--- a/银行流水分享_V1.7.pptx
+++ b/银行流水分享_V1.7.pptx
@@ -6904,6 +6904,51 @@
                     <a:bodyPr/>
                     <a:lstStyle/>
                     <a:p>
+                      <a:r>
+                        <a:t>BILL PAY Fair Go Finance A1002345</a:t>
+                      </a:r>
+                    </a:p>
+                  </a:txBody>
+                  <a:tcPr marL="27432" marR="27432" marT="9144" marB="9144">
+                    <a:lnL>
+                      <a:noFill/>
+                    </a:lnL>
+                    <a:lnR>
+                      <a:noFill/>
+                    </a:lnR>
+                    <a:lnT w="19050" cap="flat" cmpd="sng" algn="ctr">
+                      <a:solidFill>
+                        <a:srgbClr val="0A0A0A"/>
+                      </a:solidFill>
+                      <a:prstDash val="solid"/>
+                      <a:round/>
+                      <a:headEnd type="none" w="med" len="med"/>
+                      <a:tailEnd type="none" w="med" len="med"/>
+                    </a:lnT>
+                    <a:lnB w="9525" cap="flat" cmpd="sng" algn="ctr">
+                      <a:solidFill>
+                        <a:srgbClr val="D6D6D6"/>
+                      </a:solidFill>
+                      <a:prstDash val="solid"/>
+                      <a:round/>
+                      <a:headEnd type="none" w="med" len="med"/>
+                      <a:tailEnd type="none" w="med" len="med"/>
+                    </a:lnB>
+                    <a:noFill/>
+                  </a:tcPr>
+                </a:tc>
+                <a:extLst>
+                  <a:ext uri="{0D108BD9-81ED-4DB2-BD59-A6C34878D82A}">
+                    <a16:rowId xmlns:a16="http://schemas.microsoft.com/office/drawing/2014/main" val="10001"/>
+                  </a:ext>
+                </a:extLst>
+              </a:tr>
+              <a:tr h="170373">
+                <a:tc>
+                  <a:txBody>
+                    <a:bodyPr/>
+                    <a:lstStyle/>
+                    <a:p>
                       <a:pPr marL="0" algn="l" defTabSz="914400" rtl="0" eaLnBrk="1" latinLnBrk="0" hangingPunct="1"/>
                       <a:r>
                         <a:rPr sz="800" b="0" kern="1200" dirty="0">
@@ -6914,7 +6959,7 @@
                           <a:ea typeface="微软雅黑" panose="020B0503020204020204" pitchFamily="34" charset="-122"/>
                           <a:cs typeface="+mn-cs"/>
                         </a:rPr>
-                        <a:t>BILL PAY Fair Go Finance DT.58oa72 SACC 239</a:t>
+                        <a:t>2026/03/28</a:t>
                       </a:r>
                     </a:p>
                   </a:txBody>
@@ -6925,34 +6970,23 @@
                     <a:lnR>
                       <a:noFill/>
                     </a:lnR>
-                    <a:lnT w="19050" cap="flat" cmpd="sng" algn="ctr">
-                      <a:solidFill>
-                        <a:srgbClr val="0A0A0A"/>
+                    <a:lnT w="9525" cap="flat" cmpd="sng" algn="ctr">
+                      <a:solidFill>
+                        <a:srgbClr val="D6D6D6"/>
                       </a:solidFill>
                       <a:prstDash val="solid"/>
                       <a:round/>
                       <a:headEnd type="none" w="med" len="med"/>
                       <a:tailEnd type="none" w="med" len="med"/>
                     </a:lnT>
-                    <a:lnB w="9525" cap="flat" cmpd="sng" algn="ctr">
-                      <a:solidFill>
-                        <a:srgbClr val="D6D6D6"/>
-                      </a:solidFill>
-                      <a:prstDash val="solid"/>
-                      <a:round/>
-                      <a:headEnd type="none" w="med" len="med"/>
-                      <a:tailEnd type="none" w="med" len="med"/>
+                    <a:lnB w="9525">
+                      <a:solidFill>
+                        <a:srgbClr val="D6D6D6"/>
+                      </a:solidFill>
                     </a:lnB>
                     <a:noFill/>
                   </a:tcPr>
                 </a:tc>
-                <a:extLst>
-                  <a:ext uri="{0D108BD9-81ED-4DB2-BD59-A6C34878D82A}">
-                    <a16:rowId xmlns:a16="http://schemas.microsoft.com/office/drawing/2014/main" val="10001"/>
-                  </a:ext>
-                </a:extLst>
-              </a:tr>
-              <a:tr h="170373">
                 <a:tc>
                   <a:txBody>
                     <a:bodyPr/>
@@ -6968,7 +7002,7 @@
                           <a:ea typeface="微软雅黑" panose="020B0503020204020204" pitchFamily="34" charset="-122"/>
                           <a:cs typeface="+mn-cs"/>
                         </a:rPr>
-                        <a:t>2026/03/28</a:t>
+                        <a:t>A$12.40</a:t>
                       </a:r>
                     </a:p>
                   </a:txBody>
@@ -7011,7 +7045,95 @@
                           <a:ea typeface="微软雅黑" panose="020B0503020204020204" pitchFamily="34" charset="-122"/>
                           <a:cs typeface="+mn-cs"/>
                         </a:rPr>
-                        <a:t>A$12.40</a:t>
+                        <a:t>Debit</a:t>
+                      </a:r>
+                    </a:p>
+                  </a:txBody>
+                  <a:tcPr marL="27432" marR="27432" marT="9144" marB="9144">
+                    <a:lnL>
+                      <a:noFill/>
+                    </a:lnL>
+                    <a:lnR>
+                      <a:noFill/>
+                    </a:lnR>
+                    <a:lnT w="9525" cap="flat" cmpd="sng" algn="ctr">
+                      <a:solidFill>
+                        <a:srgbClr val="D6D6D6"/>
+                      </a:solidFill>
+                      <a:prstDash val="solid"/>
+                      <a:round/>
+                      <a:headEnd type="none" w="med" len="med"/>
+                      <a:tailEnd type="none" w="med" len="med"/>
+                    </a:lnT>
+                    <a:lnB w="9525">
+                      <a:solidFill>
+                        <a:srgbClr val="D6D6D6"/>
+                      </a:solidFill>
+                    </a:lnB>
+                    <a:noFill/>
+                  </a:tcPr>
+                </a:tc>
+                <a:tc>
+                  <a:txBody>
+                    <a:bodyPr/>
+                    <a:lstStyle/>
+                    <a:p>
+                      <a:r>
+                        <a:t>EFTPOS MCDONALDS BRISBANE QLD</a:t>
+                      </a:r>
+                    </a:p>
+                  </a:txBody>
+                  <a:tcPr marL="27432" marR="27432" marT="9144" marB="9144">
+                    <a:lnL>
+                      <a:noFill/>
+                    </a:lnL>
+                    <a:lnR>
+                      <a:noFill/>
+                    </a:lnR>
+                    <a:lnT w="9525" cap="flat" cmpd="sng" algn="ctr">
+                      <a:solidFill>
+                        <a:srgbClr val="D6D6D6"/>
+                      </a:solidFill>
+                      <a:prstDash val="solid"/>
+                      <a:round/>
+                      <a:headEnd type="none" w="med" len="med"/>
+                      <a:tailEnd type="none" w="med" len="med"/>
+                    </a:lnT>
+                    <a:lnB w="9525" cap="flat" cmpd="sng" algn="ctr">
+                      <a:solidFill>
+                        <a:srgbClr val="D6D6D6"/>
+                      </a:solidFill>
+                      <a:prstDash val="solid"/>
+                      <a:round/>
+                      <a:headEnd type="none" w="med" len="med"/>
+                      <a:tailEnd type="none" w="med" len="med"/>
+                    </a:lnB>
+                    <a:noFill/>
+                  </a:tcPr>
+                </a:tc>
+                <a:extLst>
+                  <a:ext uri="{0D108BD9-81ED-4DB2-BD59-A6C34878D82A}">
+                    <a16:rowId xmlns:a16="http://schemas.microsoft.com/office/drawing/2014/main" val="10002"/>
+                  </a:ext>
+                </a:extLst>
+              </a:tr>
+              <a:tr h="170373">
+                <a:tc>
+                  <a:txBody>
+                    <a:bodyPr/>
+                    <a:lstStyle/>
+                    <a:p>
+                      <a:pPr marL="0" algn="l" defTabSz="914400" rtl="0" eaLnBrk="1" latinLnBrk="0" hangingPunct="1"/>
+                      <a:r>
+                        <a:rPr sz="800" b="0" kern="1200">
+                          <a:solidFill>
+                            <a:srgbClr val="0A0A0A"/>
+                          </a:solidFill>
+                          <a:latin typeface="微软雅黑" panose="020B0503020204020204" pitchFamily="34" charset="-122"/>
+                          <a:ea typeface="微软雅黑" panose="020B0503020204020204" pitchFamily="34" charset="-122"/>
+                          <a:cs typeface="+mn-cs"/>
+                        </a:rPr>
+                        <a:t>2026/04/02</a:t>
                       </a:r>
                     </a:p>
                   </a:txBody>
@@ -7054,7 +7176,7 @@
                           <a:ea typeface="微软雅黑" panose="020B0503020204020204" pitchFamily="34" charset="-122"/>
                           <a:cs typeface="+mn-cs"/>
                         </a:rPr>
-                        <a:t>Debit</a:t>
+                        <a:t>A$35.90</a:t>
                       </a:r>
                     </a:p>
                   </a:txBody>
@@ -7097,7 +7219,7 @@
                           <a:ea typeface="微软雅黑" panose="020B0503020204020204" pitchFamily="34" charset="-122"/>
                           <a:cs typeface="+mn-cs"/>
                         </a:rPr>
-                        <a:t>MCDONALDS BRISBANE</a:t>
+                        <a:t>Debit</a:t>
                       </a:r>
                     </a:p>
                   </a:txBody>
@@ -7117,6 +7239,40 @@
                       <a:headEnd type="none" w="med" len="med"/>
                       <a:tailEnd type="none" w="med" len="med"/>
                     </a:lnT>
+                    <a:lnB w="9525">
+                      <a:solidFill>
+                        <a:srgbClr val="D6D6D6"/>
+                      </a:solidFill>
+                    </a:lnB>
+                    <a:noFill/>
+                  </a:tcPr>
+                </a:tc>
+                <a:tc>
+                  <a:txBody>
+                    <a:bodyPr/>
+                    <a:lstStyle/>
+                    <a:p>
+                      <a:r>
+                        <a:t>CHEMIST WAREHOUSE 123 BRISBANE QLD</a:t>
+                      </a:r>
+                    </a:p>
+                  </a:txBody>
+                  <a:tcPr marL="27432" marR="27432" marT="9144" marB="9144">
+                    <a:lnL>
+                      <a:noFill/>
+                    </a:lnL>
+                    <a:lnR>
+                      <a:noFill/>
+                    </a:lnR>
+                    <a:lnT w="9525" cap="flat" cmpd="sng" algn="ctr">
+                      <a:solidFill>
+                        <a:srgbClr val="D6D6D6"/>
+                      </a:solidFill>
+                      <a:prstDash val="solid"/>
+                      <a:round/>
+                      <a:headEnd type="none" w="med" len="med"/>
+                      <a:tailEnd type="none" w="med" len="med"/>
+                    </a:lnT>
                     <a:lnB w="9525" cap="flat" cmpd="sng" algn="ctr">
                       <a:solidFill>
                         <a:srgbClr val="D6D6D6"/>
@@ -7131,7 +7287,7 @@
                 </a:tc>
                 <a:extLst>
                   <a:ext uri="{0D108BD9-81ED-4DB2-BD59-A6C34878D82A}">
-                    <a16:rowId xmlns:a16="http://schemas.microsoft.com/office/drawing/2014/main" val="10002"/>
+                    <a16:rowId xmlns:a16="http://schemas.microsoft.com/office/drawing/2014/main" val="10003"/>
                   </a:ext>
                 </a:extLst>
               </a:tr>
@@ -7151,7 +7307,7 @@
                           <a:ea typeface="微软雅黑" panose="020B0503020204020204" pitchFamily="34" charset="-122"/>
                           <a:cs typeface="+mn-cs"/>
                         </a:rPr>
-                        <a:t>2026/04/02</a:t>
+                        <a:t>2026/04/08</a:t>
                       </a:r>
                     </a:p>
                   </a:txBody>
@@ -7194,7 +7350,7 @@
                           <a:ea typeface="微软雅黑" panose="020B0503020204020204" pitchFamily="34" charset="-122"/>
                           <a:cs typeface="+mn-cs"/>
                         </a:rPr>
-                        <a:t>A$35.90</a:t>
+                        <a:t>A$8.99</a:t>
                       </a:r>
                     </a:p>
                   </a:txBody>
@@ -7222,103 +7378,6 @@
                     <a:noFill/>
                   </a:tcPr>
                 </a:tc>
-                <a:tc>
-                  <a:txBody>
-                    <a:bodyPr/>
-                    <a:lstStyle/>
-                    <a:p>
-                      <a:pPr marL="0" algn="l" defTabSz="914400" rtl="0" eaLnBrk="1" latinLnBrk="0" hangingPunct="1"/>
-                      <a:r>
-                        <a:rPr sz="800" b="0" kern="1200" dirty="0">
-                          <a:solidFill>
-                            <a:srgbClr val="0A0A0A"/>
-                          </a:solidFill>
-                          <a:latin typeface="微软雅黑" panose="020B0503020204020204" pitchFamily="34" charset="-122"/>
-                          <a:ea typeface="微软雅黑" panose="020B0503020204020204" pitchFamily="34" charset="-122"/>
-                          <a:cs typeface="+mn-cs"/>
-                        </a:rPr>
-                        <a:t>Debit</a:t>
-                      </a:r>
-                    </a:p>
-                  </a:txBody>
-                  <a:tcPr marL="27432" marR="27432" marT="9144" marB="9144">
-                    <a:lnL>
-                      <a:noFill/>
-                    </a:lnL>
-                    <a:lnR>
-                      <a:noFill/>
-                    </a:lnR>
-                    <a:lnT w="9525" cap="flat" cmpd="sng" algn="ctr">
-                      <a:solidFill>
-                        <a:srgbClr val="D6D6D6"/>
-                      </a:solidFill>
-                      <a:prstDash val="solid"/>
-                      <a:round/>
-                      <a:headEnd type="none" w="med" len="med"/>
-                      <a:tailEnd type="none" w="med" len="med"/>
-                    </a:lnT>
-                    <a:lnB w="9525">
-                      <a:solidFill>
-                        <a:srgbClr val="D6D6D6"/>
-                      </a:solidFill>
-                    </a:lnB>
-                    <a:noFill/>
-                  </a:tcPr>
-                </a:tc>
-                <a:tc>
-                  <a:txBody>
-                    <a:bodyPr/>
-                    <a:lstStyle/>
-                    <a:p>
-                      <a:pPr marL="0" algn="l" defTabSz="914400" rtl="0" eaLnBrk="1" latinLnBrk="0" hangingPunct="1"/>
-                      <a:r>
-                        <a:rPr sz="800" b="0" kern="1200" dirty="0">
-                          <a:solidFill>
-                            <a:srgbClr val="0A0A0A"/>
-                          </a:solidFill>
-                          <a:latin typeface="微软雅黑" panose="020B0503020204020204" pitchFamily="34" charset="-122"/>
-                          <a:ea typeface="微软雅黑" panose="020B0503020204020204" pitchFamily="34" charset="-122"/>
-                          <a:cs typeface="+mn-cs"/>
-                        </a:rPr>
-                        <a:t>CHEMIST WAREHOUSE 123</a:t>
-                      </a:r>
-                    </a:p>
-                  </a:txBody>
-                  <a:tcPr marL="27432" marR="27432" marT="9144" marB="9144">
-                    <a:lnL>
-                      <a:noFill/>
-                    </a:lnL>
-                    <a:lnR>
-                      <a:noFill/>
-                    </a:lnR>
-                    <a:lnT w="9525" cap="flat" cmpd="sng" algn="ctr">
-                      <a:solidFill>
-                        <a:srgbClr val="D6D6D6"/>
-                      </a:solidFill>
-                      <a:prstDash val="solid"/>
-                      <a:round/>
-                      <a:headEnd type="none" w="med" len="med"/>
-                      <a:tailEnd type="none" w="med" len="med"/>
-                    </a:lnT>
-                    <a:lnB w="9525" cap="flat" cmpd="sng" algn="ctr">
-                      <a:solidFill>
-                        <a:srgbClr val="D6D6D6"/>
-                      </a:solidFill>
-                      <a:prstDash val="solid"/>
-                      <a:round/>
-                      <a:headEnd type="none" w="med" len="med"/>
-                      <a:tailEnd type="none" w="med" len="med"/>
-                    </a:lnB>
-                    <a:noFill/>
-                  </a:tcPr>
-                </a:tc>
-                <a:extLst>
-                  <a:ext uri="{0D108BD9-81ED-4DB2-BD59-A6C34878D82A}">
-                    <a16:rowId xmlns:a16="http://schemas.microsoft.com/office/drawing/2014/main" val="10003"/>
-                  </a:ext>
-                </a:extLst>
-              </a:tr>
-              <a:tr h="170373">
                 <a:tc>
                   <a:txBody>
                     <a:bodyPr/>
@@ -7334,7 +7393,7 @@
                           <a:ea typeface="微软雅黑" panose="020B0503020204020204" pitchFamily="34" charset="-122"/>
                           <a:cs typeface="+mn-cs"/>
                         </a:rPr>
-                        <a:t>2026/04/08</a:t>
+                        <a:t>Debit</a:t>
                       </a:r>
                     </a:p>
                   </a:txBody>
@@ -7367,17 +7426,8 @@
                     <a:bodyPr/>
                     <a:lstStyle/>
                     <a:p>
-                      <a:pPr marL="0" algn="l" defTabSz="914400" rtl="0" eaLnBrk="1" latinLnBrk="0" hangingPunct="1"/>
-                      <a:r>
-                        <a:rPr sz="800" b="0" kern="1200" dirty="0">
-                          <a:solidFill>
-                            <a:srgbClr val="0A0A0A"/>
-                          </a:solidFill>
-                          <a:latin typeface="微软雅黑" panose="020B0503020204020204" pitchFamily="34" charset="-122"/>
-                          <a:ea typeface="微软雅黑" panose="020B0503020204020204" pitchFamily="34" charset="-122"/>
-                          <a:cs typeface="+mn-cs"/>
-                        </a:rPr>
-                        <a:t>A$8.99</a:t>
+                      <a:r>
+                        <a:t>AMZNPRIMEAU*</a:t>
                       </a:r>
                     </a:p>
                   </a:txBody>
@@ -7397,14 +7447,25 @@
                       <a:headEnd type="none" w="med" len="med"/>
                       <a:tailEnd type="none" w="med" len="med"/>
                     </a:lnT>
-                    <a:lnB w="9525">
-                      <a:solidFill>
-                        <a:srgbClr val="D6D6D6"/>
-                      </a:solidFill>
+                    <a:lnB w="9525" cap="flat" cmpd="sng" algn="ctr">
+                      <a:solidFill>
+                        <a:srgbClr val="D6D6D6"/>
+                      </a:solidFill>
+                      <a:prstDash val="solid"/>
+                      <a:round/>
+                      <a:headEnd type="none" w="med" len="med"/>
+                      <a:tailEnd type="none" w="med" len="med"/>
                     </a:lnB>
                     <a:noFill/>
                   </a:tcPr>
                 </a:tc>
+                <a:extLst>
+                  <a:ext uri="{0D108BD9-81ED-4DB2-BD59-A6C34878D82A}">
+                    <a16:rowId xmlns:a16="http://schemas.microsoft.com/office/drawing/2014/main" val="10004"/>
+                  </a:ext>
+                </a:extLst>
+              </a:tr>
+              <a:tr h="170373">
                 <a:tc>
                   <a:txBody>
                     <a:bodyPr/>
@@ -7420,7 +7481,7 @@
                           <a:ea typeface="微软雅黑" panose="020B0503020204020204" pitchFamily="34" charset="-122"/>
                           <a:cs typeface="+mn-cs"/>
                         </a:rPr>
-                        <a:t>Debit</a:t>
+                        <a:t>2026/04/10</a:t>
                       </a:r>
                     </a:p>
                   </a:txBody>
@@ -7448,60 +7509,6 @@
                     <a:noFill/>
                   </a:tcPr>
                 </a:tc>
-                <a:tc>
-                  <a:txBody>
-                    <a:bodyPr/>
-                    <a:lstStyle/>
-                    <a:p>
-                      <a:pPr marL="0" algn="l" defTabSz="914400" rtl="0" eaLnBrk="1" latinLnBrk="0" hangingPunct="1"/>
-                      <a:r>
-                        <a:rPr sz="800" b="0" kern="1200" dirty="0">
-                          <a:solidFill>
-                            <a:srgbClr val="0A0A0A"/>
-                          </a:solidFill>
-                          <a:latin typeface="微软雅黑" panose="020B0503020204020204" pitchFamily="34" charset="-122"/>
-                          <a:ea typeface="微软雅黑" panose="020B0503020204020204" pitchFamily="34" charset="-122"/>
-                          <a:cs typeface="+mn-cs"/>
-                        </a:rPr>
-                        <a:t>AMZNPRIMEA*</a:t>
-                      </a:r>
-                    </a:p>
-                  </a:txBody>
-                  <a:tcPr marL="27432" marR="27432" marT="9144" marB="9144">
-                    <a:lnL>
-                      <a:noFill/>
-                    </a:lnL>
-                    <a:lnR>
-                      <a:noFill/>
-                    </a:lnR>
-                    <a:lnT w="9525" cap="flat" cmpd="sng" algn="ctr">
-                      <a:solidFill>
-                        <a:srgbClr val="D6D6D6"/>
-                      </a:solidFill>
-                      <a:prstDash val="solid"/>
-                      <a:round/>
-                      <a:headEnd type="none" w="med" len="med"/>
-                      <a:tailEnd type="none" w="med" len="med"/>
-                    </a:lnT>
-                    <a:lnB w="9525" cap="flat" cmpd="sng" algn="ctr">
-                      <a:solidFill>
-                        <a:srgbClr val="D6D6D6"/>
-                      </a:solidFill>
-                      <a:prstDash val="solid"/>
-                      <a:round/>
-                      <a:headEnd type="none" w="med" len="med"/>
-                      <a:tailEnd type="none" w="med" len="med"/>
-                    </a:lnB>
-                    <a:noFill/>
-                  </a:tcPr>
-                </a:tc>
-                <a:extLst>
-                  <a:ext uri="{0D108BD9-81ED-4DB2-BD59-A6C34878D82A}">
-                    <a16:rowId xmlns:a16="http://schemas.microsoft.com/office/drawing/2014/main" val="10004"/>
-                  </a:ext>
-                </a:extLst>
-              </a:tr>
-              <a:tr h="170373">
                 <a:tc>
                   <a:txBody>
                     <a:bodyPr/>
@@ -7517,7 +7524,7 @@
                           <a:ea typeface="微软雅黑" panose="020B0503020204020204" pitchFamily="34" charset="-122"/>
                           <a:cs typeface="+mn-cs"/>
                         </a:rPr>
-                        <a:t>2026/04/10</a:t>
+                        <a:t>A$3,420.50</a:t>
                       </a:r>
                     </a:p>
                   </a:txBody>
@@ -7560,7 +7567,7 @@
                           <a:ea typeface="微软雅黑" panose="020B0503020204020204" pitchFamily="34" charset="-122"/>
                           <a:cs typeface="+mn-cs"/>
                         </a:rPr>
-                        <a:t>A$3,420.50</a:t>
+                        <a:t>Credit</a:t>
                       </a:r>
                     </a:p>
                   </a:txBody>
@@ -7593,60 +7600,8 @@
                     <a:bodyPr/>
                     <a:lstStyle/>
                     <a:p>
-                      <a:pPr marL="0" algn="l" defTabSz="914400" rtl="0" eaLnBrk="1" latinLnBrk="0" hangingPunct="1"/>
-                      <a:r>
-                        <a:rPr sz="800" b="0" kern="1200">
-                          <a:solidFill>
-                            <a:srgbClr val="0A0A0A"/>
-                          </a:solidFill>
-                          <a:latin typeface="微软雅黑" panose="020B0503020204020204" pitchFamily="34" charset="-122"/>
-                          <a:ea typeface="微软雅黑" panose="020B0503020204020204" pitchFamily="34" charset="-122"/>
-                          <a:cs typeface="+mn-cs"/>
-                        </a:rPr>
-                        <a:t>Credit</a:t>
-                      </a:r>
-                    </a:p>
-                  </a:txBody>
-                  <a:tcPr marL="27432" marR="27432" marT="9144" marB="9144">
-                    <a:lnL>
-                      <a:noFill/>
-                    </a:lnL>
-                    <a:lnR>
-                      <a:noFill/>
-                    </a:lnR>
-                    <a:lnT w="9525" cap="flat" cmpd="sng" algn="ctr">
-                      <a:solidFill>
-                        <a:srgbClr val="D6D6D6"/>
-                      </a:solidFill>
-                      <a:prstDash val="solid"/>
-                      <a:round/>
-                      <a:headEnd type="none" w="med" len="med"/>
-                      <a:tailEnd type="none" w="med" len="med"/>
-                    </a:lnT>
-                    <a:lnB w="9525">
-                      <a:solidFill>
-                        <a:srgbClr val="D6D6D6"/>
-                      </a:solidFill>
-                    </a:lnB>
-                    <a:noFill/>
-                  </a:tcPr>
-                </a:tc>
-                <a:tc>
-                  <a:txBody>
-                    <a:bodyPr/>
-                    <a:lstStyle/>
-                    <a:p>
-                      <a:pPr marL="0" algn="l" defTabSz="914400" rtl="0" eaLnBrk="1" latinLnBrk="0" hangingPunct="1"/>
-                      <a:r>
-                        <a:rPr sz="800" b="0" kern="1200" dirty="0">
-                          <a:solidFill>
-                            <a:srgbClr val="0A0A0A"/>
-                          </a:solidFill>
-                          <a:latin typeface="微软雅黑" panose="020B0503020204020204" pitchFamily="34" charset="-122"/>
-                          <a:ea typeface="微软雅黑" panose="020B0503020204020204" pitchFamily="34" charset="-122"/>
-                          <a:cs typeface="+mn-cs"/>
-                        </a:rPr>
-                        <a:t>PAYROLL ACME PTY LTD</a:t>
+                      <a:r>
+                        <a:t>PAYROLL DEPOSIT ACME PTY LTD</a:t>
                       </a:r>
                     </a:p>
                   </a:txBody>
@@ -7713,63 +7668,56 @@
             <a:tbl>
               <a:tblPr/>
               <a:tblGrid>
-                <a:gridCol w="767081">
+                <a:gridCol w="768096">
                   <a:extLst>
                     <a:ext uri="{9D8B030D-6E8A-4147-A177-3AD203B41FA5}">
                       <a16:colId xmlns:a16="http://schemas.microsoft.com/office/drawing/2014/main" val="20000"/>
                     </a:ext>
                   </a:extLst>
                 </a:gridCol>
-                <a:gridCol w="2346960">
+                <a:gridCol w="914400">
                   <a:extLst>
                     <a:ext uri="{9D8B030D-6E8A-4147-A177-3AD203B41FA5}">
                       <a16:colId xmlns:a16="http://schemas.microsoft.com/office/drawing/2014/main" val="20001"/>
                     </a:ext>
                   </a:extLst>
                 </a:gridCol>
-                <a:gridCol w="1229360">
+                <a:gridCol w="2761488">
                   <a:extLst>
                     <a:ext uri="{9D8B030D-6E8A-4147-A177-3AD203B41FA5}">
                       <a16:colId xmlns:a16="http://schemas.microsoft.com/office/drawing/2014/main" val="20002"/>
                     </a:ext>
                   </a:extLst>
                 </a:gridCol>
-                <a:gridCol w="889000">
+                <a:gridCol w="1225296">
                   <a:extLst>
                     <a:ext uri="{9D8B030D-6E8A-4147-A177-3AD203B41FA5}">
                       <a16:colId xmlns:a16="http://schemas.microsoft.com/office/drawing/2014/main" val="4140160165"/>
                     </a:ext>
                   </a:extLst>
                 </a:gridCol>
-                <a:gridCol w="651418">
-                  <a:extLst>
-                    <a:ext uri="{9D8B030D-6E8A-4147-A177-3AD203B41FA5}">
-                      <a16:colId xmlns:a16="http://schemas.microsoft.com/office/drawing/2014/main" val="2534051383"/>
-                    </a:ext>
-                  </a:extLst>
-                </a:gridCol>
-                <a:gridCol w="1012354">
+                <a:gridCol w="886968">
                   <a:extLst>
                     <a:ext uri="{9D8B030D-6E8A-4147-A177-3AD203B41FA5}">
                       <a16:colId xmlns:a16="http://schemas.microsoft.com/office/drawing/2014/main" val="1228048883"/>
                     </a:ext>
                   </a:extLst>
                 </a:gridCol>
-                <a:gridCol w="829993">
+                <a:gridCol w="1014984">
                   <a:extLst>
                     <a:ext uri="{9D8B030D-6E8A-4147-A177-3AD203B41FA5}">
                       <a16:colId xmlns:a16="http://schemas.microsoft.com/office/drawing/2014/main" val="2445864241"/>
                     </a:ext>
                   </a:extLst>
                 </a:gridCol>
-                <a:gridCol w="913151">
+                <a:gridCol w="832104">
                   <a:extLst>
                     <a:ext uri="{9D8B030D-6E8A-4147-A177-3AD203B41FA5}">
                       <a16:colId xmlns:a16="http://schemas.microsoft.com/office/drawing/2014/main" val="516131836"/>
                     </a:ext>
                   </a:extLst>
                 </a:gridCol>
-                <a:gridCol w="2262314">
+                <a:gridCol w="2496312">
                   <a:extLst>
                     <a:ext uri="{9D8B030D-6E8A-4147-A177-3AD203B41FA5}">
                       <a16:colId xmlns:a16="http://schemas.microsoft.com/office/drawing/2014/main" val="994888910"/>
@@ -7778,6 +7726,11 @@
                 </a:gridCol>
               </a:tblGrid>
               <a:tr h="170373">
+                <a:extLst>
+                  <a:ext uri="{0D108BD9-81ED-4DB2-BD59-A6C34878D82A}">
+                    <a16:rowId xmlns:a16="http://schemas.microsoft.com/office/drawing/2014/main" val="10000"/>
+                  </a:ext>
+                </a:extLst>
                 <a:tc>
                   <a:txBody>
                     <a:bodyPr/>
@@ -7796,7 +7749,7 @@
                       </a:r>
                     </a:p>
                   </a:txBody>
-                  <a:tcPr marL="27432" marR="27432" marT="9144" marB="9144">
+                  <a:tcPr marL="27432" marR="27432" marT="9144" marB="9144" w="768096">
                     <a:lnL>
                       <a:noFill/>
                     </a:lnL>
@@ -7828,7 +7781,7 @@
                           <a:latin typeface="微软雅黑"/>
                           <a:ea typeface="微软雅黑"/>
                         </a:rPr>
-                        <a:t>交易描述</a:t>
+                        <a:t>交易金额</a:t>
                       </a:r>
                       <a:endParaRPr sz="800" b="1" dirty="0">
                         <a:solidFill>
@@ -7839,7 +7792,7 @@
                       </a:endParaRPr>
                     </a:p>
                   </a:txBody>
-                  <a:tcPr marL="27432" marR="27432" marT="9144" marB="9144">
+                  <a:tcPr marL="27432" marR="27432" marT="9144" marB="9144" w="914400">
                     <a:lnL>
                       <a:noFill/>
                     </a:lnL>
@@ -7849,10 +7802,14 @@
                     <a:lnT>
                       <a:noFill/>
                     </a:lnT>
-                    <a:lnB w="19050">
+                    <a:lnB w="19050" cap="flat" cmpd="sng" algn="ctr">
                       <a:solidFill>
                         <a:srgbClr val="0A0A0A"/>
                       </a:solidFill>
+                      <a:prstDash val="solid"/>
+                      <a:round/>
+                      <a:headEnd type="none" w="med" len="med"/>
+                      <a:tailEnd type="none" w="med" len="med"/>
                     </a:lnB>
                     <a:noFill/>
                   </a:tcPr>
@@ -7871,7 +7828,7 @@
                           <a:latin typeface="微软雅黑"/>
                           <a:ea typeface="微软雅黑"/>
                         </a:rPr>
-                        <a:t>标准交易对手</a:t>
+                        <a:t>交易描述</a:t>
                       </a:r>
                       <a:endParaRPr sz="800" b="1" dirty="0">
                         <a:solidFill>
@@ -7882,7 +7839,7 @@
                       </a:endParaRPr>
                     </a:p>
                   </a:txBody>
-                  <a:tcPr marL="27432" marR="27432" marT="9144" marB="9144">
+                  <a:tcPr marL="27432" marR="27432" marT="9144" marB="9144" w="2761488">
                     <a:lnL>
                       <a:noFill/>
                     </a:lnL>
@@ -7914,7 +7871,7 @@
                           <a:latin typeface="微软雅黑"/>
                           <a:ea typeface="微软雅黑"/>
                         </a:rPr>
-                        <a:t>主体类型</a:t>
+                        <a:t>标准交易对手</a:t>
                       </a:r>
                       <a:endParaRPr sz="800" b="1" dirty="0">
                         <a:solidFill>
@@ -7925,7 +7882,7 @@
                       </a:endParaRPr>
                     </a:p>
                   </a:txBody>
-                  <a:tcPr marL="27432" marR="27432" marT="9144" marB="9144">
+                  <a:tcPr marL="27432" marR="27432" marT="9144" marB="9144" w="1225296">
                     <a:lnL>
                       <a:noFill/>
                     </a:lnL>
@@ -7935,94 +7892,10 @@
                     <a:lnT>
                       <a:noFill/>
                     </a:lnT>
-                    <a:lnB w="19050" cap="flat" cmpd="sng" algn="ctr">
+                    <a:lnB w="19050">
                       <a:solidFill>
                         <a:srgbClr val="0A0A0A"/>
                       </a:solidFill>
-                      <a:prstDash val="solid"/>
-                      <a:round/>
-                      <a:headEnd type="none" w="med" len="med"/>
-                      <a:tailEnd type="none" w="med" len="med"/>
-                    </a:lnB>
-                    <a:noFill/>
-                  </a:tcPr>
-                </a:tc>
-                <a:tc>
-                  <a:txBody>
-                    <a:bodyPr/>
-                    <a:lstStyle/>
-                    <a:p>
-                      <a:pPr algn="l"/>
-                      <a:r>
-                        <a:rPr sz="800" b="1">
-                          <a:solidFill>
-                            <a:srgbClr val="0A0A0A"/>
-                          </a:solidFill>
-                          <a:latin typeface="微软雅黑"/>
-                          <a:ea typeface="微软雅黑"/>
-                        </a:rPr>
-                        <a:t>一级分类</a:t>
-                      </a:r>
-                    </a:p>
-                  </a:txBody>
-                  <a:tcPr marL="27432" marR="27432" marT="9144" marB="9144">
-                    <a:lnL>
-                      <a:noFill/>
-                    </a:lnL>
-                    <a:lnR>
-                      <a:noFill/>
-                    </a:lnR>
-                    <a:lnT>
-                      <a:noFill/>
-                    </a:lnT>
-                    <a:lnB w="19050" cap="flat" cmpd="sng" algn="ctr">
-                      <a:solidFill>
-                        <a:srgbClr val="0A0A0A"/>
-                      </a:solidFill>
-                      <a:prstDash val="solid"/>
-                      <a:round/>
-                      <a:headEnd type="none" w="med" len="med"/>
-                      <a:tailEnd type="none" w="med" len="med"/>
-                    </a:lnB>
-                    <a:noFill/>
-                  </a:tcPr>
-                </a:tc>
-                <a:tc>
-                  <a:txBody>
-                    <a:bodyPr/>
-                    <a:lstStyle/>
-                    <a:p>
-                      <a:pPr algn="l"/>
-                      <a:r>
-                        <a:rPr sz="800" b="1">
-                          <a:solidFill>
-                            <a:srgbClr val="0A0A0A"/>
-                          </a:solidFill>
-                          <a:latin typeface="微软雅黑"/>
-                          <a:ea typeface="微软雅黑"/>
-                        </a:rPr>
-                        <a:t>二级分类</a:t>
-                      </a:r>
-                    </a:p>
-                  </a:txBody>
-                  <a:tcPr marL="27432" marR="27432" marT="9144" marB="9144">
-                    <a:lnL>
-                      <a:noFill/>
-                    </a:lnL>
-                    <a:lnR>
-                      <a:noFill/>
-                    </a:lnR>
-                    <a:lnT>
-                      <a:noFill/>
-                    </a:lnT>
-                    <a:lnB w="19050" cap="flat" cmpd="sng" algn="ctr">
-                      <a:solidFill>
-                        <a:srgbClr val="0A0A0A"/>
-                      </a:solidFill>
-                      <a:prstDash val="solid"/>
-                      <a:round/>
-                      <a:headEnd type="none" w="med" len="med"/>
-                      <a:tailEnd type="none" w="med" len="med"/>
                     </a:lnB>
                     <a:noFill/>
                   </a:tcPr>
@@ -8041,7 +7914,7 @@
                           <a:latin typeface="微软雅黑"/>
                           <a:ea typeface="微软雅黑"/>
                         </a:rPr>
-                        <a:t>交易性质</a:t>
+                        <a:t>主体类型</a:t>
                       </a:r>
                       <a:endParaRPr sz="800" b="1" dirty="0">
                         <a:solidFill>
@@ -8052,7 +7925,39 @@
                       </a:endParaRPr>
                     </a:p>
                   </a:txBody>
-                  <a:tcPr marL="27432" marR="27432" marT="9144" marB="9144">
+                  <a:tcPr marL="27432" marR="27432" marT="9144" marB="9144" w="886968">
+                    <a:lnL>
+                      <a:noFill/>
+                    </a:lnL>
+                    <a:lnR>
+                      <a:noFill/>
+                    </a:lnR>
+                    <a:lnT>
+                      <a:noFill/>
+                    </a:lnT>
+                    <a:lnB w="19050" cap="flat" cmpd="sng" algn="ctr">
+                      <a:solidFill>
+                        <a:srgbClr val="0A0A0A"/>
+                      </a:solidFill>
+                      <a:prstDash val="solid"/>
+                      <a:round/>
+                      <a:headEnd type="none" w="med" len="med"/>
+                      <a:tailEnd type="none" w="med" len="med"/>
+                    </a:lnB>
+                    <a:noFill/>
+                  </a:tcPr>
+                </a:tc>
+                <a:tc>
+                  <a:txBody>
+                    <a:bodyPr/>
+                    <a:lstStyle/>
+                    <a:p>
+                      <a:r>
+                        <a:t>分类</a:t>
+                      </a:r>
+                    </a:p>
+                  </a:txBody>
+                  <a:tcPr marL="27432" marR="27432" marT="9144" marB="9144" w="1014984">
                     <a:lnL>
                       <a:noFill/>
                     </a:lnL>
@@ -8088,7 +7993,7 @@
                           <a:latin typeface="微软雅黑"/>
                           <a:ea typeface="微软雅黑"/>
                         </a:rPr>
-                        <a:t>交易金额</a:t>
+                        <a:t>交易性质</a:t>
                       </a:r>
                       <a:endParaRPr sz="800" b="1" dirty="0">
                         <a:solidFill>
@@ -8099,7 +8004,7 @@
                       </a:endParaRPr>
                     </a:p>
                   </a:txBody>
-                  <a:tcPr marL="27432" marR="27432" marT="9144" marB="9144">
+                  <a:tcPr marL="27432" marR="27432" marT="9144" marB="9144" w="832104">
                     <a:lnL>
                       <a:noFill/>
                     </a:lnL>
@@ -8139,7 +8044,7 @@
                       </a:r>
                     </a:p>
                   </a:txBody>
-                  <a:tcPr marL="27432" marR="27432" marT="9144" marB="9144">
+                  <a:tcPr marL="27432" marR="27432" marT="9144" marB="9144" w="2496312">
                     <a:lnL>
                       <a:noFill/>
                     </a:lnL>
@@ -8161,13 +8066,13 @@
                     <a:noFill/>
                   </a:tcPr>
                 </a:tc>
+              </a:tr>
+              <a:tr h="170373">
                 <a:extLst>
                   <a:ext uri="{0D108BD9-81ED-4DB2-BD59-A6C34878D82A}">
-                    <a16:rowId xmlns:a16="http://schemas.microsoft.com/office/drawing/2014/main" val="10000"/>
+                    <a16:rowId xmlns:a16="http://schemas.microsoft.com/office/drawing/2014/main" val="10001"/>
                   </a:ext>
                 </a:extLst>
-              </a:tr>
-              <a:tr h="170373">
                 <a:tc>
                   <a:txBody>
                     <a:bodyPr/>
@@ -8187,50 +8092,7 @@
                       </a:r>
                     </a:p>
                   </a:txBody>
-                  <a:tcPr marL="27432" marR="27432" marT="9144" marB="9144">
-                    <a:lnL>
-                      <a:noFill/>
-                    </a:lnL>
-                    <a:lnR>
-                      <a:noFill/>
-                    </a:lnR>
-                    <a:lnT w="19050" cap="flat" cmpd="sng" algn="ctr">
-                      <a:solidFill>
-                        <a:srgbClr val="0A0A0A"/>
-                      </a:solidFill>
-                      <a:prstDash val="solid"/>
-                      <a:round/>
-                      <a:headEnd type="none" w="med" len="med"/>
-                      <a:tailEnd type="none" w="med" len="med"/>
-                    </a:lnT>
-                    <a:lnB w="9525">
-                      <a:solidFill>
-                        <a:srgbClr val="D6D6D6"/>
-                      </a:solidFill>
-                    </a:lnB>
-                    <a:noFill/>
-                  </a:tcPr>
-                </a:tc>
-                <a:tc>
-                  <a:txBody>
-                    <a:bodyPr/>
-                    <a:lstStyle/>
-                    <a:p>
-                      <a:pPr marL="0" algn="l" defTabSz="914400" rtl="0" eaLnBrk="1" latinLnBrk="0" hangingPunct="1"/>
-                      <a:r>
-                        <a:rPr sz="800" b="0" kern="1200" dirty="0">
-                          <a:solidFill>
-                            <a:srgbClr val="0A0A0A"/>
-                          </a:solidFill>
-                          <a:latin typeface="微软雅黑" panose="020B0503020204020204" pitchFamily="34" charset="-122"/>
-                          <a:ea typeface="微软雅黑" panose="020B0503020204020204" pitchFamily="34" charset="-122"/>
-                          <a:cs typeface="+mn-cs"/>
-                        </a:rPr>
-                        <a:t>BILL PAY Fair Go Finance DT.58oa72 SACC 239</a:t>
-                      </a:r>
-                    </a:p>
-                  </a:txBody>
-                  <a:tcPr marL="27432" marR="27432" marT="9144" marB="9144">
+                  <a:tcPr marL="27432" marR="27432" marT="9144" marB="9144" w="768096">
                     <a:lnL>
                       <a:noFill/>
                     </a:lnL>
@@ -8269,11 +8131,92 @@
                           <a:ea typeface="微软雅黑" panose="020B0503020204020204" pitchFamily="34" charset="-122"/>
                           <a:cs typeface="+mn-cs"/>
                         </a:rPr>
+                        <a:t>A$156</a:t>
+                      </a:r>
+                    </a:p>
+                  </a:txBody>
+                  <a:tcPr marL="27432" marR="27432" marT="9144" marB="9144" w="914400">
+                    <a:lnL>
+                      <a:noFill/>
+                    </a:lnL>
+                    <a:lnR>
+                      <a:noFill/>
+                    </a:lnR>
+                    <a:lnT w="19050" cap="flat" cmpd="sng" algn="ctr">
+                      <a:solidFill>
+                        <a:srgbClr val="0A0A0A"/>
+                      </a:solidFill>
+                      <a:prstDash val="solid"/>
+                      <a:round/>
+                      <a:headEnd type="none" w="med" len="med"/>
+                      <a:tailEnd type="none" w="med" len="med"/>
+                    </a:lnT>
+                    <a:lnB w="9525" cap="flat" cmpd="sng" algn="ctr">
+                      <a:solidFill>
+                        <a:srgbClr val="D6D6D6"/>
+                      </a:solidFill>
+                      <a:prstDash val="solid"/>
+                      <a:round/>
+                      <a:headEnd type="none" w="med" len="med"/>
+                      <a:tailEnd type="none" w="med" len="med"/>
+                    </a:lnB>
+                    <a:noFill/>
+                  </a:tcPr>
+                </a:tc>
+                <a:tc>
+                  <a:txBody>
+                    <a:bodyPr/>
+                    <a:lstStyle/>
+                    <a:p>
+                      <a:r>
+                        <a:t>BILL PAY Fair Go Finance A1002345</a:t>
+                      </a:r>
+                    </a:p>
+                  </a:txBody>
+                  <a:tcPr marL="27432" marR="27432" marT="9144" marB="9144" w="2761488">
+                    <a:lnL>
+                      <a:noFill/>
+                    </a:lnL>
+                    <a:lnR>
+                      <a:noFill/>
+                    </a:lnR>
+                    <a:lnT w="19050" cap="flat" cmpd="sng" algn="ctr">
+                      <a:solidFill>
+                        <a:srgbClr val="0A0A0A"/>
+                      </a:solidFill>
+                      <a:prstDash val="solid"/>
+                      <a:round/>
+                      <a:headEnd type="none" w="med" len="med"/>
+                      <a:tailEnd type="none" w="med" len="med"/>
+                    </a:lnT>
+                    <a:lnB w="9525">
+                      <a:solidFill>
+                        <a:srgbClr val="D6D6D6"/>
+                      </a:solidFill>
+                    </a:lnB>
+                    <a:noFill/>
+                  </a:tcPr>
+                </a:tc>
+                <a:tc>
+                  <a:txBody>
+                    <a:bodyPr/>
+                    <a:lstStyle/>
+                    <a:p>
+                      <a:pPr marL="0" algn="l" defTabSz="914400" rtl="0" eaLnBrk="1" latinLnBrk="0" hangingPunct="1"/>
+                      <a:r>
+                        <a:rPr sz="800" b="0" kern="1200">
+                          <a:solidFill>
+                            <a:srgbClr val="0A0A0A"/>
+                          </a:solidFill>
+                          <a:latin typeface="微软雅黑" panose="020B0503020204020204" pitchFamily="34" charset="-122"/>
+                          <a:ea typeface="微软雅黑" panose="020B0503020204020204" pitchFamily="34" charset="-122"/>
+                          <a:cs typeface="+mn-cs"/>
+                        </a:rPr>
                         <a:t>Fair Go Finance</a:t>
                       </a:r>
                     </a:p>
                   </a:txBody>
-                  <a:tcPr marL="27432" marR="27432" marT="9144" marB="9144">
+                  <a:tcPr marL="27432" marR="27432" marT="9144" marB="9144" w="1225296">
                     <a:lnL>
                       <a:noFill/>
                     </a:lnL>
@@ -8324,7 +8267,7 @@
                       </a:endParaRPr>
                     </a:p>
                   </a:txBody>
-                  <a:tcPr marL="27432" marR="27432" marT="9144" marB="9144">
+                  <a:tcPr marL="27432" marR="27432" marT="9144" marB="9144" w="886968">
                     <a:lnL>
                       <a:noFill/>
                     </a:lnL>
@@ -8367,58 +8310,11 @@
                           <a:ea typeface="微软雅黑" panose="020B0503020204020204" pitchFamily="34" charset="-122"/>
                           <a:cs typeface="+mn-cs"/>
                         </a:rPr>
-                        <a:t>贷款及还款</a:t>
-                      </a:r>
-                    </a:p>
-                  </a:txBody>
-                  <a:tcPr marL="27432" marR="27432" marT="9144" marB="9144">
-                    <a:lnL>
-                      <a:noFill/>
-                    </a:lnL>
-                    <a:lnR>
-                      <a:noFill/>
-                    </a:lnR>
-                    <a:lnT w="19050" cap="flat" cmpd="sng" algn="ctr">
-                      <a:solidFill>
-                        <a:srgbClr val="0A0A0A"/>
-                      </a:solidFill>
-                      <a:prstDash val="solid"/>
-                      <a:round/>
-                      <a:headEnd type="none" w="med" len="med"/>
-                      <a:tailEnd type="none" w="med" len="med"/>
-                    </a:lnT>
-                    <a:lnB w="9525" cap="flat" cmpd="sng" algn="ctr">
-                      <a:solidFill>
-                        <a:srgbClr val="D6D6D6"/>
-                      </a:solidFill>
-                      <a:prstDash val="solid"/>
-                      <a:round/>
-                      <a:headEnd type="none" w="med" len="med"/>
-                      <a:tailEnd type="none" w="med" len="med"/>
-                    </a:lnB>
-                    <a:noFill/>
-                  </a:tcPr>
-                </a:tc>
-                <a:tc>
-                  <a:txBody>
-                    <a:bodyPr/>
-                    <a:lstStyle/>
-                    <a:p>
-                      <a:pPr marL="0" algn="l" defTabSz="914400" rtl="0" eaLnBrk="1" latinLnBrk="0" hangingPunct="1"/>
-                      <a:r>
-                        <a:rPr sz="800" b="0" kern="1200">
-                          <a:solidFill>
-                            <a:srgbClr val="0A0A0A"/>
-                          </a:solidFill>
-                          <a:latin typeface="微软雅黑" panose="020B0503020204020204" pitchFamily="34" charset="-122"/>
-                          <a:ea typeface="微软雅黑" panose="020B0503020204020204" pitchFamily="34" charset="-122"/>
-                          <a:cs typeface="+mn-cs"/>
-                        </a:rPr>
                         <a:t>SACC Loans</a:t>
                       </a:r>
                     </a:p>
                   </a:txBody>
-                  <a:tcPr marL="27432" marR="27432" marT="9144" marB="9144">
+                  <a:tcPr marL="27432" marR="27432" marT="9144" marB="9144" w="1014984">
                     <a:lnL>
                       <a:noFill/>
                     </a:lnL>
@@ -8473,7 +8369,7 @@
                       </a:endParaRPr>
                     </a:p>
                   </a:txBody>
-                  <a:tcPr marL="27432" marR="27432" marT="9144" marB="9144">
+                  <a:tcPr marL="27432" marR="27432" marT="9144" marB="9144" w="832104">
                     <a:lnL>
                       <a:noFill/>
                     </a:lnL>
@@ -8501,6 +8397,51 @@
                     <a:noFill/>
                   </a:tcPr>
                 </a:tc>
+                <a:tc>
+                  <a:txBody>
+                    <a:bodyPr/>
+                    <a:lstStyle/>
+                    <a:p>
+                      <a:r>
+                        <a:t>交易方向、机构名称及历史交易模式</a:t>
+                      </a:r>
+                    </a:p>
+                  </a:txBody>
+                  <a:tcPr marL="27432" marR="27432" marT="9144" marB="9144" w="2496312">
+                    <a:lnL>
+                      <a:noFill/>
+                    </a:lnL>
+                    <a:lnR>
+                      <a:noFill/>
+                    </a:lnR>
+                    <a:lnT w="19050" cap="flat" cmpd="sng" algn="ctr">
+                      <a:solidFill>
+                        <a:srgbClr val="0A0A0A"/>
+                      </a:solidFill>
+                      <a:prstDash val="solid"/>
+                      <a:round/>
+                      <a:headEnd type="none" w="med" len="med"/>
+                      <a:tailEnd type="none" w="med" len="med"/>
+                    </a:lnT>
+                    <a:lnB w="9525" cap="flat" cmpd="sng" algn="ctr">
+                      <a:solidFill>
+                        <a:srgbClr val="D6D6D6"/>
+                      </a:solidFill>
+                      <a:prstDash val="solid"/>
+                      <a:round/>
+                      <a:headEnd type="none" w="med" len="med"/>
+                      <a:tailEnd type="none" w="med" len="med"/>
+                    </a:lnB>
+                    <a:noFill/>
+                  </a:tcPr>
+                </a:tc>
+              </a:tr>
+              <a:tr h="170373">
+                <a:extLst>
+                  <a:ext uri="{0D108BD9-81ED-4DB2-BD59-A6C34878D82A}">
+                    <a16:rowId xmlns:a16="http://schemas.microsoft.com/office/drawing/2014/main" val="10002"/>
+                  </a:ext>
+                </a:extLst>
                 <a:tc>
                   <a:txBody>
                     <a:bodyPr/>
@@ -8516,34 +8457,30 @@
                           <a:ea typeface="微软雅黑" panose="020B0503020204020204" pitchFamily="34" charset="-122"/>
                           <a:cs typeface="+mn-cs"/>
                         </a:rPr>
-                        <a:t>A$156</a:t>
-                      </a:r>
-                    </a:p>
-                  </a:txBody>
-                  <a:tcPr marL="27432" marR="27432" marT="9144" marB="9144">
+                        <a:t>2026/03/28</a:t>
+                      </a:r>
+                    </a:p>
+                  </a:txBody>
+                  <a:tcPr marL="27432" marR="27432" marT="9144" marB="9144" w="768096">
                     <a:lnL>
                       <a:noFill/>
                     </a:lnL>
                     <a:lnR>
                       <a:noFill/>
                     </a:lnR>
-                    <a:lnT w="19050" cap="flat" cmpd="sng" algn="ctr">
-                      <a:solidFill>
-                        <a:srgbClr val="0A0A0A"/>
+                    <a:lnT w="9525" cap="flat" cmpd="sng" algn="ctr">
+                      <a:solidFill>
+                        <a:srgbClr val="D6D6D6"/>
                       </a:solidFill>
                       <a:prstDash val="solid"/>
                       <a:round/>
                       <a:headEnd type="none" w="med" len="med"/>
                       <a:tailEnd type="none" w="med" len="med"/>
                     </a:lnT>
-                    <a:lnB w="9525" cap="flat" cmpd="sng" algn="ctr">
-                      <a:solidFill>
-                        <a:srgbClr val="D6D6D6"/>
-                      </a:solidFill>
-                      <a:prstDash val="solid"/>
-                      <a:round/>
-                      <a:headEnd type="none" w="med" len="med"/>
-                      <a:tailEnd type="none" w="med" len="med"/>
+                    <a:lnB w="9525">
+                      <a:solidFill>
+                        <a:srgbClr val="D6D6D6"/>
+                      </a:solidFill>
                     </a:lnB>
                     <a:noFill/>
                   </a:tcPr>
@@ -8563,20 +8500,20 @@
                           <a:ea typeface="微软雅黑" panose="020B0503020204020204" pitchFamily="34" charset="-122"/>
                           <a:cs typeface="+mn-cs"/>
                         </a:rPr>
-                        <a:t>交易方向、机构名称、产品关键词及历史交易模式</a:t>
-                      </a:r>
-                    </a:p>
-                  </a:txBody>
-                  <a:tcPr marL="27432" marR="27432" marT="9144" marB="9144">
+                        <a:t>A$12.40</a:t>
+                      </a:r>
+                    </a:p>
+                  </a:txBody>
+                  <a:tcPr marL="27432" marR="27432" marT="9144" marB="9144" w="914400">
                     <a:lnL>
                       <a:noFill/>
                     </a:lnL>
                     <a:lnR>
                       <a:noFill/>
                     </a:lnR>
-                    <a:lnT w="19050" cap="flat" cmpd="sng" algn="ctr">
-                      <a:solidFill>
-                        <a:srgbClr val="0A0A0A"/>
+                    <a:lnT w="9525" cap="flat" cmpd="sng" algn="ctr">
+                      <a:solidFill>
+                        <a:srgbClr val="D6D6D6"/>
                       </a:solidFill>
                       <a:prstDash val="solid"/>
                       <a:round/>
@@ -8595,13 +8532,83 @@
                     <a:noFill/>
                   </a:tcPr>
                 </a:tc>
-                <a:extLst>
-                  <a:ext uri="{0D108BD9-81ED-4DB2-BD59-A6C34878D82A}">
-                    <a16:rowId xmlns:a16="http://schemas.microsoft.com/office/drawing/2014/main" val="10001"/>
-                  </a:ext>
-                </a:extLst>
-              </a:tr>
-              <a:tr h="170373">
+                <a:tc>
+                  <a:txBody>
+                    <a:bodyPr/>
+                    <a:lstStyle/>
+                    <a:p>
+                      <a:r>
+                        <a:t>EFTPOS MCDONALDS BRISBANE QLD</a:t>
+                      </a:r>
+                    </a:p>
+                  </a:txBody>
+                  <a:tcPr marL="27432" marR="27432" marT="9144" marB="9144" w="2761488">
+                    <a:lnL>
+                      <a:noFill/>
+                    </a:lnL>
+                    <a:lnR>
+                      <a:noFill/>
+                    </a:lnR>
+                    <a:lnT w="9525" cap="flat" cmpd="sng" algn="ctr">
+                      <a:solidFill>
+                        <a:srgbClr val="D6D6D6"/>
+                      </a:solidFill>
+                      <a:prstDash val="solid"/>
+                      <a:round/>
+                      <a:headEnd type="none" w="med" len="med"/>
+                      <a:tailEnd type="none" w="med" len="med"/>
+                    </a:lnT>
+                    <a:lnB w="9525">
+                      <a:solidFill>
+                        <a:srgbClr val="D6D6D6"/>
+                      </a:solidFill>
+                    </a:lnB>
+                    <a:noFill/>
+                  </a:tcPr>
+                </a:tc>
+                <a:tc>
+                  <a:txBody>
+                    <a:bodyPr/>
+                    <a:lstStyle/>
+                    <a:p>
+                      <a:pPr marL="0" algn="l" defTabSz="914400" rtl="0" eaLnBrk="1" latinLnBrk="0" hangingPunct="1"/>
+                      <a:r>
+                        <a:rPr sz="800" b="0" kern="1200" dirty="0">
+                          <a:solidFill>
+                            <a:srgbClr val="0A0A0A"/>
+                          </a:solidFill>
+                          <a:latin typeface="微软雅黑" panose="020B0503020204020204" pitchFamily="34" charset="-122"/>
+                          <a:ea typeface="微软雅黑" panose="020B0503020204020204" pitchFamily="34" charset="-122"/>
+                          <a:cs typeface="+mn-cs"/>
+                        </a:rPr>
+                        <a:t>McDonald's</a:t>
+                      </a:r>
+                    </a:p>
+                  </a:txBody>
+                  <a:tcPr marL="27432" marR="27432" marT="9144" marB="9144" w="1225296">
+                    <a:lnL>
+                      <a:noFill/>
+                    </a:lnL>
+                    <a:lnR>
+                      <a:noFill/>
+                    </a:lnR>
+                    <a:lnT w="9525" cap="flat" cmpd="sng" algn="ctr">
+                      <a:solidFill>
+                        <a:srgbClr val="D6D6D6"/>
+                      </a:solidFill>
+                      <a:prstDash val="solid"/>
+                      <a:round/>
+                      <a:headEnd type="none" w="med" len="med"/>
+                      <a:tailEnd type="none" w="med" len="med"/>
+                    </a:lnT>
+                    <a:lnB w="9525">
+                      <a:solidFill>
+                        <a:srgbClr val="D6D6D6"/>
+                      </a:solidFill>
+                    </a:lnB>
+                    <a:noFill/>
+                  </a:tcPr>
+                </a:tc>
                 <a:tc>
                   <a:txBody>
                     <a:bodyPr/>
@@ -8617,11 +8624,11 @@
                           <a:ea typeface="微软雅黑" panose="020B0503020204020204" pitchFamily="34" charset="-122"/>
                           <a:cs typeface="+mn-cs"/>
                         </a:rPr>
-                        <a:t>2026/03/28</a:t>
-                      </a:r>
-                    </a:p>
-                  </a:txBody>
-                  <a:tcPr marL="27432" marR="27432" marT="9144" marB="9144">
+                        <a:t>商户企业</a:t>
+                      </a:r>
+                    </a:p>
+                  </a:txBody>
+                  <a:tcPr marL="27432" marR="27432" marT="9144" marB="9144" w="886968">
                     <a:lnL>
                       <a:noFill/>
                     </a:lnL>
@@ -8637,96 +8644,14 @@
                       <a:headEnd type="none" w="med" len="med"/>
                       <a:tailEnd type="none" w="med" len="med"/>
                     </a:lnT>
-                    <a:lnB w="9525">
-                      <a:solidFill>
-                        <a:srgbClr val="D6D6D6"/>
-                      </a:solidFill>
-                    </a:lnB>
-                    <a:noFill/>
-                  </a:tcPr>
-                </a:tc>
-                <a:tc>
-                  <a:txBody>
-                    <a:bodyPr/>
-                    <a:lstStyle/>
-                    <a:p>
-                      <a:pPr marL="0" algn="l" defTabSz="914400" rtl="0" eaLnBrk="1" latinLnBrk="0" hangingPunct="1"/>
-                      <a:r>
-                        <a:rPr sz="800" b="0" kern="1200" dirty="0">
-                          <a:solidFill>
-                            <a:srgbClr val="0A0A0A"/>
-                          </a:solidFill>
-                          <a:latin typeface="微软雅黑" panose="020B0503020204020204" pitchFamily="34" charset="-122"/>
-                          <a:ea typeface="微软雅黑" panose="020B0503020204020204" pitchFamily="34" charset="-122"/>
-                          <a:cs typeface="+mn-cs"/>
-                        </a:rPr>
-                        <a:t>MCDONALDS BRISBANE</a:t>
-                      </a:r>
-                    </a:p>
-                  </a:txBody>
-                  <a:tcPr marL="27432" marR="27432" marT="9144" marB="9144">
-                    <a:lnL>
-                      <a:noFill/>
-                    </a:lnL>
-                    <a:lnR>
-                      <a:noFill/>
-                    </a:lnR>
-                    <a:lnT w="9525" cap="flat" cmpd="sng" algn="ctr">
-                      <a:solidFill>
-                        <a:srgbClr val="D6D6D6"/>
-                      </a:solidFill>
-                      <a:prstDash val="solid"/>
-                      <a:round/>
-                      <a:headEnd type="none" w="med" len="med"/>
-                      <a:tailEnd type="none" w="med" len="med"/>
-                    </a:lnT>
-                    <a:lnB w="9525">
-                      <a:solidFill>
-                        <a:srgbClr val="D6D6D6"/>
-                      </a:solidFill>
-                    </a:lnB>
-                    <a:noFill/>
-                  </a:tcPr>
-                </a:tc>
-                <a:tc>
-                  <a:txBody>
-                    <a:bodyPr/>
-                    <a:lstStyle/>
-                    <a:p>
-                      <a:pPr marL="0" algn="l" defTabSz="914400" rtl="0" eaLnBrk="1" latinLnBrk="0" hangingPunct="1"/>
-                      <a:r>
-                        <a:rPr sz="800" b="0" kern="1200" dirty="0">
-                          <a:solidFill>
-                            <a:srgbClr val="0A0A0A"/>
-                          </a:solidFill>
-                          <a:latin typeface="微软雅黑" panose="020B0503020204020204" pitchFamily="34" charset="-122"/>
-                          <a:ea typeface="微软雅黑" panose="020B0503020204020204" pitchFamily="34" charset="-122"/>
-                          <a:cs typeface="+mn-cs"/>
-                        </a:rPr>
-                        <a:t>McDonald's</a:t>
-                      </a:r>
-                    </a:p>
-                  </a:txBody>
-                  <a:tcPr marL="27432" marR="27432" marT="9144" marB="9144">
-                    <a:lnL>
-                      <a:noFill/>
-                    </a:lnL>
-                    <a:lnR>
-                      <a:noFill/>
-                    </a:lnR>
-                    <a:lnT w="9525" cap="flat" cmpd="sng" algn="ctr">
-                      <a:solidFill>
-                        <a:srgbClr val="D6D6D6"/>
-                      </a:solidFill>
-                      <a:prstDash val="solid"/>
-                      <a:round/>
-                      <a:headEnd type="none" w="med" len="med"/>
-                      <a:tailEnd type="none" w="med" len="med"/>
-                    </a:lnT>
-                    <a:lnB w="9525">
-                      <a:solidFill>
-                        <a:srgbClr val="D6D6D6"/>
-                      </a:solidFill>
+                    <a:lnB w="9525" cap="flat" cmpd="sng" algn="ctr">
+                      <a:solidFill>
+                        <a:srgbClr val="D6D6D6"/>
+                      </a:solidFill>
+                      <a:prstDash val="solid"/>
+                      <a:round/>
+                      <a:headEnd type="none" w="med" len="med"/>
+                      <a:tailEnd type="none" w="med" len="med"/>
                     </a:lnB>
                     <a:noFill/>
                   </a:tcPr>
@@ -8746,11 +8671,11 @@
                           <a:ea typeface="微软雅黑" panose="020B0503020204020204" pitchFamily="34" charset="-122"/>
                           <a:cs typeface="+mn-cs"/>
                         </a:rPr>
-                        <a:t>商户企业</a:t>
-                      </a:r>
-                    </a:p>
-                  </a:txBody>
-                  <a:tcPr marL="27432" marR="27432" marT="9144" marB="9144">
+                        <a:t>Dining Out</a:t>
+                      </a:r>
+                    </a:p>
+                  </a:txBody>
+                  <a:tcPr marL="27432" marR="27432" marT="9144" marB="9144" w="1014984">
                     <a:lnL>
                       <a:noFill/>
                     </a:lnL>
@@ -8793,11 +8718,11 @@
                           <a:ea typeface="微软雅黑" panose="020B0503020204020204" pitchFamily="34" charset="-122"/>
                           <a:cs typeface="+mn-cs"/>
                         </a:rPr>
-                        <a:t>消费</a:t>
-                      </a:r>
-                    </a:p>
-                  </a:txBody>
-                  <a:tcPr marL="27432" marR="27432" marT="9144" marB="9144">
+                        <a:t>消费支出</a:t>
+                      </a:r>
+                    </a:p>
+                  </a:txBody>
+                  <a:tcPr marL="27432" marR="27432" marT="9144" marB="9144" w="832104">
                     <a:lnL>
                       <a:noFill/>
                     </a:lnL>
@@ -8840,11 +8765,11 @@
                           <a:ea typeface="微软雅黑" panose="020B0503020204020204" pitchFamily="34" charset="-122"/>
                           <a:cs typeface="+mn-cs"/>
                         </a:rPr>
-                        <a:t>Dining Out</a:t>
-                      </a:r>
-                    </a:p>
-                  </a:txBody>
-                  <a:tcPr marL="27432" marR="27432" marT="9144" marB="9144">
+                        <a:t>商户知识库标准名匹配</a:t>
+                      </a:r>
+                    </a:p>
+                  </a:txBody>
+                  <a:tcPr marL="27432" marR="27432" marT="9144" marB="9144" w="2496312">
                     <a:lnL>
                       <a:noFill/>
                     </a:lnL>
@@ -8872,6 +8797,13 @@
                     <a:noFill/>
                   </a:tcPr>
                 </a:tc>
+              </a:tr>
+              <a:tr h="170373">
+                <a:extLst>
+                  <a:ext uri="{0D108BD9-81ED-4DB2-BD59-A6C34878D82A}">
+                    <a16:rowId xmlns:a16="http://schemas.microsoft.com/office/drawing/2014/main" val="10003"/>
+                  </a:ext>
+                </a:extLst>
                 <a:tc>
                   <a:txBody>
                     <a:bodyPr/>
@@ -8887,11 +8819,11 @@
                           <a:ea typeface="微软雅黑" panose="020B0503020204020204" pitchFamily="34" charset="-122"/>
                           <a:cs typeface="+mn-cs"/>
                         </a:rPr>
-                        <a:t>消费支出</a:t>
-                      </a:r>
-                    </a:p>
-                  </a:txBody>
-                  <a:tcPr marL="27432" marR="27432" marT="9144" marB="9144">
+                        <a:t>2026/04/02</a:t>
+                      </a:r>
+                    </a:p>
+                  </a:txBody>
+                  <a:tcPr marL="27432" marR="27432" marT="9144" marB="9144" w="768096">
                     <a:lnL>
                       <a:noFill/>
                     </a:lnL>
@@ -8907,14 +8839,10 @@
                       <a:headEnd type="none" w="med" len="med"/>
                       <a:tailEnd type="none" w="med" len="med"/>
                     </a:lnT>
-                    <a:lnB w="9525" cap="flat" cmpd="sng" algn="ctr">
-                      <a:solidFill>
-                        <a:srgbClr val="D6D6D6"/>
-                      </a:solidFill>
-                      <a:prstDash val="solid"/>
-                      <a:round/>
-                      <a:headEnd type="none" w="med" len="med"/>
-                      <a:tailEnd type="none" w="med" len="med"/>
+                    <a:lnB w="9525">
+                      <a:solidFill>
+                        <a:srgbClr val="D6D6D6"/>
+                      </a:solidFill>
                     </a:lnB>
                     <a:noFill/>
                   </a:tcPr>
@@ -8934,11 +8862,11 @@
                           <a:ea typeface="微软雅黑" panose="020B0503020204020204" pitchFamily="34" charset="-122"/>
                           <a:cs typeface="+mn-cs"/>
                         </a:rPr>
-                        <a:t>A$12.40</a:t>
-                      </a:r>
-                    </a:p>
-                  </a:txBody>
-                  <a:tcPr marL="27432" marR="27432" marT="9144" marB="9144">
+                        <a:t>A$35.90</a:t>
+                      </a:r>
+                    </a:p>
+                  </a:txBody>
+                  <a:tcPr marL="27432" marR="27432" marT="9144" marB="9144" w="914400">
                     <a:lnL>
                       <a:noFill/>
                     </a:lnL>
@@ -8962,6 +8890,40 @@
                       <a:round/>
                       <a:headEnd type="none" w="med" len="med"/>
                       <a:tailEnd type="none" w="med" len="med"/>
+                    </a:lnB>
+                    <a:noFill/>
+                  </a:tcPr>
+                </a:tc>
+                <a:tc>
+                  <a:txBody>
+                    <a:bodyPr/>
+                    <a:lstStyle/>
+                    <a:p>
+                      <a:r>
+                        <a:t>CHEMIST WAREHOUSE 123 BRISBANE QLD</a:t>
+                      </a:r>
+                    </a:p>
+                  </a:txBody>
+                  <a:tcPr marL="27432" marR="27432" marT="9144" marB="9144" w="2761488">
+                    <a:lnL>
+                      <a:noFill/>
+                    </a:lnL>
+                    <a:lnR>
+                      <a:noFill/>
+                    </a:lnR>
+                    <a:lnT w="9525" cap="flat" cmpd="sng" algn="ctr">
+                      <a:solidFill>
+                        <a:srgbClr val="D6D6D6"/>
+                      </a:solidFill>
+                      <a:prstDash val="solid"/>
+                      <a:round/>
+                      <a:headEnd type="none" w="med" len="med"/>
+                      <a:tailEnd type="none" w="med" len="med"/>
+                    </a:lnT>
+                    <a:lnB w="9525">
+                      <a:solidFill>
+                        <a:srgbClr val="D6D6D6"/>
+                      </a:solidFill>
                     </a:lnB>
                     <a:noFill/>
                   </a:tcPr>
@@ -8981,151 +8943,11 @@
                           <a:ea typeface="微软雅黑" panose="020B0503020204020204" pitchFamily="34" charset="-122"/>
                           <a:cs typeface="+mn-cs"/>
                         </a:rPr>
-                        <a:t>商户知识库标准名匹配</a:t>
-                      </a:r>
-                    </a:p>
-                  </a:txBody>
-                  <a:tcPr marL="27432" marR="27432" marT="9144" marB="9144">
-                    <a:lnL>
-                      <a:noFill/>
-                    </a:lnL>
-                    <a:lnR>
-                      <a:noFill/>
-                    </a:lnR>
-                    <a:lnT w="9525" cap="flat" cmpd="sng" algn="ctr">
-                      <a:solidFill>
-                        <a:srgbClr val="D6D6D6"/>
-                      </a:solidFill>
-                      <a:prstDash val="solid"/>
-                      <a:round/>
-                      <a:headEnd type="none" w="med" len="med"/>
-                      <a:tailEnd type="none" w="med" len="med"/>
-                    </a:lnT>
-                    <a:lnB w="9525" cap="flat" cmpd="sng" algn="ctr">
-                      <a:solidFill>
-                        <a:srgbClr val="D6D6D6"/>
-                      </a:solidFill>
-                      <a:prstDash val="solid"/>
-                      <a:round/>
-                      <a:headEnd type="none" w="med" len="med"/>
-                      <a:tailEnd type="none" w="med" len="med"/>
-                    </a:lnB>
-                    <a:noFill/>
-                  </a:tcPr>
-                </a:tc>
-                <a:extLst>
-                  <a:ext uri="{0D108BD9-81ED-4DB2-BD59-A6C34878D82A}">
-                    <a16:rowId xmlns:a16="http://schemas.microsoft.com/office/drawing/2014/main" val="10002"/>
-                  </a:ext>
-                </a:extLst>
-              </a:tr>
-              <a:tr h="170373">
-                <a:tc>
-                  <a:txBody>
-                    <a:bodyPr/>
-                    <a:lstStyle/>
-                    <a:p>
-                      <a:pPr marL="0" algn="l" defTabSz="914400" rtl="0" eaLnBrk="1" latinLnBrk="0" hangingPunct="1"/>
-                      <a:r>
-                        <a:rPr sz="800" b="0" kern="1200">
-                          <a:solidFill>
-                            <a:srgbClr val="0A0A0A"/>
-                          </a:solidFill>
-                          <a:latin typeface="微软雅黑" panose="020B0503020204020204" pitchFamily="34" charset="-122"/>
-                          <a:ea typeface="微软雅黑" panose="020B0503020204020204" pitchFamily="34" charset="-122"/>
-                          <a:cs typeface="+mn-cs"/>
-                        </a:rPr>
-                        <a:t>2026/04/02</a:t>
-                      </a:r>
-                    </a:p>
-                  </a:txBody>
-                  <a:tcPr marL="27432" marR="27432" marT="9144" marB="9144">
-                    <a:lnL>
-                      <a:noFill/>
-                    </a:lnL>
-                    <a:lnR>
-                      <a:noFill/>
-                    </a:lnR>
-                    <a:lnT w="9525" cap="flat" cmpd="sng" algn="ctr">
-                      <a:solidFill>
-                        <a:srgbClr val="D6D6D6"/>
-                      </a:solidFill>
-                      <a:prstDash val="solid"/>
-                      <a:round/>
-                      <a:headEnd type="none" w="med" len="med"/>
-                      <a:tailEnd type="none" w="med" len="med"/>
-                    </a:lnT>
-                    <a:lnB w="9525">
-                      <a:solidFill>
-                        <a:srgbClr val="D6D6D6"/>
-                      </a:solidFill>
-                    </a:lnB>
-                    <a:noFill/>
-                  </a:tcPr>
-                </a:tc>
-                <a:tc>
-                  <a:txBody>
-                    <a:bodyPr/>
-                    <a:lstStyle/>
-                    <a:p>
-                      <a:pPr marL="0" algn="l" defTabSz="914400" rtl="0" eaLnBrk="1" latinLnBrk="0" hangingPunct="1"/>
-                      <a:r>
-                        <a:rPr sz="800" b="0" kern="1200">
-                          <a:solidFill>
-                            <a:srgbClr val="0A0A0A"/>
-                          </a:solidFill>
-                          <a:latin typeface="微软雅黑" panose="020B0503020204020204" pitchFamily="34" charset="-122"/>
-                          <a:ea typeface="微软雅黑" panose="020B0503020204020204" pitchFamily="34" charset="-122"/>
-                          <a:cs typeface="+mn-cs"/>
-                        </a:rPr>
-                        <a:t>CHEMIST WAREHOUSE 123</a:t>
-                      </a:r>
-                    </a:p>
-                  </a:txBody>
-                  <a:tcPr marL="27432" marR="27432" marT="9144" marB="9144">
-                    <a:lnL>
-                      <a:noFill/>
-                    </a:lnL>
-                    <a:lnR>
-                      <a:noFill/>
-                    </a:lnR>
-                    <a:lnT w="9525" cap="flat" cmpd="sng" algn="ctr">
-                      <a:solidFill>
-                        <a:srgbClr val="D6D6D6"/>
-                      </a:solidFill>
-                      <a:prstDash val="solid"/>
-                      <a:round/>
-                      <a:headEnd type="none" w="med" len="med"/>
-                      <a:tailEnd type="none" w="med" len="med"/>
-                    </a:lnT>
-                    <a:lnB w="9525">
-                      <a:solidFill>
-                        <a:srgbClr val="D6D6D6"/>
-                      </a:solidFill>
-                    </a:lnB>
-                    <a:noFill/>
-                  </a:tcPr>
-                </a:tc>
-                <a:tc>
-                  <a:txBody>
-                    <a:bodyPr/>
-                    <a:lstStyle/>
-                    <a:p>
-                      <a:pPr marL="0" algn="l" defTabSz="914400" rtl="0" eaLnBrk="1" latinLnBrk="0" hangingPunct="1"/>
-                      <a:r>
-                        <a:rPr sz="800" b="0" kern="1200">
-                          <a:solidFill>
-                            <a:srgbClr val="0A0A0A"/>
-                          </a:solidFill>
-                          <a:latin typeface="微软雅黑" panose="020B0503020204020204" pitchFamily="34" charset="-122"/>
-                          <a:ea typeface="微软雅黑" panose="020B0503020204020204" pitchFamily="34" charset="-122"/>
-                          <a:cs typeface="+mn-cs"/>
-                        </a:rPr>
                         <a:t>Chemist Warehouse</a:t>
                       </a:r>
                     </a:p>
                   </a:txBody>
-                  <a:tcPr marL="27432" marR="27432" marT="9144" marB="9144">
+                  <a:tcPr marL="27432" marR="27432" marT="9144" marB="9144" w="1225296">
                     <a:lnL>
                       <a:noFill/>
                     </a:lnL>
@@ -9176,7 +8998,7 @@
                       </a:endParaRPr>
                     </a:p>
                   </a:txBody>
-                  <a:tcPr marL="27432" marR="27432" marT="9144" marB="9144">
+                  <a:tcPr marL="27432" marR="27432" marT="9144" marB="9144" w="886968">
                     <a:lnL>
                       <a:noFill/>
                     </a:lnL>
@@ -9219,11 +9041,11 @@
                           <a:ea typeface="微软雅黑" panose="020B0503020204020204" pitchFamily="34" charset="-122"/>
                           <a:cs typeface="+mn-cs"/>
                         </a:rPr>
-                        <a:t>消费</a:t>
-                      </a:r>
-                    </a:p>
-                  </a:txBody>
-                  <a:tcPr marL="27432" marR="27432" marT="9144" marB="9144">
+                        <a:t>Health</a:t>
+                      </a:r>
+                    </a:p>
+                  </a:txBody>
+                  <a:tcPr marL="27432" marR="27432" marT="9144" marB="9144" w="1014984">
                     <a:lnL>
                       <a:noFill/>
                     </a:lnL>
@@ -9266,11 +9088,11 @@
                           <a:ea typeface="微软雅黑" panose="020B0503020204020204" pitchFamily="34" charset="-122"/>
                           <a:cs typeface="+mn-cs"/>
                         </a:rPr>
-                        <a:t>Health</a:t>
-                      </a:r>
-                    </a:p>
-                  </a:txBody>
-                  <a:tcPr marL="27432" marR="27432" marT="9144" marB="9144">
+                        <a:t>消费支出</a:t>
+                      </a:r>
+                    </a:p>
+                  </a:txBody>
+                  <a:tcPr marL="27432" marR="27432" marT="9144" marB="9144" w="832104">
                     <a:lnL>
                       <a:noFill/>
                     </a:lnL>
@@ -9313,11 +9135,11 @@
                           <a:ea typeface="微软雅黑" panose="020B0503020204020204" pitchFamily="34" charset="-122"/>
                           <a:cs typeface="+mn-cs"/>
                         </a:rPr>
-                        <a:t>消费支出</a:t>
-                      </a:r>
-                    </a:p>
-                  </a:txBody>
-                  <a:tcPr marL="27432" marR="27432" marT="9144" marB="9144">
+                        <a:t>商户知识库标准名匹配</a:t>
+                      </a:r>
+                    </a:p>
+                  </a:txBody>
+                  <a:tcPr marL="27432" marR="27432" marT="9144" marB="9144" w="2496312">
                     <a:lnL>
                       <a:noFill/>
                     </a:lnL>
@@ -9345,6 +9167,13 @@
                     <a:noFill/>
                   </a:tcPr>
                 </a:tc>
+              </a:tr>
+              <a:tr h="170373">
+                <a:extLst>
+                  <a:ext uri="{0D108BD9-81ED-4DB2-BD59-A6C34878D82A}">
+                    <a16:rowId xmlns:a16="http://schemas.microsoft.com/office/drawing/2014/main" val="10004"/>
+                  </a:ext>
+                </a:extLst>
                 <a:tc>
                   <a:txBody>
                     <a:bodyPr/>
@@ -9360,11 +9189,11 @@
                           <a:ea typeface="微软雅黑" panose="020B0503020204020204" pitchFamily="34" charset="-122"/>
                           <a:cs typeface="+mn-cs"/>
                         </a:rPr>
-                        <a:t>A$35.90</a:t>
-                      </a:r>
-                    </a:p>
-                  </a:txBody>
-                  <a:tcPr marL="27432" marR="27432" marT="9144" marB="9144">
+                        <a:t>2026/04/08</a:t>
+                      </a:r>
+                    </a:p>
+                  </a:txBody>
+                  <a:tcPr marL="27432" marR="27432" marT="9144" marB="9144" w="768096">
                     <a:lnL>
                       <a:noFill/>
                     </a:lnL>
@@ -9380,6 +9209,49 @@
                       <a:headEnd type="none" w="med" len="med"/>
                       <a:tailEnd type="none" w="med" len="med"/>
                     </a:lnT>
+                    <a:lnB w="9525">
+                      <a:solidFill>
+                        <a:srgbClr val="D6D6D6"/>
+                      </a:solidFill>
+                    </a:lnB>
+                    <a:noFill/>
+                  </a:tcPr>
+                </a:tc>
+                <a:tc>
+                  <a:txBody>
+                    <a:bodyPr/>
+                    <a:lstStyle/>
+                    <a:p>
+                      <a:pPr marL="0" algn="l" defTabSz="914400" rtl="0" eaLnBrk="1" latinLnBrk="0" hangingPunct="1"/>
+                      <a:r>
+                        <a:rPr sz="800" b="0" kern="1200" dirty="0">
+                          <a:solidFill>
+                            <a:srgbClr val="0A0A0A"/>
+                          </a:solidFill>
+                          <a:latin typeface="微软雅黑" panose="020B0503020204020204" pitchFamily="34" charset="-122"/>
+                          <a:ea typeface="微软雅黑" panose="020B0503020204020204" pitchFamily="34" charset="-122"/>
+                          <a:cs typeface="+mn-cs"/>
+                        </a:rPr>
+                        <a:t>A$8.99</a:t>
+                      </a:r>
+                    </a:p>
+                  </a:txBody>
+                  <a:tcPr marL="27432" marR="27432" marT="9144" marB="9144" w="914400">
+                    <a:lnL>
+                      <a:noFill/>
+                    </a:lnL>
+                    <a:lnR>
+                      <a:noFill/>
+                    </a:lnR>
+                    <a:lnT w="9525" cap="flat" cmpd="sng" algn="ctr">
+                      <a:solidFill>
+                        <a:srgbClr val="D6D6D6"/>
+                      </a:solidFill>
+                      <a:prstDash val="solid"/>
+                      <a:round/>
+                      <a:headEnd type="none" w="med" len="med"/>
+                      <a:tailEnd type="none" w="med" len="med"/>
+                    </a:lnT>
                     <a:lnB w="9525" cap="flat" cmpd="sng" algn="ctr">
                       <a:solidFill>
                         <a:srgbClr val="D6D6D6"/>
@@ -9388,6 +9260,40 @@
                       <a:round/>
                       <a:headEnd type="none" w="med" len="med"/>
                       <a:tailEnd type="none" w="med" len="med"/>
+                    </a:lnB>
+                    <a:noFill/>
+                  </a:tcPr>
+                </a:tc>
+                <a:tc>
+                  <a:txBody>
+                    <a:bodyPr/>
+                    <a:lstStyle/>
+                    <a:p>
+                      <a:r>
+                        <a:t>AMZNPRIMEAU*</a:t>
+                      </a:r>
+                    </a:p>
+                  </a:txBody>
+                  <a:tcPr marL="27432" marR="27432" marT="9144" marB="9144" w="2761488">
+                    <a:lnL>
+                      <a:noFill/>
+                    </a:lnL>
+                    <a:lnR>
+                      <a:noFill/>
+                    </a:lnR>
+                    <a:lnT w="9525" cap="flat" cmpd="sng" algn="ctr">
+                      <a:solidFill>
+                        <a:srgbClr val="D6D6D6"/>
+                      </a:solidFill>
+                      <a:prstDash val="solid"/>
+                      <a:round/>
+                      <a:headEnd type="none" w="med" len="med"/>
+                      <a:tailEnd type="none" w="med" len="med"/>
+                    </a:lnT>
+                    <a:lnB w="9525">
+                      <a:solidFill>
+                        <a:srgbClr val="D6D6D6"/>
+                      </a:solidFill>
                     </a:lnB>
                     <a:noFill/>
                   </a:tcPr>
@@ -9407,11 +9313,11 @@
                           <a:ea typeface="微软雅黑" panose="020B0503020204020204" pitchFamily="34" charset="-122"/>
                           <a:cs typeface="+mn-cs"/>
                         </a:rPr>
-                        <a:t>商户知识库标准名匹配</a:t>
-                      </a:r>
-                    </a:p>
-                  </a:txBody>
-                  <a:tcPr marL="27432" marR="27432" marT="9144" marB="9144">
+                        <a:t>Amazon Prime</a:t>
+                      </a:r>
+                    </a:p>
+                  </a:txBody>
+                  <a:tcPr marL="27432" marR="27432" marT="9144" marB="9144" w="1225296">
                     <a:lnL>
                       <a:noFill/>
                     </a:lnL>
@@ -9427,25 +9333,14 @@
                       <a:headEnd type="none" w="med" len="med"/>
                       <a:tailEnd type="none" w="med" len="med"/>
                     </a:lnT>
-                    <a:lnB w="9525" cap="flat" cmpd="sng" algn="ctr">
-                      <a:solidFill>
-                        <a:srgbClr val="D6D6D6"/>
-                      </a:solidFill>
-                      <a:prstDash val="solid"/>
-                      <a:round/>
-                      <a:headEnd type="none" w="med" len="med"/>
-                      <a:tailEnd type="none" w="med" len="med"/>
+                    <a:lnB w="9525">
+                      <a:solidFill>
+                        <a:srgbClr val="D6D6D6"/>
+                      </a:solidFill>
                     </a:lnB>
                     <a:noFill/>
                   </a:tcPr>
                 </a:tc>
-                <a:extLst>
-                  <a:ext uri="{0D108BD9-81ED-4DB2-BD59-A6C34878D82A}">
-                    <a16:rowId xmlns:a16="http://schemas.microsoft.com/office/drawing/2014/main" val="10003"/>
-                  </a:ext>
-                </a:extLst>
-              </a:tr>
-              <a:tr h="170373">
                 <a:tc>
                   <a:txBody>
                     <a:bodyPr/>
@@ -9461,11 +9356,11 @@
                           <a:ea typeface="微软雅黑" panose="020B0503020204020204" pitchFamily="34" charset="-122"/>
                           <a:cs typeface="+mn-cs"/>
                         </a:rPr>
-                        <a:t>2026/04/08</a:t>
-                      </a:r>
-                    </a:p>
-                  </a:txBody>
-                  <a:tcPr marL="27432" marR="27432" marT="9144" marB="9144">
+                        <a:t>商户企业</a:t>
+                      </a:r>
+                    </a:p>
+                  </a:txBody>
+                  <a:tcPr marL="27432" marR="27432" marT="9144" marB="9144" w="886968">
                     <a:lnL>
                       <a:noFill/>
                     </a:lnL>
@@ -9481,10 +9376,14 @@
                       <a:headEnd type="none" w="med" len="med"/>
                       <a:tailEnd type="none" w="med" len="med"/>
                     </a:lnT>
-                    <a:lnB w="9525">
-                      <a:solidFill>
-                        <a:srgbClr val="D6D6D6"/>
-                      </a:solidFill>
+                    <a:lnB w="9525" cap="flat" cmpd="sng" algn="ctr">
+                      <a:solidFill>
+                        <a:srgbClr val="D6D6D6"/>
+                      </a:solidFill>
+                      <a:prstDash val="solid"/>
+                      <a:round/>
+                      <a:headEnd type="none" w="med" len="med"/>
+                      <a:tailEnd type="none" w="med" len="med"/>
                     </a:lnB>
                     <a:noFill/>
                   </a:tcPr>
@@ -9504,191 +9403,11 @@
                           <a:ea typeface="微软雅黑" panose="020B0503020204020204" pitchFamily="34" charset="-122"/>
                           <a:cs typeface="+mn-cs"/>
                         </a:rPr>
-                        <a:t>AMZNPRIMEA*</a:t>
-                      </a:r>
-                    </a:p>
-                  </a:txBody>
-                  <a:tcPr marL="27432" marR="27432" marT="9144" marB="9144">
-                    <a:lnL>
-                      <a:noFill/>
-                    </a:lnL>
-                    <a:lnR>
-                      <a:noFill/>
-                    </a:lnR>
-                    <a:lnT w="9525" cap="flat" cmpd="sng" algn="ctr">
-                      <a:solidFill>
-                        <a:srgbClr val="D6D6D6"/>
-                      </a:solidFill>
-                      <a:prstDash val="solid"/>
-                      <a:round/>
-                      <a:headEnd type="none" w="med" len="med"/>
-                      <a:tailEnd type="none" w="med" len="med"/>
-                    </a:lnT>
-                    <a:lnB w="9525">
-                      <a:solidFill>
-                        <a:srgbClr val="D6D6D6"/>
-                      </a:solidFill>
-                    </a:lnB>
-                    <a:noFill/>
-                  </a:tcPr>
-                </a:tc>
-                <a:tc>
-                  <a:txBody>
-                    <a:bodyPr/>
-                    <a:lstStyle/>
-                    <a:p>
-                      <a:pPr marL="0" algn="l" defTabSz="914400" rtl="0" eaLnBrk="1" latinLnBrk="0" hangingPunct="1"/>
-                      <a:r>
-                        <a:rPr sz="800" b="0" kern="1200">
-                          <a:solidFill>
-                            <a:srgbClr val="0A0A0A"/>
-                          </a:solidFill>
-                          <a:latin typeface="微软雅黑" panose="020B0503020204020204" pitchFamily="34" charset="-122"/>
-                          <a:ea typeface="微软雅黑" panose="020B0503020204020204" pitchFamily="34" charset="-122"/>
-                          <a:cs typeface="+mn-cs"/>
-                        </a:rPr>
-                        <a:t>Amazon Prime</a:t>
-                      </a:r>
-                    </a:p>
-                  </a:txBody>
-                  <a:tcPr marL="27432" marR="27432" marT="9144" marB="9144">
-                    <a:lnL>
-                      <a:noFill/>
-                    </a:lnL>
-                    <a:lnR>
-                      <a:noFill/>
-                    </a:lnR>
-                    <a:lnT w="9525" cap="flat" cmpd="sng" algn="ctr">
-                      <a:solidFill>
-                        <a:srgbClr val="D6D6D6"/>
-                      </a:solidFill>
-                      <a:prstDash val="solid"/>
-                      <a:round/>
-                      <a:headEnd type="none" w="med" len="med"/>
-                      <a:tailEnd type="none" w="med" len="med"/>
-                    </a:lnT>
-                    <a:lnB w="9525">
-                      <a:solidFill>
-                        <a:srgbClr val="D6D6D6"/>
-                      </a:solidFill>
-                    </a:lnB>
-                    <a:noFill/>
-                  </a:tcPr>
-                </a:tc>
-                <a:tc>
-                  <a:txBody>
-                    <a:bodyPr/>
-                    <a:lstStyle/>
-                    <a:p>
-                      <a:pPr marL="0" algn="l" defTabSz="914400" rtl="0" eaLnBrk="1" latinLnBrk="0" hangingPunct="1"/>
-                      <a:r>
-                        <a:rPr sz="800" b="0" kern="1200">
-                          <a:solidFill>
-                            <a:srgbClr val="0A0A0A"/>
-                          </a:solidFill>
-                          <a:latin typeface="微软雅黑" panose="020B0503020204020204" pitchFamily="34" charset="-122"/>
-                          <a:ea typeface="微软雅黑" panose="020B0503020204020204" pitchFamily="34" charset="-122"/>
-                          <a:cs typeface="+mn-cs"/>
-                        </a:rPr>
-                        <a:t>商户企业</a:t>
-                      </a:r>
-                    </a:p>
-                  </a:txBody>
-                  <a:tcPr marL="27432" marR="27432" marT="9144" marB="9144">
-                    <a:lnL>
-                      <a:noFill/>
-                    </a:lnL>
-                    <a:lnR>
-                      <a:noFill/>
-                    </a:lnR>
-                    <a:lnT w="9525" cap="flat" cmpd="sng" algn="ctr">
-                      <a:solidFill>
-                        <a:srgbClr val="D6D6D6"/>
-                      </a:solidFill>
-                      <a:prstDash val="solid"/>
-                      <a:round/>
-                      <a:headEnd type="none" w="med" len="med"/>
-                      <a:tailEnd type="none" w="med" len="med"/>
-                    </a:lnT>
-                    <a:lnB w="9525" cap="flat" cmpd="sng" algn="ctr">
-                      <a:solidFill>
-                        <a:srgbClr val="D6D6D6"/>
-                      </a:solidFill>
-                      <a:prstDash val="solid"/>
-                      <a:round/>
-                      <a:headEnd type="none" w="med" len="med"/>
-                      <a:tailEnd type="none" w="med" len="med"/>
-                    </a:lnB>
-                    <a:noFill/>
-                  </a:tcPr>
-                </a:tc>
-                <a:tc>
-                  <a:txBody>
-                    <a:bodyPr/>
-                    <a:lstStyle/>
-                    <a:p>
-                      <a:pPr marL="0" algn="l" defTabSz="914400" rtl="0" eaLnBrk="1" latinLnBrk="0" hangingPunct="1"/>
-                      <a:r>
-                        <a:rPr sz="800" b="0" kern="1200">
-                          <a:solidFill>
-                            <a:srgbClr val="0A0A0A"/>
-                          </a:solidFill>
-                          <a:latin typeface="微软雅黑" panose="020B0503020204020204" pitchFamily="34" charset="-122"/>
-                          <a:ea typeface="微软雅黑" panose="020B0503020204020204" pitchFamily="34" charset="-122"/>
-                          <a:cs typeface="+mn-cs"/>
-                        </a:rPr>
-                        <a:t>订阅</a:t>
-                      </a:r>
-                    </a:p>
-                  </a:txBody>
-                  <a:tcPr marL="27432" marR="27432" marT="9144" marB="9144">
-                    <a:lnL>
-                      <a:noFill/>
-                    </a:lnL>
-                    <a:lnR>
-                      <a:noFill/>
-                    </a:lnR>
-                    <a:lnT w="9525" cap="flat" cmpd="sng" algn="ctr">
-                      <a:solidFill>
-                        <a:srgbClr val="D6D6D6"/>
-                      </a:solidFill>
-                      <a:prstDash val="solid"/>
-                      <a:round/>
-                      <a:headEnd type="none" w="med" len="med"/>
-                      <a:tailEnd type="none" w="med" len="med"/>
-                    </a:lnT>
-                    <a:lnB w="9525" cap="flat" cmpd="sng" algn="ctr">
-                      <a:solidFill>
-                        <a:srgbClr val="D6D6D6"/>
-                      </a:solidFill>
-                      <a:prstDash val="solid"/>
-                      <a:round/>
-                      <a:headEnd type="none" w="med" len="med"/>
-                      <a:tailEnd type="none" w="med" len="med"/>
-                    </a:lnB>
-                    <a:noFill/>
-                  </a:tcPr>
-                </a:tc>
-                <a:tc>
-                  <a:txBody>
-                    <a:bodyPr/>
-                    <a:lstStyle/>
-                    <a:p>
-                      <a:pPr marL="0" algn="l" defTabSz="914400" rtl="0" eaLnBrk="1" latinLnBrk="0" hangingPunct="1"/>
-                      <a:r>
-                        <a:rPr sz="800" b="0" kern="1200">
-                          <a:solidFill>
-                            <a:srgbClr val="0A0A0A"/>
-                          </a:solidFill>
-                          <a:latin typeface="微软雅黑" panose="020B0503020204020204" pitchFamily="34" charset="-122"/>
-                          <a:ea typeface="微软雅黑" panose="020B0503020204020204" pitchFamily="34" charset="-122"/>
-                          <a:cs typeface="+mn-cs"/>
-                        </a:rPr>
                         <a:t>Subscription TV</a:t>
                       </a:r>
                     </a:p>
                   </a:txBody>
-                  <a:tcPr marL="27432" marR="27432" marT="9144" marB="9144">
+                  <a:tcPr marL="27432" marR="27432" marT="9144" marB="9144" w="1014984">
                     <a:lnL>
                       <a:noFill/>
                     </a:lnL>
@@ -9743,54 +9462,7 @@
                       </a:endParaRPr>
                     </a:p>
                   </a:txBody>
-                  <a:tcPr marL="27432" marR="27432" marT="9144" marB="9144">
-                    <a:lnL>
-                      <a:noFill/>
-                    </a:lnL>
-                    <a:lnR>
-                      <a:noFill/>
-                    </a:lnR>
-                    <a:lnT w="9525" cap="flat" cmpd="sng" algn="ctr">
-                      <a:solidFill>
-                        <a:srgbClr val="D6D6D6"/>
-                      </a:solidFill>
-                      <a:prstDash val="solid"/>
-                      <a:round/>
-                      <a:headEnd type="none" w="med" len="med"/>
-                      <a:tailEnd type="none" w="med" len="med"/>
-                    </a:lnT>
-                    <a:lnB w="9525" cap="flat" cmpd="sng" algn="ctr">
-                      <a:solidFill>
-                        <a:srgbClr val="D6D6D6"/>
-                      </a:solidFill>
-                      <a:prstDash val="solid"/>
-                      <a:round/>
-                      <a:headEnd type="none" w="med" len="med"/>
-                      <a:tailEnd type="none" w="med" len="med"/>
-                    </a:lnB>
-                    <a:noFill/>
-                  </a:tcPr>
-                </a:tc>
-                <a:tc>
-                  <a:txBody>
-                    <a:bodyPr/>
-                    <a:lstStyle/>
-                    <a:p>
-                      <a:pPr marL="0" algn="l" defTabSz="914400" rtl="0" eaLnBrk="1" latinLnBrk="0" hangingPunct="1"/>
-                      <a:r>
-                        <a:rPr sz="800" b="0" kern="1200" dirty="0">
-                          <a:solidFill>
-                            <a:srgbClr val="0A0A0A"/>
-                          </a:solidFill>
-                          <a:latin typeface="微软雅黑" panose="020B0503020204020204" pitchFamily="34" charset="-122"/>
-                          <a:ea typeface="微软雅黑" panose="020B0503020204020204" pitchFamily="34" charset="-122"/>
-                          <a:cs typeface="+mn-cs"/>
-                        </a:rPr>
-                        <a:t>A$8.99</a:t>
-                      </a:r>
-                    </a:p>
-                  </a:txBody>
-                  <a:tcPr marL="27432" marR="27432" marT="9144" marB="9144">
+                  <a:tcPr marL="27432" marR="27432" marT="9144" marB="9144" w="832104">
                     <a:lnL>
                       <a:noFill/>
                     </a:lnL>
@@ -9837,7 +9509,7 @@
                       </a:r>
                     </a:p>
                   </a:txBody>
-                  <a:tcPr marL="27432" marR="27432" marT="9144" marB="9144">
+                  <a:tcPr marL="27432" marR="27432" marT="9144" marB="9144" w="2496312">
                     <a:lnL>
                       <a:noFill/>
                     </a:lnL>
@@ -9865,13 +9537,13 @@
                     <a:noFill/>
                   </a:tcPr>
                 </a:tc>
+              </a:tr>
+              <a:tr h="170373">
                 <a:extLst>
                   <a:ext uri="{0D108BD9-81ED-4DB2-BD59-A6C34878D82A}">
-                    <a16:rowId xmlns:a16="http://schemas.microsoft.com/office/drawing/2014/main" val="10004"/>
+                    <a16:rowId xmlns:a16="http://schemas.microsoft.com/office/drawing/2014/main" val="10005"/>
                   </a:ext>
                 </a:extLst>
-              </a:tr>
-              <a:tr h="170373">
                 <a:tc>
                   <a:txBody>
                     <a:bodyPr/>
@@ -9891,7 +9563,7 @@
                       </a:r>
                     </a:p>
                   </a:txBody>
-                  <a:tcPr marL="27432" marR="27432" marT="9144" marB="9144">
+                  <a:tcPr marL="27432" marR="27432" marT="9144" marB="9144" w="768096">
                     <a:lnL>
                       <a:noFill/>
                     </a:lnL>
@@ -9930,11 +9602,45 @@
                           <a:ea typeface="微软雅黑" panose="020B0503020204020204" pitchFamily="34" charset="-122"/>
                           <a:cs typeface="+mn-cs"/>
                         </a:rPr>
-                        <a:t>PAYROLL ACME PTY LTD</a:t>
-                      </a:r>
-                    </a:p>
-                  </a:txBody>
-                  <a:tcPr marL="27432" marR="27432" marT="9144" marB="9144">
+                        <a:t>A$3,420.50</a:t>
+                      </a:r>
+                    </a:p>
+                  </a:txBody>
+                  <a:tcPr marL="27432" marR="27432" marT="9144" marB="9144" w="914400">
+                    <a:lnL>
+                      <a:noFill/>
+                    </a:lnL>
+                    <a:lnR>
+                      <a:noFill/>
+                    </a:lnR>
+                    <a:lnT w="9525" cap="flat" cmpd="sng" algn="ctr">
+                      <a:solidFill>
+                        <a:srgbClr val="D6D6D6"/>
+                      </a:solidFill>
+                      <a:prstDash val="solid"/>
+                      <a:round/>
+                      <a:headEnd type="none" w="med" len="med"/>
+                      <a:tailEnd type="none" w="med" len="med"/>
+                    </a:lnT>
+                    <a:lnB w="9525">
+                      <a:solidFill>
+                        <a:srgbClr val="D6D6D6"/>
+                      </a:solidFill>
+                    </a:lnB>
+                    <a:noFill/>
+                  </a:tcPr>
+                </a:tc>
+                <a:tc>
+                  <a:txBody>
+                    <a:bodyPr/>
+                    <a:lstStyle/>
+                    <a:p>
+                      <a:r>
+                        <a:t>PAYROLL DEPOSIT ACME PTY LTD</a:t>
+                      </a:r>
+                    </a:p>
+                  </a:txBody>
+                  <a:tcPr marL="27432" marR="27432" marT="9144" marB="9144" w="2761488">
                     <a:lnL>
                       <a:noFill/>
                     </a:lnL>
@@ -9977,7 +9683,7 @@
                       </a:r>
                     </a:p>
                   </a:txBody>
-                  <a:tcPr marL="27432" marR="27432" marT="9144" marB="9144">
+                  <a:tcPr marL="27432" marR="27432" marT="9144" marB="9144" w="1225296">
                     <a:lnL>
                       <a:noFill/>
                     </a:lnL>
@@ -10020,50 +9726,7 @@
                       </a:r>
                     </a:p>
                   </a:txBody>
-                  <a:tcPr marL="27432" marR="27432" marT="9144" marB="9144">
-                    <a:lnL>
-                      <a:noFill/>
-                    </a:lnL>
-                    <a:lnR>
-                      <a:noFill/>
-                    </a:lnR>
-                    <a:lnT w="9525" cap="flat" cmpd="sng" algn="ctr">
-                      <a:solidFill>
-                        <a:srgbClr val="D6D6D6"/>
-                      </a:solidFill>
-                      <a:prstDash val="solid"/>
-                      <a:round/>
-                      <a:headEnd type="none" w="med" len="med"/>
-                      <a:tailEnd type="none" w="med" len="med"/>
-                    </a:lnT>
-                    <a:lnB w="9525">
-                      <a:solidFill>
-                        <a:srgbClr val="D6D6D6"/>
-                      </a:solidFill>
-                    </a:lnB>
-                    <a:noFill/>
-                  </a:tcPr>
-                </a:tc>
-                <a:tc>
-                  <a:txBody>
-                    <a:bodyPr/>
-                    <a:lstStyle/>
-                    <a:p>
-                      <a:pPr marL="0" algn="l" defTabSz="914400" rtl="0" eaLnBrk="1" latinLnBrk="0" hangingPunct="1"/>
-                      <a:r>
-                        <a:rPr sz="800" b="0" kern="1200">
-                          <a:solidFill>
-                            <a:srgbClr val="0A0A0A"/>
-                          </a:solidFill>
-                          <a:latin typeface="微软雅黑" panose="020B0503020204020204" pitchFamily="34" charset="-122"/>
-                          <a:ea typeface="微软雅黑" panose="020B0503020204020204" pitchFamily="34" charset="-122"/>
-                          <a:cs typeface="+mn-cs"/>
-                        </a:rPr>
-                        <a:t>收入</a:t>
-                      </a:r>
-                    </a:p>
-                  </a:txBody>
-                  <a:tcPr marL="27432" marR="27432" marT="9144" marB="9144">
+                  <a:tcPr marL="27432" marR="27432" marT="9144" marB="9144" w="886968">
                     <a:lnL>
                       <a:noFill/>
                     </a:lnL>
@@ -10114,7 +9777,7 @@
                       </a:endParaRPr>
                     </a:p>
                   </a:txBody>
-                  <a:tcPr marL="27432" marR="27432" marT="9144" marB="9144">
+                  <a:tcPr marL="27432" marR="27432" marT="9144" marB="9144" w="1014984">
                     <a:lnL>
                       <a:noFill/>
                     </a:lnL>
@@ -10157,50 +9820,7 @@
                       </a:r>
                     </a:p>
                   </a:txBody>
-                  <a:tcPr marL="27432" marR="27432" marT="9144" marB="9144">
-                    <a:lnL>
-                      <a:noFill/>
-                    </a:lnL>
-                    <a:lnR>
-                      <a:noFill/>
-                    </a:lnR>
-                    <a:lnT w="9525" cap="flat" cmpd="sng" algn="ctr">
-                      <a:solidFill>
-                        <a:srgbClr val="D6D6D6"/>
-                      </a:solidFill>
-                      <a:prstDash val="solid"/>
-                      <a:round/>
-                      <a:headEnd type="none" w="med" len="med"/>
-                      <a:tailEnd type="none" w="med" len="med"/>
-                    </a:lnT>
-                    <a:lnB w="9525">
-                      <a:solidFill>
-                        <a:srgbClr val="D6D6D6"/>
-                      </a:solidFill>
-                    </a:lnB>
-                    <a:noFill/>
-                  </a:tcPr>
-                </a:tc>
-                <a:tc>
-                  <a:txBody>
-                    <a:bodyPr/>
-                    <a:lstStyle/>
-                    <a:p>
-                      <a:pPr marL="0" algn="l" defTabSz="914400" rtl="0" eaLnBrk="1" latinLnBrk="0" hangingPunct="1"/>
-                      <a:r>
-                        <a:rPr sz="800" b="0" kern="1200">
-                          <a:solidFill>
-                            <a:srgbClr val="0A0A0A"/>
-                          </a:solidFill>
-                          <a:latin typeface="微软雅黑" panose="020B0503020204020204" pitchFamily="34" charset="-122"/>
-                          <a:ea typeface="微软雅黑" panose="020B0503020204020204" pitchFamily="34" charset="-122"/>
-                          <a:cs typeface="+mn-cs"/>
-                        </a:rPr>
-                        <a:t>A$3,420.50</a:t>
-                      </a:r>
-                    </a:p>
-                  </a:txBody>
-                  <a:tcPr marL="27432" marR="27432" marT="9144" marB="9144">
+                  <a:tcPr marL="27432" marR="27432" marT="9144" marB="9144" w="832104">
                     <a:lnL>
                       <a:noFill/>
                     </a:lnL>
@@ -10295,7 +9915,7 @@
                       </a:endParaRPr>
                     </a:p>
                   </a:txBody>
-                  <a:tcPr marL="27432" marR="27432" marT="9144" marB="9144">
+                  <a:tcPr marL="27432" marR="27432" marT="9144" marB="9144" w="2496312">
                     <a:lnL>
                       <a:noFill/>
                     </a:lnL>
@@ -10319,11 +9939,6 @@
                     <a:noFill/>
                   </a:tcPr>
                 </a:tc>
-                <a:extLst>
-                  <a:ext uri="{0D108BD9-81ED-4DB2-BD59-A6C34878D82A}">
-                    <a16:rowId xmlns:a16="http://schemas.microsoft.com/office/drawing/2014/main" val="10005"/>
-                  </a:ext>
-                </a:extLst>
               </a:tr>
             </a:tbl>
           </a:graphicData>
@@ -12665,35 +12280,34 @@
       </p:graphicFrame>
       <p:sp>
         <p:nvSpPr>
-          <p:cNvPr id="7" name="矩形 6">
-            <a:extLst>
-              <a:ext uri="{FF2B5EF4-FFF2-40B4-BE49-F238E27FC236}">
-                <a16:creationId xmlns:a16="http://schemas.microsoft.com/office/drawing/2014/main" id="{1B718013-4527-4C93-A16A-71AD3CA129A4}"/>
-              </a:ext>
-            </a:extLst>
-          </p:cNvPr>
+          <p:cNvPr id="21" name="p2-label-bg"/>
           <p:cNvSpPr/>
           <p:nvPr/>
         </p:nvSpPr>
         <p:spPr>
           <a:xfrm>
-            <a:off x="822960" y="4777740"/>
-            <a:ext cx="777240" cy="1341120"/>
+            <a:off x="822960" y="4773168"/>
+            <a:ext cx="777240" cy="1344168"/>
           </a:xfrm>
           <a:prstGeom prst="rect">
             <a:avLst/>
           </a:prstGeom>
+          <a:solidFill>
+            <a:srgbClr val="E3EBF4"/>
+          </a:solidFill>
+          <a:ln>
+            <a:noFill/>
+          </a:ln>
+          <a:effectLst/>
         </p:spPr>
         <p:style>
-          <a:lnRef idx="2">
-            <a:schemeClr val="accent1">
-              <a:shade val="50000"/>
-            </a:schemeClr>
+          <a:lnRef idx="1">
+            <a:schemeClr val="accent1"/>
           </a:lnRef>
-          <a:fillRef idx="1">
+          <a:fillRef idx="3">
             <a:schemeClr val="accent1"/>
           </a:fillRef>
-          <a:effectRef idx="0">
+          <a:effectRef idx="2">
             <a:schemeClr val="accent1"/>
           </a:effectRef>
           <a:fontRef idx="minor">
@@ -12705,44 +12319,39 @@
           <a:lstStyle/>
           <a:p>
             <a:pPr algn="ctr"/>
-            <a:r>
-              <a:rPr lang="zh-CN" altLang="en-US" dirty="0"/>
-              <a:t>用户维度</a:t>
-            </a:r>
           </a:p>
         </p:txBody>
       </p:sp>
       <p:sp>
         <p:nvSpPr>
-          <p:cNvPr id="20" name="矩形 19">
-            <a:extLst>
-              <a:ext uri="{FF2B5EF4-FFF2-40B4-BE49-F238E27FC236}">
-                <a16:creationId xmlns:a16="http://schemas.microsoft.com/office/drawing/2014/main" id="{3FCD25F0-EBC1-4E3E-A4AA-77C198517982}"/>
-              </a:ext>
-            </a:extLst>
-          </p:cNvPr>
+          <p:cNvPr id="22" name="p2-label-bar"/>
           <p:cNvSpPr/>
           <p:nvPr/>
         </p:nvSpPr>
         <p:spPr>
           <a:xfrm>
-            <a:off x="6461187" y="4792980"/>
-            <a:ext cx="777240" cy="1341120"/>
+            <a:off x="822960" y="4773168"/>
+            <a:ext cx="54864" cy="1344168"/>
           </a:xfrm>
           <a:prstGeom prst="rect">
             <a:avLst/>
           </a:prstGeom>
+          <a:solidFill>
+            <a:srgbClr val="1F4E79"/>
+          </a:solidFill>
+          <a:ln>
+            <a:noFill/>
+          </a:ln>
+          <a:effectLst/>
         </p:spPr>
         <p:style>
-          <a:lnRef idx="2">
-            <a:schemeClr val="accent1">
-              <a:shade val="50000"/>
-            </a:schemeClr>
+          <a:lnRef idx="1">
+            <a:schemeClr val="accent1"/>
           </a:lnRef>
-          <a:fillRef idx="1">
+          <a:fillRef idx="3">
             <a:schemeClr val="accent1"/>
           </a:fillRef>
-          <a:effectRef idx="0">
+          <a:effectRef idx="2">
             <a:schemeClr val="accent1"/>
           </a:effectRef>
           <a:fontRef idx="minor">
@@ -12754,8 +12363,162 @@
           <a:lstStyle/>
           <a:p>
             <a:pPr algn="ctr"/>
+          </a:p>
+        </p:txBody>
+      </p:sp>
+      <p:sp>
+        <p:nvSpPr>
+          <p:cNvPr id="23" name="p2-label-text"/>
+          <p:cNvSpPr txBox="1"/>
+          <p:nvPr/>
+        </p:nvSpPr>
+        <p:spPr>
+          <a:xfrm>
+            <a:off x="877824" y="4773168"/>
+            <a:ext cx="722376" cy="1344168"/>
+          </a:xfrm>
+          <a:prstGeom prst="rect">
+            <a:avLst/>
+          </a:prstGeom>
+          <a:noFill/>
+        </p:spPr>
+        <p:txBody>
+          <a:bodyPr wrap="square" anchor="ctr" vert="eaVert">
+            <a:noAutofit/>
+          </a:bodyPr>
+          <a:lstStyle/>
+          <a:p>
+            <a:pPr algn="ctr"/>
             <a:r>
-              <a:rPr lang="zh-CN" altLang="en-US" dirty="0"/>
+              <a:rPr sz="1050" b="1">
+                <a:solidFill>
+                  <a:srgbClr val="0A0A0A"/>
+                </a:solidFill>
+                <a:latin typeface="微软雅黑"/>
+              </a:rPr>
+              <a:t>用户维度</a:t>
+            </a:r>
+          </a:p>
+        </p:txBody>
+      </p:sp>
+      <p:sp>
+        <p:nvSpPr>
+          <p:cNvPr id="24" name="p2-label-bg"/>
+          <p:cNvSpPr/>
+          <p:nvPr/>
+        </p:nvSpPr>
+        <p:spPr>
+          <a:xfrm>
+            <a:off x="6464808" y="4791456"/>
+            <a:ext cx="777240" cy="1344168"/>
+          </a:xfrm>
+          <a:prstGeom prst="rect">
+            <a:avLst/>
+          </a:prstGeom>
+          <a:solidFill>
+            <a:srgbClr val="E3EBF4"/>
+          </a:solidFill>
+          <a:ln>
+            <a:noFill/>
+          </a:ln>
+          <a:effectLst/>
+        </p:spPr>
+        <p:style>
+          <a:lnRef idx="1">
+            <a:schemeClr val="accent1"/>
+          </a:lnRef>
+          <a:fillRef idx="3">
+            <a:schemeClr val="accent1"/>
+          </a:fillRef>
+          <a:effectRef idx="2">
+            <a:schemeClr val="accent1"/>
+          </a:effectRef>
+          <a:fontRef idx="minor">
+            <a:schemeClr val="lt1"/>
+          </a:fontRef>
+        </p:style>
+        <p:txBody>
+          <a:bodyPr rtlCol="0" anchor="ctr"/>
+          <a:lstStyle/>
+          <a:p>
+            <a:pPr algn="ctr"/>
+          </a:p>
+        </p:txBody>
+      </p:sp>
+      <p:sp>
+        <p:nvSpPr>
+          <p:cNvPr id="25" name="p2-label-bar"/>
+          <p:cNvSpPr/>
+          <p:nvPr/>
+        </p:nvSpPr>
+        <p:spPr>
+          <a:xfrm>
+            <a:off x="6464808" y="4791456"/>
+            <a:ext cx="54864" cy="1344168"/>
+          </a:xfrm>
+          <a:prstGeom prst="rect">
+            <a:avLst/>
+          </a:prstGeom>
+          <a:solidFill>
+            <a:srgbClr val="1F4E79"/>
+          </a:solidFill>
+          <a:ln>
+            <a:noFill/>
+          </a:ln>
+          <a:effectLst/>
+        </p:spPr>
+        <p:style>
+          <a:lnRef idx="1">
+            <a:schemeClr val="accent1"/>
+          </a:lnRef>
+          <a:fillRef idx="3">
+            <a:schemeClr val="accent1"/>
+          </a:fillRef>
+          <a:effectRef idx="2">
+            <a:schemeClr val="accent1"/>
+          </a:effectRef>
+          <a:fontRef idx="minor">
+            <a:schemeClr val="lt1"/>
+          </a:fontRef>
+        </p:style>
+        <p:txBody>
+          <a:bodyPr rtlCol="0" anchor="ctr"/>
+          <a:lstStyle/>
+          <a:p>
+            <a:pPr algn="ctr"/>
+          </a:p>
+        </p:txBody>
+      </p:sp>
+      <p:sp>
+        <p:nvSpPr>
+          <p:cNvPr id="26" name="p2-label-text"/>
+          <p:cNvSpPr txBox="1"/>
+          <p:nvPr/>
+        </p:nvSpPr>
+        <p:spPr>
+          <a:xfrm>
+            <a:off x="6519672" y="4791456"/>
+            <a:ext cx="722376" cy="1344168"/>
+          </a:xfrm>
+          <a:prstGeom prst="rect">
+            <a:avLst/>
+          </a:prstGeom>
+          <a:noFill/>
+        </p:spPr>
+        <p:txBody>
+          <a:bodyPr wrap="square" anchor="ctr" vert="eaVert">
+            <a:noAutofit/>
+          </a:bodyPr>
+          <a:lstStyle/>
+          <a:p>
+            <a:pPr algn="ctr"/>
+            <a:r>
+              <a:rPr sz="1050" b="1">
+                <a:solidFill>
+                  <a:srgbClr val="0A0A0A"/>
+                </a:solidFill>
+                <a:latin typeface="微软雅黑"/>
+              </a:rPr>
               <a:t>单笔借款维度</a:t>
             </a:r>
           </a:p>
@@ -15775,253 +15538,115 @@
           </a:bodyPr>
           <a:lstStyle/>
           <a:p>
-            <a:pPr>
+            <a:pPr algn="l">
               <a:lnSpc>
-                <a:spcPct val="150000"/>
+                <a:spcPct val="100000"/>
               </a:lnSpc>
               <a:spcAft>
-                <a:spcPts val="300"/>
+                <a:spcPts val="400"/>
               </a:spcAft>
             </a:pPr>
             <a:r>
-              <a:rPr sz="900" b="0" dirty="0">
+              <a:rPr sz="900" b="1">
+                <a:solidFill>
+                  <a:srgbClr val="1F4E79"/>
+                </a:solidFill>
+                <a:latin typeface="微软雅黑"/>
+              </a:rPr>
+              <a:t>① 监控</a:t>
+            </a:r>
+            <a:r>
+              <a:rPr sz="900" b="0">
                 <a:solidFill>
                   <a:srgbClr val="3D3C3A"/>
                 </a:solidFill>
                 <a:latin typeface="微软雅黑"/>
-                <a:ea typeface="微软雅黑"/>
               </a:rPr>
-              <a:t>① </a:t>
+              <a:t>：捕捉分类批量漂移、同一交易对手归类不一致、覆盖率或命中率明显下降、新描述未被任何引擎识别等异常信号。</a:t>
+            </a:r>
+          </a:p>
+          <a:p>
+            <a:pPr algn="l">
+              <a:lnSpc>
+                <a:spcPct val="100000"/>
+              </a:lnSpc>
+              <a:spcAft>
+                <a:spcPts val="400"/>
+              </a:spcAft>
+            </a:pPr>
+            <a:r>
+              <a:rPr sz="900" b="1">
+                <a:solidFill>
+                  <a:srgbClr val="1F4E79"/>
+                </a:solidFill>
+                <a:latin typeface="微软雅黑"/>
+              </a:rPr>
+              <a:t>② 定位</a:t>
             </a:r>
             <a:r>
-              <a:rPr sz="900" b="0" dirty="0" err="1">
+              <a:rPr sz="900" b="0">
                 <a:solidFill>
                   <a:srgbClr val="3D3C3A"/>
                 </a:solidFill>
                 <a:latin typeface="微软雅黑"/>
-                <a:ea typeface="微软雅黑"/>
               </a:rPr>
-              <a:t>监控：捕捉分类批量漂移、同一交易对手归类不一致、覆盖率或命中率明显下降、新描述未被任何引擎识别等异常信号</a:t>
+              <a:t>：对异常逐笔细挖交易描述、金额、方向、交易对手、命中引擎和分类依据，归类为五类原因。</a:t>
+            </a:r>
+          </a:p>
+          <a:p>
+            <a:pPr algn="l">
+              <a:lnSpc>
+                <a:spcPct val="100000"/>
+              </a:lnSpc>
+              <a:spcAft>
+                <a:spcPts val="400"/>
+              </a:spcAft>
+            </a:pPr>
+            <a:r>
+              <a:rPr sz="900" b="1">
+                <a:solidFill>
+                  <a:srgbClr val="1F4E79"/>
+                </a:solidFill>
+                <a:latin typeface="微软雅黑"/>
+              </a:rPr>
+              <a:t>③ 输出</a:t>
             </a:r>
             <a:r>
-              <a:rPr sz="900" b="0" dirty="0">
+              <a:rPr sz="900" b="0">
                 <a:solidFill>
                   <a:srgbClr val="3D3C3A"/>
                 </a:solidFill>
                 <a:latin typeface="微软雅黑"/>
-                <a:ea typeface="微软雅黑"/>
               </a:rPr>
-              <a:t>。</a:t>
+              <a:t>：生成按优先级排序的诊断报告，直接标明问题引擎、需检查的规则、缺失的商户／关键词及应补充的知识库，供业务确认。</a:t>
             </a:r>
           </a:p>
           <a:p>
-            <a:pPr>
+            <a:pPr algn="l">
               <a:lnSpc>
-                <a:spcPct val="150000"/>
+                <a:spcPct val="100000"/>
               </a:lnSpc>
               <a:spcAft>
-                <a:spcPts val="300"/>
+                <a:spcPts val="0"/>
               </a:spcAft>
             </a:pPr>
             <a:r>
-              <a:rPr sz="900" b="0" dirty="0">
+              <a:rPr sz="900" b="1">
+                <a:solidFill>
+                  <a:srgbClr val="1F4E79"/>
+                </a:solidFill>
+                <a:latin typeface="微软雅黑"/>
+              </a:rPr>
+              <a:t>效果</a:t>
+            </a:r>
+            <a:r>
+              <a:rPr sz="900" b="0">
                 <a:solidFill>
                   <a:srgbClr val="3D3C3A"/>
                 </a:solidFill>
                 <a:latin typeface="微软雅黑"/>
-                <a:ea typeface="微软雅黑"/>
               </a:rPr>
-              <a:t>② </a:t>
-            </a:r>
-            <a:r>
-              <a:rPr sz="900" b="0" dirty="0" err="1">
-                <a:solidFill>
-                  <a:srgbClr val="3D3C3A"/>
-                </a:solidFill>
-                <a:latin typeface="微软雅黑"/>
-                <a:ea typeface="微软雅黑"/>
-              </a:rPr>
-              <a:t>定位：对异常逐笔细挖交易描述、金额、方向、交易对手、命中引擎和分类依据，归类为五类原因</a:t>
-            </a:r>
-            <a:r>
-              <a:rPr sz="900" b="0" dirty="0">
-                <a:solidFill>
-                  <a:srgbClr val="3D3C3A"/>
-                </a:solidFill>
-                <a:latin typeface="微软雅黑"/>
-                <a:ea typeface="微软雅黑"/>
-              </a:rPr>
-              <a:t>。</a:t>
-            </a:r>
-          </a:p>
-          <a:p>
-            <a:pPr>
-              <a:lnSpc>
-                <a:spcPct val="150000"/>
-              </a:lnSpc>
-              <a:spcAft>
-                <a:spcPts val="300"/>
-              </a:spcAft>
-            </a:pPr>
-            <a:r>
-              <a:rPr sz="900" b="0" dirty="0">
-                <a:solidFill>
-                  <a:srgbClr val="3D3C3A"/>
-                </a:solidFill>
-                <a:latin typeface="微软雅黑"/>
-                <a:ea typeface="微软雅黑"/>
-              </a:rPr>
-              <a:t>③ </a:t>
-            </a:r>
-            <a:r>
-              <a:rPr sz="900" b="0" dirty="0" err="1">
-                <a:solidFill>
-                  <a:srgbClr val="3D3C3A"/>
-                </a:solidFill>
-                <a:latin typeface="微软雅黑"/>
-                <a:ea typeface="微软雅黑"/>
-              </a:rPr>
-              <a:t>输出：生成按优先级排序的诊断报告，直接标明问题引擎、需检查的规则、缺失的商户／关键词及应补充的知识库，供业务确认</a:t>
-            </a:r>
-            <a:r>
-              <a:rPr sz="900" b="0" dirty="0">
-                <a:solidFill>
-                  <a:srgbClr val="3D3C3A"/>
-                </a:solidFill>
-                <a:latin typeface="微软雅黑"/>
-                <a:ea typeface="微软雅黑"/>
-              </a:rPr>
-              <a:t>。</a:t>
-            </a:r>
-          </a:p>
-          <a:p>
-            <a:pPr>
-              <a:lnSpc>
-                <a:spcPct val="150000"/>
-              </a:lnSpc>
-              <a:spcAft>
-                <a:spcPts val="300"/>
-              </a:spcAft>
-            </a:pPr>
-            <a:r>
-              <a:rPr sz="900" b="0" dirty="0" err="1">
-                <a:solidFill>
-                  <a:srgbClr val="3D3C3A"/>
-                </a:solidFill>
-                <a:latin typeface="微软雅黑"/>
-                <a:ea typeface="微软雅黑"/>
-              </a:rPr>
-              <a:t>效果：知识库随注册商户的新增、变更、失效持续更新，并从真实交易中补齐注册数据未覆盖的支付描述和商户别名。由此形成"分类</a:t>
-            </a:r>
-            <a:r>
-              <a:rPr sz="900" b="0" dirty="0">
-                <a:solidFill>
-                  <a:srgbClr val="3D3C3A"/>
-                </a:solidFill>
-                <a:latin typeface="微软雅黑"/>
-                <a:ea typeface="微软雅黑"/>
-              </a:rPr>
-              <a:t> → </a:t>
-            </a:r>
-            <a:r>
-              <a:rPr sz="900" b="0" dirty="0" err="1">
-                <a:solidFill>
-                  <a:srgbClr val="3D3C3A"/>
-                </a:solidFill>
-                <a:latin typeface="微软雅黑"/>
-                <a:ea typeface="微软雅黑"/>
-              </a:rPr>
-              <a:t>监控</a:t>
-            </a:r>
-            <a:r>
-              <a:rPr sz="900" b="0" dirty="0">
-                <a:solidFill>
-                  <a:srgbClr val="3D3C3A"/>
-                </a:solidFill>
-                <a:latin typeface="微软雅黑"/>
-                <a:ea typeface="微软雅黑"/>
-              </a:rPr>
-              <a:t> → </a:t>
-            </a:r>
-            <a:r>
-              <a:rPr sz="900" b="0" dirty="0" err="1">
-                <a:solidFill>
-                  <a:srgbClr val="3D3C3A"/>
-                </a:solidFill>
-                <a:latin typeface="微软雅黑"/>
-                <a:ea typeface="微软雅黑"/>
-              </a:rPr>
-              <a:t>定位</a:t>
-            </a:r>
-            <a:r>
-              <a:rPr sz="900" b="0" dirty="0">
-                <a:solidFill>
-                  <a:srgbClr val="3D3C3A"/>
-                </a:solidFill>
-                <a:latin typeface="微软雅黑"/>
-                <a:ea typeface="微软雅黑"/>
-              </a:rPr>
-              <a:t> → </a:t>
-            </a:r>
-            <a:r>
-              <a:rPr sz="900" b="0" dirty="0" err="1">
-                <a:solidFill>
-                  <a:srgbClr val="3D3C3A"/>
-                </a:solidFill>
-                <a:latin typeface="微软雅黑"/>
-                <a:ea typeface="微软雅黑"/>
-              </a:rPr>
-              <a:t>输出</a:t>
-            </a:r>
-            <a:r>
-              <a:rPr sz="900" b="0" dirty="0">
-                <a:solidFill>
-                  <a:srgbClr val="3D3C3A"/>
-                </a:solidFill>
-                <a:latin typeface="微软雅黑"/>
-                <a:ea typeface="微软雅黑"/>
-              </a:rPr>
-              <a:t> → </a:t>
-            </a:r>
-            <a:r>
-              <a:rPr sz="900" b="0" dirty="0" err="1">
-                <a:solidFill>
-                  <a:srgbClr val="3D3C3A"/>
-                </a:solidFill>
-                <a:latin typeface="微软雅黑"/>
-                <a:ea typeface="微软雅黑"/>
-              </a:rPr>
-              <a:t>更新</a:t>
-            </a:r>
-            <a:r>
-              <a:rPr sz="900" b="0" dirty="0">
-                <a:solidFill>
-                  <a:srgbClr val="3D3C3A"/>
-                </a:solidFill>
-                <a:latin typeface="微软雅黑"/>
-                <a:ea typeface="微软雅黑"/>
-              </a:rPr>
-              <a:t> → </a:t>
-            </a:r>
-            <a:r>
-              <a:rPr sz="900" b="0" dirty="0" err="1">
-                <a:solidFill>
-                  <a:srgbClr val="3D3C3A"/>
-                </a:solidFill>
-                <a:latin typeface="微软雅黑"/>
-                <a:ea typeface="微软雅黑"/>
-              </a:rPr>
-              <a:t>再分类"的持续优化闭环</a:t>
-            </a:r>
-            <a:r>
-              <a:rPr sz="900" b="0" dirty="0">
-                <a:solidFill>
-                  <a:srgbClr val="3D3C3A"/>
-                </a:solidFill>
-                <a:latin typeface="微软雅黑"/>
-                <a:ea typeface="微软雅黑"/>
-              </a:rPr>
-              <a:t>。</a:t>
+              <a:t>：知识库随注册商户的新增、变更、失效持续更新，并从真实交易中补齐注册数据未覆盖的支付描述和商户别名。由此形成“分类 → 监控 → 定位 → 输出 → 更新 → 再分类”的持续优化闭环。</a:t>
             </a:r>
           </a:p>
         </p:txBody>
@@ -20081,7 +19706,7 @@
         </p:nvSpPr>
         <p:spPr>
           <a:xfrm>
-            <a:off x="192023" y="1545337"/>
+            <a:off x="192023" y="1069849"/>
             <a:ext cx="64008" cy="256032"/>
           </a:xfrm>
           <a:prstGeom prst="rect">
@@ -20155,7 +19780,7 @@
         </p:nvSpPr>
         <p:spPr>
           <a:xfrm>
-            <a:off x="329182" y="1527048"/>
+            <a:off x="329182" y="1051560"/>
             <a:ext cx="4023359" cy="292608"/>
           </a:xfrm>
           <a:prstGeom prst="rect">
@@ -22770,7 +22395,7 @@
         </p:nvSpPr>
         <p:spPr>
           <a:xfrm>
-            <a:off x="420623" y="1911097"/>
+            <a:off x="420623" y="1965961"/>
             <a:ext cx="2148840" cy="2148840"/>
           </a:xfrm>
           <a:prstGeom prst="ellipse">
@@ -22848,7 +22473,7 @@
         </p:nvSpPr>
         <p:spPr>
           <a:xfrm>
-            <a:off x="1609343" y="1911097"/>
+            <a:off x="1609343" y="1965961"/>
             <a:ext cx="2148840" cy="2148840"/>
           </a:xfrm>
           <a:prstGeom prst="ellipse">
@@ -22926,7 +22551,7 @@
         </p:nvSpPr>
         <p:spPr>
           <a:xfrm>
-            <a:off x="283463" y="2848357"/>
+            <a:off x="283463" y="2903221"/>
             <a:ext cx="914400" cy="274320"/>
           </a:xfrm>
           <a:prstGeom prst="rect">
@@ -22985,7 +22610,7 @@
         </p:nvSpPr>
         <p:spPr>
           <a:xfrm>
-            <a:off x="2980943" y="2848357"/>
+            <a:off x="2980943" y="2903221"/>
             <a:ext cx="914400" cy="274320"/>
           </a:xfrm>
           <a:prstGeom prst="rect">
@@ -23044,7 +22669,7 @@
         </p:nvSpPr>
         <p:spPr>
           <a:xfrm>
-            <a:off x="1289303" y="2784349"/>
+            <a:off x="1289303" y="2839213"/>
             <a:ext cx="685800" cy="274320"/>
           </a:xfrm>
           <a:prstGeom prst="rect">
@@ -23103,7 +22728,7 @@
         </p:nvSpPr>
         <p:spPr>
           <a:xfrm>
-            <a:off x="1133855" y="3076957"/>
+            <a:off x="1133855" y="3131821"/>
             <a:ext cx="960120" cy="201168"/>
           </a:xfrm>
           <a:prstGeom prst="rect">

--- a/银行流水分享_V1.7.pptx
+++ b/银行流水分享_V1.7.pptx
@@ -9965,22 +9965,22 @@
           </p:nvPr>
         </p:nvGraphicFramePr>
         <p:xfrm>
-          <a:off x="2024032" y="4512752"/>
-          <a:ext cx="3127663" cy="2293486"/>
+          <a:off x="2020824" y="4517136"/>
+          <a:ext cx="3127248" cy="2293486"/>
         </p:xfrm>
         <a:graphic>
           <a:graphicData uri="http://schemas.openxmlformats.org/drawingml/2006/table">
             <a:tbl>
               <a:tblPr/>
               <a:tblGrid>
-                <a:gridCol w="1252461">
+                <a:gridCol w="1252728">
                   <a:extLst>
                     <a:ext uri="{9D8B030D-6E8A-4147-A177-3AD203B41FA5}">
                       <a16:colId xmlns:a16="http://schemas.microsoft.com/office/drawing/2014/main" val="20000"/>
                     </a:ext>
                   </a:extLst>
                 </a:gridCol>
-                <a:gridCol w="1875202">
+                <a:gridCol w="1875434">
                   <a:extLst>
                     <a:ext uri="{9D8B030D-6E8A-4147-A177-3AD203B41FA5}">
                       <a16:colId xmlns:a16="http://schemas.microsoft.com/office/drawing/2014/main" val="20001"/>
@@ -10014,7 +10014,7 @@
                       </a:endParaRPr>
                     </a:p>
                   </a:txBody>
-                  <a:tcPr marL="27432" marR="27432" marT="9144" marB="9144">
+                  <a:tcPr marL="27432" marR="27432" marT="9144" marB="9144" w="1252728">
                     <a:lnL>
                       <a:noFill/>
                     </a:lnL>
@@ -10057,7 +10057,7 @@
                       </a:endParaRPr>
                     </a:p>
                   </a:txBody>
-                  <a:tcPr marL="27432" marR="27432" marT="9144" marB="9144">
+                  <a:tcPr marL="27432" marR="27432" marT="9144" marB="9144" w="1875434">
                     <a:lnL>
                       <a:noFill/>
                     </a:lnL>
@@ -10107,7 +10107,7 @@
                       </a:endParaRPr>
                     </a:p>
                   </a:txBody>
-                  <a:tcPr marL="27432" marR="27432" marT="9144" marB="9144">
+                  <a:tcPr marL="27432" marR="27432" marT="9144" marB="9144" w="1252728">
                     <a:lnL>
                       <a:noFill/>
                     </a:lnL>
@@ -10149,7 +10149,7 @@
                       </a:r>
                     </a:p>
                   </a:txBody>
-                  <a:tcPr marL="27432" marR="27432" marT="9144" marB="9144">
+                  <a:tcPr marL="27432" marR="27432" marT="9144" marB="9144" w="1875434">
                     <a:lnL>
                       <a:noFill/>
                     </a:lnL>
@@ -10215,7 +10215,7 @@
                       </a:endParaRPr>
                     </a:p>
                   </a:txBody>
-                  <a:tcPr marL="27432" marR="27432" marT="9144" marB="9144">
+                  <a:tcPr marL="27432" marR="27432" marT="9144" marB="9144" w="1252728">
                     <a:lnL>
                       <a:noFill/>
                     </a:lnL>
@@ -10257,7 +10257,7 @@
                       </a:r>
                     </a:p>
                   </a:txBody>
-                  <a:tcPr marL="27432" marR="27432" marT="9144" marB="9144">
+                  <a:tcPr marL="27432" marR="27432" marT="9144" marB="9144" w="1875434">
                     <a:lnL>
                       <a:noFill/>
                     </a:lnL>
@@ -10306,7 +10306,7 @@
                       </a:r>
                     </a:p>
                   </a:txBody>
-                  <a:tcPr marL="27432" marR="27432" marT="9144" marB="9144">
+                  <a:tcPr marL="27432" marR="27432" marT="9144" marB="9144" w="1252728">
                     <a:lnL>
                       <a:noFill/>
                     </a:lnL>
@@ -10348,7 +10348,7 @@
                       </a:r>
                     </a:p>
                   </a:txBody>
-                  <a:tcPr marL="27432" marR="27432" marT="9144" marB="9144">
+                  <a:tcPr marL="27432" marR="27432" marT="9144" marB="9144" w="1875434">
                     <a:lnL>
                       <a:noFill/>
                     </a:lnL>
@@ -10404,7 +10404,7 @@
                       </a:endParaRPr>
                     </a:p>
                   </a:txBody>
-                  <a:tcPr marL="27432" marR="27432" marT="9144" marB="9144">
+                  <a:tcPr marL="27432" marR="27432" marT="9144" marB="9144" w="1252728">
                     <a:lnL>
                       <a:noFill/>
                     </a:lnL>
@@ -10450,7 +10450,7 @@
                       </a:r>
                     </a:p>
                   </a:txBody>
-                  <a:tcPr marL="27432" marR="27432" marT="9144" marB="9144">
+                  <a:tcPr marL="27432" marR="27432" marT="9144" marB="9144" w="1875434">
                     <a:lnL>
                       <a:noFill/>
                     </a:lnL>
@@ -10503,7 +10503,7 @@
                       </a:r>
                     </a:p>
                   </a:txBody>
-                  <a:tcPr marL="27432" marR="27432" marT="9144" marB="9144">
+                  <a:tcPr marL="27432" marR="27432" marT="9144" marB="9144" w="1252728">
                     <a:lnL>
                       <a:noFill/>
                     </a:lnL>
@@ -10549,7 +10549,7 @@
                       </a:r>
                     </a:p>
                   </a:txBody>
-                  <a:tcPr marL="27432" marR="27432" marT="9144" marB="9144">
+                  <a:tcPr marL="27432" marR="27432" marT="9144" marB="9144" w="1875434">
                     <a:lnL>
                       <a:noFill/>
                     </a:lnL>
@@ -10609,7 +10609,7 @@
                       </a:endParaRPr>
                     </a:p>
                   </a:txBody>
-                  <a:tcPr marL="27432" marR="27432" marT="9144" marB="9144">
+                  <a:tcPr marL="27432" marR="27432" marT="9144" marB="9144" w="1252728">
                     <a:lnL>
                       <a:noFill/>
                     </a:lnL>
@@ -10655,7 +10655,7 @@
                       </a:r>
                     </a:p>
                   </a:txBody>
-                  <a:tcPr marL="27432" marR="27432" marT="9144" marB="9144">
+                  <a:tcPr marL="27432" marR="27432" marT="9144" marB="9144" w="1875434">
                     <a:lnL>
                       <a:noFill/>
                     </a:lnL>
@@ -10708,7 +10708,7 @@
                       </a:r>
                     </a:p>
                   </a:txBody>
-                  <a:tcPr marL="27432" marR="27432" marT="9144" marB="9144">
+                  <a:tcPr marL="27432" marR="27432" marT="9144" marB="9144" w="1252728">
                     <a:lnL>
                       <a:noFill/>
                     </a:lnL>
@@ -10754,7 +10754,7 @@
                       </a:r>
                     </a:p>
                   </a:txBody>
-                  <a:tcPr marL="27432" marR="27432" marT="9144" marB="9144">
+                  <a:tcPr marL="27432" marR="27432" marT="9144" marB="9144" w="1875434">
                     <a:lnL>
                       <a:noFill/>
                     </a:lnL>
@@ -10807,7 +10807,7 @@
                       </a:r>
                     </a:p>
                   </a:txBody>
-                  <a:tcPr marL="27432" marR="27432" marT="9144" marB="9144">
+                  <a:tcPr marL="27432" marR="27432" marT="9144" marB="9144" w="1252728">
                     <a:lnL>
                       <a:noFill/>
                     </a:lnL>
@@ -10853,7 +10853,7 @@
                       </a:r>
                     </a:p>
                   </a:txBody>
-                  <a:tcPr marL="27432" marR="27432" marT="9144" marB="9144">
+                  <a:tcPr marL="27432" marR="27432" marT="9144" marB="9144" w="1875434">
                     <a:lnL>
                       <a:noFill/>
                     </a:lnL>
@@ -10906,7 +10906,7 @@
                       </a:r>
                     </a:p>
                   </a:txBody>
-                  <a:tcPr marL="27432" marR="27432" marT="9144" marB="9144">
+                  <a:tcPr marL="27432" marR="27432" marT="9144" marB="9144" w="1252728">
                     <a:lnL>
                       <a:noFill/>
                     </a:lnL>
@@ -10952,7 +10952,7 @@
                       </a:r>
                     </a:p>
                   </a:txBody>
-                  <a:tcPr marL="27432" marR="27432" marT="9144" marB="9144">
+                  <a:tcPr marL="27432" marR="27432" marT="9144" marB="9144" w="1875434">
                     <a:lnL>
                       <a:noFill/>
                     </a:lnL>
@@ -11012,7 +11012,7 @@
                       </a:endParaRPr>
                     </a:p>
                   </a:txBody>
-                  <a:tcPr marL="27432" marR="27432" marT="9144" marB="9144">
+                  <a:tcPr marL="27432" marR="27432" marT="9144" marB="9144" w="1252728">
                     <a:lnL>
                       <a:noFill/>
                     </a:lnL>
@@ -11058,7 +11058,7 @@
                       </a:r>
                     </a:p>
                   </a:txBody>
-                  <a:tcPr marL="27432" marR="27432" marT="9144" marB="9144">
+                  <a:tcPr marL="27432" marR="27432" marT="9144" marB="9144" w="1875434">
                     <a:lnL>
                       <a:noFill/>
                     </a:lnL>
@@ -11117,22 +11117,22 @@
           </p:nvPr>
         </p:nvGraphicFramePr>
         <p:xfrm>
-          <a:off x="7749192" y="4512752"/>
-          <a:ext cx="3127663" cy="2293486"/>
+          <a:off x="7744968" y="4517136"/>
+          <a:ext cx="3127248" cy="2293486"/>
         </p:xfrm>
         <a:graphic>
           <a:graphicData uri="http://schemas.openxmlformats.org/drawingml/2006/table">
             <a:tbl>
               <a:tblPr/>
               <a:tblGrid>
-                <a:gridCol w="1252461">
+                <a:gridCol w="1252728">
                   <a:extLst>
                     <a:ext uri="{9D8B030D-6E8A-4147-A177-3AD203B41FA5}">
                       <a16:colId xmlns:a16="http://schemas.microsoft.com/office/drawing/2014/main" val="20000"/>
                     </a:ext>
                   </a:extLst>
                 </a:gridCol>
-                <a:gridCol w="1875202">
+                <a:gridCol w="1875434">
                   <a:extLst>
                     <a:ext uri="{9D8B030D-6E8A-4147-A177-3AD203B41FA5}">
                       <a16:colId xmlns:a16="http://schemas.microsoft.com/office/drawing/2014/main" val="20001"/>
@@ -11166,7 +11166,7 @@
                       </a:endParaRPr>
                     </a:p>
                   </a:txBody>
-                  <a:tcPr marL="27432" marR="27432" marT="9144" marB="9144">
+                  <a:tcPr marL="27432" marR="27432" marT="9144" marB="9144" w="1252728">
                     <a:lnL>
                       <a:noFill/>
                     </a:lnL>
@@ -11202,7 +11202,7 @@
                       </a:r>
                     </a:p>
                   </a:txBody>
-                  <a:tcPr marL="27432" marR="27432" marT="9144" marB="9144">
+                  <a:tcPr marL="27432" marR="27432" marT="9144" marB="9144" w="1875434">
                     <a:lnL>
                       <a:noFill/>
                     </a:lnL>
@@ -11245,7 +11245,7 @@
                       </a:r>
                     </a:p>
                   </a:txBody>
-                  <a:tcPr marL="27432" marR="27432" marT="9144" marB="9144">
+                  <a:tcPr marL="27432" marR="27432" marT="9144" marB="9144" w="1252728">
                     <a:lnL>
                       <a:noFill/>
                     </a:lnL>
@@ -11287,7 +11287,7 @@
                       </a:r>
                     </a:p>
                   </a:txBody>
-                  <a:tcPr marL="27432" marR="27432" marT="9144" marB="9144">
+                  <a:tcPr marL="27432" marR="27432" marT="9144" marB="9144" w="1875434">
                     <a:lnL>
                       <a:noFill/>
                     </a:lnL>
@@ -11343,7 +11343,7 @@
                       </a:endParaRPr>
                     </a:p>
                   </a:txBody>
-                  <a:tcPr marL="27432" marR="27432" marT="9144" marB="9144">
+                  <a:tcPr marL="27432" marR="27432" marT="9144" marB="9144" w="1252728">
                     <a:lnL>
                       <a:noFill/>
                     </a:lnL>
@@ -11385,7 +11385,7 @@
                       </a:r>
                     </a:p>
                   </a:txBody>
-                  <a:tcPr marL="27432" marR="27432" marT="9144" marB="9144">
+                  <a:tcPr marL="27432" marR="27432" marT="9144" marB="9144" w="1875434">
                     <a:lnL>
                       <a:noFill/>
                     </a:lnL>
@@ -11451,7 +11451,7 @@
                       </a:endParaRPr>
                     </a:p>
                   </a:txBody>
-                  <a:tcPr marL="27432" marR="27432" marT="9144" marB="9144">
+                  <a:tcPr marL="27432" marR="27432" marT="9144" marB="9144" w="1252728">
                     <a:lnL>
                       <a:noFill/>
                     </a:lnL>
@@ -11493,7 +11493,7 @@
                       </a:r>
                     </a:p>
                   </a:txBody>
-                  <a:tcPr marL="27432" marR="27432" marT="9144" marB="9144">
+                  <a:tcPr marL="27432" marR="27432" marT="9144" marB="9144" w="1875434">
                     <a:lnL>
                       <a:noFill/>
                     </a:lnL>
@@ -11542,7 +11542,7 @@
                       </a:r>
                     </a:p>
                   </a:txBody>
-                  <a:tcPr marL="27432" marR="27432" marT="9144" marB="9144">
+                  <a:tcPr marL="27432" marR="27432" marT="9144" marB="9144" w="1252728">
                     <a:lnL>
                       <a:noFill/>
                     </a:lnL>
@@ -11588,7 +11588,7 @@
                       </a:r>
                     </a:p>
                   </a:txBody>
-                  <a:tcPr marL="27432" marR="27432" marT="9144" marB="9144">
+                  <a:tcPr marL="27432" marR="27432" marT="9144" marB="9144" w="1875434">
                     <a:lnL>
                       <a:noFill/>
                     </a:lnL>
@@ -11641,7 +11641,7 @@
                       </a:r>
                     </a:p>
                   </a:txBody>
-                  <a:tcPr marL="27432" marR="27432" marT="9144" marB="9144">
+                  <a:tcPr marL="27432" marR="27432" marT="9144" marB="9144" w="1252728">
                     <a:lnL>
                       <a:noFill/>
                     </a:lnL>
@@ -11687,7 +11687,7 @@
                       </a:r>
                     </a:p>
                   </a:txBody>
-                  <a:tcPr marL="27432" marR="27432" marT="9144" marB="9144">
+                  <a:tcPr marL="27432" marR="27432" marT="9144" marB="9144" w="1875434">
                     <a:lnL>
                       <a:noFill/>
                     </a:lnL>
@@ -11747,7 +11747,7 @@
                       </a:endParaRPr>
                     </a:p>
                   </a:txBody>
-                  <a:tcPr marL="27432" marR="27432" marT="9144" marB="9144">
+                  <a:tcPr marL="27432" marR="27432" marT="9144" marB="9144" w="1252728">
                     <a:lnL>
                       <a:noFill/>
                     </a:lnL>
@@ -11793,7 +11793,7 @@
                       </a:r>
                     </a:p>
                   </a:txBody>
-                  <a:tcPr marL="27432" marR="27432" marT="9144" marB="9144">
+                  <a:tcPr marL="27432" marR="27432" marT="9144" marB="9144" w="1875434">
                     <a:lnL>
                       <a:noFill/>
                     </a:lnL>
@@ -11863,7 +11863,7 @@
                       </a:endParaRPr>
                     </a:p>
                   </a:txBody>
-                  <a:tcPr marL="27432" marR="27432" marT="9144" marB="9144">
+                  <a:tcPr marL="27432" marR="27432" marT="9144" marB="9144" w="1252728">
                     <a:lnL>
                       <a:noFill/>
                     </a:lnL>
@@ -11909,7 +11909,7 @@
                       </a:r>
                     </a:p>
                   </a:txBody>
-                  <a:tcPr marL="27432" marR="27432" marT="9144" marB="9144">
+                  <a:tcPr marL="27432" marR="27432" marT="9144" marB="9144" w="1875434">
                     <a:lnL>
                       <a:noFill/>
                     </a:lnL>
@@ -11969,7 +11969,7 @@
                       </a:endParaRPr>
                     </a:p>
                   </a:txBody>
-                  <a:tcPr marL="27432" marR="27432" marT="9144" marB="9144">
+                  <a:tcPr marL="27432" marR="27432" marT="9144" marB="9144" w="1252728">
                     <a:lnL>
                       <a:noFill/>
                     </a:lnL>
@@ -12015,7 +12015,7 @@
                       </a:r>
                     </a:p>
                   </a:txBody>
-                  <a:tcPr marL="27432" marR="27432" marT="9144" marB="9144">
+                  <a:tcPr marL="27432" marR="27432" marT="9144" marB="9144" w="1875434">
                     <a:lnL>
                       <a:noFill/>
                     </a:lnL>
@@ -12075,7 +12075,7 @@
                       </a:endParaRPr>
                     </a:p>
                   </a:txBody>
-                  <a:tcPr marL="27432" marR="27432" marT="9144" marB="9144">
+                  <a:tcPr marL="27432" marR="27432" marT="9144" marB="9144" w="1252728">
                     <a:lnL>
                       <a:noFill/>
                     </a:lnL>
@@ -12121,7 +12121,7 @@
                       </a:r>
                     </a:p>
                   </a:txBody>
-                  <a:tcPr marL="27432" marR="27432" marT="9144" marB="9144">
+                  <a:tcPr marL="27432" marR="27432" marT="9144" marB="9144" w="1875434">
                     <a:lnL>
                       <a:noFill/>
                     </a:lnL>
@@ -12174,7 +12174,7 @@
                       </a:r>
                     </a:p>
                   </a:txBody>
-                  <a:tcPr marL="27432" marR="27432" marT="9144" marB="9144">
+                  <a:tcPr marL="27432" marR="27432" marT="9144" marB="9144" w="1252728">
                     <a:lnL>
                       <a:noFill/>
                     </a:lnL>
@@ -12240,7 +12240,7 @@
                       </a:r>
                     </a:p>
                   </a:txBody>
-                  <a:tcPr marL="27432" marR="27432" marT="9144" marB="9144">
+                  <a:tcPr marL="27432" marR="27432" marT="9144" marB="9144" w="1875434">
                     <a:lnL>
                       <a:noFill/>
                     </a:lnL>
@@ -12581,6 +12581,10 @@
             <a:noFill/>
           </a:ln>
         </p:spPr>
+        <p:txBody>
+          <a:bodyPr/>
+          <a:p/>
+        </p:txBody>
       </p:sp>
       <p:sp>
         <p:nvSpPr>
@@ -12710,6 +12714,10 @@
             <a:noFill/>
           </a:ln>
         </p:spPr>
+        <p:txBody>
+          <a:bodyPr/>
+          <a:p/>
+        </p:txBody>
       </p:sp>
       <p:sp>
         <p:nvSpPr>
@@ -13626,6 +13634,10 @@
             <a:noFill/>
           </a:ln>
         </p:spPr>
+        <p:txBody>
+          <a:bodyPr/>
+          <a:p/>
+        </p:txBody>
       </p:sp>
       <p:sp>
         <p:nvSpPr>
@@ -14409,6 +14421,10 @@
             <a:noFill/>
           </a:ln>
         </p:spPr>
+        <p:txBody>
+          <a:bodyPr/>
+          <a:p/>
+        </p:txBody>
       </p:sp>
       <p:sp>
         <p:nvSpPr>
@@ -15325,6 +15341,10 @@
             <a:noFill/>
           </a:ln>
         </p:spPr>
+        <p:txBody>
+          <a:bodyPr/>
+          <a:p/>
+        </p:txBody>
       </p:sp>
       <p:sp>
         <p:nvSpPr>
@@ -15524,8 +15544,8 @@
         </p:nvSpPr>
         <p:spPr>
           <a:xfrm>
-            <a:off x="6311257" y="1990719"/>
-            <a:ext cx="5540237" cy="1637500"/>
+            <a:off x="6311257" y="1975104"/>
+            <a:ext cx="5540237" cy="1792224"/>
           </a:xfrm>
           <a:prstGeom prst="rect">
             <a:avLst/>
@@ -15533,7 +15553,7 @@
           <a:noFill/>
         </p:spPr>
         <p:txBody>
-          <a:bodyPr wrap="square" rtlCol="0">
+          <a:bodyPr wrap="square" rtlCol="0" anchor="t">
             <a:spAutoFit/>
           </a:bodyPr>
           <a:lstStyle/>
@@ -15542,12 +15562,15 @@
               <a:lnSpc>
                 <a:spcPct val="100000"/>
               </a:lnSpc>
+              <a:spcBef>
+                <a:spcPts val="0"/>
+              </a:spcBef>
               <a:spcAft>
-                <a:spcPts val="400"/>
+                <a:spcPts val="100"/>
               </a:spcAft>
             </a:pPr>
             <a:r>
-              <a:rPr sz="900" b="1">
+              <a:rPr sz="1000" b="1">
                 <a:solidFill>
                   <a:srgbClr val="1F4E79"/>
                 </a:solidFill>
@@ -15555,14 +15578,27 @@
               </a:rPr>
               <a:t>① 监控</a:t>
             </a:r>
+          </a:p>
+          <a:p>
+            <a:pPr algn="l">
+              <a:lnSpc>
+                <a:spcPct val="100000"/>
+              </a:lnSpc>
+              <a:spcBef>
+                <a:spcPts val="0"/>
+              </a:spcBef>
+              <a:spcAft>
+                <a:spcPts val="300"/>
+              </a:spcAft>
+            </a:pPr>
             <a:r>
-              <a:rPr sz="900" b="0">
+              <a:rPr sz="850" b="0">
                 <a:solidFill>
                   <a:srgbClr val="3D3C3A"/>
                 </a:solidFill>
                 <a:latin typeface="微软雅黑"/>
               </a:rPr>
-              <a:t>：捕捉分类批量漂移、同一交易对手归类不一致、覆盖率或命中率明显下降、新描述未被任何引擎识别等异常信号。</a:t>
+              <a:t>捕捉分类批量漂移、同一交易对手归类不一致、覆盖率或命中率明显下降、新描述未被任何引擎识别等异常信号。</a:t>
             </a:r>
           </a:p>
           <a:p>
@@ -15570,12 +15606,15 @@
               <a:lnSpc>
                 <a:spcPct val="100000"/>
               </a:lnSpc>
+              <a:spcBef>
+                <a:spcPts val="0"/>
+              </a:spcBef>
               <a:spcAft>
-                <a:spcPts val="400"/>
+                <a:spcPts val="100"/>
               </a:spcAft>
             </a:pPr>
             <a:r>
-              <a:rPr sz="900" b="1">
+              <a:rPr sz="1000" b="1">
                 <a:solidFill>
                   <a:srgbClr val="1F4E79"/>
                 </a:solidFill>
@@ -15583,14 +15622,27 @@
               </a:rPr>
               <a:t>② 定位</a:t>
             </a:r>
+          </a:p>
+          <a:p>
+            <a:pPr algn="l">
+              <a:lnSpc>
+                <a:spcPct val="100000"/>
+              </a:lnSpc>
+              <a:spcBef>
+                <a:spcPts val="0"/>
+              </a:spcBef>
+              <a:spcAft>
+                <a:spcPts val="300"/>
+              </a:spcAft>
+            </a:pPr>
             <a:r>
-              <a:rPr sz="900" b="0">
+              <a:rPr sz="850" b="0">
                 <a:solidFill>
                   <a:srgbClr val="3D3C3A"/>
                 </a:solidFill>
                 <a:latin typeface="微软雅黑"/>
               </a:rPr>
-              <a:t>：对异常逐笔细挖交易描述、金额、方向、交易对手、命中引擎和分类依据，归类为五类原因。</a:t>
+              <a:t>对异常逐笔细挖交易描述、金额、方向、交易对手、命中引擎和分类依据，归类为五类原因。</a:t>
             </a:r>
           </a:p>
           <a:p>
@@ -15598,12 +15650,15 @@
               <a:lnSpc>
                 <a:spcPct val="100000"/>
               </a:lnSpc>
+              <a:spcBef>
+                <a:spcPts val="0"/>
+              </a:spcBef>
               <a:spcAft>
-                <a:spcPts val="400"/>
+                <a:spcPts val="100"/>
               </a:spcAft>
             </a:pPr>
             <a:r>
-              <a:rPr sz="900" b="1">
+              <a:rPr sz="1000" b="1">
                 <a:solidFill>
                   <a:srgbClr val="1F4E79"/>
                 </a:solidFill>
@@ -15611,14 +15666,27 @@
               </a:rPr>
               <a:t>③ 输出</a:t>
             </a:r>
+          </a:p>
+          <a:p>
+            <a:pPr algn="l">
+              <a:lnSpc>
+                <a:spcPct val="100000"/>
+              </a:lnSpc>
+              <a:spcBef>
+                <a:spcPts val="0"/>
+              </a:spcBef>
+              <a:spcAft>
+                <a:spcPts val="300"/>
+              </a:spcAft>
+            </a:pPr>
             <a:r>
-              <a:rPr sz="900" b="0">
+              <a:rPr sz="850" b="0">
                 <a:solidFill>
                   <a:srgbClr val="3D3C3A"/>
                 </a:solidFill>
                 <a:latin typeface="微软雅黑"/>
               </a:rPr>
-              <a:t>：生成按优先级排序的诊断报告，直接标明问题引擎、需检查的规则、缺失的商户／关键词及应补充的知识库，供业务确认。</a:t>
+              <a:t>生成按优先级排序的诊断报告，直接标明问题引擎、需检查的规则、缺失的商户／关键词及应补充的知识库，供业务确认。</a:t>
             </a:r>
           </a:p>
           <a:p>
@@ -15626,12 +15694,15 @@
               <a:lnSpc>
                 <a:spcPct val="100000"/>
               </a:lnSpc>
+              <a:spcBef>
+                <a:spcPts val="0"/>
+              </a:spcBef>
               <a:spcAft>
-                <a:spcPts val="0"/>
+                <a:spcPts val="100"/>
               </a:spcAft>
             </a:pPr>
             <a:r>
-              <a:rPr sz="900" b="1">
+              <a:rPr sz="1000" b="1">
                 <a:solidFill>
                   <a:srgbClr val="1F4E79"/>
                 </a:solidFill>
@@ -15639,14 +15710,27 @@
               </a:rPr>
               <a:t>效果</a:t>
             </a:r>
+          </a:p>
+          <a:p>
+            <a:pPr algn="l">
+              <a:lnSpc>
+                <a:spcPct val="100000"/>
+              </a:lnSpc>
+              <a:spcBef>
+                <a:spcPts val="0"/>
+              </a:spcBef>
+              <a:spcAft>
+                <a:spcPts val="300"/>
+              </a:spcAft>
+            </a:pPr>
             <a:r>
-              <a:rPr sz="900" b="0">
+              <a:rPr sz="850" b="0">
                 <a:solidFill>
                   <a:srgbClr val="3D3C3A"/>
                 </a:solidFill>
                 <a:latin typeface="微软雅黑"/>
               </a:rPr>
-              <a:t>：知识库随注册商户的新增、变更、失效持续更新，并从真实交易中补齐注册数据未覆盖的支付描述和商户别名。由此形成“分类 → 监控 → 定位 → 输出 → 更新 → 再分类”的持续优化闭环。</a:t>
+              <a:t>知识库随注册商户的新增、变更、失效持续更新，并从真实交易中补齐注册数据未覆盖的支付描述和商户别名。由此形成“分类 → 监控 → 定位 → 输出 → 更新 → 再分类”的持续优化闭环。</a:t>
             </a:r>
           </a:p>
         </p:txBody>
@@ -15778,7 +15862,7 @@
                     <a:p>
                       <a:pPr algn="l"/>
                       <a:r>
-                        <a:rPr sz="700" b="1">
+                        <a:rPr sz="800" b="1">
                           <a:solidFill>
                             <a:srgbClr val="0A0A0A"/>
                           </a:solidFill>
@@ -15789,7 +15873,13 @@
                       </a:r>
                     </a:p>
                   </a:txBody>
-                  <a:tcPr marL="27432" marR="27432" marT="9144" marB="9144"/>
+                  <a:tcPr marL="27432" marR="27432" marT="9144" marB="9144">
+                    <a:lnB w="19050" cap="flat">
+                      <a:solidFill>
+                        <a:srgbClr val="0A0A0A"/>
+                      </a:solidFill>
+                    </a:lnB>
+                  </a:tcPr>
                 </a:tc>
                 <a:tc>
                   <a:txBody>
@@ -15798,7 +15888,7 @@
                     <a:p>
                       <a:pPr algn="l"/>
                       <a:r>
-                        <a:rPr sz="700" b="1">
+                        <a:rPr sz="800" b="1">
                           <a:solidFill>
                             <a:srgbClr val="0A0A0A"/>
                           </a:solidFill>
@@ -15809,7 +15899,13 @@
                       </a:r>
                     </a:p>
                   </a:txBody>
-                  <a:tcPr marL="27432" marR="27432" marT="9144" marB="9144"/>
+                  <a:tcPr marL="27432" marR="27432" marT="9144" marB="9144">
+                    <a:lnB w="19050" cap="flat">
+                      <a:solidFill>
+                        <a:srgbClr val="0A0A0A"/>
+                      </a:solidFill>
+                    </a:lnB>
+                  </a:tcPr>
                 </a:tc>
                 <a:extLst>
                   <a:ext uri="{0D108BD9-81ED-4DB2-BD59-A6C34878D82A}">
@@ -15825,7 +15921,7 @@
                     <a:p>
                       <a:pPr algn="l"/>
                       <a:r>
-                        <a:rPr sz="700" b="0">
+                        <a:rPr sz="800" b="1">
                           <a:solidFill>
                             <a:srgbClr val="3D3C3A"/>
                           </a:solidFill>
@@ -15836,7 +15932,18 @@
                       </a:r>
                     </a:p>
                   </a:txBody>
-                  <a:tcPr marL="27432" marR="27432" marT="9144" marB="9144"/>
+                  <a:tcPr marL="27432" marR="27432" marT="9144" marB="9144">
+                    <a:lnT w="19050" cap="flat">
+                      <a:solidFill>
+                        <a:srgbClr val="0A0A0A"/>
+                      </a:solidFill>
+                    </a:lnT>
+                    <a:lnB w="9525" cap="flat">
+                      <a:solidFill>
+                        <a:srgbClr val="D6D6D6"/>
+                      </a:solidFill>
+                    </a:lnB>
+                  </a:tcPr>
                 </a:tc>
                 <a:tc>
                   <a:txBody>
@@ -15845,7 +15952,7 @@
                     <a:p>
                       <a:pPr algn="l"/>
                       <a:r>
-                        <a:rPr sz="700" b="0">
+                        <a:rPr sz="800" b="0">
                           <a:solidFill>
                             <a:srgbClr val="3D3C3A"/>
                           </a:solidFill>
@@ -15856,7 +15963,18 @@
                       </a:r>
                     </a:p>
                   </a:txBody>
-                  <a:tcPr marL="27432" marR="27432" marT="9144" marB="9144"/>
+                  <a:tcPr marL="27432" marR="27432" marT="9144" marB="9144">
+                    <a:lnT w="19050" cap="flat">
+                      <a:solidFill>
+                        <a:srgbClr val="0A0A0A"/>
+                      </a:solidFill>
+                    </a:lnT>
+                    <a:lnB w="9525" cap="flat">
+                      <a:solidFill>
+                        <a:srgbClr val="D6D6D6"/>
+                      </a:solidFill>
+                    </a:lnB>
+                  </a:tcPr>
                 </a:tc>
                 <a:extLst>
                   <a:ext uri="{0D108BD9-81ED-4DB2-BD59-A6C34878D82A}">
@@ -15872,7 +15990,7 @@
                     <a:p>
                       <a:pPr algn="l"/>
                       <a:r>
-                        <a:rPr sz="700" b="0">
+                        <a:rPr sz="800" b="1">
                           <a:solidFill>
                             <a:srgbClr val="3D3C3A"/>
                           </a:solidFill>
@@ -15883,7 +16001,18 @@
                       </a:r>
                     </a:p>
                   </a:txBody>
-                  <a:tcPr marL="27432" marR="27432" marT="9144" marB="9144"/>
+                  <a:tcPr marL="27432" marR="27432" marT="9144" marB="9144">
+                    <a:lnT w="19050" cap="flat">
+                      <a:solidFill>
+                        <a:srgbClr val="0A0A0A"/>
+                      </a:solidFill>
+                    </a:lnT>
+                    <a:lnB w="9525" cap="flat">
+                      <a:solidFill>
+                        <a:srgbClr val="D6D6D6"/>
+                      </a:solidFill>
+                    </a:lnB>
+                  </a:tcPr>
                 </a:tc>
                 <a:tc>
                   <a:txBody>
@@ -15892,7 +16021,7 @@
                     <a:p>
                       <a:pPr algn="l"/>
                       <a:r>
-                        <a:rPr sz="700" b="0" dirty="0" err="1">
+                        <a:rPr sz="800" b="0" dirty="0" err="1">
                           <a:solidFill>
                             <a:srgbClr val="3D3C3A"/>
                           </a:solidFill>
@@ -15902,7 +16031,7 @@
                         <a:t>新开业商户或新兴</a:t>
                       </a:r>
                       <a:r>
-                        <a:rPr sz="700" b="0" dirty="0">
+                        <a:rPr sz="800" b="0" dirty="0">
                           <a:solidFill>
                             <a:srgbClr val="3D3C3A"/>
                           </a:solidFill>
@@ -15912,7 +16041,7 @@
                         <a:t> BNPL </a:t>
                       </a:r>
                       <a:r>
-                        <a:rPr sz="700" b="0" dirty="0" err="1">
+                        <a:rPr sz="800" b="0" dirty="0" err="1">
                           <a:solidFill>
                             <a:srgbClr val="3D3C3A"/>
                           </a:solidFill>
@@ -15922,7 +16051,7 @@
                         <a:t>平台的交易描述未收录，落入</a:t>
                       </a:r>
                       <a:r>
-                        <a:rPr sz="700" b="0" dirty="0">
+                        <a:rPr sz="800" b="0" dirty="0">
                           <a:solidFill>
                             <a:srgbClr val="3D3C3A"/>
                           </a:solidFill>
@@ -15932,7 +16061,7 @@
                         <a:t> Other </a:t>
                       </a:r>
                       <a:r>
-                        <a:rPr sz="700" b="0" dirty="0" err="1">
+                        <a:rPr sz="800" b="0" dirty="0" err="1">
                           <a:solidFill>
                             <a:srgbClr val="3D3C3A"/>
                           </a:solidFill>
@@ -15950,7 +16079,18 @@
                       </a:endParaRPr>
                     </a:p>
                   </a:txBody>
-                  <a:tcPr marL="27432" marR="27432" marT="9144" marB="9144"/>
+                  <a:tcPr marL="27432" marR="27432" marT="9144" marB="9144">
+                    <a:lnT w="19050" cap="flat">
+                      <a:solidFill>
+                        <a:srgbClr val="0A0A0A"/>
+                      </a:solidFill>
+                    </a:lnT>
+                    <a:lnB w="9525" cap="flat">
+                      <a:solidFill>
+                        <a:srgbClr val="D6D6D6"/>
+                      </a:solidFill>
+                    </a:lnB>
+                  </a:tcPr>
                 </a:tc>
                 <a:extLst>
                   <a:ext uri="{0D108BD9-81ED-4DB2-BD59-A6C34878D82A}">
@@ -15966,7 +16106,7 @@
                     <a:p>
                       <a:pPr algn="l"/>
                       <a:r>
-                        <a:rPr sz="700" b="0">
+                        <a:rPr sz="800" b="1">
                           <a:solidFill>
                             <a:srgbClr val="3D3C3A"/>
                           </a:solidFill>
@@ -15977,7 +16117,18 @@
                       </a:r>
                     </a:p>
                   </a:txBody>
-                  <a:tcPr marL="27432" marR="27432" marT="9144" marB="9144"/>
+                  <a:tcPr marL="27432" marR="27432" marT="9144" marB="9144">
+                    <a:lnT w="19050" cap="flat">
+                      <a:solidFill>
+                        <a:srgbClr val="0A0A0A"/>
+                      </a:solidFill>
+                    </a:lnT>
+                    <a:lnB w="9525" cap="flat">
+                      <a:solidFill>
+                        <a:srgbClr val="D6D6D6"/>
+                      </a:solidFill>
+                    </a:lnB>
+                  </a:tcPr>
                 </a:tc>
                 <a:tc>
                   <a:txBody>
@@ -15986,7 +16137,7 @@
                     <a:p>
                       <a:pPr algn="l"/>
                       <a:r>
-                        <a:rPr sz="700" b="0">
+                        <a:rPr sz="800" b="0">
                           <a:solidFill>
                             <a:srgbClr val="3D3C3A"/>
                           </a:solidFill>
@@ -15997,7 +16148,18 @@
                       </a:r>
                     </a:p>
                   </a:txBody>
-                  <a:tcPr marL="27432" marR="27432" marT="9144" marB="9144"/>
+                  <a:tcPr marL="27432" marR="27432" marT="9144" marB="9144">
+                    <a:lnT w="19050" cap="flat">
+                      <a:solidFill>
+                        <a:srgbClr val="0A0A0A"/>
+                      </a:solidFill>
+                    </a:lnT>
+                    <a:lnB w="9525" cap="flat">
+                      <a:solidFill>
+                        <a:srgbClr val="D6D6D6"/>
+                      </a:solidFill>
+                    </a:lnB>
+                  </a:tcPr>
                 </a:tc>
                 <a:extLst>
                   <a:ext uri="{0D108BD9-81ED-4DB2-BD59-A6C34878D82A}">
@@ -16013,7 +16175,7 @@
                     <a:p>
                       <a:pPr algn="l"/>
                       <a:r>
-                        <a:rPr sz="700" b="0">
+                        <a:rPr sz="800" b="1">
                           <a:solidFill>
                             <a:srgbClr val="3D3C3A"/>
                           </a:solidFill>
@@ -16024,7 +16186,18 @@
                       </a:r>
                     </a:p>
                   </a:txBody>
-                  <a:tcPr marL="27432" marR="27432" marT="9144" marB="9144"/>
+                  <a:tcPr marL="27432" marR="27432" marT="9144" marB="9144">
+                    <a:lnT w="19050" cap="flat">
+                      <a:solidFill>
+                        <a:srgbClr val="0A0A0A"/>
+                      </a:solidFill>
+                    </a:lnT>
+                    <a:lnB w="9525" cap="flat">
+                      <a:solidFill>
+                        <a:srgbClr val="D6D6D6"/>
+                      </a:solidFill>
+                    </a:lnB>
+                  </a:tcPr>
                 </a:tc>
                 <a:tc>
                   <a:txBody>
@@ -16033,7 +16206,7 @@
                     <a:p>
                       <a:pPr algn="l"/>
                       <a:r>
-                        <a:rPr sz="700" b="0">
+                        <a:rPr sz="800" b="0">
                           <a:solidFill>
                             <a:srgbClr val="3D3C3A"/>
                           </a:solidFill>
@@ -16044,7 +16217,18 @@
                       </a:r>
                     </a:p>
                   </a:txBody>
-                  <a:tcPr marL="27432" marR="27432" marT="9144" marB="9144"/>
+                  <a:tcPr marL="27432" marR="27432" marT="9144" marB="9144">
+                    <a:lnT w="19050" cap="flat">
+                      <a:solidFill>
+                        <a:srgbClr val="0A0A0A"/>
+                      </a:solidFill>
+                    </a:lnT>
+                    <a:lnB w="9525" cap="flat">
+                      <a:solidFill>
+                        <a:srgbClr val="D6D6D6"/>
+                      </a:solidFill>
+                    </a:lnB>
+                  </a:tcPr>
                 </a:tc>
                 <a:extLst>
                   <a:ext uri="{0D108BD9-81ED-4DB2-BD59-A6C34878D82A}">
@@ -16060,7 +16244,7 @@
                     <a:p>
                       <a:pPr algn="l"/>
                       <a:r>
-                        <a:rPr sz="700" b="0">
+                        <a:rPr sz="800" b="1">
                           <a:solidFill>
                             <a:srgbClr val="3D3C3A"/>
                           </a:solidFill>
@@ -16071,7 +16255,18 @@
                       </a:r>
                     </a:p>
                   </a:txBody>
-                  <a:tcPr marL="27432" marR="27432" marT="9144" marB="9144"/>
+                  <a:tcPr marL="27432" marR="27432" marT="9144" marB="9144">
+                    <a:lnT w="19050" cap="flat">
+                      <a:solidFill>
+                        <a:srgbClr val="0A0A0A"/>
+                      </a:solidFill>
+                    </a:lnT>
+                    <a:lnB w="9525" cap="flat">
+                      <a:solidFill>
+                        <a:srgbClr val="D6D6D6"/>
+                      </a:solidFill>
+                    </a:lnB>
+                  </a:tcPr>
                 </a:tc>
                 <a:tc>
                   <a:txBody>
@@ -16080,7 +16275,7 @@
                     <a:p>
                       <a:pPr algn="l"/>
                       <a:r>
-                        <a:rPr sz="700" b="0" dirty="0" err="1">
+                        <a:rPr sz="800" b="0" dirty="0" err="1">
                           <a:solidFill>
                             <a:srgbClr val="3D3C3A"/>
                           </a:solidFill>
@@ -16098,7 +16293,18 @@
                       </a:endParaRPr>
                     </a:p>
                   </a:txBody>
-                  <a:tcPr marL="27432" marR="27432" marT="9144" marB="9144"/>
+                  <a:tcPr marL="27432" marR="27432" marT="9144" marB="9144">
+                    <a:lnT w="19050" cap="flat">
+                      <a:solidFill>
+                        <a:srgbClr val="0A0A0A"/>
+                      </a:solidFill>
+                    </a:lnT>
+                    <a:lnB w="9525" cap="flat">
+                      <a:solidFill>
+                        <a:srgbClr val="D6D6D6"/>
+                      </a:solidFill>
+                    </a:lnB>
+                  </a:tcPr>
                 </a:tc>
                 <a:extLst>
                   <a:ext uri="{0D108BD9-81ED-4DB2-BD59-A6C34878D82A}">
@@ -16208,7 +16414,7 @@
                     <a:p>
                       <a:pPr algn="l"/>
                       <a:r>
-                        <a:rPr sz="700" b="1">
+                        <a:rPr sz="800" b="1">
                           <a:solidFill>
                             <a:srgbClr val="0A0A0A"/>
                           </a:solidFill>
@@ -16219,7 +16425,13 @@
                       </a:r>
                     </a:p>
                   </a:txBody>
-                  <a:tcPr marL="27432" marR="27432" marT="9144" marB="9144"/>
+                  <a:tcPr marL="27432" marR="27432" marT="9144" marB="9144">
+                    <a:lnB w="19050" cap="flat">
+                      <a:solidFill>
+                        <a:srgbClr val="0A0A0A"/>
+                      </a:solidFill>
+                    </a:lnB>
+                  </a:tcPr>
                 </a:tc>
                 <a:tc>
                   <a:txBody>
@@ -16228,7 +16440,7 @@
                     <a:p>
                       <a:pPr algn="l"/>
                       <a:r>
-                        <a:rPr sz="700" b="1">
+                        <a:rPr sz="800" b="1">
                           <a:solidFill>
                             <a:srgbClr val="0A0A0A"/>
                           </a:solidFill>
@@ -16239,7 +16451,13 @@
                       </a:r>
                     </a:p>
                   </a:txBody>
-                  <a:tcPr marL="27432" marR="27432" marT="9144" marB="9144"/>
+                  <a:tcPr marL="27432" marR="27432" marT="9144" marB="9144">
+                    <a:lnB w="19050" cap="flat">
+                      <a:solidFill>
+                        <a:srgbClr val="0A0A0A"/>
+                      </a:solidFill>
+                    </a:lnB>
+                  </a:tcPr>
                 </a:tc>
                 <a:tc>
                   <a:txBody>
@@ -16248,7 +16466,7 @@
                     <a:p>
                       <a:pPr algn="l"/>
                       <a:r>
-                        <a:rPr sz="700" b="1">
+                        <a:rPr sz="800" b="1">
                           <a:solidFill>
                             <a:srgbClr val="0A0A0A"/>
                           </a:solidFill>
@@ -16259,7 +16477,13 @@
                       </a:r>
                     </a:p>
                   </a:txBody>
-                  <a:tcPr marL="27432" marR="27432" marT="9144" marB="9144"/>
+                  <a:tcPr marL="27432" marR="27432" marT="9144" marB="9144">
+                    <a:lnB w="19050" cap="flat">
+                      <a:solidFill>
+                        <a:srgbClr val="0A0A0A"/>
+                      </a:solidFill>
+                    </a:lnB>
+                  </a:tcPr>
                 </a:tc>
                 <a:tc>
                   <a:txBody>
@@ -16268,7 +16492,7 @@
                     <a:p>
                       <a:pPr algn="l"/>
                       <a:r>
-                        <a:rPr sz="700" b="1">
+                        <a:rPr sz="800" b="1">
                           <a:solidFill>
                             <a:srgbClr val="0A0A0A"/>
                           </a:solidFill>
@@ -16279,7 +16503,13 @@
                       </a:r>
                     </a:p>
                   </a:txBody>
-                  <a:tcPr marL="27432" marR="27432" marT="9144" marB="9144"/>
+                  <a:tcPr marL="27432" marR="27432" marT="9144" marB="9144">
+                    <a:lnB w="19050" cap="flat">
+                      <a:solidFill>
+                        <a:srgbClr val="0A0A0A"/>
+                      </a:solidFill>
+                    </a:lnB>
+                  </a:tcPr>
                 </a:tc>
                 <a:extLst>
                   <a:ext uri="{0D108BD9-81ED-4DB2-BD59-A6C34878D82A}">
@@ -16295,7 +16525,7 @@
                     <a:p>
                       <a:pPr algn="l"/>
                       <a:r>
-                        <a:rPr sz="700" b="0">
+                        <a:rPr sz="800" b="1">
                           <a:solidFill>
                             <a:srgbClr val="3D3C3A"/>
                           </a:solidFill>
@@ -16306,7 +16536,18 @@
                       </a:r>
                     </a:p>
                   </a:txBody>
-                  <a:tcPr marL="27432" marR="27432" marT="9144" marB="9144"/>
+                  <a:tcPr marL="27432" marR="27432" marT="9144" marB="9144">
+                    <a:lnT w="19050" cap="flat">
+                      <a:solidFill>
+                        <a:srgbClr val="0A0A0A"/>
+                      </a:solidFill>
+                    </a:lnT>
+                    <a:lnB w="9525" cap="flat">
+                      <a:solidFill>
+                        <a:srgbClr val="D6D6D6"/>
+                      </a:solidFill>
+                    </a:lnB>
+                  </a:tcPr>
                 </a:tc>
                 <a:tc>
                   <a:txBody>
@@ -16315,7 +16556,7 @@
                     <a:p>
                       <a:pPr algn="l"/>
                       <a:r>
-                        <a:rPr sz="700" b="0">
+                        <a:rPr sz="800" b="0">
                           <a:solidFill>
                             <a:srgbClr val="3D3C3A"/>
                           </a:solidFill>
@@ -16326,7 +16567,18 @@
                       </a:r>
                     </a:p>
                   </a:txBody>
-                  <a:tcPr marL="27432" marR="27432" marT="9144" marB="9144"/>
+                  <a:tcPr marL="27432" marR="27432" marT="9144" marB="9144">
+                    <a:lnT w="19050" cap="flat">
+                      <a:solidFill>
+                        <a:srgbClr val="0A0A0A"/>
+                      </a:solidFill>
+                    </a:lnT>
+                    <a:lnB w="9525" cap="flat">
+                      <a:solidFill>
+                        <a:srgbClr val="D6D6D6"/>
+                      </a:solidFill>
+                    </a:lnB>
+                  </a:tcPr>
                 </a:tc>
                 <a:tc>
                   <a:txBody>
@@ -16335,7 +16587,7 @@
                     <a:p>
                       <a:pPr algn="l"/>
                       <a:r>
-                        <a:rPr sz="700" b="0">
+                        <a:rPr sz="800" b="0">
                           <a:solidFill>
                             <a:srgbClr val="3D3C3A"/>
                           </a:solidFill>
@@ -16346,7 +16598,18 @@
                       </a:r>
                     </a:p>
                   </a:txBody>
-                  <a:tcPr marL="27432" marR="27432" marT="9144" marB="9144"/>
+                  <a:tcPr marL="27432" marR="27432" marT="9144" marB="9144">
+                    <a:lnT w="19050" cap="flat">
+                      <a:solidFill>
+                        <a:srgbClr val="0A0A0A"/>
+                      </a:solidFill>
+                    </a:lnT>
+                    <a:lnB w="9525" cap="flat">
+                      <a:solidFill>
+                        <a:srgbClr val="D6D6D6"/>
+                      </a:solidFill>
+                    </a:lnB>
+                  </a:tcPr>
                 </a:tc>
                 <a:tc>
                   <a:txBody>
@@ -16355,7 +16618,7 @@
                     <a:p>
                       <a:pPr algn="l"/>
                       <a:r>
-                        <a:rPr sz="700" b="0">
+                        <a:rPr sz="800" b="0">
                           <a:solidFill>
                             <a:srgbClr val="3D3C3A"/>
                           </a:solidFill>
@@ -16366,7 +16629,18 @@
                       </a:r>
                     </a:p>
                   </a:txBody>
-                  <a:tcPr marL="27432" marR="27432" marT="9144" marB="9144"/>
+                  <a:tcPr marL="27432" marR="27432" marT="9144" marB="9144">
+                    <a:lnT w="19050" cap="flat">
+                      <a:solidFill>
+                        <a:srgbClr val="0A0A0A"/>
+                      </a:solidFill>
+                    </a:lnT>
+                    <a:lnB w="9525" cap="flat">
+                      <a:solidFill>
+                        <a:srgbClr val="D6D6D6"/>
+                      </a:solidFill>
+                    </a:lnB>
+                  </a:tcPr>
                 </a:tc>
                 <a:extLst>
                   <a:ext uri="{0D108BD9-81ED-4DB2-BD59-A6C34878D82A}">
@@ -16382,7 +16656,7 @@
                     <a:p>
                       <a:pPr algn="l"/>
                       <a:r>
-                        <a:rPr sz="700" b="0">
+                        <a:rPr sz="800" b="1">
                           <a:solidFill>
                             <a:srgbClr val="3D3C3A"/>
                           </a:solidFill>
@@ -16393,7 +16667,18 @@
                       </a:r>
                     </a:p>
                   </a:txBody>
-                  <a:tcPr marL="27432" marR="27432" marT="9144" marB="9144"/>
+                  <a:tcPr marL="27432" marR="27432" marT="9144" marB="9144">
+                    <a:lnT w="19050" cap="flat">
+                      <a:solidFill>
+                        <a:srgbClr val="0A0A0A"/>
+                      </a:solidFill>
+                    </a:lnT>
+                    <a:lnB w="9525" cap="flat">
+                      <a:solidFill>
+                        <a:srgbClr val="D6D6D6"/>
+                      </a:solidFill>
+                    </a:lnB>
+                  </a:tcPr>
                 </a:tc>
                 <a:tc>
                   <a:txBody>
@@ -16402,7 +16687,7 @@
                     <a:p>
                       <a:pPr algn="l"/>
                       <a:r>
-                        <a:rPr sz="700" b="0">
+                        <a:rPr sz="800" b="0">
                           <a:solidFill>
                             <a:srgbClr val="3D3C3A"/>
                           </a:solidFill>
@@ -16413,7 +16698,18 @@
                       </a:r>
                     </a:p>
                   </a:txBody>
-                  <a:tcPr marL="27432" marR="27432" marT="9144" marB="9144"/>
+                  <a:tcPr marL="27432" marR="27432" marT="9144" marB="9144">
+                    <a:lnT w="19050" cap="flat">
+                      <a:solidFill>
+                        <a:srgbClr val="0A0A0A"/>
+                      </a:solidFill>
+                    </a:lnT>
+                    <a:lnB w="9525" cap="flat">
+                      <a:solidFill>
+                        <a:srgbClr val="D6D6D6"/>
+                      </a:solidFill>
+                    </a:lnB>
+                  </a:tcPr>
                 </a:tc>
                 <a:tc>
                   <a:txBody>
@@ -16422,7 +16718,7 @@
                     <a:p>
                       <a:pPr algn="l"/>
                       <a:r>
-                        <a:rPr sz="700" b="0">
+                        <a:rPr sz="800" b="0">
                           <a:solidFill>
                             <a:srgbClr val="3D3C3A"/>
                           </a:solidFill>
@@ -16433,7 +16729,18 @@
                       </a:r>
                     </a:p>
                   </a:txBody>
-                  <a:tcPr marL="27432" marR="27432" marT="9144" marB="9144"/>
+                  <a:tcPr marL="27432" marR="27432" marT="9144" marB="9144">
+                    <a:lnT w="19050" cap="flat">
+                      <a:solidFill>
+                        <a:srgbClr val="0A0A0A"/>
+                      </a:solidFill>
+                    </a:lnT>
+                    <a:lnB w="9525" cap="flat">
+                      <a:solidFill>
+                        <a:srgbClr val="D6D6D6"/>
+                      </a:solidFill>
+                    </a:lnB>
+                  </a:tcPr>
                 </a:tc>
                 <a:tc>
                   <a:txBody>
@@ -16442,7 +16749,7 @@
                     <a:p>
                       <a:pPr algn="l"/>
                       <a:r>
-                        <a:rPr sz="700" b="0">
+                        <a:rPr sz="800" b="0">
                           <a:solidFill>
                             <a:srgbClr val="3D3C3A"/>
                           </a:solidFill>
@@ -16453,7 +16760,18 @@
                       </a:r>
                     </a:p>
                   </a:txBody>
-                  <a:tcPr marL="27432" marR="27432" marT="9144" marB="9144"/>
+                  <a:tcPr marL="27432" marR="27432" marT="9144" marB="9144">
+                    <a:lnT w="19050" cap="flat">
+                      <a:solidFill>
+                        <a:srgbClr val="0A0A0A"/>
+                      </a:solidFill>
+                    </a:lnT>
+                    <a:lnB w="9525" cap="flat">
+                      <a:solidFill>
+                        <a:srgbClr val="D6D6D6"/>
+                      </a:solidFill>
+                    </a:lnB>
+                  </a:tcPr>
                 </a:tc>
                 <a:extLst>
                   <a:ext uri="{0D108BD9-81ED-4DB2-BD59-A6C34878D82A}">
@@ -16469,7 +16787,7 @@
                     <a:p>
                       <a:pPr algn="l"/>
                       <a:r>
-                        <a:rPr sz="700" b="0">
+                        <a:rPr sz="800" b="1">
                           <a:solidFill>
                             <a:srgbClr val="3D3C3A"/>
                           </a:solidFill>
@@ -16480,7 +16798,18 @@
                       </a:r>
                     </a:p>
                   </a:txBody>
-                  <a:tcPr marL="27432" marR="27432" marT="9144" marB="9144"/>
+                  <a:tcPr marL="27432" marR="27432" marT="9144" marB="9144">
+                    <a:lnT w="19050" cap="flat">
+                      <a:solidFill>
+                        <a:srgbClr val="0A0A0A"/>
+                      </a:solidFill>
+                    </a:lnT>
+                    <a:lnB w="9525" cap="flat">
+                      <a:solidFill>
+                        <a:srgbClr val="D6D6D6"/>
+                      </a:solidFill>
+                    </a:lnB>
+                  </a:tcPr>
                 </a:tc>
                 <a:tc>
                   <a:txBody>
@@ -16489,7 +16818,7 @@
                     <a:p>
                       <a:pPr algn="l"/>
                       <a:r>
-                        <a:rPr sz="700" b="0">
+                        <a:rPr sz="800" b="0">
                           <a:solidFill>
                             <a:srgbClr val="3D3C3A"/>
                           </a:solidFill>
@@ -16500,7 +16829,18 @@
                       </a:r>
                     </a:p>
                   </a:txBody>
-                  <a:tcPr marL="27432" marR="27432" marT="9144" marB="9144"/>
+                  <a:tcPr marL="27432" marR="27432" marT="9144" marB="9144">
+                    <a:lnT w="19050" cap="flat">
+                      <a:solidFill>
+                        <a:srgbClr val="0A0A0A"/>
+                      </a:solidFill>
+                    </a:lnT>
+                    <a:lnB w="9525" cap="flat">
+                      <a:solidFill>
+                        <a:srgbClr val="D6D6D6"/>
+                      </a:solidFill>
+                    </a:lnB>
+                  </a:tcPr>
                 </a:tc>
                 <a:tc>
                   <a:txBody>
@@ -16509,7 +16849,7 @@
                     <a:p>
                       <a:pPr algn="l"/>
                       <a:r>
-                        <a:rPr sz="700" b="0">
+                        <a:rPr sz="800" b="0">
                           <a:solidFill>
                             <a:srgbClr val="3D3C3A"/>
                           </a:solidFill>
@@ -16520,7 +16860,18 @@
                       </a:r>
                     </a:p>
                   </a:txBody>
-                  <a:tcPr marL="27432" marR="27432" marT="9144" marB="9144"/>
+                  <a:tcPr marL="27432" marR="27432" marT="9144" marB="9144">
+                    <a:lnT w="19050" cap="flat">
+                      <a:solidFill>
+                        <a:srgbClr val="0A0A0A"/>
+                      </a:solidFill>
+                    </a:lnT>
+                    <a:lnB w="9525" cap="flat">
+                      <a:solidFill>
+                        <a:srgbClr val="D6D6D6"/>
+                      </a:solidFill>
+                    </a:lnB>
+                  </a:tcPr>
                 </a:tc>
                 <a:tc>
                   <a:txBody>
@@ -16529,7 +16880,7 @@
                     <a:p>
                       <a:pPr algn="l"/>
                       <a:r>
-                        <a:rPr sz="700" b="0" dirty="0" err="1">
+                        <a:rPr sz="800" b="0" dirty="0" err="1">
                           <a:solidFill>
                             <a:srgbClr val="3D3C3A"/>
                           </a:solidFill>
@@ -16547,7 +16898,18 @@
                       </a:endParaRPr>
                     </a:p>
                   </a:txBody>
-                  <a:tcPr marL="27432" marR="27432" marT="9144" marB="9144"/>
+                  <a:tcPr marL="27432" marR="27432" marT="9144" marB="9144">
+                    <a:lnT w="19050" cap="flat">
+                      <a:solidFill>
+                        <a:srgbClr val="0A0A0A"/>
+                      </a:solidFill>
+                    </a:lnT>
+                    <a:lnB w="9525" cap="flat">
+                      <a:solidFill>
+                        <a:srgbClr val="D6D6D6"/>
+                      </a:solidFill>
+                    </a:lnB>
+                  </a:tcPr>
                 </a:tc>
                 <a:extLst>
                   <a:ext uri="{0D108BD9-81ED-4DB2-BD59-A6C34878D82A}">

--- a/银行流水分享_V1.7.pptx
+++ b/银行流水分享_V1.7.pptx
@@ -6336,7 +6336,7 @@
               </a:lnSpc>
             </a:pPr>
             <a:r>
-              <a:rPr sz="1200" b="1" dirty="0">
+              <a:rPr sz="1300" b="1" dirty="0">
                 <a:solidFill>
                   <a:srgbClr val="0A0A0A"/>
                 </a:solidFill>
@@ -6346,7 +6346,7 @@
               <a:t>1. </a:t>
             </a:r>
             <a:r>
-              <a:rPr sz="1200" b="1" dirty="0" err="1">
+              <a:rPr sz="1300" b="1" dirty="0" err="1">
                 <a:solidFill>
                   <a:srgbClr val="0A0A0A"/>
                 </a:solidFill>
@@ -6356,7 +6356,7 @@
               <a:t>原始银行流水（输入示例</a:t>
             </a:r>
             <a:r>
-              <a:rPr sz="1200" b="1" dirty="0">
+              <a:rPr sz="1300" b="1" dirty="0">
                 <a:solidFill>
                   <a:srgbClr val="0A0A0A"/>
                 </a:solidFill>
@@ -6407,7 +6407,7 @@
               </a:lnSpc>
             </a:pPr>
             <a:r>
-              <a:rPr sz="1200" b="1" dirty="0">
+              <a:rPr sz="1300" b="1" dirty="0">
                 <a:solidFill>
                   <a:srgbClr val="0A0A0A"/>
                 </a:solidFill>
@@ -6417,7 +6417,7 @@
               <a:t>2. </a:t>
             </a:r>
             <a:r>
-              <a:rPr sz="1200" b="1" dirty="0" err="1">
+              <a:rPr sz="1300" b="1" dirty="0" err="1">
                 <a:solidFill>
                   <a:srgbClr val="0A0A0A"/>
                 </a:solidFill>
@@ -6427,7 +6427,7 @@
               <a:t>交易明细维度：理解每一笔交易（输出示例</a:t>
             </a:r>
             <a:r>
-              <a:rPr sz="1200" b="1" dirty="0">
+              <a:rPr sz="1300" b="1" dirty="0">
                 <a:solidFill>
                   <a:srgbClr val="0A0A0A"/>
                 </a:solidFill>
@@ -6481,7 +6481,7 @@
               </a:lnSpc>
             </a:pPr>
             <a:r>
-              <a:rPr sz="1200" b="1" dirty="0">
+              <a:rPr sz="1300" b="1" dirty="0">
                 <a:solidFill>
                   <a:srgbClr val="0A0A0A"/>
                 </a:solidFill>
@@ -6491,7 +6491,7 @@
               <a:t>3. </a:t>
             </a:r>
             <a:r>
-              <a:rPr sz="1200" b="1" dirty="0" err="1">
+              <a:rPr sz="1300" b="1" dirty="0" err="1">
                 <a:solidFill>
                   <a:srgbClr val="0A0A0A"/>
                 </a:solidFill>
@@ -6501,7 +6501,7 @@
               <a:t>用户汇总维度：形成完整负债画像（输出示例</a:t>
             </a:r>
             <a:r>
-              <a:rPr sz="1200" b="1" dirty="0">
+              <a:rPr sz="1300" b="1" dirty="0">
                 <a:solidFill>
                   <a:srgbClr val="0A0A0A"/>
                 </a:solidFill>
@@ -12520,6 +12520,243 @@
                 <a:latin typeface="微软雅黑"/>
               </a:rPr>
               <a:t>单笔借款维度</a:t>
+            </a:r>
+          </a:p>
+        </p:txBody>
+      </p:sp>
+      <p:sp>
+        <p:nvSpPr>
+          <p:cNvPr id="27" name="s-badge-1"/>
+          <p:cNvSpPr/>
+          <p:nvPr/>
+        </p:nvSpPr>
+        <p:spPr>
+          <a:xfrm>
+            <a:off x="265176" y="1184148"/>
+            <a:ext cx="274320" cy="274320"/>
+          </a:xfrm>
+          <a:prstGeom prst="rect">
+            <a:avLst/>
+          </a:prstGeom>
+          <a:solidFill>
+            <a:srgbClr val="D6A000"/>
+          </a:solidFill>
+          <a:ln>
+            <a:noFill/>
+          </a:ln>
+          <a:effectLst/>
+        </p:spPr>
+        <p:style>
+          <a:lnRef idx="1">
+            <a:schemeClr val="accent1"/>
+          </a:lnRef>
+          <a:fillRef idx="3">
+            <a:schemeClr val="accent1"/>
+          </a:fillRef>
+          <a:effectRef idx="2">
+            <a:schemeClr val="accent1"/>
+          </a:effectRef>
+          <a:fontRef idx="minor">
+            <a:schemeClr val="lt1"/>
+          </a:fontRef>
+        </p:style>
+        <p:txBody>
+          <a:bodyPr rtlCol="0" anchor="ctr"/>
+          <a:lstStyle/>
+          <a:p>
+            <a:pPr algn="ctr"/>
+          </a:p>
+        </p:txBody>
+      </p:sp>
+      <p:sp>
+        <p:nvSpPr>
+          <p:cNvPr id="28" name="s-badge-text-1"/>
+          <p:cNvSpPr txBox="1"/>
+          <p:nvPr/>
+        </p:nvSpPr>
+        <p:spPr>
+          <a:xfrm>
+            <a:off x="265176" y="1184148"/>
+            <a:ext cx="274320" cy="274320"/>
+          </a:xfrm>
+          <a:prstGeom prst="rect">
+            <a:avLst/>
+          </a:prstGeom>
+          <a:noFill/>
+        </p:spPr>
+        <p:txBody>
+          <a:bodyPr wrap="none" anchor="ctr">
+            <a:noAutofit/>
+          </a:bodyPr>
+          <a:lstStyle/>
+          <a:p>
+            <a:pPr algn="ctr"/>
+            <a:r>
+              <a:rPr sz="1200" b="1">
+                <a:solidFill>
+                  <a:srgbClr val="FFFFFF"/>
+                </a:solidFill>
+                <a:latin typeface="微软雅黑"/>
+              </a:rPr>
+              <a:t>1</a:t>
+            </a:r>
+          </a:p>
+        </p:txBody>
+      </p:sp>
+      <p:sp>
+        <p:nvSpPr>
+          <p:cNvPr id="29" name="s-badge-2"/>
+          <p:cNvSpPr/>
+          <p:nvPr/>
+        </p:nvSpPr>
+        <p:spPr>
+          <a:xfrm>
+            <a:off x="310896" y="2638044"/>
+            <a:ext cx="274320" cy="274320"/>
+          </a:xfrm>
+          <a:prstGeom prst="rect">
+            <a:avLst/>
+          </a:prstGeom>
+          <a:solidFill>
+            <a:srgbClr val="D6A000"/>
+          </a:solidFill>
+          <a:ln>
+            <a:noFill/>
+          </a:ln>
+          <a:effectLst/>
+        </p:spPr>
+        <p:style>
+          <a:lnRef idx="1">
+            <a:schemeClr val="accent1"/>
+          </a:lnRef>
+          <a:fillRef idx="3">
+            <a:schemeClr val="accent1"/>
+          </a:fillRef>
+          <a:effectRef idx="2">
+            <a:schemeClr val="accent1"/>
+          </a:effectRef>
+          <a:fontRef idx="minor">
+            <a:schemeClr val="lt1"/>
+          </a:fontRef>
+        </p:style>
+        <p:txBody>
+          <a:bodyPr rtlCol="0" anchor="ctr"/>
+          <a:lstStyle/>
+          <a:p>
+            <a:pPr algn="ctr"/>
+          </a:p>
+        </p:txBody>
+      </p:sp>
+      <p:sp>
+        <p:nvSpPr>
+          <p:cNvPr id="30" name="s-badge-text-2"/>
+          <p:cNvSpPr txBox="1"/>
+          <p:nvPr/>
+        </p:nvSpPr>
+        <p:spPr>
+          <a:xfrm>
+            <a:off x="310896" y="2638044"/>
+            <a:ext cx="274320" cy="274320"/>
+          </a:xfrm>
+          <a:prstGeom prst="rect">
+            <a:avLst/>
+          </a:prstGeom>
+          <a:noFill/>
+        </p:spPr>
+        <p:txBody>
+          <a:bodyPr wrap="none" anchor="ctr">
+            <a:noAutofit/>
+          </a:bodyPr>
+          <a:lstStyle/>
+          <a:p>
+            <a:pPr algn="ctr"/>
+            <a:r>
+              <a:rPr sz="1200" b="1">
+                <a:solidFill>
+                  <a:srgbClr val="FFFFFF"/>
+                </a:solidFill>
+                <a:latin typeface="微软雅黑"/>
+              </a:rPr>
+              <a:t>2</a:t>
+            </a:r>
+          </a:p>
+        </p:txBody>
+      </p:sp>
+      <p:sp>
+        <p:nvSpPr>
+          <p:cNvPr id="31" name="s-badge-3"/>
+          <p:cNvSpPr/>
+          <p:nvPr/>
+        </p:nvSpPr>
+        <p:spPr>
+          <a:xfrm>
+            <a:off x="310896" y="4146803"/>
+            <a:ext cx="274320" cy="274320"/>
+          </a:xfrm>
+          <a:prstGeom prst="rect">
+            <a:avLst/>
+          </a:prstGeom>
+          <a:solidFill>
+            <a:srgbClr val="D6A000"/>
+          </a:solidFill>
+          <a:ln>
+            <a:noFill/>
+          </a:ln>
+          <a:effectLst/>
+        </p:spPr>
+        <p:style>
+          <a:lnRef idx="1">
+            <a:schemeClr val="accent1"/>
+          </a:lnRef>
+          <a:fillRef idx="3">
+            <a:schemeClr val="accent1"/>
+          </a:fillRef>
+          <a:effectRef idx="2">
+            <a:schemeClr val="accent1"/>
+          </a:effectRef>
+          <a:fontRef idx="minor">
+            <a:schemeClr val="lt1"/>
+          </a:fontRef>
+        </p:style>
+        <p:txBody>
+          <a:bodyPr rtlCol="0" anchor="ctr"/>
+          <a:lstStyle/>
+          <a:p>
+            <a:pPr algn="ctr"/>
+          </a:p>
+        </p:txBody>
+      </p:sp>
+      <p:sp>
+        <p:nvSpPr>
+          <p:cNvPr id="32" name="s-badge-text-3"/>
+          <p:cNvSpPr txBox="1"/>
+          <p:nvPr/>
+        </p:nvSpPr>
+        <p:spPr>
+          <a:xfrm>
+            <a:off x="310896" y="4146803"/>
+            <a:ext cx="274320" cy="274320"/>
+          </a:xfrm>
+          <a:prstGeom prst="rect">
+            <a:avLst/>
+          </a:prstGeom>
+          <a:noFill/>
+        </p:spPr>
+        <p:txBody>
+          <a:bodyPr wrap="none" anchor="ctr">
+            <a:noAutofit/>
+          </a:bodyPr>
+          <a:lstStyle/>
+          <a:p>
+            <a:pPr algn="ctr"/>
+            <a:r>
+              <a:rPr sz="1200" b="1">
+                <a:solidFill>
+                  <a:srgbClr val="FFFFFF"/>
+                </a:solidFill>
+                <a:latin typeface="微软雅黑"/>
+              </a:rPr>
+              <a:t>3</a:t>
             </a:r>
           </a:p>
         </p:txBody>

--- a/银行流水分享_V1.7.pptx
+++ b/银行流水分享_V1.7.pptx
@@ -1616,7 +1616,7 @@
             <a:fld id="{4B68A51D-33DD-5B4A-A86B-549782FCD6DF}" type="datetimeFigureOut">
               <a:rPr kumimoji="1" lang="zh-CN" altLang="en-US" smtClean="0"/>
               <a:pPr/>
-              <a:t>2026/8/9</a:t>
+              <a:t>2026/8/10</a:t>
             </a:fld>
             <a:endParaRPr kumimoji="1" lang="zh-CN" altLang="en-US" dirty="0"/>
           </a:p>
@@ -2432,7 +2432,7 @@
           <p:nvPr>
             <p:extLst>
               <p:ext uri="{F5677B7D-0D2A-4D9B-9A5C-6D8D7D0E5A5D}">
-                <pptd:line xmlns="" xmlns:a14="http://schemas.microsoft.com/office/drawing/2010/main" xmlns:c="http://schemas.openxmlformats.org/drawingml/2006/chart" xmlns:cx="http://schemas.microsoft.com/office/drawing/2014/chartex" xmlns:m="http://schemas.openxmlformats.org/officeDocument/2006/math" xmlns:mc="http://schemas.openxmlformats.org/markup-compatibility/2006" xmlns:pptd="https://kimi-design.msh.team/pptd/2026" encoding="base64url">eyJ2aWV3Qm94IjpbMSwzNDBdLCJwb2ludHMiOiIwLDAgMCwzNDAifQ</pptd:line>
+                <pptd:line xmlns:pptd="https://kimi-design.msh.team/pptd/2026" xmlns:mc="http://schemas.openxmlformats.org/markup-compatibility/2006" xmlns:m="http://schemas.openxmlformats.org/officeDocument/2006/math" xmlns:cx="http://schemas.microsoft.com/office/drawing/2014/chartex" xmlns:c="http://schemas.openxmlformats.org/drawingml/2006/chart" xmlns:a14="http://schemas.microsoft.com/office/drawing/2010/main" xmlns="" encoding="base64url">eyJ2aWV3Qm94IjpbMSwzNDBdLCJwb2ludHMiOiIwLDAgMCwzNDAifQ</pptd:line>
               </p:ext>
             </p:extLst>
           </p:nvPr>
@@ -2603,7 +2603,7 @@
           <p:nvPr>
             <p:extLst>
               <p:ext uri="{F5677B7D-0D2A-4D9B-9A5C-6D8D7D0E5A5D}">
-                <pptd:line xmlns="" xmlns:a14="http://schemas.microsoft.com/office/drawing/2010/main" xmlns:c="http://schemas.openxmlformats.org/drawingml/2006/chart" xmlns:cx="http://schemas.microsoft.com/office/drawing/2014/chartex" xmlns:m="http://schemas.openxmlformats.org/officeDocument/2006/math" xmlns:mc="http://schemas.openxmlformats.org/markup-compatibility/2006" xmlns:pptd="https://kimi-design.msh.team/pptd/2026" encoding="base64url">eyJ2aWV3Qm94IjpbMzc2LDFdLCJwb2ludHMiOiIwLDAgMzc2LDAifQ</pptd:line>
+                <pptd:line xmlns:pptd="https://kimi-design.msh.team/pptd/2026" xmlns:mc="http://schemas.openxmlformats.org/markup-compatibility/2006" xmlns:m="http://schemas.openxmlformats.org/officeDocument/2006/math" xmlns:cx="http://schemas.microsoft.com/office/drawing/2014/chartex" xmlns:c="http://schemas.openxmlformats.org/drawingml/2006/chart" xmlns:a14="http://schemas.microsoft.com/office/drawing/2010/main" xmlns="" encoding="base64url">eyJ2aWV3Qm94IjpbMzc2LDFdLCJwb2ludHMiOiIwLDAgMzc2LDAifQ</pptd:line>
               </p:ext>
             </p:extLst>
           </p:nvPr>
@@ -2727,7 +2727,7 @@
           <p:nvPr>
             <p:extLst>
               <p:ext uri="{F5677B7D-0D2A-4D9B-9A5C-6D8D7D0E5A5D}">
-                <pptd:line xmlns="" xmlns:a14="http://schemas.microsoft.com/office/drawing/2010/main" xmlns:c="http://schemas.openxmlformats.org/drawingml/2006/chart" xmlns:cx="http://schemas.microsoft.com/office/drawing/2014/chartex" xmlns:m="http://schemas.openxmlformats.org/officeDocument/2006/math" xmlns:mc="http://schemas.openxmlformats.org/markup-compatibility/2006" xmlns:pptd="https://kimi-design.msh.team/pptd/2026" encoding="base64url">eyJ2aWV3Qm94IjpbMzc2LDFdLCJwb2ludHMiOiIwLDAgMzc2LDAifQ</pptd:line>
+                <pptd:line xmlns:pptd="https://kimi-design.msh.team/pptd/2026" xmlns:mc="http://schemas.openxmlformats.org/markup-compatibility/2006" xmlns:m="http://schemas.openxmlformats.org/officeDocument/2006/math" xmlns:cx="http://schemas.microsoft.com/office/drawing/2014/chartex" xmlns:c="http://schemas.openxmlformats.org/drawingml/2006/chart" xmlns:a14="http://schemas.microsoft.com/office/drawing/2010/main" xmlns="" encoding="base64url">eyJ2aWV3Qm94IjpbMzc2LDFdLCJwb2ludHMiOiIwLDAgMzc2LDAifQ</pptd:line>
               </p:ext>
             </p:extLst>
           </p:nvPr>
@@ -2871,7 +2871,7 @@
           <p:nvPr>
             <p:extLst>
               <p:ext uri="{F5677B7D-0D2A-4D9B-9A5C-6D8D7D0E5A5D}">
-                <pptd:line xmlns="" xmlns:a14="http://schemas.microsoft.com/office/drawing/2010/main" xmlns:c="http://schemas.openxmlformats.org/drawingml/2006/chart" xmlns:cx="http://schemas.microsoft.com/office/drawing/2014/chartex" xmlns:m="http://schemas.openxmlformats.org/officeDocument/2006/math" xmlns:mc="http://schemas.openxmlformats.org/markup-compatibility/2006" xmlns:pptd="https://kimi-design.msh.team/pptd/2026" encoding="base64url">eyJ2aWV3Qm94IjpbMzc2LDFdLCJwb2ludHMiOiIwLDAgMzc2LDAifQ</pptd:line>
+                <pptd:line xmlns:pptd="https://kimi-design.msh.team/pptd/2026" xmlns:mc="http://schemas.openxmlformats.org/markup-compatibility/2006" xmlns:m="http://schemas.openxmlformats.org/officeDocument/2006/math" xmlns:cx="http://schemas.microsoft.com/office/drawing/2014/chartex" xmlns:c="http://schemas.openxmlformats.org/drawingml/2006/chart" xmlns:a14="http://schemas.microsoft.com/office/drawing/2010/main" xmlns="" encoding="base64url">eyJ2aWV3Qm94IjpbMzc2LDFdLCJwb2ludHMiOiIwLDAgMzc2LDAifQ</pptd:line>
               </p:ext>
             </p:extLst>
           </p:nvPr>
@@ -3035,7 +3035,7 @@
             <p:nvPr>
               <p:extLst>
                 <p:ext uri="{F5677B7D-0D2A-4D9B-9A5C-6D8D7D0E5A5D}">
-                  <pptd:line xmlns:pptd="https://kimi-design.msh.team/pptd/2026" xmlns:mc="http://schemas.openxmlformats.org/markup-compatibility/2006" xmlns:m="http://schemas.openxmlformats.org/officeDocument/2006/math" xmlns:cx="http://schemas.microsoft.com/office/drawing/2014/chartex" xmlns:c="http://schemas.openxmlformats.org/drawingml/2006/chart" xmlns:a14="http://schemas.microsoft.com/office/drawing/2010/main" xmlns="" encoding="base64url">eyJ2aWV3Qm94IjpbODU2LDFdLCJwb2ludHMiOiIwLDAgODU2LDAifQ</pptd:line>
+                  <pptd:line xmlns="" xmlns:a14="http://schemas.microsoft.com/office/drawing/2010/main" xmlns:c="http://schemas.openxmlformats.org/drawingml/2006/chart" xmlns:cx="http://schemas.microsoft.com/office/drawing/2014/chartex" xmlns:m="http://schemas.openxmlformats.org/officeDocument/2006/math" xmlns:mc="http://schemas.openxmlformats.org/markup-compatibility/2006" xmlns:pptd="https://kimi-design.msh.team/pptd/2026" encoding="base64url">eyJ2aWV3Qm94IjpbODU2LDFdLCJwb2ludHMiOiIwLDAgODU2LDAifQ</pptd:line>
                 </p:ext>
               </p:extLst>
             </p:nvPr>
@@ -6180,24 +6180,53 @@
           <a:bodyPr wrap="none" lIns="0" tIns="0" rIns="0" bIns="0" rtlCol="0" anchor="ctr"/>
           <a:lstStyle/>
           <a:p>
-            <a:pPr algn="l">
+            <a:pPr marL="0" marR="0" lvl="0" indent="0" algn="l" defTabSz="914400" rtl="0" eaLnBrk="1" fontAlgn="auto" latinLnBrk="0" hangingPunct="1">
               <a:lnSpc>
                 <a:spcPct val="130000"/>
               </a:lnSpc>
+              <a:spcBef>
+                <a:spcPts val="0"/>
+              </a:spcBef>
+              <a:spcAft>
+                <a:spcPts val="0"/>
+              </a:spcAft>
+              <a:buClrTx/>
+              <a:buSzTx/>
+              <a:buFontTx/>
+              <a:buNone/>
+              <a:tabLst/>
+              <a:defRPr/>
             </a:pPr>
             <a:r>
-              <a:rPr lang="en-US" altLang="zh-CN" sz="2000" b="1" noProof="1">
+              <a:rPr kumimoji="0" lang="en-US" altLang="zh-CN" sz="2000" b="1" i="0" u="none" strike="noStrike" kern="1200" cap="none" spc="0" normalizeH="0" baseline="0" noProof="1">
+                <a:ln>
+                  <a:noFill/>
+                </a:ln>
                 <a:solidFill>
                   <a:srgbClr val="0A0A0A"/>
                 </a:solidFill>
+                <a:effectLst/>
+                <a:uLnTx/>
+                <a:uFillTx/>
                 <a:latin typeface="微软雅黑" panose="020B0503020204020204" pitchFamily="34" charset="-122"/>
                 <a:ea typeface="微软雅黑" panose="020B0503020204020204" pitchFamily="34" charset="-122"/>
+                <a:cs typeface="+mn-cs"/>
               </a:rPr>
               <a:t>从一笔交易到完整的客户财务画像，输出直接回答新增还款能力</a:t>
             </a:r>
-            <a:endParaRPr lang="en-US" altLang="zh-CN" sz="2000" noProof="1">
+            <a:endParaRPr kumimoji="0" lang="en-US" altLang="zh-CN" sz="2000" b="0" i="0" u="none" strike="noStrike" kern="1200" cap="none" spc="0" normalizeH="0" baseline="0" noProof="1">
+              <a:ln>
+                <a:noFill/>
+              </a:ln>
+              <a:solidFill>
+                <a:prstClr val="black"/>
+              </a:solidFill>
+              <a:effectLst/>
+              <a:uLnTx/>
+              <a:uFillTx/>
               <a:latin typeface="微软雅黑" panose="020B0503020204020204" pitchFamily="34" charset="-122"/>
               <a:ea typeface="微软雅黑" panose="020B0503020204020204" pitchFamily="34" charset="-122"/>
+              <a:cs typeface="+mn-cs"/>
             </a:endParaRPr>
           </a:p>
         </p:txBody>
@@ -6230,24 +6259,53 @@
           </a:bodyPr>
           <a:lstStyle/>
           <a:p>
-            <a:pPr algn="l">
+            <a:pPr marL="0" marR="0" lvl="0" indent="0" algn="l" defTabSz="914400" rtl="0" eaLnBrk="1" fontAlgn="auto" latinLnBrk="0" hangingPunct="1">
               <a:lnSpc>
                 <a:spcPct val="140000"/>
               </a:lnSpc>
+              <a:spcBef>
+                <a:spcPts val="0"/>
+              </a:spcBef>
+              <a:spcAft>
+                <a:spcPts val="0"/>
+              </a:spcAft>
+              <a:buClrTx/>
+              <a:buSzTx/>
+              <a:buFontTx/>
+              <a:buNone/>
+              <a:tabLst/>
+              <a:defRPr/>
             </a:pPr>
             <a:r>
-              <a:rPr lang="en-US" altLang="zh-CN" sz="1800" noProof="1">
+              <a:rPr kumimoji="0" lang="en-US" altLang="zh-CN" sz="1800" b="0" i="0" u="none" strike="noStrike" kern="1200" cap="none" spc="0" normalizeH="0" baseline="0" noProof="1">
+                <a:ln>
+                  <a:noFill/>
+                </a:ln>
                 <a:solidFill>
                   <a:srgbClr val="606060"/>
                 </a:solidFill>
+                <a:effectLst/>
+                <a:uLnTx/>
+                <a:uFillTx/>
                 <a:latin typeface="微软雅黑" panose="020B0503020204020204" pitchFamily="34" charset="-122"/>
                 <a:ea typeface="微软雅黑" panose="020B0503020204020204" pitchFamily="34" charset="-122"/>
+                <a:cs typeface="+mn-cs"/>
               </a:rPr>
               <a:t>原始流水 → 交易明细维度 → 用户汇总维度 → Serviceability 计算</a:t>
             </a:r>
-            <a:endParaRPr lang="en-US" altLang="zh-CN" sz="1800" noProof="1">
+            <a:endParaRPr kumimoji="0" lang="en-US" altLang="zh-CN" sz="1800" b="0" i="0" u="none" strike="noStrike" kern="1200" cap="none" spc="0" normalizeH="0" baseline="0" noProof="1">
+              <a:ln>
+                <a:noFill/>
+              </a:ln>
+              <a:solidFill>
+                <a:prstClr val="black"/>
+              </a:solidFill>
+              <a:effectLst/>
+              <a:uLnTx/>
+              <a:uFillTx/>
               <a:latin typeface="微软雅黑" panose="020B0503020204020204" pitchFamily="34" charset="-122"/>
               <a:ea typeface="微软雅黑" panose="020B0503020204020204" pitchFamily="34" charset="-122"/>
+              <a:cs typeface="+mn-cs"/>
             </a:endParaRPr>
           </a:p>
         </p:txBody>
@@ -6330,44 +6388,87 @@
           <a:bodyPr wrap="none" lIns="0" tIns="0" rIns="0" bIns="0" rtlCol="0" anchor="ctr"/>
           <a:lstStyle/>
           <a:p>
-            <a:pPr algn="l">
+            <a:pPr marL="0" marR="0" lvl="0" indent="0" algn="l" defTabSz="914400" rtl="0" eaLnBrk="1" fontAlgn="auto" latinLnBrk="0" hangingPunct="1">
               <a:lnSpc>
                 <a:spcPct val="125000"/>
               </a:lnSpc>
+              <a:spcBef>
+                <a:spcPts val="0"/>
+              </a:spcBef>
+              <a:spcAft>
+                <a:spcPts val="0"/>
+              </a:spcAft>
+              <a:buClrTx/>
+              <a:buSzTx/>
+              <a:buFontTx/>
+              <a:buNone/>
+              <a:tabLst/>
+              <a:defRPr/>
             </a:pPr>
             <a:r>
-              <a:rPr sz="1300" b="1" dirty="0">
+              <a:rPr kumimoji="0" sz="1200" b="1" i="0" u="none" strike="noStrike" kern="1200" cap="none" spc="0" normalizeH="0" baseline="0" noProof="0" dirty="0">
+                <a:ln>
+                  <a:noFill/>
+                </a:ln>
                 <a:solidFill>
                   <a:srgbClr val="0A0A0A"/>
                 </a:solidFill>
+                <a:effectLst/>
+                <a:uLnTx/>
+                <a:uFillTx/>
                 <a:latin typeface="微软雅黑"/>
                 <a:ea typeface="微软雅黑"/>
+                <a:cs typeface="+mn-cs"/>
               </a:rPr>
               <a:t>1. </a:t>
             </a:r>
             <a:r>
-              <a:rPr sz="1300" b="1" dirty="0" err="1">
+              <a:rPr kumimoji="0" sz="1200" b="1" i="0" u="none" strike="noStrike" kern="1200" cap="none" spc="0" normalizeH="0" baseline="0" noProof="0" dirty="0" err="1">
+                <a:ln>
+                  <a:noFill/>
+                </a:ln>
                 <a:solidFill>
                   <a:srgbClr val="0A0A0A"/>
                 </a:solidFill>
+                <a:effectLst/>
+                <a:uLnTx/>
+                <a:uFillTx/>
                 <a:latin typeface="微软雅黑"/>
                 <a:ea typeface="微软雅黑"/>
+                <a:cs typeface="+mn-cs"/>
               </a:rPr>
               <a:t>原始银行流水（输入示例</a:t>
             </a:r>
             <a:r>
-              <a:rPr sz="1300" b="1" dirty="0">
+              <a:rPr kumimoji="0" sz="1200" b="1" i="0" u="none" strike="noStrike" kern="1200" cap="none" spc="0" normalizeH="0" baseline="0" noProof="0" dirty="0">
+                <a:ln>
+                  <a:noFill/>
+                </a:ln>
                 <a:solidFill>
                   <a:srgbClr val="0A0A0A"/>
                 </a:solidFill>
+                <a:effectLst/>
+                <a:uLnTx/>
+                <a:uFillTx/>
                 <a:latin typeface="微软雅黑"/>
                 <a:ea typeface="微软雅黑"/>
+                <a:cs typeface="+mn-cs"/>
               </a:rPr>
               <a:t>）</a:t>
             </a:r>
-            <a:endParaRPr lang="en-US" sz="1200" noProof="1">
+            <a:endParaRPr kumimoji="0" lang="en-US" sz="1200" b="0" i="0" u="none" strike="noStrike" kern="1200" cap="none" spc="0" normalizeH="0" baseline="0" noProof="1">
+              <a:ln>
+                <a:noFill/>
+              </a:ln>
+              <a:solidFill>
+                <a:prstClr val="black"/>
+              </a:solidFill>
+              <a:effectLst/>
+              <a:uLnTx/>
+              <a:uFillTx/>
               <a:latin typeface="微软雅黑" panose="020B0503020204020204" pitchFamily="34" charset="-122"/>
               <a:ea typeface="微软雅黑" panose="020B0503020204020204" pitchFamily="34" charset="-122"/>
+              <a:cs typeface="+mn-cs"/>
             </a:endParaRPr>
           </a:p>
         </p:txBody>
@@ -6401,47 +6502,87 @@
           <a:bodyPr wrap="none" lIns="0" tIns="0" rIns="0" bIns="0" rtlCol="0" anchor="ctr"/>
           <a:lstStyle/>
           <a:p>
-            <a:pPr>
+            <a:pPr marL="0" marR="0" lvl="0" indent="0" algn="l" defTabSz="914400" rtl="0" eaLnBrk="1" fontAlgn="auto" latinLnBrk="0" hangingPunct="1">
               <a:lnSpc>
                 <a:spcPct val="125000"/>
               </a:lnSpc>
+              <a:spcBef>
+                <a:spcPts val="0"/>
+              </a:spcBef>
+              <a:spcAft>
+                <a:spcPts val="0"/>
+              </a:spcAft>
+              <a:buClrTx/>
+              <a:buSzTx/>
+              <a:buFontTx/>
+              <a:buNone/>
+              <a:tabLst/>
+              <a:defRPr/>
             </a:pPr>
             <a:r>
-              <a:rPr sz="1300" b="1" dirty="0">
+              <a:rPr kumimoji="0" sz="1200" b="1" i="0" u="none" strike="noStrike" kern="1200" cap="none" spc="0" normalizeH="0" baseline="0" noProof="0" dirty="0">
+                <a:ln>
+                  <a:noFill/>
+                </a:ln>
                 <a:solidFill>
                   <a:srgbClr val="0A0A0A"/>
                 </a:solidFill>
+                <a:effectLst/>
+                <a:uLnTx/>
+                <a:uFillTx/>
                 <a:latin typeface="微软雅黑"/>
                 <a:ea typeface="微软雅黑"/>
+                <a:cs typeface="+mn-cs"/>
               </a:rPr>
               <a:t>2. </a:t>
             </a:r>
             <a:r>
-              <a:rPr sz="1300" b="1" dirty="0" err="1">
+              <a:rPr kumimoji="0" sz="1200" b="1" i="0" u="none" strike="noStrike" kern="1200" cap="none" spc="0" normalizeH="0" baseline="0" noProof="0" dirty="0" err="1">
+                <a:ln>
+                  <a:noFill/>
+                </a:ln>
                 <a:solidFill>
                   <a:srgbClr val="0A0A0A"/>
                 </a:solidFill>
+                <a:effectLst/>
+                <a:uLnTx/>
+                <a:uFillTx/>
                 <a:latin typeface="微软雅黑"/>
                 <a:ea typeface="微软雅黑"/>
+                <a:cs typeface="+mn-cs"/>
               </a:rPr>
               <a:t>交易明细维度：理解每一笔交易（输出示例</a:t>
             </a:r>
             <a:r>
-              <a:rPr sz="1300" b="1" dirty="0">
+              <a:rPr kumimoji="0" sz="1200" b="1" i="0" u="none" strike="noStrike" kern="1200" cap="none" spc="0" normalizeH="0" baseline="0" noProof="0" dirty="0">
+                <a:ln>
+                  <a:noFill/>
+                </a:ln>
                 <a:solidFill>
                   <a:srgbClr val="0A0A0A"/>
                 </a:solidFill>
+                <a:effectLst/>
+                <a:uLnTx/>
+                <a:uFillTx/>
                 <a:latin typeface="微软雅黑"/>
                 <a:ea typeface="微软雅黑"/>
+                <a:cs typeface="+mn-cs"/>
               </a:rPr>
               <a:t>）</a:t>
             </a:r>
-            <a:endParaRPr lang="en-US" sz="1200" b="1" noProof="1">
+            <a:endParaRPr kumimoji="0" lang="en-US" sz="1200" b="1" i="0" u="none" strike="noStrike" kern="1200" cap="none" spc="0" normalizeH="0" baseline="0" noProof="1">
+              <a:ln>
+                <a:noFill/>
+              </a:ln>
               <a:solidFill>
                 <a:srgbClr val="0A0A0A"/>
               </a:solidFill>
+              <a:effectLst/>
+              <a:uLnTx/>
+              <a:uFillTx/>
               <a:latin typeface="微软雅黑"/>
               <a:ea typeface="微软雅黑"/>
+              <a:cs typeface="+mn-cs"/>
             </a:endParaRPr>
           </a:p>
         </p:txBody>
@@ -6475,47 +6616,87 @@
           <a:bodyPr wrap="none" lIns="0" tIns="0" rIns="0" bIns="0" rtlCol="0" anchor="ctr"/>
           <a:lstStyle/>
           <a:p>
-            <a:pPr>
+            <a:pPr marL="0" marR="0" lvl="0" indent="0" algn="l" defTabSz="914400" rtl="0" eaLnBrk="1" fontAlgn="auto" latinLnBrk="0" hangingPunct="1">
               <a:lnSpc>
                 <a:spcPct val="125000"/>
               </a:lnSpc>
+              <a:spcBef>
+                <a:spcPts val="0"/>
+              </a:spcBef>
+              <a:spcAft>
+                <a:spcPts val="0"/>
+              </a:spcAft>
+              <a:buClrTx/>
+              <a:buSzTx/>
+              <a:buFontTx/>
+              <a:buNone/>
+              <a:tabLst/>
+              <a:defRPr/>
             </a:pPr>
             <a:r>
-              <a:rPr sz="1300" b="1" dirty="0">
+              <a:rPr kumimoji="0" sz="1200" b="1" i="0" u="none" strike="noStrike" kern="1200" cap="none" spc="0" normalizeH="0" baseline="0" noProof="0" dirty="0">
+                <a:ln>
+                  <a:noFill/>
+                </a:ln>
                 <a:solidFill>
                   <a:srgbClr val="0A0A0A"/>
                 </a:solidFill>
+                <a:effectLst/>
+                <a:uLnTx/>
+                <a:uFillTx/>
                 <a:latin typeface="微软雅黑"/>
                 <a:ea typeface="微软雅黑"/>
+                <a:cs typeface="+mn-cs"/>
               </a:rPr>
               <a:t>3. </a:t>
             </a:r>
             <a:r>
-              <a:rPr sz="1300" b="1" dirty="0" err="1">
+              <a:rPr kumimoji="0" sz="1200" b="1" i="0" u="none" strike="noStrike" kern="1200" cap="none" spc="0" normalizeH="0" baseline="0" noProof="0" dirty="0" err="1">
+                <a:ln>
+                  <a:noFill/>
+                </a:ln>
                 <a:solidFill>
                   <a:srgbClr val="0A0A0A"/>
                 </a:solidFill>
+                <a:effectLst/>
+                <a:uLnTx/>
+                <a:uFillTx/>
                 <a:latin typeface="微软雅黑"/>
                 <a:ea typeface="微软雅黑"/>
+                <a:cs typeface="+mn-cs"/>
               </a:rPr>
               <a:t>用户汇总维度：形成完整负债画像（输出示例</a:t>
             </a:r>
             <a:r>
-              <a:rPr sz="1300" b="1" dirty="0">
+              <a:rPr kumimoji="0" sz="1200" b="1" i="0" u="none" strike="noStrike" kern="1200" cap="none" spc="0" normalizeH="0" baseline="0" noProof="0" dirty="0">
+                <a:ln>
+                  <a:noFill/>
+                </a:ln>
                 <a:solidFill>
                   <a:srgbClr val="0A0A0A"/>
                 </a:solidFill>
+                <a:effectLst/>
+                <a:uLnTx/>
+                <a:uFillTx/>
                 <a:latin typeface="微软雅黑"/>
                 <a:ea typeface="微软雅黑"/>
+                <a:cs typeface="+mn-cs"/>
               </a:rPr>
               <a:t>）</a:t>
             </a:r>
-            <a:endParaRPr lang="en-US" sz="1200" b="1" noProof="1">
+            <a:endParaRPr kumimoji="0" lang="en-US" sz="1200" b="1" i="0" u="none" strike="noStrike" kern="1200" cap="none" spc="0" normalizeH="0" baseline="0" noProof="1">
+              <a:ln>
+                <a:noFill/>
+              </a:ln>
               <a:solidFill>
                 <a:srgbClr val="0A0A0A"/>
               </a:solidFill>
+              <a:effectLst/>
+              <a:uLnTx/>
+              <a:uFillTx/>
               <a:latin typeface="微软雅黑"/>
               <a:ea typeface="微软雅黑"/>
+              <a:cs typeface="+mn-cs"/>
             </a:endParaRPr>
           </a:p>
         </p:txBody>
@@ -6532,13 +6713,7 @@
           <p:cNvGraphicFramePr>
             <a:graphicFrameLocks noGrp="1"/>
           </p:cNvGraphicFramePr>
-          <p:nvPr>
-            <p:extLst>
-              <p:ext uri="{D42A27DB-BD31-4B8C-83A1-F6EECF244321}">
-                <p14:modId xmlns:p14="http://schemas.microsoft.com/office/powerpoint/2010/main" val="2767462542"/>
-              </p:ext>
-            </p:extLst>
-          </p:nvPr>
+          <p:nvPr/>
         </p:nvGraphicFramePr>
         <p:xfrm>
           <a:off x="650815" y="1550812"/>
@@ -6904,8 +7079,17 @@
                     <a:bodyPr/>
                     <a:lstStyle/>
                     <a:p>
-                      <a:r>
-                        <a:t>BILL PAY Fair Go Finance A1002345</a:t>
+                      <a:pPr marL="0" algn="l" defTabSz="914400" rtl="0" eaLnBrk="1" latinLnBrk="0" hangingPunct="1"/>
+                      <a:r>
+                        <a:rPr sz="800" b="0" kern="1200" dirty="0">
+                          <a:solidFill>
+                            <a:srgbClr val="0A0A0A"/>
+                          </a:solidFill>
+                          <a:latin typeface="微软雅黑" panose="020B0503020204020204" pitchFamily="34" charset="-122"/>
+                          <a:ea typeface="微软雅黑" panose="020B0503020204020204" pitchFamily="34" charset="-122"/>
+                          <a:cs typeface="+mn-cs"/>
+                        </a:rPr>
+                        <a:t>BILL PAY Fair Go Finance DT.58oa72 SACC 239</a:t>
                       </a:r>
                     </a:p>
                   </a:txBody>
@@ -7078,8 +7262,17 @@
                     <a:bodyPr/>
                     <a:lstStyle/>
                     <a:p>
-                      <a:r>
-                        <a:t>EFTPOS MCDONALDS BRISBANE QLD</a:t>
+                      <a:pPr marL="0" algn="l" defTabSz="914400" rtl="0" eaLnBrk="1" latinLnBrk="0" hangingPunct="1"/>
+                      <a:r>
+                        <a:rPr sz="800" b="0" kern="1200" dirty="0">
+                          <a:solidFill>
+                            <a:srgbClr val="0A0A0A"/>
+                          </a:solidFill>
+                          <a:latin typeface="微软雅黑" panose="020B0503020204020204" pitchFamily="34" charset="-122"/>
+                          <a:ea typeface="微软雅黑" panose="020B0503020204020204" pitchFamily="34" charset="-122"/>
+                          <a:cs typeface="+mn-cs"/>
+                        </a:rPr>
+                        <a:t>MCDONALDS BRISBANE</a:t>
                       </a:r>
                     </a:p>
                   </a:txBody>
@@ -7252,8 +7445,17 @@
                     <a:bodyPr/>
                     <a:lstStyle/>
                     <a:p>
-                      <a:r>
-                        <a:t>CHEMIST WAREHOUSE 123 BRISBANE QLD</a:t>
+                      <a:pPr marL="0" algn="l" defTabSz="914400" rtl="0" eaLnBrk="1" latinLnBrk="0" hangingPunct="1"/>
+                      <a:r>
+                        <a:rPr sz="800" b="0" kern="1200" dirty="0">
+                          <a:solidFill>
+                            <a:srgbClr val="0A0A0A"/>
+                          </a:solidFill>
+                          <a:latin typeface="微软雅黑" panose="020B0503020204020204" pitchFamily="34" charset="-122"/>
+                          <a:ea typeface="微软雅黑" panose="020B0503020204020204" pitchFamily="34" charset="-122"/>
+                          <a:cs typeface="+mn-cs"/>
+                        </a:rPr>
+                        <a:t>CHEMIST WAREHOUSE 123</a:t>
                       </a:r>
                     </a:p>
                   </a:txBody>
@@ -7426,8 +7628,17 @@
                     <a:bodyPr/>
                     <a:lstStyle/>
                     <a:p>
-                      <a:r>
-                        <a:t>AMZNPRIMEAU*</a:t>
+                      <a:pPr marL="0" algn="l" defTabSz="914400" rtl="0" eaLnBrk="1" latinLnBrk="0" hangingPunct="1"/>
+                      <a:r>
+                        <a:rPr sz="800" b="0" kern="1200" dirty="0">
+                          <a:solidFill>
+                            <a:srgbClr val="0A0A0A"/>
+                          </a:solidFill>
+                          <a:latin typeface="微软雅黑" panose="020B0503020204020204" pitchFamily="34" charset="-122"/>
+                          <a:ea typeface="微软雅黑" panose="020B0503020204020204" pitchFamily="34" charset="-122"/>
+                          <a:cs typeface="+mn-cs"/>
+                        </a:rPr>
+                        <a:t>AMZNPRIMEA*</a:t>
                       </a:r>
                     </a:p>
                   </a:txBody>
@@ -7600,8 +7811,17 @@
                     <a:bodyPr/>
                     <a:lstStyle/>
                     <a:p>
-                      <a:r>
-                        <a:t>PAYROLL DEPOSIT ACME PTY LTD</a:t>
+                      <a:pPr marL="0" algn="l" defTabSz="914400" rtl="0" eaLnBrk="1" latinLnBrk="0" hangingPunct="1"/>
+                      <a:r>
+                        <a:rPr sz="800" b="0" kern="1200" dirty="0">
+                          <a:solidFill>
+                            <a:srgbClr val="0A0A0A"/>
+                          </a:solidFill>
+                          <a:latin typeface="微软雅黑" panose="020B0503020204020204" pitchFamily="34" charset="-122"/>
+                          <a:ea typeface="微软雅黑" panose="020B0503020204020204" pitchFamily="34" charset="-122"/>
+                          <a:cs typeface="+mn-cs"/>
+                        </a:rPr>
+                        <a:t>PAYROLL ACME PTY LTD</a:t>
                       </a:r>
                     </a:p>
                   </a:txBody>
@@ -7651,13 +7871,7 @@
           <p:cNvGraphicFramePr>
             <a:graphicFrameLocks noGrp="1"/>
           </p:cNvGraphicFramePr>
-          <p:nvPr>
-            <p:extLst>
-              <p:ext uri="{D42A27DB-BD31-4B8C-83A1-F6EECF244321}">
-                <p14:modId xmlns:p14="http://schemas.microsoft.com/office/powerpoint/2010/main" val="2219282757"/>
-              </p:ext>
-            </p:extLst>
-          </p:nvPr>
+          <p:nvPr/>
         </p:nvGraphicFramePr>
         <p:xfrm>
           <a:off x="634999" y="2940397"/>
@@ -7668,56 +7882,63 @@
             <a:tbl>
               <a:tblPr/>
               <a:tblGrid>
-                <a:gridCol w="768096">
+                <a:gridCol w="767081">
                   <a:extLst>
                     <a:ext uri="{9D8B030D-6E8A-4147-A177-3AD203B41FA5}">
                       <a16:colId xmlns:a16="http://schemas.microsoft.com/office/drawing/2014/main" val="20000"/>
                     </a:ext>
                   </a:extLst>
                 </a:gridCol>
-                <a:gridCol w="914400">
+                <a:gridCol w="2346960">
                   <a:extLst>
                     <a:ext uri="{9D8B030D-6E8A-4147-A177-3AD203B41FA5}">
                       <a16:colId xmlns:a16="http://schemas.microsoft.com/office/drawing/2014/main" val="20001"/>
                     </a:ext>
                   </a:extLst>
                 </a:gridCol>
-                <a:gridCol w="2761488">
+                <a:gridCol w="1229360">
                   <a:extLst>
                     <a:ext uri="{9D8B030D-6E8A-4147-A177-3AD203B41FA5}">
                       <a16:colId xmlns:a16="http://schemas.microsoft.com/office/drawing/2014/main" val="20002"/>
                     </a:ext>
                   </a:extLst>
                 </a:gridCol>
-                <a:gridCol w="1225296">
+                <a:gridCol w="889000">
                   <a:extLst>
                     <a:ext uri="{9D8B030D-6E8A-4147-A177-3AD203B41FA5}">
                       <a16:colId xmlns:a16="http://schemas.microsoft.com/office/drawing/2014/main" val="4140160165"/>
                     </a:ext>
                   </a:extLst>
                 </a:gridCol>
-                <a:gridCol w="886968">
+                <a:gridCol w="651418">
+                  <a:extLst>
+                    <a:ext uri="{9D8B030D-6E8A-4147-A177-3AD203B41FA5}">
+                      <a16:colId xmlns:a16="http://schemas.microsoft.com/office/drawing/2014/main" val="2534051383"/>
+                    </a:ext>
+                  </a:extLst>
+                </a:gridCol>
+                <a:gridCol w="1012354">
                   <a:extLst>
                     <a:ext uri="{9D8B030D-6E8A-4147-A177-3AD203B41FA5}">
                       <a16:colId xmlns:a16="http://schemas.microsoft.com/office/drawing/2014/main" val="1228048883"/>
                     </a:ext>
                   </a:extLst>
                 </a:gridCol>
-                <a:gridCol w="1014984">
+                <a:gridCol w="829993">
                   <a:extLst>
                     <a:ext uri="{9D8B030D-6E8A-4147-A177-3AD203B41FA5}">
                       <a16:colId xmlns:a16="http://schemas.microsoft.com/office/drawing/2014/main" val="2445864241"/>
                     </a:ext>
                   </a:extLst>
                 </a:gridCol>
-                <a:gridCol w="832104">
+                <a:gridCol w="913151">
                   <a:extLst>
                     <a:ext uri="{9D8B030D-6E8A-4147-A177-3AD203B41FA5}">
                       <a16:colId xmlns:a16="http://schemas.microsoft.com/office/drawing/2014/main" val="516131836"/>
                     </a:ext>
                   </a:extLst>
                 </a:gridCol>
-                <a:gridCol w="2496312">
+                <a:gridCol w="2262314">
                   <a:extLst>
                     <a:ext uri="{9D8B030D-6E8A-4147-A177-3AD203B41FA5}">
                       <a16:colId xmlns:a16="http://schemas.microsoft.com/office/drawing/2014/main" val="994888910"/>
@@ -7726,11 +7947,6 @@
                 </a:gridCol>
               </a:tblGrid>
               <a:tr h="170373">
-                <a:extLst>
-                  <a:ext uri="{0D108BD9-81ED-4DB2-BD59-A6C34878D82A}">
-                    <a16:rowId xmlns:a16="http://schemas.microsoft.com/office/drawing/2014/main" val="10000"/>
-                  </a:ext>
-                </a:extLst>
                 <a:tc>
                   <a:txBody>
                     <a:bodyPr/>
@@ -7749,7 +7965,7 @@
                       </a:r>
                     </a:p>
                   </a:txBody>
-                  <a:tcPr marL="27432" marR="27432" marT="9144" marB="9144" w="768096">
+                  <a:tcPr marL="27432" marR="27432" marT="9144" marB="9144">
                     <a:lnL>
                       <a:noFill/>
                     </a:lnL>
@@ -7781,7 +7997,7 @@
                           <a:latin typeface="微软雅黑"/>
                           <a:ea typeface="微软雅黑"/>
                         </a:rPr>
-                        <a:t>交易金额</a:t>
+                        <a:t>交易描述</a:t>
                       </a:r>
                       <a:endParaRPr sz="800" b="1" dirty="0">
                         <a:solidFill>
@@ -7792,7 +8008,7 @@
                       </a:endParaRPr>
                     </a:p>
                   </a:txBody>
-                  <a:tcPr marL="27432" marR="27432" marT="9144" marB="9144" w="914400">
+                  <a:tcPr marL="27432" marR="27432" marT="9144" marB="9144">
                     <a:lnL>
                       <a:noFill/>
                     </a:lnL>
@@ -7802,14 +8018,10 @@
                     <a:lnT>
                       <a:noFill/>
                     </a:lnT>
-                    <a:lnB w="19050" cap="flat" cmpd="sng" algn="ctr">
+                    <a:lnB w="19050">
                       <a:solidFill>
                         <a:srgbClr val="0A0A0A"/>
                       </a:solidFill>
-                      <a:prstDash val="solid"/>
-                      <a:round/>
-                      <a:headEnd type="none" w="med" len="med"/>
-                      <a:tailEnd type="none" w="med" len="med"/>
                     </a:lnB>
                     <a:noFill/>
                   </a:tcPr>
@@ -7828,7 +8040,7 @@
                           <a:latin typeface="微软雅黑"/>
                           <a:ea typeface="微软雅黑"/>
                         </a:rPr>
-                        <a:t>交易描述</a:t>
+                        <a:t>标准交易对手</a:t>
                       </a:r>
                       <a:endParaRPr sz="800" b="1" dirty="0">
                         <a:solidFill>
@@ -7839,7 +8051,7 @@
                       </a:endParaRPr>
                     </a:p>
                   </a:txBody>
-                  <a:tcPr marL="27432" marR="27432" marT="9144" marB="9144" w="2761488">
+                  <a:tcPr marL="27432" marR="27432" marT="9144" marB="9144">
                     <a:lnL>
                       <a:noFill/>
                     </a:lnL>
@@ -7871,7 +8083,7 @@
                           <a:latin typeface="微软雅黑"/>
                           <a:ea typeface="微软雅黑"/>
                         </a:rPr>
-                        <a:t>标准交易对手</a:t>
+                        <a:t>主体类型</a:t>
                       </a:r>
                       <a:endParaRPr sz="800" b="1" dirty="0">
                         <a:solidFill>
@@ -7882,7 +8094,7 @@
                       </a:endParaRPr>
                     </a:p>
                   </a:txBody>
-                  <a:tcPr marL="27432" marR="27432" marT="9144" marB="9144" w="1225296">
+                  <a:tcPr marL="27432" marR="27432" marT="9144" marB="9144">
                     <a:lnL>
                       <a:noFill/>
                     </a:lnL>
@@ -7892,10 +8104,94 @@
                     <a:lnT>
                       <a:noFill/>
                     </a:lnT>
-                    <a:lnB w="19050">
+                    <a:lnB w="19050" cap="flat" cmpd="sng" algn="ctr">
                       <a:solidFill>
                         <a:srgbClr val="0A0A0A"/>
                       </a:solidFill>
+                      <a:prstDash val="solid"/>
+                      <a:round/>
+                      <a:headEnd type="none" w="med" len="med"/>
+                      <a:tailEnd type="none" w="med" len="med"/>
+                    </a:lnB>
+                    <a:noFill/>
+                  </a:tcPr>
+                </a:tc>
+                <a:tc>
+                  <a:txBody>
+                    <a:bodyPr/>
+                    <a:lstStyle/>
+                    <a:p>
+                      <a:pPr algn="l"/>
+                      <a:r>
+                        <a:rPr sz="800" b="1">
+                          <a:solidFill>
+                            <a:srgbClr val="0A0A0A"/>
+                          </a:solidFill>
+                          <a:latin typeface="微软雅黑"/>
+                          <a:ea typeface="微软雅黑"/>
+                        </a:rPr>
+                        <a:t>一级分类</a:t>
+                      </a:r>
+                    </a:p>
+                  </a:txBody>
+                  <a:tcPr marL="27432" marR="27432" marT="9144" marB="9144">
+                    <a:lnL>
+                      <a:noFill/>
+                    </a:lnL>
+                    <a:lnR>
+                      <a:noFill/>
+                    </a:lnR>
+                    <a:lnT>
+                      <a:noFill/>
+                    </a:lnT>
+                    <a:lnB w="19050" cap="flat" cmpd="sng" algn="ctr">
+                      <a:solidFill>
+                        <a:srgbClr val="0A0A0A"/>
+                      </a:solidFill>
+                      <a:prstDash val="solid"/>
+                      <a:round/>
+                      <a:headEnd type="none" w="med" len="med"/>
+                      <a:tailEnd type="none" w="med" len="med"/>
+                    </a:lnB>
+                    <a:noFill/>
+                  </a:tcPr>
+                </a:tc>
+                <a:tc>
+                  <a:txBody>
+                    <a:bodyPr/>
+                    <a:lstStyle/>
+                    <a:p>
+                      <a:pPr algn="l"/>
+                      <a:r>
+                        <a:rPr sz="800" b="1">
+                          <a:solidFill>
+                            <a:srgbClr val="0A0A0A"/>
+                          </a:solidFill>
+                          <a:latin typeface="微软雅黑"/>
+                          <a:ea typeface="微软雅黑"/>
+                        </a:rPr>
+                        <a:t>二级分类</a:t>
+                      </a:r>
+                    </a:p>
+                  </a:txBody>
+                  <a:tcPr marL="27432" marR="27432" marT="9144" marB="9144">
+                    <a:lnL>
+                      <a:noFill/>
+                    </a:lnL>
+                    <a:lnR>
+                      <a:noFill/>
+                    </a:lnR>
+                    <a:lnT>
+                      <a:noFill/>
+                    </a:lnT>
+                    <a:lnB w="19050" cap="flat" cmpd="sng" algn="ctr">
+                      <a:solidFill>
+                        <a:srgbClr val="0A0A0A"/>
+                      </a:solidFill>
+                      <a:prstDash val="solid"/>
+                      <a:round/>
+                      <a:headEnd type="none" w="med" len="med"/>
+                      <a:tailEnd type="none" w="med" len="med"/>
                     </a:lnB>
                     <a:noFill/>
                   </a:tcPr>
@@ -7914,7 +8210,7 @@
                           <a:latin typeface="微软雅黑"/>
                           <a:ea typeface="微软雅黑"/>
                         </a:rPr>
-                        <a:t>主体类型</a:t>
+                        <a:t>交易性质</a:t>
                       </a:r>
                       <a:endParaRPr sz="800" b="1" dirty="0">
                         <a:solidFill>
@@ -7925,39 +8221,7 @@
                       </a:endParaRPr>
                     </a:p>
                   </a:txBody>
-                  <a:tcPr marL="27432" marR="27432" marT="9144" marB="9144" w="886968">
-                    <a:lnL>
-                      <a:noFill/>
-                    </a:lnL>
-                    <a:lnR>
-                      <a:noFill/>
-                    </a:lnR>
-                    <a:lnT>
-                      <a:noFill/>
-                    </a:lnT>
-                    <a:lnB w="19050" cap="flat" cmpd="sng" algn="ctr">
-                      <a:solidFill>
-                        <a:srgbClr val="0A0A0A"/>
-                      </a:solidFill>
-                      <a:prstDash val="solid"/>
-                      <a:round/>
-                      <a:headEnd type="none" w="med" len="med"/>
-                      <a:tailEnd type="none" w="med" len="med"/>
-                    </a:lnB>
-                    <a:noFill/>
-                  </a:tcPr>
-                </a:tc>
-                <a:tc>
-                  <a:txBody>
-                    <a:bodyPr/>
-                    <a:lstStyle/>
-                    <a:p>
-                      <a:r>
-                        <a:t>分类</a:t>
-                      </a:r>
-                    </a:p>
-                  </a:txBody>
-                  <a:tcPr marL="27432" marR="27432" marT="9144" marB="9144" w="1014984">
+                  <a:tcPr marL="27432" marR="27432" marT="9144" marB="9144">
                     <a:lnL>
                       <a:noFill/>
                     </a:lnL>
@@ -7993,7 +8257,7 @@
                           <a:latin typeface="微软雅黑"/>
                           <a:ea typeface="微软雅黑"/>
                         </a:rPr>
-                        <a:t>交易性质</a:t>
+                        <a:t>交易金额</a:t>
                       </a:r>
                       <a:endParaRPr sz="800" b="1" dirty="0">
                         <a:solidFill>
@@ -8004,7 +8268,7 @@
                       </a:endParaRPr>
                     </a:p>
                   </a:txBody>
-                  <a:tcPr marL="27432" marR="27432" marT="9144" marB="9144" w="832104">
+                  <a:tcPr marL="27432" marR="27432" marT="9144" marB="9144">
                     <a:lnL>
                       <a:noFill/>
                     </a:lnL>
@@ -8044,7 +8308,7 @@
                       </a:r>
                     </a:p>
                   </a:txBody>
-                  <a:tcPr marL="27432" marR="27432" marT="9144" marB="9144" w="2496312">
+                  <a:tcPr marL="27432" marR="27432" marT="9144" marB="9144">
                     <a:lnL>
                       <a:noFill/>
                     </a:lnL>
@@ -8066,13 +8330,13 @@
                     <a:noFill/>
                   </a:tcPr>
                 </a:tc>
+                <a:extLst>
+                  <a:ext uri="{0D108BD9-81ED-4DB2-BD59-A6C34878D82A}">
+                    <a16:rowId xmlns:a16="http://schemas.microsoft.com/office/drawing/2014/main" val="10000"/>
+                  </a:ext>
+                </a:extLst>
               </a:tr>
               <a:tr h="170373">
-                <a:extLst>
-                  <a:ext uri="{0D108BD9-81ED-4DB2-BD59-A6C34878D82A}">
-                    <a16:rowId xmlns:a16="http://schemas.microsoft.com/office/drawing/2014/main" val="10001"/>
-                  </a:ext>
-                </a:extLst>
                 <a:tc>
                   <a:txBody>
                     <a:bodyPr/>
@@ -8092,7 +8356,50 @@
                       </a:r>
                     </a:p>
                   </a:txBody>
-                  <a:tcPr marL="27432" marR="27432" marT="9144" marB="9144" w="768096">
+                  <a:tcPr marL="27432" marR="27432" marT="9144" marB="9144">
+                    <a:lnL>
+                      <a:noFill/>
+                    </a:lnL>
+                    <a:lnR>
+                      <a:noFill/>
+                    </a:lnR>
+                    <a:lnT w="19050" cap="flat" cmpd="sng" algn="ctr">
+                      <a:solidFill>
+                        <a:srgbClr val="0A0A0A"/>
+                      </a:solidFill>
+                      <a:prstDash val="solid"/>
+                      <a:round/>
+                      <a:headEnd type="none" w="med" len="med"/>
+                      <a:tailEnd type="none" w="med" len="med"/>
+                    </a:lnT>
+                    <a:lnB w="9525">
+                      <a:solidFill>
+                        <a:srgbClr val="D6D6D6"/>
+                      </a:solidFill>
+                    </a:lnB>
+                    <a:noFill/>
+                  </a:tcPr>
+                </a:tc>
+                <a:tc>
+                  <a:txBody>
+                    <a:bodyPr/>
+                    <a:lstStyle/>
+                    <a:p>
+                      <a:pPr marL="0" algn="l" defTabSz="914400" rtl="0" eaLnBrk="1" latinLnBrk="0" hangingPunct="1"/>
+                      <a:r>
+                        <a:rPr sz="800" b="0" kern="1200" dirty="0">
+                          <a:solidFill>
+                            <a:srgbClr val="0A0A0A"/>
+                          </a:solidFill>
+                          <a:latin typeface="微软雅黑" panose="020B0503020204020204" pitchFamily="34" charset="-122"/>
+                          <a:ea typeface="微软雅黑" panose="020B0503020204020204" pitchFamily="34" charset="-122"/>
+                          <a:cs typeface="+mn-cs"/>
+                        </a:rPr>
+                        <a:t>BILL PAY Fair Go Finance DT.58oa72 SACC 239</a:t>
+                      </a:r>
+                    </a:p>
+                  </a:txBody>
+                  <a:tcPr marL="27432" marR="27432" marT="9144" marB="9144">
                     <a:lnL>
                       <a:noFill/>
                     </a:lnL>
@@ -8131,92 +8438,11 @@
                           <a:ea typeface="微软雅黑" panose="020B0503020204020204" pitchFamily="34" charset="-122"/>
                           <a:cs typeface="+mn-cs"/>
                         </a:rPr>
-                        <a:t>A$156</a:t>
-                      </a:r>
-                    </a:p>
-                  </a:txBody>
-                  <a:tcPr marL="27432" marR="27432" marT="9144" marB="9144" w="914400">
-                    <a:lnL>
-                      <a:noFill/>
-                    </a:lnL>
-                    <a:lnR>
-                      <a:noFill/>
-                    </a:lnR>
-                    <a:lnT w="19050" cap="flat" cmpd="sng" algn="ctr">
-                      <a:solidFill>
-                        <a:srgbClr val="0A0A0A"/>
-                      </a:solidFill>
-                      <a:prstDash val="solid"/>
-                      <a:round/>
-                      <a:headEnd type="none" w="med" len="med"/>
-                      <a:tailEnd type="none" w="med" len="med"/>
-                    </a:lnT>
-                    <a:lnB w="9525" cap="flat" cmpd="sng" algn="ctr">
-                      <a:solidFill>
-                        <a:srgbClr val="D6D6D6"/>
-                      </a:solidFill>
-                      <a:prstDash val="solid"/>
-                      <a:round/>
-                      <a:headEnd type="none" w="med" len="med"/>
-                      <a:tailEnd type="none" w="med" len="med"/>
-                    </a:lnB>
-                    <a:noFill/>
-                  </a:tcPr>
-                </a:tc>
-                <a:tc>
-                  <a:txBody>
-                    <a:bodyPr/>
-                    <a:lstStyle/>
-                    <a:p>
-                      <a:r>
-                        <a:t>BILL PAY Fair Go Finance A1002345</a:t>
-                      </a:r>
-                    </a:p>
-                  </a:txBody>
-                  <a:tcPr marL="27432" marR="27432" marT="9144" marB="9144" w="2761488">
-                    <a:lnL>
-                      <a:noFill/>
-                    </a:lnL>
-                    <a:lnR>
-                      <a:noFill/>
-                    </a:lnR>
-                    <a:lnT w="19050" cap="flat" cmpd="sng" algn="ctr">
-                      <a:solidFill>
-                        <a:srgbClr val="0A0A0A"/>
-                      </a:solidFill>
-                      <a:prstDash val="solid"/>
-                      <a:round/>
-                      <a:headEnd type="none" w="med" len="med"/>
-                      <a:tailEnd type="none" w="med" len="med"/>
-                    </a:lnT>
-                    <a:lnB w="9525">
-                      <a:solidFill>
-                        <a:srgbClr val="D6D6D6"/>
-                      </a:solidFill>
-                    </a:lnB>
-                    <a:noFill/>
-                  </a:tcPr>
-                </a:tc>
-                <a:tc>
-                  <a:txBody>
-                    <a:bodyPr/>
-                    <a:lstStyle/>
-                    <a:p>
-                      <a:pPr marL="0" algn="l" defTabSz="914400" rtl="0" eaLnBrk="1" latinLnBrk="0" hangingPunct="1"/>
-                      <a:r>
-                        <a:rPr sz="800" b="0" kern="1200">
-                          <a:solidFill>
-                            <a:srgbClr val="0A0A0A"/>
-                          </a:solidFill>
-                          <a:latin typeface="微软雅黑" panose="020B0503020204020204" pitchFamily="34" charset="-122"/>
-                          <a:ea typeface="微软雅黑" panose="020B0503020204020204" pitchFamily="34" charset="-122"/>
-                          <a:cs typeface="+mn-cs"/>
-                        </a:rPr>
                         <a:t>Fair Go Finance</a:t>
                       </a:r>
                     </a:p>
                   </a:txBody>
-                  <a:tcPr marL="27432" marR="27432" marT="9144" marB="9144" w="1225296">
+                  <a:tcPr marL="27432" marR="27432" marT="9144" marB="9144">
                     <a:lnL>
                       <a:noFill/>
                     </a:lnL>
@@ -8267,7 +8493,7 @@
                       </a:endParaRPr>
                     </a:p>
                   </a:txBody>
-                  <a:tcPr marL="27432" marR="27432" marT="9144" marB="9144" w="886968">
+                  <a:tcPr marL="27432" marR="27432" marT="9144" marB="9144">
                     <a:lnL>
                       <a:noFill/>
                     </a:lnL>
@@ -8310,11 +8536,58 @@
                           <a:ea typeface="微软雅黑" panose="020B0503020204020204" pitchFamily="34" charset="-122"/>
                           <a:cs typeface="+mn-cs"/>
                         </a:rPr>
+                        <a:t>贷款及还款</a:t>
+                      </a:r>
+                    </a:p>
+                  </a:txBody>
+                  <a:tcPr marL="27432" marR="27432" marT="9144" marB="9144">
+                    <a:lnL>
+                      <a:noFill/>
+                    </a:lnL>
+                    <a:lnR>
+                      <a:noFill/>
+                    </a:lnR>
+                    <a:lnT w="19050" cap="flat" cmpd="sng" algn="ctr">
+                      <a:solidFill>
+                        <a:srgbClr val="0A0A0A"/>
+                      </a:solidFill>
+                      <a:prstDash val="solid"/>
+                      <a:round/>
+                      <a:headEnd type="none" w="med" len="med"/>
+                      <a:tailEnd type="none" w="med" len="med"/>
+                    </a:lnT>
+                    <a:lnB w="9525" cap="flat" cmpd="sng" algn="ctr">
+                      <a:solidFill>
+                        <a:srgbClr val="D6D6D6"/>
+                      </a:solidFill>
+                      <a:prstDash val="solid"/>
+                      <a:round/>
+                      <a:headEnd type="none" w="med" len="med"/>
+                      <a:tailEnd type="none" w="med" len="med"/>
+                    </a:lnB>
+                    <a:noFill/>
+                  </a:tcPr>
+                </a:tc>
+                <a:tc>
+                  <a:txBody>
+                    <a:bodyPr/>
+                    <a:lstStyle/>
+                    <a:p>
+                      <a:pPr marL="0" algn="l" defTabSz="914400" rtl="0" eaLnBrk="1" latinLnBrk="0" hangingPunct="1"/>
+                      <a:r>
+                        <a:rPr sz="800" b="0" kern="1200">
+                          <a:solidFill>
+                            <a:srgbClr val="0A0A0A"/>
+                          </a:solidFill>
+                          <a:latin typeface="微软雅黑" panose="020B0503020204020204" pitchFamily="34" charset="-122"/>
+                          <a:ea typeface="微软雅黑" panose="020B0503020204020204" pitchFamily="34" charset="-122"/>
+                          <a:cs typeface="+mn-cs"/>
+                        </a:rPr>
                         <a:t>SACC Loans</a:t>
                       </a:r>
                     </a:p>
                   </a:txBody>
-                  <a:tcPr marL="27432" marR="27432" marT="9144" marB="9144" w="1014984">
+                  <a:tcPr marL="27432" marR="27432" marT="9144" marB="9144">
                     <a:lnL>
                       <a:noFill/>
                     </a:lnL>
@@ -8369,7 +8642,7 @@
                       </a:endParaRPr>
                     </a:p>
                   </a:txBody>
-                  <a:tcPr marL="27432" marR="27432" marT="9144" marB="9144" w="832104">
+                  <a:tcPr marL="27432" marR="27432" marT="9144" marB="9144">
                     <a:lnL>
                       <a:noFill/>
                     </a:lnL>
@@ -8397,51 +8670,6 @@
                     <a:noFill/>
                   </a:tcPr>
                 </a:tc>
-                <a:tc>
-                  <a:txBody>
-                    <a:bodyPr/>
-                    <a:lstStyle/>
-                    <a:p>
-                      <a:r>
-                        <a:t>交易方向、机构名称及历史交易模式</a:t>
-                      </a:r>
-                    </a:p>
-                  </a:txBody>
-                  <a:tcPr marL="27432" marR="27432" marT="9144" marB="9144" w="2496312">
-                    <a:lnL>
-                      <a:noFill/>
-                    </a:lnL>
-                    <a:lnR>
-                      <a:noFill/>
-                    </a:lnR>
-                    <a:lnT w="19050" cap="flat" cmpd="sng" algn="ctr">
-                      <a:solidFill>
-                        <a:srgbClr val="0A0A0A"/>
-                      </a:solidFill>
-                      <a:prstDash val="solid"/>
-                      <a:round/>
-                      <a:headEnd type="none" w="med" len="med"/>
-                      <a:tailEnd type="none" w="med" len="med"/>
-                    </a:lnT>
-                    <a:lnB w="9525" cap="flat" cmpd="sng" algn="ctr">
-                      <a:solidFill>
-                        <a:srgbClr val="D6D6D6"/>
-                      </a:solidFill>
-                      <a:prstDash val="solid"/>
-                      <a:round/>
-                      <a:headEnd type="none" w="med" len="med"/>
-                      <a:tailEnd type="none" w="med" len="med"/>
-                    </a:lnB>
-                    <a:noFill/>
-                  </a:tcPr>
-                </a:tc>
-              </a:tr>
-              <a:tr h="170373">
-                <a:extLst>
-                  <a:ext uri="{0D108BD9-81ED-4DB2-BD59-A6C34878D82A}">
-                    <a16:rowId xmlns:a16="http://schemas.microsoft.com/office/drawing/2014/main" val="10002"/>
-                  </a:ext>
-                </a:extLst>
                 <a:tc>
                   <a:txBody>
                     <a:bodyPr/>
@@ -8457,30 +8685,34 @@
                           <a:ea typeface="微软雅黑" panose="020B0503020204020204" pitchFamily="34" charset="-122"/>
                           <a:cs typeface="+mn-cs"/>
                         </a:rPr>
-                        <a:t>2026/03/28</a:t>
-                      </a:r>
-                    </a:p>
-                  </a:txBody>
-                  <a:tcPr marL="27432" marR="27432" marT="9144" marB="9144" w="768096">
+                        <a:t>A$156</a:t>
+                      </a:r>
+                    </a:p>
+                  </a:txBody>
+                  <a:tcPr marL="27432" marR="27432" marT="9144" marB="9144">
                     <a:lnL>
                       <a:noFill/>
                     </a:lnL>
                     <a:lnR>
                       <a:noFill/>
                     </a:lnR>
-                    <a:lnT w="9525" cap="flat" cmpd="sng" algn="ctr">
-                      <a:solidFill>
-                        <a:srgbClr val="D6D6D6"/>
-                      </a:solidFill>
-                      <a:prstDash val="solid"/>
-                      <a:round/>
-                      <a:headEnd type="none" w="med" len="med"/>
-                      <a:tailEnd type="none" w="med" len="med"/>
-                    </a:lnT>
-                    <a:lnB w="9525">
-                      <a:solidFill>
-                        <a:srgbClr val="D6D6D6"/>
-                      </a:solidFill>
+                    <a:lnT w="19050" cap="flat" cmpd="sng" algn="ctr">
+                      <a:solidFill>
+                        <a:srgbClr val="0A0A0A"/>
+                      </a:solidFill>
+                      <a:prstDash val="solid"/>
+                      <a:round/>
+                      <a:headEnd type="none" w="med" len="med"/>
+                      <a:tailEnd type="none" w="med" len="med"/>
+                    </a:lnT>
+                    <a:lnB w="9525" cap="flat" cmpd="sng" algn="ctr">
+                      <a:solidFill>
+                        <a:srgbClr val="D6D6D6"/>
+                      </a:solidFill>
+                      <a:prstDash val="solid"/>
+                      <a:round/>
+                      <a:headEnd type="none" w="med" len="med"/>
+                      <a:tailEnd type="none" w="med" len="med"/>
                     </a:lnB>
                     <a:noFill/>
                   </a:tcPr>
@@ -8500,20 +8732,20 @@
                           <a:ea typeface="微软雅黑" panose="020B0503020204020204" pitchFamily="34" charset="-122"/>
                           <a:cs typeface="+mn-cs"/>
                         </a:rPr>
-                        <a:t>A$12.40</a:t>
-                      </a:r>
-                    </a:p>
-                  </a:txBody>
-                  <a:tcPr marL="27432" marR="27432" marT="9144" marB="9144" w="914400">
+                        <a:t>交易方向、机构名称、产品关键词及历史交易模式</a:t>
+                      </a:r>
+                    </a:p>
+                  </a:txBody>
+                  <a:tcPr marL="27432" marR="27432" marT="9144" marB="9144">
                     <a:lnL>
                       <a:noFill/>
                     </a:lnL>
                     <a:lnR>
                       <a:noFill/>
                     </a:lnR>
-                    <a:lnT w="9525" cap="flat" cmpd="sng" algn="ctr">
-                      <a:solidFill>
-                        <a:srgbClr val="D6D6D6"/>
+                    <a:lnT w="19050" cap="flat" cmpd="sng" algn="ctr">
+                      <a:solidFill>
+                        <a:srgbClr val="0A0A0A"/>
                       </a:solidFill>
                       <a:prstDash val="solid"/>
                       <a:round/>
@@ -8532,17 +8764,33 @@
                     <a:noFill/>
                   </a:tcPr>
                 </a:tc>
-                <a:tc>
-                  <a:txBody>
-                    <a:bodyPr/>
-                    <a:lstStyle/>
-                    <a:p>
-                      <a:r>
-                        <a:t>EFTPOS MCDONALDS BRISBANE QLD</a:t>
-                      </a:r>
-                    </a:p>
-                  </a:txBody>
-                  <a:tcPr marL="27432" marR="27432" marT="9144" marB="9144" w="2761488">
+                <a:extLst>
+                  <a:ext uri="{0D108BD9-81ED-4DB2-BD59-A6C34878D82A}">
+                    <a16:rowId xmlns:a16="http://schemas.microsoft.com/office/drawing/2014/main" val="10001"/>
+                  </a:ext>
+                </a:extLst>
+              </a:tr>
+              <a:tr h="170373">
+                <a:tc>
+                  <a:txBody>
+                    <a:bodyPr/>
+                    <a:lstStyle/>
+                    <a:p>
+                      <a:pPr marL="0" algn="l" defTabSz="914400" rtl="0" eaLnBrk="1" latinLnBrk="0" hangingPunct="1"/>
+                      <a:r>
+                        <a:rPr sz="800" b="0" kern="1200">
+                          <a:solidFill>
+                            <a:srgbClr val="0A0A0A"/>
+                          </a:solidFill>
+                          <a:latin typeface="微软雅黑" panose="020B0503020204020204" pitchFamily="34" charset="-122"/>
+                          <a:ea typeface="微软雅黑" panose="020B0503020204020204" pitchFamily="34" charset="-122"/>
+                          <a:cs typeface="+mn-cs"/>
+                        </a:rPr>
+                        <a:t>2026/03/28</a:t>
+                      </a:r>
+                    </a:p>
+                  </a:txBody>
+                  <a:tcPr marL="27432" marR="27432" marT="9144" marB="9144">
                     <a:lnL>
                       <a:noFill/>
                     </a:lnL>
@@ -8581,11 +8829,54 @@
                           <a:ea typeface="微软雅黑" panose="020B0503020204020204" pitchFamily="34" charset="-122"/>
                           <a:cs typeface="+mn-cs"/>
                         </a:rPr>
+                        <a:t>MCDONALDS BRISBANE</a:t>
+                      </a:r>
+                    </a:p>
+                  </a:txBody>
+                  <a:tcPr marL="27432" marR="27432" marT="9144" marB="9144">
+                    <a:lnL>
+                      <a:noFill/>
+                    </a:lnL>
+                    <a:lnR>
+                      <a:noFill/>
+                    </a:lnR>
+                    <a:lnT w="9525" cap="flat" cmpd="sng" algn="ctr">
+                      <a:solidFill>
+                        <a:srgbClr val="D6D6D6"/>
+                      </a:solidFill>
+                      <a:prstDash val="solid"/>
+                      <a:round/>
+                      <a:headEnd type="none" w="med" len="med"/>
+                      <a:tailEnd type="none" w="med" len="med"/>
+                    </a:lnT>
+                    <a:lnB w="9525">
+                      <a:solidFill>
+                        <a:srgbClr val="D6D6D6"/>
+                      </a:solidFill>
+                    </a:lnB>
+                    <a:noFill/>
+                  </a:tcPr>
+                </a:tc>
+                <a:tc>
+                  <a:txBody>
+                    <a:bodyPr/>
+                    <a:lstStyle/>
+                    <a:p>
+                      <a:pPr marL="0" algn="l" defTabSz="914400" rtl="0" eaLnBrk="1" latinLnBrk="0" hangingPunct="1"/>
+                      <a:r>
+                        <a:rPr sz="800" b="0" kern="1200" dirty="0">
+                          <a:solidFill>
+                            <a:srgbClr val="0A0A0A"/>
+                          </a:solidFill>
+                          <a:latin typeface="微软雅黑" panose="020B0503020204020204" pitchFamily="34" charset="-122"/>
+                          <a:ea typeface="微软雅黑" panose="020B0503020204020204" pitchFamily="34" charset="-122"/>
+                          <a:cs typeface="+mn-cs"/>
+                        </a:rPr>
                         <a:t>McDonald's</a:t>
                       </a:r>
                     </a:p>
                   </a:txBody>
-                  <a:tcPr marL="27432" marR="27432" marT="9144" marB="9144" w="1225296">
+                  <a:tcPr marL="27432" marR="27432" marT="9144" marB="9144">
                     <a:lnL>
                       <a:noFill/>
                     </a:lnL>
@@ -8628,7 +8919,7 @@
                       </a:r>
                     </a:p>
                   </a:txBody>
-                  <a:tcPr marL="27432" marR="27432" marT="9144" marB="9144" w="886968">
+                  <a:tcPr marL="27432" marR="27432" marT="9144" marB="9144">
                     <a:lnL>
                       <a:noFill/>
                     </a:lnL>
@@ -8671,11 +8962,11 @@
                           <a:ea typeface="微软雅黑" panose="020B0503020204020204" pitchFamily="34" charset="-122"/>
                           <a:cs typeface="+mn-cs"/>
                         </a:rPr>
-                        <a:t>Dining Out</a:t>
-                      </a:r>
-                    </a:p>
-                  </a:txBody>
-                  <a:tcPr marL="27432" marR="27432" marT="9144" marB="9144" w="1014984">
+                        <a:t>消费</a:t>
+                      </a:r>
+                    </a:p>
+                  </a:txBody>
+                  <a:tcPr marL="27432" marR="27432" marT="9144" marB="9144">
                     <a:lnL>
                       <a:noFill/>
                     </a:lnL>
@@ -8718,11 +9009,11 @@
                           <a:ea typeface="微软雅黑" panose="020B0503020204020204" pitchFamily="34" charset="-122"/>
                           <a:cs typeface="+mn-cs"/>
                         </a:rPr>
-                        <a:t>消费支出</a:t>
-                      </a:r>
-                    </a:p>
-                  </a:txBody>
-                  <a:tcPr marL="27432" marR="27432" marT="9144" marB="9144" w="832104">
+                        <a:t>Dining Out</a:t>
+                      </a:r>
+                    </a:p>
+                  </a:txBody>
+                  <a:tcPr marL="27432" marR="27432" marT="9144" marB="9144">
                     <a:lnL>
                       <a:noFill/>
                     </a:lnL>
@@ -8765,11 +9056,11 @@
                           <a:ea typeface="微软雅黑" panose="020B0503020204020204" pitchFamily="34" charset="-122"/>
                           <a:cs typeface="+mn-cs"/>
                         </a:rPr>
-                        <a:t>商户知识库标准名匹配</a:t>
-                      </a:r>
-                    </a:p>
-                  </a:txBody>
-                  <a:tcPr marL="27432" marR="27432" marT="9144" marB="9144" w="2496312">
+                        <a:t>消费支出</a:t>
+                      </a:r>
+                    </a:p>
+                  </a:txBody>
+                  <a:tcPr marL="27432" marR="27432" marT="9144" marB="9144">
                     <a:lnL>
                       <a:noFill/>
                     </a:lnL>
@@ -8797,13 +9088,6 @@
                     <a:noFill/>
                   </a:tcPr>
                 </a:tc>
-              </a:tr>
-              <a:tr h="170373">
-                <a:extLst>
-                  <a:ext uri="{0D108BD9-81ED-4DB2-BD59-A6C34878D82A}">
-                    <a16:rowId xmlns:a16="http://schemas.microsoft.com/office/drawing/2014/main" val="10003"/>
-                  </a:ext>
-                </a:extLst>
                 <a:tc>
                   <a:txBody>
                     <a:bodyPr/>
@@ -8819,11 +9103,11 @@
                           <a:ea typeface="微软雅黑" panose="020B0503020204020204" pitchFamily="34" charset="-122"/>
                           <a:cs typeface="+mn-cs"/>
                         </a:rPr>
-                        <a:t>2026/04/02</a:t>
-                      </a:r>
-                    </a:p>
-                  </a:txBody>
-                  <a:tcPr marL="27432" marR="27432" marT="9144" marB="9144" w="768096">
+                        <a:t>A$12.40</a:t>
+                      </a:r>
+                    </a:p>
+                  </a:txBody>
+                  <a:tcPr marL="27432" marR="27432" marT="9144" marB="9144">
                     <a:lnL>
                       <a:noFill/>
                     </a:lnL>
@@ -8839,10 +9123,14 @@
                       <a:headEnd type="none" w="med" len="med"/>
                       <a:tailEnd type="none" w="med" len="med"/>
                     </a:lnT>
-                    <a:lnB w="9525">
-                      <a:solidFill>
-                        <a:srgbClr val="D6D6D6"/>
-                      </a:solidFill>
+                    <a:lnB w="9525" cap="flat" cmpd="sng" algn="ctr">
+                      <a:solidFill>
+                        <a:srgbClr val="D6D6D6"/>
+                      </a:solidFill>
+                      <a:prstDash val="solid"/>
+                      <a:round/>
+                      <a:headEnd type="none" w="med" len="med"/>
+                      <a:tailEnd type="none" w="med" len="med"/>
                     </a:lnB>
                     <a:noFill/>
                   </a:tcPr>
@@ -8862,11 +9150,11 @@
                           <a:ea typeface="微软雅黑" panose="020B0503020204020204" pitchFamily="34" charset="-122"/>
                           <a:cs typeface="+mn-cs"/>
                         </a:rPr>
-                        <a:t>A$35.90</a:t>
-                      </a:r>
-                    </a:p>
-                  </a:txBody>
-                  <a:tcPr marL="27432" marR="27432" marT="9144" marB="9144" w="914400">
+                        <a:t>商户知识库标准名匹配</a:t>
+                      </a:r>
+                    </a:p>
+                  </a:txBody>
+                  <a:tcPr marL="27432" marR="27432" marT="9144" marB="9144">
                     <a:lnL>
                       <a:noFill/>
                     </a:lnL>
@@ -8894,40 +9182,13 @@
                     <a:noFill/>
                   </a:tcPr>
                 </a:tc>
-                <a:tc>
-                  <a:txBody>
-                    <a:bodyPr/>
-                    <a:lstStyle/>
-                    <a:p>
-                      <a:r>
-                        <a:t>CHEMIST WAREHOUSE 123 BRISBANE QLD</a:t>
-                      </a:r>
-                    </a:p>
-                  </a:txBody>
-                  <a:tcPr marL="27432" marR="27432" marT="9144" marB="9144" w="2761488">
-                    <a:lnL>
-                      <a:noFill/>
-                    </a:lnL>
-                    <a:lnR>
-                      <a:noFill/>
-                    </a:lnR>
-                    <a:lnT w="9525" cap="flat" cmpd="sng" algn="ctr">
-                      <a:solidFill>
-                        <a:srgbClr val="D6D6D6"/>
-                      </a:solidFill>
-                      <a:prstDash val="solid"/>
-                      <a:round/>
-                      <a:headEnd type="none" w="med" len="med"/>
-                      <a:tailEnd type="none" w="med" len="med"/>
-                    </a:lnT>
-                    <a:lnB w="9525">
-                      <a:solidFill>
-                        <a:srgbClr val="D6D6D6"/>
-                      </a:solidFill>
-                    </a:lnB>
-                    <a:noFill/>
-                  </a:tcPr>
-                </a:tc>
+                <a:extLst>
+                  <a:ext uri="{0D108BD9-81ED-4DB2-BD59-A6C34878D82A}">
+                    <a16:rowId xmlns:a16="http://schemas.microsoft.com/office/drawing/2014/main" val="10002"/>
+                  </a:ext>
+                </a:extLst>
+              </a:tr>
+              <a:tr h="170373">
                 <a:tc>
                   <a:txBody>
                     <a:bodyPr/>
@@ -8943,11 +9204,97 @@
                           <a:ea typeface="微软雅黑" panose="020B0503020204020204" pitchFamily="34" charset="-122"/>
                           <a:cs typeface="+mn-cs"/>
                         </a:rPr>
+                        <a:t>2026/04/02</a:t>
+                      </a:r>
+                    </a:p>
+                  </a:txBody>
+                  <a:tcPr marL="27432" marR="27432" marT="9144" marB="9144">
+                    <a:lnL>
+                      <a:noFill/>
+                    </a:lnL>
+                    <a:lnR>
+                      <a:noFill/>
+                    </a:lnR>
+                    <a:lnT w="9525" cap="flat" cmpd="sng" algn="ctr">
+                      <a:solidFill>
+                        <a:srgbClr val="D6D6D6"/>
+                      </a:solidFill>
+                      <a:prstDash val="solid"/>
+                      <a:round/>
+                      <a:headEnd type="none" w="med" len="med"/>
+                      <a:tailEnd type="none" w="med" len="med"/>
+                    </a:lnT>
+                    <a:lnB w="9525">
+                      <a:solidFill>
+                        <a:srgbClr val="D6D6D6"/>
+                      </a:solidFill>
+                    </a:lnB>
+                    <a:noFill/>
+                  </a:tcPr>
+                </a:tc>
+                <a:tc>
+                  <a:txBody>
+                    <a:bodyPr/>
+                    <a:lstStyle/>
+                    <a:p>
+                      <a:pPr marL="0" algn="l" defTabSz="914400" rtl="0" eaLnBrk="1" latinLnBrk="0" hangingPunct="1"/>
+                      <a:r>
+                        <a:rPr sz="800" b="0" kern="1200">
+                          <a:solidFill>
+                            <a:srgbClr val="0A0A0A"/>
+                          </a:solidFill>
+                          <a:latin typeface="微软雅黑" panose="020B0503020204020204" pitchFamily="34" charset="-122"/>
+                          <a:ea typeface="微软雅黑" panose="020B0503020204020204" pitchFamily="34" charset="-122"/>
+                          <a:cs typeface="+mn-cs"/>
+                        </a:rPr>
+                        <a:t>CHEMIST WAREHOUSE 123</a:t>
+                      </a:r>
+                    </a:p>
+                  </a:txBody>
+                  <a:tcPr marL="27432" marR="27432" marT="9144" marB="9144">
+                    <a:lnL>
+                      <a:noFill/>
+                    </a:lnL>
+                    <a:lnR>
+                      <a:noFill/>
+                    </a:lnR>
+                    <a:lnT w="9525" cap="flat" cmpd="sng" algn="ctr">
+                      <a:solidFill>
+                        <a:srgbClr val="D6D6D6"/>
+                      </a:solidFill>
+                      <a:prstDash val="solid"/>
+                      <a:round/>
+                      <a:headEnd type="none" w="med" len="med"/>
+                      <a:tailEnd type="none" w="med" len="med"/>
+                    </a:lnT>
+                    <a:lnB w="9525">
+                      <a:solidFill>
+                        <a:srgbClr val="D6D6D6"/>
+                      </a:solidFill>
+                    </a:lnB>
+                    <a:noFill/>
+                  </a:tcPr>
+                </a:tc>
+                <a:tc>
+                  <a:txBody>
+                    <a:bodyPr/>
+                    <a:lstStyle/>
+                    <a:p>
+                      <a:pPr marL="0" algn="l" defTabSz="914400" rtl="0" eaLnBrk="1" latinLnBrk="0" hangingPunct="1"/>
+                      <a:r>
+                        <a:rPr sz="800" b="0" kern="1200">
+                          <a:solidFill>
+                            <a:srgbClr val="0A0A0A"/>
+                          </a:solidFill>
+                          <a:latin typeface="微软雅黑" panose="020B0503020204020204" pitchFamily="34" charset="-122"/>
+                          <a:ea typeface="微软雅黑" panose="020B0503020204020204" pitchFamily="34" charset="-122"/>
+                          <a:cs typeface="+mn-cs"/>
+                        </a:rPr>
                         <a:t>Chemist Warehouse</a:t>
                       </a:r>
                     </a:p>
                   </a:txBody>
-                  <a:tcPr marL="27432" marR="27432" marT="9144" marB="9144" w="1225296">
+                  <a:tcPr marL="27432" marR="27432" marT="9144" marB="9144">
                     <a:lnL>
                       <a:noFill/>
                     </a:lnL>
@@ -8998,7 +9345,7 @@
                       </a:endParaRPr>
                     </a:p>
                   </a:txBody>
-                  <a:tcPr marL="27432" marR="27432" marT="9144" marB="9144" w="886968">
+                  <a:tcPr marL="27432" marR="27432" marT="9144" marB="9144">
                     <a:lnL>
                       <a:noFill/>
                     </a:lnL>
@@ -9041,11 +9388,11 @@
                           <a:ea typeface="微软雅黑" panose="020B0503020204020204" pitchFamily="34" charset="-122"/>
                           <a:cs typeface="+mn-cs"/>
                         </a:rPr>
-                        <a:t>Health</a:t>
-                      </a:r>
-                    </a:p>
-                  </a:txBody>
-                  <a:tcPr marL="27432" marR="27432" marT="9144" marB="9144" w="1014984">
+                        <a:t>消费</a:t>
+                      </a:r>
+                    </a:p>
+                  </a:txBody>
+                  <a:tcPr marL="27432" marR="27432" marT="9144" marB="9144">
                     <a:lnL>
                       <a:noFill/>
                     </a:lnL>
@@ -9088,11 +9435,11 @@
                           <a:ea typeface="微软雅黑" panose="020B0503020204020204" pitchFamily="34" charset="-122"/>
                           <a:cs typeface="+mn-cs"/>
                         </a:rPr>
-                        <a:t>消费支出</a:t>
-                      </a:r>
-                    </a:p>
-                  </a:txBody>
-                  <a:tcPr marL="27432" marR="27432" marT="9144" marB="9144" w="832104">
+                        <a:t>Health</a:t>
+                      </a:r>
+                    </a:p>
+                  </a:txBody>
+                  <a:tcPr marL="27432" marR="27432" marT="9144" marB="9144">
                     <a:lnL>
                       <a:noFill/>
                     </a:lnL>
@@ -9135,11 +9482,11 @@
                           <a:ea typeface="微软雅黑" panose="020B0503020204020204" pitchFamily="34" charset="-122"/>
                           <a:cs typeface="+mn-cs"/>
                         </a:rPr>
-                        <a:t>商户知识库标准名匹配</a:t>
-                      </a:r>
-                    </a:p>
-                  </a:txBody>
-                  <a:tcPr marL="27432" marR="27432" marT="9144" marB="9144" w="2496312">
+                        <a:t>消费支出</a:t>
+                      </a:r>
+                    </a:p>
+                  </a:txBody>
+                  <a:tcPr marL="27432" marR="27432" marT="9144" marB="9144">
                     <a:lnL>
                       <a:noFill/>
                     </a:lnL>
@@ -9167,13 +9514,6 @@
                     <a:noFill/>
                   </a:tcPr>
                 </a:tc>
-              </a:tr>
-              <a:tr h="170373">
-                <a:extLst>
-                  <a:ext uri="{0D108BD9-81ED-4DB2-BD59-A6C34878D82A}">
-                    <a16:rowId xmlns:a16="http://schemas.microsoft.com/office/drawing/2014/main" val="10004"/>
-                  </a:ext>
-                </a:extLst>
                 <a:tc>
                   <a:txBody>
                     <a:bodyPr/>
@@ -9189,11 +9529,11 @@
                           <a:ea typeface="微软雅黑" panose="020B0503020204020204" pitchFamily="34" charset="-122"/>
                           <a:cs typeface="+mn-cs"/>
                         </a:rPr>
-                        <a:t>2026/04/08</a:t>
-                      </a:r>
-                    </a:p>
-                  </a:txBody>
-                  <a:tcPr marL="27432" marR="27432" marT="9144" marB="9144" w="768096">
+                        <a:t>A$35.90</a:t>
+                      </a:r>
+                    </a:p>
+                  </a:txBody>
+                  <a:tcPr marL="27432" marR="27432" marT="9144" marB="9144">
                     <a:lnL>
                       <a:noFill/>
                     </a:lnL>
@@ -9209,49 +9549,6 @@
                       <a:headEnd type="none" w="med" len="med"/>
                       <a:tailEnd type="none" w="med" len="med"/>
                     </a:lnT>
-                    <a:lnB w="9525">
-                      <a:solidFill>
-                        <a:srgbClr val="D6D6D6"/>
-                      </a:solidFill>
-                    </a:lnB>
-                    <a:noFill/>
-                  </a:tcPr>
-                </a:tc>
-                <a:tc>
-                  <a:txBody>
-                    <a:bodyPr/>
-                    <a:lstStyle/>
-                    <a:p>
-                      <a:pPr marL="0" algn="l" defTabSz="914400" rtl="0" eaLnBrk="1" latinLnBrk="0" hangingPunct="1"/>
-                      <a:r>
-                        <a:rPr sz="800" b="0" kern="1200" dirty="0">
-                          <a:solidFill>
-                            <a:srgbClr val="0A0A0A"/>
-                          </a:solidFill>
-                          <a:latin typeface="微软雅黑" panose="020B0503020204020204" pitchFamily="34" charset="-122"/>
-                          <a:ea typeface="微软雅黑" panose="020B0503020204020204" pitchFamily="34" charset="-122"/>
-                          <a:cs typeface="+mn-cs"/>
-                        </a:rPr>
-                        <a:t>A$8.99</a:t>
-                      </a:r>
-                    </a:p>
-                  </a:txBody>
-                  <a:tcPr marL="27432" marR="27432" marT="9144" marB="9144" w="914400">
-                    <a:lnL>
-                      <a:noFill/>
-                    </a:lnL>
-                    <a:lnR>
-                      <a:noFill/>
-                    </a:lnR>
-                    <a:lnT w="9525" cap="flat" cmpd="sng" algn="ctr">
-                      <a:solidFill>
-                        <a:srgbClr val="D6D6D6"/>
-                      </a:solidFill>
-                      <a:prstDash val="solid"/>
-                      <a:round/>
-                      <a:headEnd type="none" w="med" len="med"/>
-                      <a:tailEnd type="none" w="med" len="med"/>
-                    </a:lnT>
                     <a:lnB w="9525" cap="flat" cmpd="sng" algn="ctr">
                       <a:solidFill>
                         <a:srgbClr val="D6D6D6"/>
@@ -9260,40 +9557,6 @@
                       <a:round/>
                       <a:headEnd type="none" w="med" len="med"/>
                       <a:tailEnd type="none" w="med" len="med"/>
-                    </a:lnB>
-                    <a:noFill/>
-                  </a:tcPr>
-                </a:tc>
-                <a:tc>
-                  <a:txBody>
-                    <a:bodyPr/>
-                    <a:lstStyle/>
-                    <a:p>
-                      <a:r>
-                        <a:t>AMZNPRIMEAU*</a:t>
-                      </a:r>
-                    </a:p>
-                  </a:txBody>
-                  <a:tcPr marL="27432" marR="27432" marT="9144" marB="9144" w="2761488">
-                    <a:lnL>
-                      <a:noFill/>
-                    </a:lnL>
-                    <a:lnR>
-                      <a:noFill/>
-                    </a:lnR>
-                    <a:lnT w="9525" cap="flat" cmpd="sng" algn="ctr">
-                      <a:solidFill>
-                        <a:srgbClr val="D6D6D6"/>
-                      </a:solidFill>
-                      <a:prstDash val="solid"/>
-                      <a:round/>
-                      <a:headEnd type="none" w="med" len="med"/>
-                      <a:tailEnd type="none" w="med" len="med"/>
-                    </a:lnT>
-                    <a:lnB w="9525">
-                      <a:solidFill>
-                        <a:srgbClr val="D6D6D6"/>
-                      </a:solidFill>
                     </a:lnB>
                     <a:noFill/>
                   </a:tcPr>
@@ -9313,11 +9576,11 @@
                           <a:ea typeface="微软雅黑" panose="020B0503020204020204" pitchFamily="34" charset="-122"/>
                           <a:cs typeface="+mn-cs"/>
                         </a:rPr>
-                        <a:t>Amazon Prime</a:t>
-                      </a:r>
-                    </a:p>
-                  </a:txBody>
-                  <a:tcPr marL="27432" marR="27432" marT="9144" marB="9144" w="1225296">
+                        <a:t>商户知识库标准名匹配</a:t>
+                      </a:r>
+                    </a:p>
+                  </a:txBody>
+                  <a:tcPr marL="27432" marR="27432" marT="9144" marB="9144">
                     <a:lnL>
                       <a:noFill/>
                     </a:lnL>
@@ -9333,14 +9596,25 @@
                       <a:headEnd type="none" w="med" len="med"/>
                       <a:tailEnd type="none" w="med" len="med"/>
                     </a:lnT>
-                    <a:lnB w="9525">
-                      <a:solidFill>
-                        <a:srgbClr val="D6D6D6"/>
-                      </a:solidFill>
+                    <a:lnB w="9525" cap="flat" cmpd="sng" algn="ctr">
+                      <a:solidFill>
+                        <a:srgbClr val="D6D6D6"/>
+                      </a:solidFill>
+                      <a:prstDash val="solid"/>
+                      <a:round/>
+                      <a:headEnd type="none" w="med" len="med"/>
+                      <a:tailEnd type="none" w="med" len="med"/>
                     </a:lnB>
                     <a:noFill/>
                   </a:tcPr>
                 </a:tc>
+                <a:extLst>
+                  <a:ext uri="{0D108BD9-81ED-4DB2-BD59-A6C34878D82A}">
+                    <a16:rowId xmlns:a16="http://schemas.microsoft.com/office/drawing/2014/main" val="10003"/>
+                  </a:ext>
+                </a:extLst>
+              </a:tr>
+              <a:tr h="170373">
                 <a:tc>
                   <a:txBody>
                     <a:bodyPr/>
@@ -9356,11 +9630,11 @@
                           <a:ea typeface="微软雅黑" panose="020B0503020204020204" pitchFamily="34" charset="-122"/>
                           <a:cs typeface="+mn-cs"/>
                         </a:rPr>
-                        <a:t>商户企业</a:t>
-                      </a:r>
-                    </a:p>
-                  </a:txBody>
-                  <a:tcPr marL="27432" marR="27432" marT="9144" marB="9144" w="886968">
+                        <a:t>2026/04/08</a:t>
+                      </a:r>
+                    </a:p>
+                  </a:txBody>
+                  <a:tcPr marL="27432" marR="27432" marT="9144" marB="9144">
                     <a:lnL>
                       <a:noFill/>
                     </a:lnL>
@@ -9376,14 +9650,10 @@
                       <a:headEnd type="none" w="med" len="med"/>
                       <a:tailEnd type="none" w="med" len="med"/>
                     </a:lnT>
-                    <a:lnB w="9525" cap="flat" cmpd="sng" algn="ctr">
-                      <a:solidFill>
-                        <a:srgbClr val="D6D6D6"/>
-                      </a:solidFill>
-                      <a:prstDash val="solid"/>
-                      <a:round/>
-                      <a:headEnd type="none" w="med" len="med"/>
-                      <a:tailEnd type="none" w="med" len="med"/>
+                    <a:lnB w="9525">
+                      <a:solidFill>
+                        <a:srgbClr val="D6D6D6"/>
+                      </a:solidFill>
                     </a:lnB>
                     <a:noFill/>
                   </a:tcPr>
@@ -9403,11 +9673,191 @@
                           <a:ea typeface="微软雅黑" panose="020B0503020204020204" pitchFamily="34" charset="-122"/>
                           <a:cs typeface="+mn-cs"/>
                         </a:rPr>
+                        <a:t>AMZNPRIMEA*</a:t>
+                      </a:r>
+                    </a:p>
+                  </a:txBody>
+                  <a:tcPr marL="27432" marR="27432" marT="9144" marB="9144">
+                    <a:lnL>
+                      <a:noFill/>
+                    </a:lnL>
+                    <a:lnR>
+                      <a:noFill/>
+                    </a:lnR>
+                    <a:lnT w="9525" cap="flat" cmpd="sng" algn="ctr">
+                      <a:solidFill>
+                        <a:srgbClr val="D6D6D6"/>
+                      </a:solidFill>
+                      <a:prstDash val="solid"/>
+                      <a:round/>
+                      <a:headEnd type="none" w="med" len="med"/>
+                      <a:tailEnd type="none" w="med" len="med"/>
+                    </a:lnT>
+                    <a:lnB w="9525">
+                      <a:solidFill>
+                        <a:srgbClr val="D6D6D6"/>
+                      </a:solidFill>
+                    </a:lnB>
+                    <a:noFill/>
+                  </a:tcPr>
+                </a:tc>
+                <a:tc>
+                  <a:txBody>
+                    <a:bodyPr/>
+                    <a:lstStyle/>
+                    <a:p>
+                      <a:pPr marL="0" algn="l" defTabSz="914400" rtl="0" eaLnBrk="1" latinLnBrk="0" hangingPunct="1"/>
+                      <a:r>
+                        <a:rPr sz="800" b="0" kern="1200">
+                          <a:solidFill>
+                            <a:srgbClr val="0A0A0A"/>
+                          </a:solidFill>
+                          <a:latin typeface="微软雅黑" panose="020B0503020204020204" pitchFamily="34" charset="-122"/>
+                          <a:ea typeface="微软雅黑" panose="020B0503020204020204" pitchFamily="34" charset="-122"/>
+                          <a:cs typeface="+mn-cs"/>
+                        </a:rPr>
+                        <a:t>Amazon Prime</a:t>
+                      </a:r>
+                    </a:p>
+                  </a:txBody>
+                  <a:tcPr marL="27432" marR="27432" marT="9144" marB="9144">
+                    <a:lnL>
+                      <a:noFill/>
+                    </a:lnL>
+                    <a:lnR>
+                      <a:noFill/>
+                    </a:lnR>
+                    <a:lnT w="9525" cap="flat" cmpd="sng" algn="ctr">
+                      <a:solidFill>
+                        <a:srgbClr val="D6D6D6"/>
+                      </a:solidFill>
+                      <a:prstDash val="solid"/>
+                      <a:round/>
+                      <a:headEnd type="none" w="med" len="med"/>
+                      <a:tailEnd type="none" w="med" len="med"/>
+                    </a:lnT>
+                    <a:lnB w="9525">
+                      <a:solidFill>
+                        <a:srgbClr val="D6D6D6"/>
+                      </a:solidFill>
+                    </a:lnB>
+                    <a:noFill/>
+                  </a:tcPr>
+                </a:tc>
+                <a:tc>
+                  <a:txBody>
+                    <a:bodyPr/>
+                    <a:lstStyle/>
+                    <a:p>
+                      <a:pPr marL="0" algn="l" defTabSz="914400" rtl="0" eaLnBrk="1" latinLnBrk="0" hangingPunct="1"/>
+                      <a:r>
+                        <a:rPr sz="800" b="0" kern="1200">
+                          <a:solidFill>
+                            <a:srgbClr val="0A0A0A"/>
+                          </a:solidFill>
+                          <a:latin typeface="微软雅黑" panose="020B0503020204020204" pitchFamily="34" charset="-122"/>
+                          <a:ea typeface="微软雅黑" panose="020B0503020204020204" pitchFamily="34" charset="-122"/>
+                          <a:cs typeface="+mn-cs"/>
+                        </a:rPr>
+                        <a:t>商户企业</a:t>
+                      </a:r>
+                    </a:p>
+                  </a:txBody>
+                  <a:tcPr marL="27432" marR="27432" marT="9144" marB="9144">
+                    <a:lnL>
+                      <a:noFill/>
+                    </a:lnL>
+                    <a:lnR>
+                      <a:noFill/>
+                    </a:lnR>
+                    <a:lnT w="9525" cap="flat" cmpd="sng" algn="ctr">
+                      <a:solidFill>
+                        <a:srgbClr val="D6D6D6"/>
+                      </a:solidFill>
+                      <a:prstDash val="solid"/>
+                      <a:round/>
+                      <a:headEnd type="none" w="med" len="med"/>
+                      <a:tailEnd type="none" w="med" len="med"/>
+                    </a:lnT>
+                    <a:lnB w="9525" cap="flat" cmpd="sng" algn="ctr">
+                      <a:solidFill>
+                        <a:srgbClr val="D6D6D6"/>
+                      </a:solidFill>
+                      <a:prstDash val="solid"/>
+                      <a:round/>
+                      <a:headEnd type="none" w="med" len="med"/>
+                      <a:tailEnd type="none" w="med" len="med"/>
+                    </a:lnB>
+                    <a:noFill/>
+                  </a:tcPr>
+                </a:tc>
+                <a:tc>
+                  <a:txBody>
+                    <a:bodyPr/>
+                    <a:lstStyle/>
+                    <a:p>
+                      <a:pPr marL="0" algn="l" defTabSz="914400" rtl="0" eaLnBrk="1" latinLnBrk="0" hangingPunct="1"/>
+                      <a:r>
+                        <a:rPr sz="800" b="0" kern="1200">
+                          <a:solidFill>
+                            <a:srgbClr val="0A0A0A"/>
+                          </a:solidFill>
+                          <a:latin typeface="微软雅黑" panose="020B0503020204020204" pitchFamily="34" charset="-122"/>
+                          <a:ea typeface="微软雅黑" panose="020B0503020204020204" pitchFamily="34" charset="-122"/>
+                          <a:cs typeface="+mn-cs"/>
+                        </a:rPr>
+                        <a:t>订阅</a:t>
+                      </a:r>
+                    </a:p>
+                  </a:txBody>
+                  <a:tcPr marL="27432" marR="27432" marT="9144" marB="9144">
+                    <a:lnL>
+                      <a:noFill/>
+                    </a:lnL>
+                    <a:lnR>
+                      <a:noFill/>
+                    </a:lnR>
+                    <a:lnT w="9525" cap="flat" cmpd="sng" algn="ctr">
+                      <a:solidFill>
+                        <a:srgbClr val="D6D6D6"/>
+                      </a:solidFill>
+                      <a:prstDash val="solid"/>
+                      <a:round/>
+                      <a:headEnd type="none" w="med" len="med"/>
+                      <a:tailEnd type="none" w="med" len="med"/>
+                    </a:lnT>
+                    <a:lnB w="9525" cap="flat" cmpd="sng" algn="ctr">
+                      <a:solidFill>
+                        <a:srgbClr val="D6D6D6"/>
+                      </a:solidFill>
+                      <a:prstDash val="solid"/>
+                      <a:round/>
+                      <a:headEnd type="none" w="med" len="med"/>
+                      <a:tailEnd type="none" w="med" len="med"/>
+                    </a:lnB>
+                    <a:noFill/>
+                  </a:tcPr>
+                </a:tc>
+                <a:tc>
+                  <a:txBody>
+                    <a:bodyPr/>
+                    <a:lstStyle/>
+                    <a:p>
+                      <a:pPr marL="0" algn="l" defTabSz="914400" rtl="0" eaLnBrk="1" latinLnBrk="0" hangingPunct="1"/>
+                      <a:r>
+                        <a:rPr sz="800" b="0" kern="1200">
+                          <a:solidFill>
+                            <a:srgbClr val="0A0A0A"/>
+                          </a:solidFill>
+                          <a:latin typeface="微软雅黑" panose="020B0503020204020204" pitchFamily="34" charset="-122"/>
+                          <a:ea typeface="微软雅黑" panose="020B0503020204020204" pitchFamily="34" charset="-122"/>
+                          <a:cs typeface="+mn-cs"/>
+                        </a:rPr>
                         <a:t>Subscription TV</a:t>
                       </a:r>
                     </a:p>
                   </a:txBody>
-                  <a:tcPr marL="27432" marR="27432" marT="9144" marB="9144" w="1014984">
+                  <a:tcPr marL="27432" marR="27432" marT="9144" marB="9144">
                     <a:lnL>
                       <a:noFill/>
                     </a:lnL>
@@ -9462,7 +9912,54 @@
                       </a:endParaRPr>
                     </a:p>
                   </a:txBody>
-                  <a:tcPr marL="27432" marR="27432" marT="9144" marB="9144" w="832104">
+                  <a:tcPr marL="27432" marR="27432" marT="9144" marB="9144">
+                    <a:lnL>
+                      <a:noFill/>
+                    </a:lnL>
+                    <a:lnR>
+                      <a:noFill/>
+                    </a:lnR>
+                    <a:lnT w="9525" cap="flat" cmpd="sng" algn="ctr">
+                      <a:solidFill>
+                        <a:srgbClr val="D6D6D6"/>
+                      </a:solidFill>
+                      <a:prstDash val="solid"/>
+                      <a:round/>
+                      <a:headEnd type="none" w="med" len="med"/>
+                      <a:tailEnd type="none" w="med" len="med"/>
+                    </a:lnT>
+                    <a:lnB w="9525" cap="flat" cmpd="sng" algn="ctr">
+                      <a:solidFill>
+                        <a:srgbClr val="D6D6D6"/>
+                      </a:solidFill>
+                      <a:prstDash val="solid"/>
+                      <a:round/>
+                      <a:headEnd type="none" w="med" len="med"/>
+                      <a:tailEnd type="none" w="med" len="med"/>
+                    </a:lnB>
+                    <a:noFill/>
+                  </a:tcPr>
+                </a:tc>
+                <a:tc>
+                  <a:txBody>
+                    <a:bodyPr/>
+                    <a:lstStyle/>
+                    <a:p>
+                      <a:pPr marL="0" algn="l" defTabSz="914400" rtl="0" eaLnBrk="1" latinLnBrk="0" hangingPunct="1"/>
+                      <a:r>
+                        <a:rPr sz="800" b="0" kern="1200" dirty="0">
+                          <a:solidFill>
+                            <a:srgbClr val="0A0A0A"/>
+                          </a:solidFill>
+                          <a:latin typeface="微软雅黑" panose="020B0503020204020204" pitchFamily="34" charset="-122"/>
+                          <a:ea typeface="微软雅黑" panose="020B0503020204020204" pitchFamily="34" charset="-122"/>
+                          <a:cs typeface="+mn-cs"/>
+                        </a:rPr>
+                        <a:t>A$8.99</a:t>
+                      </a:r>
+                    </a:p>
+                  </a:txBody>
+                  <a:tcPr marL="27432" marR="27432" marT="9144" marB="9144">
                     <a:lnL>
                       <a:noFill/>
                     </a:lnL>
@@ -9509,7 +10006,7 @@
                       </a:r>
                     </a:p>
                   </a:txBody>
-                  <a:tcPr marL="27432" marR="27432" marT="9144" marB="9144" w="2496312">
+                  <a:tcPr marL="27432" marR="27432" marT="9144" marB="9144">
                     <a:lnL>
                       <a:noFill/>
                     </a:lnL>
@@ -9537,13 +10034,13 @@
                     <a:noFill/>
                   </a:tcPr>
                 </a:tc>
+                <a:extLst>
+                  <a:ext uri="{0D108BD9-81ED-4DB2-BD59-A6C34878D82A}">
+                    <a16:rowId xmlns:a16="http://schemas.microsoft.com/office/drawing/2014/main" val="10004"/>
+                  </a:ext>
+                </a:extLst>
               </a:tr>
               <a:tr h="170373">
-                <a:extLst>
-                  <a:ext uri="{0D108BD9-81ED-4DB2-BD59-A6C34878D82A}">
-                    <a16:rowId xmlns:a16="http://schemas.microsoft.com/office/drawing/2014/main" val="10005"/>
-                  </a:ext>
-                </a:extLst>
                 <a:tc>
                   <a:txBody>
                     <a:bodyPr/>
@@ -9563,7 +10060,7 @@
                       </a:r>
                     </a:p>
                   </a:txBody>
-                  <a:tcPr marL="27432" marR="27432" marT="9144" marB="9144" w="768096">
+                  <a:tcPr marL="27432" marR="27432" marT="9144" marB="9144">
                     <a:lnL>
                       <a:noFill/>
                     </a:lnL>
@@ -9602,45 +10099,11 @@
                           <a:ea typeface="微软雅黑" panose="020B0503020204020204" pitchFamily="34" charset="-122"/>
                           <a:cs typeface="+mn-cs"/>
                         </a:rPr>
-                        <a:t>A$3,420.50</a:t>
-                      </a:r>
-                    </a:p>
-                  </a:txBody>
-                  <a:tcPr marL="27432" marR="27432" marT="9144" marB="9144" w="914400">
-                    <a:lnL>
-                      <a:noFill/>
-                    </a:lnL>
-                    <a:lnR>
-                      <a:noFill/>
-                    </a:lnR>
-                    <a:lnT w="9525" cap="flat" cmpd="sng" algn="ctr">
-                      <a:solidFill>
-                        <a:srgbClr val="D6D6D6"/>
-                      </a:solidFill>
-                      <a:prstDash val="solid"/>
-                      <a:round/>
-                      <a:headEnd type="none" w="med" len="med"/>
-                      <a:tailEnd type="none" w="med" len="med"/>
-                    </a:lnT>
-                    <a:lnB w="9525">
-                      <a:solidFill>
-                        <a:srgbClr val="D6D6D6"/>
-                      </a:solidFill>
-                    </a:lnB>
-                    <a:noFill/>
-                  </a:tcPr>
-                </a:tc>
-                <a:tc>
-                  <a:txBody>
-                    <a:bodyPr/>
-                    <a:lstStyle/>
-                    <a:p>
-                      <a:r>
-                        <a:t>PAYROLL DEPOSIT ACME PTY LTD</a:t>
-                      </a:r>
-                    </a:p>
-                  </a:txBody>
-                  <a:tcPr marL="27432" marR="27432" marT="9144" marB="9144" w="2761488">
+                        <a:t>PAYROLL ACME PTY LTD</a:t>
+                      </a:r>
+                    </a:p>
+                  </a:txBody>
+                  <a:tcPr marL="27432" marR="27432" marT="9144" marB="9144">
                     <a:lnL>
                       <a:noFill/>
                     </a:lnL>
@@ -9683,7 +10146,7 @@
                       </a:r>
                     </a:p>
                   </a:txBody>
-                  <a:tcPr marL="27432" marR="27432" marT="9144" marB="9144" w="1225296">
+                  <a:tcPr marL="27432" marR="27432" marT="9144" marB="9144">
                     <a:lnL>
                       <a:noFill/>
                     </a:lnL>
@@ -9726,7 +10189,50 @@
                       </a:r>
                     </a:p>
                   </a:txBody>
-                  <a:tcPr marL="27432" marR="27432" marT="9144" marB="9144" w="886968">
+                  <a:tcPr marL="27432" marR="27432" marT="9144" marB="9144">
+                    <a:lnL>
+                      <a:noFill/>
+                    </a:lnL>
+                    <a:lnR>
+                      <a:noFill/>
+                    </a:lnR>
+                    <a:lnT w="9525" cap="flat" cmpd="sng" algn="ctr">
+                      <a:solidFill>
+                        <a:srgbClr val="D6D6D6"/>
+                      </a:solidFill>
+                      <a:prstDash val="solid"/>
+                      <a:round/>
+                      <a:headEnd type="none" w="med" len="med"/>
+                      <a:tailEnd type="none" w="med" len="med"/>
+                    </a:lnT>
+                    <a:lnB w="9525">
+                      <a:solidFill>
+                        <a:srgbClr val="D6D6D6"/>
+                      </a:solidFill>
+                    </a:lnB>
+                    <a:noFill/>
+                  </a:tcPr>
+                </a:tc>
+                <a:tc>
+                  <a:txBody>
+                    <a:bodyPr/>
+                    <a:lstStyle/>
+                    <a:p>
+                      <a:pPr marL="0" algn="l" defTabSz="914400" rtl="0" eaLnBrk="1" latinLnBrk="0" hangingPunct="1"/>
+                      <a:r>
+                        <a:rPr sz="800" b="0" kern="1200">
+                          <a:solidFill>
+                            <a:srgbClr val="0A0A0A"/>
+                          </a:solidFill>
+                          <a:latin typeface="微软雅黑" panose="020B0503020204020204" pitchFamily="34" charset="-122"/>
+                          <a:ea typeface="微软雅黑" panose="020B0503020204020204" pitchFamily="34" charset="-122"/>
+                          <a:cs typeface="+mn-cs"/>
+                        </a:rPr>
+                        <a:t>收入</a:t>
+                      </a:r>
+                    </a:p>
+                  </a:txBody>
+                  <a:tcPr marL="27432" marR="27432" marT="9144" marB="9144">
                     <a:lnL>
                       <a:noFill/>
                     </a:lnL>
@@ -9777,7 +10283,7 @@
                       </a:endParaRPr>
                     </a:p>
                   </a:txBody>
-                  <a:tcPr marL="27432" marR="27432" marT="9144" marB="9144" w="1014984">
+                  <a:tcPr marL="27432" marR="27432" marT="9144" marB="9144">
                     <a:lnL>
                       <a:noFill/>
                     </a:lnL>
@@ -9820,7 +10326,50 @@
                       </a:r>
                     </a:p>
                   </a:txBody>
-                  <a:tcPr marL="27432" marR="27432" marT="9144" marB="9144" w="832104">
+                  <a:tcPr marL="27432" marR="27432" marT="9144" marB="9144">
+                    <a:lnL>
+                      <a:noFill/>
+                    </a:lnL>
+                    <a:lnR>
+                      <a:noFill/>
+                    </a:lnR>
+                    <a:lnT w="9525" cap="flat" cmpd="sng" algn="ctr">
+                      <a:solidFill>
+                        <a:srgbClr val="D6D6D6"/>
+                      </a:solidFill>
+                      <a:prstDash val="solid"/>
+                      <a:round/>
+                      <a:headEnd type="none" w="med" len="med"/>
+                      <a:tailEnd type="none" w="med" len="med"/>
+                    </a:lnT>
+                    <a:lnB w="9525">
+                      <a:solidFill>
+                        <a:srgbClr val="D6D6D6"/>
+                      </a:solidFill>
+                    </a:lnB>
+                    <a:noFill/>
+                  </a:tcPr>
+                </a:tc>
+                <a:tc>
+                  <a:txBody>
+                    <a:bodyPr/>
+                    <a:lstStyle/>
+                    <a:p>
+                      <a:pPr marL="0" algn="l" defTabSz="914400" rtl="0" eaLnBrk="1" latinLnBrk="0" hangingPunct="1"/>
+                      <a:r>
+                        <a:rPr sz="800" b="0" kern="1200">
+                          <a:solidFill>
+                            <a:srgbClr val="0A0A0A"/>
+                          </a:solidFill>
+                          <a:latin typeface="微软雅黑" panose="020B0503020204020204" pitchFamily="34" charset="-122"/>
+                          <a:ea typeface="微软雅黑" panose="020B0503020204020204" pitchFamily="34" charset="-122"/>
+                          <a:cs typeface="+mn-cs"/>
+                        </a:rPr>
+                        <a:t>A$3,420.50</a:t>
+                      </a:r>
+                    </a:p>
+                  </a:txBody>
+                  <a:tcPr marL="27432" marR="27432" marT="9144" marB="9144">
                     <a:lnL>
                       <a:noFill/>
                     </a:lnL>
@@ -9915,7 +10464,7 @@
                       </a:endParaRPr>
                     </a:p>
                   </a:txBody>
-                  <a:tcPr marL="27432" marR="27432" marT="9144" marB="9144" w="2496312">
+                  <a:tcPr marL="27432" marR="27432" marT="9144" marB="9144">
                     <a:lnL>
                       <a:noFill/>
                     </a:lnL>
@@ -9939,6 +10488,11 @@
                     <a:noFill/>
                   </a:tcPr>
                 </a:tc>
+                <a:extLst>
+                  <a:ext uri="{0D108BD9-81ED-4DB2-BD59-A6C34878D82A}">
+                    <a16:rowId xmlns:a16="http://schemas.microsoft.com/office/drawing/2014/main" val="10005"/>
+                  </a:ext>
+                </a:extLst>
               </a:tr>
             </a:tbl>
           </a:graphicData>
@@ -9956,31 +10510,25 @@
           <p:cNvGraphicFramePr>
             <a:graphicFrameLocks noGrp="1"/>
           </p:cNvGraphicFramePr>
-          <p:nvPr>
-            <p:extLst>
-              <p:ext uri="{D42A27DB-BD31-4B8C-83A1-F6EECF244321}">
-                <p14:modId xmlns:p14="http://schemas.microsoft.com/office/powerpoint/2010/main" val="4190995091"/>
-              </p:ext>
-            </p:extLst>
-          </p:nvPr>
+          <p:nvPr/>
         </p:nvGraphicFramePr>
         <p:xfrm>
-          <a:off x="2020824" y="4517136"/>
-          <a:ext cx="3127248" cy="2293486"/>
+          <a:off x="2024032" y="4512752"/>
+          <a:ext cx="3127663" cy="2293486"/>
         </p:xfrm>
         <a:graphic>
           <a:graphicData uri="http://schemas.openxmlformats.org/drawingml/2006/table">
             <a:tbl>
               <a:tblPr/>
               <a:tblGrid>
-                <a:gridCol w="1252728">
+                <a:gridCol w="1252461">
                   <a:extLst>
                     <a:ext uri="{9D8B030D-6E8A-4147-A177-3AD203B41FA5}">
                       <a16:colId xmlns:a16="http://schemas.microsoft.com/office/drawing/2014/main" val="20000"/>
                     </a:ext>
                   </a:extLst>
                 </a:gridCol>
-                <a:gridCol w="1875434">
+                <a:gridCol w="1875202">
                   <a:extLst>
                     <a:ext uri="{9D8B030D-6E8A-4147-A177-3AD203B41FA5}">
                       <a16:colId xmlns:a16="http://schemas.microsoft.com/office/drawing/2014/main" val="20001"/>
@@ -10014,7 +10562,7 @@
                       </a:endParaRPr>
                     </a:p>
                   </a:txBody>
-                  <a:tcPr marL="27432" marR="27432" marT="9144" marB="9144" w="1252728">
+                  <a:tcPr marL="27432" marR="27432" marT="9144" marB="9144">
                     <a:lnL>
                       <a:noFill/>
                     </a:lnL>
@@ -10057,7 +10605,7 @@
                       </a:endParaRPr>
                     </a:p>
                   </a:txBody>
-                  <a:tcPr marL="27432" marR="27432" marT="9144" marB="9144" w="1875434">
+                  <a:tcPr marL="27432" marR="27432" marT="9144" marB="9144">
                     <a:lnL>
                       <a:noFill/>
                     </a:lnL>
@@ -10107,7 +10655,7 @@
                       </a:endParaRPr>
                     </a:p>
                   </a:txBody>
-                  <a:tcPr marL="27432" marR="27432" marT="9144" marB="9144" w="1252728">
+                  <a:tcPr marL="27432" marR="27432" marT="9144" marB="9144">
                     <a:lnL>
                       <a:noFill/>
                     </a:lnL>
@@ -10149,7 +10697,7 @@
                       </a:r>
                     </a:p>
                   </a:txBody>
-                  <a:tcPr marL="27432" marR="27432" marT="9144" marB="9144" w="1875434">
+                  <a:tcPr marL="27432" marR="27432" marT="9144" marB="9144">
                     <a:lnL>
                       <a:noFill/>
                     </a:lnL>
@@ -10215,7 +10763,7 @@
                       </a:endParaRPr>
                     </a:p>
                   </a:txBody>
-                  <a:tcPr marL="27432" marR="27432" marT="9144" marB="9144" w="1252728">
+                  <a:tcPr marL="27432" marR="27432" marT="9144" marB="9144">
                     <a:lnL>
                       <a:noFill/>
                     </a:lnL>
@@ -10257,7 +10805,7 @@
                       </a:r>
                     </a:p>
                   </a:txBody>
-                  <a:tcPr marL="27432" marR="27432" marT="9144" marB="9144" w="1875434">
+                  <a:tcPr marL="27432" marR="27432" marT="9144" marB="9144">
                     <a:lnL>
                       <a:noFill/>
                     </a:lnL>
@@ -10306,7 +10854,7 @@
                       </a:r>
                     </a:p>
                   </a:txBody>
-                  <a:tcPr marL="27432" marR="27432" marT="9144" marB="9144" w="1252728">
+                  <a:tcPr marL="27432" marR="27432" marT="9144" marB="9144">
                     <a:lnL>
                       <a:noFill/>
                     </a:lnL>
@@ -10348,7 +10896,7 @@
                       </a:r>
                     </a:p>
                   </a:txBody>
-                  <a:tcPr marL="27432" marR="27432" marT="9144" marB="9144" w="1875434">
+                  <a:tcPr marL="27432" marR="27432" marT="9144" marB="9144">
                     <a:lnL>
                       <a:noFill/>
                     </a:lnL>
@@ -10404,7 +10952,7 @@
                       </a:endParaRPr>
                     </a:p>
                   </a:txBody>
-                  <a:tcPr marL="27432" marR="27432" marT="9144" marB="9144" w="1252728">
+                  <a:tcPr marL="27432" marR="27432" marT="9144" marB="9144">
                     <a:lnL>
                       <a:noFill/>
                     </a:lnL>
@@ -10450,7 +10998,7 @@
                       </a:r>
                     </a:p>
                   </a:txBody>
-                  <a:tcPr marL="27432" marR="27432" marT="9144" marB="9144" w="1875434">
+                  <a:tcPr marL="27432" marR="27432" marT="9144" marB="9144">
                     <a:lnL>
                       <a:noFill/>
                     </a:lnL>
@@ -10503,7 +11051,7 @@
                       </a:r>
                     </a:p>
                   </a:txBody>
-                  <a:tcPr marL="27432" marR="27432" marT="9144" marB="9144" w="1252728">
+                  <a:tcPr marL="27432" marR="27432" marT="9144" marB="9144">
                     <a:lnL>
                       <a:noFill/>
                     </a:lnL>
@@ -10549,7 +11097,7 @@
                       </a:r>
                     </a:p>
                   </a:txBody>
-                  <a:tcPr marL="27432" marR="27432" marT="9144" marB="9144" w="1875434">
+                  <a:tcPr marL="27432" marR="27432" marT="9144" marB="9144">
                     <a:lnL>
                       <a:noFill/>
                     </a:lnL>
@@ -10609,7 +11157,7 @@
                       </a:endParaRPr>
                     </a:p>
                   </a:txBody>
-                  <a:tcPr marL="27432" marR="27432" marT="9144" marB="9144" w="1252728">
+                  <a:tcPr marL="27432" marR="27432" marT="9144" marB="9144">
                     <a:lnL>
                       <a:noFill/>
                     </a:lnL>
@@ -10655,7 +11203,7 @@
                       </a:r>
                     </a:p>
                   </a:txBody>
-                  <a:tcPr marL="27432" marR="27432" marT="9144" marB="9144" w="1875434">
+                  <a:tcPr marL="27432" marR="27432" marT="9144" marB="9144">
                     <a:lnL>
                       <a:noFill/>
                     </a:lnL>
@@ -10708,7 +11256,7 @@
                       </a:r>
                     </a:p>
                   </a:txBody>
-                  <a:tcPr marL="27432" marR="27432" marT="9144" marB="9144" w="1252728">
+                  <a:tcPr marL="27432" marR="27432" marT="9144" marB="9144">
                     <a:lnL>
                       <a:noFill/>
                     </a:lnL>
@@ -10754,7 +11302,7 @@
                       </a:r>
                     </a:p>
                   </a:txBody>
-                  <a:tcPr marL="27432" marR="27432" marT="9144" marB="9144" w="1875434">
+                  <a:tcPr marL="27432" marR="27432" marT="9144" marB="9144">
                     <a:lnL>
                       <a:noFill/>
                     </a:lnL>
@@ -10807,7 +11355,7 @@
                       </a:r>
                     </a:p>
                   </a:txBody>
-                  <a:tcPr marL="27432" marR="27432" marT="9144" marB="9144" w="1252728">
+                  <a:tcPr marL="27432" marR="27432" marT="9144" marB="9144">
                     <a:lnL>
                       <a:noFill/>
                     </a:lnL>
@@ -10853,7 +11401,7 @@
                       </a:r>
                     </a:p>
                   </a:txBody>
-                  <a:tcPr marL="27432" marR="27432" marT="9144" marB="9144" w="1875434">
+                  <a:tcPr marL="27432" marR="27432" marT="9144" marB="9144">
                     <a:lnL>
                       <a:noFill/>
                     </a:lnL>
@@ -10906,7 +11454,7 @@
                       </a:r>
                     </a:p>
                   </a:txBody>
-                  <a:tcPr marL="27432" marR="27432" marT="9144" marB="9144" w="1252728">
+                  <a:tcPr marL="27432" marR="27432" marT="9144" marB="9144">
                     <a:lnL>
                       <a:noFill/>
                     </a:lnL>
@@ -10952,7 +11500,7 @@
                       </a:r>
                     </a:p>
                   </a:txBody>
-                  <a:tcPr marL="27432" marR="27432" marT="9144" marB="9144" w="1875434">
+                  <a:tcPr marL="27432" marR="27432" marT="9144" marB="9144">
                     <a:lnL>
                       <a:noFill/>
                     </a:lnL>
@@ -11012,7 +11560,7 @@
                       </a:endParaRPr>
                     </a:p>
                   </a:txBody>
-                  <a:tcPr marL="27432" marR="27432" marT="9144" marB="9144" w="1252728">
+                  <a:tcPr marL="27432" marR="27432" marT="9144" marB="9144">
                     <a:lnL>
                       <a:noFill/>
                     </a:lnL>
@@ -11058,7 +11606,7 @@
                       </a:r>
                     </a:p>
                   </a:txBody>
-                  <a:tcPr marL="27432" marR="27432" marT="9144" marB="9144" w="1875434">
+                  <a:tcPr marL="27432" marR="27432" marT="9144" marB="9144">
                     <a:lnL>
                       <a:noFill/>
                     </a:lnL>
@@ -11108,31 +11656,25 @@
           <p:cNvGraphicFramePr>
             <a:graphicFrameLocks noGrp="1"/>
           </p:cNvGraphicFramePr>
-          <p:nvPr>
-            <p:extLst>
-              <p:ext uri="{D42A27DB-BD31-4B8C-83A1-F6EECF244321}">
-                <p14:modId xmlns:p14="http://schemas.microsoft.com/office/powerpoint/2010/main" val="2758486903"/>
-              </p:ext>
-            </p:extLst>
-          </p:nvPr>
+          <p:nvPr/>
         </p:nvGraphicFramePr>
         <p:xfrm>
-          <a:off x="7744968" y="4517136"/>
-          <a:ext cx="3127248" cy="2293486"/>
+          <a:off x="7749192" y="4512752"/>
+          <a:ext cx="3127663" cy="2293486"/>
         </p:xfrm>
         <a:graphic>
           <a:graphicData uri="http://schemas.openxmlformats.org/drawingml/2006/table">
             <a:tbl>
               <a:tblPr/>
               <a:tblGrid>
-                <a:gridCol w="1252728">
+                <a:gridCol w="1252461">
                   <a:extLst>
                     <a:ext uri="{9D8B030D-6E8A-4147-A177-3AD203B41FA5}">
                       <a16:colId xmlns:a16="http://schemas.microsoft.com/office/drawing/2014/main" val="20000"/>
                     </a:ext>
                   </a:extLst>
                 </a:gridCol>
-                <a:gridCol w="1875434">
+                <a:gridCol w="1875202">
                   <a:extLst>
                     <a:ext uri="{9D8B030D-6E8A-4147-A177-3AD203B41FA5}">
                       <a16:colId xmlns:a16="http://schemas.microsoft.com/office/drawing/2014/main" val="20001"/>
@@ -11166,7 +11708,7 @@
                       </a:endParaRPr>
                     </a:p>
                   </a:txBody>
-                  <a:tcPr marL="27432" marR="27432" marT="9144" marB="9144" w="1252728">
+                  <a:tcPr marL="27432" marR="27432" marT="9144" marB="9144">
                     <a:lnL>
                       <a:noFill/>
                     </a:lnL>
@@ -11202,7 +11744,7 @@
                       </a:r>
                     </a:p>
                   </a:txBody>
-                  <a:tcPr marL="27432" marR="27432" marT="9144" marB="9144" w="1875434">
+                  <a:tcPr marL="27432" marR="27432" marT="9144" marB="9144">
                     <a:lnL>
                       <a:noFill/>
                     </a:lnL>
@@ -11245,7 +11787,7 @@
                       </a:r>
                     </a:p>
                   </a:txBody>
-                  <a:tcPr marL="27432" marR="27432" marT="9144" marB="9144" w="1252728">
+                  <a:tcPr marL="27432" marR="27432" marT="9144" marB="9144">
                     <a:lnL>
                       <a:noFill/>
                     </a:lnL>
@@ -11287,7 +11829,7 @@
                       </a:r>
                     </a:p>
                   </a:txBody>
-                  <a:tcPr marL="27432" marR="27432" marT="9144" marB="9144" w="1875434">
+                  <a:tcPr marL="27432" marR="27432" marT="9144" marB="9144">
                     <a:lnL>
                       <a:noFill/>
                     </a:lnL>
@@ -11343,7 +11885,7 @@
                       </a:endParaRPr>
                     </a:p>
                   </a:txBody>
-                  <a:tcPr marL="27432" marR="27432" marT="9144" marB="9144" w="1252728">
+                  <a:tcPr marL="27432" marR="27432" marT="9144" marB="9144">
                     <a:lnL>
                       <a:noFill/>
                     </a:lnL>
@@ -11385,7 +11927,7 @@
                       </a:r>
                     </a:p>
                   </a:txBody>
-                  <a:tcPr marL="27432" marR="27432" marT="9144" marB="9144" w="1875434">
+                  <a:tcPr marL="27432" marR="27432" marT="9144" marB="9144">
                     <a:lnL>
                       <a:noFill/>
                     </a:lnL>
@@ -11451,7 +11993,7 @@
                       </a:endParaRPr>
                     </a:p>
                   </a:txBody>
-                  <a:tcPr marL="27432" marR="27432" marT="9144" marB="9144" w="1252728">
+                  <a:tcPr marL="27432" marR="27432" marT="9144" marB="9144">
                     <a:lnL>
                       <a:noFill/>
                     </a:lnL>
@@ -11493,7 +12035,7 @@
                       </a:r>
                     </a:p>
                   </a:txBody>
-                  <a:tcPr marL="27432" marR="27432" marT="9144" marB="9144" w="1875434">
+                  <a:tcPr marL="27432" marR="27432" marT="9144" marB="9144">
                     <a:lnL>
                       <a:noFill/>
                     </a:lnL>
@@ -11542,7 +12084,7 @@
                       </a:r>
                     </a:p>
                   </a:txBody>
-                  <a:tcPr marL="27432" marR="27432" marT="9144" marB="9144" w="1252728">
+                  <a:tcPr marL="27432" marR="27432" marT="9144" marB="9144">
                     <a:lnL>
                       <a:noFill/>
                     </a:lnL>
@@ -11588,7 +12130,7 @@
                       </a:r>
                     </a:p>
                   </a:txBody>
-                  <a:tcPr marL="27432" marR="27432" marT="9144" marB="9144" w="1875434">
+                  <a:tcPr marL="27432" marR="27432" marT="9144" marB="9144">
                     <a:lnL>
                       <a:noFill/>
                     </a:lnL>
@@ -11641,7 +12183,7 @@
                       </a:r>
                     </a:p>
                   </a:txBody>
-                  <a:tcPr marL="27432" marR="27432" marT="9144" marB="9144" w="1252728">
+                  <a:tcPr marL="27432" marR="27432" marT="9144" marB="9144">
                     <a:lnL>
                       <a:noFill/>
                     </a:lnL>
@@ -11687,7 +12229,7 @@
                       </a:r>
                     </a:p>
                   </a:txBody>
-                  <a:tcPr marL="27432" marR="27432" marT="9144" marB="9144" w="1875434">
+                  <a:tcPr marL="27432" marR="27432" marT="9144" marB="9144">
                     <a:lnL>
                       <a:noFill/>
                     </a:lnL>
@@ -11747,7 +12289,7 @@
                       </a:endParaRPr>
                     </a:p>
                   </a:txBody>
-                  <a:tcPr marL="27432" marR="27432" marT="9144" marB="9144" w="1252728">
+                  <a:tcPr marL="27432" marR="27432" marT="9144" marB="9144">
                     <a:lnL>
                       <a:noFill/>
                     </a:lnL>
@@ -11793,7 +12335,7 @@
                       </a:r>
                     </a:p>
                   </a:txBody>
-                  <a:tcPr marL="27432" marR="27432" marT="9144" marB="9144" w="1875434">
+                  <a:tcPr marL="27432" marR="27432" marT="9144" marB="9144">
                     <a:lnL>
                       <a:noFill/>
                     </a:lnL>
@@ -11863,7 +12405,7 @@
                       </a:endParaRPr>
                     </a:p>
                   </a:txBody>
-                  <a:tcPr marL="27432" marR="27432" marT="9144" marB="9144" w="1252728">
+                  <a:tcPr marL="27432" marR="27432" marT="9144" marB="9144">
                     <a:lnL>
                       <a:noFill/>
                     </a:lnL>
@@ -11909,7 +12451,7 @@
                       </a:r>
                     </a:p>
                   </a:txBody>
-                  <a:tcPr marL="27432" marR="27432" marT="9144" marB="9144" w="1875434">
+                  <a:tcPr marL="27432" marR="27432" marT="9144" marB="9144">
                     <a:lnL>
                       <a:noFill/>
                     </a:lnL>
@@ -11969,7 +12511,7 @@
                       </a:endParaRPr>
                     </a:p>
                   </a:txBody>
-                  <a:tcPr marL="27432" marR="27432" marT="9144" marB="9144" w="1252728">
+                  <a:tcPr marL="27432" marR="27432" marT="9144" marB="9144">
                     <a:lnL>
                       <a:noFill/>
                     </a:lnL>
@@ -12015,7 +12557,7 @@
                       </a:r>
                     </a:p>
                   </a:txBody>
-                  <a:tcPr marL="27432" marR="27432" marT="9144" marB="9144" w="1875434">
+                  <a:tcPr marL="27432" marR="27432" marT="9144" marB="9144">
                     <a:lnL>
                       <a:noFill/>
                     </a:lnL>
@@ -12075,7 +12617,7 @@
                       </a:endParaRPr>
                     </a:p>
                   </a:txBody>
-                  <a:tcPr marL="27432" marR="27432" marT="9144" marB="9144" w="1252728">
+                  <a:tcPr marL="27432" marR="27432" marT="9144" marB="9144">
                     <a:lnL>
                       <a:noFill/>
                     </a:lnL>
@@ -12121,7 +12663,7 @@
                       </a:r>
                     </a:p>
                   </a:txBody>
-                  <a:tcPr marL="27432" marR="27432" marT="9144" marB="9144" w="1875434">
+                  <a:tcPr marL="27432" marR="27432" marT="9144" marB="9144">
                     <a:lnL>
                       <a:noFill/>
                     </a:lnL>
@@ -12174,7 +12716,7 @@
                       </a:r>
                     </a:p>
                   </a:txBody>
-                  <a:tcPr marL="27432" marR="27432" marT="9144" marB="9144" w="1252728">
+                  <a:tcPr marL="27432" marR="27432" marT="9144" marB="9144">
                     <a:lnL>
                       <a:noFill/>
                     </a:lnL>
@@ -12240,7 +12782,7 @@
                       </a:r>
                     </a:p>
                   </a:txBody>
-                  <a:tcPr marL="27432" marR="27432" marT="9144" marB="9144" w="1875434">
+                  <a:tcPr marL="27432" marR="27432" marT="9144" marB="9144">
                     <a:lnL>
                       <a:noFill/>
                     </a:lnL>
@@ -12280,34 +12822,35 @@
       </p:graphicFrame>
       <p:sp>
         <p:nvSpPr>
-          <p:cNvPr id="21" name="p2-label-bg"/>
+          <p:cNvPr id="7" name="矩形 6">
+            <a:extLst>
+              <a:ext uri="{FF2B5EF4-FFF2-40B4-BE49-F238E27FC236}">
+                <a16:creationId xmlns:a16="http://schemas.microsoft.com/office/drawing/2014/main" id="{1B718013-4527-4C93-A16A-71AD3CA129A4}"/>
+              </a:ext>
+            </a:extLst>
+          </p:cNvPr>
           <p:cNvSpPr/>
           <p:nvPr/>
         </p:nvSpPr>
         <p:spPr>
           <a:xfrm>
-            <a:off x="822960" y="4773168"/>
-            <a:ext cx="777240" cy="1344168"/>
+            <a:off x="822960" y="4777740"/>
+            <a:ext cx="777240" cy="1341120"/>
           </a:xfrm>
           <a:prstGeom prst="rect">
             <a:avLst/>
           </a:prstGeom>
-          <a:solidFill>
-            <a:srgbClr val="E3EBF4"/>
-          </a:solidFill>
-          <a:ln>
-            <a:noFill/>
-          </a:ln>
-          <a:effectLst/>
         </p:spPr>
         <p:style>
-          <a:lnRef idx="1">
-            <a:schemeClr val="accent1"/>
+          <a:lnRef idx="2">
+            <a:schemeClr val="accent1">
+              <a:shade val="50000"/>
+            </a:schemeClr>
           </a:lnRef>
-          <a:fillRef idx="3">
+          <a:fillRef idx="1">
             <a:schemeClr val="accent1"/>
           </a:fillRef>
-          <a:effectRef idx="2">
+          <a:effectRef idx="0">
             <a:schemeClr val="accent1"/>
           </a:effectRef>
           <a:fontRef idx="minor">
@@ -12318,40 +12861,74 @@
           <a:bodyPr rtlCol="0" anchor="ctr"/>
           <a:lstStyle/>
           <a:p>
-            <a:pPr algn="ctr"/>
+            <a:pPr marL="0" marR="0" lvl="0" indent="0" algn="ctr" defTabSz="914400" rtl="0" eaLnBrk="1" fontAlgn="auto" latinLnBrk="0" hangingPunct="1">
+              <a:lnSpc>
+                <a:spcPct val="100000"/>
+              </a:lnSpc>
+              <a:spcBef>
+                <a:spcPts val="0"/>
+              </a:spcBef>
+              <a:spcAft>
+                <a:spcPts val="0"/>
+              </a:spcAft>
+              <a:buClrTx/>
+              <a:buSzTx/>
+              <a:buFontTx/>
+              <a:buNone/>
+              <a:tabLst/>
+              <a:defRPr/>
+            </a:pPr>
+            <a:r>
+              <a:rPr kumimoji="0" lang="zh-CN" altLang="en-US" sz="1800" b="0" i="0" u="none" strike="noStrike" kern="1200" cap="none" spc="0" normalizeH="0" baseline="0" noProof="0" dirty="0">
+                <a:ln>
+                  <a:noFill/>
+                </a:ln>
+                <a:solidFill>
+                  <a:prstClr val="white"/>
+                </a:solidFill>
+                <a:effectLst/>
+                <a:uLnTx/>
+                <a:uFillTx/>
+                <a:latin typeface="等线"/>
+                <a:ea typeface="等线" panose="02010600030101010101" pitchFamily="2" charset="-122"/>
+                <a:cs typeface="+mn-cs"/>
+              </a:rPr>
+              <a:t>用户维度</a:t>
+            </a:r>
           </a:p>
         </p:txBody>
       </p:sp>
       <p:sp>
         <p:nvSpPr>
-          <p:cNvPr id="22" name="p2-label-bar"/>
+          <p:cNvPr id="20" name="矩形 19">
+            <a:extLst>
+              <a:ext uri="{FF2B5EF4-FFF2-40B4-BE49-F238E27FC236}">
+                <a16:creationId xmlns:a16="http://schemas.microsoft.com/office/drawing/2014/main" id="{3FCD25F0-EBC1-4E3E-A4AA-77C198517982}"/>
+              </a:ext>
+            </a:extLst>
+          </p:cNvPr>
           <p:cNvSpPr/>
           <p:nvPr/>
         </p:nvSpPr>
         <p:spPr>
           <a:xfrm>
-            <a:off x="822960" y="4773168"/>
-            <a:ext cx="54864" cy="1344168"/>
+            <a:off x="6461187" y="4792980"/>
+            <a:ext cx="777240" cy="1341120"/>
           </a:xfrm>
           <a:prstGeom prst="rect">
             <a:avLst/>
           </a:prstGeom>
-          <a:solidFill>
-            <a:srgbClr val="1F4E79"/>
-          </a:solidFill>
-          <a:ln>
-            <a:noFill/>
-          </a:ln>
-          <a:effectLst/>
         </p:spPr>
         <p:style>
-          <a:lnRef idx="1">
-            <a:schemeClr val="accent1"/>
+          <a:lnRef idx="2">
+            <a:schemeClr val="accent1">
+              <a:shade val="50000"/>
+            </a:schemeClr>
           </a:lnRef>
-          <a:fillRef idx="3">
+          <a:fillRef idx="1">
             <a:schemeClr val="accent1"/>
           </a:fillRef>
-          <a:effectRef idx="2">
+          <a:effectRef idx="0">
             <a:schemeClr val="accent1"/>
           </a:effectRef>
           <a:fontRef idx="minor">
@@ -12362,401 +12939,39 @@
           <a:bodyPr rtlCol="0" anchor="ctr"/>
           <a:lstStyle/>
           <a:p>
-            <a:pPr algn="ctr"/>
-          </a:p>
-        </p:txBody>
-      </p:sp>
-      <p:sp>
-        <p:nvSpPr>
-          <p:cNvPr id="23" name="p2-label-text"/>
-          <p:cNvSpPr txBox="1"/>
-          <p:nvPr/>
-        </p:nvSpPr>
-        <p:spPr>
-          <a:xfrm>
-            <a:off x="877824" y="4773168"/>
-            <a:ext cx="722376" cy="1344168"/>
-          </a:xfrm>
-          <a:prstGeom prst="rect">
-            <a:avLst/>
-          </a:prstGeom>
-          <a:noFill/>
-        </p:spPr>
-        <p:txBody>
-          <a:bodyPr wrap="square" anchor="ctr" vert="eaVert">
-            <a:noAutofit/>
-          </a:bodyPr>
-          <a:lstStyle/>
-          <a:p>
-            <a:pPr algn="ctr"/>
+            <a:pPr marL="0" marR="0" lvl="0" indent="0" algn="ctr" defTabSz="914400" rtl="0" eaLnBrk="1" fontAlgn="auto" latinLnBrk="0" hangingPunct="1">
+              <a:lnSpc>
+                <a:spcPct val="100000"/>
+              </a:lnSpc>
+              <a:spcBef>
+                <a:spcPts val="0"/>
+              </a:spcBef>
+              <a:spcAft>
+                <a:spcPts val="0"/>
+              </a:spcAft>
+              <a:buClrTx/>
+              <a:buSzTx/>
+              <a:buFontTx/>
+              <a:buNone/>
+              <a:tabLst/>
+              <a:defRPr/>
+            </a:pPr>
             <a:r>
-              <a:rPr sz="1050" b="1">
+              <a:rPr kumimoji="0" lang="zh-CN" altLang="en-US" sz="1800" b="0" i="0" u="none" strike="noStrike" kern="1200" cap="none" spc="0" normalizeH="0" baseline="0" noProof="0" dirty="0">
+                <a:ln>
+                  <a:noFill/>
+                </a:ln>
                 <a:solidFill>
-                  <a:srgbClr val="0A0A0A"/>
+                  <a:prstClr val="white"/>
                 </a:solidFill>
-                <a:latin typeface="微软雅黑"/>
-              </a:rPr>
-              <a:t>用户维度</a:t>
-            </a:r>
-          </a:p>
-        </p:txBody>
-      </p:sp>
-      <p:sp>
-        <p:nvSpPr>
-          <p:cNvPr id="24" name="p2-label-bg"/>
-          <p:cNvSpPr/>
-          <p:nvPr/>
-        </p:nvSpPr>
-        <p:spPr>
-          <a:xfrm>
-            <a:off x="6464808" y="4791456"/>
-            <a:ext cx="777240" cy="1344168"/>
-          </a:xfrm>
-          <a:prstGeom prst="rect">
-            <a:avLst/>
-          </a:prstGeom>
-          <a:solidFill>
-            <a:srgbClr val="E3EBF4"/>
-          </a:solidFill>
-          <a:ln>
-            <a:noFill/>
-          </a:ln>
-          <a:effectLst/>
-        </p:spPr>
-        <p:style>
-          <a:lnRef idx="1">
-            <a:schemeClr val="accent1"/>
-          </a:lnRef>
-          <a:fillRef idx="3">
-            <a:schemeClr val="accent1"/>
-          </a:fillRef>
-          <a:effectRef idx="2">
-            <a:schemeClr val="accent1"/>
-          </a:effectRef>
-          <a:fontRef idx="minor">
-            <a:schemeClr val="lt1"/>
-          </a:fontRef>
-        </p:style>
-        <p:txBody>
-          <a:bodyPr rtlCol="0" anchor="ctr"/>
-          <a:lstStyle/>
-          <a:p>
-            <a:pPr algn="ctr"/>
-          </a:p>
-        </p:txBody>
-      </p:sp>
-      <p:sp>
-        <p:nvSpPr>
-          <p:cNvPr id="25" name="p2-label-bar"/>
-          <p:cNvSpPr/>
-          <p:nvPr/>
-        </p:nvSpPr>
-        <p:spPr>
-          <a:xfrm>
-            <a:off x="6464808" y="4791456"/>
-            <a:ext cx="54864" cy="1344168"/>
-          </a:xfrm>
-          <a:prstGeom prst="rect">
-            <a:avLst/>
-          </a:prstGeom>
-          <a:solidFill>
-            <a:srgbClr val="1F4E79"/>
-          </a:solidFill>
-          <a:ln>
-            <a:noFill/>
-          </a:ln>
-          <a:effectLst/>
-        </p:spPr>
-        <p:style>
-          <a:lnRef idx="1">
-            <a:schemeClr val="accent1"/>
-          </a:lnRef>
-          <a:fillRef idx="3">
-            <a:schemeClr val="accent1"/>
-          </a:fillRef>
-          <a:effectRef idx="2">
-            <a:schemeClr val="accent1"/>
-          </a:effectRef>
-          <a:fontRef idx="minor">
-            <a:schemeClr val="lt1"/>
-          </a:fontRef>
-        </p:style>
-        <p:txBody>
-          <a:bodyPr rtlCol="0" anchor="ctr"/>
-          <a:lstStyle/>
-          <a:p>
-            <a:pPr algn="ctr"/>
-          </a:p>
-        </p:txBody>
-      </p:sp>
-      <p:sp>
-        <p:nvSpPr>
-          <p:cNvPr id="26" name="p2-label-text"/>
-          <p:cNvSpPr txBox="1"/>
-          <p:nvPr/>
-        </p:nvSpPr>
-        <p:spPr>
-          <a:xfrm>
-            <a:off x="6519672" y="4791456"/>
-            <a:ext cx="722376" cy="1344168"/>
-          </a:xfrm>
-          <a:prstGeom prst="rect">
-            <a:avLst/>
-          </a:prstGeom>
-          <a:noFill/>
-        </p:spPr>
-        <p:txBody>
-          <a:bodyPr wrap="square" anchor="ctr" vert="eaVert">
-            <a:noAutofit/>
-          </a:bodyPr>
-          <a:lstStyle/>
-          <a:p>
-            <a:pPr algn="ctr"/>
-            <a:r>
-              <a:rPr sz="1050" b="1">
-                <a:solidFill>
-                  <a:srgbClr val="0A0A0A"/>
-                </a:solidFill>
-                <a:latin typeface="微软雅黑"/>
+                <a:effectLst/>
+                <a:uLnTx/>
+                <a:uFillTx/>
+                <a:latin typeface="等线"/>
+                <a:ea typeface="等线" panose="02010600030101010101" pitchFamily="2" charset="-122"/>
+                <a:cs typeface="+mn-cs"/>
               </a:rPr>
               <a:t>单笔借款维度</a:t>
-            </a:r>
-          </a:p>
-        </p:txBody>
-      </p:sp>
-      <p:sp>
-        <p:nvSpPr>
-          <p:cNvPr id="27" name="s-badge-1"/>
-          <p:cNvSpPr/>
-          <p:nvPr/>
-        </p:nvSpPr>
-        <p:spPr>
-          <a:xfrm>
-            <a:off x="265176" y="1184148"/>
-            <a:ext cx="274320" cy="274320"/>
-          </a:xfrm>
-          <a:prstGeom prst="rect">
-            <a:avLst/>
-          </a:prstGeom>
-          <a:solidFill>
-            <a:srgbClr val="D6A000"/>
-          </a:solidFill>
-          <a:ln>
-            <a:noFill/>
-          </a:ln>
-          <a:effectLst/>
-        </p:spPr>
-        <p:style>
-          <a:lnRef idx="1">
-            <a:schemeClr val="accent1"/>
-          </a:lnRef>
-          <a:fillRef idx="3">
-            <a:schemeClr val="accent1"/>
-          </a:fillRef>
-          <a:effectRef idx="2">
-            <a:schemeClr val="accent1"/>
-          </a:effectRef>
-          <a:fontRef idx="minor">
-            <a:schemeClr val="lt1"/>
-          </a:fontRef>
-        </p:style>
-        <p:txBody>
-          <a:bodyPr rtlCol="0" anchor="ctr"/>
-          <a:lstStyle/>
-          <a:p>
-            <a:pPr algn="ctr"/>
-          </a:p>
-        </p:txBody>
-      </p:sp>
-      <p:sp>
-        <p:nvSpPr>
-          <p:cNvPr id="28" name="s-badge-text-1"/>
-          <p:cNvSpPr txBox="1"/>
-          <p:nvPr/>
-        </p:nvSpPr>
-        <p:spPr>
-          <a:xfrm>
-            <a:off x="265176" y="1184148"/>
-            <a:ext cx="274320" cy="274320"/>
-          </a:xfrm>
-          <a:prstGeom prst="rect">
-            <a:avLst/>
-          </a:prstGeom>
-          <a:noFill/>
-        </p:spPr>
-        <p:txBody>
-          <a:bodyPr wrap="none" anchor="ctr">
-            <a:noAutofit/>
-          </a:bodyPr>
-          <a:lstStyle/>
-          <a:p>
-            <a:pPr algn="ctr"/>
-            <a:r>
-              <a:rPr sz="1200" b="1">
-                <a:solidFill>
-                  <a:srgbClr val="FFFFFF"/>
-                </a:solidFill>
-                <a:latin typeface="微软雅黑"/>
-              </a:rPr>
-              <a:t>1</a:t>
-            </a:r>
-          </a:p>
-        </p:txBody>
-      </p:sp>
-      <p:sp>
-        <p:nvSpPr>
-          <p:cNvPr id="29" name="s-badge-2"/>
-          <p:cNvSpPr/>
-          <p:nvPr/>
-        </p:nvSpPr>
-        <p:spPr>
-          <a:xfrm>
-            <a:off x="310896" y="2638044"/>
-            <a:ext cx="274320" cy="274320"/>
-          </a:xfrm>
-          <a:prstGeom prst="rect">
-            <a:avLst/>
-          </a:prstGeom>
-          <a:solidFill>
-            <a:srgbClr val="D6A000"/>
-          </a:solidFill>
-          <a:ln>
-            <a:noFill/>
-          </a:ln>
-          <a:effectLst/>
-        </p:spPr>
-        <p:style>
-          <a:lnRef idx="1">
-            <a:schemeClr val="accent1"/>
-          </a:lnRef>
-          <a:fillRef idx="3">
-            <a:schemeClr val="accent1"/>
-          </a:fillRef>
-          <a:effectRef idx="2">
-            <a:schemeClr val="accent1"/>
-          </a:effectRef>
-          <a:fontRef idx="minor">
-            <a:schemeClr val="lt1"/>
-          </a:fontRef>
-        </p:style>
-        <p:txBody>
-          <a:bodyPr rtlCol="0" anchor="ctr"/>
-          <a:lstStyle/>
-          <a:p>
-            <a:pPr algn="ctr"/>
-          </a:p>
-        </p:txBody>
-      </p:sp>
-      <p:sp>
-        <p:nvSpPr>
-          <p:cNvPr id="30" name="s-badge-text-2"/>
-          <p:cNvSpPr txBox="1"/>
-          <p:nvPr/>
-        </p:nvSpPr>
-        <p:spPr>
-          <a:xfrm>
-            <a:off x="310896" y="2638044"/>
-            <a:ext cx="274320" cy="274320"/>
-          </a:xfrm>
-          <a:prstGeom prst="rect">
-            <a:avLst/>
-          </a:prstGeom>
-          <a:noFill/>
-        </p:spPr>
-        <p:txBody>
-          <a:bodyPr wrap="none" anchor="ctr">
-            <a:noAutofit/>
-          </a:bodyPr>
-          <a:lstStyle/>
-          <a:p>
-            <a:pPr algn="ctr"/>
-            <a:r>
-              <a:rPr sz="1200" b="1">
-                <a:solidFill>
-                  <a:srgbClr val="FFFFFF"/>
-                </a:solidFill>
-                <a:latin typeface="微软雅黑"/>
-              </a:rPr>
-              <a:t>2</a:t>
-            </a:r>
-          </a:p>
-        </p:txBody>
-      </p:sp>
-      <p:sp>
-        <p:nvSpPr>
-          <p:cNvPr id="31" name="s-badge-3"/>
-          <p:cNvSpPr/>
-          <p:nvPr/>
-        </p:nvSpPr>
-        <p:spPr>
-          <a:xfrm>
-            <a:off x="310896" y="4146803"/>
-            <a:ext cx="274320" cy="274320"/>
-          </a:xfrm>
-          <a:prstGeom prst="rect">
-            <a:avLst/>
-          </a:prstGeom>
-          <a:solidFill>
-            <a:srgbClr val="D6A000"/>
-          </a:solidFill>
-          <a:ln>
-            <a:noFill/>
-          </a:ln>
-          <a:effectLst/>
-        </p:spPr>
-        <p:style>
-          <a:lnRef idx="1">
-            <a:schemeClr val="accent1"/>
-          </a:lnRef>
-          <a:fillRef idx="3">
-            <a:schemeClr val="accent1"/>
-          </a:fillRef>
-          <a:effectRef idx="2">
-            <a:schemeClr val="accent1"/>
-          </a:effectRef>
-          <a:fontRef idx="minor">
-            <a:schemeClr val="lt1"/>
-          </a:fontRef>
-        </p:style>
-        <p:txBody>
-          <a:bodyPr rtlCol="0" anchor="ctr"/>
-          <a:lstStyle/>
-          <a:p>
-            <a:pPr algn="ctr"/>
-          </a:p>
-        </p:txBody>
-      </p:sp>
-      <p:sp>
-        <p:nvSpPr>
-          <p:cNvPr id="32" name="s-badge-text-3"/>
-          <p:cNvSpPr txBox="1"/>
-          <p:nvPr/>
-        </p:nvSpPr>
-        <p:spPr>
-          <a:xfrm>
-            <a:off x="310896" y="4146803"/>
-            <a:ext cx="274320" cy="274320"/>
-          </a:xfrm>
-          <a:prstGeom prst="rect">
-            <a:avLst/>
-          </a:prstGeom>
-          <a:noFill/>
-        </p:spPr>
-        <p:txBody>
-          <a:bodyPr wrap="none" anchor="ctr">
-            <a:noAutofit/>
-          </a:bodyPr>
-          <a:lstStyle/>
-          <a:p>
-            <a:pPr algn="ctr"/>
-            <a:r>
-              <a:rPr sz="1200" b="1">
-                <a:solidFill>
-                  <a:srgbClr val="FFFFFF"/>
-                </a:solidFill>
-                <a:latin typeface="微软雅黑"/>
-              </a:rPr>
-              <a:t>3</a:t>
             </a:r>
           </a:p>
         </p:txBody>
@@ -12820,7 +13035,10 @@
         </p:spPr>
         <p:txBody>
           <a:bodyPr/>
-          <a:p/>
+          <a:lstStyle/>
+          <a:p>
+            <a:endParaRPr/>
+          </a:p>
         </p:txBody>
       </p:sp>
       <p:sp>
@@ -12953,7 +13171,10 @@
         </p:spPr>
         <p:txBody>
           <a:bodyPr/>
-          <a:p/>
+          <a:lstStyle/>
+          <a:p>
+            <a:endParaRPr/>
+          </a:p>
         </p:txBody>
       </p:sp>
       <p:sp>
@@ -13873,7 +14094,10 @@
         </p:spPr>
         <p:txBody>
           <a:bodyPr/>
-          <a:p/>
+          <a:lstStyle/>
+          <a:p>
+            <a:endParaRPr/>
+          </a:p>
         </p:txBody>
       </p:sp>
       <p:sp>
@@ -14660,7 +14884,10 @@
         </p:spPr>
         <p:txBody>
           <a:bodyPr/>
-          <a:p/>
+          <a:lstStyle/>
+          <a:p>
+            <a:endParaRPr/>
+          </a:p>
         </p:txBody>
       </p:sp>
       <p:sp>
@@ -15580,7 +15807,10 @@
         </p:spPr>
         <p:txBody>
           <a:bodyPr/>
-          <a:p/>
+          <a:lstStyle/>
+          <a:p>
+            <a:endParaRPr/>
+          </a:p>
         </p:txBody>
       </p:sp>
       <p:sp>
@@ -16239,10 +16469,14 @@
                     </a:p>
                   </a:txBody>
                   <a:tcPr marL="27432" marR="27432" marT="9144" marB="9144">
-                    <a:lnT w="19050" cap="flat">
-                      <a:solidFill>
-                        <a:srgbClr val="0A0A0A"/>
-                      </a:solidFill>
+                    <a:lnT w="9525" cap="flat" cmpd="sng" algn="ctr">
+                      <a:solidFill>
+                        <a:srgbClr val="D6D6D6"/>
+                      </a:solidFill>
+                      <a:prstDash val="solid"/>
+                      <a:round/>
+                      <a:headEnd type="none" w="med" len="med"/>
+                      <a:tailEnd type="none" w="med" len="med"/>
                     </a:lnT>
                     <a:lnB w="9525" cap="flat">
                       <a:solidFill>
@@ -16317,10 +16551,14 @@
                     </a:p>
                   </a:txBody>
                   <a:tcPr marL="27432" marR="27432" marT="9144" marB="9144">
-                    <a:lnT w="19050" cap="flat">
-                      <a:solidFill>
-                        <a:srgbClr val="0A0A0A"/>
-                      </a:solidFill>
+                    <a:lnT w="9525" cap="flat" cmpd="sng" algn="ctr">
+                      <a:solidFill>
+                        <a:srgbClr val="D6D6D6"/>
+                      </a:solidFill>
+                      <a:prstDash val="solid"/>
+                      <a:round/>
+                      <a:headEnd type="none" w="med" len="med"/>
+                      <a:tailEnd type="none" w="med" len="med"/>
                     </a:lnT>
                     <a:lnB w="9525" cap="flat">
                       <a:solidFill>
@@ -16355,10 +16593,14 @@
                     </a:p>
                   </a:txBody>
                   <a:tcPr marL="27432" marR="27432" marT="9144" marB="9144">
-                    <a:lnT w="19050" cap="flat">
-                      <a:solidFill>
-                        <a:srgbClr val="0A0A0A"/>
-                      </a:solidFill>
+                    <a:lnT w="9525" cap="flat" cmpd="sng" algn="ctr">
+                      <a:solidFill>
+                        <a:srgbClr val="D6D6D6"/>
+                      </a:solidFill>
+                      <a:prstDash val="solid"/>
+                      <a:round/>
+                      <a:headEnd type="none" w="med" len="med"/>
+                      <a:tailEnd type="none" w="med" len="med"/>
                     </a:lnT>
                     <a:lnB w="9525" cap="flat">
                       <a:solidFill>
@@ -16386,10 +16628,14 @@
                     </a:p>
                   </a:txBody>
                   <a:tcPr marL="27432" marR="27432" marT="9144" marB="9144">
-                    <a:lnT w="19050" cap="flat">
-                      <a:solidFill>
-                        <a:srgbClr val="0A0A0A"/>
-                      </a:solidFill>
+                    <a:lnT w="9525" cap="flat" cmpd="sng" algn="ctr">
+                      <a:solidFill>
+                        <a:srgbClr val="D6D6D6"/>
+                      </a:solidFill>
+                      <a:prstDash val="solid"/>
+                      <a:round/>
+                      <a:headEnd type="none" w="med" len="med"/>
+                      <a:tailEnd type="none" w="med" len="med"/>
                     </a:lnT>
                     <a:lnB w="9525" cap="flat">
                       <a:solidFill>
@@ -16424,10 +16670,14 @@
                     </a:p>
                   </a:txBody>
                   <a:tcPr marL="27432" marR="27432" marT="9144" marB="9144">
-                    <a:lnT w="19050" cap="flat">
-                      <a:solidFill>
-                        <a:srgbClr val="0A0A0A"/>
-                      </a:solidFill>
+                    <a:lnT w="9525" cap="flat" cmpd="sng" algn="ctr">
+                      <a:solidFill>
+                        <a:srgbClr val="D6D6D6"/>
+                      </a:solidFill>
+                      <a:prstDash val="solid"/>
+                      <a:round/>
+                      <a:headEnd type="none" w="med" len="med"/>
+                      <a:tailEnd type="none" w="med" len="med"/>
                     </a:lnT>
                     <a:lnB w="9525" cap="flat">
                       <a:solidFill>
@@ -16455,10 +16705,14 @@
                     </a:p>
                   </a:txBody>
                   <a:tcPr marL="27432" marR="27432" marT="9144" marB="9144">
-                    <a:lnT w="19050" cap="flat">
-                      <a:solidFill>
-                        <a:srgbClr val="0A0A0A"/>
-                      </a:solidFill>
+                    <a:lnT w="9525" cap="flat" cmpd="sng" algn="ctr">
+                      <a:solidFill>
+                        <a:srgbClr val="D6D6D6"/>
+                      </a:solidFill>
+                      <a:prstDash val="solid"/>
+                      <a:round/>
+                      <a:headEnd type="none" w="med" len="med"/>
+                      <a:tailEnd type="none" w="med" len="med"/>
                     </a:lnT>
                     <a:lnB w="9525" cap="flat">
                       <a:solidFill>
@@ -16493,10 +16747,14 @@
                     </a:p>
                   </a:txBody>
                   <a:tcPr marL="27432" marR="27432" marT="9144" marB="9144">
-                    <a:lnT w="19050" cap="flat">
-                      <a:solidFill>
-                        <a:srgbClr val="0A0A0A"/>
-                      </a:solidFill>
+                    <a:lnT w="9525" cap="flat" cmpd="sng" algn="ctr">
+                      <a:solidFill>
+                        <a:srgbClr val="D6D6D6"/>
+                      </a:solidFill>
+                      <a:prstDash val="solid"/>
+                      <a:round/>
+                      <a:headEnd type="none" w="med" len="med"/>
+                      <a:tailEnd type="none" w="med" len="med"/>
                     </a:lnT>
                     <a:lnB w="9525" cap="flat">
                       <a:solidFill>
@@ -16531,10 +16789,14 @@
                     </a:p>
                   </a:txBody>
                   <a:tcPr marL="27432" marR="27432" marT="9144" marB="9144">
-                    <a:lnT w="19050" cap="flat">
-                      <a:solidFill>
-                        <a:srgbClr val="0A0A0A"/>
-                      </a:solidFill>
+                    <a:lnT w="9525" cap="flat" cmpd="sng" algn="ctr">
+                      <a:solidFill>
+                        <a:srgbClr val="D6D6D6"/>
+                      </a:solidFill>
+                      <a:prstDash val="solid"/>
+                      <a:round/>
+                      <a:headEnd type="none" w="med" len="med"/>
+                      <a:tailEnd type="none" w="med" len="med"/>
                     </a:lnT>
                     <a:lnB w="9525" cap="flat">
                       <a:solidFill>
@@ -16905,10 +17167,14 @@
                     </a:p>
                   </a:txBody>
                   <a:tcPr marL="27432" marR="27432" marT="9144" marB="9144">
-                    <a:lnT w="19050" cap="flat">
-                      <a:solidFill>
-                        <a:srgbClr val="0A0A0A"/>
-                      </a:solidFill>
+                    <a:lnT w="9525" cap="flat" cmpd="sng" algn="ctr">
+                      <a:solidFill>
+                        <a:srgbClr val="D6D6D6"/>
+                      </a:solidFill>
+                      <a:prstDash val="solid"/>
+                      <a:round/>
+                      <a:headEnd type="none" w="med" len="med"/>
+                      <a:tailEnd type="none" w="med" len="med"/>
                     </a:lnT>
                     <a:lnB w="9525" cap="flat">
                       <a:solidFill>
@@ -16936,10 +17202,14 @@
                     </a:p>
                   </a:txBody>
                   <a:tcPr marL="27432" marR="27432" marT="9144" marB="9144">
-                    <a:lnT w="19050" cap="flat">
-                      <a:solidFill>
-                        <a:srgbClr val="0A0A0A"/>
-                      </a:solidFill>
+                    <a:lnT w="9525" cap="flat" cmpd="sng" algn="ctr">
+                      <a:solidFill>
+                        <a:srgbClr val="D6D6D6"/>
+                      </a:solidFill>
+                      <a:prstDash val="solid"/>
+                      <a:round/>
+                      <a:headEnd type="none" w="med" len="med"/>
+                      <a:tailEnd type="none" w="med" len="med"/>
                     </a:lnT>
                     <a:lnB w="9525" cap="flat">
                       <a:solidFill>
@@ -16967,10 +17237,14 @@
                     </a:p>
                   </a:txBody>
                   <a:tcPr marL="27432" marR="27432" marT="9144" marB="9144">
-                    <a:lnT w="19050" cap="flat">
-                      <a:solidFill>
-                        <a:srgbClr val="0A0A0A"/>
-                      </a:solidFill>
+                    <a:lnT w="9525" cap="flat" cmpd="sng" algn="ctr">
+                      <a:solidFill>
+                        <a:srgbClr val="D6D6D6"/>
+                      </a:solidFill>
+                      <a:prstDash val="solid"/>
+                      <a:round/>
+                      <a:headEnd type="none" w="med" len="med"/>
+                      <a:tailEnd type="none" w="med" len="med"/>
                     </a:lnT>
                     <a:lnB w="9525" cap="flat">
                       <a:solidFill>
@@ -16998,10 +17272,14 @@
                     </a:p>
                   </a:txBody>
                   <a:tcPr marL="27432" marR="27432" marT="9144" marB="9144">
-                    <a:lnT w="19050" cap="flat">
-                      <a:solidFill>
-                        <a:srgbClr val="0A0A0A"/>
-                      </a:solidFill>
+                    <a:lnT w="9525" cap="flat" cmpd="sng" algn="ctr">
+                      <a:solidFill>
+                        <a:srgbClr val="D6D6D6"/>
+                      </a:solidFill>
+                      <a:prstDash val="solid"/>
+                      <a:round/>
+                      <a:headEnd type="none" w="med" len="med"/>
+                      <a:tailEnd type="none" w="med" len="med"/>
                     </a:lnT>
                     <a:lnB w="9525" cap="flat">
                       <a:solidFill>
@@ -17036,10 +17314,14 @@
                     </a:p>
                   </a:txBody>
                   <a:tcPr marL="27432" marR="27432" marT="9144" marB="9144">
-                    <a:lnT w="19050" cap="flat">
-                      <a:solidFill>
-                        <a:srgbClr val="0A0A0A"/>
-                      </a:solidFill>
+                    <a:lnT w="9525" cap="flat" cmpd="sng" algn="ctr">
+                      <a:solidFill>
+                        <a:srgbClr val="D6D6D6"/>
+                      </a:solidFill>
+                      <a:prstDash val="solid"/>
+                      <a:round/>
+                      <a:headEnd type="none" w="med" len="med"/>
+                      <a:tailEnd type="none" w="med" len="med"/>
                     </a:lnT>
                     <a:lnB w="9525" cap="flat">
                       <a:solidFill>
@@ -17067,10 +17349,14 @@
                     </a:p>
                   </a:txBody>
                   <a:tcPr marL="27432" marR="27432" marT="9144" marB="9144">
-                    <a:lnT w="19050" cap="flat">
-                      <a:solidFill>
-                        <a:srgbClr val="0A0A0A"/>
-                      </a:solidFill>
+                    <a:lnT w="9525" cap="flat" cmpd="sng" algn="ctr">
+                      <a:solidFill>
+                        <a:srgbClr val="D6D6D6"/>
+                      </a:solidFill>
+                      <a:prstDash val="solid"/>
+                      <a:round/>
+                      <a:headEnd type="none" w="med" len="med"/>
+                      <a:tailEnd type="none" w="med" len="med"/>
                     </a:lnT>
                     <a:lnB w="9525" cap="flat">
                       <a:solidFill>
@@ -17098,10 +17384,14 @@
                     </a:p>
                   </a:txBody>
                   <a:tcPr marL="27432" marR="27432" marT="9144" marB="9144">
-                    <a:lnT w="19050" cap="flat">
-                      <a:solidFill>
-                        <a:srgbClr val="0A0A0A"/>
-                      </a:solidFill>
+                    <a:lnT w="9525" cap="flat" cmpd="sng" algn="ctr">
+                      <a:solidFill>
+                        <a:srgbClr val="D6D6D6"/>
+                      </a:solidFill>
+                      <a:prstDash val="solid"/>
+                      <a:round/>
+                      <a:headEnd type="none" w="med" len="med"/>
+                      <a:tailEnd type="none" w="med" len="med"/>
                     </a:lnT>
                     <a:lnB w="9525" cap="flat">
                       <a:solidFill>
@@ -17136,10 +17426,14 @@
                     </a:p>
                   </a:txBody>
                   <a:tcPr marL="27432" marR="27432" marT="9144" marB="9144">
-                    <a:lnT w="19050" cap="flat">
-                      <a:solidFill>
-                        <a:srgbClr val="0A0A0A"/>
-                      </a:solidFill>
+                    <a:lnT w="9525" cap="flat" cmpd="sng" algn="ctr">
+                      <a:solidFill>
+                        <a:srgbClr val="D6D6D6"/>
+                      </a:solidFill>
+                      <a:prstDash val="solid"/>
+                      <a:round/>
+                      <a:headEnd type="none" w="med" len="med"/>
+                      <a:tailEnd type="none" w="med" len="med"/>
                     </a:lnT>
                     <a:lnB w="9525" cap="flat">
                       <a:solidFill>

--- a/银行流水分享_V1.7.pptx
+++ b/银行流水分享_V1.7.pptx
@@ -1222,7 +1222,7 @@
         </p:nvSpPr>
         <p:spPr>
           <a:xfrm>
-            <a:off x="607168" y="195922"/>
+            <a:off x="914400" y="8686800"/>
             <a:ext cx="4304581" cy="369332"/>
           </a:xfrm>
           <a:prstGeom prst="rect">
@@ -1257,7 +1257,7 @@
         </p:nvSpPr>
         <p:spPr>
           <a:xfrm>
-            <a:off x="607168" y="620360"/>
+            <a:off x="914400" y="8686800"/>
             <a:ext cx="4304581" cy="369332"/>
           </a:xfrm>
           <a:prstGeom prst="rect">
@@ -6165,8 +6165,8 @@
         </p:nvSpPr>
         <p:spPr>
           <a:xfrm>
-            <a:off x="600015" y="214702"/>
-            <a:ext cx="8890000" cy="355600"/>
+            <a:off x="603504" y="210312"/>
+            <a:ext cx="10972800" cy="621792"/>
           </a:xfrm>
           <a:prstGeom prst="rect">
             <a:avLst/>
@@ -6177,10 +6177,10 @@
           </a:ln>
         </p:spPr>
         <p:txBody>
-          <a:bodyPr wrap="none" lIns="0" tIns="0" rIns="0" bIns="0" rtlCol="0" anchor="ctr"/>
+          <a:bodyPr wrap="square" lIns="0" tIns="0" rIns="0" bIns="0" rtlCol="0" anchor="ctr"/>
           <a:lstStyle/>
           <a:p>
-            <a:pPr marL="0" marR="0" lvl="0" indent="0" algn="l" defTabSz="914400" rtl="0" eaLnBrk="1" fontAlgn="auto" latinLnBrk="0" hangingPunct="1">
+            <a:pPr marL="0" marR="0" lvl="0" indent="0" algn="l" defTabSz="914400" rtl="0" eaLnBrk="1" fontAlgn="auto" latinLnBrk="1" hangingPunct="1">
               <a:lnSpc>
                 <a:spcPct val="130000"/>
               </a:lnSpc>
@@ -6198,36 +6198,14 @@
               <a:defRPr/>
             </a:pPr>
             <a:r>
-              <a:rPr kumimoji="0" lang="en-US" altLang="zh-CN" sz="2000" b="1" i="0" u="none" strike="noStrike" kern="1200" cap="none" spc="0" normalizeH="0" baseline="0" noProof="1">
-                <a:ln>
-                  <a:noFill/>
-                </a:ln>
+              <a:rPr lang="zh-CN" altLang="en-US" sz="2000" b="1" noProof="1">
                 <a:solidFill>
                   <a:srgbClr val="0A0A0A"/>
                 </a:solidFill>
-                <a:effectLst/>
-                <a:uLnTx/>
-                <a:uFillTx/>
-                <a:latin typeface="微软雅黑" panose="020B0503020204020204" pitchFamily="34" charset="-122"/>
                 <a:ea typeface="微软雅黑" panose="020B0503020204020204" pitchFamily="34" charset="-122"/>
-                <a:cs typeface="+mn-cs"/>
               </a:rPr>
-              <a:t>从一笔交易到完整的客户财务画像，输出直接回答新增还款能力</a:t>
+              <a:t>从一笔交易到完整客户财务画像直接回答新增还款能力</a:t>
             </a:r>
-            <a:endParaRPr kumimoji="0" lang="en-US" altLang="zh-CN" sz="2000" b="0" i="0" u="none" strike="noStrike" kern="1200" cap="none" spc="0" normalizeH="0" baseline="0" noProof="1">
-              <a:ln>
-                <a:noFill/>
-              </a:ln>
-              <a:solidFill>
-                <a:prstClr val="black"/>
-              </a:solidFill>
-              <a:effectLst/>
-              <a:uLnTx/>
-              <a:uFillTx/>
-              <a:latin typeface="微软雅黑" panose="020B0503020204020204" pitchFamily="34" charset="-122"/>
-              <a:ea typeface="微软雅黑" panose="020B0503020204020204" pitchFamily="34" charset="-122"/>
-              <a:cs typeface="+mn-cs"/>
-            </a:endParaRPr>
           </a:p>
         </p:txBody>
       </p:sp>
@@ -6245,7 +6223,7 @@
         </p:nvSpPr>
         <p:spPr>
           <a:xfrm>
-            <a:off x="511115" y="570302"/>
+            <a:off x="511115" y="736600"/>
             <a:ext cx="10901632" cy="438133"/>
           </a:xfrm>
           <a:prstGeom prst="rect">
@@ -6277,7 +6255,7 @@
               <a:defRPr/>
             </a:pPr>
             <a:r>
-              <a:rPr kumimoji="0" lang="en-US" altLang="zh-CN" sz="1800" b="0" i="0" u="none" strike="noStrike" kern="1200" cap="none" spc="0" normalizeH="0" baseline="0" noProof="1">
+              <a:rPr kumimoji="0" lang="zh-CN" altLang="en-US" sz="1800" b="0" i="0" u="none" strike="noStrike" kern="1200" cap="none" spc="0" normalizeH="0" baseline="0" noProof="1">
                 <a:ln>
                   <a:noFill/>
                 </a:ln>
@@ -6291,7 +6269,7 @@
                 <a:ea typeface="微软雅黑" panose="020B0503020204020204" pitchFamily="34" charset="-122"/>
                 <a:cs typeface="+mn-cs"/>
               </a:rPr>
-              <a:t>原始流水 → 交易明细维度 → 用户汇总维度 → Serviceability 计算</a:t>
+              <a:t>原始银行流水经大模型识别与分类，形成交易明细与用户汇总两级视图，直接回答新增还款能力</a:t>
             </a:r>
             <a:endParaRPr kumimoji="0" lang="en-US" altLang="zh-CN" sz="1800" b="0" i="0" u="none" strike="noStrike" kern="1200" cap="none" spc="0" normalizeH="0" baseline="0" noProof="1">
               <a:ln>
@@ -6373,7 +6351,7 @@
         </p:nvSpPr>
         <p:spPr>
           <a:xfrm>
-            <a:off x="584200" y="1206500"/>
+            <a:off x="584200" y="1252728"/>
             <a:ext cx="3810000" cy="228600"/>
           </a:xfrm>
           <a:prstGeom prst="rect">
@@ -6406,7 +6384,7 @@
               <a:defRPr/>
             </a:pPr>
             <a:r>
-              <a:rPr kumimoji="0" sz="1200" b="1" i="0" u="none" strike="noStrike" kern="1200" cap="none" spc="0" normalizeH="0" baseline="0" noProof="0" dirty="0">
+              <a:rPr kumimoji="0" lang="en-US" altLang="zh-CN" sz="1200" b="1" i="0" u="none" strike="noStrike" kern="1200" cap="none" spc="0" normalizeH="0" baseline="0" noProof="0">
                 <a:ln>
                   <a:noFill/>
                 </a:ln>
@@ -6423,7 +6401,7 @@
               <a:t>1. </a:t>
             </a:r>
             <a:r>
-              <a:rPr kumimoji="0" sz="1200" b="1" i="0" u="none" strike="noStrike" kern="1200" cap="none" spc="0" normalizeH="0" baseline="0" noProof="0" dirty="0" err="1">
+              <a:rPr kumimoji="0" lang="zh-CN" altLang="en-US" sz="1200" b="1" i="0" u="none" strike="noStrike" kern="1200" cap="none" spc="0" normalizeH="0" baseline="0" noProof="0">
                 <a:ln>
                   <a:noFill/>
                 </a:ln>
@@ -6437,24 +6415,7 @@
                 <a:ea typeface="微软雅黑"/>
                 <a:cs typeface="+mn-cs"/>
               </a:rPr>
-              <a:t>原始银行流水（输入示例</a:t>
-            </a:r>
-            <a:r>
-              <a:rPr kumimoji="0" sz="1200" b="1" i="0" u="none" strike="noStrike" kern="1200" cap="none" spc="0" normalizeH="0" baseline="0" noProof="0" dirty="0">
-                <a:ln>
-                  <a:noFill/>
-                </a:ln>
-                <a:solidFill>
-                  <a:srgbClr val="0A0A0A"/>
-                </a:solidFill>
-                <a:effectLst/>
-                <a:uLnTx/>
-                <a:uFillTx/>
-                <a:latin typeface="微软雅黑"/>
-                <a:ea typeface="微软雅黑"/>
-                <a:cs typeface="+mn-cs"/>
-              </a:rPr>
-              <a:t>）</a:t>
+              <a:t>原始银行流水（输入示例）</a:t>
             </a:r>
             <a:endParaRPr kumimoji="0" lang="en-US" sz="1200" b="0" i="0" u="none" strike="noStrike" kern="1200" cap="none" spc="0" normalizeH="0" baseline="0" noProof="1">
               <a:ln>
@@ -6488,7 +6449,7 @@
         <p:spPr>
           <a:xfrm>
             <a:off x="635000" y="2662175"/>
-            <a:ext cx="4572000" cy="228600"/>
+            <a:ext cx="5943600" cy="228600"/>
           </a:xfrm>
           <a:prstGeom prst="rect">
             <a:avLst/>
@@ -6520,7 +6481,7 @@
               <a:defRPr/>
             </a:pPr>
             <a:r>
-              <a:rPr kumimoji="0" sz="1200" b="1" i="0" u="none" strike="noStrike" kern="1200" cap="none" spc="0" normalizeH="0" baseline="0" noProof="0" dirty="0">
+              <a:rPr kumimoji="0" lang="en-US" altLang="zh-CN" sz="1200" b="1" i="0" u="none" strike="noStrike" kern="1200" cap="none" spc="0" normalizeH="0" baseline="0" noProof="0">
                 <a:ln>
                   <a:noFill/>
                 </a:ln>
@@ -6537,7 +6498,7 @@
               <a:t>2. </a:t>
             </a:r>
             <a:r>
-              <a:rPr kumimoji="0" sz="1200" b="1" i="0" u="none" strike="noStrike" kern="1200" cap="none" spc="0" normalizeH="0" baseline="0" noProof="0" dirty="0" err="1">
+              <a:rPr kumimoji="0" lang="zh-CN" altLang="en-US" sz="1200" b="1" i="0" u="none" strike="noStrike" kern="1200" cap="none" spc="0" normalizeH="0" baseline="0" noProof="0">
                 <a:ln>
                   <a:noFill/>
                 </a:ln>
@@ -6551,24 +6512,7 @@
                 <a:ea typeface="微软雅黑"/>
                 <a:cs typeface="+mn-cs"/>
               </a:rPr>
-              <a:t>交易明细维度：理解每一笔交易（输出示例</a:t>
-            </a:r>
-            <a:r>
-              <a:rPr kumimoji="0" sz="1200" b="1" i="0" u="none" strike="noStrike" kern="1200" cap="none" spc="0" normalizeH="0" baseline="0" noProof="0" dirty="0">
-                <a:ln>
-                  <a:noFill/>
-                </a:ln>
-                <a:solidFill>
-                  <a:srgbClr val="0A0A0A"/>
-                </a:solidFill>
-                <a:effectLst/>
-                <a:uLnTx/>
-                <a:uFillTx/>
-                <a:latin typeface="微软雅黑"/>
-                <a:ea typeface="微软雅黑"/>
-                <a:cs typeface="+mn-cs"/>
-              </a:rPr>
-              <a:t>）</a:t>
+              <a:t>交易明细维度：理解每一笔交易（输出示例）</a:t>
             </a:r>
             <a:endParaRPr kumimoji="0" lang="en-US" sz="1200" b="1" i="0" u="none" strike="noStrike" kern="1200" cap="none" spc="0" normalizeH="0" baseline="0" noProof="1">
               <a:ln>
@@ -6602,7 +6546,7 @@
         <p:spPr>
           <a:xfrm>
             <a:off x="634999" y="4169271"/>
-            <a:ext cx="4572000" cy="228600"/>
+            <a:ext cx="5943600" cy="228600"/>
           </a:xfrm>
           <a:prstGeom prst="rect">
             <a:avLst/>
@@ -6634,7 +6578,7 @@
               <a:defRPr/>
             </a:pPr>
             <a:r>
-              <a:rPr kumimoji="0" sz="1200" b="1" i="0" u="none" strike="noStrike" kern="1200" cap="none" spc="0" normalizeH="0" baseline="0" noProof="0" dirty="0">
+              <a:rPr kumimoji="0" lang="en-US" altLang="zh-CN" sz="1200" b="1" i="0" u="none" strike="noStrike" kern="1200" cap="none" spc="0" normalizeH="0" baseline="0" noProof="0">
                 <a:ln>
                   <a:noFill/>
                 </a:ln>
@@ -6651,7 +6595,7 @@
               <a:t>3. </a:t>
             </a:r>
             <a:r>
-              <a:rPr kumimoji="0" sz="1200" b="1" i="0" u="none" strike="noStrike" kern="1200" cap="none" spc="0" normalizeH="0" baseline="0" noProof="0" dirty="0" err="1">
+              <a:rPr kumimoji="0" lang="zh-CN" altLang="en-US" sz="1200" b="1" i="0" u="none" strike="noStrike" kern="1200" cap="none" spc="0" normalizeH="0" baseline="0" noProof="0">
                 <a:ln>
                   <a:noFill/>
                 </a:ln>
@@ -6665,24 +6609,7 @@
                 <a:ea typeface="微软雅黑"/>
                 <a:cs typeface="+mn-cs"/>
               </a:rPr>
-              <a:t>用户汇总维度：形成完整负债画像（输出示例</a:t>
-            </a:r>
-            <a:r>
-              <a:rPr kumimoji="0" sz="1200" b="1" i="0" u="none" strike="noStrike" kern="1200" cap="none" spc="0" normalizeH="0" baseline="0" noProof="0" dirty="0">
-                <a:ln>
-                  <a:noFill/>
-                </a:ln>
-                <a:solidFill>
-                  <a:srgbClr val="0A0A0A"/>
-                </a:solidFill>
-                <a:effectLst/>
-                <a:uLnTx/>
-                <a:uFillTx/>
-                <a:latin typeface="微软雅黑"/>
-                <a:ea typeface="微软雅黑"/>
-                <a:cs typeface="+mn-cs"/>
-              </a:rPr>
-              <a:t>）</a:t>
+              <a:t>用户汇总维度：形成完整负债画像（输出示例）</a:t>
             </a:r>
             <a:endParaRPr kumimoji="0" lang="en-US" sz="1200" b="1" i="0" u="none" strike="noStrike" kern="1200" cap="none" spc="0" normalizeH="0" baseline="0" noProof="1">
               <a:ln>
@@ -10510,10 +10437,16 @@
           <p:cNvGraphicFramePr>
             <a:graphicFrameLocks noGrp="1"/>
           </p:cNvGraphicFramePr>
-          <p:nvPr/>
+          <p:nvPr>
+            <p:extLst>
+              <p:ext uri="{D42A27DB-BD31-4B8C-83A1-F6EECF244321}">
+                <p14:modId xmlns:p14="http://schemas.microsoft.com/office/powerpoint/2010/main" val="1273557807"/>
+              </p:ext>
+            </p:extLst>
+          </p:nvPr>
         </p:nvGraphicFramePr>
         <p:xfrm>
-          <a:off x="2024032" y="4512752"/>
+          <a:off x="2024032" y="4292600"/>
           <a:ext cx="3127663" cy="2293486"/>
         </p:xfrm>
         <a:graphic>
@@ -10536,7 +10469,7 @@
                   </a:extLst>
                 </a:gridCol>
               </a:tblGrid>
-              <a:tr h="184136">
+              <a:tr h="177800">
                 <a:tc>
                   <a:txBody>
                     <a:bodyPr/>
@@ -10629,7 +10562,7 @@
                   </a:ext>
                 </a:extLst>
               </a:tr>
-              <a:tr h="210935">
+              <a:tr h="190500">
                 <a:tc>
                   <a:txBody>
                     <a:bodyPr/>
@@ -10727,7 +10660,7 @@
                   </a:ext>
                 </a:extLst>
               </a:tr>
-              <a:tr h="210935">
+              <a:tr h="190500">
                 <a:tc>
                   <a:txBody>
                     <a:bodyPr/>
@@ -10835,7 +10768,7 @@
                   </a:ext>
                 </a:extLst>
               </a:tr>
-              <a:tr h="210935">
+              <a:tr h="190500">
                 <a:tc>
                   <a:txBody>
                     <a:bodyPr/>
@@ -10926,7 +10859,7 @@
                   </a:ext>
                 </a:extLst>
               </a:tr>
-              <a:tr h="210935">
+              <a:tr h="190500">
                 <a:tc>
                   <a:txBody>
                     <a:bodyPr/>
@@ -11032,7 +10965,7 @@
                   </a:ext>
                 </a:extLst>
               </a:tr>
-              <a:tr h="210935">
+              <a:tr h="190500">
                 <a:tc>
                   <a:txBody>
                     <a:bodyPr/>
@@ -11131,7 +11064,7 @@
                   </a:ext>
                 </a:extLst>
               </a:tr>
-              <a:tr h="210935">
+              <a:tr h="190500">
                 <a:tc>
                   <a:txBody>
                     <a:bodyPr/>
@@ -11237,7 +11170,7 @@
                   </a:ext>
                 </a:extLst>
               </a:tr>
-              <a:tr h="210935">
+              <a:tr h="190500">
                 <a:tc>
                   <a:txBody>
                     <a:bodyPr/>
@@ -11336,7 +11269,7 @@
                   </a:ext>
                 </a:extLst>
               </a:tr>
-              <a:tr h="210935">
+              <a:tr h="190500">
                 <a:tc>
                   <a:txBody>
                     <a:bodyPr/>
@@ -11435,7 +11368,7 @@
                   </a:ext>
                 </a:extLst>
               </a:tr>
-              <a:tr h="210935">
+              <a:tr h="190500">
                 <a:tc>
                   <a:txBody>
                     <a:bodyPr/>
@@ -11534,7 +11467,7 @@
                   </a:ext>
                 </a:extLst>
               </a:tr>
-              <a:tr h="210935">
+              <a:tr h="190500">
                 <a:tc>
                   <a:txBody>
                     <a:bodyPr/>
@@ -11656,10 +11589,16 @@
           <p:cNvGraphicFramePr>
             <a:graphicFrameLocks noGrp="1"/>
           </p:cNvGraphicFramePr>
-          <p:nvPr/>
+          <p:nvPr>
+            <p:extLst>
+              <p:ext uri="{D42A27DB-BD31-4B8C-83A1-F6EECF244321}">
+                <p14:modId xmlns:p14="http://schemas.microsoft.com/office/powerpoint/2010/main" val="743752341"/>
+              </p:ext>
+            </p:extLst>
+          </p:nvPr>
         </p:nvGraphicFramePr>
         <p:xfrm>
-          <a:off x="7749192" y="4512752"/>
+          <a:off x="7749192" y="4292600"/>
           <a:ext cx="3127663" cy="2293486"/>
         </p:xfrm>
         <a:graphic>
@@ -11682,7 +11621,7 @@
                   </a:extLst>
                 </a:gridCol>
               </a:tblGrid>
-              <a:tr h="184136">
+              <a:tr h="177800">
                 <a:tc>
                   <a:txBody>
                     <a:bodyPr/>
@@ -11768,7 +11707,7 @@
                   </a:ext>
                 </a:extLst>
               </a:tr>
-              <a:tr h="210935">
+              <a:tr h="190500">
                 <a:tc>
                   <a:txBody>
                     <a:bodyPr/>
@@ -11859,7 +11798,7 @@
                   </a:ext>
                 </a:extLst>
               </a:tr>
-              <a:tr h="210935">
+              <a:tr h="190500">
                 <a:tc>
                   <a:txBody>
                     <a:bodyPr/>
@@ -11957,7 +11896,7 @@
                   </a:ext>
                 </a:extLst>
               </a:tr>
-              <a:tr h="210935">
+              <a:tr h="190500">
                 <a:tc>
                   <a:txBody>
                     <a:bodyPr/>
@@ -12065,7 +12004,7 @@
                   </a:ext>
                 </a:extLst>
               </a:tr>
-              <a:tr h="210935">
+              <a:tr h="190500">
                 <a:tc>
                   <a:txBody>
                     <a:bodyPr/>
@@ -12164,7 +12103,7 @@
                   </a:ext>
                 </a:extLst>
               </a:tr>
-              <a:tr h="210935">
+              <a:tr h="190500">
                 <a:tc>
                   <a:txBody>
                     <a:bodyPr/>
@@ -12263,7 +12202,7 @@
                   </a:ext>
                 </a:extLst>
               </a:tr>
-              <a:tr h="210935">
+              <a:tr h="190500">
                 <a:tc>
                   <a:txBody>
                     <a:bodyPr/>
@@ -12369,7 +12308,7 @@
                   </a:ext>
                 </a:extLst>
               </a:tr>
-              <a:tr h="210935">
+              <a:tr h="190500">
                 <a:tc>
                   <a:txBody>
                     <a:bodyPr/>
@@ -12485,7 +12424,7 @@
                   </a:ext>
                 </a:extLst>
               </a:tr>
-              <a:tr h="210935">
+              <a:tr h="190500">
                 <a:tc>
                   <a:txBody>
                     <a:bodyPr/>
@@ -12591,7 +12530,7 @@
                   </a:ext>
                 </a:extLst>
               </a:tr>
-              <a:tr h="210935">
+              <a:tr h="190500">
                 <a:tc>
                   <a:txBody>
                     <a:bodyPr/>
@@ -12697,7 +12636,7 @@
                   </a:ext>
                 </a:extLst>
               </a:tr>
-              <a:tr h="210935">
+              <a:tr h="190500">
                 <a:tc>
                   <a:txBody>
                     <a:bodyPr/>
@@ -12834,12 +12773,18 @@
         </p:nvSpPr>
         <p:spPr>
           <a:xfrm>
-            <a:off x="822960" y="4777740"/>
-            <a:ext cx="777240" cy="1341120"/>
+            <a:off x="1453896" y="4800600"/>
+            <a:ext cx="384048" cy="1097280"/>
           </a:xfrm>
           <a:prstGeom prst="rect">
             <a:avLst/>
           </a:prstGeom>
+          <a:solidFill>
+            <a:srgbClr val="E3EBF4"/>
+          </a:solidFill>
+          <a:ln>
+            <a:noFill/>
+          </a:ln>
         </p:spPr>
         <p:style>
           <a:lnRef idx="2">
@@ -12858,7 +12803,7 @@
           </a:fontRef>
         </p:style>
         <p:txBody>
-          <a:bodyPr rtlCol="0" anchor="ctr"/>
+          <a:bodyPr vert="eaVert" wrap="none" lIns="0" tIns="0" rIns="0" bIns="0" rtlCol="0" anchor="ctr"/>
           <a:lstStyle/>
           <a:p>
             <a:pPr marL="0" marR="0" lvl="0" indent="0" algn="ctr" defTabSz="914400" rtl="0" eaLnBrk="1" fontAlgn="auto" latinLnBrk="0" hangingPunct="1">
@@ -12879,22 +12824,36 @@
               <a:defRPr/>
             </a:pPr>
             <a:r>
-              <a:rPr kumimoji="0" lang="zh-CN" altLang="en-US" sz="1800" b="0" i="0" u="none" strike="noStrike" kern="1200" cap="none" spc="0" normalizeH="0" baseline="0" noProof="0" dirty="0">
+              <a:rPr kumimoji="0" lang="zh-CN" altLang="en-US" sz="1300" b="1" i="0" u="none" strike="noStrike" kern="1200" cap="none" spc="0" normalizeH="0" baseline="0" noProof="0">
                 <a:ln>
                   <a:noFill/>
                 </a:ln>
                 <a:solidFill>
-                  <a:prstClr val="white"/>
+                  <a:srgbClr val="0A0A0A"/>
                 </a:solidFill>
                 <a:effectLst/>
                 <a:uLnTx/>
                 <a:uFillTx/>
-                <a:latin typeface="等线"/>
+                <a:latin typeface="微软雅黑"/>
                 <a:ea typeface="等线" panose="02010600030101010101" pitchFamily="2" charset="-122"/>
                 <a:cs typeface="+mn-cs"/>
               </a:rPr>
               <a:t>用户维度</a:t>
             </a:r>
+            <a:endParaRPr kumimoji="0" lang="zh-CN" altLang="en-US" sz="1300" b="1" i="0" u="none" strike="noStrike" kern="1200" cap="none" spc="0" normalizeH="0" baseline="0" noProof="0" dirty="0">
+              <a:ln>
+                <a:noFill/>
+              </a:ln>
+              <a:solidFill>
+                <a:srgbClr val="0A0A0A"/>
+              </a:solidFill>
+              <a:effectLst/>
+              <a:uLnTx/>
+              <a:uFillTx/>
+              <a:latin typeface="微软雅黑"/>
+              <a:ea typeface="等线" panose="02010600030101010101" pitchFamily="2" charset="-122"/>
+              <a:cs typeface="+mn-cs"/>
+            </a:endParaRPr>
           </a:p>
         </p:txBody>
       </p:sp>
@@ -12912,12 +12871,18 @@
         </p:nvSpPr>
         <p:spPr>
           <a:xfrm>
-            <a:off x="6461187" y="4792980"/>
-            <a:ext cx="777240" cy="1341120"/>
+            <a:off x="7178040" y="4800600"/>
+            <a:ext cx="384048" cy="1097280"/>
           </a:xfrm>
           <a:prstGeom prst="rect">
             <a:avLst/>
           </a:prstGeom>
+          <a:solidFill>
+            <a:srgbClr val="E3EBF4"/>
+          </a:solidFill>
+          <a:ln>
+            <a:noFill/>
+          </a:ln>
         </p:spPr>
         <p:style>
           <a:lnRef idx="2">
@@ -12936,7 +12901,7 @@
           </a:fontRef>
         </p:style>
         <p:txBody>
-          <a:bodyPr rtlCol="0" anchor="ctr"/>
+          <a:bodyPr vert="eaVert" wrap="none" lIns="0" tIns="0" rIns="0" bIns="0" rtlCol="0" anchor="ctr"/>
           <a:lstStyle/>
           <a:p>
             <a:pPr marL="0" marR="0" lvl="0" indent="0" algn="ctr" defTabSz="914400" rtl="0" eaLnBrk="1" fontAlgn="auto" latinLnBrk="0" hangingPunct="1">
@@ -12957,22 +12922,271 @@
               <a:defRPr/>
             </a:pPr>
             <a:r>
-              <a:rPr kumimoji="0" lang="zh-CN" altLang="en-US" sz="1800" b="0" i="0" u="none" strike="noStrike" kern="1200" cap="none" spc="0" normalizeH="0" baseline="0" noProof="0" dirty="0">
+              <a:rPr kumimoji="0" lang="zh-CN" altLang="en-US" sz="1300" b="1" i="0" u="none" strike="noStrike" kern="1200" cap="none" spc="0" normalizeH="0" baseline="0" noProof="0">
                 <a:ln>
                   <a:noFill/>
                 </a:ln>
                 <a:solidFill>
-                  <a:prstClr val="white"/>
+                  <a:srgbClr val="0A0A0A"/>
                 </a:solidFill>
                 <a:effectLst/>
                 <a:uLnTx/>
                 <a:uFillTx/>
-                <a:latin typeface="等线"/>
+                <a:latin typeface="微软雅黑"/>
                 <a:ea typeface="等线" panose="02010600030101010101" pitchFamily="2" charset="-122"/>
                 <a:cs typeface="+mn-cs"/>
               </a:rPr>
               <a:t>单笔借款维度</a:t>
             </a:r>
+            <a:endParaRPr kumimoji="0" lang="zh-CN" altLang="en-US" sz="1300" b="1" i="0" u="none" strike="noStrike" kern="1200" cap="none" spc="0" normalizeH="0" baseline="0" noProof="0" dirty="0">
+              <a:ln>
+                <a:noFill/>
+              </a:ln>
+              <a:solidFill>
+                <a:srgbClr val="0A0A0A"/>
+              </a:solidFill>
+              <a:effectLst/>
+              <a:uLnTx/>
+              <a:uFillTx/>
+              <a:latin typeface="微软雅黑"/>
+              <a:ea typeface="等线" panose="02010600030101010101" pitchFamily="2" charset="-122"/>
+              <a:cs typeface="+mn-cs"/>
+            </a:endParaRPr>
+          </a:p>
+        </p:txBody>
+      </p:sp>
+      <p:sp>
+        <p:nvSpPr>
+          <p:cNvPr id="21" name="Rectangle 20"/>
+          <p:cNvSpPr/>
+          <p:nvPr/>
+        </p:nvSpPr>
+        <p:spPr>
+          <a:xfrm>
+            <a:off x="1399032" y="4800600"/>
+            <a:ext cx="54864" cy="1097280"/>
+          </a:xfrm>
+          <a:prstGeom prst="rect">
+            <a:avLst/>
+          </a:prstGeom>
+          <a:solidFill>
+            <a:srgbClr val="1F4E79"/>
+          </a:solidFill>
+          <a:ln>
+            <a:noFill/>
+          </a:ln>
+          <a:effectLst/>
+        </p:spPr>
+        <p:style>
+          <a:lnRef idx="1">
+            <a:schemeClr val="accent1"/>
+          </a:lnRef>
+          <a:fillRef idx="3">
+            <a:schemeClr val="accent1"/>
+          </a:fillRef>
+          <a:effectRef idx="2">
+            <a:schemeClr val="accent1"/>
+          </a:effectRef>
+          <a:fontRef idx="minor">
+            <a:schemeClr val="lt1"/>
+          </a:fontRef>
+        </p:style>
+        <p:txBody>
+          <a:bodyPr rtlCol="0" anchor="ctr"/>
+          <a:lstStyle/>
+          <a:p>
+            <a:pPr algn="ctr"/>
+            <a:endParaRPr/>
+          </a:p>
+        </p:txBody>
+      </p:sp>
+      <p:sp>
+        <p:nvSpPr>
+          <p:cNvPr id="22" name="Rectangle 21"/>
+          <p:cNvSpPr/>
+          <p:nvPr/>
+        </p:nvSpPr>
+        <p:spPr>
+          <a:xfrm>
+            <a:off x="7123176" y="4800600"/>
+            <a:ext cx="54864" cy="1097280"/>
+          </a:xfrm>
+          <a:prstGeom prst="rect">
+            <a:avLst/>
+          </a:prstGeom>
+          <a:solidFill>
+            <a:srgbClr val="1F4E79"/>
+          </a:solidFill>
+          <a:ln>
+            <a:noFill/>
+          </a:ln>
+          <a:effectLst/>
+        </p:spPr>
+        <p:style>
+          <a:lnRef idx="1">
+            <a:schemeClr val="accent1"/>
+          </a:lnRef>
+          <a:fillRef idx="3">
+            <a:schemeClr val="accent1"/>
+          </a:fillRef>
+          <a:effectRef idx="2">
+            <a:schemeClr val="accent1"/>
+          </a:effectRef>
+          <a:fontRef idx="minor">
+            <a:schemeClr val="lt1"/>
+          </a:fontRef>
+        </p:style>
+        <p:txBody>
+          <a:bodyPr rtlCol="0" anchor="ctr"/>
+          <a:lstStyle/>
+          <a:p>
+            <a:pPr algn="ctr"/>
+            <a:endParaRPr/>
+          </a:p>
+        </p:txBody>
+      </p:sp>
+      <p:sp>
+        <p:nvSpPr>
+          <p:cNvPr id="23" name="Rectangle 22"/>
+          <p:cNvSpPr/>
+          <p:nvPr/>
+        </p:nvSpPr>
+        <p:spPr>
+          <a:xfrm>
+            <a:off x="749808" y="6446520"/>
+            <a:ext cx="9198864" cy="365760"/>
+          </a:xfrm>
+          <a:prstGeom prst="rect">
+            <a:avLst/>
+          </a:prstGeom>
+          <a:solidFill>
+            <a:srgbClr val="FAF3E0"/>
+          </a:solidFill>
+          <a:ln>
+            <a:noFill/>
+          </a:ln>
+          <a:effectLst/>
+        </p:spPr>
+        <p:style>
+          <a:lnRef idx="1">
+            <a:schemeClr val="accent1"/>
+          </a:lnRef>
+          <a:fillRef idx="3">
+            <a:schemeClr val="accent1"/>
+          </a:fillRef>
+          <a:effectRef idx="2">
+            <a:schemeClr val="accent1"/>
+          </a:effectRef>
+          <a:fontRef idx="minor">
+            <a:schemeClr val="lt1"/>
+          </a:fontRef>
+        </p:style>
+        <p:txBody>
+          <a:bodyPr lIns="190500" tIns="0" rIns="101600" bIns="0" rtlCol="0" anchor="ctr"/>
+          <a:lstStyle/>
+          <a:p>
+            <a:pPr algn="ctr"/>
+            <a:r>
+              <a:rPr lang="zh-CN" altLang="en-US" sz="900" b="1">
+                <a:solidFill>
+                  <a:srgbClr val="000000"/>
+                </a:solidFill>
+                <a:latin typeface="微软雅黑" panose="020B0503020204020204" pitchFamily="34" charset="-122"/>
+              </a:rPr>
+              <a:t>平均月还款金额 </a:t>
+            </a:r>
+            <a:r>
+              <a:rPr lang="en-US" sz="900" b="1">
+                <a:solidFill>
+                  <a:srgbClr val="000000"/>
+                </a:solidFill>
+                <a:latin typeface="微软雅黑" panose="020B0503020204020204" pitchFamily="34" charset="-122"/>
+              </a:rPr>
+              <a:t>A$428 </a:t>
+            </a:r>
+            <a:r>
+              <a:rPr lang="zh-CN" altLang="en-US" sz="900" b="1">
+                <a:solidFill>
+                  <a:srgbClr val="000000"/>
+                </a:solidFill>
+                <a:latin typeface="微软雅黑" panose="020B0503020204020204" pitchFamily="34" charset="-122"/>
+              </a:rPr>
+              <a:t>直接进入 </a:t>
+            </a:r>
+            <a:r>
+              <a:rPr lang="en-US" sz="900" b="1">
+                <a:solidFill>
+                  <a:srgbClr val="000000"/>
+                </a:solidFill>
+                <a:latin typeface="微软雅黑" panose="020B0503020204020204" pitchFamily="34" charset="-122"/>
+              </a:rPr>
+              <a:t>Serviceability </a:t>
+            </a:r>
+            <a:r>
+              <a:rPr lang="zh-CN" altLang="en-US" sz="900" b="1">
+                <a:solidFill>
+                  <a:srgbClr val="000000"/>
+                </a:solidFill>
+                <a:latin typeface="微软雅黑" panose="020B0503020204020204" pitchFamily="34" charset="-122"/>
+              </a:rPr>
+              <a:t>计算，作为新增还款能力评估的核心输入</a:t>
+            </a:r>
+            <a:endParaRPr sz="900" b="1">
+              <a:solidFill>
+                <a:srgbClr val="000000"/>
+              </a:solidFill>
+              <a:latin typeface="微软雅黑" panose="020B0503020204020204" pitchFamily="34" charset="-122"/>
+            </a:endParaRPr>
+          </a:p>
+        </p:txBody>
+      </p:sp>
+      <p:sp>
+        <p:nvSpPr>
+          <p:cNvPr id="24" name="Rectangle 23"/>
+          <p:cNvSpPr/>
+          <p:nvPr/>
+        </p:nvSpPr>
+        <p:spPr>
+          <a:xfrm>
+            <a:off x="749808" y="6446520"/>
+            <a:ext cx="64008" cy="365760"/>
+          </a:xfrm>
+          <a:prstGeom prst="rect">
+            <a:avLst/>
+          </a:prstGeom>
+          <a:solidFill>
+            <a:srgbClr val="D6A000"/>
+          </a:solidFill>
+          <a:ln>
+            <a:noFill/>
+          </a:ln>
+          <a:effectLst/>
+        </p:spPr>
+        <p:style>
+          <a:lnRef idx="1">
+            <a:schemeClr val="accent1"/>
+          </a:lnRef>
+          <a:fillRef idx="3">
+            <a:schemeClr val="accent1"/>
+          </a:fillRef>
+          <a:effectRef idx="2">
+            <a:schemeClr val="accent1"/>
+          </a:effectRef>
+          <a:fontRef idx="minor">
+            <a:schemeClr val="lt1"/>
+          </a:fontRef>
+        </p:style>
+        <p:txBody>
+          <a:bodyPr wrap="square" lIns="182880" tIns="0" rIns="109728" bIns="0" rtlCol="0" anchor="t"/>
+          <a:lstStyle/>
+          <a:p>
+            <a:pPr algn="l"/>
+            <a:endParaRPr sz="900" b="1">
+              <a:solidFill>
+                <a:srgbClr val="0A0A0A"/>
+              </a:solidFill>
+              <a:latin typeface="微软雅黑"/>
+            </a:endParaRPr>
           </a:p>
         </p:txBody>
       </p:sp>

--- a/银行流水分享_V1.7.pptx
+++ b/银行流水分享_V1.7.pptx
@@ -16516,9 +16516,7 @@
         <a:graphic>
           <a:graphicData uri="http://schemas.openxmlformats.org/drawingml/2006/table">
             <a:tbl>
-              <a:tblPr>
-                <a:tableStyleId>{5C22544A-7EE6-4342-B048-85BDC9FD1C3A}</a:tableStyleId>
-              </a:tblPr>
+              <a:tblPr/>
               <a:tblGrid>
                 <a:gridCol w="923372">
                   <a:extLst>
@@ -16555,6 +16553,15 @@
                     </a:p>
                   </a:txBody>
                   <a:tcPr marL="27432" marR="27432" marT="9144" marB="9144">
+                    <a:lnL>
+                      <a:noFill/>
+                    </a:lnL>
+                    <a:lnR>
+                      <a:noFill/>
+                    </a:lnR>
+                    <a:lnT>
+                      <a:noFill/>
+                    </a:lnT>
                     <a:lnB w="19050" cap="flat">
                       <a:solidFill>
                         <a:srgbClr val="0A0A0A"/>
@@ -16581,6 +16588,15 @@
                     </a:p>
                   </a:txBody>
                   <a:tcPr marL="27432" marR="27432" marT="9144" marB="9144">
+                    <a:lnL>
+                      <a:noFill/>
+                    </a:lnL>
+                    <a:lnR>
+                      <a:noFill/>
+                    </a:lnR>
+                    <a:lnT>
+                      <a:noFill/>
+                    </a:lnT>
                     <a:lnB w="19050" cap="flat">
                       <a:solidFill>
                         <a:srgbClr val="0A0A0A"/>
@@ -16614,6 +16630,12 @@
                     </a:p>
                   </a:txBody>
                   <a:tcPr marL="27432" marR="27432" marT="9144" marB="9144">
+                    <a:lnL>
+                      <a:noFill/>
+                    </a:lnL>
+                    <a:lnR>
+                      <a:noFill/>
+                    </a:lnR>
                     <a:lnT w="19050" cap="flat">
                       <a:solidFill>
                         <a:srgbClr val="0A0A0A"/>
@@ -16645,6 +16667,12 @@
                     </a:p>
                   </a:txBody>
                   <a:tcPr marL="27432" marR="27432" marT="9144" marB="9144">
+                    <a:lnL>
+                      <a:noFill/>
+                    </a:lnL>
+                    <a:lnR>
+                      <a:noFill/>
+                    </a:lnR>
                     <a:lnT w="19050" cap="flat">
                       <a:solidFill>
                         <a:srgbClr val="0A0A0A"/>
@@ -16683,6 +16711,12 @@
                     </a:p>
                   </a:txBody>
                   <a:tcPr marL="27432" marR="27432" marT="9144" marB="9144">
+                    <a:lnL>
+                      <a:noFill/>
+                    </a:lnL>
+                    <a:lnR>
+                      <a:noFill/>
+                    </a:lnR>
                     <a:lnT w="9525" cap="flat" cmpd="sng" algn="ctr">
                       <a:solidFill>
                         <a:srgbClr val="D6D6D6"/>
@@ -16765,6 +16799,12 @@
                     </a:p>
                   </a:txBody>
                   <a:tcPr marL="27432" marR="27432" marT="9144" marB="9144">
+                    <a:lnL>
+                      <a:noFill/>
+                    </a:lnL>
+                    <a:lnR>
+                      <a:noFill/>
+                    </a:lnR>
                     <a:lnT w="9525" cap="flat" cmpd="sng" algn="ctr">
                       <a:solidFill>
                         <a:srgbClr val="D6D6D6"/>
@@ -16807,6 +16847,12 @@
                     </a:p>
                   </a:txBody>
                   <a:tcPr marL="27432" marR="27432" marT="9144" marB="9144">
+                    <a:lnL>
+                      <a:noFill/>
+                    </a:lnL>
+                    <a:lnR>
+                      <a:noFill/>
+                    </a:lnR>
                     <a:lnT w="9525" cap="flat" cmpd="sng" algn="ctr">
                       <a:solidFill>
                         <a:srgbClr val="D6D6D6"/>
@@ -16842,6 +16888,12 @@
                     </a:p>
                   </a:txBody>
                   <a:tcPr marL="27432" marR="27432" marT="9144" marB="9144">
+                    <a:lnL>
+                      <a:noFill/>
+                    </a:lnL>
+                    <a:lnR>
+                      <a:noFill/>
+                    </a:lnR>
                     <a:lnT w="9525" cap="flat" cmpd="sng" algn="ctr">
                       <a:solidFill>
                         <a:srgbClr val="D6D6D6"/>
@@ -16884,6 +16936,12 @@
                     </a:p>
                   </a:txBody>
                   <a:tcPr marL="27432" marR="27432" marT="9144" marB="9144">
+                    <a:lnL>
+                      <a:noFill/>
+                    </a:lnL>
+                    <a:lnR>
+                      <a:noFill/>
+                    </a:lnR>
                     <a:lnT w="9525" cap="flat" cmpd="sng" algn="ctr">
                       <a:solidFill>
                         <a:srgbClr val="D6D6D6"/>
@@ -16919,6 +16977,12 @@
                     </a:p>
                   </a:txBody>
                   <a:tcPr marL="27432" marR="27432" marT="9144" marB="9144">
+                    <a:lnL>
+                      <a:noFill/>
+                    </a:lnL>
+                    <a:lnR>
+                      <a:noFill/>
+                    </a:lnR>
                     <a:lnT w="9525" cap="flat" cmpd="sng" algn="ctr">
                       <a:solidFill>
                         <a:srgbClr val="D6D6D6"/>
@@ -16961,6 +17025,12 @@
                     </a:p>
                   </a:txBody>
                   <a:tcPr marL="27432" marR="27432" marT="9144" marB="9144">
+                    <a:lnL>
+                      <a:noFill/>
+                    </a:lnL>
+                    <a:lnR>
+                      <a:noFill/>
+                    </a:lnR>
                     <a:lnT w="9525" cap="flat" cmpd="sng" algn="ctr">
                       <a:solidFill>
                         <a:srgbClr val="D6D6D6"/>
@@ -17003,6 +17073,12 @@
                     </a:p>
                   </a:txBody>
                   <a:tcPr marL="27432" marR="27432" marT="9144" marB="9144">
+                    <a:lnL>
+                      <a:noFill/>
+                    </a:lnL>
+                    <a:lnR>
+                      <a:noFill/>
+                    </a:lnR>
                     <a:lnT w="9525" cap="flat" cmpd="sng" algn="ctr">
                       <a:solidFill>
                         <a:srgbClr val="D6D6D6"/>
@@ -17086,9 +17162,7 @@
         <a:graphic>
           <a:graphicData uri="http://schemas.openxmlformats.org/drawingml/2006/table">
             <a:tbl>
-              <a:tblPr>
-                <a:tableStyleId>{5C22544A-7EE6-4342-B048-85BDC9FD1C3A}</a:tableStyleId>
-              </a:tblPr>
+              <a:tblPr/>
               <a:tblGrid>
                 <a:gridCol w="554023">
                   <a:extLst>
@@ -17139,6 +17213,15 @@
                     </a:p>
                   </a:txBody>
                   <a:tcPr marL="27432" marR="27432" marT="9144" marB="9144">
+                    <a:lnL>
+                      <a:noFill/>
+                    </a:lnL>
+                    <a:lnR>
+                      <a:noFill/>
+                    </a:lnR>
+                    <a:lnT>
+                      <a:noFill/>
+                    </a:lnT>
                     <a:lnB w="19050" cap="flat">
                       <a:solidFill>
                         <a:srgbClr val="0A0A0A"/>
@@ -17165,6 +17248,15 @@
                     </a:p>
                   </a:txBody>
                   <a:tcPr marL="27432" marR="27432" marT="9144" marB="9144">
+                    <a:lnL>
+                      <a:noFill/>
+                    </a:lnL>
+                    <a:lnR>
+                      <a:noFill/>
+                    </a:lnR>
+                    <a:lnT>
+                      <a:noFill/>
+                    </a:lnT>
                     <a:lnB w="19050" cap="flat">
                       <a:solidFill>
                         <a:srgbClr val="0A0A0A"/>
@@ -17191,6 +17283,15 @@
                     </a:p>
                   </a:txBody>
                   <a:tcPr marL="27432" marR="27432" marT="9144" marB="9144">
+                    <a:lnL>
+                      <a:noFill/>
+                    </a:lnL>
+                    <a:lnR>
+                      <a:noFill/>
+                    </a:lnR>
+                    <a:lnT>
+                      <a:noFill/>
+                    </a:lnT>
                     <a:lnB w="19050" cap="flat">
                       <a:solidFill>
                         <a:srgbClr val="0A0A0A"/>
@@ -17217,6 +17318,15 @@
                     </a:p>
                   </a:txBody>
                   <a:tcPr marL="27432" marR="27432" marT="9144" marB="9144">
+                    <a:lnL>
+                      <a:noFill/>
+                    </a:lnL>
+                    <a:lnR>
+                      <a:noFill/>
+                    </a:lnR>
+                    <a:lnT>
+                      <a:noFill/>
+                    </a:lnT>
                     <a:lnB w="19050" cap="flat">
                       <a:solidFill>
                         <a:srgbClr val="0A0A0A"/>
@@ -17250,6 +17360,12 @@
                     </a:p>
                   </a:txBody>
                   <a:tcPr marL="27432" marR="27432" marT="9144" marB="9144">
+                    <a:lnL>
+                      <a:noFill/>
+                    </a:lnL>
+                    <a:lnR>
+                      <a:noFill/>
+                    </a:lnR>
                     <a:lnT w="19050" cap="flat">
                       <a:solidFill>
                         <a:srgbClr val="0A0A0A"/>
@@ -17281,6 +17397,12 @@
                     </a:p>
                   </a:txBody>
                   <a:tcPr marL="27432" marR="27432" marT="9144" marB="9144">
+                    <a:lnL>
+                      <a:noFill/>
+                    </a:lnL>
+                    <a:lnR>
+                      <a:noFill/>
+                    </a:lnR>
                     <a:lnT w="19050" cap="flat">
                       <a:solidFill>
                         <a:srgbClr val="0A0A0A"/>
@@ -17312,6 +17434,12 @@
                     </a:p>
                   </a:txBody>
                   <a:tcPr marL="27432" marR="27432" marT="9144" marB="9144">
+                    <a:lnL>
+                      <a:noFill/>
+                    </a:lnL>
+                    <a:lnR>
+                      <a:noFill/>
+                    </a:lnR>
                     <a:lnT w="19050" cap="flat">
                       <a:solidFill>
                         <a:srgbClr val="0A0A0A"/>
@@ -17343,6 +17471,12 @@
                     </a:p>
                   </a:txBody>
                   <a:tcPr marL="27432" marR="27432" marT="9144" marB="9144">
+                    <a:lnL>
+                      <a:noFill/>
+                    </a:lnL>
+                    <a:lnR>
+                      <a:noFill/>
+                    </a:lnR>
                     <a:lnT w="19050" cap="flat">
                       <a:solidFill>
                         <a:srgbClr val="0A0A0A"/>
@@ -17381,6 +17515,12 @@
                     </a:p>
                   </a:txBody>
                   <a:tcPr marL="27432" marR="27432" marT="9144" marB="9144">
+                    <a:lnL>
+                      <a:noFill/>
+                    </a:lnL>
+                    <a:lnR>
+                      <a:noFill/>
+                    </a:lnR>
                     <a:lnT w="9525" cap="flat" cmpd="sng" algn="ctr">
                       <a:solidFill>
                         <a:srgbClr val="D6D6D6"/>
@@ -17416,6 +17556,12 @@
                     </a:p>
                   </a:txBody>
                   <a:tcPr marL="27432" marR="27432" marT="9144" marB="9144">
+                    <a:lnL>
+                      <a:noFill/>
+                    </a:lnL>
+                    <a:lnR>
+                      <a:noFill/>
+                    </a:lnR>
                     <a:lnT w="9525" cap="flat" cmpd="sng" algn="ctr">
                       <a:solidFill>
                         <a:srgbClr val="D6D6D6"/>
@@ -17451,6 +17597,12 @@
                     </a:p>
                   </a:txBody>
                   <a:tcPr marL="27432" marR="27432" marT="9144" marB="9144">
+                    <a:lnL>
+                      <a:noFill/>
+                    </a:lnL>
+                    <a:lnR>
+                      <a:noFill/>
+                    </a:lnR>
                     <a:lnT w="9525" cap="flat" cmpd="sng" algn="ctr">
                       <a:solidFill>
                         <a:srgbClr val="D6D6D6"/>
@@ -17486,6 +17638,12 @@
                     </a:p>
                   </a:txBody>
                   <a:tcPr marL="27432" marR="27432" marT="9144" marB="9144">
+                    <a:lnL>
+                      <a:noFill/>
+                    </a:lnL>
+                    <a:lnR>
+                      <a:noFill/>
+                    </a:lnR>
                     <a:lnT w="9525" cap="flat" cmpd="sng" algn="ctr">
                       <a:solidFill>
                         <a:srgbClr val="D6D6D6"/>
@@ -17528,6 +17686,12 @@
                     </a:p>
                   </a:txBody>
                   <a:tcPr marL="27432" marR="27432" marT="9144" marB="9144">
+                    <a:lnL>
+                      <a:noFill/>
+                    </a:lnL>
+                    <a:lnR>
+                      <a:noFill/>
+                    </a:lnR>
                     <a:lnT w="9525" cap="flat" cmpd="sng" algn="ctr">
                       <a:solidFill>
                         <a:srgbClr val="D6D6D6"/>
@@ -17563,6 +17727,12 @@
                     </a:p>
                   </a:txBody>
                   <a:tcPr marL="27432" marR="27432" marT="9144" marB="9144">
+                    <a:lnL>
+                      <a:noFill/>
+                    </a:lnL>
+                    <a:lnR>
+                      <a:noFill/>
+                    </a:lnR>
                     <a:lnT w="9525" cap="flat" cmpd="sng" algn="ctr">
                       <a:solidFill>
                         <a:srgbClr val="D6D6D6"/>
@@ -17598,6 +17768,12 @@
                     </a:p>
                   </a:txBody>
                   <a:tcPr marL="27432" marR="27432" marT="9144" marB="9144">
+                    <a:lnL>
+                      <a:noFill/>
+                    </a:lnL>
+                    <a:lnR>
+                      <a:noFill/>
+                    </a:lnR>
                     <a:lnT w="9525" cap="flat" cmpd="sng" algn="ctr">
                       <a:solidFill>
                         <a:srgbClr val="D6D6D6"/>
@@ -17640,6 +17816,12 @@
                     </a:p>
                   </a:txBody>
                   <a:tcPr marL="27432" marR="27432" marT="9144" marB="9144">
+                    <a:lnL>
+                      <a:noFill/>
+                    </a:lnL>
+                    <a:lnR>
+                      <a:noFill/>
+                    </a:lnR>
                     <a:lnT w="9525" cap="flat" cmpd="sng" algn="ctr">
                       <a:solidFill>
                         <a:srgbClr val="D6D6D6"/>
@@ -17837,9 +18019,7 @@
         <a:graphic>
           <a:graphicData uri="http://schemas.openxmlformats.org/drawingml/2006/table">
             <a:tbl>
-              <a:tblPr>
-                <a:tableStyleId>{5C22544A-7EE6-4342-B048-85BDC9FD1C3A}</a:tableStyleId>
-              </a:tblPr>
+              <a:tblPr/>
               <a:tblGrid>
                 <a:gridCol w="777240">
                   <a:extLst>
@@ -17908,6 +18088,15 @@
                     </a:p>
                   </a:txBody>
                   <a:tcPr marL="45720" marR="45720" marT="18288" marB="18288" anchor="ctr">
+                    <a:lnL>
+                      <a:noFill/>
+                    </a:lnL>
+                    <a:lnR>
+                      <a:noFill/>
+                    </a:lnR>
+                    <a:lnT>
+                      <a:noFill/>
+                    </a:lnT>
                     <a:lnB w="19050">
                       <a:solidFill>
                         <a:srgbClr val="0A0A0A"/>
@@ -17938,6 +18127,15 @@
                     </a:p>
                   </a:txBody>
                   <a:tcPr marL="45720" marR="45720" marT="18288" marB="18288" anchor="ctr">
+                    <a:lnL>
+                      <a:noFill/>
+                    </a:lnL>
+                    <a:lnR>
+                      <a:noFill/>
+                    </a:lnR>
+                    <a:lnT>
+                      <a:noFill/>
+                    </a:lnT>
                     <a:lnB w="19050">
                       <a:solidFill>
                         <a:srgbClr val="0A0A0A"/>
@@ -17968,6 +18166,15 @@
                     </a:p>
                   </a:txBody>
                   <a:tcPr marL="45720" marR="45720" marT="18288" marB="18288" anchor="ctr">
+                    <a:lnL>
+                      <a:noFill/>
+                    </a:lnL>
+                    <a:lnR>
+                      <a:noFill/>
+                    </a:lnR>
+                    <a:lnT>
+                      <a:noFill/>
+                    </a:lnT>
                     <a:lnB w="19050">
                       <a:solidFill>
                         <a:srgbClr val="0A0A0A"/>
@@ -17998,6 +18205,15 @@
                     </a:p>
                   </a:txBody>
                   <a:tcPr marL="45720" marR="45720" marT="18288" marB="18288" anchor="ctr">
+                    <a:lnL>
+                      <a:noFill/>
+                    </a:lnL>
+                    <a:lnR>
+                      <a:noFill/>
+                    </a:lnR>
+                    <a:lnT>
+                      <a:noFill/>
+                    </a:lnT>
                     <a:lnB w="19050">
                       <a:solidFill>
                         <a:srgbClr val="0A0A0A"/>
@@ -18028,6 +18244,15 @@
                     </a:p>
                   </a:txBody>
                   <a:tcPr marL="45720" marR="45720" marT="18288" marB="18288" anchor="ctr">
+                    <a:lnL>
+                      <a:noFill/>
+                    </a:lnL>
+                    <a:lnR>
+                      <a:noFill/>
+                    </a:lnR>
+                    <a:lnT>
+                      <a:noFill/>
+                    </a:lnT>
                     <a:lnB w="19050">
                       <a:solidFill>
                         <a:srgbClr val="0A0A0A"/>
@@ -18058,6 +18283,15 @@
                     </a:p>
                   </a:txBody>
                   <a:tcPr marL="45720" marR="45720" marT="18288" marB="18288" anchor="ctr">
+                    <a:lnL>
+                      <a:noFill/>
+                    </a:lnL>
+                    <a:lnR>
+                      <a:noFill/>
+                    </a:lnR>
+                    <a:lnT>
+                      <a:noFill/>
+                    </a:lnT>
                     <a:lnB w="19050">
                       <a:solidFill>
                         <a:srgbClr val="0A0A0A"/>
@@ -18095,6 +18329,12 @@
                     </a:p>
                   </a:txBody>
                   <a:tcPr marL="45720" marR="45720" marT="18288" marB="18288" anchor="ctr">
+                    <a:lnL>
+                      <a:noFill/>
+                    </a:lnL>
+                    <a:lnR>
+                      <a:noFill/>
+                    </a:lnR>
                     <a:lnT w="19050" cap="flat" cmpd="sng" algn="ctr">
                       <a:solidFill>
                         <a:srgbClr val="0A0A0A"/>
@@ -18130,6 +18370,12 @@
                     </a:p>
                   </a:txBody>
                   <a:tcPr marL="45720" marR="45720" marT="18288" marB="18288" anchor="ctr">
+                    <a:lnL>
+                      <a:noFill/>
+                    </a:lnL>
+                    <a:lnR>
+                      <a:noFill/>
+                    </a:lnR>
                     <a:lnT w="19050" cap="flat" cmpd="sng" algn="ctr">
                       <a:solidFill>
                         <a:srgbClr val="0A0A0A"/>
@@ -18165,6 +18411,12 @@
                     </a:p>
                   </a:txBody>
                   <a:tcPr marL="45720" marR="45720" marT="18288" marB="18288" anchor="ctr">
+                    <a:lnL>
+                      <a:noFill/>
+                    </a:lnL>
+                    <a:lnR>
+                      <a:noFill/>
+                    </a:lnR>
                     <a:lnT w="19050" cap="flat" cmpd="sng" algn="ctr">
                       <a:solidFill>
                         <a:srgbClr val="0A0A0A"/>
@@ -18200,6 +18452,12 @@
                     </a:p>
                   </a:txBody>
                   <a:tcPr marL="45720" marR="45720" marT="18288" marB="18288" anchor="ctr">
+                    <a:lnL>
+                      <a:noFill/>
+                    </a:lnL>
+                    <a:lnR>
+                      <a:noFill/>
+                    </a:lnR>
                     <a:lnT w="19050" cap="flat" cmpd="sng" algn="ctr">
                       <a:solidFill>
                         <a:srgbClr val="0A0A0A"/>
@@ -18235,6 +18493,12 @@
                     </a:p>
                   </a:txBody>
                   <a:tcPr marL="45720" marR="45720" marT="18288" marB="18288" anchor="ctr">
+                    <a:lnL>
+                      <a:noFill/>
+                    </a:lnL>
+                    <a:lnR>
+                      <a:noFill/>
+                    </a:lnR>
                     <a:lnT w="19050" cap="flat" cmpd="sng" algn="ctr">
                       <a:solidFill>
                         <a:srgbClr val="0A0A0A"/>
@@ -18270,6 +18534,12 @@
                     </a:p>
                   </a:txBody>
                   <a:tcPr marL="45720" marR="45720" marT="18288" marB="18288" anchor="ctr">
+                    <a:lnL>
+                      <a:noFill/>
+                    </a:lnL>
+                    <a:lnR>
+                      <a:noFill/>
+                    </a:lnR>
                     <a:lnT w="19050" cap="flat" cmpd="sng" algn="ctr">
                       <a:solidFill>
                         <a:srgbClr val="0A0A0A"/>
@@ -18307,9 +18577,7 @@
         <a:graphic>
           <a:graphicData uri="http://schemas.openxmlformats.org/drawingml/2006/table">
             <a:tbl>
-              <a:tblPr>
-                <a:tableStyleId>{5C22544A-7EE6-4342-B048-85BDC9FD1C3A}</a:tableStyleId>
-              </a:tblPr>
+              <a:tblPr/>
               <a:tblGrid>
                 <a:gridCol w="777240">
                   <a:extLst>
@@ -18378,6 +18646,15 @@
                     </a:p>
                   </a:txBody>
                   <a:tcPr marL="45720" marR="45720" marT="18288" marB="18288" anchor="ctr">
+                    <a:lnL>
+                      <a:noFill/>
+                    </a:lnL>
+                    <a:lnR>
+                      <a:noFill/>
+                    </a:lnR>
+                    <a:lnT>
+                      <a:noFill/>
+                    </a:lnT>
                     <a:lnB w="19050">
                       <a:solidFill>
                         <a:srgbClr val="0A0A0A"/>
@@ -18408,6 +18685,15 @@
                     </a:p>
                   </a:txBody>
                   <a:tcPr marL="45720" marR="45720" marT="18288" marB="18288" anchor="ctr">
+                    <a:lnL>
+                      <a:noFill/>
+                    </a:lnL>
+                    <a:lnR>
+                      <a:noFill/>
+                    </a:lnR>
+                    <a:lnT>
+                      <a:noFill/>
+                    </a:lnT>
                     <a:lnB w="19050">
                       <a:solidFill>
                         <a:srgbClr val="0A0A0A"/>
@@ -18438,6 +18724,15 @@
                     </a:p>
                   </a:txBody>
                   <a:tcPr marL="45720" marR="45720" marT="18288" marB="18288" anchor="ctr">
+                    <a:lnL>
+                      <a:noFill/>
+                    </a:lnL>
+                    <a:lnR>
+                      <a:noFill/>
+                    </a:lnR>
+                    <a:lnT>
+                      <a:noFill/>
+                    </a:lnT>
                     <a:lnB w="19050">
                       <a:solidFill>
                         <a:srgbClr val="0A0A0A"/>
@@ -18468,6 +18763,15 @@
                     </a:p>
                   </a:txBody>
                   <a:tcPr marL="45720" marR="45720" marT="18288" marB="18288" anchor="ctr">
+                    <a:lnL>
+                      <a:noFill/>
+                    </a:lnL>
+                    <a:lnR>
+                      <a:noFill/>
+                    </a:lnR>
+                    <a:lnT>
+                      <a:noFill/>
+                    </a:lnT>
                     <a:lnB w="19050">
                       <a:solidFill>
                         <a:srgbClr val="0A0A0A"/>
@@ -18498,6 +18802,15 @@
                     </a:p>
                   </a:txBody>
                   <a:tcPr marL="45720" marR="45720" marT="18288" marB="18288" anchor="ctr">
+                    <a:lnL>
+                      <a:noFill/>
+                    </a:lnL>
+                    <a:lnR>
+                      <a:noFill/>
+                    </a:lnR>
+                    <a:lnT>
+                      <a:noFill/>
+                    </a:lnT>
                     <a:lnB w="19050">
                       <a:solidFill>
                         <a:srgbClr val="0A0A0A"/>
@@ -18528,6 +18841,15 @@
                     </a:p>
                   </a:txBody>
                   <a:tcPr marL="45720" marR="45720" marT="18288" marB="18288" anchor="ctr">
+                    <a:lnL>
+                      <a:noFill/>
+                    </a:lnL>
+                    <a:lnR>
+                      <a:noFill/>
+                    </a:lnR>
+                    <a:lnT>
+                      <a:noFill/>
+                    </a:lnT>
                     <a:lnB w="19050">
                       <a:solidFill>
                         <a:srgbClr val="0A0A0A"/>
@@ -18565,6 +18887,12 @@
                     </a:p>
                   </a:txBody>
                   <a:tcPr marL="45720" marR="45720" marT="18288" marB="18288" anchor="ctr">
+                    <a:lnL>
+                      <a:noFill/>
+                    </a:lnL>
+                    <a:lnR>
+                      <a:noFill/>
+                    </a:lnR>
                     <a:lnT w="19050" cap="flat" cmpd="sng" algn="ctr">
                       <a:solidFill>
                         <a:srgbClr val="0A0A0A"/>
@@ -18600,6 +18928,12 @@
                     </a:p>
                   </a:txBody>
                   <a:tcPr marL="45720" marR="45720" marT="18288" marB="18288" anchor="ctr">
+                    <a:lnL>
+                      <a:noFill/>
+                    </a:lnL>
+                    <a:lnR>
+                      <a:noFill/>
+                    </a:lnR>
                     <a:lnT w="19050" cap="flat" cmpd="sng" algn="ctr">
                       <a:solidFill>
                         <a:srgbClr val="0A0A0A"/>
@@ -18635,6 +18969,12 @@
                     </a:p>
                   </a:txBody>
                   <a:tcPr marL="45720" marR="45720" marT="18288" marB="18288" anchor="ctr">
+                    <a:lnL>
+                      <a:noFill/>
+                    </a:lnL>
+                    <a:lnR>
+                      <a:noFill/>
+                    </a:lnR>
                     <a:lnT w="19050" cap="flat" cmpd="sng" algn="ctr">
                       <a:solidFill>
                         <a:srgbClr val="0A0A0A"/>
@@ -18670,6 +19010,12 @@
                     </a:p>
                   </a:txBody>
                   <a:tcPr marL="45720" marR="45720" marT="18288" marB="18288" anchor="ctr">
+                    <a:lnL>
+                      <a:noFill/>
+                    </a:lnL>
+                    <a:lnR>
+                      <a:noFill/>
+                    </a:lnR>
                     <a:lnT w="19050" cap="flat" cmpd="sng" algn="ctr">
                       <a:solidFill>
                         <a:srgbClr val="0A0A0A"/>
@@ -18705,6 +19051,12 @@
                     </a:p>
                   </a:txBody>
                   <a:tcPr marL="45720" marR="45720" marT="18288" marB="18288" anchor="ctr">
+                    <a:lnL>
+                      <a:noFill/>
+                    </a:lnL>
+                    <a:lnR>
+                      <a:noFill/>
+                    </a:lnR>
                     <a:lnT w="19050" cap="flat" cmpd="sng" algn="ctr">
                       <a:solidFill>
                         <a:srgbClr val="0A0A0A"/>
@@ -18740,6 +19092,12 @@
                     </a:p>
                   </a:txBody>
                   <a:tcPr marL="45720" marR="45720" marT="18288" marB="18288" anchor="ctr">
+                    <a:lnL>
+                      <a:noFill/>
+                    </a:lnL>
+                    <a:lnR>
+                      <a:noFill/>
+                    </a:lnR>
                     <a:lnT w="19050" cap="flat" cmpd="sng" algn="ctr">
                       <a:solidFill>
                         <a:srgbClr val="0A0A0A"/>
@@ -18782,6 +19140,12 @@
                     </a:p>
                   </a:txBody>
                   <a:tcPr marL="45720" marR="45720" marT="18288" marB="18288" anchor="ctr">
+                    <a:lnL>
+                      <a:noFill/>
+                    </a:lnL>
+                    <a:lnR>
+                      <a:noFill/>
+                    </a:lnR>
                     <a:lnT w="9525" cap="flat" cmpd="sng" algn="ctr">
                       <a:solidFill>
                         <a:srgbClr val="D6D6D6"/>
@@ -18821,6 +19185,12 @@
                     </a:p>
                   </a:txBody>
                   <a:tcPr marL="45720" marR="45720" marT="18288" marB="18288" anchor="ctr">
+                    <a:lnL>
+                      <a:noFill/>
+                    </a:lnL>
+                    <a:lnR>
+                      <a:noFill/>
+                    </a:lnR>
                     <a:lnT w="9525" cap="flat" cmpd="sng" algn="ctr">
                       <a:solidFill>
                         <a:srgbClr val="D6D6D6"/>
@@ -18860,6 +19230,12 @@
                     </a:p>
                   </a:txBody>
                   <a:tcPr marL="45720" marR="45720" marT="18288" marB="18288" anchor="ctr">
+                    <a:lnL>
+                      <a:noFill/>
+                    </a:lnL>
+                    <a:lnR>
+                      <a:noFill/>
+                    </a:lnR>
                     <a:lnT w="9525" cap="flat" cmpd="sng" algn="ctr">
                       <a:solidFill>
                         <a:srgbClr val="D6D6D6"/>
@@ -18899,6 +19275,12 @@
                     </a:p>
                   </a:txBody>
                   <a:tcPr marL="45720" marR="45720" marT="18288" marB="18288" anchor="ctr">
+                    <a:lnL>
+                      <a:noFill/>
+                    </a:lnL>
+                    <a:lnR>
+                      <a:noFill/>
+                    </a:lnR>
                     <a:lnT w="9525" cap="flat" cmpd="sng" algn="ctr">
                       <a:solidFill>
                         <a:srgbClr val="D6D6D6"/>
@@ -18938,6 +19320,12 @@
                     </a:p>
                   </a:txBody>
                   <a:tcPr marL="45720" marR="45720" marT="18288" marB="18288" anchor="ctr">
+                    <a:lnL>
+                      <a:noFill/>
+                    </a:lnL>
+                    <a:lnR>
+                      <a:noFill/>
+                    </a:lnR>
                     <a:lnT w="9525" cap="flat" cmpd="sng" algn="ctr">
                       <a:solidFill>
                         <a:srgbClr val="D6D6D6"/>
@@ -18977,6 +19365,12 @@
                     </a:p>
                   </a:txBody>
                   <a:tcPr marL="45720" marR="45720" marT="18288" marB="18288" anchor="ctr">
+                    <a:lnL>
+                      <a:noFill/>
+                    </a:lnL>
+                    <a:lnR>
+                      <a:noFill/>
+                    </a:lnR>
                     <a:lnT w="9525" cap="flat" cmpd="sng" algn="ctr">
                       <a:solidFill>
                         <a:srgbClr val="D6D6D6"/>
@@ -19023,6 +19417,12 @@
                     </a:p>
                   </a:txBody>
                   <a:tcPr marL="45720" marR="45720" marT="18288" marB="18288" anchor="ctr">
+                    <a:lnL>
+                      <a:noFill/>
+                    </a:lnL>
+                    <a:lnR>
+                      <a:noFill/>
+                    </a:lnR>
                     <a:lnT w="9525" cap="flat" cmpd="sng" algn="ctr">
                       <a:solidFill>
                         <a:srgbClr val="D6D6D6"/>
@@ -19062,6 +19462,12 @@
                     </a:p>
                   </a:txBody>
                   <a:tcPr marL="45720" marR="45720" marT="18288" marB="18288" anchor="ctr">
+                    <a:lnL>
+                      <a:noFill/>
+                    </a:lnL>
+                    <a:lnR>
+                      <a:noFill/>
+                    </a:lnR>
                     <a:lnT w="9525" cap="flat" cmpd="sng" algn="ctr">
                       <a:solidFill>
                         <a:srgbClr val="D6D6D6"/>
@@ -19101,6 +19507,12 @@
                     </a:p>
                   </a:txBody>
                   <a:tcPr marL="45720" marR="45720" marT="18288" marB="18288" anchor="ctr">
+                    <a:lnL>
+                      <a:noFill/>
+                    </a:lnL>
+                    <a:lnR>
+                      <a:noFill/>
+                    </a:lnR>
                     <a:lnT w="9525" cap="flat" cmpd="sng" algn="ctr">
                       <a:solidFill>
                         <a:srgbClr val="D6D6D6"/>
@@ -19140,6 +19552,12 @@
                     </a:p>
                   </a:txBody>
                   <a:tcPr marL="45720" marR="45720" marT="18288" marB="18288" anchor="ctr">
+                    <a:lnL>
+                      <a:noFill/>
+                    </a:lnL>
+                    <a:lnR>
+                      <a:noFill/>
+                    </a:lnR>
                     <a:lnT w="9525" cap="flat" cmpd="sng" algn="ctr">
                       <a:solidFill>
                         <a:srgbClr val="D6D6D6"/>
@@ -19179,6 +19597,12 @@
                     </a:p>
                   </a:txBody>
                   <a:tcPr marL="45720" marR="45720" marT="18288" marB="18288" anchor="ctr">
+                    <a:lnL>
+                      <a:noFill/>
+                    </a:lnL>
+                    <a:lnR>
+                      <a:noFill/>
+                    </a:lnR>
                     <a:lnT w="9525" cap="flat" cmpd="sng" algn="ctr">
                       <a:solidFill>
                         <a:srgbClr val="D6D6D6"/>
@@ -19218,6 +19642,12 @@
                     </a:p>
                   </a:txBody>
                   <a:tcPr marL="45720" marR="45720" marT="18288" marB="18288" anchor="ctr">
+                    <a:lnL>
+                      <a:noFill/>
+                    </a:lnL>
+                    <a:lnR>
+                      <a:noFill/>
+                    </a:lnR>
                     <a:lnT w="9525" cap="flat" cmpd="sng" algn="ctr">
                       <a:solidFill>
                         <a:srgbClr val="D6D6D6"/>
@@ -19264,6 +19694,12 @@
                     </a:p>
                   </a:txBody>
                   <a:tcPr marL="45720" marR="45720" marT="18288" marB="18288" anchor="ctr">
+                    <a:lnL>
+                      <a:noFill/>
+                    </a:lnL>
+                    <a:lnR>
+                      <a:noFill/>
+                    </a:lnR>
                     <a:lnT w="9525" cap="flat" cmpd="sng" algn="ctr">
                       <a:solidFill>
                         <a:srgbClr val="D6D6D6"/>
@@ -19303,6 +19739,12 @@
                     </a:p>
                   </a:txBody>
                   <a:tcPr marL="45720" marR="45720" marT="18288" marB="18288" anchor="ctr">
+                    <a:lnL>
+                      <a:noFill/>
+                    </a:lnL>
+                    <a:lnR>
+                      <a:noFill/>
+                    </a:lnR>
                     <a:lnT w="9525" cap="flat" cmpd="sng" algn="ctr">
                       <a:solidFill>
                         <a:srgbClr val="D6D6D6"/>
@@ -19342,6 +19784,12 @@
                     </a:p>
                   </a:txBody>
                   <a:tcPr marL="45720" marR="45720" marT="18288" marB="18288" anchor="ctr">
+                    <a:lnL>
+                      <a:noFill/>
+                    </a:lnL>
+                    <a:lnR>
+                      <a:noFill/>
+                    </a:lnR>
                     <a:lnT w="9525" cap="flat" cmpd="sng" algn="ctr">
                       <a:solidFill>
                         <a:srgbClr val="D6D6D6"/>
@@ -19381,6 +19829,12 @@
                     </a:p>
                   </a:txBody>
                   <a:tcPr marL="45720" marR="45720" marT="18288" marB="18288" anchor="ctr">
+                    <a:lnL>
+                      <a:noFill/>
+                    </a:lnL>
+                    <a:lnR>
+                      <a:noFill/>
+                    </a:lnR>
                     <a:lnT w="9525" cap="flat" cmpd="sng" algn="ctr">
                       <a:solidFill>
                         <a:srgbClr val="D6D6D6"/>
@@ -19420,6 +19874,12 @@
                     </a:p>
                   </a:txBody>
                   <a:tcPr marL="45720" marR="45720" marT="18288" marB="18288" anchor="ctr">
+                    <a:lnL>
+                      <a:noFill/>
+                    </a:lnL>
+                    <a:lnR>
+                      <a:noFill/>
+                    </a:lnR>
                     <a:lnT w="9525" cap="flat" cmpd="sng" algn="ctr">
                       <a:solidFill>
                         <a:srgbClr val="D6D6D6"/>
@@ -19459,6 +19919,12 @@
                     </a:p>
                   </a:txBody>
                   <a:tcPr marL="45720" marR="45720" marT="18288" marB="18288" anchor="ctr">
+                    <a:lnL>
+                      <a:noFill/>
+                    </a:lnL>
+                    <a:lnR>
+                      <a:noFill/>
+                    </a:lnR>
                     <a:lnT w="9525" cap="flat" cmpd="sng" algn="ctr">
                       <a:solidFill>
                         <a:srgbClr val="D6D6D6"/>
@@ -19505,6 +19971,12 @@
                     </a:p>
                   </a:txBody>
                   <a:tcPr marL="45720" marR="45720" marT="18288" marB="18288" anchor="ctr">
+                    <a:lnL>
+                      <a:noFill/>
+                    </a:lnL>
+                    <a:lnR>
+                      <a:noFill/>
+                    </a:lnR>
                     <a:lnT w="9525" cap="flat" cmpd="sng" algn="ctr">
                       <a:solidFill>
                         <a:srgbClr val="D6D6D6"/>
@@ -19544,6 +20016,12 @@
                     </a:p>
                   </a:txBody>
                   <a:tcPr marL="45720" marR="45720" marT="18288" marB="18288" anchor="ctr">
+                    <a:lnL>
+                      <a:noFill/>
+                    </a:lnL>
+                    <a:lnR>
+                      <a:noFill/>
+                    </a:lnR>
                     <a:lnT w="9525" cap="flat" cmpd="sng" algn="ctr">
                       <a:solidFill>
                         <a:srgbClr val="D6D6D6"/>
@@ -19583,6 +20061,12 @@
                     </a:p>
                   </a:txBody>
                   <a:tcPr marL="45720" marR="45720" marT="18288" marB="18288" anchor="ctr">
+                    <a:lnL>
+                      <a:noFill/>
+                    </a:lnL>
+                    <a:lnR>
+                      <a:noFill/>
+                    </a:lnR>
                     <a:lnT w="9525" cap="flat" cmpd="sng" algn="ctr">
                       <a:solidFill>
                         <a:srgbClr val="D6D6D6"/>
@@ -19622,6 +20106,12 @@
                     </a:p>
                   </a:txBody>
                   <a:tcPr marL="45720" marR="45720" marT="18288" marB="18288" anchor="ctr">
+                    <a:lnL>
+                      <a:noFill/>
+                    </a:lnL>
+                    <a:lnR>
+                      <a:noFill/>
+                    </a:lnR>
                     <a:lnT w="9525" cap="flat" cmpd="sng" algn="ctr">
                       <a:solidFill>
                         <a:srgbClr val="D6D6D6"/>
@@ -19661,6 +20151,12 @@
                     </a:p>
                   </a:txBody>
                   <a:tcPr marL="45720" marR="45720" marT="18288" marB="18288" anchor="ctr">
+                    <a:lnL>
+                      <a:noFill/>
+                    </a:lnL>
+                    <a:lnR>
+                      <a:noFill/>
+                    </a:lnR>
                     <a:lnT w="9525" cap="flat" cmpd="sng" algn="ctr">
                       <a:solidFill>
                         <a:srgbClr val="D6D6D6"/>
@@ -19700,6 +20196,12 @@
                     </a:p>
                   </a:txBody>
                   <a:tcPr marL="45720" marR="45720" marT="18288" marB="18288" anchor="ctr">
+                    <a:lnL>
+                      <a:noFill/>
+                    </a:lnL>
+                    <a:lnR>
+                      <a:noFill/>
+                    </a:lnR>
                     <a:lnT w="9525" cap="flat" cmpd="sng" algn="ctr">
                       <a:solidFill>
                         <a:srgbClr val="D6D6D6"/>
@@ -19741,9 +20243,7 @@
         <a:graphic>
           <a:graphicData uri="http://schemas.openxmlformats.org/drawingml/2006/table">
             <a:tbl>
-              <a:tblPr>
-                <a:tableStyleId>{5C22544A-7EE6-4342-B048-85BDC9FD1C3A}</a:tableStyleId>
-              </a:tblPr>
+              <a:tblPr/>
               <a:tblGrid>
                 <a:gridCol w="777240">
                   <a:extLst>
@@ -19812,6 +20312,15 @@
                     </a:p>
                   </a:txBody>
                   <a:tcPr marL="45720" marR="45720" marT="18288" marB="18288" anchor="ctr">
+                    <a:lnL>
+                      <a:noFill/>
+                    </a:lnL>
+                    <a:lnR>
+                      <a:noFill/>
+                    </a:lnR>
+                    <a:lnT>
+                      <a:noFill/>
+                    </a:lnT>
                     <a:lnB w="19050">
                       <a:solidFill>
                         <a:srgbClr val="0A0A0A"/>
@@ -19842,6 +20351,15 @@
                     </a:p>
                   </a:txBody>
                   <a:tcPr marL="45720" marR="45720" marT="18288" marB="18288" anchor="ctr">
+                    <a:lnL>
+                      <a:noFill/>
+                    </a:lnL>
+                    <a:lnR>
+                      <a:noFill/>
+                    </a:lnR>
+                    <a:lnT>
+                      <a:noFill/>
+                    </a:lnT>
                     <a:lnB w="19050">
                       <a:solidFill>
                         <a:srgbClr val="0A0A0A"/>
@@ -19872,6 +20390,15 @@
                     </a:p>
                   </a:txBody>
                   <a:tcPr marL="45720" marR="45720" marT="18288" marB="18288" anchor="ctr">
+                    <a:lnL>
+                      <a:noFill/>
+                    </a:lnL>
+                    <a:lnR>
+                      <a:noFill/>
+                    </a:lnR>
+                    <a:lnT>
+                      <a:noFill/>
+                    </a:lnT>
                     <a:lnB w="19050">
                       <a:solidFill>
                         <a:srgbClr val="0A0A0A"/>
@@ -19902,6 +20429,15 @@
                     </a:p>
                   </a:txBody>
                   <a:tcPr marL="45720" marR="45720" marT="18288" marB="18288" anchor="ctr">
+                    <a:lnL>
+                      <a:noFill/>
+                    </a:lnL>
+                    <a:lnR>
+                      <a:noFill/>
+                    </a:lnR>
+                    <a:lnT>
+                      <a:noFill/>
+                    </a:lnT>
                     <a:lnB w="19050">
                       <a:solidFill>
                         <a:srgbClr val="0A0A0A"/>
@@ -19932,6 +20468,15 @@
                     </a:p>
                   </a:txBody>
                   <a:tcPr marL="45720" marR="45720" marT="18288" marB="18288" anchor="ctr">
+                    <a:lnL>
+                      <a:noFill/>
+                    </a:lnL>
+                    <a:lnR>
+                      <a:noFill/>
+                    </a:lnR>
+                    <a:lnT>
+                      <a:noFill/>
+                    </a:lnT>
                     <a:lnB w="19050">
                       <a:solidFill>
                         <a:srgbClr val="0A0A0A"/>
@@ -19962,6 +20507,15 @@
                     </a:p>
                   </a:txBody>
                   <a:tcPr marL="45720" marR="45720" marT="18288" marB="18288" anchor="ctr">
+                    <a:lnL>
+                      <a:noFill/>
+                    </a:lnL>
+                    <a:lnR>
+                      <a:noFill/>
+                    </a:lnR>
+                    <a:lnT>
+                      <a:noFill/>
+                    </a:lnT>
                     <a:lnB w="19050">
                       <a:solidFill>
                         <a:srgbClr val="0A0A0A"/>
@@ -19999,6 +20553,12 @@
                     </a:p>
                   </a:txBody>
                   <a:tcPr marL="45720" marR="45720" marT="18288" marB="18288" anchor="ctr">
+                    <a:lnL>
+                      <a:noFill/>
+                    </a:lnL>
+                    <a:lnR>
+                      <a:noFill/>
+                    </a:lnR>
                     <a:lnT w="19050" cap="flat" cmpd="sng" algn="ctr">
                       <a:solidFill>
                         <a:srgbClr val="0A0A0A"/>
@@ -20034,6 +20594,12 @@
                     </a:p>
                   </a:txBody>
                   <a:tcPr marL="45720" marR="45720" marT="18288" marB="18288" anchor="ctr">
+                    <a:lnL>
+                      <a:noFill/>
+                    </a:lnL>
+                    <a:lnR>
+                      <a:noFill/>
+                    </a:lnR>
                     <a:lnT w="19050" cap="flat" cmpd="sng" algn="ctr">
                       <a:solidFill>
                         <a:srgbClr val="0A0A0A"/>
@@ -20069,6 +20635,12 @@
                     </a:p>
                   </a:txBody>
                   <a:tcPr marL="45720" marR="45720" marT="18288" marB="18288" anchor="ctr">
+                    <a:lnL>
+                      <a:noFill/>
+                    </a:lnL>
+                    <a:lnR>
+                      <a:noFill/>
+                    </a:lnR>
                     <a:lnT w="19050" cap="flat" cmpd="sng" algn="ctr">
                       <a:solidFill>
                         <a:srgbClr val="0A0A0A"/>
@@ -20104,6 +20676,12 @@
                     </a:p>
                   </a:txBody>
                   <a:tcPr marL="45720" marR="45720" marT="18288" marB="18288" anchor="ctr">
+                    <a:lnL>
+                      <a:noFill/>
+                    </a:lnL>
+                    <a:lnR>
+                      <a:noFill/>
+                    </a:lnR>
                     <a:lnT w="19050" cap="flat" cmpd="sng" algn="ctr">
                       <a:solidFill>
                         <a:srgbClr val="0A0A0A"/>
@@ -20139,6 +20717,12 @@
                     </a:p>
                   </a:txBody>
                   <a:tcPr marL="45720" marR="45720" marT="18288" marB="18288" anchor="ctr">
+                    <a:lnL>
+                      <a:noFill/>
+                    </a:lnL>
+                    <a:lnR>
+                      <a:noFill/>
+                    </a:lnR>
                     <a:lnT w="19050" cap="flat" cmpd="sng" algn="ctr">
                       <a:solidFill>
                         <a:srgbClr val="0A0A0A"/>
@@ -20174,6 +20758,12 @@
                     </a:p>
                   </a:txBody>
                   <a:tcPr marL="45720" marR="45720" marT="18288" marB="18288" anchor="ctr">
+                    <a:lnL>
+                      <a:noFill/>
+                    </a:lnL>
+                    <a:lnR>
+                      <a:noFill/>
+                    </a:lnR>
                     <a:lnT w="19050" cap="flat" cmpd="sng" algn="ctr">
                       <a:solidFill>
                         <a:srgbClr val="0A0A0A"/>
@@ -20216,6 +20806,12 @@
                     </a:p>
                   </a:txBody>
                   <a:tcPr marL="45720" marR="45720" marT="18288" marB="18288" anchor="ctr">
+                    <a:lnL>
+                      <a:noFill/>
+                    </a:lnL>
+                    <a:lnR>
+                      <a:noFill/>
+                    </a:lnR>
                     <a:lnT w="9525" cap="flat" cmpd="sng" algn="ctr">
                       <a:solidFill>
                         <a:srgbClr val="D6D6D6"/>
@@ -20255,6 +20851,12 @@
                     </a:p>
                   </a:txBody>
                   <a:tcPr marL="45720" marR="45720" marT="18288" marB="18288" anchor="ctr">
+                    <a:lnL>
+                      <a:noFill/>
+                    </a:lnL>
+                    <a:lnR>
+                      <a:noFill/>
+                    </a:lnR>
                     <a:lnT w="9525" cap="flat" cmpd="sng" algn="ctr">
                       <a:solidFill>
                         <a:srgbClr val="D6D6D6"/>
@@ -20294,6 +20896,12 @@
                     </a:p>
                   </a:txBody>
                   <a:tcPr marL="45720" marR="45720" marT="18288" marB="18288" anchor="ctr">
+                    <a:lnL>
+                      <a:noFill/>
+                    </a:lnL>
+                    <a:lnR>
+                      <a:noFill/>
+                    </a:lnR>
                     <a:lnT w="9525" cap="flat" cmpd="sng" algn="ctr">
                       <a:solidFill>
                         <a:srgbClr val="D6D6D6"/>
@@ -20333,6 +20941,12 @@
                     </a:p>
                   </a:txBody>
                   <a:tcPr marL="45720" marR="45720" marT="18288" marB="18288" anchor="ctr">
+                    <a:lnL>
+                      <a:noFill/>
+                    </a:lnL>
+                    <a:lnR>
+                      <a:noFill/>
+                    </a:lnR>
                     <a:lnT w="9525" cap="flat" cmpd="sng" algn="ctr">
                       <a:solidFill>
                         <a:srgbClr val="D6D6D6"/>
@@ -20372,6 +20986,12 @@
                     </a:p>
                   </a:txBody>
                   <a:tcPr marL="45720" marR="45720" marT="18288" marB="18288" anchor="ctr">
+                    <a:lnL>
+                      <a:noFill/>
+                    </a:lnL>
+                    <a:lnR>
+                      <a:noFill/>
+                    </a:lnR>
                     <a:lnT w="9525" cap="flat" cmpd="sng" algn="ctr">
                       <a:solidFill>
                         <a:srgbClr val="D6D6D6"/>
@@ -20411,6 +21031,12 @@
                     </a:p>
                   </a:txBody>
                   <a:tcPr marL="45720" marR="45720" marT="18288" marB="18288" anchor="ctr">
+                    <a:lnL>
+                      <a:noFill/>
+                    </a:lnL>
+                    <a:lnR>
+                      <a:noFill/>
+                    </a:lnR>
                     <a:lnT w="9525" cap="flat" cmpd="sng" algn="ctr">
                       <a:solidFill>
                         <a:srgbClr val="D6D6D6"/>
@@ -20457,6 +21083,12 @@
                     </a:p>
                   </a:txBody>
                   <a:tcPr marL="45720" marR="45720" marT="18288" marB="18288" anchor="ctr">
+                    <a:lnL>
+                      <a:noFill/>
+                    </a:lnL>
+                    <a:lnR>
+                      <a:noFill/>
+                    </a:lnR>
                     <a:lnT w="9525" cap="flat" cmpd="sng" algn="ctr">
                       <a:solidFill>
                         <a:srgbClr val="D6D6D6"/>
@@ -20496,6 +21128,12 @@
                     </a:p>
                   </a:txBody>
                   <a:tcPr marL="45720" marR="45720" marT="18288" marB="18288" anchor="ctr">
+                    <a:lnL>
+                      <a:noFill/>
+                    </a:lnL>
+                    <a:lnR>
+                      <a:noFill/>
+                    </a:lnR>
                     <a:lnT w="9525" cap="flat" cmpd="sng" algn="ctr">
                       <a:solidFill>
                         <a:srgbClr val="D6D6D6"/>
@@ -20535,6 +21173,12 @@
                     </a:p>
                   </a:txBody>
                   <a:tcPr marL="45720" marR="45720" marT="18288" marB="18288" anchor="ctr">
+                    <a:lnL>
+                      <a:noFill/>
+                    </a:lnL>
+                    <a:lnR>
+                      <a:noFill/>
+                    </a:lnR>
                     <a:lnT w="9525" cap="flat" cmpd="sng" algn="ctr">
                       <a:solidFill>
                         <a:srgbClr val="D6D6D6"/>
@@ -20574,6 +21218,12 @@
                     </a:p>
                   </a:txBody>
                   <a:tcPr marL="45720" marR="45720" marT="18288" marB="18288" anchor="ctr">
+                    <a:lnL>
+                      <a:noFill/>
+                    </a:lnL>
+                    <a:lnR>
+                      <a:noFill/>
+                    </a:lnR>
                     <a:lnT w="9525" cap="flat" cmpd="sng" algn="ctr">
                       <a:solidFill>
                         <a:srgbClr val="D6D6D6"/>
@@ -20613,6 +21263,12 @@
                     </a:p>
                   </a:txBody>
                   <a:tcPr marL="45720" marR="45720" marT="18288" marB="18288" anchor="ctr">
+                    <a:lnL>
+                      <a:noFill/>
+                    </a:lnL>
+                    <a:lnR>
+                      <a:noFill/>
+                    </a:lnR>
                     <a:lnT w="9525" cap="flat" cmpd="sng" algn="ctr">
                       <a:solidFill>
                         <a:srgbClr val="D6D6D6"/>
@@ -20652,6 +21308,12 @@
                     </a:p>
                   </a:txBody>
                   <a:tcPr marL="45720" marR="45720" marT="18288" marB="18288" anchor="ctr">
+                    <a:lnL>
+                      <a:noFill/>
+                    </a:lnL>
+                    <a:lnR>
+                      <a:noFill/>
+                    </a:lnR>
                     <a:lnT w="9525" cap="flat" cmpd="sng" algn="ctr">
                       <a:solidFill>
                         <a:srgbClr val="D6D6D6"/>

--- a/银行流水分享_V1.7.pptx
+++ b/银行流水分享_V1.7.pptx
@@ -14356,7 +14356,7 @@
                 <a:latin typeface="微软雅黑" panose="020B0503020204020204" pitchFamily="34" charset="-122"/>
                 <a:ea typeface="微软雅黑" panose="020B0503020204020204" pitchFamily="34" charset="-122"/>
               </a:rPr>
-              <a:t>收入识别知识库</a:t>
+              <a:t>收入识别库</a:t>
             </a:r>
             <a:endParaRPr lang="en-US" altLang="zh-CN" sz="1050" noProof="1">
               <a:latin typeface="微软雅黑" panose="020B0503020204020204" pitchFamily="34" charset="-122"/>
@@ -15146,7 +15146,7 @@
                 <a:latin typeface="微软雅黑" panose="020B0503020204020204" pitchFamily="34" charset="-122"/>
                 <a:ea typeface="微软雅黑" panose="020B0503020204020204" pitchFamily="34" charset="-122"/>
               </a:rPr>
-              <a:t>贷款识别知识库</a:t>
+              <a:t>贷款识别库</a:t>
             </a:r>
             <a:endParaRPr lang="en-US" altLang="zh-CN" sz="1050" noProof="1">
               <a:latin typeface="微软雅黑" panose="020B0503020204020204" pitchFamily="34" charset="-122"/>
@@ -15177,7 +15177,7 @@
         </p:nvGraphicFramePr>
         <p:xfrm>
           <a:off x="511115" y="5244263"/>
-          <a:ext cx="5540237" cy="1676400"/>
+          <a:ext cx="5540237" cy="1426464"/>
         </p:xfrm>
         <a:graphic>
           <a:graphicData uri="http://schemas.openxmlformats.org/drawingml/2006/table">
@@ -15206,7 +15206,7 @@
                   </a:extLst>
                 </a:gridCol>
               </a:tblGrid>
-              <a:tr h="279400">
+              <a:tr h="237744">
                 <a:tc>
                   <a:txBody>
                     <a:bodyPr/>
@@ -15321,7 +15321,7 @@
                   </a:ext>
                 </a:extLst>
               </a:tr>
-              <a:tr h="279400">
+              <a:tr h="237744">
                 <a:tc>
                   <a:txBody>
                     <a:bodyPr/>
@@ -15454,7 +15454,7 @@
                   </a:ext>
                 </a:extLst>
               </a:tr>
-              <a:tr h="279400">
+              <a:tr h="237744">
                 <a:tc>
                   <a:txBody>
                     <a:bodyPr/>
@@ -15587,7 +15587,7 @@
                   </a:ext>
                 </a:extLst>
               </a:tr>
-              <a:tr h="279400">
+              <a:tr h="237744">
                 <a:tc>
                   <a:txBody>
                     <a:bodyPr/>
@@ -15720,7 +15720,7 @@
                   </a:ext>
                 </a:extLst>
               </a:tr>
-              <a:tr h="279400">
+              <a:tr h="237744">
                 <a:tc>
                   <a:txBody>
                     <a:bodyPr/>
@@ -15853,7 +15853,7 @@
                   </a:ext>
                 </a:extLst>
               </a:tr>
-              <a:tr h="279400">
+              <a:tr h="237744">
                 <a:tc>
                   <a:txBody>
                     <a:bodyPr/>
@@ -16370,50 +16370,6 @@
               <a:t>生成按优先级排序的诊断报告，直接标明问题引擎、需检查的规则、缺失的商户／关键词及应补充的知识库，供业务确认。</a:t>
             </a:r>
           </a:p>
-          <a:p>
-            <a:pPr algn="l">
-              <a:lnSpc>
-                <a:spcPct val="100000"/>
-              </a:lnSpc>
-              <a:spcBef>
-                <a:spcPts val="0"/>
-              </a:spcBef>
-              <a:spcAft>
-                <a:spcPts val="100"/>
-              </a:spcAft>
-            </a:pPr>
-            <a:r>
-              <a:rPr sz="1000" b="1">
-                <a:solidFill>
-                  <a:srgbClr val="1F4E79"/>
-                </a:solidFill>
-                <a:latin typeface="微软雅黑"/>
-              </a:rPr>
-              <a:t>效果</a:t>
-            </a:r>
-          </a:p>
-          <a:p>
-            <a:pPr algn="l">
-              <a:lnSpc>
-                <a:spcPct val="100000"/>
-              </a:lnSpc>
-              <a:spcBef>
-                <a:spcPts val="0"/>
-              </a:spcBef>
-              <a:spcAft>
-                <a:spcPts val="300"/>
-              </a:spcAft>
-            </a:pPr>
-            <a:r>
-              <a:rPr sz="850" b="0">
-                <a:solidFill>
-                  <a:srgbClr val="3D3C3A"/>
-                </a:solidFill>
-                <a:latin typeface="微软雅黑"/>
-              </a:rPr>
-              <a:t>知识库随注册商户的新增、变更、失效持续更新，并从真实交易中补齐注册数据未覆盖的支付描述和商户别名。由此形成“分类 → 监控 → 定位 → 输出 → 更新 → 再分类”的持续优化闭环。</a:t>
-            </a:r>
-          </a:p>
         </p:txBody>
       </p:sp>
       <p:sp>
@@ -17113,8 +17069,8 @@
         </p:nvSpPr>
         <p:spPr>
           <a:xfrm>
-            <a:off x="6311257" y="5282559"/>
-            <a:ext cx="5540237" cy="237744"/>
+            <a:off x="6281928" y="5285232"/>
+            <a:ext cx="5029200" cy="256032"/>
           </a:xfrm>
           <a:prstGeom prst="rect">
             <a:avLst/>
@@ -17122,13 +17078,14 @@
           <a:noFill/>
         </p:spPr>
         <p:txBody>
-          <a:bodyPr wrap="none">
+          <a:bodyPr wrap="square">
             <a:spAutoFit/>
           </a:bodyPr>
           <a:lstStyle/>
           <a:p>
+            <a:pPr algn="l"/>
             <a:r>
-              <a:rPr sz="900" b="1" dirty="0" err="1">
+              <a:rPr sz="1200" b="1" dirty="0" err="1">
                 <a:solidFill>
                   <a:srgbClr val="0A0A0A"/>
                 </a:solidFill>
@@ -17862,8 +17819,8 @@
         </p:nvSpPr>
         <p:spPr>
           <a:xfrm>
-            <a:off x="6219817" y="3773799"/>
-            <a:ext cx="1107996" cy="230832"/>
+            <a:off x="6281928" y="3776472"/>
+            <a:ext cx="5029200" cy="256032"/>
           </a:xfrm>
           <a:prstGeom prst="rect">
             <a:avLst/>
@@ -17871,18 +17828,18 @@
           <a:noFill/>
         </p:spPr>
         <p:txBody>
-          <a:bodyPr wrap="none">
+          <a:bodyPr wrap="square">
             <a:spAutoFit/>
           </a:bodyPr>
           <a:lstStyle/>
           <a:p>
-            <a:pPr>
+            <a:pPr algn="l">
               <a:spcAft>
                 <a:spcPts val="300"/>
               </a:spcAft>
             </a:pPr>
             <a:r>
-              <a:rPr lang="zh-CN" altLang="en-US" sz="900" b="1" dirty="0">
+              <a:rPr lang="zh-CN" altLang="en-US" sz="1200" b="1" dirty="0">
                 <a:solidFill>
                   <a:srgbClr val="0A0A0A"/>
                 </a:solidFill>
@@ -17890,6 +17847,216 @@
                 <a:ea typeface="微软雅黑"/>
               </a:rPr>
               <a:t>五类定位原因示例</a:t>
+            </a:r>
+          </a:p>
+        </p:txBody>
+      </p:sp>
+      <p:sp>
+        <p:nvSpPr>
+          <p:cNvPr id="33" name="Rectangle 32"/>
+          <p:cNvSpPr/>
+          <p:nvPr/>
+        </p:nvSpPr>
+        <p:spPr>
+          <a:xfrm>
+            <a:off x="6217920" y="3776472"/>
+            <a:ext cx="54864" cy="228600"/>
+          </a:xfrm>
+          <a:prstGeom prst="rect">
+            <a:avLst/>
+          </a:prstGeom>
+          <a:solidFill>
+            <a:srgbClr val="D6A000"/>
+          </a:solidFill>
+          <a:ln>
+            <a:noFill/>
+          </a:ln>
+          <a:effectLst/>
+        </p:spPr>
+        <p:style>
+          <a:lnRef idx="1">
+            <a:schemeClr val="accent1"/>
+          </a:lnRef>
+          <a:fillRef idx="3">
+            <a:schemeClr val="accent1"/>
+          </a:fillRef>
+          <a:effectRef idx="2">
+            <a:schemeClr val="accent1"/>
+          </a:effectRef>
+          <a:fontRef idx="minor">
+            <a:schemeClr val="lt1"/>
+          </a:fontRef>
+        </p:style>
+        <p:txBody>
+          <a:bodyPr rtlCol="0" anchor="ctr"/>
+          <a:lstStyle/>
+          <a:p>
+            <a:pPr algn="ctr"/>
+          </a:p>
+        </p:txBody>
+      </p:sp>
+      <p:sp>
+        <p:nvSpPr>
+          <p:cNvPr id="34" name="Rectangle 33"/>
+          <p:cNvSpPr/>
+          <p:nvPr/>
+        </p:nvSpPr>
+        <p:spPr>
+          <a:xfrm>
+            <a:off x="6217920" y="5285232"/>
+            <a:ext cx="54864" cy="228600"/>
+          </a:xfrm>
+          <a:prstGeom prst="rect">
+            <a:avLst/>
+          </a:prstGeom>
+          <a:solidFill>
+            <a:srgbClr val="D6A000"/>
+          </a:solidFill>
+          <a:ln>
+            <a:noFill/>
+          </a:ln>
+          <a:effectLst/>
+        </p:spPr>
+        <p:style>
+          <a:lnRef idx="1">
+            <a:schemeClr val="accent1"/>
+          </a:lnRef>
+          <a:fillRef idx="3">
+            <a:schemeClr val="accent1"/>
+          </a:fillRef>
+          <a:effectRef idx="2">
+            <a:schemeClr val="accent1"/>
+          </a:effectRef>
+          <a:fontRef idx="minor">
+            <a:schemeClr val="lt1"/>
+          </a:fontRef>
+        </p:style>
+        <p:txBody>
+          <a:bodyPr rtlCol="0" anchor="ctr"/>
+          <a:lstStyle/>
+          <a:p>
+            <a:pPr algn="ctr"/>
+          </a:p>
+        </p:txBody>
+      </p:sp>
+      <p:sp>
+        <p:nvSpPr>
+          <p:cNvPr id="35" name="Rectangle 34"/>
+          <p:cNvSpPr/>
+          <p:nvPr/>
+        </p:nvSpPr>
+        <p:spPr>
+          <a:xfrm>
+            <a:off x="6281928" y="6327648"/>
+            <a:ext cx="5541264" cy="384048"/>
+          </a:xfrm>
+          <a:prstGeom prst="rect">
+            <a:avLst/>
+          </a:prstGeom>
+          <a:solidFill>
+            <a:srgbClr val="FAF3E0"/>
+          </a:solidFill>
+          <a:ln>
+            <a:noFill/>
+          </a:ln>
+          <a:effectLst/>
+        </p:spPr>
+        <p:style>
+          <a:lnRef idx="1">
+            <a:schemeClr val="accent1"/>
+          </a:lnRef>
+          <a:fillRef idx="3">
+            <a:schemeClr val="accent1"/>
+          </a:fillRef>
+          <a:effectRef idx="2">
+            <a:schemeClr val="accent1"/>
+          </a:effectRef>
+          <a:fontRef idx="minor">
+            <a:schemeClr val="lt1"/>
+          </a:fontRef>
+        </p:style>
+        <p:txBody>
+          <a:bodyPr rtlCol="0" anchor="ctr"/>
+          <a:lstStyle/>
+          <a:p>
+            <a:pPr algn="ctr"/>
+          </a:p>
+        </p:txBody>
+      </p:sp>
+      <p:sp>
+        <p:nvSpPr>
+          <p:cNvPr id="36" name="Rectangle 35"/>
+          <p:cNvSpPr/>
+          <p:nvPr/>
+        </p:nvSpPr>
+        <p:spPr>
+          <a:xfrm>
+            <a:off x="6217920" y="6327648"/>
+            <a:ext cx="54864" cy="384048"/>
+          </a:xfrm>
+          <a:prstGeom prst="rect">
+            <a:avLst/>
+          </a:prstGeom>
+          <a:solidFill>
+            <a:srgbClr val="D6A000"/>
+          </a:solidFill>
+          <a:ln>
+            <a:noFill/>
+          </a:ln>
+          <a:effectLst/>
+        </p:spPr>
+        <p:style>
+          <a:lnRef idx="1">
+            <a:schemeClr val="accent1"/>
+          </a:lnRef>
+          <a:fillRef idx="3">
+            <a:schemeClr val="accent1"/>
+          </a:fillRef>
+          <a:effectRef idx="2">
+            <a:schemeClr val="accent1"/>
+          </a:effectRef>
+          <a:fontRef idx="minor">
+            <a:schemeClr val="lt1"/>
+          </a:fontRef>
+        </p:style>
+        <p:txBody>
+          <a:bodyPr rtlCol="0" anchor="ctr"/>
+          <a:lstStyle/>
+          <a:p>
+            <a:pPr algn="ctr"/>
+          </a:p>
+        </p:txBody>
+      </p:sp>
+      <p:sp>
+        <p:nvSpPr>
+          <p:cNvPr id="37" name="TextBox 36"/>
+          <p:cNvSpPr txBox="1"/>
+          <p:nvPr/>
+        </p:nvSpPr>
+        <p:spPr>
+          <a:xfrm>
+            <a:off x="6373368" y="6327648"/>
+            <a:ext cx="5349240" cy="384048"/>
+          </a:xfrm>
+          <a:prstGeom prst="rect">
+            <a:avLst/>
+          </a:prstGeom>
+          <a:noFill/>
+        </p:spPr>
+        <p:txBody>
+          <a:bodyPr wrap="square" lIns="0" rIns="0" tIns="0" bIns="0" anchor="ctr">
+            <a:spAutoFit/>
+          </a:bodyPr>
+          <a:lstStyle/>
+          <a:p>
+            <a:pPr algn="l"/>
+            <a:r>
+              <a:rPr sz="900" b="1">
+                <a:solidFill>
+                  <a:srgbClr val="0A0A0A"/>
+                </a:solidFill>
+              </a:rPr>
+              <a:t>知识库随注册商户的新增、变更、失效持续更新，并从真实交易中补齐注册数据未覆盖的支付描述和商户别名。由此形成“分类 → 监控 → 定位 → 输出 → 更新 → 再分类”的持续优化闭环。</a:t>
             </a:r>
           </a:p>
         </p:txBody>

--- a/银行流水分享_V1.7.pptx
+++ b/银行流水分享_V1.7.pptx
@@ -8,6 +8,7 @@
     <p:sldId id="260" r:id="rId2"/>
     <p:sldId id="269" r:id="rId3"/>
     <p:sldId id="267" r:id="rId4"/>
+    <p:sldId id="280" r:id="rId15"/>
     <p:sldId id="279" r:id="rId5"/>
   </p:sldIdLst>
   <p:sldSz cx="12192000" cy="6858000"/>
@@ -18075,6 +18076,5035 @@
 </file>
 
 <file path=ppt/slides/slide4.xml><?xml version="1.0" encoding="utf-8"?>
+<p:sld xmlns:a="http://schemas.openxmlformats.org/drawingml/2006/main" xmlns:p="http://schemas.openxmlformats.org/presentationml/2006/main" xmlns:r="http://schemas.openxmlformats.org/officeDocument/2006/relationships">
+  <p:cSld>
+    <p:spTree>
+      <p:nvGrpSpPr>
+        <p:cNvPr id="1" name=""/>
+        <p:cNvGrpSpPr/>
+        <p:nvPr/>
+      </p:nvGrpSpPr>
+      <p:grpSpPr/>
+      <p:sp>
+        <p:nvSpPr>
+          <p:cNvPr id="28" name="band-bg">
+            <a:extLst>
+              <a:ext uri="{FF2B5EF4-FFF2-40B4-BE49-F238E27FC236}">
+                <a16:creationId xmlns:a16="http://schemas.microsoft.com/office/drawing/2014/main" id="{D6429189-C8AA-4544-BEC8-9DF6FD837EF5}"/>
+              </a:ext>
+            </a:extLst>
+          </p:cNvPr>
+          <p:cNvSpPr/>
+          <p:nvPr/>
+        </p:nvSpPr>
+        <p:spPr>
+          <a:xfrm>
+            <a:off x="584453" y="1105291"/>
+            <a:ext cx="10871200" cy="505124"/>
+          </a:xfrm>
+          <a:prstGeom prst="rect">
+            <a:avLst/>
+          </a:prstGeom>
+          <a:solidFill>
+            <a:srgbClr val="F0F0F0"/>
+          </a:solidFill>
+          <a:ln>
+            <a:noFill/>
+          </a:ln>
+        </p:spPr>
+        <p:txBody>
+          <a:bodyPr/>
+          <a:lstStyle/>
+          <a:p>
+            <a:endParaRPr/>
+          </a:p>
+        </p:txBody>
+      </p:sp>
+      <p:sp>
+        <p:nvSpPr>
+          <p:cNvPr id="2" name="title">
+            <a:extLst>
+              <a:ext uri="{FF2B5EF4-FFF2-40B4-BE49-F238E27FC236}">
+                <a16:creationId xmlns:a16="http://schemas.microsoft.com/office/drawing/2014/main" id="{2D6C6528-4DFB-4D29-B578-BC3E760E6C21}"/>
+              </a:ext>
+            </a:extLst>
+          </p:cNvPr>
+          <p:cNvSpPr txBox="1"/>
+          <p:nvPr/>
+        </p:nvSpPr>
+        <p:spPr>
+          <a:xfrm>
+            <a:off x="600015" y="214702"/>
+            <a:ext cx="8890000" cy="355600"/>
+          </a:xfrm>
+          <a:prstGeom prst="rect">
+            <a:avLst/>
+          </a:prstGeom>
+          <a:noFill/>
+          <a:ln>
+            <a:noFill/>
+          </a:ln>
+        </p:spPr>
+        <p:txBody>
+          <a:bodyPr wrap="none" lIns="0" tIns="0" rIns="0" bIns="0" rtlCol="0" anchor="ctr"/>
+          <a:lstStyle/>
+          <a:p>
+            <a:pPr algn="l">
+              <a:lnSpc>
+                <a:spcPct val="130000"/>
+              </a:lnSpc>
+            </a:pPr>
+            <a:r>
+              <a:rPr lang="en-US" altLang="zh-CN" sz="2000" b="1" noProof="1">
+                <a:solidFill>
+                  <a:srgbClr val="0A0A0A"/>
+                </a:solidFill>
+                <a:latin typeface="微软雅黑" panose="020B0503020204020204" pitchFamily="34" charset="-122"/>
+                <a:ea typeface="微软雅黑" panose="020B0503020204020204" pitchFamily="34" charset="-122"/>
+              </a:rPr>
+              <a:t>多引擎分工分类，AI 建设与维护知识库并驱动持续优化闭环</a:t>
+            </a:r>
+            <a:endParaRPr lang="en-US" altLang="zh-CN" sz="2000" noProof="1">
+              <a:latin typeface="微软雅黑" panose="020B0503020204020204" pitchFamily="34" charset="-122"/>
+              <a:ea typeface="微软雅黑" panose="020B0503020204020204" pitchFamily="34" charset="-122"/>
+            </a:endParaRPr>
+          </a:p>
+        </p:txBody>
+      </p:sp>
+      <p:sp>
+        <p:nvSpPr>
+          <p:cNvPr id="3" name="文本框 2">
+            <a:extLst>
+              <a:ext uri="{FF2B5EF4-FFF2-40B4-BE49-F238E27FC236}">
+                <a16:creationId xmlns:a16="http://schemas.microsoft.com/office/drawing/2014/main" id="{4D96AA42-FD16-4226-8E79-584F342FB5EE}"/>
+              </a:ext>
+            </a:extLst>
+          </p:cNvPr>
+          <p:cNvSpPr txBox="1"/>
+          <p:nvPr/>
+        </p:nvSpPr>
+        <p:spPr>
+          <a:xfrm>
+            <a:off x="511115" y="570302"/>
+            <a:ext cx="10901632" cy="438133"/>
+          </a:xfrm>
+          <a:prstGeom prst="rect">
+            <a:avLst/>
+          </a:prstGeom>
+          <a:noFill/>
+        </p:spPr>
+        <p:txBody>
+          <a:bodyPr wrap="square">
+            <a:spAutoFit/>
+          </a:bodyPr>
+          <a:lstStyle/>
+          <a:p>
+            <a:pPr algn="l">
+              <a:lnSpc>
+                <a:spcPct val="140000"/>
+              </a:lnSpc>
+            </a:pPr>
+            <a:r>
+              <a:rPr lang="en-US" altLang="zh-CN" sz="1800" noProof="1">
+                <a:solidFill>
+                  <a:srgbClr val="606060"/>
+                </a:solidFill>
+                <a:latin typeface="微软雅黑" panose="020B0503020204020204" pitchFamily="34" charset="-122"/>
+                <a:ea typeface="微软雅黑" panose="020B0503020204020204" pitchFamily="34" charset="-122"/>
+              </a:rPr>
+              <a:t>流水依次经过多个分类引擎，各引擎输出交易类别、交易对手，后续引擎发现更明确证据可修正前序分类</a:t>
+            </a:r>
+            <a:endParaRPr lang="en-US" altLang="zh-CN" sz="1800" noProof="1">
+              <a:latin typeface="微软雅黑" panose="020B0503020204020204" pitchFamily="34" charset="-122"/>
+              <a:ea typeface="微软雅黑" panose="020B0503020204020204" pitchFamily="34" charset="-122"/>
+            </a:endParaRPr>
+          </a:p>
+        </p:txBody>
+      </p:sp>
+      <p:sp>
+        <p:nvSpPr>
+          <p:cNvPr id="5" name="s1-bar">
+            <a:extLst>
+              <a:ext uri="{FF2B5EF4-FFF2-40B4-BE49-F238E27FC236}">
+                <a16:creationId xmlns:a16="http://schemas.microsoft.com/office/drawing/2014/main" id="{91A77EEA-A124-4DAB-9FE8-7A3DD468C350}"/>
+              </a:ext>
+            </a:extLst>
+          </p:cNvPr>
+          <p:cNvSpPr/>
+          <p:nvPr/>
+        </p:nvSpPr>
+        <p:spPr>
+          <a:xfrm>
+            <a:off x="568717" y="1732980"/>
+            <a:ext cx="50800" cy="165100"/>
+          </a:xfrm>
+          <a:prstGeom prst="rect">
+            <a:avLst/>
+          </a:prstGeom>
+          <a:solidFill>
+            <a:srgbClr val="D6A000"/>
+          </a:solidFill>
+          <a:ln>
+            <a:noFill/>
+          </a:ln>
+        </p:spPr>
+        <p:txBody>
+          <a:bodyPr/>
+          <a:lstStyle/>
+          <a:p>
+            <a:endParaRPr/>
+          </a:p>
+        </p:txBody>
+      </p:sp>
+      <p:sp>
+        <p:nvSpPr>
+          <p:cNvPr id="6" name="s1-title">
+            <a:extLst>
+              <a:ext uri="{FF2B5EF4-FFF2-40B4-BE49-F238E27FC236}">
+                <a16:creationId xmlns:a16="http://schemas.microsoft.com/office/drawing/2014/main" id="{2E0EF8C0-7EE5-4A89-9BFB-5F574061D5AA}"/>
+              </a:ext>
+            </a:extLst>
+          </p:cNvPr>
+          <p:cNvSpPr txBox="1"/>
+          <p:nvPr/>
+        </p:nvSpPr>
+        <p:spPr>
+          <a:xfrm>
+            <a:off x="721117" y="1694880"/>
+            <a:ext cx="4064000" cy="228600"/>
+          </a:xfrm>
+          <a:prstGeom prst="rect">
+            <a:avLst/>
+          </a:prstGeom>
+          <a:noFill/>
+          <a:ln>
+            <a:noFill/>
+          </a:ln>
+        </p:spPr>
+        <p:txBody>
+          <a:bodyPr wrap="none" lIns="0" tIns="0" rIns="0" bIns="0" rtlCol="0" anchor="ctr"/>
+          <a:lstStyle/>
+          <a:p>
+            <a:pPr algn="l">
+              <a:lnSpc>
+                <a:spcPct val="125000"/>
+              </a:lnSpc>
+            </a:pPr>
+            <a:r>
+              <a:rPr sz="1400" b="1">
+                <a:solidFill>
+                  <a:srgbClr val="0A0A0A"/>
+                </a:solidFill>
+                <a:latin typeface="微软雅黑"/>
+                <a:ea typeface="微软雅黑"/>
+              </a:rPr>
+              <a:t>1. AI 建设与维护知识库</a:t>
+            </a:r>
+            <a:endParaRPr lang="en-US" sz="1400" noProof="1">
+              <a:latin typeface="微软雅黑" panose="020B0503020204020204" pitchFamily="34" charset="-122"/>
+              <a:ea typeface="微软雅黑" panose="020B0503020204020204" pitchFamily="34" charset="-122"/>
+            </a:endParaRPr>
+          </a:p>
+        </p:txBody>
+      </p:sp>
+      <p:graphicFrame>
+        <p:nvGraphicFramePr>
+          <p:cNvPr id="7" name="init-table">
+            <a:extLst>
+              <a:ext uri="{FF2B5EF4-FFF2-40B4-BE49-F238E27FC236}">
+                <a16:creationId xmlns:a16="http://schemas.microsoft.com/office/drawing/2014/main" id="{296C6557-7410-4A1E-A4E0-C1913FA164B3}"/>
+              </a:ext>
+            </a:extLst>
+          </p:cNvPr>
+          <p:cNvGraphicFramePr>
+            <a:graphicFrameLocks noGrp="1"/>
+          </p:cNvGraphicFramePr>
+          <p:nvPr>
+            <p:extLst>
+              <p:ext uri="{D42A27DB-BD31-4B8C-83A1-F6EECF244321}">
+                <p14:modId xmlns:p14="http://schemas.microsoft.com/office/powerpoint/2010/main" val="2055821530"/>
+              </p:ext>
+            </p:extLst>
+          </p:nvPr>
+        </p:nvGraphicFramePr>
+        <p:xfrm>
+          <a:off x="568716" y="2274555"/>
+          <a:ext cx="5222483" cy="1280160"/>
+        </p:xfrm>
+        <a:graphic>
+          <a:graphicData uri="http://schemas.openxmlformats.org/drawingml/2006/table">
+            <a:tbl>
+              <a:tblPr/>
+              <a:tblGrid>
+                <a:gridCol w="1314156">
+                  <a:extLst>
+                    <a:ext uri="{9D8B030D-6E8A-4147-A177-3AD203B41FA5}">
+                      <a16:colId xmlns:a16="http://schemas.microsoft.com/office/drawing/2014/main" val="20000"/>
+                    </a:ext>
+                  </a:extLst>
+                </a:gridCol>
+                <a:gridCol w="2341582">
+                  <a:extLst>
+                    <a:ext uri="{9D8B030D-6E8A-4147-A177-3AD203B41FA5}">
+                      <a16:colId xmlns:a16="http://schemas.microsoft.com/office/drawing/2014/main" val="20001"/>
+                    </a:ext>
+                  </a:extLst>
+                </a:gridCol>
+                <a:gridCol w="1566745">
+                  <a:extLst>
+                    <a:ext uri="{9D8B030D-6E8A-4147-A177-3AD203B41FA5}">
+                      <a16:colId xmlns:a16="http://schemas.microsoft.com/office/drawing/2014/main" val="20002"/>
+                    </a:ext>
+                  </a:extLst>
+                </a:gridCol>
+              </a:tblGrid>
+              <a:tr h="173695">
+                <a:tc>
+                  <a:txBody>
+                    <a:bodyPr/>
+                    <a:lstStyle/>
+                    <a:p>
+                      <a:pPr algn="l"/>
+                      <a:r>
+                        <a:rPr lang="en-US" sz="800" b="1" noProof="1">
+                          <a:solidFill>
+                            <a:srgbClr val="0A0A0A"/>
+                          </a:solidFill>
+                          <a:latin typeface="微软雅黑" panose="020B0503020204020204" pitchFamily="34" charset="-122"/>
+                          <a:ea typeface="微软雅黑" panose="020B0503020204020204" pitchFamily="34" charset="-122"/>
+                        </a:rPr>
+                        <a:t>标准商户</a:t>
+                      </a:r>
+                    </a:p>
+                  </a:txBody>
+                  <a:tcPr anchor="ctr">
+                    <a:lnL>
+                      <a:noFill/>
+                    </a:lnL>
+                    <a:lnR>
+                      <a:noFill/>
+                    </a:lnR>
+                    <a:lnT>
+                      <a:noFill/>
+                    </a:lnT>
+                    <a:lnB w="19050">
+                      <a:solidFill>
+                        <a:srgbClr val="0A0A0A"/>
+                      </a:solidFill>
+                    </a:lnB>
+                    <a:noFill/>
+                  </a:tcPr>
+                </a:tc>
+                <a:tc>
+                  <a:txBody>
+                    <a:bodyPr/>
+                    <a:lstStyle/>
+                    <a:p>
+                      <a:pPr algn="l"/>
+                      <a:r>
+                        <a:rPr lang="en-US" sz="800" b="1" noProof="1">
+                          <a:solidFill>
+                            <a:srgbClr val="0A0A0A"/>
+                          </a:solidFill>
+                          <a:latin typeface="微软雅黑" panose="020B0503020204020204" pitchFamily="34" charset="-122"/>
+                          <a:ea typeface="微软雅黑" panose="020B0503020204020204" pitchFamily="34" charset="-122"/>
+                        </a:rPr>
+                        <a:t>关键词／别名</a:t>
+                      </a:r>
+                    </a:p>
+                  </a:txBody>
+                  <a:tcPr anchor="ctr">
+                    <a:lnL>
+                      <a:noFill/>
+                    </a:lnL>
+                    <a:lnR>
+                      <a:noFill/>
+                    </a:lnR>
+                    <a:lnT>
+                      <a:noFill/>
+                    </a:lnT>
+                    <a:lnB w="19050">
+                      <a:solidFill>
+                        <a:srgbClr val="0A0A0A"/>
+                      </a:solidFill>
+                    </a:lnB>
+                    <a:noFill/>
+                  </a:tcPr>
+                </a:tc>
+                <a:tc>
+                  <a:txBody>
+                    <a:bodyPr/>
+                    <a:lstStyle/>
+                    <a:p>
+                      <a:pPr algn="l"/>
+                      <a:r>
+                        <a:rPr lang="en-US" sz="800" b="1" noProof="1">
+                          <a:solidFill>
+                            <a:srgbClr val="0A0A0A"/>
+                          </a:solidFill>
+                          <a:latin typeface="微软雅黑" panose="020B0503020204020204" pitchFamily="34" charset="-122"/>
+                          <a:ea typeface="微软雅黑" panose="020B0503020204020204" pitchFamily="34" charset="-122"/>
+                        </a:rPr>
+                        <a:t>类别</a:t>
+                      </a:r>
+                    </a:p>
+                  </a:txBody>
+                  <a:tcPr anchor="ctr">
+                    <a:lnL>
+                      <a:noFill/>
+                    </a:lnL>
+                    <a:lnR>
+                      <a:noFill/>
+                    </a:lnR>
+                    <a:lnT>
+                      <a:noFill/>
+                    </a:lnT>
+                    <a:lnB w="19050">
+                      <a:solidFill>
+                        <a:srgbClr val="0A0A0A"/>
+                      </a:solidFill>
+                    </a:lnB>
+                    <a:noFill/>
+                  </a:tcPr>
+                </a:tc>
+                <a:extLst>
+                  <a:ext uri="{0D108BD9-81ED-4DB2-BD59-A6C34878D82A}">
+                    <a16:rowId xmlns:a16="http://schemas.microsoft.com/office/drawing/2014/main" val="10000"/>
+                  </a:ext>
+                </a:extLst>
+              </a:tr>
+              <a:tr h="173695">
+                <a:tc>
+                  <a:txBody>
+                    <a:bodyPr/>
+                    <a:lstStyle/>
+                    <a:p>
+                      <a:pPr algn="l"/>
+                      <a:r>
+                        <a:rPr lang="en-US" sz="800" b="1" noProof="1">
+                          <a:solidFill>
+                            <a:srgbClr val="0A0A0A"/>
+                          </a:solidFill>
+                          <a:latin typeface="微软雅黑" panose="020B0503020204020204" pitchFamily="34" charset="-122"/>
+                          <a:ea typeface="微软雅黑" panose="020B0503020204020204" pitchFamily="34" charset="-122"/>
+                        </a:rPr>
+                        <a:t>Temu</a:t>
+                      </a:r>
+                    </a:p>
+                  </a:txBody>
+                  <a:tcPr anchor="ctr">
+                    <a:lnL>
+                      <a:noFill/>
+                    </a:lnL>
+                    <a:lnR>
+                      <a:noFill/>
+                    </a:lnR>
+                    <a:lnT w="19050" cap="flat" cmpd="sng" algn="ctr">
+                      <a:solidFill>
+                        <a:srgbClr val="0A0A0A"/>
+                      </a:solidFill>
+                      <a:prstDash val="solid"/>
+                      <a:round/>
+                      <a:headEnd type="none" w="med" len="med"/>
+                      <a:tailEnd type="none" w="med" len="med"/>
+                    </a:lnT>
+                    <a:lnB w="9525">
+                      <a:solidFill>
+                        <a:srgbClr val="D6D6D6"/>
+                      </a:solidFill>
+                    </a:lnB>
+                    <a:noFill/>
+                  </a:tcPr>
+                </a:tc>
+                <a:tc>
+                  <a:txBody>
+                    <a:bodyPr/>
+                    <a:lstStyle/>
+                    <a:p>
+                      <a:pPr algn="l"/>
+                      <a:r>
+                        <a:rPr lang="en-US" sz="800" noProof="1">
+                          <a:solidFill>
+                            <a:srgbClr val="3D3C3A"/>
+                          </a:solidFill>
+                          <a:latin typeface="微软雅黑" panose="020B0503020204020204" pitchFamily="34" charset="-122"/>
+                          <a:ea typeface="微软雅黑" panose="020B0503020204020204" pitchFamily="34" charset="-122"/>
+                        </a:rPr>
+                        <a:t>TEMU.COM、TEMU</a:t>
+                      </a:r>
+                    </a:p>
+                  </a:txBody>
+                  <a:tcPr anchor="ctr">
+                    <a:lnL>
+                      <a:noFill/>
+                    </a:lnL>
+                    <a:lnR>
+                      <a:noFill/>
+                    </a:lnR>
+                    <a:lnT w="19050" cap="flat" cmpd="sng" algn="ctr">
+                      <a:solidFill>
+                        <a:srgbClr val="0A0A0A"/>
+                      </a:solidFill>
+                      <a:prstDash val="solid"/>
+                      <a:round/>
+                      <a:headEnd type="none" w="med" len="med"/>
+                      <a:tailEnd type="none" w="med" len="med"/>
+                    </a:lnT>
+                    <a:lnB w="9525">
+                      <a:solidFill>
+                        <a:srgbClr val="D6D6D6"/>
+                      </a:solidFill>
+                    </a:lnB>
+                    <a:noFill/>
+                  </a:tcPr>
+                </a:tc>
+                <a:tc>
+                  <a:txBody>
+                    <a:bodyPr/>
+                    <a:lstStyle/>
+                    <a:p>
+                      <a:pPr algn="l"/>
+                      <a:r>
+                        <a:rPr lang="en-US" sz="800" noProof="1">
+                          <a:solidFill>
+                            <a:srgbClr val="3D3C3A"/>
+                          </a:solidFill>
+                          <a:latin typeface="微软雅黑" panose="020B0503020204020204" pitchFamily="34" charset="-122"/>
+                          <a:ea typeface="微软雅黑" panose="020B0503020204020204" pitchFamily="34" charset="-122"/>
+                        </a:rPr>
+                        <a:t>Online Shopping</a:t>
+                      </a:r>
+                    </a:p>
+                  </a:txBody>
+                  <a:tcPr anchor="ctr">
+                    <a:lnL>
+                      <a:noFill/>
+                    </a:lnL>
+                    <a:lnR>
+                      <a:noFill/>
+                    </a:lnR>
+                    <a:lnT w="19050" cap="flat" cmpd="sng" algn="ctr">
+                      <a:solidFill>
+                        <a:srgbClr val="0A0A0A"/>
+                      </a:solidFill>
+                      <a:prstDash val="solid"/>
+                      <a:round/>
+                      <a:headEnd type="none" w="med" len="med"/>
+                      <a:tailEnd type="none" w="med" len="med"/>
+                    </a:lnT>
+                    <a:lnB w="9525">
+                      <a:solidFill>
+                        <a:srgbClr val="D6D6D6"/>
+                      </a:solidFill>
+                    </a:lnB>
+                    <a:noFill/>
+                  </a:tcPr>
+                </a:tc>
+                <a:extLst>
+                  <a:ext uri="{0D108BD9-81ED-4DB2-BD59-A6C34878D82A}">
+                    <a16:rowId xmlns:a16="http://schemas.microsoft.com/office/drawing/2014/main" val="10001"/>
+                  </a:ext>
+                </a:extLst>
+              </a:tr>
+              <a:tr h="173695">
+                <a:tc>
+                  <a:txBody>
+                    <a:bodyPr/>
+                    <a:lstStyle/>
+                    <a:p>
+                      <a:pPr algn="l"/>
+                      <a:r>
+                        <a:rPr lang="en-US" sz="800" b="1" noProof="1">
+                          <a:solidFill>
+                            <a:srgbClr val="0A0A0A"/>
+                          </a:solidFill>
+                          <a:latin typeface="微软雅黑" panose="020B0503020204020204" pitchFamily="34" charset="-122"/>
+                          <a:ea typeface="微软雅黑" panose="020B0503020204020204" pitchFamily="34" charset="-122"/>
+                        </a:rPr>
+                        <a:t>Uber Eats</a:t>
+                      </a:r>
+                    </a:p>
+                  </a:txBody>
+                  <a:tcPr anchor="ctr">
+                    <a:lnL>
+                      <a:noFill/>
+                    </a:lnL>
+                    <a:lnR>
+                      <a:noFill/>
+                    </a:lnR>
+                    <a:lnT w="9525" cap="flat" cmpd="sng" algn="ctr">
+                      <a:solidFill>
+                        <a:srgbClr val="D6D6D6"/>
+                      </a:solidFill>
+                      <a:prstDash val="solid"/>
+                      <a:round/>
+                      <a:headEnd type="none" w="med" len="med"/>
+                      <a:tailEnd type="none" w="med" len="med"/>
+                    </a:lnT>
+                    <a:lnB w="9525">
+                      <a:solidFill>
+                        <a:srgbClr val="D6D6D6"/>
+                      </a:solidFill>
+                    </a:lnB>
+                    <a:noFill/>
+                  </a:tcPr>
+                </a:tc>
+                <a:tc>
+                  <a:txBody>
+                    <a:bodyPr/>
+                    <a:lstStyle/>
+                    <a:p>
+                      <a:pPr algn="l"/>
+                      <a:r>
+                        <a:rPr lang="en-US" sz="800" noProof="1">
+                          <a:solidFill>
+                            <a:srgbClr val="3D3C3A"/>
+                          </a:solidFill>
+                          <a:latin typeface="微软雅黑" panose="020B0503020204020204" pitchFamily="34" charset="-122"/>
+                          <a:ea typeface="微软雅黑" panose="020B0503020204020204" pitchFamily="34" charset="-122"/>
+                        </a:rPr>
+                        <a:t>UBER EATS</a:t>
+                      </a:r>
+                    </a:p>
+                  </a:txBody>
+                  <a:tcPr anchor="ctr">
+                    <a:lnL>
+                      <a:noFill/>
+                    </a:lnL>
+                    <a:lnR>
+                      <a:noFill/>
+                    </a:lnR>
+                    <a:lnT w="9525" cap="flat" cmpd="sng" algn="ctr">
+                      <a:solidFill>
+                        <a:srgbClr val="D6D6D6"/>
+                      </a:solidFill>
+                      <a:prstDash val="solid"/>
+                      <a:round/>
+                      <a:headEnd type="none" w="med" len="med"/>
+                      <a:tailEnd type="none" w="med" len="med"/>
+                    </a:lnT>
+                    <a:lnB w="9525">
+                      <a:solidFill>
+                        <a:srgbClr val="D6D6D6"/>
+                      </a:solidFill>
+                    </a:lnB>
+                    <a:noFill/>
+                  </a:tcPr>
+                </a:tc>
+                <a:tc>
+                  <a:txBody>
+                    <a:bodyPr/>
+                    <a:lstStyle/>
+                    <a:p>
+                      <a:pPr algn="l"/>
+                      <a:r>
+                        <a:rPr lang="en-US" sz="800" noProof="1">
+                          <a:solidFill>
+                            <a:srgbClr val="3D3C3A"/>
+                          </a:solidFill>
+                          <a:latin typeface="微软雅黑" panose="020B0503020204020204" pitchFamily="34" charset="-122"/>
+                          <a:ea typeface="微软雅黑" panose="020B0503020204020204" pitchFamily="34" charset="-122"/>
+                        </a:rPr>
+                        <a:t>Dining Out</a:t>
+                      </a:r>
+                    </a:p>
+                  </a:txBody>
+                  <a:tcPr anchor="ctr">
+                    <a:lnL>
+                      <a:noFill/>
+                    </a:lnL>
+                    <a:lnR>
+                      <a:noFill/>
+                    </a:lnR>
+                    <a:lnT w="9525" cap="flat" cmpd="sng" algn="ctr">
+                      <a:solidFill>
+                        <a:srgbClr val="D6D6D6"/>
+                      </a:solidFill>
+                      <a:prstDash val="solid"/>
+                      <a:round/>
+                      <a:headEnd type="none" w="med" len="med"/>
+                      <a:tailEnd type="none" w="med" len="med"/>
+                    </a:lnT>
+                    <a:lnB w="9525">
+                      <a:solidFill>
+                        <a:srgbClr val="D6D6D6"/>
+                      </a:solidFill>
+                    </a:lnB>
+                    <a:noFill/>
+                  </a:tcPr>
+                </a:tc>
+                <a:extLst>
+                  <a:ext uri="{0D108BD9-81ED-4DB2-BD59-A6C34878D82A}">
+                    <a16:rowId xmlns:a16="http://schemas.microsoft.com/office/drawing/2014/main" val="10002"/>
+                  </a:ext>
+                </a:extLst>
+              </a:tr>
+              <a:tr h="173695">
+                <a:tc>
+                  <a:txBody>
+                    <a:bodyPr/>
+                    <a:lstStyle/>
+                    <a:p>
+                      <a:pPr algn="l"/>
+                      <a:r>
+                        <a:rPr lang="en-US" sz="800" b="1" noProof="1">
+                          <a:solidFill>
+                            <a:srgbClr val="0A0A0A"/>
+                          </a:solidFill>
+                          <a:latin typeface="微软雅黑" panose="020B0503020204020204" pitchFamily="34" charset="-122"/>
+                          <a:ea typeface="微软雅黑" panose="020B0503020204020204" pitchFamily="34" charset="-122"/>
+                        </a:rPr>
+                        <a:t>Netflix</a:t>
+                      </a:r>
+                    </a:p>
+                  </a:txBody>
+                  <a:tcPr anchor="ctr">
+                    <a:lnL>
+                      <a:noFill/>
+                    </a:lnL>
+                    <a:lnR>
+                      <a:noFill/>
+                    </a:lnR>
+                    <a:lnT w="9525" cap="flat" cmpd="sng" algn="ctr">
+                      <a:solidFill>
+                        <a:srgbClr val="D6D6D6"/>
+                      </a:solidFill>
+                      <a:prstDash val="solid"/>
+                      <a:round/>
+                      <a:headEnd type="none" w="med" len="med"/>
+                      <a:tailEnd type="none" w="med" len="med"/>
+                    </a:lnT>
+                    <a:lnB w="9525">
+                      <a:solidFill>
+                        <a:srgbClr val="D6D6D6"/>
+                      </a:solidFill>
+                    </a:lnB>
+                    <a:noFill/>
+                  </a:tcPr>
+                </a:tc>
+                <a:tc>
+                  <a:txBody>
+                    <a:bodyPr/>
+                    <a:lstStyle/>
+                    <a:p>
+                      <a:pPr algn="l"/>
+                      <a:r>
+                        <a:rPr lang="en-US" sz="800" noProof="1">
+                          <a:solidFill>
+                            <a:srgbClr val="3D3C3A"/>
+                          </a:solidFill>
+                          <a:latin typeface="微软雅黑" panose="020B0503020204020204" pitchFamily="34" charset="-122"/>
+                          <a:ea typeface="微软雅黑" panose="020B0503020204020204" pitchFamily="34" charset="-122"/>
+                        </a:rPr>
+                        <a:t>NETFLIX.COM、NETFLIX</a:t>
+                      </a:r>
+                    </a:p>
+                  </a:txBody>
+                  <a:tcPr anchor="ctr">
+                    <a:lnL>
+                      <a:noFill/>
+                    </a:lnL>
+                    <a:lnR>
+                      <a:noFill/>
+                    </a:lnR>
+                    <a:lnT w="9525" cap="flat" cmpd="sng" algn="ctr">
+                      <a:solidFill>
+                        <a:srgbClr val="D6D6D6"/>
+                      </a:solidFill>
+                      <a:prstDash val="solid"/>
+                      <a:round/>
+                      <a:headEnd type="none" w="med" len="med"/>
+                      <a:tailEnd type="none" w="med" len="med"/>
+                    </a:lnT>
+                    <a:lnB w="9525">
+                      <a:solidFill>
+                        <a:srgbClr val="D6D6D6"/>
+                      </a:solidFill>
+                    </a:lnB>
+                    <a:noFill/>
+                  </a:tcPr>
+                </a:tc>
+                <a:tc>
+                  <a:txBody>
+                    <a:bodyPr/>
+                    <a:lstStyle/>
+                    <a:p>
+                      <a:pPr algn="l"/>
+                      <a:r>
+                        <a:rPr lang="en-US" sz="800" noProof="1">
+                          <a:solidFill>
+                            <a:srgbClr val="3D3C3A"/>
+                          </a:solidFill>
+                          <a:latin typeface="微软雅黑" panose="020B0503020204020204" pitchFamily="34" charset="-122"/>
+                          <a:ea typeface="微软雅黑" panose="020B0503020204020204" pitchFamily="34" charset="-122"/>
+                        </a:rPr>
+                        <a:t>Subscription TV</a:t>
+                      </a:r>
+                    </a:p>
+                  </a:txBody>
+                  <a:tcPr anchor="ctr">
+                    <a:lnL>
+                      <a:noFill/>
+                    </a:lnL>
+                    <a:lnR>
+                      <a:noFill/>
+                    </a:lnR>
+                    <a:lnT w="9525" cap="flat" cmpd="sng" algn="ctr">
+                      <a:solidFill>
+                        <a:srgbClr val="D6D6D6"/>
+                      </a:solidFill>
+                      <a:prstDash val="solid"/>
+                      <a:round/>
+                      <a:headEnd type="none" w="med" len="med"/>
+                      <a:tailEnd type="none" w="med" len="med"/>
+                    </a:lnT>
+                    <a:lnB w="9525">
+                      <a:solidFill>
+                        <a:srgbClr val="D6D6D6"/>
+                      </a:solidFill>
+                    </a:lnB>
+                    <a:noFill/>
+                  </a:tcPr>
+                </a:tc>
+                <a:extLst>
+                  <a:ext uri="{0D108BD9-81ED-4DB2-BD59-A6C34878D82A}">
+                    <a16:rowId xmlns:a16="http://schemas.microsoft.com/office/drawing/2014/main" val="10003"/>
+                  </a:ext>
+                </a:extLst>
+              </a:tr>
+              <a:tr h="173695">
+                <a:tc>
+                  <a:txBody>
+                    <a:bodyPr/>
+                    <a:lstStyle/>
+                    <a:p>
+                      <a:pPr algn="l"/>
+                      <a:r>
+                        <a:rPr lang="en-US" sz="800" b="1" noProof="1">
+                          <a:solidFill>
+                            <a:srgbClr val="0A0A0A"/>
+                          </a:solidFill>
+                          <a:latin typeface="微软雅黑" panose="020B0503020204020204" pitchFamily="34" charset="-122"/>
+                          <a:ea typeface="微软雅黑" panose="020B0503020204020204" pitchFamily="34" charset="-122"/>
+                        </a:rPr>
+                        <a:t>Spotify</a:t>
+                      </a:r>
+                    </a:p>
+                  </a:txBody>
+                  <a:tcPr anchor="ctr">
+                    <a:lnL>
+                      <a:noFill/>
+                    </a:lnL>
+                    <a:lnR>
+                      <a:noFill/>
+                    </a:lnR>
+                    <a:lnT w="9525" cap="flat" cmpd="sng" algn="ctr">
+                      <a:solidFill>
+                        <a:srgbClr val="D6D6D6"/>
+                      </a:solidFill>
+                      <a:prstDash val="solid"/>
+                      <a:round/>
+                      <a:headEnd type="none" w="med" len="med"/>
+                      <a:tailEnd type="none" w="med" len="med"/>
+                    </a:lnT>
+                    <a:lnB w="9525">
+                      <a:solidFill>
+                        <a:srgbClr val="D6D6D6"/>
+                      </a:solidFill>
+                    </a:lnB>
+                    <a:noFill/>
+                  </a:tcPr>
+                </a:tc>
+                <a:tc>
+                  <a:txBody>
+                    <a:bodyPr/>
+                    <a:lstStyle/>
+                    <a:p>
+                      <a:pPr algn="l"/>
+                      <a:r>
+                        <a:rPr lang="en-US" sz="800" noProof="1">
+                          <a:solidFill>
+                            <a:srgbClr val="3D3C3A"/>
+                          </a:solidFill>
+                          <a:latin typeface="微软雅黑" panose="020B0503020204020204" pitchFamily="34" charset="-122"/>
+                          <a:ea typeface="微软雅黑" panose="020B0503020204020204" pitchFamily="34" charset="-122"/>
+                        </a:rPr>
+                        <a:t>SPOTIFY</a:t>
+                      </a:r>
+                    </a:p>
+                  </a:txBody>
+                  <a:tcPr anchor="ctr">
+                    <a:lnL>
+                      <a:noFill/>
+                    </a:lnL>
+                    <a:lnR>
+                      <a:noFill/>
+                    </a:lnR>
+                    <a:lnT w="9525" cap="flat" cmpd="sng" algn="ctr">
+                      <a:solidFill>
+                        <a:srgbClr val="D6D6D6"/>
+                      </a:solidFill>
+                      <a:prstDash val="solid"/>
+                      <a:round/>
+                      <a:headEnd type="none" w="med" len="med"/>
+                      <a:tailEnd type="none" w="med" len="med"/>
+                    </a:lnT>
+                    <a:lnB w="9525">
+                      <a:solidFill>
+                        <a:srgbClr val="D6D6D6"/>
+                      </a:solidFill>
+                    </a:lnB>
+                    <a:noFill/>
+                  </a:tcPr>
+                </a:tc>
+                <a:tc>
+                  <a:txBody>
+                    <a:bodyPr/>
+                    <a:lstStyle/>
+                    <a:p>
+                      <a:pPr algn="l"/>
+                      <a:r>
+                        <a:rPr lang="en-US" sz="800" noProof="1">
+                          <a:solidFill>
+                            <a:srgbClr val="3D3C3A"/>
+                          </a:solidFill>
+                          <a:latin typeface="微软雅黑" panose="020B0503020204020204" pitchFamily="34" charset="-122"/>
+                          <a:ea typeface="微软雅黑" panose="020B0503020204020204" pitchFamily="34" charset="-122"/>
+                        </a:rPr>
+                        <a:t>Entertainment</a:t>
+                      </a:r>
+                    </a:p>
+                  </a:txBody>
+                  <a:tcPr anchor="ctr">
+                    <a:lnL>
+                      <a:noFill/>
+                    </a:lnL>
+                    <a:lnR>
+                      <a:noFill/>
+                    </a:lnR>
+                    <a:lnT w="9525" cap="flat" cmpd="sng" algn="ctr">
+                      <a:solidFill>
+                        <a:srgbClr val="D6D6D6"/>
+                      </a:solidFill>
+                      <a:prstDash val="solid"/>
+                      <a:round/>
+                      <a:headEnd type="none" w="med" len="med"/>
+                      <a:tailEnd type="none" w="med" len="med"/>
+                    </a:lnT>
+                    <a:lnB w="9525">
+                      <a:solidFill>
+                        <a:srgbClr val="D6D6D6"/>
+                      </a:solidFill>
+                    </a:lnB>
+                    <a:noFill/>
+                  </a:tcPr>
+                </a:tc>
+                <a:extLst>
+                  <a:ext uri="{0D108BD9-81ED-4DB2-BD59-A6C34878D82A}">
+                    <a16:rowId xmlns:a16="http://schemas.microsoft.com/office/drawing/2014/main" val="10004"/>
+                  </a:ext>
+                </a:extLst>
+              </a:tr>
+              <a:tr h="173695">
+                <a:tc>
+                  <a:txBody>
+                    <a:bodyPr/>
+                    <a:lstStyle/>
+                    <a:p>
+                      <a:pPr algn="l"/>
+                      <a:r>
+                        <a:rPr lang="en-US" sz="800" b="1" noProof="1">
+                          <a:solidFill>
+                            <a:srgbClr val="0A0A0A"/>
+                          </a:solidFill>
+                          <a:latin typeface="微软雅黑" panose="020B0503020204020204" pitchFamily="34" charset="-122"/>
+                          <a:ea typeface="微软雅黑" panose="020B0503020204020204" pitchFamily="34" charset="-122"/>
+                        </a:rPr>
+                        <a:t>OpenAI</a:t>
+                      </a:r>
+                    </a:p>
+                  </a:txBody>
+                  <a:tcPr anchor="ctr">
+                    <a:lnL>
+                      <a:noFill/>
+                    </a:lnL>
+                    <a:lnR>
+                      <a:noFill/>
+                    </a:lnR>
+                    <a:lnT w="9525" cap="flat" cmpd="sng" algn="ctr">
+                      <a:solidFill>
+                        <a:srgbClr val="D6D6D6"/>
+                      </a:solidFill>
+                      <a:prstDash val="solid"/>
+                      <a:round/>
+                      <a:headEnd type="none" w="med" len="med"/>
+                      <a:tailEnd type="none" w="med" len="med"/>
+                    </a:lnT>
+                    <a:lnB w="9525">
+                      <a:solidFill>
+                        <a:srgbClr val="D6D6D6"/>
+                      </a:solidFill>
+                    </a:lnB>
+                    <a:noFill/>
+                  </a:tcPr>
+                </a:tc>
+                <a:tc>
+                  <a:txBody>
+                    <a:bodyPr/>
+                    <a:lstStyle/>
+                    <a:p>
+                      <a:pPr algn="l"/>
+                      <a:r>
+                        <a:rPr lang="en-US" sz="800" noProof="1">
+                          <a:solidFill>
+                            <a:srgbClr val="3D3C3A"/>
+                          </a:solidFill>
+                          <a:latin typeface="微软雅黑" panose="020B0503020204020204" pitchFamily="34" charset="-122"/>
+                          <a:ea typeface="微软雅黑" panose="020B0503020204020204" pitchFamily="34" charset="-122"/>
+                        </a:rPr>
+                        <a:t>OPENAI *CHATGPT</a:t>
+                      </a:r>
+                    </a:p>
+                  </a:txBody>
+                  <a:tcPr anchor="ctr">
+                    <a:lnL>
+                      <a:noFill/>
+                    </a:lnL>
+                    <a:lnR>
+                      <a:noFill/>
+                    </a:lnR>
+                    <a:lnT w="9525" cap="flat" cmpd="sng" algn="ctr">
+                      <a:solidFill>
+                        <a:srgbClr val="D6D6D6"/>
+                      </a:solidFill>
+                      <a:prstDash val="solid"/>
+                      <a:round/>
+                      <a:headEnd type="none" w="med" len="med"/>
+                      <a:tailEnd type="none" w="med" len="med"/>
+                    </a:lnT>
+                    <a:lnB w="9525">
+                      <a:solidFill>
+                        <a:srgbClr val="D6D6D6"/>
+                      </a:solidFill>
+                    </a:lnB>
+                    <a:noFill/>
+                  </a:tcPr>
+                </a:tc>
+                <a:tc>
+                  <a:txBody>
+                    <a:bodyPr/>
+                    <a:lstStyle/>
+                    <a:p>
+                      <a:pPr algn="l"/>
+                      <a:r>
+                        <a:rPr lang="en-US" sz="800" noProof="1">
+                          <a:solidFill>
+                            <a:srgbClr val="3D3C3A"/>
+                          </a:solidFill>
+                          <a:latin typeface="微软雅黑" panose="020B0503020204020204" pitchFamily="34" charset="-122"/>
+                          <a:ea typeface="微软雅黑" panose="020B0503020204020204" pitchFamily="34" charset="-122"/>
+                        </a:rPr>
+                        <a:t>Information</a:t>
+                      </a:r>
+                    </a:p>
+                  </a:txBody>
+                  <a:tcPr anchor="ctr">
+                    <a:lnL>
+                      <a:noFill/>
+                    </a:lnL>
+                    <a:lnR>
+                      <a:noFill/>
+                    </a:lnR>
+                    <a:lnT w="9525" cap="flat" cmpd="sng" algn="ctr">
+                      <a:solidFill>
+                        <a:srgbClr val="D6D6D6"/>
+                      </a:solidFill>
+                      <a:prstDash val="solid"/>
+                      <a:round/>
+                      <a:headEnd type="none" w="med" len="med"/>
+                      <a:tailEnd type="none" w="med" len="med"/>
+                    </a:lnT>
+                    <a:lnB w="9525">
+                      <a:solidFill>
+                        <a:srgbClr val="D6D6D6"/>
+                      </a:solidFill>
+                    </a:lnB>
+                    <a:noFill/>
+                  </a:tcPr>
+                </a:tc>
+                <a:extLst>
+                  <a:ext uri="{0D108BD9-81ED-4DB2-BD59-A6C34878D82A}">
+                    <a16:rowId xmlns:a16="http://schemas.microsoft.com/office/drawing/2014/main" val="10005"/>
+                  </a:ext>
+                </a:extLst>
+              </a:tr>
+            </a:tbl>
+          </a:graphicData>
+        </a:graphic>
+      </p:graphicFrame>
+      <p:sp>
+        <p:nvSpPr>
+          <p:cNvPr id="9" name="income-capsule">
+            <a:extLst>
+              <a:ext uri="{FF2B5EF4-FFF2-40B4-BE49-F238E27FC236}">
+                <a16:creationId xmlns:a16="http://schemas.microsoft.com/office/drawing/2014/main" id="{B4CB0565-A9AE-4A45-8F6A-44E49726E461}"/>
+              </a:ext>
+            </a:extLst>
+          </p:cNvPr>
+          <p:cNvSpPr/>
+          <p:nvPr/>
+        </p:nvSpPr>
+        <p:spPr>
+          <a:xfrm>
+            <a:off x="557541" y="3610392"/>
+            <a:ext cx="1295400" cy="228600"/>
+          </a:xfrm>
+          <a:prstGeom prst="roundRect">
+            <a:avLst>
+              <a:gd name="adj" fmla="val 50000"/>
+            </a:avLst>
+          </a:prstGeom>
+          <a:solidFill>
+            <a:srgbClr val="D6A000"/>
+          </a:solidFill>
+          <a:ln>
+            <a:noFill/>
+          </a:ln>
+        </p:spPr>
+        <p:txBody>
+          <a:bodyPr/>
+          <a:lstStyle/>
+          <a:p>
+            <a:endParaRPr/>
+          </a:p>
+        </p:txBody>
+      </p:sp>
+      <p:sp>
+        <p:nvSpPr>
+          <p:cNvPr id="10" name="income-capsule-text">
+            <a:extLst>
+              <a:ext uri="{FF2B5EF4-FFF2-40B4-BE49-F238E27FC236}">
+                <a16:creationId xmlns:a16="http://schemas.microsoft.com/office/drawing/2014/main" id="{3B41C0CB-B265-49B8-8346-7A67CD243C57}"/>
+              </a:ext>
+            </a:extLst>
+          </p:cNvPr>
+          <p:cNvSpPr txBox="1"/>
+          <p:nvPr/>
+        </p:nvSpPr>
+        <p:spPr>
+          <a:xfrm>
+            <a:off x="557541" y="3610392"/>
+            <a:ext cx="1295400" cy="228600"/>
+          </a:xfrm>
+          <a:prstGeom prst="rect">
+            <a:avLst/>
+          </a:prstGeom>
+          <a:noFill/>
+          <a:ln>
+            <a:noFill/>
+          </a:ln>
+        </p:spPr>
+        <p:txBody>
+          <a:bodyPr wrap="none" lIns="0" tIns="0" rIns="0" bIns="0" rtlCol="0" anchor="ctr"/>
+          <a:lstStyle/>
+          <a:p>
+            <a:pPr algn="ctr">
+              <a:lnSpc>
+                <a:spcPct val="120000"/>
+              </a:lnSpc>
+            </a:pPr>
+            <a:r>
+              <a:rPr lang="zh-CN" altLang="en-US" sz="1050" b="1" noProof="1">
+                <a:solidFill>
+                  <a:srgbClr val="FFFFFF"/>
+                </a:solidFill>
+                <a:latin typeface="微软雅黑" panose="020B0503020204020204" pitchFamily="34" charset="-122"/>
+                <a:ea typeface="微软雅黑" panose="020B0503020204020204" pitchFamily="34" charset="-122"/>
+              </a:rPr>
+              <a:t>收入识别库</a:t>
+            </a:r>
+            <a:endParaRPr lang="en-US" altLang="zh-CN" sz="1050" noProof="1">
+              <a:latin typeface="微软雅黑" panose="020B0503020204020204" pitchFamily="34" charset="-122"/>
+              <a:ea typeface="微软雅黑" panose="020B0503020204020204" pitchFamily="34" charset="-122"/>
+            </a:endParaRPr>
+          </a:p>
+        </p:txBody>
+      </p:sp>
+      <p:graphicFrame>
+        <p:nvGraphicFramePr>
+          <p:cNvPr id="11" name="income-table">
+            <a:extLst>
+              <a:ext uri="{FF2B5EF4-FFF2-40B4-BE49-F238E27FC236}">
+                <a16:creationId xmlns:a16="http://schemas.microsoft.com/office/drawing/2014/main" id="{437DE33D-539A-4A03-AC67-AB16184E7F7A}"/>
+              </a:ext>
+            </a:extLst>
+          </p:cNvPr>
+          <p:cNvGraphicFramePr>
+            <a:graphicFrameLocks noGrp="1"/>
+          </p:cNvGraphicFramePr>
+          <p:nvPr>
+            <p:extLst>
+              <p:ext uri="{D42A27DB-BD31-4B8C-83A1-F6EECF244321}">
+                <p14:modId xmlns:p14="http://schemas.microsoft.com/office/powerpoint/2010/main" val="850780107"/>
+              </p:ext>
+            </p:extLst>
+          </p:nvPr>
+        </p:nvGraphicFramePr>
+        <p:xfrm>
+          <a:off x="541547" y="3918704"/>
+          <a:ext cx="5222483" cy="1066800"/>
+        </p:xfrm>
+        <a:graphic>
+          <a:graphicData uri="http://schemas.openxmlformats.org/drawingml/2006/table">
+            <a:tbl>
+              <a:tblPr/>
+              <a:tblGrid>
+                <a:gridCol w="1252461">
+                  <a:extLst>
+                    <a:ext uri="{9D8B030D-6E8A-4147-A177-3AD203B41FA5}">
+                      <a16:colId xmlns:a16="http://schemas.microsoft.com/office/drawing/2014/main" val="20000"/>
+                    </a:ext>
+                  </a:extLst>
+                </a:gridCol>
+                <a:gridCol w="1875202">
+                  <a:extLst>
+                    <a:ext uri="{9D8B030D-6E8A-4147-A177-3AD203B41FA5}">
+                      <a16:colId xmlns:a16="http://schemas.microsoft.com/office/drawing/2014/main" val="20001"/>
+                    </a:ext>
+                  </a:extLst>
+                </a:gridCol>
+                <a:gridCol w="2094820">
+                  <a:extLst>
+                    <a:ext uri="{9D8B030D-6E8A-4147-A177-3AD203B41FA5}">
+                      <a16:colId xmlns:a16="http://schemas.microsoft.com/office/drawing/2014/main" val="20002"/>
+                    </a:ext>
+                  </a:extLst>
+                </a:gridCol>
+              </a:tblGrid>
+              <a:tr h="184136">
+                <a:tc>
+                  <a:txBody>
+                    <a:bodyPr/>
+                    <a:lstStyle/>
+                    <a:p>
+                      <a:pPr algn="l"/>
+                      <a:r>
+                        <a:rPr lang="en-US" sz="800" b="1" noProof="1">
+                          <a:solidFill>
+                            <a:srgbClr val="0A0A0A"/>
+                          </a:solidFill>
+                          <a:latin typeface="微软雅黑" panose="020B0503020204020204" pitchFamily="34" charset="-122"/>
+                          <a:ea typeface="微软雅黑" panose="020B0503020204020204" pitchFamily="34" charset="-122"/>
+                        </a:rPr>
+                        <a:t>场景</a:t>
+                      </a:r>
+                    </a:p>
+                  </a:txBody>
+                  <a:tcPr anchor="ctr">
+                    <a:lnL>
+                      <a:noFill/>
+                    </a:lnL>
+                    <a:lnR>
+                      <a:noFill/>
+                    </a:lnR>
+                    <a:lnT>
+                      <a:noFill/>
+                    </a:lnT>
+                    <a:lnB w="19050">
+                      <a:solidFill>
+                        <a:srgbClr val="0A0A0A"/>
+                      </a:solidFill>
+                    </a:lnB>
+                    <a:noFill/>
+                  </a:tcPr>
+                </a:tc>
+                <a:tc>
+                  <a:txBody>
+                    <a:bodyPr/>
+                    <a:lstStyle/>
+                    <a:p>
+                      <a:pPr algn="l"/>
+                      <a:r>
+                        <a:rPr lang="en-US" sz="800" b="1" noProof="1">
+                          <a:solidFill>
+                            <a:srgbClr val="0A0A0A"/>
+                          </a:solidFill>
+                          <a:latin typeface="微软雅黑" panose="020B0503020204020204" pitchFamily="34" charset="-122"/>
+                          <a:ea typeface="微软雅黑" panose="020B0503020204020204" pitchFamily="34" charset="-122"/>
+                        </a:rPr>
+                        <a:t>交易描述与线索</a:t>
+                      </a:r>
+                    </a:p>
+                  </a:txBody>
+                  <a:tcPr anchor="ctr">
+                    <a:lnL>
+                      <a:noFill/>
+                    </a:lnL>
+                    <a:lnR>
+                      <a:noFill/>
+                    </a:lnR>
+                    <a:lnT>
+                      <a:noFill/>
+                    </a:lnT>
+                    <a:lnB w="19050">
+                      <a:solidFill>
+                        <a:srgbClr val="0A0A0A"/>
+                      </a:solidFill>
+                    </a:lnB>
+                    <a:noFill/>
+                  </a:tcPr>
+                </a:tc>
+                <a:tc>
+                  <a:txBody>
+                    <a:bodyPr/>
+                    <a:lstStyle/>
+                    <a:p>
+                      <a:pPr algn="l"/>
+                      <a:r>
+                        <a:rPr lang="en-US" sz="800" b="1" noProof="1">
+                          <a:solidFill>
+                            <a:srgbClr val="0A0A0A"/>
+                          </a:solidFill>
+                          <a:latin typeface="微软雅黑" panose="020B0503020204020204" pitchFamily="34" charset="-122"/>
+                          <a:ea typeface="微软雅黑" panose="020B0503020204020204" pitchFamily="34" charset="-122"/>
+                        </a:rPr>
+                        <a:t>命中的知识</a:t>
+                      </a:r>
+                    </a:p>
+                  </a:txBody>
+                  <a:tcPr anchor="ctr">
+                    <a:lnL>
+                      <a:noFill/>
+                    </a:lnL>
+                    <a:lnR>
+                      <a:noFill/>
+                    </a:lnR>
+                    <a:lnT>
+                      <a:noFill/>
+                    </a:lnT>
+                    <a:lnB w="19050">
+                      <a:solidFill>
+                        <a:srgbClr val="0A0A0A"/>
+                      </a:solidFill>
+                    </a:lnB>
+                    <a:noFill/>
+                  </a:tcPr>
+                </a:tc>
+                <a:extLst>
+                  <a:ext uri="{0D108BD9-81ED-4DB2-BD59-A6C34878D82A}">
+                    <a16:rowId xmlns:a16="http://schemas.microsoft.com/office/drawing/2014/main" val="10000"/>
+                  </a:ext>
+                </a:extLst>
+              </a:tr>
+              <a:tr h="210935">
+                <a:tc>
+                  <a:txBody>
+                    <a:bodyPr/>
+                    <a:lstStyle/>
+                    <a:p>
+                      <a:pPr algn="l"/>
+                      <a:r>
+                        <a:rPr lang="en-US" sz="800" b="1" noProof="1">
+                          <a:solidFill>
+                            <a:srgbClr val="0A0A0A"/>
+                          </a:solidFill>
+                          <a:latin typeface="微软雅黑" panose="020B0503020204020204" pitchFamily="34" charset="-122"/>
+                          <a:ea typeface="微软雅黑" panose="020B0503020204020204" pitchFamily="34" charset="-122"/>
+                        </a:rPr>
+                        <a:t>普通工资</a:t>
+                      </a:r>
+                    </a:p>
+                  </a:txBody>
+                  <a:tcPr anchor="ctr">
+                    <a:lnL>
+                      <a:noFill/>
+                    </a:lnL>
+                    <a:lnR>
+                      <a:noFill/>
+                    </a:lnR>
+                    <a:lnT w="19050" cap="flat" cmpd="sng" algn="ctr">
+                      <a:solidFill>
+                        <a:srgbClr val="0A0A0A"/>
+                      </a:solidFill>
+                      <a:prstDash val="solid"/>
+                      <a:round/>
+                      <a:headEnd type="none" w="med" len="med"/>
+                      <a:tailEnd type="none" w="med" len="med"/>
+                    </a:lnT>
+                    <a:lnB w="9525">
+                      <a:solidFill>
+                        <a:srgbClr val="D6D6D6"/>
+                      </a:solidFill>
+                    </a:lnB>
+                    <a:noFill/>
+                  </a:tcPr>
+                </a:tc>
+                <a:tc>
+                  <a:txBody>
+                    <a:bodyPr/>
+                    <a:lstStyle/>
+                    <a:p>
+                      <a:pPr algn="l"/>
+                      <a:r>
+                        <a:rPr lang="en-US" sz="800" noProof="1">
+                          <a:solidFill>
+                            <a:srgbClr val="3D3C3A"/>
+                          </a:solidFill>
+                          <a:latin typeface="微软雅黑" panose="020B0503020204020204" pitchFamily="34" charset="-122"/>
+                          <a:ea typeface="微软雅黑" panose="020B0503020204020204" pitchFamily="34" charset="-122"/>
+                        </a:rPr>
+                        <a:t>PAYROLL ACME 双周入账</a:t>
+                      </a:r>
+                    </a:p>
+                  </a:txBody>
+                  <a:tcPr anchor="ctr">
+                    <a:lnL>
+                      <a:noFill/>
+                    </a:lnL>
+                    <a:lnR>
+                      <a:noFill/>
+                    </a:lnR>
+                    <a:lnT w="19050" cap="flat" cmpd="sng" algn="ctr">
+                      <a:solidFill>
+                        <a:srgbClr val="0A0A0A"/>
+                      </a:solidFill>
+                      <a:prstDash val="solid"/>
+                      <a:round/>
+                      <a:headEnd type="none" w="med" len="med"/>
+                      <a:tailEnd type="none" w="med" len="med"/>
+                    </a:lnT>
+                    <a:lnB w="9525">
+                      <a:solidFill>
+                        <a:srgbClr val="D6D6D6"/>
+                      </a:solidFill>
+                    </a:lnB>
+                    <a:noFill/>
+                  </a:tcPr>
+                </a:tc>
+                <a:tc>
+                  <a:txBody>
+                    <a:bodyPr/>
+                    <a:lstStyle/>
+                    <a:p>
+                      <a:pPr algn="l"/>
+                      <a:r>
+                        <a:rPr lang="en-US" sz="800" noProof="1">
+                          <a:solidFill>
+                            <a:srgbClr val="3D3C3A"/>
+                          </a:solidFill>
+                          <a:latin typeface="微软雅黑" panose="020B0503020204020204" pitchFamily="34" charset="-122"/>
+                          <a:ea typeface="微软雅黑" panose="020B0503020204020204" pitchFamily="34" charset="-122"/>
+                        </a:rPr>
+                        <a:t>Payroll 模式＋周期＋稳定阈值</a:t>
+                      </a:r>
+                    </a:p>
+                  </a:txBody>
+                  <a:tcPr anchor="ctr">
+                    <a:lnL>
+                      <a:noFill/>
+                    </a:lnL>
+                    <a:lnR>
+                      <a:noFill/>
+                    </a:lnR>
+                    <a:lnT w="19050" cap="flat" cmpd="sng" algn="ctr">
+                      <a:solidFill>
+                        <a:srgbClr val="0A0A0A"/>
+                      </a:solidFill>
+                      <a:prstDash val="solid"/>
+                      <a:round/>
+                      <a:headEnd type="none" w="med" len="med"/>
+                      <a:tailEnd type="none" w="med" len="med"/>
+                    </a:lnT>
+                    <a:lnB w="9525">
+                      <a:solidFill>
+                        <a:srgbClr val="D6D6D6"/>
+                      </a:solidFill>
+                    </a:lnB>
+                    <a:noFill/>
+                  </a:tcPr>
+                </a:tc>
+                <a:extLst>
+                  <a:ext uri="{0D108BD9-81ED-4DB2-BD59-A6C34878D82A}">
+                    <a16:rowId xmlns:a16="http://schemas.microsoft.com/office/drawing/2014/main" val="10001"/>
+                  </a:ext>
+                </a:extLst>
+              </a:tr>
+              <a:tr h="210935">
+                <a:tc>
+                  <a:txBody>
+                    <a:bodyPr/>
+                    <a:lstStyle/>
+                    <a:p>
+                      <a:pPr algn="l"/>
+                      <a:r>
+                        <a:rPr lang="en-US" sz="800" b="1" noProof="1">
+                          <a:solidFill>
+                            <a:srgbClr val="0A0A0A"/>
+                          </a:solidFill>
+                          <a:latin typeface="微软雅黑" panose="020B0503020204020204" pitchFamily="34" charset="-122"/>
+                          <a:ea typeface="微软雅黑" panose="020B0503020204020204" pitchFamily="34" charset="-122"/>
+                        </a:rPr>
+                        <a:t>薪酬包装</a:t>
+                      </a:r>
+                    </a:p>
+                  </a:txBody>
+                  <a:tcPr anchor="ctr">
+                    <a:lnL>
+                      <a:noFill/>
+                    </a:lnL>
+                    <a:lnR>
+                      <a:noFill/>
+                    </a:lnR>
+                    <a:lnT w="9525" cap="flat" cmpd="sng" algn="ctr">
+                      <a:solidFill>
+                        <a:srgbClr val="D6D6D6"/>
+                      </a:solidFill>
+                      <a:prstDash val="solid"/>
+                      <a:round/>
+                      <a:headEnd type="none" w="med" len="med"/>
+                      <a:tailEnd type="none" w="med" len="med"/>
+                    </a:lnT>
+                    <a:lnB w="9525">
+                      <a:solidFill>
+                        <a:srgbClr val="D6D6D6"/>
+                      </a:solidFill>
+                    </a:lnB>
+                    <a:noFill/>
+                  </a:tcPr>
+                </a:tc>
+                <a:tc>
+                  <a:txBody>
+                    <a:bodyPr/>
+                    <a:lstStyle/>
+                    <a:p>
+                      <a:pPr algn="l"/>
+                      <a:r>
+                        <a:rPr lang="en-US" sz="800" noProof="1">
+                          <a:solidFill>
+                            <a:srgbClr val="3D3C3A"/>
+                          </a:solidFill>
+                          <a:latin typeface="微软雅黑" panose="020B0503020204020204" pitchFamily="34" charset="-122"/>
+                          <a:ea typeface="微软雅黑" panose="020B0503020204020204" pitchFamily="34" charset="-122"/>
+                        </a:rPr>
+                        <a:t>SALARY PACKAGING ...</a:t>
+                      </a:r>
+                    </a:p>
+                  </a:txBody>
+                  <a:tcPr anchor="ctr">
+                    <a:lnL>
+                      <a:noFill/>
+                    </a:lnL>
+                    <a:lnR>
+                      <a:noFill/>
+                    </a:lnR>
+                    <a:lnT w="9525" cap="flat" cmpd="sng" algn="ctr">
+                      <a:solidFill>
+                        <a:srgbClr val="D6D6D6"/>
+                      </a:solidFill>
+                      <a:prstDash val="solid"/>
+                      <a:round/>
+                      <a:headEnd type="none" w="med" len="med"/>
+                      <a:tailEnd type="none" w="med" len="med"/>
+                    </a:lnT>
+                    <a:lnB w="9525">
+                      <a:solidFill>
+                        <a:srgbClr val="D6D6D6"/>
+                      </a:solidFill>
+                    </a:lnB>
+                    <a:noFill/>
+                  </a:tcPr>
+                </a:tc>
+                <a:tc>
+                  <a:txBody>
+                    <a:bodyPr/>
+                    <a:lstStyle/>
+                    <a:p>
+                      <a:pPr algn="l"/>
+                      <a:r>
+                        <a:rPr lang="en-US" sz="800" noProof="1">
+                          <a:solidFill>
+                            <a:srgbClr val="3D3C3A"/>
+                          </a:solidFill>
+                          <a:latin typeface="微软雅黑" panose="020B0503020204020204" pitchFamily="34" charset="-122"/>
+                          <a:ea typeface="微软雅黑" panose="020B0503020204020204" pitchFamily="34" charset="-122"/>
+                        </a:rPr>
+                        <a:t>薪酬包装模式优先于普通工资</a:t>
+                      </a:r>
+                    </a:p>
+                  </a:txBody>
+                  <a:tcPr anchor="ctr">
+                    <a:lnL>
+                      <a:noFill/>
+                    </a:lnL>
+                    <a:lnR>
+                      <a:noFill/>
+                    </a:lnR>
+                    <a:lnT w="9525" cap="flat" cmpd="sng" algn="ctr">
+                      <a:solidFill>
+                        <a:srgbClr val="D6D6D6"/>
+                      </a:solidFill>
+                      <a:prstDash val="solid"/>
+                      <a:round/>
+                      <a:headEnd type="none" w="med" len="med"/>
+                      <a:tailEnd type="none" w="med" len="med"/>
+                    </a:lnT>
+                    <a:lnB w="9525">
+                      <a:solidFill>
+                        <a:srgbClr val="D6D6D6"/>
+                      </a:solidFill>
+                    </a:lnB>
+                    <a:noFill/>
+                  </a:tcPr>
+                </a:tc>
+                <a:extLst>
+                  <a:ext uri="{0D108BD9-81ED-4DB2-BD59-A6C34878D82A}">
+                    <a16:rowId xmlns:a16="http://schemas.microsoft.com/office/drawing/2014/main" val="10002"/>
+                  </a:ext>
+                </a:extLst>
+              </a:tr>
+              <a:tr h="210935">
+                <a:tc>
+                  <a:txBody>
+                    <a:bodyPr/>
+                    <a:lstStyle/>
+                    <a:p>
+                      <a:pPr algn="l"/>
+                      <a:r>
+                        <a:rPr lang="en-US" sz="800" b="1" noProof="1">
+                          <a:solidFill>
+                            <a:srgbClr val="0A0A0A"/>
+                          </a:solidFill>
+                          <a:latin typeface="微软雅黑" panose="020B0503020204020204" pitchFamily="34" charset="-122"/>
+                          <a:ea typeface="微软雅黑" panose="020B0503020204020204" pitchFamily="34" charset="-122"/>
+                        </a:rPr>
+                        <a:t>政府补助</a:t>
+                      </a:r>
+                    </a:p>
+                  </a:txBody>
+                  <a:tcPr anchor="ctr">
+                    <a:lnL>
+                      <a:noFill/>
+                    </a:lnL>
+                    <a:lnR>
+                      <a:noFill/>
+                    </a:lnR>
+                    <a:lnT w="9525" cap="flat" cmpd="sng" algn="ctr">
+                      <a:solidFill>
+                        <a:srgbClr val="D6D6D6"/>
+                      </a:solidFill>
+                      <a:prstDash val="solid"/>
+                      <a:round/>
+                      <a:headEnd type="none" w="med" len="med"/>
+                      <a:tailEnd type="none" w="med" len="med"/>
+                    </a:lnT>
+                    <a:lnB w="9525">
+                      <a:solidFill>
+                        <a:srgbClr val="D6D6D6"/>
+                      </a:solidFill>
+                    </a:lnB>
+                    <a:noFill/>
+                  </a:tcPr>
+                </a:tc>
+                <a:tc>
+                  <a:txBody>
+                    <a:bodyPr/>
+                    <a:lstStyle/>
+                    <a:p>
+                      <a:pPr algn="l"/>
+                      <a:r>
+                        <a:rPr lang="en-US" sz="800" noProof="1">
+                          <a:solidFill>
+                            <a:srgbClr val="3D3C3A"/>
+                          </a:solidFill>
+                          <a:latin typeface="微软雅黑" panose="020B0503020204020204" pitchFamily="34" charset="-122"/>
+                          <a:ea typeface="微软雅黑" panose="020B0503020204020204" pitchFamily="34" charset="-122"/>
+                        </a:rPr>
+                        <a:t>CENTRELINK ...</a:t>
+                      </a:r>
+                    </a:p>
+                  </a:txBody>
+                  <a:tcPr anchor="ctr">
+                    <a:lnL>
+                      <a:noFill/>
+                    </a:lnL>
+                    <a:lnR>
+                      <a:noFill/>
+                    </a:lnR>
+                    <a:lnT w="9525" cap="flat" cmpd="sng" algn="ctr">
+                      <a:solidFill>
+                        <a:srgbClr val="D6D6D6"/>
+                      </a:solidFill>
+                      <a:prstDash val="solid"/>
+                      <a:round/>
+                      <a:headEnd type="none" w="med" len="med"/>
+                      <a:tailEnd type="none" w="med" len="med"/>
+                    </a:lnT>
+                    <a:lnB w="9525">
+                      <a:solidFill>
+                        <a:srgbClr val="D6D6D6"/>
+                      </a:solidFill>
+                    </a:lnB>
+                    <a:noFill/>
+                  </a:tcPr>
+                </a:tc>
+                <a:tc>
+                  <a:txBody>
+                    <a:bodyPr/>
+                    <a:lstStyle/>
+                    <a:p>
+                      <a:pPr algn="l"/>
+                      <a:r>
+                        <a:rPr lang="en-US" sz="800" noProof="1">
+                          <a:solidFill>
+                            <a:srgbClr val="3D3C3A"/>
+                          </a:solidFill>
+                          <a:latin typeface="微软雅黑" panose="020B0503020204020204" pitchFamily="34" charset="-122"/>
+                          <a:ea typeface="微软雅黑" panose="020B0503020204020204" pitchFamily="34" charset="-122"/>
+                        </a:rPr>
+                        <a:t>Centrelink 专项模式</a:t>
+                      </a:r>
+                    </a:p>
+                  </a:txBody>
+                  <a:tcPr anchor="ctr">
+                    <a:lnL>
+                      <a:noFill/>
+                    </a:lnL>
+                    <a:lnR>
+                      <a:noFill/>
+                    </a:lnR>
+                    <a:lnT w="9525" cap="flat" cmpd="sng" algn="ctr">
+                      <a:solidFill>
+                        <a:srgbClr val="D6D6D6"/>
+                      </a:solidFill>
+                      <a:prstDash val="solid"/>
+                      <a:round/>
+                      <a:headEnd type="none" w="med" len="med"/>
+                      <a:tailEnd type="none" w="med" len="med"/>
+                    </a:lnT>
+                    <a:lnB w="9525">
+                      <a:solidFill>
+                        <a:srgbClr val="D6D6D6"/>
+                      </a:solidFill>
+                    </a:lnB>
+                    <a:noFill/>
+                  </a:tcPr>
+                </a:tc>
+                <a:extLst>
+                  <a:ext uri="{0D108BD9-81ED-4DB2-BD59-A6C34878D82A}">
+                    <a16:rowId xmlns:a16="http://schemas.microsoft.com/office/drawing/2014/main" val="10003"/>
+                  </a:ext>
+                </a:extLst>
+              </a:tr>
+              <a:tr h="210935">
+                <a:tc>
+                  <a:txBody>
+                    <a:bodyPr/>
+                    <a:lstStyle/>
+                    <a:p>
+                      <a:pPr algn="l"/>
+                      <a:r>
+                        <a:rPr lang="en-US" sz="800" b="1" noProof="1">
+                          <a:solidFill>
+                            <a:srgbClr val="0A0A0A"/>
+                          </a:solidFill>
+                          <a:latin typeface="微软雅黑" panose="020B0503020204020204" pitchFamily="34" charset="-122"/>
+                          <a:ea typeface="微软雅黑" panose="020B0503020204020204" pitchFamily="34" charset="-122"/>
+                        </a:rPr>
+                        <a:t>零工收入</a:t>
+                      </a:r>
+                    </a:p>
+                  </a:txBody>
+                  <a:tcPr anchor="ctr">
+                    <a:lnL>
+                      <a:noFill/>
+                    </a:lnL>
+                    <a:lnR>
+                      <a:noFill/>
+                    </a:lnR>
+                    <a:lnT w="9525" cap="flat" cmpd="sng" algn="ctr">
+                      <a:solidFill>
+                        <a:srgbClr val="D6D6D6"/>
+                      </a:solidFill>
+                      <a:prstDash val="solid"/>
+                      <a:round/>
+                      <a:headEnd type="none" w="med" len="med"/>
+                      <a:tailEnd type="none" w="med" len="med"/>
+                    </a:lnT>
+                    <a:lnB w="9525">
+                      <a:solidFill>
+                        <a:srgbClr val="D6D6D6"/>
+                      </a:solidFill>
+                    </a:lnB>
+                    <a:noFill/>
+                  </a:tcPr>
+                </a:tc>
+                <a:tc>
+                  <a:txBody>
+                    <a:bodyPr/>
+                    <a:lstStyle/>
+                    <a:p>
+                      <a:pPr algn="l"/>
+                      <a:r>
+                        <a:rPr lang="en-US" sz="800" noProof="1">
+                          <a:solidFill>
+                            <a:srgbClr val="3D3C3A"/>
+                          </a:solidFill>
+                          <a:latin typeface="微软雅黑" panose="020B0503020204020204" pitchFamily="34" charset="-122"/>
+                          <a:ea typeface="微软雅黑" panose="020B0503020204020204" pitchFamily="34" charset="-122"/>
+                        </a:rPr>
+                        <a:t>UBER 入账，无退款信号</a:t>
+                      </a:r>
+                    </a:p>
+                  </a:txBody>
+                  <a:tcPr anchor="ctr">
+                    <a:lnL>
+                      <a:noFill/>
+                    </a:lnL>
+                    <a:lnR>
+                      <a:noFill/>
+                    </a:lnR>
+                    <a:lnT w="9525" cap="flat" cmpd="sng" algn="ctr">
+                      <a:solidFill>
+                        <a:srgbClr val="D6D6D6"/>
+                      </a:solidFill>
+                      <a:prstDash val="solid"/>
+                      <a:round/>
+                      <a:headEnd type="none" w="med" len="med"/>
+                      <a:tailEnd type="none" w="med" len="med"/>
+                    </a:lnT>
+                    <a:lnB w="9525">
+                      <a:solidFill>
+                        <a:srgbClr val="D6D6D6"/>
+                      </a:solidFill>
+                    </a:lnB>
+                    <a:noFill/>
+                  </a:tcPr>
+                </a:tc>
+                <a:tc>
+                  <a:txBody>
+                    <a:bodyPr/>
+                    <a:lstStyle/>
+                    <a:p>
+                      <a:pPr algn="l"/>
+                      <a:r>
+                        <a:rPr lang="en-US" sz="800" noProof="1">
+                          <a:solidFill>
+                            <a:srgbClr val="3D3C3A"/>
+                          </a:solidFill>
+                          <a:latin typeface="微软雅黑" panose="020B0503020204020204" pitchFamily="34" charset="-122"/>
+                          <a:ea typeface="微软雅黑" panose="020B0503020204020204" pitchFamily="34" charset="-122"/>
+                        </a:rPr>
+                        <a:t>零工模式＋入账方向＋排除规则</a:t>
+                      </a:r>
+                    </a:p>
+                  </a:txBody>
+                  <a:tcPr anchor="ctr">
+                    <a:lnL>
+                      <a:noFill/>
+                    </a:lnL>
+                    <a:lnR>
+                      <a:noFill/>
+                    </a:lnR>
+                    <a:lnT w="9525" cap="flat" cmpd="sng" algn="ctr">
+                      <a:solidFill>
+                        <a:srgbClr val="D6D6D6"/>
+                      </a:solidFill>
+                      <a:prstDash val="solid"/>
+                      <a:round/>
+                      <a:headEnd type="none" w="med" len="med"/>
+                      <a:tailEnd type="none" w="med" len="med"/>
+                    </a:lnT>
+                    <a:lnB w="9525">
+                      <a:solidFill>
+                        <a:srgbClr val="D6D6D6"/>
+                      </a:solidFill>
+                    </a:lnB>
+                    <a:noFill/>
+                  </a:tcPr>
+                </a:tc>
+                <a:extLst>
+                  <a:ext uri="{0D108BD9-81ED-4DB2-BD59-A6C34878D82A}">
+                    <a16:rowId xmlns:a16="http://schemas.microsoft.com/office/drawing/2014/main" val="10004"/>
+                  </a:ext>
+                </a:extLst>
+              </a:tr>
+            </a:tbl>
+          </a:graphicData>
+        </a:graphic>
+      </p:graphicFrame>
+      <p:sp>
+        <p:nvSpPr>
+          <p:cNvPr id="13" name="liab-capsule">
+            <a:extLst>
+              <a:ext uri="{FF2B5EF4-FFF2-40B4-BE49-F238E27FC236}">
+                <a16:creationId xmlns:a16="http://schemas.microsoft.com/office/drawing/2014/main" id="{A571CED0-8DA4-453B-8B62-551D2F39A966}"/>
+              </a:ext>
+            </a:extLst>
+          </p:cNvPr>
+          <p:cNvSpPr/>
+          <p:nvPr/>
+        </p:nvSpPr>
+        <p:spPr>
+          <a:xfrm>
+            <a:off x="511115" y="5015663"/>
+            <a:ext cx="1295400" cy="228600"/>
+          </a:xfrm>
+          <a:prstGeom prst="roundRect">
+            <a:avLst>
+              <a:gd name="adj" fmla="val 50000"/>
+            </a:avLst>
+          </a:prstGeom>
+          <a:solidFill>
+            <a:srgbClr val="D6A000"/>
+          </a:solidFill>
+          <a:ln>
+            <a:noFill/>
+          </a:ln>
+        </p:spPr>
+        <p:txBody>
+          <a:bodyPr/>
+          <a:lstStyle/>
+          <a:p>
+            <a:endParaRPr/>
+          </a:p>
+        </p:txBody>
+      </p:sp>
+      <p:sp>
+        <p:nvSpPr>
+          <p:cNvPr id="14" name="liab-capsule-text">
+            <a:extLst>
+              <a:ext uri="{FF2B5EF4-FFF2-40B4-BE49-F238E27FC236}">
+                <a16:creationId xmlns:a16="http://schemas.microsoft.com/office/drawing/2014/main" id="{671DCB91-F81B-448D-8287-02975156DBAA}"/>
+              </a:ext>
+            </a:extLst>
+          </p:cNvPr>
+          <p:cNvSpPr txBox="1"/>
+          <p:nvPr/>
+        </p:nvSpPr>
+        <p:spPr>
+          <a:xfrm>
+            <a:off x="511115" y="5015663"/>
+            <a:ext cx="1295400" cy="228600"/>
+          </a:xfrm>
+          <a:prstGeom prst="rect">
+            <a:avLst/>
+          </a:prstGeom>
+          <a:noFill/>
+          <a:ln>
+            <a:noFill/>
+          </a:ln>
+        </p:spPr>
+        <p:txBody>
+          <a:bodyPr wrap="none" lIns="0" tIns="0" rIns="0" bIns="0" rtlCol="0" anchor="ctr"/>
+          <a:lstStyle/>
+          <a:p>
+            <a:pPr algn="ctr">
+              <a:lnSpc>
+                <a:spcPct val="120000"/>
+              </a:lnSpc>
+            </a:pPr>
+            <a:r>
+              <a:rPr lang="zh-CN" altLang="en-US" sz="1050" b="1" noProof="1">
+                <a:solidFill>
+                  <a:srgbClr val="FFFFFF"/>
+                </a:solidFill>
+                <a:latin typeface="微软雅黑" panose="020B0503020204020204" pitchFamily="34" charset="-122"/>
+                <a:ea typeface="微软雅黑" panose="020B0503020204020204" pitchFamily="34" charset="-122"/>
+              </a:rPr>
+              <a:t>贷款识别库</a:t>
+            </a:r>
+            <a:endParaRPr lang="en-US" altLang="zh-CN" sz="1050" noProof="1">
+              <a:latin typeface="微软雅黑" panose="020B0503020204020204" pitchFamily="34" charset="-122"/>
+              <a:ea typeface="微软雅黑" panose="020B0503020204020204" pitchFamily="34" charset="-122"/>
+            </a:endParaRPr>
+          </a:p>
+        </p:txBody>
+      </p:sp>
+      <p:graphicFrame>
+        <p:nvGraphicFramePr>
+          <p:cNvPr id="15" name="liab-table">
+            <a:extLst>
+              <a:ext uri="{FF2B5EF4-FFF2-40B4-BE49-F238E27FC236}">
+                <a16:creationId xmlns:a16="http://schemas.microsoft.com/office/drawing/2014/main" id="{D9D16F0A-2CA9-444A-9C30-0D63C131C933}"/>
+              </a:ext>
+            </a:extLst>
+          </p:cNvPr>
+          <p:cNvGraphicFramePr>
+            <a:graphicFrameLocks noGrp="1"/>
+          </p:cNvGraphicFramePr>
+          <p:nvPr>
+            <p:extLst>
+              <p:ext uri="{D42A27DB-BD31-4B8C-83A1-F6EECF244321}">
+                <p14:modId xmlns:p14="http://schemas.microsoft.com/office/powerpoint/2010/main" val="3351406915"/>
+              </p:ext>
+            </p:extLst>
+          </p:nvPr>
+        </p:nvGraphicFramePr>
+        <p:xfrm>
+          <a:off x="511115" y="5244263"/>
+          <a:ext cx="5540237" cy="1426464"/>
+        </p:xfrm>
+        <a:graphic>
+          <a:graphicData uri="http://schemas.openxmlformats.org/drawingml/2006/table">
+            <a:tbl>
+              <a:tblPr/>
+              <a:tblGrid>
+                <a:gridCol w="1627753">
+                  <a:extLst>
+                    <a:ext uri="{9D8B030D-6E8A-4147-A177-3AD203B41FA5}">
+                      <a16:colId xmlns:a16="http://schemas.microsoft.com/office/drawing/2014/main" val="20000"/>
+                    </a:ext>
+                  </a:extLst>
+                </a:gridCol>
+                <a:gridCol w="1651632">
+                  <a:extLst>
+                    <a:ext uri="{9D8B030D-6E8A-4147-A177-3AD203B41FA5}">
+                      <a16:colId xmlns:a16="http://schemas.microsoft.com/office/drawing/2014/main" val="20001"/>
+                    </a:ext>
+                  </a:extLst>
+                </a:gridCol>
+                <a:gridCol w="2260852">
+                  <a:extLst>
+                    <a:ext uri="{9D8B030D-6E8A-4147-A177-3AD203B41FA5}">
+                      <a16:colId xmlns:a16="http://schemas.microsoft.com/office/drawing/2014/main" val="20002"/>
+                    </a:ext>
+                  </a:extLst>
+                </a:gridCol>
+              </a:tblGrid>
+              <a:tr h="237744">
+                <a:tc>
+                  <a:txBody>
+                    <a:bodyPr/>
+                    <a:lstStyle/>
+                    <a:p>
+                      <a:pPr algn="l"/>
+                      <a:r>
+                        <a:rPr lang="en-US" sz="800" b="1" noProof="1">
+                          <a:solidFill>
+                            <a:srgbClr val="0A0A0A"/>
+                          </a:solidFill>
+                          <a:latin typeface="微软雅黑" panose="020B0503020204020204" pitchFamily="34" charset="-122"/>
+                          <a:ea typeface="微软雅黑" panose="020B0503020204020204" pitchFamily="34" charset="-122"/>
+                        </a:rPr>
+                        <a:t>知识库／场景</a:t>
+                      </a:r>
+                    </a:p>
+                  </a:txBody>
+                  <a:tcPr anchor="ctr">
+                    <a:lnL>
+                      <a:noFill/>
+                    </a:lnL>
+                    <a:lnR>
+                      <a:noFill/>
+                    </a:lnR>
+                    <a:lnT>
+                      <a:noFill/>
+                    </a:lnT>
+                    <a:lnB w="19050">
+                      <a:solidFill>
+                        <a:srgbClr val="0A0A0A"/>
+                      </a:solidFill>
+                    </a:lnB>
+                    <a:noFill/>
+                  </a:tcPr>
+                </a:tc>
+                <a:tc>
+                  <a:txBody>
+                    <a:bodyPr/>
+                    <a:lstStyle/>
+                    <a:p>
+                      <a:pPr algn="l"/>
+                      <a:r>
+                        <a:rPr lang="en-US" sz="800" b="1" noProof="1">
+                          <a:solidFill>
+                            <a:srgbClr val="0A0A0A"/>
+                          </a:solidFill>
+                          <a:latin typeface="微软雅黑" panose="020B0503020204020204" pitchFamily="34" charset="-122"/>
+                          <a:ea typeface="微软雅黑" panose="020B0503020204020204" pitchFamily="34" charset="-122"/>
+                        </a:rPr>
+                        <a:t>交易描述示例</a:t>
+                      </a:r>
+                    </a:p>
+                  </a:txBody>
+                  <a:tcPr anchor="ctr">
+                    <a:lnL>
+                      <a:noFill/>
+                    </a:lnL>
+                    <a:lnR>
+                      <a:noFill/>
+                    </a:lnR>
+                    <a:lnT>
+                      <a:noFill/>
+                    </a:lnT>
+                    <a:lnB w="19050">
+                      <a:solidFill>
+                        <a:srgbClr val="0A0A0A"/>
+                      </a:solidFill>
+                    </a:lnB>
+                    <a:noFill/>
+                  </a:tcPr>
+                </a:tc>
+                <a:tc>
+                  <a:txBody>
+                    <a:bodyPr/>
+                    <a:lstStyle/>
+                    <a:p>
+                      <a:pPr algn="l"/>
+                      <a:r>
+                        <a:rPr lang="en-US" altLang="zh-CN" sz="800" b="1" noProof="1">
+                          <a:solidFill>
+                            <a:srgbClr val="0A0A0A"/>
+                          </a:solidFill>
+                          <a:latin typeface="微软雅黑" panose="020B0503020204020204" pitchFamily="34" charset="-122"/>
+                          <a:ea typeface="微软雅黑" panose="020B0503020204020204" pitchFamily="34" charset="-122"/>
+                        </a:rPr>
+                        <a:t>命中的知识</a:t>
+                      </a:r>
+                    </a:p>
+                  </a:txBody>
+                  <a:tcPr anchor="ctr">
+                    <a:lnL>
+                      <a:noFill/>
+                    </a:lnL>
+                    <a:lnR>
+                      <a:noFill/>
+                    </a:lnR>
+                    <a:lnT>
+                      <a:noFill/>
+                    </a:lnT>
+                    <a:lnB w="19050">
+                      <a:solidFill>
+                        <a:srgbClr val="0A0A0A"/>
+                      </a:solidFill>
+                    </a:lnB>
+                    <a:noFill/>
+                  </a:tcPr>
+                </a:tc>
+                <a:extLst>
+                  <a:ext uri="{0D108BD9-81ED-4DB2-BD59-A6C34878D82A}">
+                    <a16:rowId xmlns:a16="http://schemas.microsoft.com/office/drawing/2014/main" val="10000"/>
+                  </a:ext>
+                </a:extLst>
+              </a:tr>
+              <a:tr h="237744">
+                <a:tc>
+                  <a:txBody>
+                    <a:bodyPr/>
+                    <a:lstStyle/>
+                    <a:p>
+                      <a:pPr algn="l"/>
+                      <a:r>
+                        <a:rPr lang="en-US" sz="800" b="1" noProof="1">
+                          <a:solidFill>
+                            <a:srgbClr val="0A0A0A"/>
+                          </a:solidFill>
+                          <a:latin typeface="微软雅黑" panose="020B0503020204020204" pitchFamily="34" charset="-122"/>
+                          <a:ea typeface="微软雅黑" panose="020B0503020204020204" pitchFamily="34" charset="-122"/>
+                        </a:rPr>
+                        <a:t>BNPL 对手库</a:t>
+                      </a:r>
+                    </a:p>
+                  </a:txBody>
+                  <a:tcPr anchor="ctr">
+                    <a:lnL>
+                      <a:noFill/>
+                    </a:lnL>
+                    <a:lnR>
+                      <a:noFill/>
+                    </a:lnR>
+                    <a:lnT w="19050" cap="flat" cmpd="sng" algn="ctr">
+                      <a:solidFill>
+                        <a:srgbClr val="0A0A0A"/>
+                      </a:solidFill>
+                      <a:prstDash val="solid"/>
+                      <a:round/>
+                      <a:headEnd type="none" w="med" len="med"/>
+                      <a:tailEnd type="none" w="med" len="med"/>
+                    </a:lnT>
+                    <a:lnB w="9525">
+                      <a:solidFill>
+                        <a:srgbClr val="D6D6D6"/>
+                      </a:solidFill>
+                    </a:lnB>
+                    <a:noFill/>
+                  </a:tcPr>
+                </a:tc>
+                <a:tc>
+                  <a:txBody>
+                    <a:bodyPr/>
+                    <a:lstStyle/>
+                    <a:p>
+                      <a:pPr algn="l"/>
+                      <a:r>
+                        <a:rPr lang="en-US" sz="800" noProof="1">
+                          <a:solidFill>
+                            <a:srgbClr val="3D3C3A"/>
+                          </a:solidFill>
+                          <a:latin typeface="微软雅黑" panose="020B0503020204020204" pitchFamily="34" charset="-122"/>
+                          <a:ea typeface="微软雅黑" panose="020B0503020204020204" pitchFamily="34" charset="-122"/>
+                        </a:rPr>
+                        <a:t>DIRECT DEBIT AFTERPAY</a:t>
+                      </a:r>
+                    </a:p>
+                  </a:txBody>
+                  <a:tcPr anchor="ctr">
+                    <a:lnL>
+                      <a:noFill/>
+                    </a:lnL>
+                    <a:lnR>
+                      <a:noFill/>
+                    </a:lnR>
+                    <a:lnT w="19050" cap="flat" cmpd="sng" algn="ctr">
+                      <a:solidFill>
+                        <a:srgbClr val="0A0A0A"/>
+                      </a:solidFill>
+                      <a:prstDash val="solid"/>
+                      <a:round/>
+                      <a:headEnd type="none" w="med" len="med"/>
+                      <a:tailEnd type="none" w="med" len="med"/>
+                    </a:lnT>
+                    <a:lnB w="9525">
+                      <a:solidFill>
+                        <a:srgbClr val="D6D6D6"/>
+                      </a:solidFill>
+                    </a:lnB>
+                    <a:noFill/>
+                  </a:tcPr>
+                </a:tc>
+                <a:tc>
+                  <a:txBody>
+                    <a:bodyPr/>
+                    <a:lstStyle/>
+                    <a:p>
+                      <a:pPr algn="l"/>
+                      <a:r>
+                        <a:rPr lang="en-US" sz="800" noProof="1">
+                          <a:solidFill>
+                            <a:srgbClr val="3D3C3A"/>
+                          </a:solidFill>
+                          <a:latin typeface="微软雅黑" panose="020B0503020204020204" pitchFamily="34" charset="-122"/>
+                          <a:ea typeface="微软雅黑" panose="020B0503020204020204" pitchFamily="34" charset="-122"/>
+                        </a:rPr>
+                        <a:t>BNPL 交易对手关键词</a:t>
+                      </a:r>
+                    </a:p>
+                  </a:txBody>
+                  <a:tcPr anchor="ctr">
+                    <a:lnL>
+                      <a:noFill/>
+                    </a:lnL>
+                    <a:lnR>
+                      <a:noFill/>
+                    </a:lnR>
+                    <a:lnT w="19050" cap="flat" cmpd="sng" algn="ctr">
+                      <a:solidFill>
+                        <a:srgbClr val="0A0A0A"/>
+                      </a:solidFill>
+                      <a:prstDash val="solid"/>
+                      <a:round/>
+                      <a:headEnd type="none" w="med" len="med"/>
+                      <a:tailEnd type="none" w="med" len="med"/>
+                    </a:lnT>
+                    <a:lnB w="9525">
+                      <a:solidFill>
+                        <a:srgbClr val="D6D6D6"/>
+                      </a:solidFill>
+                    </a:lnB>
+                    <a:noFill/>
+                  </a:tcPr>
+                </a:tc>
+                <a:extLst>
+                  <a:ext uri="{0D108BD9-81ED-4DB2-BD59-A6C34878D82A}">
+                    <a16:rowId xmlns:a16="http://schemas.microsoft.com/office/drawing/2014/main" val="10001"/>
+                  </a:ext>
+                </a:extLst>
+              </a:tr>
+              <a:tr h="237744">
+                <a:tc>
+                  <a:txBody>
+                    <a:bodyPr/>
+                    <a:lstStyle/>
+                    <a:p>
+                      <a:pPr algn="l"/>
+                      <a:r>
+                        <a:rPr lang="en-US" sz="800" b="1" noProof="1">
+                          <a:solidFill>
+                            <a:srgbClr val="0A0A0A"/>
+                          </a:solidFill>
+                          <a:latin typeface="微软雅黑" panose="020B0503020204020204" pitchFamily="34" charset="-122"/>
+                          <a:ea typeface="微软雅黑" panose="020B0503020204020204" pitchFamily="34" charset="-122"/>
+                        </a:rPr>
+                        <a:t>信用卡规则库</a:t>
+                      </a:r>
+                    </a:p>
+                  </a:txBody>
+                  <a:tcPr anchor="ctr">
+                    <a:lnL>
+                      <a:noFill/>
+                    </a:lnL>
+                    <a:lnR>
+                      <a:noFill/>
+                    </a:lnR>
+                    <a:lnT w="9525" cap="flat" cmpd="sng" algn="ctr">
+                      <a:solidFill>
+                        <a:srgbClr val="D6D6D6"/>
+                      </a:solidFill>
+                      <a:prstDash val="solid"/>
+                      <a:round/>
+                      <a:headEnd type="none" w="med" len="med"/>
+                      <a:tailEnd type="none" w="med" len="med"/>
+                    </a:lnT>
+                    <a:lnB w="9525">
+                      <a:solidFill>
+                        <a:srgbClr val="D6D6D6"/>
+                      </a:solidFill>
+                    </a:lnB>
+                    <a:noFill/>
+                  </a:tcPr>
+                </a:tc>
+                <a:tc>
+                  <a:txBody>
+                    <a:bodyPr/>
+                    <a:lstStyle/>
+                    <a:p>
+                      <a:pPr algn="l"/>
+                      <a:r>
+                        <a:rPr lang="en-US" sz="800" noProof="1">
+                          <a:solidFill>
+                            <a:srgbClr val="3D3C3A"/>
+                          </a:solidFill>
+                          <a:latin typeface="微软雅黑" panose="020B0503020204020204" pitchFamily="34" charset="-122"/>
+                          <a:ea typeface="微软雅黑" panose="020B0503020204020204" pitchFamily="34" charset="-122"/>
+                        </a:rPr>
+                        <a:t>BPAY ... ANZ CARDS</a:t>
+                      </a:r>
+                    </a:p>
+                  </a:txBody>
+                  <a:tcPr anchor="ctr">
+                    <a:lnL>
+                      <a:noFill/>
+                    </a:lnL>
+                    <a:lnR>
+                      <a:noFill/>
+                    </a:lnR>
+                    <a:lnT w="9525" cap="flat" cmpd="sng" algn="ctr">
+                      <a:solidFill>
+                        <a:srgbClr val="D6D6D6"/>
+                      </a:solidFill>
+                      <a:prstDash val="solid"/>
+                      <a:round/>
+                      <a:headEnd type="none" w="med" len="med"/>
+                      <a:tailEnd type="none" w="med" len="med"/>
+                    </a:lnT>
+                    <a:lnB w="9525">
+                      <a:solidFill>
+                        <a:srgbClr val="D6D6D6"/>
+                      </a:solidFill>
+                    </a:lnB>
+                    <a:noFill/>
+                  </a:tcPr>
+                </a:tc>
+                <a:tc>
+                  <a:txBody>
+                    <a:bodyPr/>
+                    <a:lstStyle/>
+                    <a:p>
+                      <a:pPr algn="l"/>
+                      <a:r>
+                        <a:rPr lang="en-US" sz="800" noProof="1">
+                          <a:solidFill>
+                            <a:srgbClr val="3D3C3A"/>
+                          </a:solidFill>
+                          <a:latin typeface="微软雅黑" panose="020B0503020204020204" pitchFamily="34" charset="-122"/>
+                          <a:ea typeface="微软雅黑" panose="020B0503020204020204" pitchFamily="34" charset="-122"/>
+                        </a:rPr>
+                        <a:t>银行、账户类型、方向与文本共同匹配</a:t>
+                      </a:r>
+                    </a:p>
+                  </a:txBody>
+                  <a:tcPr anchor="ctr">
+                    <a:lnL>
+                      <a:noFill/>
+                    </a:lnL>
+                    <a:lnR>
+                      <a:noFill/>
+                    </a:lnR>
+                    <a:lnT w="9525" cap="flat" cmpd="sng" algn="ctr">
+                      <a:solidFill>
+                        <a:srgbClr val="D6D6D6"/>
+                      </a:solidFill>
+                      <a:prstDash val="solid"/>
+                      <a:round/>
+                      <a:headEnd type="none" w="med" len="med"/>
+                      <a:tailEnd type="none" w="med" len="med"/>
+                    </a:lnT>
+                    <a:lnB w="9525">
+                      <a:solidFill>
+                        <a:srgbClr val="D6D6D6"/>
+                      </a:solidFill>
+                    </a:lnB>
+                    <a:noFill/>
+                  </a:tcPr>
+                </a:tc>
+                <a:extLst>
+                  <a:ext uri="{0D108BD9-81ED-4DB2-BD59-A6C34878D82A}">
+                    <a16:rowId xmlns:a16="http://schemas.microsoft.com/office/drawing/2014/main" val="10002"/>
+                  </a:ext>
+                </a:extLst>
+              </a:tr>
+              <a:tr h="237744">
+                <a:tc>
+                  <a:txBody>
+                    <a:bodyPr/>
+                    <a:lstStyle/>
+                    <a:p>
+                      <a:pPr algn="l"/>
+                      <a:r>
+                        <a:rPr lang="en-US" sz="800" b="1" noProof="1">
+                          <a:solidFill>
+                            <a:srgbClr val="0A0A0A"/>
+                          </a:solidFill>
+                          <a:latin typeface="微软雅黑" panose="020B0503020204020204" pitchFamily="34" charset="-122"/>
+                          <a:ea typeface="微软雅黑" panose="020B0503020204020204" pitchFamily="34" charset="-122"/>
+                        </a:rPr>
+                        <a:t>房贷规则库</a:t>
+                      </a:r>
+                    </a:p>
+                  </a:txBody>
+                  <a:tcPr anchor="ctr">
+                    <a:lnL>
+                      <a:noFill/>
+                    </a:lnL>
+                    <a:lnR>
+                      <a:noFill/>
+                    </a:lnR>
+                    <a:lnT w="9525" cap="flat" cmpd="sng" algn="ctr">
+                      <a:solidFill>
+                        <a:srgbClr val="D6D6D6"/>
+                      </a:solidFill>
+                      <a:prstDash val="solid"/>
+                      <a:round/>
+                      <a:headEnd type="none" w="med" len="med"/>
+                      <a:tailEnd type="none" w="med" len="med"/>
+                    </a:lnT>
+                    <a:lnB w="9525">
+                      <a:solidFill>
+                        <a:srgbClr val="D6D6D6"/>
+                      </a:solidFill>
+                    </a:lnB>
+                    <a:noFill/>
+                  </a:tcPr>
+                </a:tc>
+                <a:tc>
+                  <a:txBody>
+                    <a:bodyPr/>
+                    <a:lstStyle/>
+                    <a:p>
+                      <a:pPr algn="l"/>
+                      <a:r>
+                        <a:rPr lang="en-US" sz="800" noProof="1">
+                          <a:solidFill>
+                            <a:srgbClr val="3D3C3A"/>
+                          </a:solidFill>
+                          <a:latin typeface="微软雅黑" panose="020B0503020204020204" pitchFamily="34" charset="-122"/>
+                          <a:ea typeface="微软雅黑" panose="020B0503020204020204" pitchFamily="34" charset="-122"/>
+                        </a:rPr>
+                        <a:t>MORTGAGE REPAYMENT</a:t>
+                      </a:r>
+                    </a:p>
+                  </a:txBody>
+                  <a:tcPr anchor="ctr">
+                    <a:lnL>
+                      <a:noFill/>
+                    </a:lnL>
+                    <a:lnR>
+                      <a:noFill/>
+                    </a:lnR>
+                    <a:lnT w="9525" cap="flat" cmpd="sng" algn="ctr">
+                      <a:solidFill>
+                        <a:srgbClr val="D6D6D6"/>
+                      </a:solidFill>
+                      <a:prstDash val="solid"/>
+                      <a:round/>
+                      <a:headEnd type="none" w="med" len="med"/>
+                      <a:tailEnd type="none" w="med" len="med"/>
+                    </a:lnT>
+                    <a:lnB w="9525">
+                      <a:solidFill>
+                        <a:srgbClr val="D6D6D6"/>
+                      </a:solidFill>
+                    </a:lnB>
+                    <a:noFill/>
+                  </a:tcPr>
+                </a:tc>
+                <a:tc>
+                  <a:txBody>
+                    <a:bodyPr/>
+                    <a:lstStyle/>
+                    <a:p>
+                      <a:pPr algn="l"/>
+                      <a:r>
+                        <a:rPr lang="en-US" sz="800" noProof="1">
+                          <a:solidFill>
+                            <a:srgbClr val="3D3C3A"/>
+                          </a:solidFill>
+                          <a:latin typeface="微软雅黑" panose="020B0503020204020204" pitchFamily="34" charset="-122"/>
+                          <a:ea typeface="微软雅黑" panose="020B0503020204020204" pitchFamily="34" charset="-122"/>
+                        </a:rPr>
+                        <a:t>Mortgage、Home Loan 关键词</a:t>
+                      </a:r>
+                    </a:p>
+                  </a:txBody>
+                  <a:tcPr anchor="ctr">
+                    <a:lnL>
+                      <a:noFill/>
+                    </a:lnL>
+                    <a:lnR>
+                      <a:noFill/>
+                    </a:lnR>
+                    <a:lnT w="9525" cap="flat" cmpd="sng" algn="ctr">
+                      <a:solidFill>
+                        <a:srgbClr val="D6D6D6"/>
+                      </a:solidFill>
+                      <a:prstDash val="solid"/>
+                      <a:round/>
+                      <a:headEnd type="none" w="med" len="med"/>
+                      <a:tailEnd type="none" w="med" len="med"/>
+                    </a:lnT>
+                    <a:lnB w="9525">
+                      <a:solidFill>
+                        <a:srgbClr val="D6D6D6"/>
+                      </a:solidFill>
+                    </a:lnB>
+                    <a:noFill/>
+                  </a:tcPr>
+                </a:tc>
+                <a:extLst>
+                  <a:ext uri="{0D108BD9-81ED-4DB2-BD59-A6C34878D82A}">
+                    <a16:rowId xmlns:a16="http://schemas.microsoft.com/office/drawing/2014/main" val="10003"/>
+                  </a:ext>
+                </a:extLst>
+              </a:tr>
+              <a:tr h="237744">
+                <a:tc>
+                  <a:txBody>
+                    <a:bodyPr/>
+                    <a:lstStyle/>
+                    <a:p>
+                      <a:pPr algn="l"/>
+                      <a:r>
+                        <a:rPr lang="en-US" sz="800" b="1" noProof="1">
+                          <a:solidFill>
+                            <a:srgbClr val="0A0A0A"/>
+                          </a:solidFill>
+                          <a:latin typeface="微软雅黑" panose="020B0503020204020204" pitchFamily="34" charset="-122"/>
+                          <a:ea typeface="微软雅黑" panose="020B0503020204020204" pitchFamily="34" charset="-122"/>
+                        </a:rPr>
+                        <a:t>车贷规则库</a:t>
+                      </a:r>
+                    </a:p>
+                  </a:txBody>
+                  <a:tcPr anchor="ctr">
+                    <a:lnL>
+                      <a:noFill/>
+                    </a:lnL>
+                    <a:lnR>
+                      <a:noFill/>
+                    </a:lnR>
+                    <a:lnT w="9525" cap="flat" cmpd="sng" algn="ctr">
+                      <a:solidFill>
+                        <a:srgbClr val="D6D6D6"/>
+                      </a:solidFill>
+                      <a:prstDash val="solid"/>
+                      <a:round/>
+                      <a:headEnd type="none" w="med" len="med"/>
+                      <a:tailEnd type="none" w="med" len="med"/>
+                    </a:lnT>
+                    <a:lnB w="9525">
+                      <a:solidFill>
+                        <a:srgbClr val="D6D6D6"/>
+                      </a:solidFill>
+                    </a:lnB>
+                    <a:noFill/>
+                  </a:tcPr>
+                </a:tc>
+                <a:tc>
+                  <a:txBody>
+                    <a:bodyPr/>
+                    <a:lstStyle/>
+                    <a:p>
+                      <a:pPr algn="l"/>
+                      <a:r>
+                        <a:rPr lang="en-US" sz="800" noProof="1">
+                          <a:solidFill>
+                            <a:srgbClr val="3D3C3A"/>
+                          </a:solidFill>
+                          <a:latin typeface="微软雅黑" panose="020B0503020204020204" pitchFamily="34" charset="-122"/>
+                          <a:ea typeface="微软雅黑" panose="020B0503020204020204" pitchFamily="34" charset="-122"/>
+                        </a:rPr>
+                        <a:t>车贷机构或专用描述扣款</a:t>
+                      </a:r>
+                    </a:p>
+                  </a:txBody>
+                  <a:tcPr anchor="ctr">
+                    <a:lnL>
+                      <a:noFill/>
+                    </a:lnL>
+                    <a:lnR>
+                      <a:noFill/>
+                    </a:lnR>
+                    <a:lnT w="9525" cap="flat" cmpd="sng" algn="ctr">
+                      <a:solidFill>
+                        <a:srgbClr val="D6D6D6"/>
+                      </a:solidFill>
+                      <a:prstDash val="solid"/>
+                      <a:round/>
+                      <a:headEnd type="none" w="med" len="med"/>
+                      <a:tailEnd type="none" w="med" len="med"/>
+                    </a:lnT>
+                    <a:lnB w="9525">
+                      <a:solidFill>
+                        <a:srgbClr val="D6D6D6"/>
+                      </a:solidFill>
+                    </a:lnB>
+                    <a:noFill/>
+                  </a:tcPr>
+                </a:tc>
+                <a:tc>
+                  <a:txBody>
+                    <a:bodyPr/>
+                    <a:lstStyle/>
+                    <a:p>
+                      <a:pPr algn="l"/>
+                      <a:r>
+                        <a:rPr lang="en-US" sz="800" noProof="1">
+                          <a:solidFill>
+                            <a:srgbClr val="3D3C3A"/>
+                          </a:solidFill>
+                          <a:latin typeface="微软雅黑" panose="020B0503020204020204" pitchFamily="34" charset="-122"/>
+                          <a:ea typeface="微软雅黑" panose="020B0503020204020204" pitchFamily="34" charset="-122"/>
+                        </a:rPr>
+                        <a:t>车贷标记＋交易对手规则</a:t>
+                      </a:r>
+                    </a:p>
+                  </a:txBody>
+                  <a:tcPr anchor="ctr">
+                    <a:lnL>
+                      <a:noFill/>
+                    </a:lnL>
+                    <a:lnR>
+                      <a:noFill/>
+                    </a:lnR>
+                    <a:lnT w="9525" cap="flat" cmpd="sng" algn="ctr">
+                      <a:solidFill>
+                        <a:srgbClr val="D6D6D6"/>
+                      </a:solidFill>
+                      <a:prstDash val="solid"/>
+                      <a:round/>
+                      <a:headEnd type="none" w="med" len="med"/>
+                      <a:tailEnd type="none" w="med" len="med"/>
+                    </a:lnT>
+                    <a:lnB w="9525">
+                      <a:solidFill>
+                        <a:srgbClr val="D6D6D6"/>
+                      </a:solidFill>
+                    </a:lnB>
+                    <a:noFill/>
+                  </a:tcPr>
+                </a:tc>
+                <a:extLst>
+                  <a:ext uri="{0D108BD9-81ED-4DB2-BD59-A6C34878D82A}">
+                    <a16:rowId xmlns:a16="http://schemas.microsoft.com/office/drawing/2014/main" val="10004"/>
+                  </a:ext>
+                </a:extLst>
+              </a:tr>
+              <a:tr h="237744">
+                <a:tc>
+                  <a:txBody>
+                    <a:bodyPr/>
+                    <a:lstStyle/>
+                    <a:p>
+                      <a:pPr algn="l"/>
+                      <a:r>
+                        <a:rPr lang="en-US" sz="800" b="1" noProof="1">
+                          <a:solidFill>
+                            <a:srgbClr val="0A0A0A"/>
+                          </a:solidFill>
+                          <a:latin typeface="微软雅黑" panose="020B0503020204020204" pitchFamily="34" charset="-122"/>
+                          <a:ea typeface="微软雅黑" panose="020B0503020204020204" pitchFamily="34" charset="-122"/>
+                        </a:rPr>
+                        <a:t>催收／债务整合</a:t>
+                      </a:r>
+                    </a:p>
+                  </a:txBody>
+                  <a:tcPr anchor="ctr">
+                    <a:lnL>
+                      <a:noFill/>
+                    </a:lnL>
+                    <a:lnR>
+                      <a:noFill/>
+                    </a:lnR>
+                    <a:lnT w="9525" cap="flat" cmpd="sng" algn="ctr">
+                      <a:solidFill>
+                        <a:srgbClr val="D6D6D6"/>
+                      </a:solidFill>
+                      <a:prstDash val="solid"/>
+                      <a:round/>
+                      <a:headEnd type="none" w="med" len="med"/>
+                      <a:tailEnd type="none" w="med" len="med"/>
+                    </a:lnT>
+                    <a:lnB w="9525">
+                      <a:solidFill>
+                        <a:srgbClr val="D6D6D6"/>
+                      </a:solidFill>
+                    </a:lnB>
+                    <a:noFill/>
+                  </a:tcPr>
+                </a:tc>
+                <a:tc>
+                  <a:txBody>
+                    <a:bodyPr/>
+                    <a:lstStyle/>
+                    <a:p>
+                      <a:pPr algn="l"/>
+                      <a:r>
+                        <a:rPr lang="en-US" sz="800" noProof="1">
+                          <a:solidFill>
+                            <a:srgbClr val="3D3C3A"/>
+                          </a:solidFill>
+                          <a:latin typeface="微软雅黑" panose="020B0503020204020204" pitchFamily="34" charset="-122"/>
+                          <a:ea typeface="微软雅黑" panose="020B0503020204020204" pitchFamily="34" charset="-122"/>
+                        </a:rPr>
+                        <a:t>已知催收机构或整合描述</a:t>
+                      </a:r>
+                    </a:p>
+                  </a:txBody>
+                  <a:tcPr anchor="ctr">
+                    <a:lnL>
+                      <a:noFill/>
+                    </a:lnL>
+                    <a:lnR>
+                      <a:noFill/>
+                    </a:lnR>
+                    <a:lnT w="9525" cap="flat" cmpd="sng" algn="ctr">
+                      <a:solidFill>
+                        <a:srgbClr val="D6D6D6"/>
+                      </a:solidFill>
+                      <a:prstDash val="solid"/>
+                      <a:round/>
+                      <a:headEnd type="none" w="med" len="med"/>
+                      <a:tailEnd type="none" w="med" len="med"/>
+                    </a:lnT>
+                    <a:lnB w="9525">
+                      <a:solidFill>
+                        <a:srgbClr val="D6D6D6"/>
+                      </a:solidFill>
+                    </a:lnB>
+                    <a:noFill/>
+                  </a:tcPr>
+                </a:tc>
+                <a:tc>
+                  <a:txBody>
+                    <a:bodyPr/>
+                    <a:lstStyle/>
+                    <a:p>
+                      <a:pPr algn="l"/>
+                      <a:r>
+                        <a:rPr lang="en-US" sz="800" noProof="1">
+                          <a:solidFill>
+                            <a:srgbClr val="3D3C3A"/>
+                          </a:solidFill>
+                          <a:latin typeface="微软雅黑" panose="020B0503020204020204" pitchFamily="34" charset="-122"/>
+                          <a:ea typeface="微软雅黑" panose="020B0503020204020204" pitchFamily="34" charset="-122"/>
+                        </a:rPr>
+                        <a:t>催收、整合关键词与专项标记</a:t>
+                      </a:r>
+                    </a:p>
+                  </a:txBody>
+                  <a:tcPr anchor="ctr">
+                    <a:lnL>
+                      <a:noFill/>
+                    </a:lnL>
+                    <a:lnR>
+                      <a:noFill/>
+                    </a:lnR>
+                    <a:lnT w="9525" cap="flat" cmpd="sng" algn="ctr">
+                      <a:solidFill>
+                        <a:srgbClr val="D6D6D6"/>
+                      </a:solidFill>
+                      <a:prstDash val="solid"/>
+                      <a:round/>
+                      <a:headEnd type="none" w="med" len="med"/>
+                      <a:tailEnd type="none" w="med" len="med"/>
+                    </a:lnT>
+                    <a:lnB w="9525">
+                      <a:solidFill>
+                        <a:srgbClr val="D6D6D6"/>
+                      </a:solidFill>
+                    </a:lnB>
+                    <a:noFill/>
+                  </a:tcPr>
+                </a:tc>
+                <a:extLst>
+                  <a:ext uri="{0D108BD9-81ED-4DB2-BD59-A6C34878D82A}">
+                    <a16:rowId xmlns:a16="http://schemas.microsoft.com/office/drawing/2014/main" val="10005"/>
+                  </a:ext>
+                </a:extLst>
+              </a:tr>
+            </a:tbl>
+          </a:graphicData>
+        </a:graphic>
+      </p:graphicFrame>
+      <p:sp>
+        <p:nvSpPr>
+          <p:cNvPr id="23" name="income-capsule">
+            <a:extLst>
+              <a:ext uri="{FF2B5EF4-FFF2-40B4-BE49-F238E27FC236}">
+                <a16:creationId xmlns:a16="http://schemas.microsoft.com/office/drawing/2014/main" id="{CFEC0F35-840B-44A5-BDAF-0D56EDB6D11F}"/>
+              </a:ext>
+            </a:extLst>
+          </p:cNvPr>
+          <p:cNvSpPr/>
+          <p:nvPr/>
+        </p:nvSpPr>
+        <p:spPr>
+          <a:xfrm>
+            <a:off x="541547" y="2003724"/>
+            <a:ext cx="1295400" cy="228600"/>
+          </a:xfrm>
+          <a:prstGeom prst="roundRect">
+            <a:avLst>
+              <a:gd name="adj" fmla="val 50000"/>
+            </a:avLst>
+          </a:prstGeom>
+          <a:solidFill>
+            <a:srgbClr val="D6A000"/>
+          </a:solidFill>
+          <a:ln>
+            <a:noFill/>
+          </a:ln>
+        </p:spPr>
+        <p:txBody>
+          <a:bodyPr/>
+          <a:lstStyle/>
+          <a:p>
+            <a:endParaRPr/>
+          </a:p>
+        </p:txBody>
+      </p:sp>
+      <p:sp>
+        <p:nvSpPr>
+          <p:cNvPr id="24" name="income-capsule-text">
+            <a:extLst>
+              <a:ext uri="{FF2B5EF4-FFF2-40B4-BE49-F238E27FC236}">
+                <a16:creationId xmlns:a16="http://schemas.microsoft.com/office/drawing/2014/main" id="{455365E2-0360-47A7-B894-12DC05DCC697}"/>
+              </a:ext>
+            </a:extLst>
+          </p:cNvPr>
+          <p:cNvSpPr txBox="1"/>
+          <p:nvPr/>
+        </p:nvSpPr>
+        <p:spPr>
+          <a:xfrm>
+            <a:off x="541547" y="2003724"/>
+            <a:ext cx="1295400" cy="228600"/>
+          </a:xfrm>
+          <a:prstGeom prst="rect">
+            <a:avLst/>
+          </a:prstGeom>
+          <a:noFill/>
+          <a:ln>
+            <a:noFill/>
+          </a:ln>
+        </p:spPr>
+        <p:txBody>
+          <a:bodyPr wrap="none" lIns="0" tIns="0" rIns="0" bIns="0" rtlCol="0" anchor="ctr"/>
+          <a:lstStyle/>
+          <a:p>
+            <a:pPr algn="ctr">
+              <a:lnSpc>
+                <a:spcPct val="120000"/>
+              </a:lnSpc>
+            </a:pPr>
+            <a:r>
+              <a:rPr lang="zh-CN" altLang="en-US" sz="1050" b="1" noProof="1">
+                <a:solidFill>
+                  <a:srgbClr val="FFFFFF"/>
+                </a:solidFill>
+                <a:latin typeface="微软雅黑" panose="020B0503020204020204" pitchFamily="34" charset="-122"/>
+                <a:ea typeface="微软雅黑" panose="020B0503020204020204" pitchFamily="34" charset="-122"/>
+              </a:rPr>
+              <a:t>澳洲企业库</a:t>
+            </a:r>
+            <a:endParaRPr lang="en-US" sz="1050" noProof="1">
+              <a:latin typeface="微软雅黑" panose="020B0503020204020204" pitchFamily="34" charset="-122"/>
+              <a:ea typeface="微软雅黑" panose="020B0503020204020204" pitchFamily="34" charset="-122"/>
+            </a:endParaRPr>
+          </a:p>
+        </p:txBody>
+      </p:sp>
+      <p:sp>
+        <p:nvSpPr>
+          <p:cNvPr id="27" name="Rectangle 3">
+            <a:extLst>
+              <a:ext uri="{FF2B5EF4-FFF2-40B4-BE49-F238E27FC236}">
+                <a16:creationId xmlns:a16="http://schemas.microsoft.com/office/drawing/2014/main" id="{BAB8C997-F392-44D6-BD9C-9CC639AE4236}"/>
+              </a:ext>
+            </a:extLst>
+          </p:cNvPr>
+          <p:cNvSpPr>
+            <a:spLocks noChangeArrowheads="1"/>
+          </p:cNvSpPr>
+          <p:nvPr/>
+        </p:nvSpPr>
+        <p:spPr bwMode="auto">
+          <a:xfrm>
+            <a:off x="557541" y="1241953"/>
+            <a:ext cx="10898112" cy="276999"/>
+          </a:xfrm>
+          <a:prstGeom prst="rect">
+            <a:avLst/>
+          </a:prstGeom>
+          <a:noFill/>
+          <a:ln>
+            <a:noFill/>
+          </a:ln>
+          <a:effectLst/>
+          <a:extLst>
+            <a:ext uri="{909E8E84-426E-40DD-AFC4-6F175D3DCCD1}">
+              <a14:hiddenFill xmlns:a14="http://schemas.microsoft.com/office/drawing/2010/main">
+                <a:solidFill>
+                  <a:schemeClr val="accent1"/>
+                </a:solidFill>
+              </a14:hiddenFill>
+            </a:ext>
+            <a:ext uri="{91240B29-F687-4F45-9708-019B960494DF}">
+              <a14:hiddenLine xmlns:a14="http://schemas.microsoft.com/office/drawing/2010/main" w="9525">
+                <a:solidFill>
+                  <a:schemeClr val="tx1"/>
+                </a:solidFill>
+                <a:miter lim="800000"/>
+                <a:headEnd/>
+                <a:tailEnd/>
+              </a14:hiddenLine>
+            </a:ext>
+            <a:ext uri="{AF507438-7753-43E0-B8FC-AC1667EBCBE1}">
+              <a14:hiddenEffects xmlns:a14="http://schemas.microsoft.com/office/drawing/2010/main">
+                <a:effectLst>
+                  <a:outerShdw dist="35921" dir="2700000" algn="ctr" rotWithShape="0">
+                    <a:schemeClr val="bg2"/>
+                  </a:outerShdw>
+                </a:effectLst>
+              </a14:hiddenEffects>
+            </a:ext>
+          </a:extLst>
+        </p:spPr>
+        <p:txBody>
+          <a:bodyPr vert="horz" wrap="none" lIns="91440" tIns="45720" rIns="91440" bIns="45720" numCol="1" anchor="ctr" anchorCtr="0" compatLnSpc="1">
+            <a:prstTxWarp prst="textNoShape">
+              <a:avLst/>
+            </a:prstTxWarp>
+            <a:spAutoFit/>
+          </a:bodyPr>
+          <a:lstStyle/>
+          <a:p>
+            <a:pPr marL="0" marR="0" lvl="0" indent="0" algn="l" defTabSz="914400" rtl="0" eaLnBrk="0" fontAlgn="base" latinLnBrk="0" hangingPunct="0">
+              <a:lnSpc>
+                <a:spcPct val="100000"/>
+              </a:lnSpc>
+              <a:spcBef>
+                <a:spcPct val="0"/>
+              </a:spcBef>
+              <a:spcAft>
+                <a:spcPct val="0"/>
+              </a:spcAft>
+              <a:buClrTx/>
+              <a:buSzTx/>
+              <a:buFontTx/>
+              <a:buNone/>
+              <a:tabLst/>
+            </a:pPr>
+            <a:r>
+              <a:rPr lang="zh-CN" altLang="zh-CN" sz="1200" b="1" dirty="0">
+                <a:latin typeface="微软雅黑" panose="020B0503020204020204" pitchFamily="34" charset="-122"/>
+                <a:ea typeface="微软雅黑" panose="020B0503020204020204" pitchFamily="34" charset="-122"/>
+              </a:rPr>
+              <a:t>引擎流程：</a:t>
+            </a:r>
+            <a:r>
+              <a:rPr lang="en-US" altLang="zh-CN" sz="1200" b="1" dirty="0">
+                <a:latin typeface="微软雅黑" panose="020B0503020204020204" pitchFamily="34" charset="-122"/>
+                <a:ea typeface="微软雅黑" panose="020B0503020204020204" pitchFamily="34" charset="-122"/>
+              </a:rPr>
+              <a:t>Init → Income → Liability → Other Engines (</a:t>
+            </a:r>
+            <a:r>
+              <a:rPr lang="en-US" altLang="zh-CN" sz="1200" b="1" dirty="0" err="1">
+                <a:latin typeface="微软雅黑" panose="020B0503020204020204" pitchFamily="34" charset="-122"/>
+                <a:ea typeface="微软雅黑" panose="020B0503020204020204" pitchFamily="34" charset="-122"/>
+              </a:rPr>
+              <a:t>Transfers,Gambling</a:t>
+            </a:r>
+            <a:r>
+              <a:rPr lang="en-US" altLang="zh-CN" sz="1200" b="1" dirty="0">
+                <a:latin typeface="微软雅黑" panose="020B0503020204020204" pitchFamily="34" charset="-122"/>
+                <a:ea typeface="微软雅黑" panose="020B0503020204020204" pitchFamily="34" charset="-122"/>
+              </a:rPr>
+              <a:t>, and Rent) → Quality Review &amp; Optimization</a:t>
+            </a:r>
+            <a:r>
+              <a:rPr lang="zh-CN" altLang="zh-CN" sz="1200" b="1" dirty="0">
+                <a:latin typeface="微软雅黑" panose="020B0503020204020204" pitchFamily="34" charset="-122"/>
+                <a:ea typeface="微软雅黑" panose="020B0503020204020204" pitchFamily="34" charset="-122"/>
+              </a:rPr>
+              <a:t>→ 质量评估</a:t>
+            </a:r>
+            <a:r>
+              <a:rPr kumimoji="0" lang="zh-CN" altLang="zh-CN" sz="1200" b="1" i="0" u="none" strike="noStrike" cap="none" normalizeH="0" baseline="0" dirty="0">
+                <a:ln>
+                  <a:noFill/>
+                </a:ln>
+                <a:solidFill>
+                  <a:schemeClr val="tx1"/>
+                </a:solidFill>
+                <a:effectLst/>
+                <a:latin typeface="微软雅黑" panose="020B0503020204020204" pitchFamily="34" charset="-122"/>
+                <a:ea typeface="微软雅黑" panose="020B0503020204020204" pitchFamily="34" charset="-122"/>
+              </a:rPr>
+              <a:t>与优化闭环</a:t>
+            </a:r>
+          </a:p>
+        </p:txBody>
+      </p:sp>
+      <p:sp>
+        <p:nvSpPr>
+          <p:cNvPr id="25" name="s1-bar">
+            <a:extLst>
+              <a:ext uri="{FF2B5EF4-FFF2-40B4-BE49-F238E27FC236}">
+                <a16:creationId xmlns:a16="http://schemas.microsoft.com/office/drawing/2014/main" id="{A8EBEEE2-E859-4ED2-B0ED-270FD3E8E714}"/>
+              </a:ext>
+            </a:extLst>
+          </p:cNvPr>
+          <p:cNvSpPr/>
+          <p:nvPr/>
+        </p:nvSpPr>
+        <p:spPr>
+          <a:xfrm>
+            <a:off x="6285857" y="1737516"/>
+            <a:ext cx="50800" cy="165100"/>
+          </a:xfrm>
+          <a:prstGeom prst="rect">
+            <a:avLst/>
+          </a:prstGeom>
+          <a:solidFill>
+            <a:srgbClr val="D6A000"/>
+          </a:solidFill>
+          <a:ln>
+            <a:noFill/>
+          </a:ln>
+        </p:spPr>
+        <p:txBody>
+          <a:bodyPr/>
+          <a:p/>
+        </p:txBody>
+      </p:sp>
+      <p:sp>
+        <p:nvSpPr>
+          <p:cNvPr id="26" name="s1-title">
+            <a:extLst>
+              <a:ext uri="{FF2B5EF4-FFF2-40B4-BE49-F238E27FC236}">
+                <a16:creationId xmlns:a16="http://schemas.microsoft.com/office/drawing/2014/main" id="{04C828B8-086B-404C-8643-9D85D8368225}"/>
+              </a:ext>
+            </a:extLst>
+          </p:cNvPr>
+          <p:cNvSpPr txBox="1"/>
+          <p:nvPr/>
+        </p:nvSpPr>
+        <p:spPr>
+          <a:xfrm>
+            <a:off x="6438257" y="1699416"/>
+            <a:ext cx="4064000" cy="228600"/>
+          </a:xfrm>
+          <a:prstGeom prst="rect">
+            <a:avLst/>
+          </a:prstGeom>
+          <a:noFill/>
+          <a:ln>
+            <a:noFill/>
+          </a:ln>
+        </p:spPr>
+        <p:txBody>
+          <a:bodyPr wrap="none" lIns="0" tIns="0" rIns="0" bIns="0" rtlCol="0" anchor="ctr"/>
+          <a:lstStyle/>
+          <a:p>
+            <a:pPr algn="l">
+              <a:lnSpc>
+                <a:spcPct val="125000"/>
+              </a:lnSpc>
+            </a:pPr>
+            <a:r>
+              <a:rPr sz="1400" b="1">
+                <a:solidFill>
+                  <a:srgbClr val="0A0A0A"/>
+                </a:solidFill>
+                <a:latin typeface="微软雅黑"/>
+                <a:ea typeface="微软雅黑"/>
+              </a:rPr>
+              <a:t>2. AI 质检 Agent：监控分类波动并输出诊断报告</a:t>
+            </a:r>
+            <a:endParaRPr lang="en-US" sz="1400" noProof="1">
+              <a:latin typeface="微软雅黑" panose="020B0503020204020204" pitchFamily="34" charset="-122"/>
+              <a:ea typeface="微软雅黑" panose="020B0503020204020204" pitchFamily="34" charset="-122"/>
+            </a:endParaRPr>
+          </a:p>
+        </p:txBody>
+      </p:sp>
+      <p:graphicFrame>
+        <p:nvGraphicFramePr>
+          <p:cNvPr id="29" name="Table 28"/>
+          <p:cNvGraphicFramePr>
+            <a:graphicFrameLocks noGrp="1"/>
+          </p:cNvGraphicFramePr>
+          <p:nvPr>
+            <p:extLst>
+              <p:ext uri="{D42A27DB-BD31-4B8C-83A1-F6EECF244321}">
+                <p14:modId xmlns:p14="http://schemas.microsoft.com/office/powerpoint/2010/main" val="1945025288"/>
+              </p:ext>
+            </p:extLst>
+          </p:nvPr>
+        </p:nvGraphicFramePr>
+        <p:xfrm>
+          <a:off x="6311255" y="4049611"/>
+          <a:ext cx="5540236" cy="1042416"/>
+        </p:xfrm>
+        <a:graphic>
+          <a:graphicData uri="http://schemas.openxmlformats.org/drawingml/2006/table">
+            <a:tbl>
+              <a:tblPr/>
+              <a:tblGrid>
+                <a:gridCol w="923372">
+                  <a:extLst>
+                    <a:ext uri="{9D8B030D-6E8A-4147-A177-3AD203B41FA5}">
+                      <a16:colId xmlns:a16="http://schemas.microsoft.com/office/drawing/2014/main" val="20000"/>
+                    </a:ext>
+                  </a:extLst>
+                </a:gridCol>
+                <a:gridCol w="4616864">
+                  <a:extLst>
+                    <a:ext uri="{9D8B030D-6E8A-4147-A177-3AD203B41FA5}">
+                      <a16:colId xmlns:a16="http://schemas.microsoft.com/office/drawing/2014/main" val="20001"/>
+                    </a:ext>
+                  </a:extLst>
+                </a:gridCol>
+              </a:tblGrid>
+              <a:tr h="173736">
+                <a:tc>
+                  <a:txBody>
+                    <a:bodyPr/>
+                    <a:lstStyle/>
+                    <a:p>
+                      <a:pPr algn="l"/>
+                      <a:r>
+                        <a:rPr sz="800" b="1">
+                          <a:solidFill>
+                            <a:srgbClr val="0A0A0A"/>
+                          </a:solidFill>
+                          <a:latin typeface="微软雅黑"/>
+                          <a:ea typeface="微软雅黑"/>
+                        </a:rPr>
+                        <a:t>定位原因</a:t>
+                      </a:r>
+                    </a:p>
+                  </a:txBody>
+                  <a:tcPr marL="27432" marR="27432" marT="9144" marB="9144">
+                    <a:lnL>
+                      <a:noFill/>
+                    </a:lnL>
+                    <a:lnR>
+                      <a:noFill/>
+                    </a:lnR>
+                    <a:lnT>
+                      <a:noFill/>
+                    </a:lnT>
+                    <a:lnB w="19050" cap="flat">
+                      <a:solidFill>
+                        <a:srgbClr val="0A0A0A"/>
+                      </a:solidFill>
+                    </a:lnB>
+                  </a:tcPr>
+                </a:tc>
+                <a:tc>
+                  <a:txBody>
+                    <a:bodyPr/>
+                    <a:lstStyle/>
+                    <a:p>
+                      <a:pPr algn="l"/>
+                      <a:r>
+                        <a:rPr sz="800" b="1">
+                          <a:solidFill>
+                            <a:srgbClr val="0A0A0A"/>
+                          </a:solidFill>
+                          <a:latin typeface="微软雅黑"/>
+                          <a:ea typeface="微软雅黑"/>
+                        </a:rPr>
+                        <a:t>示例场景</a:t>
+                      </a:r>
+                    </a:p>
+                  </a:txBody>
+                  <a:tcPr marL="27432" marR="27432" marT="9144" marB="9144">
+                    <a:lnL>
+                      <a:noFill/>
+                    </a:lnL>
+                    <a:lnR>
+                      <a:noFill/>
+                    </a:lnR>
+                    <a:lnT>
+                      <a:noFill/>
+                    </a:lnT>
+                    <a:lnB w="19050" cap="flat">
+                      <a:solidFill>
+                        <a:srgbClr val="0A0A0A"/>
+                      </a:solidFill>
+                    </a:lnB>
+                  </a:tcPr>
+                </a:tc>
+                <a:extLst>
+                  <a:ext uri="{0D108BD9-81ED-4DB2-BD59-A6C34878D82A}">
+                    <a16:rowId xmlns:a16="http://schemas.microsoft.com/office/drawing/2014/main" val="10000"/>
+                  </a:ext>
+                </a:extLst>
+              </a:tr>
+              <a:tr h="173736">
+                <a:tc>
+                  <a:txBody>
+                    <a:bodyPr/>
+                    <a:lstStyle/>
+                    <a:p>
+                      <a:pPr algn="l"/>
+                      <a:r>
+                        <a:rPr sz="800" b="1">
+                          <a:solidFill>
+                            <a:srgbClr val="3D3C3A"/>
+                          </a:solidFill>
+                          <a:latin typeface="微软雅黑"/>
+                          <a:ea typeface="微软雅黑"/>
+                        </a:rPr>
+                        <a:t>引擎规则问题</a:t>
+                      </a:r>
+                    </a:p>
+                  </a:txBody>
+                  <a:tcPr marL="27432" marR="27432" marT="9144" marB="9144">
+                    <a:lnL>
+                      <a:noFill/>
+                    </a:lnL>
+                    <a:lnR>
+                      <a:noFill/>
+                    </a:lnR>
+                    <a:lnT w="19050" cap="flat">
+                      <a:solidFill>
+                        <a:srgbClr val="0A0A0A"/>
+                      </a:solidFill>
+                    </a:lnT>
+                    <a:lnB w="9525" cap="flat">
+                      <a:solidFill>
+                        <a:srgbClr val="D6D6D6"/>
+                      </a:solidFill>
+                    </a:lnB>
+                  </a:tcPr>
+                </a:tc>
+                <a:tc>
+                  <a:txBody>
+                    <a:bodyPr/>
+                    <a:lstStyle/>
+                    <a:p>
+                      <a:pPr algn="l"/>
+                      <a:r>
+                        <a:rPr sz="800" b="0">
+                          <a:solidFill>
+                            <a:srgbClr val="3D3C3A"/>
+                          </a:solidFill>
+                          <a:latin typeface="微软雅黑"/>
+                          <a:ea typeface="微软雅黑"/>
+                        </a:rPr>
+                        <a:t>排除规则过宽，房租、保险、水电被误归为内部转账，导致租金支出在支出计算中漏算</a:t>
+                      </a:r>
+                    </a:p>
+                  </a:txBody>
+                  <a:tcPr marL="27432" marR="27432" marT="9144" marB="9144">
+                    <a:lnL>
+                      <a:noFill/>
+                    </a:lnL>
+                    <a:lnR>
+                      <a:noFill/>
+                    </a:lnR>
+                    <a:lnT w="19050" cap="flat">
+                      <a:solidFill>
+                        <a:srgbClr val="0A0A0A"/>
+                      </a:solidFill>
+                    </a:lnT>
+                    <a:lnB w="9525" cap="flat">
+                      <a:solidFill>
+                        <a:srgbClr val="D6D6D6"/>
+                      </a:solidFill>
+                    </a:lnB>
+                  </a:tcPr>
+                </a:tc>
+                <a:extLst>
+                  <a:ext uri="{0D108BD9-81ED-4DB2-BD59-A6C34878D82A}">
+                    <a16:rowId xmlns:a16="http://schemas.microsoft.com/office/drawing/2014/main" val="10001"/>
+                  </a:ext>
+                </a:extLst>
+              </a:tr>
+              <a:tr h="173736">
+                <a:tc>
+                  <a:txBody>
+                    <a:bodyPr/>
+                    <a:lstStyle/>
+                    <a:p>
+                      <a:pPr algn="l"/>
+                      <a:r>
+                        <a:rPr sz="800" b="1">
+                          <a:solidFill>
+                            <a:srgbClr val="3D3C3A"/>
+                          </a:solidFill>
+                          <a:latin typeface="微软雅黑"/>
+                          <a:ea typeface="微软雅黑"/>
+                        </a:rPr>
+                        <a:t>知识库不足</a:t>
+                      </a:r>
+                    </a:p>
+                  </a:txBody>
+                  <a:tcPr marL="27432" marR="27432" marT="9144" marB="9144">
+                    <a:lnL>
+                      <a:noFill/>
+                    </a:lnL>
+                    <a:lnR>
+                      <a:noFill/>
+                    </a:lnR>
+                    <a:lnT w="9525" cap="flat" cmpd="sng" algn="ctr">
+                      <a:solidFill>
+                        <a:srgbClr val="D6D6D6"/>
+                      </a:solidFill>
+                      <a:prstDash val="solid"/>
+                      <a:round/>
+                      <a:headEnd type="none" w="med" len="med"/>
+                      <a:tailEnd type="none" w="med" len="med"/>
+                    </a:lnT>
+                    <a:lnB w="9525" cap="flat">
+                      <a:solidFill>
+                        <a:srgbClr val="D6D6D6"/>
+                      </a:solidFill>
+                    </a:lnB>
+                  </a:tcPr>
+                </a:tc>
+                <a:tc>
+                  <a:txBody>
+                    <a:bodyPr/>
+                    <a:lstStyle/>
+                    <a:p>
+                      <a:pPr algn="l"/>
+                      <a:r>
+                        <a:rPr sz="800" b="0" dirty="0" err="1">
+                          <a:solidFill>
+                            <a:srgbClr val="3D3C3A"/>
+                          </a:solidFill>
+                          <a:latin typeface="微软雅黑"/>
+                          <a:ea typeface="微软雅黑"/>
+                        </a:rPr>
+                        <a:t>新开业商户或新兴</a:t>
+                      </a:r>
+                      <a:r>
+                        <a:rPr sz="800" b="0" dirty="0">
+                          <a:solidFill>
+                            <a:srgbClr val="3D3C3A"/>
+                          </a:solidFill>
+                          <a:latin typeface="微软雅黑"/>
+                          <a:ea typeface="微软雅黑"/>
+                        </a:rPr>
+                        <a:t> BNPL </a:t>
+                      </a:r>
+                      <a:r>
+                        <a:rPr sz="800" b="0" dirty="0" err="1">
+                          <a:solidFill>
+                            <a:srgbClr val="3D3C3A"/>
+                          </a:solidFill>
+                          <a:latin typeface="微软雅黑"/>
+                          <a:ea typeface="微软雅黑"/>
+                        </a:rPr>
+                        <a:t>平台的交易描述未收录，落入</a:t>
+                      </a:r>
+                      <a:r>
+                        <a:rPr sz="800" b="0" dirty="0">
+                          <a:solidFill>
+                            <a:srgbClr val="3D3C3A"/>
+                          </a:solidFill>
+                          <a:latin typeface="微软雅黑"/>
+                          <a:ea typeface="微软雅黑"/>
+                        </a:rPr>
+                        <a:t> Other </a:t>
+                      </a:r>
+                      <a:r>
+                        <a:rPr sz="800" b="0" dirty="0" err="1">
+                          <a:solidFill>
+                            <a:srgbClr val="3D3C3A"/>
+                          </a:solidFill>
+                          <a:latin typeface="微软雅黑"/>
+                          <a:ea typeface="微软雅黑"/>
+                        </a:rPr>
+                        <a:t>或无法归集为负债流</a:t>
+                      </a:r>
+                      <a:endParaRPr sz="700" b="0" dirty="0">
+                        <a:solidFill>
+                          <a:srgbClr val="3D3C3A"/>
+                        </a:solidFill>
+                        <a:latin typeface="微软雅黑"/>
+                        <a:ea typeface="微软雅黑"/>
+                      </a:endParaRPr>
+                    </a:p>
+                  </a:txBody>
+                  <a:tcPr marL="27432" marR="27432" marT="9144" marB="9144">
+                    <a:lnL>
+                      <a:noFill/>
+                    </a:lnL>
+                    <a:lnR>
+                      <a:noFill/>
+                    </a:lnR>
+                    <a:lnT w="9525" cap="flat" cmpd="sng" algn="ctr">
+                      <a:solidFill>
+                        <a:srgbClr val="D6D6D6"/>
+                      </a:solidFill>
+                      <a:prstDash val="solid"/>
+                      <a:round/>
+                      <a:headEnd type="none" w="med" len="med"/>
+                      <a:tailEnd type="none" w="med" len="med"/>
+                    </a:lnT>
+                    <a:lnB w="9525" cap="flat">
+                      <a:solidFill>
+                        <a:srgbClr val="D6D6D6"/>
+                      </a:solidFill>
+                    </a:lnB>
+                  </a:tcPr>
+                </a:tc>
+                <a:extLst>
+                  <a:ext uri="{0D108BD9-81ED-4DB2-BD59-A6C34878D82A}">
+                    <a16:rowId xmlns:a16="http://schemas.microsoft.com/office/drawing/2014/main" val="10002"/>
+                  </a:ext>
+                </a:extLst>
+              </a:tr>
+              <a:tr h="173736">
+                <a:tc>
+                  <a:txBody>
+                    <a:bodyPr/>
+                    <a:lstStyle/>
+                    <a:p>
+                      <a:pPr algn="l"/>
+                      <a:r>
+                        <a:rPr sz="800" b="1">
+                          <a:solidFill>
+                            <a:srgbClr val="3D3C3A"/>
+                          </a:solidFill>
+                          <a:latin typeface="微软雅黑"/>
+                          <a:ea typeface="微软雅黑"/>
+                        </a:rPr>
+                        <a:t>数据本身异常</a:t>
+                      </a:r>
+                    </a:p>
+                  </a:txBody>
+                  <a:tcPr marL="27432" marR="27432" marT="9144" marB="9144">
+                    <a:lnL>
+                      <a:noFill/>
+                    </a:lnL>
+                    <a:lnR>
+                      <a:noFill/>
+                    </a:lnR>
+                    <a:lnT w="9525" cap="flat" cmpd="sng" algn="ctr">
+                      <a:solidFill>
+                        <a:srgbClr val="D6D6D6"/>
+                      </a:solidFill>
+                      <a:prstDash val="solid"/>
+                      <a:round/>
+                      <a:headEnd type="none" w="med" len="med"/>
+                      <a:tailEnd type="none" w="med" len="med"/>
+                    </a:lnT>
+                    <a:lnB w="9525" cap="flat">
+                      <a:solidFill>
+                        <a:srgbClr val="D6D6D6"/>
+                      </a:solidFill>
+                    </a:lnB>
+                  </a:tcPr>
+                </a:tc>
+                <a:tc>
+                  <a:txBody>
+                    <a:bodyPr/>
+                    <a:lstStyle/>
+                    <a:p>
+                      <a:pPr algn="l"/>
+                      <a:r>
+                        <a:rPr sz="800" b="0">
+                          <a:solidFill>
+                            <a:srgbClr val="3D3C3A"/>
+                          </a:solidFill>
+                          <a:latin typeface="微软雅黑"/>
+                          <a:ea typeface="微软雅黑"/>
+                        </a:rPr>
+                        <a:t>银行返回描述被截断（仅剩 EFTPOS *）、金额与方向矛盾、同一笔交易重复入账</a:t>
+                      </a:r>
+                    </a:p>
+                  </a:txBody>
+                  <a:tcPr marL="27432" marR="27432" marT="9144" marB="9144">
+                    <a:lnL>
+                      <a:noFill/>
+                    </a:lnL>
+                    <a:lnR>
+                      <a:noFill/>
+                    </a:lnR>
+                    <a:lnT w="9525" cap="flat" cmpd="sng" algn="ctr">
+                      <a:solidFill>
+                        <a:srgbClr val="D6D6D6"/>
+                      </a:solidFill>
+                      <a:prstDash val="solid"/>
+                      <a:round/>
+                      <a:headEnd type="none" w="med" len="med"/>
+                      <a:tailEnd type="none" w="med" len="med"/>
+                    </a:lnT>
+                    <a:lnB w="9525" cap="flat">
+                      <a:solidFill>
+                        <a:srgbClr val="D6D6D6"/>
+                      </a:solidFill>
+                    </a:lnB>
+                  </a:tcPr>
+                </a:tc>
+                <a:extLst>
+                  <a:ext uri="{0D108BD9-81ED-4DB2-BD59-A6C34878D82A}">
+                    <a16:rowId xmlns:a16="http://schemas.microsoft.com/office/drawing/2014/main" val="10003"/>
+                  </a:ext>
+                </a:extLst>
+              </a:tr>
+              <a:tr h="173736">
+                <a:tc>
+                  <a:txBody>
+                    <a:bodyPr/>
+                    <a:lstStyle/>
+                    <a:p>
+                      <a:pPr algn="l"/>
+                      <a:r>
+                        <a:rPr sz="800" b="1">
+                          <a:solidFill>
+                            <a:srgbClr val="3D3C3A"/>
+                          </a:solidFill>
+                          <a:latin typeface="微软雅黑"/>
+                          <a:ea typeface="微软雅黑"/>
+                        </a:rPr>
+                        <a:t>多引擎冲突</a:t>
+                      </a:r>
+                    </a:p>
+                  </a:txBody>
+                  <a:tcPr marL="27432" marR="27432" marT="9144" marB="9144">
+                    <a:lnL>
+                      <a:noFill/>
+                    </a:lnL>
+                    <a:lnR>
+                      <a:noFill/>
+                    </a:lnR>
+                    <a:lnT w="9525" cap="flat" cmpd="sng" algn="ctr">
+                      <a:solidFill>
+                        <a:srgbClr val="D6D6D6"/>
+                      </a:solidFill>
+                      <a:prstDash val="solid"/>
+                      <a:round/>
+                      <a:headEnd type="none" w="med" len="med"/>
+                      <a:tailEnd type="none" w="med" len="med"/>
+                    </a:lnT>
+                    <a:lnB w="9525" cap="flat">
+                      <a:solidFill>
+                        <a:srgbClr val="D6D6D6"/>
+                      </a:solidFill>
+                    </a:lnB>
+                  </a:tcPr>
+                </a:tc>
+                <a:tc>
+                  <a:txBody>
+                    <a:bodyPr/>
+                    <a:lstStyle/>
+                    <a:p>
+                      <a:pPr algn="l"/>
+                      <a:r>
+                        <a:rPr sz="800" b="0">
+                          <a:solidFill>
+                            <a:srgbClr val="3D3C3A"/>
+                          </a:solidFill>
+                          <a:latin typeface="微软雅黑"/>
+                          <a:ea typeface="微软雅黑"/>
+                        </a:rPr>
+                        <a:t>同一笔 BPAY ... 被 Transfer 归为转账、被 Liability 识别为还款，需按业务语义裁决</a:t>
+                      </a:r>
+                    </a:p>
+                  </a:txBody>
+                  <a:tcPr marL="27432" marR="27432" marT="9144" marB="9144">
+                    <a:lnL>
+                      <a:noFill/>
+                    </a:lnL>
+                    <a:lnR>
+                      <a:noFill/>
+                    </a:lnR>
+                    <a:lnT w="9525" cap="flat" cmpd="sng" algn="ctr">
+                      <a:solidFill>
+                        <a:srgbClr val="D6D6D6"/>
+                      </a:solidFill>
+                      <a:prstDash val="solid"/>
+                      <a:round/>
+                      <a:headEnd type="none" w="med" len="med"/>
+                      <a:tailEnd type="none" w="med" len="med"/>
+                    </a:lnT>
+                    <a:lnB w="9525" cap="flat">
+                      <a:solidFill>
+                        <a:srgbClr val="D6D6D6"/>
+                      </a:solidFill>
+                    </a:lnB>
+                  </a:tcPr>
+                </a:tc>
+                <a:extLst>
+                  <a:ext uri="{0D108BD9-81ED-4DB2-BD59-A6C34878D82A}">
+                    <a16:rowId xmlns:a16="http://schemas.microsoft.com/office/drawing/2014/main" val="10004"/>
+                  </a:ext>
+                </a:extLst>
+              </a:tr>
+              <a:tr h="173736">
+                <a:tc>
+                  <a:txBody>
+                    <a:bodyPr/>
+                    <a:lstStyle/>
+                    <a:p>
+                      <a:pPr algn="l"/>
+                      <a:r>
+                        <a:rPr sz="800" b="1">
+                          <a:solidFill>
+                            <a:srgbClr val="3D3C3A"/>
+                          </a:solidFill>
+                          <a:latin typeface="微软雅黑"/>
+                          <a:ea typeface="微软雅黑"/>
+                        </a:rPr>
+                        <a:t>正常波动</a:t>
+                      </a:r>
+                    </a:p>
+                  </a:txBody>
+                  <a:tcPr marL="27432" marR="27432" marT="9144" marB="9144">
+                    <a:lnL>
+                      <a:noFill/>
+                    </a:lnL>
+                    <a:lnR>
+                      <a:noFill/>
+                    </a:lnR>
+                    <a:lnT w="9525" cap="flat" cmpd="sng" algn="ctr">
+                      <a:solidFill>
+                        <a:srgbClr val="D6D6D6"/>
+                      </a:solidFill>
+                      <a:prstDash val="solid"/>
+                      <a:round/>
+                      <a:headEnd type="none" w="med" len="med"/>
+                      <a:tailEnd type="none" w="med" len="med"/>
+                    </a:lnT>
+                    <a:lnB w="9525" cap="flat">
+                      <a:solidFill>
+                        <a:srgbClr val="D6D6D6"/>
+                      </a:solidFill>
+                    </a:lnB>
+                  </a:tcPr>
+                </a:tc>
+                <a:tc>
+                  <a:txBody>
+                    <a:bodyPr/>
+                    <a:lstStyle/>
+                    <a:p>
+                      <a:pPr algn="l"/>
+                      <a:r>
+                        <a:rPr sz="800" b="0" dirty="0" err="1">
+                          <a:solidFill>
+                            <a:srgbClr val="3D3C3A"/>
+                          </a:solidFill>
+                          <a:latin typeface="微软雅黑"/>
+                          <a:ea typeface="微软雅黑"/>
+                        </a:rPr>
+                        <a:t>月初集中缴费、节假日消费高峰导致某类别占比短期上升，属正常范围，无需干预</a:t>
+                      </a:r>
+                      <a:endParaRPr sz="700" b="0" dirty="0">
+                        <a:solidFill>
+                          <a:srgbClr val="3D3C3A"/>
+                        </a:solidFill>
+                        <a:latin typeface="微软雅黑"/>
+                        <a:ea typeface="微软雅黑"/>
+                      </a:endParaRPr>
+                    </a:p>
+                  </a:txBody>
+                  <a:tcPr marL="27432" marR="27432" marT="9144" marB="9144">
+                    <a:lnL>
+                      <a:noFill/>
+                    </a:lnL>
+                    <a:lnR>
+                      <a:noFill/>
+                    </a:lnR>
+                    <a:lnT w="9525" cap="flat" cmpd="sng" algn="ctr">
+                      <a:solidFill>
+                        <a:srgbClr val="D6D6D6"/>
+                      </a:solidFill>
+                      <a:prstDash val="solid"/>
+                      <a:round/>
+                      <a:headEnd type="none" w="med" len="med"/>
+                      <a:tailEnd type="none" w="med" len="med"/>
+                    </a:lnT>
+                    <a:lnB w="9525" cap="flat">
+                      <a:solidFill>
+                        <a:srgbClr val="D6D6D6"/>
+                      </a:solidFill>
+                    </a:lnB>
+                  </a:tcPr>
+                </a:tc>
+                <a:extLst>
+                  <a:ext uri="{0D108BD9-81ED-4DB2-BD59-A6C34878D82A}">
+                    <a16:rowId xmlns:a16="http://schemas.microsoft.com/office/drawing/2014/main" val="10005"/>
+                  </a:ext>
+                </a:extLst>
+              </a:tr>
+            </a:tbl>
+          </a:graphicData>
+        </a:graphic>
+      </p:graphicFrame>
+      <p:sp>
+        <p:nvSpPr>
+          <p:cNvPr id="30" name="TextBox 29"/>
+          <p:cNvSpPr txBox="1"/>
+          <p:nvPr/>
+        </p:nvSpPr>
+        <p:spPr>
+          <a:xfrm>
+            <a:off x="6281928" y="5285232"/>
+            <a:ext cx="5029200" cy="256032"/>
+          </a:xfrm>
+          <a:prstGeom prst="rect">
+            <a:avLst/>
+          </a:prstGeom>
+          <a:noFill/>
+        </p:spPr>
+        <p:txBody>
+          <a:bodyPr wrap="square">
+            <a:spAutoFit/>
+          </a:bodyPr>
+          <a:lstStyle/>
+          <a:p>
+            <a:pPr algn="l"/>
+            <a:r>
+              <a:rPr sz="1200" b="1" dirty="0" err="1">
+                <a:solidFill>
+                  <a:srgbClr val="0A0A0A"/>
+                </a:solidFill>
+                <a:latin typeface="微软雅黑"/>
+                <a:ea typeface="微软雅黑"/>
+              </a:rPr>
+              <a:t>诊断报告输出示例</a:t>
+            </a:r>
+            <a:endParaRPr sz="900" b="1" dirty="0">
+              <a:solidFill>
+                <a:srgbClr val="0A0A0A"/>
+              </a:solidFill>
+              <a:latin typeface="微软雅黑"/>
+              <a:ea typeface="微软雅黑"/>
+            </a:endParaRPr>
+          </a:p>
+        </p:txBody>
+      </p:sp>
+      <p:graphicFrame>
+        <p:nvGraphicFramePr>
+          <p:cNvPr id="31" name="Table 30"/>
+          <p:cNvGraphicFramePr>
+            <a:graphicFrameLocks noGrp="1"/>
+          </p:cNvGraphicFramePr>
+          <p:nvPr/>
+        </p:nvGraphicFramePr>
+        <p:xfrm>
+          <a:off x="6311257" y="5556879"/>
+          <a:ext cx="5540234" cy="694944"/>
+        </p:xfrm>
+        <a:graphic>
+          <a:graphicData uri="http://schemas.openxmlformats.org/drawingml/2006/table">
+            <a:tbl>
+              <a:tblPr/>
+              <a:tblGrid>
+                <a:gridCol w="554023">
+                  <a:extLst>
+                    <a:ext uri="{9D8B030D-6E8A-4147-A177-3AD203B41FA5}">
+                      <a16:colId xmlns:a16="http://schemas.microsoft.com/office/drawing/2014/main" val="20000"/>
+                    </a:ext>
+                  </a:extLst>
+                </a:gridCol>
+                <a:gridCol w="1846745">
+                  <a:extLst>
+                    <a:ext uri="{9D8B030D-6E8A-4147-A177-3AD203B41FA5}">
+                      <a16:colId xmlns:a16="http://schemas.microsoft.com/office/drawing/2014/main" val="20001"/>
+                    </a:ext>
+                  </a:extLst>
+                </a:gridCol>
+                <a:gridCol w="923372">
+                  <a:extLst>
+                    <a:ext uri="{9D8B030D-6E8A-4147-A177-3AD203B41FA5}">
+                      <a16:colId xmlns:a16="http://schemas.microsoft.com/office/drawing/2014/main" val="20002"/>
+                    </a:ext>
+                  </a:extLst>
+                </a:gridCol>
+                <a:gridCol w="2216094">
+                  <a:extLst>
+                    <a:ext uri="{9D8B030D-6E8A-4147-A177-3AD203B41FA5}">
+                      <a16:colId xmlns:a16="http://schemas.microsoft.com/office/drawing/2014/main" val="20003"/>
+                    </a:ext>
+                  </a:extLst>
+                </a:gridCol>
+              </a:tblGrid>
+              <a:tr h="173736">
+                <a:tc>
+                  <a:txBody>
+                    <a:bodyPr/>
+                    <a:lstStyle/>
+                    <a:p>
+                      <a:pPr algn="l"/>
+                      <a:r>
+                        <a:rPr sz="800" b="1">
+                          <a:solidFill>
+                            <a:srgbClr val="0A0A0A"/>
+                          </a:solidFill>
+                          <a:latin typeface="微软雅黑"/>
+                          <a:ea typeface="微软雅黑"/>
+                        </a:rPr>
+                        <a:t>优先级</a:t>
+                      </a:r>
+                    </a:p>
+                  </a:txBody>
+                  <a:tcPr marL="27432" marR="27432" marT="9144" marB="9144">
+                    <a:lnL>
+                      <a:noFill/>
+                    </a:lnL>
+                    <a:lnR>
+                      <a:noFill/>
+                    </a:lnR>
+                    <a:lnT>
+                      <a:noFill/>
+                    </a:lnT>
+                    <a:lnB w="19050" cap="flat">
+                      <a:solidFill>
+                        <a:srgbClr val="0A0A0A"/>
+                      </a:solidFill>
+                    </a:lnB>
+                  </a:tcPr>
+                </a:tc>
+                <a:tc>
+                  <a:txBody>
+                    <a:bodyPr/>
+                    <a:lstStyle/>
+                    <a:p>
+                      <a:pPr algn="l"/>
+                      <a:r>
+                        <a:rPr sz="800" b="1">
+                          <a:solidFill>
+                            <a:srgbClr val="0A0A0A"/>
+                          </a:solidFill>
+                          <a:latin typeface="微软雅黑"/>
+                          <a:ea typeface="微软雅黑"/>
+                        </a:rPr>
+                        <a:t>问题描述</a:t>
+                      </a:r>
+                    </a:p>
+                  </a:txBody>
+                  <a:tcPr marL="27432" marR="27432" marT="9144" marB="9144">
+                    <a:lnL>
+                      <a:noFill/>
+                    </a:lnL>
+                    <a:lnR>
+                      <a:noFill/>
+                    </a:lnR>
+                    <a:lnT>
+                      <a:noFill/>
+                    </a:lnT>
+                    <a:lnB w="19050" cap="flat">
+                      <a:solidFill>
+                        <a:srgbClr val="0A0A0A"/>
+                      </a:solidFill>
+                    </a:lnB>
+                  </a:tcPr>
+                </a:tc>
+                <a:tc>
+                  <a:txBody>
+                    <a:bodyPr/>
+                    <a:lstStyle/>
+                    <a:p>
+                      <a:pPr algn="l"/>
+                      <a:r>
+                        <a:rPr sz="800" b="1">
+                          <a:solidFill>
+                            <a:srgbClr val="0A0A0A"/>
+                          </a:solidFill>
+                          <a:latin typeface="微软雅黑"/>
+                          <a:ea typeface="微软雅黑"/>
+                        </a:rPr>
+                        <a:t>定位原因</a:t>
+                      </a:r>
+                    </a:p>
+                  </a:txBody>
+                  <a:tcPr marL="27432" marR="27432" marT="9144" marB="9144">
+                    <a:lnL>
+                      <a:noFill/>
+                    </a:lnL>
+                    <a:lnR>
+                      <a:noFill/>
+                    </a:lnR>
+                    <a:lnT>
+                      <a:noFill/>
+                    </a:lnT>
+                    <a:lnB w="19050" cap="flat">
+                      <a:solidFill>
+                        <a:srgbClr val="0A0A0A"/>
+                      </a:solidFill>
+                    </a:lnB>
+                  </a:tcPr>
+                </a:tc>
+                <a:tc>
+                  <a:txBody>
+                    <a:bodyPr/>
+                    <a:lstStyle/>
+                    <a:p>
+                      <a:pPr algn="l"/>
+                      <a:r>
+                        <a:rPr sz="800" b="1">
+                          <a:solidFill>
+                            <a:srgbClr val="0A0A0A"/>
+                          </a:solidFill>
+                          <a:latin typeface="微软雅黑"/>
+                          <a:ea typeface="微软雅黑"/>
+                        </a:rPr>
+                        <a:t>建议动作</a:t>
+                      </a:r>
+                    </a:p>
+                  </a:txBody>
+                  <a:tcPr marL="27432" marR="27432" marT="9144" marB="9144">
+                    <a:lnL>
+                      <a:noFill/>
+                    </a:lnL>
+                    <a:lnR>
+                      <a:noFill/>
+                    </a:lnR>
+                    <a:lnT>
+                      <a:noFill/>
+                    </a:lnT>
+                    <a:lnB w="19050" cap="flat">
+                      <a:solidFill>
+                        <a:srgbClr val="0A0A0A"/>
+                      </a:solidFill>
+                    </a:lnB>
+                  </a:tcPr>
+                </a:tc>
+                <a:extLst>
+                  <a:ext uri="{0D108BD9-81ED-4DB2-BD59-A6C34878D82A}">
+                    <a16:rowId xmlns:a16="http://schemas.microsoft.com/office/drawing/2014/main" val="10000"/>
+                  </a:ext>
+                </a:extLst>
+              </a:tr>
+              <a:tr h="173736">
+                <a:tc>
+                  <a:txBody>
+                    <a:bodyPr/>
+                    <a:lstStyle/>
+                    <a:p>
+                      <a:pPr algn="l"/>
+                      <a:r>
+                        <a:rPr sz="800" b="1">
+                          <a:solidFill>
+                            <a:srgbClr val="3D3C3A"/>
+                          </a:solidFill>
+                          <a:latin typeface="微软雅黑"/>
+                          <a:ea typeface="微软雅黑"/>
+                        </a:rPr>
+                        <a:t>P0</a:t>
+                      </a:r>
+                    </a:p>
+                  </a:txBody>
+                  <a:tcPr marL="27432" marR="27432" marT="9144" marB="9144">
+                    <a:lnL>
+                      <a:noFill/>
+                    </a:lnL>
+                    <a:lnR>
+                      <a:noFill/>
+                    </a:lnR>
+                    <a:lnT w="19050" cap="flat">
+                      <a:solidFill>
+                        <a:srgbClr val="0A0A0A"/>
+                      </a:solidFill>
+                    </a:lnT>
+                    <a:lnB w="9525" cap="flat">
+                      <a:solidFill>
+                        <a:srgbClr val="D6D6D6"/>
+                      </a:solidFill>
+                    </a:lnB>
+                  </a:tcPr>
+                </a:tc>
+                <a:tc>
+                  <a:txBody>
+                    <a:bodyPr/>
+                    <a:lstStyle/>
+                    <a:p>
+                      <a:pPr algn="l"/>
+                      <a:r>
+                        <a:rPr sz="800" b="0">
+                          <a:solidFill>
+                            <a:srgbClr val="3D3C3A"/>
+                          </a:solidFill>
+                          <a:latin typeface="微软雅黑"/>
+                          <a:ea typeface="微软雅黑"/>
+                        </a:rPr>
+                        <a:t>房租交易批量被归为内部转账</a:t>
+                      </a:r>
+                    </a:p>
+                  </a:txBody>
+                  <a:tcPr marL="27432" marR="27432" marT="9144" marB="9144">
+                    <a:lnL>
+                      <a:noFill/>
+                    </a:lnL>
+                    <a:lnR>
+                      <a:noFill/>
+                    </a:lnR>
+                    <a:lnT w="19050" cap="flat">
+                      <a:solidFill>
+                        <a:srgbClr val="0A0A0A"/>
+                      </a:solidFill>
+                    </a:lnT>
+                    <a:lnB w="9525" cap="flat">
+                      <a:solidFill>
+                        <a:srgbClr val="D6D6D6"/>
+                      </a:solidFill>
+                    </a:lnB>
+                  </a:tcPr>
+                </a:tc>
+                <a:tc>
+                  <a:txBody>
+                    <a:bodyPr/>
+                    <a:lstStyle/>
+                    <a:p>
+                      <a:pPr algn="l"/>
+                      <a:r>
+                        <a:rPr sz="800" b="0">
+                          <a:solidFill>
+                            <a:srgbClr val="3D3C3A"/>
+                          </a:solidFill>
+                          <a:latin typeface="微软雅黑"/>
+                          <a:ea typeface="微软雅黑"/>
+                        </a:rPr>
+                        <a:t>引擎规则问题</a:t>
+                      </a:r>
+                    </a:p>
+                  </a:txBody>
+                  <a:tcPr marL="27432" marR="27432" marT="9144" marB="9144">
+                    <a:lnL>
+                      <a:noFill/>
+                    </a:lnL>
+                    <a:lnR>
+                      <a:noFill/>
+                    </a:lnR>
+                    <a:lnT w="19050" cap="flat">
+                      <a:solidFill>
+                        <a:srgbClr val="0A0A0A"/>
+                      </a:solidFill>
+                    </a:lnT>
+                    <a:lnB w="9525" cap="flat">
+                      <a:solidFill>
+                        <a:srgbClr val="D6D6D6"/>
+                      </a:solidFill>
+                    </a:lnB>
+                  </a:tcPr>
+                </a:tc>
+                <a:tc>
+                  <a:txBody>
+                    <a:bodyPr/>
+                    <a:lstStyle/>
+                    <a:p>
+                      <a:pPr algn="l"/>
+                      <a:r>
+                        <a:rPr sz="800" b="0">
+                          <a:solidFill>
+                            <a:srgbClr val="3D3C3A"/>
+                          </a:solidFill>
+                          <a:latin typeface="微软雅黑"/>
+                          <a:ea typeface="微软雅黑"/>
+                        </a:rPr>
+                        <a:t>优化 Transfer 排除规则并补充回归用例</a:t>
+                      </a:r>
+                    </a:p>
+                  </a:txBody>
+                  <a:tcPr marL="27432" marR="27432" marT="9144" marB="9144">
+                    <a:lnL>
+                      <a:noFill/>
+                    </a:lnL>
+                    <a:lnR>
+                      <a:noFill/>
+                    </a:lnR>
+                    <a:lnT w="19050" cap="flat">
+                      <a:solidFill>
+                        <a:srgbClr val="0A0A0A"/>
+                      </a:solidFill>
+                    </a:lnT>
+                    <a:lnB w="9525" cap="flat">
+                      <a:solidFill>
+                        <a:srgbClr val="D6D6D6"/>
+                      </a:solidFill>
+                    </a:lnB>
+                  </a:tcPr>
+                </a:tc>
+                <a:extLst>
+                  <a:ext uri="{0D108BD9-81ED-4DB2-BD59-A6C34878D82A}">
+                    <a16:rowId xmlns:a16="http://schemas.microsoft.com/office/drawing/2014/main" val="10001"/>
+                  </a:ext>
+                </a:extLst>
+              </a:tr>
+              <a:tr h="173736">
+                <a:tc>
+                  <a:txBody>
+                    <a:bodyPr/>
+                    <a:lstStyle/>
+                    <a:p>
+                      <a:pPr algn="l"/>
+                      <a:r>
+                        <a:rPr sz="800" b="1">
+                          <a:solidFill>
+                            <a:srgbClr val="3D3C3A"/>
+                          </a:solidFill>
+                          <a:latin typeface="微软雅黑"/>
+                          <a:ea typeface="微软雅黑"/>
+                        </a:rPr>
+                        <a:t>P1</a:t>
+                      </a:r>
+                    </a:p>
+                  </a:txBody>
+                  <a:tcPr marL="27432" marR="27432" marT="9144" marB="9144">
+                    <a:lnL>
+                      <a:noFill/>
+                    </a:lnL>
+                    <a:lnR>
+                      <a:noFill/>
+                    </a:lnR>
+                    <a:lnT w="9525" cap="flat" cmpd="sng" algn="ctr">
+                      <a:solidFill>
+                        <a:srgbClr val="D6D6D6"/>
+                      </a:solidFill>
+                      <a:prstDash val="solid"/>
+                      <a:round/>
+                      <a:headEnd type="none" w="med" len="med"/>
+                      <a:tailEnd type="none" w="med" len="med"/>
+                    </a:lnT>
+                    <a:lnB w="9525" cap="flat">
+                      <a:solidFill>
+                        <a:srgbClr val="D6D6D6"/>
+                      </a:solidFill>
+                    </a:lnB>
+                  </a:tcPr>
+                </a:tc>
+                <a:tc>
+                  <a:txBody>
+                    <a:bodyPr/>
+                    <a:lstStyle/>
+                    <a:p>
+                      <a:pPr algn="l"/>
+                      <a:r>
+                        <a:rPr sz="800" b="0">
+                          <a:solidFill>
+                            <a:srgbClr val="3D3C3A"/>
+                          </a:solidFill>
+                          <a:latin typeface="微软雅黑"/>
+                          <a:ea typeface="微软雅黑"/>
+                        </a:rPr>
+                        <a:t>新 BNPL 平台还款未被识别</a:t>
+                      </a:r>
+                    </a:p>
+                  </a:txBody>
+                  <a:tcPr marL="27432" marR="27432" marT="9144" marB="9144">
+                    <a:lnL>
+                      <a:noFill/>
+                    </a:lnL>
+                    <a:lnR>
+                      <a:noFill/>
+                    </a:lnR>
+                    <a:lnT w="9525" cap="flat" cmpd="sng" algn="ctr">
+                      <a:solidFill>
+                        <a:srgbClr val="D6D6D6"/>
+                      </a:solidFill>
+                      <a:prstDash val="solid"/>
+                      <a:round/>
+                      <a:headEnd type="none" w="med" len="med"/>
+                      <a:tailEnd type="none" w="med" len="med"/>
+                    </a:lnT>
+                    <a:lnB w="9525" cap="flat">
+                      <a:solidFill>
+                        <a:srgbClr val="D6D6D6"/>
+                      </a:solidFill>
+                    </a:lnB>
+                  </a:tcPr>
+                </a:tc>
+                <a:tc>
+                  <a:txBody>
+                    <a:bodyPr/>
+                    <a:lstStyle/>
+                    <a:p>
+                      <a:pPr algn="l"/>
+                      <a:r>
+                        <a:rPr sz="800" b="0">
+                          <a:solidFill>
+                            <a:srgbClr val="3D3C3A"/>
+                          </a:solidFill>
+                          <a:latin typeface="微软雅黑"/>
+                          <a:ea typeface="微软雅黑"/>
+                        </a:rPr>
+                        <a:t>知识库不足</a:t>
+                      </a:r>
+                    </a:p>
+                  </a:txBody>
+                  <a:tcPr marL="27432" marR="27432" marT="9144" marB="9144">
+                    <a:lnL>
+                      <a:noFill/>
+                    </a:lnL>
+                    <a:lnR>
+                      <a:noFill/>
+                    </a:lnR>
+                    <a:lnT w="9525" cap="flat" cmpd="sng" algn="ctr">
+                      <a:solidFill>
+                        <a:srgbClr val="D6D6D6"/>
+                      </a:solidFill>
+                      <a:prstDash val="solid"/>
+                      <a:round/>
+                      <a:headEnd type="none" w="med" len="med"/>
+                      <a:tailEnd type="none" w="med" len="med"/>
+                    </a:lnT>
+                    <a:lnB w="9525" cap="flat">
+                      <a:solidFill>
+                        <a:srgbClr val="D6D6D6"/>
+                      </a:solidFill>
+                    </a:lnB>
+                  </a:tcPr>
+                </a:tc>
+                <a:tc>
+                  <a:txBody>
+                    <a:bodyPr/>
+                    <a:lstStyle/>
+                    <a:p>
+                      <a:pPr algn="l"/>
+                      <a:r>
+                        <a:rPr sz="800" b="0">
+                          <a:solidFill>
+                            <a:srgbClr val="3D3C3A"/>
+                          </a:solidFill>
+                          <a:latin typeface="微软雅黑"/>
+                          <a:ea typeface="微软雅黑"/>
+                        </a:rPr>
+                        <a:t>补充平台名称及扣款描述关键词</a:t>
+                      </a:r>
+                    </a:p>
+                  </a:txBody>
+                  <a:tcPr marL="27432" marR="27432" marT="9144" marB="9144">
+                    <a:lnL>
+                      <a:noFill/>
+                    </a:lnL>
+                    <a:lnR>
+                      <a:noFill/>
+                    </a:lnR>
+                    <a:lnT w="9525" cap="flat" cmpd="sng" algn="ctr">
+                      <a:solidFill>
+                        <a:srgbClr val="D6D6D6"/>
+                      </a:solidFill>
+                      <a:prstDash val="solid"/>
+                      <a:round/>
+                      <a:headEnd type="none" w="med" len="med"/>
+                      <a:tailEnd type="none" w="med" len="med"/>
+                    </a:lnT>
+                    <a:lnB w="9525" cap="flat">
+                      <a:solidFill>
+                        <a:srgbClr val="D6D6D6"/>
+                      </a:solidFill>
+                    </a:lnB>
+                  </a:tcPr>
+                </a:tc>
+                <a:extLst>
+                  <a:ext uri="{0D108BD9-81ED-4DB2-BD59-A6C34878D82A}">
+                    <a16:rowId xmlns:a16="http://schemas.microsoft.com/office/drawing/2014/main" val="10002"/>
+                  </a:ext>
+                </a:extLst>
+              </a:tr>
+              <a:tr h="173736">
+                <a:tc>
+                  <a:txBody>
+                    <a:bodyPr/>
+                    <a:lstStyle/>
+                    <a:p>
+                      <a:pPr algn="l"/>
+                      <a:r>
+                        <a:rPr sz="800" b="1">
+                          <a:solidFill>
+                            <a:srgbClr val="3D3C3A"/>
+                          </a:solidFill>
+                          <a:latin typeface="微软雅黑"/>
+                          <a:ea typeface="微软雅黑"/>
+                        </a:rPr>
+                        <a:t>P2</a:t>
+                      </a:r>
+                    </a:p>
+                  </a:txBody>
+                  <a:tcPr marL="27432" marR="27432" marT="9144" marB="9144">
+                    <a:lnL>
+                      <a:noFill/>
+                    </a:lnL>
+                    <a:lnR>
+                      <a:noFill/>
+                    </a:lnR>
+                    <a:lnT w="9525" cap="flat" cmpd="sng" algn="ctr">
+                      <a:solidFill>
+                        <a:srgbClr val="D6D6D6"/>
+                      </a:solidFill>
+                      <a:prstDash val="solid"/>
+                      <a:round/>
+                      <a:headEnd type="none" w="med" len="med"/>
+                      <a:tailEnd type="none" w="med" len="med"/>
+                    </a:lnT>
+                    <a:lnB w="9525" cap="flat">
+                      <a:solidFill>
+                        <a:srgbClr val="D6D6D6"/>
+                      </a:solidFill>
+                    </a:lnB>
+                  </a:tcPr>
+                </a:tc>
+                <a:tc>
+                  <a:txBody>
+                    <a:bodyPr/>
+                    <a:lstStyle/>
+                    <a:p>
+                      <a:pPr algn="l"/>
+                      <a:r>
+                        <a:rPr sz="800" b="0">
+                          <a:solidFill>
+                            <a:srgbClr val="3D3C3A"/>
+                          </a:solidFill>
+                          <a:latin typeface="微软雅黑"/>
+                          <a:ea typeface="微软雅黑"/>
+                        </a:rPr>
+                        <a:t>某商户 7 月分类占比短期上升</a:t>
+                      </a:r>
+                    </a:p>
+                  </a:txBody>
+                  <a:tcPr marL="27432" marR="27432" marT="9144" marB="9144">
+                    <a:lnL>
+                      <a:noFill/>
+                    </a:lnL>
+                    <a:lnR>
+                      <a:noFill/>
+                    </a:lnR>
+                    <a:lnT w="9525" cap="flat" cmpd="sng" algn="ctr">
+                      <a:solidFill>
+                        <a:srgbClr val="D6D6D6"/>
+                      </a:solidFill>
+                      <a:prstDash val="solid"/>
+                      <a:round/>
+                      <a:headEnd type="none" w="med" len="med"/>
+                      <a:tailEnd type="none" w="med" len="med"/>
+                    </a:lnT>
+                    <a:lnB w="9525" cap="flat">
+                      <a:solidFill>
+                        <a:srgbClr val="D6D6D6"/>
+                      </a:solidFill>
+                    </a:lnB>
+                  </a:tcPr>
+                </a:tc>
+                <a:tc>
+                  <a:txBody>
+                    <a:bodyPr/>
+                    <a:lstStyle/>
+                    <a:p>
+                      <a:pPr algn="l"/>
+                      <a:r>
+                        <a:rPr sz="800" b="0">
+                          <a:solidFill>
+                            <a:srgbClr val="3D3C3A"/>
+                          </a:solidFill>
+                          <a:latin typeface="微软雅黑"/>
+                          <a:ea typeface="微软雅黑"/>
+                        </a:rPr>
+                        <a:t>正常波动</a:t>
+                      </a:r>
+                    </a:p>
+                  </a:txBody>
+                  <a:tcPr marL="27432" marR="27432" marT="9144" marB="9144">
+                    <a:lnL>
+                      <a:noFill/>
+                    </a:lnL>
+                    <a:lnR>
+                      <a:noFill/>
+                    </a:lnR>
+                    <a:lnT w="9525" cap="flat" cmpd="sng" algn="ctr">
+                      <a:solidFill>
+                        <a:srgbClr val="D6D6D6"/>
+                      </a:solidFill>
+                      <a:prstDash val="solid"/>
+                      <a:round/>
+                      <a:headEnd type="none" w="med" len="med"/>
+                      <a:tailEnd type="none" w="med" len="med"/>
+                    </a:lnT>
+                    <a:lnB w="9525" cap="flat">
+                      <a:solidFill>
+                        <a:srgbClr val="D6D6D6"/>
+                      </a:solidFill>
+                    </a:lnB>
+                  </a:tcPr>
+                </a:tc>
+                <a:tc>
+                  <a:txBody>
+                    <a:bodyPr/>
+                    <a:lstStyle/>
+                    <a:p>
+                      <a:pPr algn="l"/>
+                      <a:r>
+                        <a:rPr sz="800" b="0" dirty="0" err="1">
+                          <a:solidFill>
+                            <a:srgbClr val="3D3C3A"/>
+                          </a:solidFill>
+                          <a:latin typeface="微软雅黑"/>
+                          <a:ea typeface="微软雅黑"/>
+                        </a:rPr>
+                        <a:t>无需处理，持续观察</a:t>
+                      </a:r>
+                      <a:endParaRPr sz="700" b="0" dirty="0">
+                        <a:solidFill>
+                          <a:srgbClr val="3D3C3A"/>
+                        </a:solidFill>
+                        <a:latin typeface="微软雅黑"/>
+                        <a:ea typeface="微软雅黑"/>
+                      </a:endParaRPr>
+                    </a:p>
+                  </a:txBody>
+                  <a:tcPr marL="27432" marR="27432" marT="9144" marB="9144">
+                    <a:lnL>
+                      <a:noFill/>
+                    </a:lnL>
+                    <a:lnR>
+                      <a:noFill/>
+                    </a:lnR>
+                    <a:lnT w="9525" cap="flat" cmpd="sng" algn="ctr">
+                      <a:solidFill>
+                        <a:srgbClr val="D6D6D6"/>
+                      </a:solidFill>
+                      <a:prstDash val="solid"/>
+                      <a:round/>
+                      <a:headEnd type="none" w="med" len="med"/>
+                      <a:tailEnd type="none" w="med" len="med"/>
+                    </a:lnT>
+                    <a:lnB w="9525" cap="flat">
+                      <a:solidFill>
+                        <a:srgbClr val="D6D6D6"/>
+                      </a:solidFill>
+                    </a:lnB>
+                  </a:tcPr>
+                </a:tc>
+                <a:extLst>
+                  <a:ext uri="{0D108BD9-81ED-4DB2-BD59-A6C34878D82A}">
+                    <a16:rowId xmlns:a16="http://schemas.microsoft.com/office/drawing/2014/main" val="10003"/>
+                  </a:ext>
+                </a:extLst>
+              </a:tr>
+            </a:tbl>
+          </a:graphicData>
+        </a:graphic>
+      </p:graphicFrame>
+      <p:sp>
+        <p:nvSpPr>
+          <p:cNvPr id="32" name="TextBox 29">
+            <a:extLst>
+              <a:ext uri="{FF2B5EF4-FFF2-40B4-BE49-F238E27FC236}">
+                <a16:creationId xmlns:a16="http://schemas.microsoft.com/office/drawing/2014/main" id="{59843E63-6597-4DF7-94AC-310E51A426D8}"/>
+              </a:ext>
+            </a:extLst>
+          </p:cNvPr>
+          <p:cNvSpPr txBox="1"/>
+          <p:nvPr/>
+        </p:nvSpPr>
+        <p:spPr>
+          <a:xfrm>
+            <a:off x="6281928" y="3776472"/>
+            <a:ext cx="5029200" cy="256032"/>
+          </a:xfrm>
+          <a:prstGeom prst="rect">
+            <a:avLst/>
+          </a:prstGeom>
+          <a:noFill/>
+        </p:spPr>
+        <p:txBody>
+          <a:bodyPr wrap="square">
+            <a:spAutoFit/>
+          </a:bodyPr>
+          <a:lstStyle/>
+          <a:p>
+            <a:pPr algn="l">
+              <a:spcAft>
+                <a:spcPts val="300"/>
+              </a:spcAft>
+            </a:pPr>
+            <a:r>
+              <a:rPr lang="zh-CN" altLang="en-US" sz="1200" b="1" dirty="0">
+                <a:solidFill>
+                  <a:srgbClr val="0A0A0A"/>
+                </a:solidFill>
+                <a:latin typeface="微软雅黑"/>
+                <a:ea typeface="微软雅黑"/>
+              </a:rPr>
+              <a:t>五类定位原因示例</a:t>
+            </a:r>
+          </a:p>
+        </p:txBody>
+      </p:sp>
+      <p:sp>
+        <p:nvSpPr>
+          <p:cNvPr id="33" name="Rectangle 32"/>
+          <p:cNvSpPr/>
+          <p:nvPr/>
+        </p:nvSpPr>
+        <p:spPr>
+          <a:xfrm>
+            <a:off x="6217920" y="3776472"/>
+            <a:ext cx="54864" cy="228600"/>
+          </a:xfrm>
+          <a:prstGeom prst="rect">
+            <a:avLst/>
+          </a:prstGeom>
+          <a:solidFill>
+            <a:srgbClr val="D6A000"/>
+          </a:solidFill>
+          <a:ln>
+            <a:noFill/>
+          </a:ln>
+          <a:effectLst/>
+        </p:spPr>
+        <p:style>
+          <a:lnRef idx="1">
+            <a:schemeClr val="accent1"/>
+          </a:lnRef>
+          <a:fillRef idx="3">
+            <a:schemeClr val="accent1"/>
+          </a:fillRef>
+          <a:effectRef idx="2">
+            <a:schemeClr val="accent1"/>
+          </a:effectRef>
+          <a:fontRef idx="minor">
+            <a:schemeClr val="lt1"/>
+          </a:fontRef>
+        </p:style>
+        <p:txBody>
+          <a:bodyPr rtlCol="0" anchor="ctr"/>
+          <a:lstStyle/>
+          <a:p>
+            <a:pPr algn="ctr"/>
+          </a:p>
+        </p:txBody>
+      </p:sp>
+      <p:sp>
+        <p:nvSpPr>
+          <p:cNvPr id="34" name="Rectangle 33"/>
+          <p:cNvSpPr/>
+          <p:nvPr/>
+        </p:nvSpPr>
+        <p:spPr>
+          <a:xfrm>
+            <a:off x="6217920" y="5285232"/>
+            <a:ext cx="54864" cy="228600"/>
+          </a:xfrm>
+          <a:prstGeom prst="rect">
+            <a:avLst/>
+          </a:prstGeom>
+          <a:solidFill>
+            <a:srgbClr val="D6A000"/>
+          </a:solidFill>
+          <a:ln>
+            <a:noFill/>
+          </a:ln>
+          <a:effectLst/>
+        </p:spPr>
+        <p:style>
+          <a:lnRef idx="1">
+            <a:schemeClr val="accent1"/>
+          </a:lnRef>
+          <a:fillRef idx="3">
+            <a:schemeClr val="accent1"/>
+          </a:fillRef>
+          <a:effectRef idx="2">
+            <a:schemeClr val="accent1"/>
+          </a:effectRef>
+          <a:fontRef idx="minor">
+            <a:schemeClr val="lt1"/>
+          </a:fontRef>
+        </p:style>
+        <p:txBody>
+          <a:bodyPr rtlCol="0" anchor="ctr"/>
+          <a:lstStyle/>
+          <a:p>
+            <a:pPr algn="ctr"/>
+          </a:p>
+        </p:txBody>
+      </p:sp>
+      <p:sp>
+        <p:nvSpPr>
+          <p:cNvPr id="35" name="Rectangle 34"/>
+          <p:cNvSpPr/>
+          <p:nvPr/>
+        </p:nvSpPr>
+        <p:spPr>
+          <a:xfrm>
+            <a:off x="6281928" y="6327648"/>
+            <a:ext cx="5541264" cy="384048"/>
+          </a:xfrm>
+          <a:prstGeom prst="rect">
+            <a:avLst/>
+          </a:prstGeom>
+          <a:solidFill>
+            <a:srgbClr val="FAF3E0"/>
+          </a:solidFill>
+          <a:ln>
+            <a:noFill/>
+          </a:ln>
+          <a:effectLst/>
+        </p:spPr>
+        <p:style>
+          <a:lnRef idx="1">
+            <a:schemeClr val="accent1"/>
+          </a:lnRef>
+          <a:fillRef idx="3">
+            <a:schemeClr val="accent1"/>
+          </a:fillRef>
+          <a:effectRef idx="2">
+            <a:schemeClr val="accent1"/>
+          </a:effectRef>
+          <a:fontRef idx="minor">
+            <a:schemeClr val="lt1"/>
+          </a:fontRef>
+        </p:style>
+        <p:txBody>
+          <a:bodyPr rtlCol="0" anchor="ctr"/>
+          <a:lstStyle/>
+          <a:p>
+            <a:pPr algn="ctr"/>
+          </a:p>
+        </p:txBody>
+      </p:sp>
+      <p:sp>
+        <p:nvSpPr>
+          <p:cNvPr id="36" name="Rectangle 35"/>
+          <p:cNvSpPr/>
+          <p:nvPr/>
+        </p:nvSpPr>
+        <p:spPr>
+          <a:xfrm>
+            <a:off x="6217920" y="6327648"/>
+            <a:ext cx="54864" cy="384048"/>
+          </a:xfrm>
+          <a:prstGeom prst="rect">
+            <a:avLst/>
+          </a:prstGeom>
+          <a:solidFill>
+            <a:srgbClr val="D6A000"/>
+          </a:solidFill>
+          <a:ln>
+            <a:noFill/>
+          </a:ln>
+          <a:effectLst/>
+        </p:spPr>
+        <p:style>
+          <a:lnRef idx="1">
+            <a:schemeClr val="accent1"/>
+          </a:lnRef>
+          <a:fillRef idx="3">
+            <a:schemeClr val="accent1"/>
+          </a:fillRef>
+          <a:effectRef idx="2">
+            <a:schemeClr val="accent1"/>
+          </a:effectRef>
+          <a:fontRef idx="minor">
+            <a:schemeClr val="lt1"/>
+          </a:fontRef>
+        </p:style>
+        <p:txBody>
+          <a:bodyPr rtlCol="0" anchor="ctr"/>
+          <a:lstStyle/>
+          <a:p>
+            <a:pPr algn="ctr"/>
+          </a:p>
+        </p:txBody>
+      </p:sp>
+      <p:sp>
+        <p:nvSpPr>
+          <p:cNvPr id="37" name="TextBox 36"/>
+          <p:cNvSpPr txBox="1"/>
+          <p:nvPr/>
+        </p:nvSpPr>
+        <p:spPr>
+          <a:xfrm>
+            <a:off x="6373368" y="6327648"/>
+            <a:ext cx="5349240" cy="384048"/>
+          </a:xfrm>
+          <a:prstGeom prst="rect">
+            <a:avLst/>
+          </a:prstGeom>
+          <a:noFill/>
+        </p:spPr>
+        <p:txBody>
+          <a:bodyPr wrap="square" lIns="0" rIns="0" tIns="0" bIns="0" anchor="ctr">
+            <a:spAutoFit/>
+          </a:bodyPr>
+          <a:lstStyle/>
+          <a:p>
+            <a:pPr algn="l"/>
+            <a:r>
+              <a:rPr sz="900" b="1">
+                <a:solidFill>
+                  <a:srgbClr val="0A0A0A"/>
+                </a:solidFill>
+              </a:rPr>
+              <a:t>知识库随注册商户的新增、变更、失效持续更新，并从真实交易中补齐注册数据未覆盖的支付描述和商户别名。由此形成“分类 → 监控 → 定位 → 输出 → 更新 → 再分类”的持续优化闭环。</a:t>
+            </a:r>
+          </a:p>
+        </p:txBody>
+      </p:sp>
+      <p:sp>
+        <p:nvSpPr>
+          <p:cNvPr id="38" name="Rectangle 37"/>
+          <p:cNvSpPr/>
+          <p:nvPr/>
+        </p:nvSpPr>
+        <p:spPr>
+          <a:xfrm>
+            <a:off x="6309360" y="1975104"/>
+            <a:ext cx="5541264" cy="530352"/>
+          </a:xfrm>
+          <a:prstGeom prst="rect">
+            <a:avLst/>
+          </a:prstGeom>
+          <a:solidFill>
+            <a:srgbClr val="E3EBF4"/>
+          </a:solidFill>
+          <a:ln>
+            <a:noFill/>
+          </a:ln>
+          <a:effectLst/>
+        </p:spPr>
+        <p:style>
+          <a:lnRef idx="1">
+            <a:schemeClr val="accent1"/>
+          </a:lnRef>
+          <a:fillRef idx="3">
+            <a:schemeClr val="accent1"/>
+          </a:fillRef>
+          <a:effectRef idx="2">
+            <a:schemeClr val="accent1"/>
+          </a:effectRef>
+          <a:fontRef idx="minor">
+            <a:schemeClr val="lt1"/>
+          </a:fontRef>
+        </p:style>
+        <p:txBody>
+          <a:bodyPr rtlCol="0" anchor="ctr" wrap="square" lIns="128016" rIns="73152" bIns="36576"/>
+          <a:lstStyle/>
+          <a:p>
+            <a:pPr latinLnBrk="1"/>
+            <a:r>
+              <a:rPr sz="1100" b="1" lang="zh-CN">
+                <a:solidFill>
+                  <a:srgbClr val="1F4E79"/>
+                </a:solidFill>
+                <a:ea typeface="微软雅黑"/>
+              </a:rPr>
+              <a:t>① 监控</a:t>
+            </a:r>
+          </a:p>
+          <a:p>
+            <a:pPr latinLnBrk="1"/>
+            <a:r>
+              <a:rPr sz="850" b="0" lang="zh-CN">
+                <a:solidFill>
+                  <a:srgbClr val="3D3C3A"/>
+                </a:solidFill>
+                <a:ea typeface="微软雅黑"/>
+              </a:rPr>
+              <a:t>捕捉分类批量漂移、同一交易对手归类不一致、覆盖率或命中率明显下降、新描述未被任何引擎识别等异常信号。</a:t>
+            </a:r>
+          </a:p>
+        </p:txBody>
+      </p:sp>
+      <p:sp>
+        <p:nvSpPr>
+          <p:cNvPr id="39" name="Rectangle 38"/>
+          <p:cNvSpPr/>
+          <p:nvPr/>
+        </p:nvSpPr>
+        <p:spPr>
+          <a:xfrm>
+            <a:off x="6309360" y="1975104"/>
+            <a:ext cx="5541264" cy="54864"/>
+          </a:xfrm>
+          <a:prstGeom prst="rect">
+            <a:avLst/>
+          </a:prstGeom>
+          <a:solidFill>
+            <a:srgbClr val="1F4E79"/>
+          </a:solidFill>
+          <a:ln>
+            <a:noFill/>
+          </a:ln>
+          <a:effectLst/>
+        </p:spPr>
+        <p:style>
+          <a:lnRef idx="1">
+            <a:schemeClr val="accent1"/>
+          </a:lnRef>
+          <a:fillRef idx="3">
+            <a:schemeClr val="accent1"/>
+          </a:fillRef>
+          <a:effectRef idx="2">
+            <a:schemeClr val="accent1"/>
+          </a:effectRef>
+          <a:fontRef idx="minor">
+            <a:schemeClr val="lt1"/>
+          </a:fontRef>
+        </p:style>
+        <p:txBody>
+          <a:bodyPr rtlCol="0" anchor="ctr"/>
+          <a:lstStyle/>
+          <a:p>
+            <a:pPr algn="ctr"/>
+          </a:p>
+        </p:txBody>
+      </p:sp>
+      <p:sp>
+        <p:nvSpPr>
+          <p:cNvPr id="40" name="Rectangle 39"/>
+          <p:cNvSpPr/>
+          <p:nvPr/>
+        </p:nvSpPr>
+        <p:spPr>
+          <a:xfrm>
+            <a:off x="6309360" y="2587752"/>
+            <a:ext cx="5541264" cy="530352"/>
+          </a:xfrm>
+          <a:prstGeom prst="rect">
+            <a:avLst/>
+          </a:prstGeom>
+          <a:solidFill>
+            <a:srgbClr val="E3EBF4"/>
+          </a:solidFill>
+          <a:ln>
+            <a:noFill/>
+          </a:ln>
+          <a:effectLst/>
+        </p:spPr>
+        <p:style>
+          <a:lnRef idx="1">
+            <a:schemeClr val="accent1"/>
+          </a:lnRef>
+          <a:fillRef idx="3">
+            <a:schemeClr val="accent1"/>
+          </a:fillRef>
+          <a:effectRef idx="2">
+            <a:schemeClr val="accent1"/>
+          </a:effectRef>
+          <a:fontRef idx="minor">
+            <a:schemeClr val="lt1"/>
+          </a:fontRef>
+        </p:style>
+        <p:txBody>
+          <a:bodyPr rtlCol="0" anchor="ctr" wrap="square" lIns="128016" rIns="73152" bIns="36576"/>
+          <a:lstStyle/>
+          <a:p>
+            <a:pPr latinLnBrk="1"/>
+            <a:r>
+              <a:rPr sz="1100" b="1" lang="zh-CN">
+                <a:solidFill>
+                  <a:srgbClr val="1F4E79"/>
+                </a:solidFill>
+                <a:ea typeface="微软雅黑"/>
+              </a:rPr>
+              <a:t>② 定位</a:t>
+            </a:r>
+          </a:p>
+          <a:p>
+            <a:pPr latinLnBrk="1"/>
+            <a:r>
+              <a:rPr sz="850" b="0" lang="zh-CN">
+                <a:solidFill>
+                  <a:srgbClr val="3D3C3A"/>
+                </a:solidFill>
+                <a:ea typeface="微软雅黑"/>
+              </a:rPr>
+              <a:t>对异常逐笔细挖交易描述、金额、方向、交易对手、命中引擎和分类依据，归类为五类原因。</a:t>
+            </a:r>
+          </a:p>
+        </p:txBody>
+      </p:sp>
+      <p:sp>
+        <p:nvSpPr>
+          <p:cNvPr id="41" name="Rectangle 40"/>
+          <p:cNvSpPr/>
+          <p:nvPr/>
+        </p:nvSpPr>
+        <p:spPr>
+          <a:xfrm>
+            <a:off x="6309360" y="2587752"/>
+            <a:ext cx="5541264" cy="54864"/>
+          </a:xfrm>
+          <a:prstGeom prst="rect">
+            <a:avLst/>
+          </a:prstGeom>
+          <a:solidFill>
+            <a:srgbClr val="1F4E79"/>
+          </a:solidFill>
+          <a:ln>
+            <a:noFill/>
+          </a:ln>
+          <a:effectLst/>
+        </p:spPr>
+        <p:style>
+          <a:lnRef idx="1">
+            <a:schemeClr val="accent1"/>
+          </a:lnRef>
+          <a:fillRef idx="3">
+            <a:schemeClr val="accent1"/>
+          </a:fillRef>
+          <a:effectRef idx="2">
+            <a:schemeClr val="accent1"/>
+          </a:effectRef>
+          <a:fontRef idx="minor">
+            <a:schemeClr val="lt1"/>
+          </a:fontRef>
+        </p:style>
+        <p:txBody>
+          <a:bodyPr rtlCol="0" anchor="ctr"/>
+          <a:lstStyle/>
+          <a:p>
+            <a:pPr algn="ctr"/>
+          </a:p>
+        </p:txBody>
+      </p:sp>
+      <p:sp>
+        <p:nvSpPr>
+          <p:cNvPr id="42" name="Rectangle 41"/>
+          <p:cNvSpPr/>
+          <p:nvPr/>
+        </p:nvSpPr>
+        <p:spPr>
+          <a:xfrm>
+            <a:off x="6309360" y="3200400"/>
+            <a:ext cx="5541264" cy="530352"/>
+          </a:xfrm>
+          <a:prstGeom prst="rect">
+            <a:avLst/>
+          </a:prstGeom>
+          <a:solidFill>
+            <a:srgbClr val="E3EBF4"/>
+          </a:solidFill>
+          <a:ln>
+            <a:noFill/>
+          </a:ln>
+          <a:effectLst/>
+        </p:spPr>
+        <p:style>
+          <a:lnRef idx="1">
+            <a:schemeClr val="accent1"/>
+          </a:lnRef>
+          <a:fillRef idx="3">
+            <a:schemeClr val="accent1"/>
+          </a:fillRef>
+          <a:effectRef idx="2">
+            <a:schemeClr val="accent1"/>
+          </a:effectRef>
+          <a:fontRef idx="minor">
+            <a:schemeClr val="lt1"/>
+          </a:fontRef>
+        </p:style>
+        <p:txBody>
+          <a:bodyPr rtlCol="0" anchor="ctr" wrap="square" lIns="128016" rIns="73152" bIns="36576"/>
+          <a:lstStyle/>
+          <a:p>
+            <a:pPr latinLnBrk="1"/>
+            <a:r>
+              <a:rPr sz="1100" b="1" lang="zh-CN">
+                <a:solidFill>
+                  <a:srgbClr val="1F4E79"/>
+                </a:solidFill>
+                <a:ea typeface="微软雅黑"/>
+              </a:rPr>
+              <a:t>③ 输出</a:t>
+            </a:r>
+          </a:p>
+          <a:p>
+            <a:pPr latinLnBrk="1"/>
+            <a:r>
+              <a:rPr sz="850" b="0" lang="zh-CN">
+                <a:solidFill>
+                  <a:srgbClr val="3D3C3A"/>
+                </a:solidFill>
+                <a:ea typeface="微软雅黑"/>
+              </a:rPr>
+              <a:t>生成按优先级排序的诊断报告，直接标明问题引擎、需检查的规则、缺失的商户／关键词及应补充的知识库，供业务确认。</a:t>
+            </a:r>
+          </a:p>
+        </p:txBody>
+      </p:sp>
+      <p:sp>
+        <p:nvSpPr>
+          <p:cNvPr id="43" name="Rectangle 42"/>
+          <p:cNvSpPr/>
+          <p:nvPr/>
+        </p:nvSpPr>
+        <p:spPr>
+          <a:xfrm>
+            <a:off x="6309360" y="3200400"/>
+            <a:ext cx="5541264" cy="54864"/>
+          </a:xfrm>
+          <a:prstGeom prst="rect">
+            <a:avLst/>
+          </a:prstGeom>
+          <a:solidFill>
+            <a:srgbClr val="1F4E79"/>
+          </a:solidFill>
+          <a:ln>
+            <a:noFill/>
+          </a:ln>
+          <a:effectLst/>
+        </p:spPr>
+        <p:style>
+          <a:lnRef idx="1">
+            <a:schemeClr val="accent1"/>
+          </a:lnRef>
+          <a:fillRef idx="3">
+            <a:schemeClr val="accent1"/>
+          </a:fillRef>
+          <a:effectRef idx="2">
+            <a:schemeClr val="accent1"/>
+          </a:effectRef>
+          <a:fontRef idx="minor">
+            <a:schemeClr val="lt1"/>
+          </a:fontRef>
+        </p:style>
+        <p:txBody>
+          <a:bodyPr rtlCol="0" anchor="ctr"/>
+          <a:lstStyle/>
+          <a:p>
+            <a:pPr algn="ctr"/>
+          </a:p>
+        </p:txBody>
+      </p:sp>
+    </p:spTree>
+  </p:cSld>
+  <p:clrMapOvr>
+    <a:masterClrMapping/>
+  </p:clrMapOvr>
+</p:sld>
+</file>
+
+<file path=ppt/slides/slide5.xml><?xml version="1.0" encoding="utf-8"?>
 <p:sld xmlns:a="http://schemas.openxmlformats.org/drawingml/2006/main" xmlns:r="http://schemas.openxmlformats.org/officeDocument/2006/relationships" xmlns:p="http://schemas.openxmlformats.org/presentationml/2006/main">
   <p:cSld>
     <p:spTree>

--- a/银行流水分享_V1.7.pptx
+++ b/银行流水分享_V1.7.pptx
@@ -18392,7 +18392,6 @@
                         <a:srgbClr val="0A0A0A"/>
                       </a:solidFill>
                     </a:lnB>
-                    <a:noFill/>
                   </a:tcPr>
                 </a:tc>
                 <a:tc>
@@ -18428,7 +18427,6 @@
                         <a:srgbClr val="0A0A0A"/>
                       </a:solidFill>
                     </a:lnB>
-                    <a:noFill/>
                   </a:tcPr>
                 </a:tc>
                 <a:tc>
@@ -18464,7 +18462,6 @@
                         <a:srgbClr val="0A0A0A"/>
                       </a:solidFill>
                     </a:lnB>
-                    <a:noFill/>
                   </a:tcPr>
                 </a:tc>
                 <a:extLst>
@@ -19315,7 +19312,6 @@
                         <a:srgbClr val="0A0A0A"/>
                       </a:solidFill>
                     </a:lnB>
-                    <a:noFill/>
                   </a:tcPr>
                 </a:tc>
                 <a:tc>
@@ -19351,7 +19347,6 @@
                         <a:srgbClr val="0A0A0A"/>
                       </a:solidFill>
                     </a:lnB>
-                    <a:noFill/>
                   </a:tcPr>
                 </a:tc>
                 <a:tc>
@@ -19387,7 +19382,6 @@
                         <a:srgbClr val="0A0A0A"/>
                       </a:solidFill>
                     </a:lnB>
-                    <a:noFill/>
                   </a:tcPr>
                 </a:tc>
                 <a:extLst>
@@ -20105,7 +20099,6 @@
                         <a:srgbClr val="0A0A0A"/>
                       </a:solidFill>
                     </a:lnB>
-                    <a:noFill/>
                   </a:tcPr>
                 </a:tc>
                 <a:tc>
@@ -20141,7 +20134,6 @@
                         <a:srgbClr val="0A0A0A"/>
                       </a:solidFill>
                     </a:lnB>
-                    <a:noFill/>
                   </a:tcPr>
                 </a:tc>
                 <a:tc>
@@ -20177,7 +20169,6 @@
                         <a:srgbClr val="0A0A0A"/>
                       </a:solidFill>
                     </a:lnB>
-                    <a:noFill/>
                   </a:tcPr>
                 </a:tc>
                 <a:extLst>
@@ -22784,7 +22775,7 @@
             <a:avLst/>
           </a:prstGeom>
           <a:solidFill>
-            <a:srgbClr val="E3EBF4"/>
+            <a:srgbClr val="F0F0F0"/>
           </a:solidFill>
           <a:ln>
             <a:noFill/>
@@ -22893,7 +22884,7 @@
             <a:avLst/>
           </a:prstGeom>
           <a:solidFill>
-            <a:srgbClr val="E3EBF4"/>
+            <a:srgbClr val="F0F0F0"/>
           </a:solidFill>
           <a:ln>
             <a:noFill/>
@@ -23002,7 +22993,7 @@
             <a:avLst/>
           </a:prstGeom>
           <a:solidFill>
-            <a:srgbClr val="E3EBF4"/>
+            <a:srgbClr val="F0F0F0"/>
           </a:solidFill>
           <a:ln>
             <a:noFill/>

--- a/银行流水分享_V1.7.pptx
+++ b/银行流水分享_V1.7.pptx
@@ -7,8 +7,7 @@
   <p:sldIdLst>
     <p:sldId id="260" r:id="rId2"/>
     <p:sldId id="269" r:id="rId3"/>
-    <p:sldId id="267" r:id="rId4"/>
-    <p:sldId id="280" r:id="rId15"/>
+    <p:sldId id="280" r:id="rId4"/>
     <p:sldId id="279" r:id="rId5"/>
   </p:sldIdLst>
   <p:sldSz cx="12192000" cy="6858000"/>
@@ -137,7 +136,7 @@
           <p14:sldIdLst>
             <p14:sldId id="260"/>
             <p14:sldId id="269"/>
-            <p14:sldId id="267"/>
+            <p14:sldId id="280"/>
             <p14:sldId id="279"/>
           </p14:sldIdLst>
         </p14:section>
@@ -2433,7 +2432,7 @@
           <p:nvPr>
             <p:extLst>
               <p:ext uri="{F5677B7D-0D2A-4D9B-9A5C-6D8D7D0E5A5D}">
-                <pptd:line xmlns:pptd="https://kimi-design.msh.team/pptd/2026" xmlns:mc="http://schemas.openxmlformats.org/markup-compatibility/2006" xmlns:m="http://schemas.openxmlformats.org/officeDocument/2006/math" xmlns:cx="http://schemas.microsoft.com/office/drawing/2014/chartex" xmlns:c="http://schemas.openxmlformats.org/drawingml/2006/chart" xmlns:a14="http://schemas.microsoft.com/office/drawing/2010/main" xmlns="" encoding="base64url">eyJ2aWV3Qm94IjpbMSwzNDBdLCJwb2ludHMiOiIwLDAgMCwzNDAifQ</pptd:line>
+                <pptd:line xmlns="" xmlns:a14="http://schemas.microsoft.com/office/drawing/2010/main" xmlns:c="http://schemas.openxmlformats.org/drawingml/2006/chart" xmlns:cx="http://schemas.microsoft.com/office/drawing/2014/chartex" xmlns:m="http://schemas.openxmlformats.org/officeDocument/2006/math" xmlns:mc="http://schemas.openxmlformats.org/markup-compatibility/2006" xmlns:pptd="https://kimi-design.msh.team/pptd/2026" encoding="base64url">eyJ2aWV3Qm94IjpbMSwzNDBdLCJwb2ludHMiOiIwLDAgMCwzNDAifQ</pptd:line>
               </p:ext>
             </p:extLst>
           </p:nvPr>
@@ -2604,7 +2603,7 @@
           <p:nvPr>
             <p:extLst>
               <p:ext uri="{F5677B7D-0D2A-4D9B-9A5C-6D8D7D0E5A5D}">
-                <pptd:line xmlns:pptd="https://kimi-design.msh.team/pptd/2026" xmlns:mc="http://schemas.openxmlformats.org/markup-compatibility/2006" xmlns:m="http://schemas.openxmlformats.org/officeDocument/2006/math" xmlns:cx="http://schemas.microsoft.com/office/drawing/2014/chartex" xmlns:c="http://schemas.openxmlformats.org/drawingml/2006/chart" xmlns:a14="http://schemas.microsoft.com/office/drawing/2010/main" xmlns="" encoding="base64url">eyJ2aWV3Qm94IjpbMzc2LDFdLCJwb2ludHMiOiIwLDAgMzc2LDAifQ</pptd:line>
+                <pptd:line xmlns="" xmlns:a14="http://schemas.microsoft.com/office/drawing/2010/main" xmlns:c="http://schemas.openxmlformats.org/drawingml/2006/chart" xmlns:cx="http://schemas.microsoft.com/office/drawing/2014/chartex" xmlns:m="http://schemas.openxmlformats.org/officeDocument/2006/math" xmlns:mc="http://schemas.openxmlformats.org/markup-compatibility/2006" xmlns:pptd="https://kimi-design.msh.team/pptd/2026" encoding="base64url">eyJ2aWV3Qm94IjpbMzc2LDFdLCJwb2ludHMiOiIwLDAgMzc2LDAifQ</pptd:line>
               </p:ext>
             </p:extLst>
           </p:nvPr>
@@ -2728,7 +2727,7 @@
           <p:nvPr>
             <p:extLst>
               <p:ext uri="{F5677B7D-0D2A-4D9B-9A5C-6D8D7D0E5A5D}">
-                <pptd:line xmlns:pptd="https://kimi-design.msh.team/pptd/2026" xmlns:mc="http://schemas.openxmlformats.org/markup-compatibility/2006" xmlns:m="http://schemas.openxmlformats.org/officeDocument/2006/math" xmlns:cx="http://schemas.microsoft.com/office/drawing/2014/chartex" xmlns:c="http://schemas.openxmlformats.org/drawingml/2006/chart" xmlns:a14="http://schemas.microsoft.com/office/drawing/2010/main" xmlns="" encoding="base64url">eyJ2aWV3Qm94IjpbMzc2LDFdLCJwb2ludHMiOiIwLDAgMzc2LDAifQ</pptd:line>
+                <pptd:line xmlns="" xmlns:a14="http://schemas.microsoft.com/office/drawing/2010/main" xmlns:c="http://schemas.openxmlformats.org/drawingml/2006/chart" xmlns:cx="http://schemas.microsoft.com/office/drawing/2014/chartex" xmlns:m="http://schemas.openxmlformats.org/officeDocument/2006/math" xmlns:mc="http://schemas.openxmlformats.org/markup-compatibility/2006" xmlns:pptd="https://kimi-design.msh.team/pptd/2026" encoding="base64url">eyJ2aWV3Qm94IjpbMzc2LDFdLCJwb2ludHMiOiIwLDAgMzc2LDAifQ</pptd:line>
               </p:ext>
             </p:extLst>
           </p:nvPr>
@@ -2872,7 +2871,7 @@
           <p:nvPr>
             <p:extLst>
               <p:ext uri="{F5677B7D-0D2A-4D9B-9A5C-6D8D7D0E5A5D}">
-                <pptd:line xmlns:pptd="https://kimi-design.msh.team/pptd/2026" xmlns:mc="http://schemas.openxmlformats.org/markup-compatibility/2006" xmlns:m="http://schemas.openxmlformats.org/officeDocument/2006/math" xmlns:cx="http://schemas.microsoft.com/office/drawing/2014/chartex" xmlns:c="http://schemas.openxmlformats.org/drawingml/2006/chart" xmlns:a14="http://schemas.microsoft.com/office/drawing/2010/main" xmlns="" encoding="base64url">eyJ2aWV3Qm94IjpbMzc2LDFdLCJwb2ludHMiOiIwLDAgMzc2LDAifQ</pptd:line>
+                <pptd:line xmlns="" xmlns:a14="http://schemas.microsoft.com/office/drawing/2010/main" xmlns:c="http://schemas.openxmlformats.org/drawingml/2006/chart" xmlns:cx="http://schemas.microsoft.com/office/drawing/2014/chartex" xmlns:m="http://schemas.openxmlformats.org/officeDocument/2006/math" xmlns:mc="http://schemas.openxmlformats.org/markup-compatibility/2006" xmlns:pptd="https://kimi-design.msh.team/pptd/2026" encoding="base64url">eyJ2aWV3Qm94IjpbMzc2LDFdLCJwb2ludHMiOiIwLDAgMzc2LDAifQ</pptd:line>
               </p:ext>
             </p:extLst>
           </p:nvPr>
@@ -3036,7 +3035,7 @@
             <p:nvPr>
               <p:extLst>
                 <p:ext uri="{F5677B7D-0D2A-4D9B-9A5C-6D8D7D0E5A5D}">
-                  <pptd:line xmlns="" xmlns:a14="http://schemas.microsoft.com/office/drawing/2010/main" xmlns:c="http://schemas.openxmlformats.org/drawingml/2006/chart" xmlns:cx="http://schemas.microsoft.com/office/drawing/2014/chartex" xmlns:m="http://schemas.openxmlformats.org/officeDocument/2006/math" xmlns:mc="http://schemas.openxmlformats.org/markup-compatibility/2006" xmlns:pptd="https://kimi-design.msh.team/pptd/2026" encoding="base64url">eyJ2aWV3Qm94IjpbODU2LDFdLCJwb2ludHMiOiIwLDAgODU2LDAifQ</pptd:line>
+                  <pptd:line xmlns:pptd="https://kimi-design.msh.team/pptd/2026" xmlns:mc="http://schemas.openxmlformats.org/markup-compatibility/2006" xmlns:m="http://schemas.openxmlformats.org/officeDocument/2006/math" xmlns:cx="http://schemas.microsoft.com/office/drawing/2014/chartex" xmlns:c="http://schemas.openxmlformats.org/drawingml/2006/chart" xmlns:a14="http://schemas.microsoft.com/office/drawing/2010/main" xmlns="" encoding="base64url">eyJ2aWV3Qm94IjpbODU2LDFdLCJwb2ludHMiOiIwLDAgODU2LDAifQ</pptd:line>
                 </p:ext>
               </p:extLst>
             </p:nvPr>
@@ -6166,7 +6165,7 @@
         </p:nvSpPr>
         <p:spPr>
           <a:xfrm>
-            <a:off x="603504" y="210312"/>
+            <a:off x="603504" y="65149"/>
             <a:ext cx="10972800" cy="621792"/>
           </a:xfrm>
           <a:prstGeom prst="rect">
@@ -6224,8 +6223,8 @@
         </p:nvSpPr>
         <p:spPr>
           <a:xfrm>
-            <a:off x="511115" y="736600"/>
-            <a:ext cx="10901632" cy="438133"/>
+            <a:off x="511115" y="566724"/>
+            <a:ext cx="10901632" cy="443391"/>
           </a:xfrm>
           <a:prstGeom prst="rect">
             <a:avLst/>
@@ -6256,21 +6255,16 @@
               <a:defRPr/>
             </a:pPr>
             <a:r>
-              <a:rPr kumimoji="0" lang="zh-CN" altLang="en-US" sz="1800" b="0" i="0" u="none" strike="noStrike" kern="1200" cap="none" spc="0" normalizeH="0" baseline="0" noProof="1">
-                <a:ln>
-                  <a:noFill/>
-                </a:ln>
-                <a:solidFill>
-                  <a:srgbClr val="606060"/>
-                </a:solidFill>
-                <a:effectLst/>
-                <a:uLnTx/>
-                <a:uFillTx/>
-                <a:latin typeface="微软雅黑" panose="020B0503020204020204" pitchFamily="34" charset="-122"/>
-                <a:ea typeface="微软雅黑" panose="020B0503020204020204" pitchFamily="34" charset="-122"/>
-                <a:cs typeface="+mn-cs"/>
-              </a:rPr>
-              <a:t>原始银行流水经大模型识别与分类，形成交易明细与用户汇总两级视图，直接回答新增还款能力</a:t>
+              <a:rPr lang="zh-CN" altLang="en-US" dirty="0"/>
+              <a:t>原始流水 → 单笔交易识别 → 用户</a:t>
+            </a:r>
+            <a:r>
+              <a:rPr lang="en-US" altLang="zh-CN" dirty="0"/>
+              <a:t>/</a:t>
+            </a:r>
+            <a:r>
+              <a:rPr lang="zh-CN" altLang="en-US" dirty="0"/>
+              <a:t>贷款汇总</a:t>
             </a:r>
             <a:endParaRPr kumimoji="0" lang="en-US" altLang="zh-CN" sz="1800" b="0" i="0" u="none" strike="noStrike" kern="1200" cap="none" spc="0" normalizeH="0" baseline="0" noProof="1">
               <a:ln>
@@ -6291,55 +6285,6 @@
       </p:sp>
       <p:sp>
         <p:nvSpPr>
-          <p:cNvPr id="4" name="divider">
-            <a:extLst>
-              <a:ext uri="{FF2B5EF4-FFF2-40B4-BE49-F238E27FC236}">
-                <a16:creationId xmlns:a16="http://schemas.microsoft.com/office/drawing/2014/main" id="{6D65428F-6A5F-41C4-ACB7-27279799D716}"/>
-              </a:ext>
-            </a:extLst>
-          </p:cNvPr>
-          <p:cNvSpPr/>
-          <p:nvPr>
-            <p:extLst>
-              <p:ext uri="{F5677B7D-0D2A-4D9B-9A5C-6D8D7D0E5A5D}">
-                <pptd:line xmlns="" xmlns:a14="http://schemas.microsoft.com/office/drawing/2010/main" xmlns:c="http://schemas.openxmlformats.org/drawingml/2006/chart" xmlns:cx="http://schemas.microsoft.com/office/drawing/2014/chartex" xmlns:m="http://schemas.openxmlformats.org/officeDocument/2006/math" xmlns:mc="http://schemas.openxmlformats.org/markup-compatibility/2006" xmlns:pptd="https://kimi-design.msh.team/pptd/2026" encoding="base64url">eyJ2aWV3Qm94IjpbODU2LDFdLCJwb2ludHMiOiIwLDAgODU2LDAifQ</pptd:line>
-              </p:ext>
-            </p:extLst>
-          </p:nvPr>
-        </p:nvSpPr>
-        <p:spPr>
-          <a:xfrm>
-            <a:off x="431800" y="1092200"/>
-            <a:ext cx="10871200" cy="12700"/>
-          </a:xfrm>
-          <a:custGeom>
-            <a:avLst/>
-            <a:gdLst/>
-            <a:ahLst/>
-            <a:cxnLst/>
-            <a:rect l="l" t="t" r="r" b="b"/>
-            <a:pathLst>
-              <a:path w="856" h="1">
-                <a:moveTo>
-                  <a:pt x="0" y="0"/>
-                </a:moveTo>
-                <a:lnTo>
-                  <a:pt x="856" y="0"/>
-                </a:lnTo>
-              </a:path>
-            </a:pathLst>
-          </a:custGeom>
-          <a:noFill/>
-          <a:ln w="9525" cap="rnd">
-            <a:solidFill>
-              <a:srgbClr val="D6D6D6"/>
-            </a:solidFill>
-            <a:round/>
-          </a:ln>
-        </p:spPr>
-      </p:sp>
-      <p:sp>
-        <p:nvSpPr>
           <p:cNvPr id="6" name="s1-title">
             <a:extLst>
               <a:ext uri="{FF2B5EF4-FFF2-40B4-BE49-F238E27FC236}">
@@ -6352,7 +6297,7 @@
         </p:nvSpPr>
         <p:spPr>
           <a:xfrm>
-            <a:off x="584200" y="1252728"/>
+            <a:off x="568385" y="1113405"/>
             <a:ext cx="3810000" cy="228600"/>
           </a:xfrm>
           <a:prstGeom prst="rect">
@@ -6385,7 +6330,7 @@
               <a:defRPr/>
             </a:pPr>
             <a:r>
-              <a:rPr kumimoji="0" lang="en-US" altLang="zh-CN" sz="1200" b="1" i="0" u="none" strike="noStrike" kern="1200" cap="none" spc="0" normalizeH="0" baseline="0" noProof="0">
+              <a:rPr kumimoji="0" lang="en-US" altLang="zh-CN" sz="1200" b="1" i="0" u="none" strike="noStrike" kern="1200" cap="none" spc="0" normalizeH="0" baseline="0" noProof="0" dirty="0">
                 <a:ln>
                   <a:noFill/>
                 </a:ln>
@@ -6402,7 +6347,7 @@
               <a:t>1. </a:t>
             </a:r>
             <a:r>
-              <a:rPr kumimoji="0" lang="zh-CN" altLang="en-US" sz="1200" b="1" i="0" u="none" strike="noStrike" kern="1200" cap="none" spc="0" normalizeH="0" baseline="0" noProof="0">
+              <a:rPr kumimoji="0" lang="zh-CN" altLang="en-US" sz="1200" b="1" i="0" u="none" strike="noStrike" kern="1200" cap="none" spc="0" normalizeH="0" baseline="0" noProof="0" dirty="0">
                 <a:ln>
                   <a:noFill/>
                 </a:ln>
@@ -6449,7 +6394,7 @@
         </p:nvSpPr>
         <p:spPr>
           <a:xfrm>
-            <a:off x="635000" y="2662175"/>
+            <a:off x="568386" y="2523256"/>
             <a:ext cx="5943600" cy="228600"/>
           </a:xfrm>
           <a:prstGeom prst="rect">
@@ -6546,7 +6491,7 @@
         </p:nvSpPr>
         <p:spPr>
           <a:xfrm>
-            <a:off x="634999" y="4169271"/>
+            <a:off x="568385" y="3989324"/>
             <a:ext cx="5943600" cy="228600"/>
           </a:xfrm>
           <a:prstGeom prst="rect">
@@ -6579,7 +6524,7 @@
               <a:defRPr/>
             </a:pPr>
             <a:r>
-              <a:rPr kumimoji="0" lang="en-US" altLang="zh-CN" sz="1200" b="1" i="0" u="none" strike="noStrike" kern="1200" cap="none" spc="0" normalizeH="0" baseline="0" noProof="0">
+              <a:rPr kumimoji="0" lang="en-US" altLang="zh-CN" sz="1200" b="1" i="0" u="none" strike="noStrike" kern="1200" cap="none" spc="0" normalizeH="0" baseline="0" noProof="0" dirty="0">
                 <a:ln>
                   <a:noFill/>
                 </a:ln>
@@ -6596,7 +6541,7 @@
               <a:t>3. </a:t>
             </a:r>
             <a:r>
-              <a:rPr kumimoji="0" lang="zh-CN" altLang="en-US" sz="1200" b="1" i="0" u="none" strike="noStrike" kern="1200" cap="none" spc="0" normalizeH="0" baseline="0" noProof="0">
+              <a:rPr kumimoji="0" lang="zh-CN" altLang="en-US" sz="1200" b="1" i="0" u="none" strike="noStrike" kern="1200" cap="none" spc="0" normalizeH="0" baseline="0" noProof="0" dirty="0">
                 <a:ln>
                   <a:noFill/>
                 </a:ln>
@@ -6641,10 +6586,16 @@
           <p:cNvGraphicFramePr>
             <a:graphicFrameLocks noGrp="1"/>
           </p:cNvGraphicFramePr>
-          <p:nvPr/>
+          <p:nvPr>
+            <p:extLst>
+              <p:ext uri="{D42A27DB-BD31-4B8C-83A1-F6EECF244321}">
+                <p14:modId xmlns:p14="http://schemas.microsoft.com/office/powerpoint/2010/main" val="4096992607"/>
+              </p:ext>
+            </p:extLst>
+          </p:nvPr>
         </p:nvGraphicFramePr>
         <p:xfrm>
-          <a:off x="650815" y="1550812"/>
+          <a:off x="568385" y="1435904"/>
           <a:ext cx="10901630" cy="1022238"/>
         </p:xfrm>
         <a:graphic>
@@ -6687,7 +6638,7 @@
                     <a:bodyPr/>
                     <a:lstStyle/>
                     <a:p>
-                      <a:pPr marL="0" algn="l" defTabSz="914400" rtl="0" eaLnBrk="1" latinLnBrk="0" hangingPunct="1"/>
+                      <a:pPr marL="0" algn="ctr" defTabSz="914400" rtl="0" eaLnBrk="1" latinLnBrk="0" hangingPunct="1"/>
                       <a:r>
                         <a:rPr sz="800" b="1" kern="1200" dirty="0" err="1">
                           <a:solidFill>
@@ -6732,7 +6683,7 @@
                     <a:bodyPr/>
                     <a:lstStyle/>
                     <a:p>
-                      <a:pPr marL="0" algn="l" defTabSz="914400" rtl="0" eaLnBrk="1" latinLnBrk="0" hangingPunct="1"/>
+                      <a:pPr marL="0" algn="ctr" defTabSz="914400" rtl="0" eaLnBrk="1" latinLnBrk="0" hangingPunct="1"/>
                       <a:r>
                         <a:rPr sz="800" b="1" kern="1200" dirty="0" err="1">
                           <a:solidFill>
@@ -6777,7 +6728,7 @@
                     <a:bodyPr/>
                     <a:lstStyle/>
                     <a:p>
-                      <a:pPr marL="0" algn="l" defTabSz="914400" rtl="0" eaLnBrk="1" latinLnBrk="0" hangingPunct="1"/>
+                      <a:pPr marL="0" algn="ctr" defTabSz="914400" rtl="0" eaLnBrk="1" latinLnBrk="0" hangingPunct="1"/>
                       <a:r>
                         <a:rPr sz="800" b="1" kern="1200" dirty="0" err="1">
                           <a:solidFill>
@@ -6822,7 +6773,7 @@
                     <a:bodyPr/>
                     <a:lstStyle/>
                     <a:p>
-                      <a:pPr marL="0" algn="l" defTabSz="914400" rtl="0" eaLnBrk="1" latinLnBrk="0" hangingPunct="1"/>
+                      <a:pPr marL="0" algn="ctr" defTabSz="914400" rtl="0" eaLnBrk="1" latinLnBrk="0" hangingPunct="1"/>
                       <a:r>
                         <a:rPr sz="800" b="1" kern="1200" dirty="0" err="1">
                           <a:solidFill>
@@ -6878,7 +6829,7 @@
                     <a:bodyPr/>
                     <a:lstStyle/>
                     <a:p>
-                      <a:pPr marL="0" algn="l" defTabSz="914400" rtl="0" eaLnBrk="1" latinLnBrk="0" hangingPunct="1"/>
+                      <a:pPr marL="0" algn="ctr" defTabSz="914400" rtl="0" eaLnBrk="1" latinLnBrk="0" hangingPunct="1"/>
                       <a:r>
                         <a:rPr sz="800" b="0" kern="1200" dirty="0">
                           <a:solidFill>
@@ -6921,7 +6872,7 @@
                     <a:bodyPr/>
                     <a:lstStyle/>
                     <a:p>
-                      <a:pPr marL="0" algn="l" defTabSz="914400" rtl="0" eaLnBrk="1" latinLnBrk="0" hangingPunct="1"/>
+                      <a:pPr marL="0" algn="ctr" defTabSz="914400" rtl="0" eaLnBrk="1" latinLnBrk="0" hangingPunct="1"/>
                       <a:r>
                         <a:rPr sz="800" b="0" kern="1200" dirty="0">
                           <a:solidFill>
@@ -6964,7 +6915,7 @@
                     <a:bodyPr/>
                     <a:lstStyle/>
                     <a:p>
-                      <a:pPr marL="0" algn="l" defTabSz="914400" rtl="0" eaLnBrk="1" latinLnBrk="0" hangingPunct="1"/>
+                      <a:pPr marL="0" algn="ctr" defTabSz="914400" rtl="0" eaLnBrk="1" latinLnBrk="0" hangingPunct="1"/>
                       <a:r>
                         <a:rPr sz="800" b="0" kern="1200" dirty="0">
                           <a:solidFill>
@@ -7007,7 +6958,7 @@
                     <a:bodyPr/>
                     <a:lstStyle/>
                     <a:p>
-                      <a:pPr marL="0" algn="l" defTabSz="914400" rtl="0" eaLnBrk="1" latinLnBrk="0" hangingPunct="1"/>
+                      <a:pPr marL="0" algn="ctr" defTabSz="914400" rtl="0" eaLnBrk="1" latinLnBrk="0" hangingPunct="1"/>
                       <a:r>
                         <a:rPr sz="800" b="0" kern="1200" dirty="0">
                           <a:solidFill>
@@ -7061,7 +7012,7 @@
                     <a:bodyPr/>
                     <a:lstStyle/>
                     <a:p>
-                      <a:pPr marL="0" algn="l" defTabSz="914400" rtl="0" eaLnBrk="1" latinLnBrk="0" hangingPunct="1"/>
+                      <a:pPr marL="0" algn="ctr" defTabSz="914400" rtl="0" eaLnBrk="1" latinLnBrk="0" hangingPunct="1"/>
                       <a:r>
                         <a:rPr sz="800" b="0" kern="1200" dirty="0">
                           <a:solidFill>
@@ -7104,7 +7055,7 @@
                     <a:bodyPr/>
                     <a:lstStyle/>
                     <a:p>
-                      <a:pPr marL="0" algn="l" defTabSz="914400" rtl="0" eaLnBrk="1" latinLnBrk="0" hangingPunct="1"/>
+                      <a:pPr marL="0" algn="ctr" defTabSz="914400" rtl="0" eaLnBrk="1" latinLnBrk="0" hangingPunct="1"/>
                       <a:r>
                         <a:rPr sz="800" b="0" kern="1200" dirty="0">
                           <a:solidFill>
@@ -7147,7 +7098,7 @@
                     <a:bodyPr/>
                     <a:lstStyle/>
                     <a:p>
-                      <a:pPr marL="0" algn="l" defTabSz="914400" rtl="0" eaLnBrk="1" latinLnBrk="0" hangingPunct="1"/>
+                      <a:pPr marL="0" algn="ctr" defTabSz="914400" rtl="0" eaLnBrk="1" latinLnBrk="0" hangingPunct="1"/>
                       <a:r>
                         <a:rPr sz="800" b="0" kern="1200" dirty="0">
                           <a:solidFill>
@@ -7190,7 +7141,7 @@
                     <a:bodyPr/>
                     <a:lstStyle/>
                     <a:p>
-                      <a:pPr marL="0" algn="l" defTabSz="914400" rtl="0" eaLnBrk="1" latinLnBrk="0" hangingPunct="1"/>
+                      <a:pPr marL="0" algn="ctr" defTabSz="914400" rtl="0" eaLnBrk="1" latinLnBrk="0" hangingPunct="1"/>
                       <a:r>
                         <a:rPr sz="800" b="0" kern="1200" dirty="0">
                           <a:solidFill>
@@ -7244,7 +7195,7 @@
                     <a:bodyPr/>
                     <a:lstStyle/>
                     <a:p>
-                      <a:pPr marL="0" algn="l" defTabSz="914400" rtl="0" eaLnBrk="1" latinLnBrk="0" hangingPunct="1"/>
+                      <a:pPr marL="0" algn="ctr" defTabSz="914400" rtl="0" eaLnBrk="1" latinLnBrk="0" hangingPunct="1"/>
                       <a:r>
                         <a:rPr sz="800" b="0" kern="1200">
                           <a:solidFill>
@@ -7287,7 +7238,7 @@
                     <a:bodyPr/>
                     <a:lstStyle/>
                     <a:p>
-                      <a:pPr marL="0" algn="l" defTabSz="914400" rtl="0" eaLnBrk="1" latinLnBrk="0" hangingPunct="1"/>
+                      <a:pPr marL="0" algn="ctr" defTabSz="914400" rtl="0" eaLnBrk="1" latinLnBrk="0" hangingPunct="1"/>
                       <a:r>
                         <a:rPr sz="800" b="0" kern="1200" dirty="0">
                           <a:solidFill>
@@ -7330,7 +7281,7 @@
                     <a:bodyPr/>
                     <a:lstStyle/>
                     <a:p>
-                      <a:pPr marL="0" algn="l" defTabSz="914400" rtl="0" eaLnBrk="1" latinLnBrk="0" hangingPunct="1"/>
+                      <a:pPr marL="0" algn="ctr" defTabSz="914400" rtl="0" eaLnBrk="1" latinLnBrk="0" hangingPunct="1"/>
                       <a:r>
                         <a:rPr sz="800" b="0" kern="1200" dirty="0">
                           <a:solidFill>
@@ -7373,7 +7324,7 @@
                     <a:bodyPr/>
                     <a:lstStyle/>
                     <a:p>
-                      <a:pPr marL="0" algn="l" defTabSz="914400" rtl="0" eaLnBrk="1" latinLnBrk="0" hangingPunct="1"/>
+                      <a:pPr marL="0" algn="ctr" defTabSz="914400" rtl="0" eaLnBrk="1" latinLnBrk="0" hangingPunct="1"/>
                       <a:r>
                         <a:rPr sz="800" b="0" kern="1200" dirty="0">
                           <a:solidFill>
@@ -7427,7 +7378,7 @@
                     <a:bodyPr/>
                     <a:lstStyle/>
                     <a:p>
-                      <a:pPr marL="0" algn="l" defTabSz="914400" rtl="0" eaLnBrk="1" latinLnBrk="0" hangingPunct="1"/>
+                      <a:pPr marL="0" algn="ctr" defTabSz="914400" rtl="0" eaLnBrk="1" latinLnBrk="0" hangingPunct="1"/>
                       <a:r>
                         <a:rPr sz="800" b="0" kern="1200">
                           <a:solidFill>
@@ -7470,7 +7421,7 @@
                     <a:bodyPr/>
                     <a:lstStyle/>
                     <a:p>
-                      <a:pPr marL="0" algn="l" defTabSz="914400" rtl="0" eaLnBrk="1" latinLnBrk="0" hangingPunct="1"/>
+                      <a:pPr marL="0" algn="ctr" defTabSz="914400" rtl="0" eaLnBrk="1" latinLnBrk="0" hangingPunct="1"/>
                       <a:r>
                         <a:rPr sz="800" b="0" kern="1200" dirty="0">
                           <a:solidFill>
@@ -7513,7 +7464,7 @@
                     <a:bodyPr/>
                     <a:lstStyle/>
                     <a:p>
-                      <a:pPr marL="0" algn="l" defTabSz="914400" rtl="0" eaLnBrk="1" latinLnBrk="0" hangingPunct="1"/>
+                      <a:pPr marL="0" algn="ctr" defTabSz="914400" rtl="0" eaLnBrk="1" latinLnBrk="0" hangingPunct="1"/>
                       <a:r>
                         <a:rPr sz="800" b="0" kern="1200">
                           <a:solidFill>
@@ -7556,7 +7507,7 @@
                     <a:bodyPr/>
                     <a:lstStyle/>
                     <a:p>
-                      <a:pPr marL="0" algn="l" defTabSz="914400" rtl="0" eaLnBrk="1" latinLnBrk="0" hangingPunct="1"/>
+                      <a:pPr marL="0" algn="ctr" defTabSz="914400" rtl="0" eaLnBrk="1" latinLnBrk="0" hangingPunct="1"/>
                       <a:r>
                         <a:rPr sz="800" b="0" kern="1200" dirty="0">
                           <a:solidFill>
@@ -7610,7 +7561,7 @@
                     <a:bodyPr/>
                     <a:lstStyle/>
                     <a:p>
-                      <a:pPr marL="0" algn="l" defTabSz="914400" rtl="0" eaLnBrk="1" latinLnBrk="0" hangingPunct="1"/>
+                      <a:pPr marL="0" algn="ctr" defTabSz="914400" rtl="0" eaLnBrk="1" latinLnBrk="0" hangingPunct="1"/>
                       <a:r>
                         <a:rPr sz="800" b="0" kern="1200">
                           <a:solidFill>
@@ -7653,7 +7604,7 @@
                     <a:bodyPr/>
                     <a:lstStyle/>
                     <a:p>
-                      <a:pPr marL="0" algn="l" defTabSz="914400" rtl="0" eaLnBrk="1" latinLnBrk="0" hangingPunct="1"/>
+                      <a:pPr marL="0" algn="ctr" defTabSz="914400" rtl="0" eaLnBrk="1" latinLnBrk="0" hangingPunct="1"/>
                       <a:r>
                         <a:rPr sz="800" b="0" kern="1200">
                           <a:solidFill>
@@ -7696,7 +7647,7 @@
                     <a:bodyPr/>
                     <a:lstStyle/>
                     <a:p>
-                      <a:pPr marL="0" algn="l" defTabSz="914400" rtl="0" eaLnBrk="1" latinLnBrk="0" hangingPunct="1"/>
+                      <a:pPr marL="0" algn="ctr" defTabSz="914400" rtl="0" eaLnBrk="1" latinLnBrk="0" hangingPunct="1"/>
                       <a:r>
                         <a:rPr sz="800" b="0" kern="1200">
                           <a:solidFill>
@@ -7739,7 +7690,7 @@
                     <a:bodyPr/>
                     <a:lstStyle/>
                     <a:p>
-                      <a:pPr marL="0" algn="l" defTabSz="914400" rtl="0" eaLnBrk="1" latinLnBrk="0" hangingPunct="1"/>
+                      <a:pPr marL="0" algn="ctr" defTabSz="914400" rtl="0" eaLnBrk="1" latinLnBrk="0" hangingPunct="1"/>
                       <a:r>
                         <a:rPr sz="800" b="0" kern="1200" dirty="0">
                           <a:solidFill>
@@ -7799,74 +7750,66 @@
           <p:cNvGraphicFramePr>
             <a:graphicFrameLocks noGrp="1"/>
           </p:cNvGraphicFramePr>
-          <p:nvPr/>
+          <p:nvPr>
+            <p:extLst>
+              <p:ext uri="{D42A27DB-BD31-4B8C-83A1-F6EECF244321}">
+                <p14:modId xmlns:p14="http://schemas.microsoft.com/office/powerpoint/2010/main" val="4233041013"/>
+              </p:ext>
+            </p:extLst>
+          </p:nvPr>
         </p:nvGraphicFramePr>
         <p:xfrm>
-          <a:off x="634999" y="2940397"/>
-          <a:ext cx="10901631" cy="1113993"/>
+          <a:off x="568385" y="2839315"/>
+          <a:ext cx="10901631" cy="1022238"/>
         </p:xfrm>
         <a:graphic>
           <a:graphicData uri="http://schemas.openxmlformats.org/drawingml/2006/table">
             <a:tbl>
               <a:tblPr/>
               <a:tblGrid>
-                <a:gridCol w="767081">
+                <a:gridCol w="796947">
                   <a:extLst>
                     <a:ext uri="{9D8B030D-6E8A-4147-A177-3AD203B41FA5}">
                       <a16:colId xmlns:a16="http://schemas.microsoft.com/office/drawing/2014/main" val="20000"/>
                     </a:ext>
                   </a:extLst>
                 </a:gridCol>
-                <a:gridCol w="2346960">
+                <a:gridCol w="3717051">
                   <a:extLst>
                     <a:ext uri="{9D8B030D-6E8A-4147-A177-3AD203B41FA5}">
                       <a16:colId xmlns:a16="http://schemas.microsoft.com/office/drawing/2014/main" val="20001"/>
                     </a:ext>
                   </a:extLst>
                 </a:gridCol>
-                <a:gridCol w="1229360">
+                <a:gridCol w="1159622">
+                  <a:extLst>
+                    <a:ext uri="{9D8B030D-6E8A-4147-A177-3AD203B41FA5}">
+                      <a16:colId xmlns:a16="http://schemas.microsoft.com/office/drawing/2014/main" val="2631831465"/>
+                    </a:ext>
+                  </a:extLst>
+                </a:gridCol>
+                <a:gridCol w="1277223">
                   <a:extLst>
                     <a:ext uri="{9D8B030D-6E8A-4147-A177-3AD203B41FA5}">
                       <a16:colId xmlns:a16="http://schemas.microsoft.com/office/drawing/2014/main" val="20002"/>
                     </a:ext>
                   </a:extLst>
                 </a:gridCol>
-                <a:gridCol w="889000">
+                <a:gridCol w="923613">
                   <a:extLst>
                     <a:ext uri="{9D8B030D-6E8A-4147-A177-3AD203B41FA5}">
                       <a16:colId xmlns:a16="http://schemas.microsoft.com/office/drawing/2014/main" val="4140160165"/>
                     </a:ext>
                   </a:extLst>
                 </a:gridCol>
-                <a:gridCol w="651418">
+                <a:gridCol w="676780">
                   <a:extLst>
                     <a:ext uri="{9D8B030D-6E8A-4147-A177-3AD203B41FA5}">
                       <a16:colId xmlns:a16="http://schemas.microsoft.com/office/drawing/2014/main" val="2534051383"/>
                     </a:ext>
                   </a:extLst>
                 </a:gridCol>
-                <a:gridCol w="1012354">
-                  <a:extLst>
-                    <a:ext uri="{9D8B030D-6E8A-4147-A177-3AD203B41FA5}">
-                      <a16:colId xmlns:a16="http://schemas.microsoft.com/office/drawing/2014/main" val="1228048883"/>
-                    </a:ext>
-                  </a:extLst>
-                </a:gridCol>
-                <a:gridCol w="829993">
-                  <a:extLst>
-                    <a:ext uri="{9D8B030D-6E8A-4147-A177-3AD203B41FA5}">
-                      <a16:colId xmlns:a16="http://schemas.microsoft.com/office/drawing/2014/main" val="2445864241"/>
-                    </a:ext>
-                  </a:extLst>
-                </a:gridCol>
-                <a:gridCol w="913151">
-                  <a:extLst>
-                    <a:ext uri="{9D8B030D-6E8A-4147-A177-3AD203B41FA5}">
-                      <a16:colId xmlns:a16="http://schemas.microsoft.com/office/drawing/2014/main" val="516131836"/>
-                    </a:ext>
-                  </a:extLst>
-                </a:gridCol>
-                <a:gridCol w="2262314">
+                <a:gridCol w="2350395">
                   <a:extLst>
                     <a:ext uri="{9D8B030D-6E8A-4147-A177-3AD203B41FA5}">
                       <a16:colId xmlns:a16="http://schemas.microsoft.com/office/drawing/2014/main" val="994888910"/>
@@ -7968,7 +7911,7 @@
                           <a:latin typeface="微软雅黑"/>
                           <a:ea typeface="微软雅黑"/>
                         </a:rPr>
-                        <a:t>标准交易对手</a:t>
+                        <a:t>交易金额</a:t>
                       </a:r>
                       <a:endParaRPr sz="800" b="1" dirty="0">
                         <a:solidFill>
@@ -7989,10 +7932,14 @@
                     <a:lnT>
                       <a:noFill/>
                     </a:lnT>
-                    <a:lnB w="19050">
+                    <a:lnB w="19050" cap="flat" cmpd="sng" algn="ctr">
                       <a:solidFill>
                         <a:srgbClr val="0A0A0A"/>
                       </a:solidFill>
+                      <a:prstDash val="solid"/>
+                      <a:round/>
+                      <a:headEnd type="none" w="med" len="med"/>
+                      <a:tailEnd type="none" w="med" len="med"/>
                     </a:lnB>
                     <a:noFill/>
                   </a:tcPr>
@@ -8011,7 +7958,7 @@
                           <a:latin typeface="微软雅黑"/>
                           <a:ea typeface="微软雅黑"/>
                         </a:rPr>
-                        <a:t>主体类型</a:t>
+                        <a:t>标准交易对手</a:t>
                       </a:r>
                       <a:endParaRPr sz="800" b="1" dirty="0">
                         <a:solidFill>
@@ -8032,94 +7979,10 @@
                     <a:lnT>
                       <a:noFill/>
                     </a:lnT>
-                    <a:lnB w="19050" cap="flat" cmpd="sng" algn="ctr">
+                    <a:lnB w="19050">
                       <a:solidFill>
                         <a:srgbClr val="0A0A0A"/>
                       </a:solidFill>
-                      <a:prstDash val="solid"/>
-                      <a:round/>
-                      <a:headEnd type="none" w="med" len="med"/>
-                      <a:tailEnd type="none" w="med" len="med"/>
-                    </a:lnB>
-                    <a:noFill/>
-                  </a:tcPr>
-                </a:tc>
-                <a:tc>
-                  <a:txBody>
-                    <a:bodyPr/>
-                    <a:lstStyle/>
-                    <a:p>
-                      <a:pPr algn="l"/>
-                      <a:r>
-                        <a:rPr sz="800" b="1">
-                          <a:solidFill>
-                            <a:srgbClr val="0A0A0A"/>
-                          </a:solidFill>
-                          <a:latin typeface="微软雅黑"/>
-                          <a:ea typeface="微软雅黑"/>
-                        </a:rPr>
-                        <a:t>一级分类</a:t>
-                      </a:r>
-                    </a:p>
-                  </a:txBody>
-                  <a:tcPr marL="27432" marR="27432" marT="9144" marB="9144">
-                    <a:lnL>
-                      <a:noFill/>
-                    </a:lnL>
-                    <a:lnR>
-                      <a:noFill/>
-                    </a:lnR>
-                    <a:lnT>
-                      <a:noFill/>
-                    </a:lnT>
-                    <a:lnB w="19050" cap="flat" cmpd="sng" algn="ctr">
-                      <a:solidFill>
-                        <a:srgbClr val="0A0A0A"/>
-                      </a:solidFill>
-                      <a:prstDash val="solid"/>
-                      <a:round/>
-                      <a:headEnd type="none" w="med" len="med"/>
-                      <a:tailEnd type="none" w="med" len="med"/>
-                    </a:lnB>
-                    <a:noFill/>
-                  </a:tcPr>
-                </a:tc>
-                <a:tc>
-                  <a:txBody>
-                    <a:bodyPr/>
-                    <a:lstStyle/>
-                    <a:p>
-                      <a:pPr algn="l"/>
-                      <a:r>
-                        <a:rPr sz="800" b="1">
-                          <a:solidFill>
-                            <a:srgbClr val="0A0A0A"/>
-                          </a:solidFill>
-                          <a:latin typeface="微软雅黑"/>
-                          <a:ea typeface="微软雅黑"/>
-                        </a:rPr>
-                        <a:t>二级分类</a:t>
-                      </a:r>
-                    </a:p>
-                  </a:txBody>
-                  <a:tcPr marL="27432" marR="27432" marT="9144" marB="9144">
-                    <a:lnL>
-                      <a:noFill/>
-                    </a:lnL>
-                    <a:lnR>
-                      <a:noFill/>
-                    </a:lnR>
-                    <a:lnT>
-                      <a:noFill/>
-                    </a:lnT>
-                    <a:lnB w="19050" cap="flat" cmpd="sng" algn="ctr">
-                      <a:solidFill>
-                        <a:srgbClr val="0A0A0A"/>
-                      </a:solidFill>
-                      <a:prstDash val="solid"/>
-                      <a:round/>
-                      <a:headEnd type="none" w="med" len="med"/>
-                      <a:tailEnd type="none" w="med" len="med"/>
                     </a:lnB>
                     <a:noFill/>
                   </a:tcPr>
@@ -8138,7 +8001,7 @@
                           <a:latin typeface="微软雅黑"/>
                           <a:ea typeface="微软雅黑"/>
                         </a:rPr>
-                        <a:t>交易性质</a:t>
+                        <a:t>主体类型</a:t>
                       </a:r>
                       <a:endParaRPr sz="800" b="1" dirty="0">
                         <a:solidFill>
@@ -8178,22 +8041,15 @@
                     <a:p>
                       <a:pPr algn="l"/>
                       <a:r>
-                        <a:rPr sz="800" b="1" dirty="0" err="1">
+                        <a:rPr sz="800" b="1">
                           <a:solidFill>
                             <a:srgbClr val="0A0A0A"/>
                           </a:solidFill>
                           <a:latin typeface="微软雅黑"/>
                           <a:ea typeface="微软雅黑"/>
                         </a:rPr>
-                        <a:t>交易金额</a:t>
-                      </a:r>
-                      <a:endParaRPr sz="800" b="1" dirty="0">
-                        <a:solidFill>
-                          <a:srgbClr val="0A0A0A"/>
-                        </a:solidFill>
-                        <a:latin typeface="微软雅黑"/>
-                        <a:ea typeface="微软雅黑"/>
-                      </a:endParaRPr>
+                        <a:t>一级分类</a:t>
+                      </a:r>
                     </a:p>
                   </a:txBody>
                   <a:tcPr marL="27432" marR="27432" marT="9144" marB="9144">
@@ -8347,6 +8203,53 @@
                       <a:solidFill>
                         <a:srgbClr val="D6D6D6"/>
                       </a:solidFill>
+                    </a:lnB>
+                    <a:noFill/>
+                  </a:tcPr>
+                </a:tc>
+                <a:tc>
+                  <a:txBody>
+                    <a:bodyPr/>
+                    <a:lstStyle/>
+                    <a:p>
+                      <a:pPr marL="0" algn="l" defTabSz="914400" rtl="0" eaLnBrk="1" latinLnBrk="0" hangingPunct="1"/>
+                      <a:r>
+                        <a:rPr sz="800" b="0" kern="1200" dirty="0">
+                          <a:solidFill>
+                            <a:srgbClr val="0A0A0A"/>
+                          </a:solidFill>
+                          <a:latin typeface="微软雅黑" panose="020B0503020204020204" pitchFamily="34" charset="-122"/>
+                          <a:ea typeface="微软雅黑" panose="020B0503020204020204" pitchFamily="34" charset="-122"/>
+                          <a:cs typeface="+mn-cs"/>
+                        </a:rPr>
+                        <a:t>A$156</a:t>
+                      </a:r>
+                    </a:p>
+                  </a:txBody>
+                  <a:tcPr marL="27432" marR="27432" marT="9144" marB="9144">
+                    <a:lnL>
+                      <a:noFill/>
+                    </a:lnL>
+                    <a:lnR>
+                      <a:noFill/>
+                    </a:lnR>
+                    <a:lnT w="19050" cap="flat" cmpd="sng" algn="ctr">
+                      <a:solidFill>
+                        <a:srgbClr val="0A0A0A"/>
+                      </a:solidFill>
+                      <a:prstDash val="solid"/>
+                      <a:round/>
+                      <a:headEnd type="none" w="med" len="med"/>
+                      <a:tailEnd type="none" w="med" len="med"/>
+                    </a:lnT>
+                    <a:lnB w="9525" cap="flat" cmpd="sng" algn="ctr">
+                      <a:solidFill>
+                        <a:srgbClr val="D6D6D6"/>
+                      </a:solidFill>
+                      <a:prstDash val="solid"/>
+                      <a:round/>
+                      <a:headEnd type="none" w="med" len="med"/>
+                      <a:tailEnd type="none" w="med" len="med"/>
                     </a:lnB>
                     <a:noFill/>
                   </a:tcPr>
@@ -8511,7 +8414,7 @@
                           <a:ea typeface="微软雅黑" panose="020B0503020204020204" pitchFamily="34" charset="-122"/>
                           <a:cs typeface="+mn-cs"/>
                         </a:rPr>
-                        <a:t>SACC Loans</a:t>
+                        <a:t>交易方向、机构名称、产品关键词及历史交易模式</a:t>
                       </a:r>
                     </a:p>
                   </a:txBody>
@@ -8539,6 +8442,513 @@
                       <a:round/>
                       <a:headEnd type="none" w="med" len="med"/>
                       <a:tailEnd type="none" w="med" len="med"/>
+                    </a:lnB>
+                    <a:noFill/>
+                  </a:tcPr>
+                </a:tc>
+                <a:extLst>
+                  <a:ext uri="{0D108BD9-81ED-4DB2-BD59-A6C34878D82A}">
+                    <a16:rowId xmlns:a16="http://schemas.microsoft.com/office/drawing/2014/main" val="10001"/>
+                  </a:ext>
+                </a:extLst>
+              </a:tr>
+              <a:tr h="170373">
+                <a:tc>
+                  <a:txBody>
+                    <a:bodyPr/>
+                    <a:lstStyle/>
+                    <a:p>
+                      <a:pPr marL="0" algn="l" defTabSz="914400" rtl="0" eaLnBrk="1" latinLnBrk="0" hangingPunct="1"/>
+                      <a:r>
+                        <a:rPr sz="800" b="0" kern="1200">
+                          <a:solidFill>
+                            <a:srgbClr val="0A0A0A"/>
+                          </a:solidFill>
+                          <a:latin typeface="微软雅黑" panose="020B0503020204020204" pitchFamily="34" charset="-122"/>
+                          <a:ea typeface="微软雅黑" panose="020B0503020204020204" pitchFamily="34" charset="-122"/>
+                          <a:cs typeface="+mn-cs"/>
+                        </a:rPr>
+                        <a:t>2026/03/28</a:t>
+                      </a:r>
+                    </a:p>
+                  </a:txBody>
+                  <a:tcPr marL="27432" marR="27432" marT="9144" marB="9144">
+                    <a:lnL>
+                      <a:noFill/>
+                    </a:lnL>
+                    <a:lnR>
+                      <a:noFill/>
+                    </a:lnR>
+                    <a:lnT w="9525" cap="flat" cmpd="sng" algn="ctr">
+                      <a:solidFill>
+                        <a:srgbClr val="D6D6D6"/>
+                      </a:solidFill>
+                      <a:prstDash val="solid"/>
+                      <a:round/>
+                      <a:headEnd type="none" w="med" len="med"/>
+                      <a:tailEnd type="none" w="med" len="med"/>
+                    </a:lnT>
+                    <a:lnB w="9525">
+                      <a:solidFill>
+                        <a:srgbClr val="D6D6D6"/>
+                      </a:solidFill>
+                    </a:lnB>
+                    <a:noFill/>
+                  </a:tcPr>
+                </a:tc>
+                <a:tc>
+                  <a:txBody>
+                    <a:bodyPr/>
+                    <a:lstStyle/>
+                    <a:p>
+                      <a:pPr marL="0" algn="l" defTabSz="914400" rtl="0" eaLnBrk="1" latinLnBrk="0" hangingPunct="1"/>
+                      <a:r>
+                        <a:rPr sz="800" b="0" kern="1200" dirty="0">
+                          <a:solidFill>
+                            <a:srgbClr val="0A0A0A"/>
+                          </a:solidFill>
+                          <a:latin typeface="微软雅黑" panose="020B0503020204020204" pitchFamily="34" charset="-122"/>
+                          <a:ea typeface="微软雅黑" panose="020B0503020204020204" pitchFamily="34" charset="-122"/>
+                          <a:cs typeface="+mn-cs"/>
+                        </a:rPr>
+                        <a:t>MCDONALDS BRISBANE</a:t>
+                      </a:r>
+                    </a:p>
+                  </a:txBody>
+                  <a:tcPr marL="27432" marR="27432" marT="9144" marB="9144">
+                    <a:lnL>
+                      <a:noFill/>
+                    </a:lnL>
+                    <a:lnR>
+                      <a:noFill/>
+                    </a:lnR>
+                    <a:lnT w="9525" cap="flat" cmpd="sng" algn="ctr">
+                      <a:solidFill>
+                        <a:srgbClr val="D6D6D6"/>
+                      </a:solidFill>
+                      <a:prstDash val="solid"/>
+                      <a:round/>
+                      <a:headEnd type="none" w="med" len="med"/>
+                      <a:tailEnd type="none" w="med" len="med"/>
+                    </a:lnT>
+                    <a:lnB w="9525">
+                      <a:solidFill>
+                        <a:srgbClr val="D6D6D6"/>
+                      </a:solidFill>
+                    </a:lnB>
+                    <a:noFill/>
+                  </a:tcPr>
+                </a:tc>
+                <a:tc>
+                  <a:txBody>
+                    <a:bodyPr/>
+                    <a:lstStyle/>
+                    <a:p>
+                      <a:pPr marL="0" algn="l" defTabSz="914400" rtl="0" eaLnBrk="1" latinLnBrk="0" hangingPunct="1"/>
+                      <a:r>
+                        <a:rPr sz="800" b="0" kern="1200">
+                          <a:solidFill>
+                            <a:srgbClr val="0A0A0A"/>
+                          </a:solidFill>
+                          <a:latin typeface="微软雅黑" panose="020B0503020204020204" pitchFamily="34" charset="-122"/>
+                          <a:ea typeface="微软雅黑" panose="020B0503020204020204" pitchFamily="34" charset="-122"/>
+                          <a:cs typeface="+mn-cs"/>
+                        </a:rPr>
+                        <a:t>A$12.40</a:t>
+                      </a:r>
+                    </a:p>
+                  </a:txBody>
+                  <a:tcPr marL="27432" marR="27432" marT="9144" marB="9144">
+                    <a:lnL>
+                      <a:noFill/>
+                    </a:lnL>
+                    <a:lnR>
+                      <a:noFill/>
+                    </a:lnR>
+                    <a:lnT w="9525" cap="flat" cmpd="sng" algn="ctr">
+                      <a:solidFill>
+                        <a:srgbClr val="D6D6D6"/>
+                      </a:solidFill>
+                      <a:prstDash val="solid"/>
+                      <a:round/>
+                      <a:headEnd type="none" w="med" len="med"/>
+                      <a:tailEnd type="none" w="med" len="med"/>
+                    </a:lnT>
+                    <a:lnB w="9525" cap="flat" cmpd="sng" algn="ctr">
+                      <a:solidFill>
+                        <a:srgbClr val="D6D6D6"/>
+                      </a:solidFill>
+                      <a:prstDash val="solid"/>
+                      <a:round/>
+                      <a:headEnd type="none" w="med" len="med"/>
+                      <a:tailEnd type="none" w="med" len="med"/>
+                    </a:lnB>
+                    <a:noFill/>
+                  </a:tcPr>
+                </a:tc>
+                <a:tc>
+                  <a:txBody>
+                    <a:bodyPr/>
+                    <a:lstStyle/>
+                    <a:p>
+                      <a:pPr marL="0" algn="l" defTabSz="914400" rtl="0" eaLnBrk="1" latinLnBrk="0" hangingPunct="1"/>
+                      <a:r>
+                        <a:rPr sz="800" b="0" kern="1200" dirty="0">
+                          <a:solidFill>
+                            <a:srgbClr val="0A0A0A"/>
+                          </a:solidFill>
+                          <a:latin typeface="微软雅黑" panose="020B0503020204020204" pitchFamily="34" charset="-122"/>
+                          <a:ea typeface="微软雅黑" panose="020B0503020204020204" pitchFamily="34" charset="-122"/>
+                          <a:cs typeface="+mn-cs"/>
+                        </a:rPr>
+                        <a:t>McDonald's</a:t>
+                      </a:r>
+                    </a:p>
+                  </a:txBody>
+                  <a:tcPr marL="27432" marR="27432" marT="9144" marB="9144">
+                    <a:lnL>
+                      <a:noFill/>
+                    </a:lnL>
+                    <a:lnR>
+                      <a:noFill/>
+                    </a:lnR>
+                    <a:lnT w="9525" cap="flat" cmpd="sng" algn="ctr">
+                      <a:solidFill>
+                        <a:srgbClr val="D6D6D6"/>
+                      </a:solidFill>
+                      <a:prstDash val="solid"/>
+                      <a:round/>
+                      <a:headEnd type="none" w="med" len="med"/>
+                      <a:tailEnd type="none" w="med" len="med"/>
+                    </a:lnT>
+                    <a:lnB w="9525">
+                      <a:solidFill>
+                        <a:srgbClr val="D6D6D6"/>
+                      </a:solidFill>
+                    </a:lnB>
+                    <a:noFill/>
+                  </a:tcPr>
+                </a:tc>
+                <a:tc>
+                  <a:txBody>
+                    <a:bodyPr/>
+                    <a:lstStyle/>
+                    <a:p>
+                      <a:pPr marL="0" algn="l" defTabSz="914400" rtl="0" eaLnBrk="1" latinLnBrk="0" hangingPunct="1"/>
+                      <a:r>
+                        <a:rPr sz="800" b="0" kern="1200">
+                          <a:solidFill>
+                            <a:srgbClr val="0A0A0A"/>
+                          </a:solidFill>
+                          <a:latin typeface="微软雅黑" panose="020B0503020204020204" pitchFamily="34" charset="-122"/>
+                          <a:ea typeface="微软雅黑" panose="020B0503020204020204" pitchFamily="34" charset="-122"/>
+                          <a:cs typeface="+mn-cs"/>
+                        </a:rPr>
+                        <a:t>商户企业</a:t>
+                      </a:r>
+                    </a:p>
+                  </a:txBody>
+                  <a:tcPr marL="27432" marR="27432" marT="9144" marB="9144">
+                    <a:lnL>
+                      <a:noFill/>
+                    </a:lnL>
+                    <a:lnR>
+                      <a:noFill/>
+                    </a:lnR>
+                    <a:lnT w="9525" cap="flat" cmpd="sng" algn="ctr">
+                      <a:solidFill>
+                        <a:srgbClr val="D6D6D6"/>
+                      </a:solidFill>
+                      <a:prstDash val="solid"/>
+                      <a:round/>
+                      <a:headEnd type="none" w="med" len="med"/>
+                      <a:tailEnd type="none" w="med" len="med"/>
+                    </a:lnT>
+                    <a:lnB w="9525" cap="flat" cmpd="sng" algn="ctr">
+                      <a:solidFill>
+                        <a:srgbClr val="D6D6D6"/>
+                      </a:solidFill>
+                      <a:prstDash val="solid"/>
+                      <a:round/>
+                      <a:headEnd type="none" w="med" len="med"/>
+                      <a:tailEnd type="none" w="med" len="med"/>
+                    </a:lnB>
+                    <a:noFill/>
+                  </a:tcPr>
+                </a:tc>
+                <a:tc>
+                  <a:txBody>
+                    <a:bodyPr/>
+                    <a:lstStyle/>
+                    <a:p>
+                      <a:pPr marL="0" algn="l" defTabSz="914400" rtl="0" eaLnBrk="1" latinLnBrk="0" hangingPunct="1"/>
+                      <a:r>
+                        <a:rPr sz="800" b="0" kern="1200">
+                          <a:solidFill>
+                            <a:srgbClr val="0A0A0A"/>
+                          </a:solidFill>
+                          <a:latin typeface="微软雅黑" panose="020B0503020204020204" pitchFamily="34" charset="-122"/>
+                          <a:ea typeface="微软雅黑" panose="020B0503020204020204" pitchFamily="34" charset="-122"/>
+                          <a:cs typeface="+mn-cs"/>
+                        </a:rPr>
+                        <a:t>消费</a:t>
+                      </a:r>
+                    </a:p>
+                  </a:txBody>
+                  <a:tcPr marL="27432" marR="27432" marT="9144" marB="9144">
+                    <a:lnL>
+                      <a:noFill/>
+                    </a:lnL>
+                    <a:lnR>
+                      <a:noFill/>
+                    </a:lnR>
+                    <a:lnT w="9525" cap="flat" cmpd="sng" algn="ctr">
+                      <a:solidFill>
+                        <a:srgbClr val="D6D6D6"/>
+                      </a:solidFill>
+                      <a:prstDash val="solid"/>
+                      <a:round/>
+                      <a:headEnd type="none" w="med" len="med"/>
+                      <a:tailEnd type="none" w="med" len="med"/>
+                    </a:lnT>
+                    <a:lnB w="9525" cap="flat" cmpd="sng" algn="ctr">
+                      <a:solidFill>
+                        <a:srgbClr val="D6D6D6"/>
+                      </a:solidFill>
+                      <a:prstDash val="solid"/>
+                      <a:round/>
+                      <a:headEnd type="none" w="med" len="med"/>
+                      <a:tailEnd type="none" w="med" len="med"/>
+                    </a:lnB>
+                    <a:noFill/>
+                  </a:tcPr>
+                </a:tc>
+                <a:tc>
+                  <a:txBody>
+                    <a:bodyPr/>
+                    <a:lstStyle/>
+                    <a:p>
+                      <a:pPr marL="0" algn="l" defTabSz="914400" rtl="0" eaLnBrk="1" latinLnBrk="0" hangingPunct="1"/>
+                      <a:r>
+                        <a:rPr sz="800" b="0" kern="1200">
+                          <a:solidFill>
+                            <a:srgbClr val="0A0A0A"/>
+                          </a:solidFill>
+                          <a:latin typeface="微软雅黑" panose="020B0503020204020204" pitchFamily="34" charset="-122"/>
+                          <a:ea typeface="微软雅黑" panose="020B0503020204020204" pitchFamily="34" charset="-122"/>
+                          <a:cs typeface="+mn-cs"/>
+                        </a:rPr>
+                        <a:t>商户知识库标准名匹配</a:t>
+                      </a:r>
+                    </a:p>
+                  </a:txBody>
+                  <a:tcPr marL="27432" marR="27432" marT="9144" marB="9144">
+                    <a:lnL>
+                      <a:noFill/>
+                    </a:lnL>
+                    <a:lnR>
+                      <a:noFill/>
+                    </a:lnR>
+                    <a:lnT w="9525" cap="flat" cmpd="sng" algn="ctr">
+                      <a:solidFill>
+                        <a:srgbClr val="D6D6D6"/>
+                      </a:solidFill>
+                      <a:prstDash val="solid"/>
+                      <a:round/>
+                      <a:headEnd type="none" w="med" len="med"/>
+                      <a:tailEnd type="none" w="med" len="med"/>
+                    </a:lnT>
+                    <a:lnB w="9525" cap="flat" cmpd="sng" algn="ctr">
+                      <a:solidFill>
+                        <a:srgbClr val="D6D6D6"/>
+                      </a:solidFill>
+                      <a:prstDash val="solid"/>
+                      <a:round/>
+                      <a:headEnd type="none" w="med" len="med"/>
+                      <a:tailEnd type="none" w="med" len="med"/>
+                    </a:lnB>
+                    <a:noFill/>
+                  </a:tcPr>
+                </a:tc>
+                <a:extLst>
+                  <a:ext uri="{0D108BD9-81ED-4DB2-BD59-A6C34878D82A}">
+                    <a16:rowId xmlns:a16="http://schemas.microsoft.com/office/drawing/2014/main" val="10002"/>
+                  </a:ext>
+                </a:extLst>
+              </a:tr>
+              <a:tr h="170373">
+                <a:tc>
+                  <a:txBody>
+                    <a:bodyPr/>
+                    <a:lstStyle/>
+                    <a:p>
+                      <a:pPr marL="0" algn="l" defTabSz="914400" rtl="0" eaLnBrk="1" latinLnBrk="0" hangingPunct="1"/>
+                      <a:r>
+                        <a:rPr sz="800" b="0" kern="1200">
+                          <a:solidFill>
+                            <a:srgbClr val="0A0A0A"/>
+                          </a:solidFill>
+                          <a:latin typeface="微软雅黑" panose="020B0503020204020204" pitchFamily="34" charset="-122"/>
+                          <a:ea typeface="微软雅黑" panose="020B0503020204020204" pitchFamily="34" charset="-122"/>
+                          <a:cs typeface="+mn-cs"/>
+                        </a:rPr>
+                        <a:t>2026/04/02</a:t>
+                      </a:r>
+                    </a:p>
+                  </a:txBody>
+                  <a:tcPr marL="27432" marR="27432" marT="9144" marB="9144">
+                    <a:lnL>
+                      <a:noFill/>
+                    </a:lnL>
+                    <a:lnR>
+                      <a:noFill/>
+                    </a:lnR>
+                    <a:lnT w="9525" cap="flat" cmpd="sng" algn="ctr">
+                      <a:solidFill>
+                        <a:srgbClr val="D6D6D6"/>
+                      </a:solidFill>
+                      <a:prstDash val="solid"/>
+                      <a:round/>
+                      <a:headEnd type="none" w="med" len="med"/>
+                      <a:tailEnd type="none" w="med" len="med"/>
+                    </a:lnT>
+                    <a:lnB w="9525">
+                      <a:solidFill>
+                        <a:srgbClr val="D6D6D6"/>
+                      </a:solidFill>
+                    </a:lnB>
+                    <a:noFill/>
+                  </a:tcPr>
+                </a:tc>
+                <a:tc>
+                  <a:txBody>
+                    <a:bodyPr/>
+                    <a:lstStyle/>
+                    <a:p>
+                      <a:pPr marL="0" algn="l" defTabSz="914400" rtl="0" eaLnBrk="1" latinLnBrk="0" hangingPunct="1"/>
+                      <a:r>
+                        <a:rPr sz="800" b="0" kern="1200" dirty="0">
+                          <a:solidFill>
+                            <a:srgbClr val="0A0A0A"/>
+                          </a:solidFill>
+                          <a:latin typeface="微软雅黑" panose="020B0503020204020204" pitchFamily="34" charset="-122"/>
+                          <a:ea typeface="微软雅黑" panose="020B0503020204020204" pitchFamily="34" charset="-122"/>
+                          <a:cs typeface="+mn-cs"/>
+                        </a:rPr>
+                        <a:t>CHEMIST WAREHOUSE 123</a:t>
+                      </a:r>
+                    </a:p>
+                  </a:txBody>
+                  <a:tcPr marL="27432" marR="27432" marT="9144" marB="9144">
+                    <a:lnL>
+                      <a:noFill/>
+                    </a:lnL>
+                    <a:lnR>
+                      <a:noFill/>
+                    </a:lnR>
+                    <a:lnT w="9525" cap="flat" cmpd="sng" algn="ctr">
+                      <a:solidFill>
+                        <a:srgbClr val="D6D6D6"/>
+                      </a:solidFill>
+                      <a:prstDash val="solid"/>
+                      <a:round/>
+                      <a:headEnd type="none" w="med" len="med"/>
+                      <a:tailEnd type="none" w="med" len="med"/>
+                    </a:lnT>
+                    <a:lnB w="9525">
+                      <a:solidFill>
+                        <a:srgbClr val="D6D6D6"/>
+                      </a:solidFill>
+                    </a:lnB>
+                    <a:noFill/>
+                  </a:tcPr>
+                </a:tc>
+                <a:tc>
+                  <a:txBody>
+                    <a:bodyPr/>
+                    <a:lstStyle/>
+                    <a:p>
+                      <a:pPr marL="0" algn="l" defTabSz="914400" rtl="0" eaLnBrk="1" latinLnBrk="0" hangingPunct="1"/>
+                      <a:r>
+                        <a:rPr sz="800" b="0" kern="1200" dirty="0">
+                          <a:solidFill>
+                            <a:srgbClr val="0A0A0A"/>
+                          </a:solidFill>
+                          <a:latin typeface="微软雅黑" panose="020B0503020204020204" pitchFamily="34" charset="-122"/>
+                          <a:ea typeface="微软雅黑" panose="020B0503020204020204" pitchFamily="34" charset="-122"/>
+                          <a:cs typeface="+mn-cs"/>
+                        </a:rPr>
+                        <a:t>A$35.90</a:t>
+                      </a:r>
+                    </a:p>
+                  </a:txBody>
+                  <a:tcPr marL="27432" marR="27432" marT="9144" marB="9144">
+                    <a:lnL>
+                      <a:noFill/>
+                    </a:lnL>
+                    <a:lnR>
+                      <a:noFill/>
+                    </a:lnR>
+                    <a:lnT w="9525" cap="flat" cmpd="sng" algn="ctr">
+                      <a:solidFill>
+                        <a:srgbClr val="D6D6D6"/>
+                      </a:solidFill>
+                      <a:prstDash val="solid"/>
+                      <a:round/>
+                      <a:headEnd type="none" w="med" len="med"/>
+                      <a:tailEnd type="none" w="med" len="med"/>
+                    </a:lnT>
+                    <a:lnB w="9525" cap="flat" cmpd="sng" algn="ctr">
+                      <a:solidFill>
+                        <a:srgbClr val="D6D6D6"/>
+                      </a:solidFill>
+                      <a:prstDash val="solid"/>
+                      <a:round/>
+                      <a:headEnd type="none" w="med" len="med"/>
+                      <a:tailEnd type="none" w="med" len="med"/>
+                    </a:lnB>
+                    <a:noFill/>
+                  </a:tcPr>
+                </a:tc>
+                <a:tc>
+                  <a:txBody>
+                    <a:bodyPr/>
+                    <a:lstStyle/>
+                    <a:p>
+                      <a:pPr marL="0" algn="l" defTabSz="914400" rtl="0" eaLnBrk="1" latinLnBrk="0" hangingPunct="1"/>
+                      <a:r>
+                        <a:rPr sz="800" b="0" kern="1200">
+                          <a:solidFill>
+                            <a:srgbClr val="0A0A0A"/>
+                          </a:solidFill>
+                          <a:latin typeface="微软雅黑" panose="020B0503020204020204" pitchFamily="34" charset="-122"/>
+                          <a:ea typeface="微软雅黑" panose="020B0503020204020204" pitchFamily="34" charset="-122"/>
+                          <a:cs typeface="+mn-cs"/>
+                        </a:rPr>
+                        <a:t>Chemist Warehouse</a:t>
+                      </a:r>
+                    </a:p>
+                  </a:txBody>
+                  <a:tcPr marL="27432" marR="27432" marT="9144" marB="9144">
+                    <a:lnL>
+                      <a:noFill/>
+                    </a:lnL>
+                    <a:lnR>
+                      <a:noFill/>
+                    </a:lnR>
+                    <a:lnT w="9525" cap="flat" cmpd="sng" algn="ctr">
+                      <a:solidFill>
+                        <a:srgbClr val="D6D6D6"/>
+                      </a:solidFill>
+                      <a:prstDash val="solid"/>
+                      <a:round/>
+                      <a:headEnd type="none" w="med" len="med"/>
+                      <a:tailEnd type="none" w="med" len="med"/>
+                    </a:lnT>
+                    <a:lnB w="9525">
+                      <a:solidFill>
+                        <a:srgbClr val="D6D6D6"/>
+                      </a:solidFill>
                     </a:lnB>
                     <a:noFill/>
                   </a:tcPr>
@@ -8558,7 +8968,7 @@
                           <a:ea typeface="微软雅黑" panose="020B0503020204020204" pitchFamily="34" charset="-122"/>
                           <a:cs typeface="+mn-cs"/>
                         </a:rPr>
-                        <a:t>贷款还款</a:t>
+                        <a:t>商户企业</a:t>
                       </a:r>
                       <a:endParaRPr sz="800" b="0" kern="1200" dirty="0">
                         <a:solidFill>
@@ -8577,9 +8987,9 @@
                     <a:lnR>
                       <a:noFill/>
                     </a:lnR>
-                    <a:lnT w="19050" cap="flat" cmpd="sng" algn="ctr">
-                      <a:solidFill>
-                        <a:srgbClr val="0A0A0A"/>
+                    <a:lnT w="9525" cap="flat" cmpd="sng" algn="ctr">
+                      <a:solidFill>
+                        <a:srgbClr val="D6D6D6"/>
                       </a:solidFill>
                       <a:prstDash val="solid"/>
                       <a:round/>
@@ -8613,7 +9023,7 @@
                           <a:ea typeface="微软雅黑" panose="020B0503020204020204" pitchFamily="34" charset="-122"/>
                           <a:cs typeface="+mn-cs"/>
                         </a:rPr>
-                        <a:t>A$156</a:t>
+                        <a:t>消费</a:t>
                       </a:r>
                     </a:p>
                   </a:txBody>
@@ -8624,9 +9034,9 @@
                     <a:lnR>
                       <a:noFill/>
                     </a:lnR>
-                    <a:lnT w="19050" cap="flat" cmpd="sng" algn="ctr">
-                      <a:solidFill>
-                        <a:srgbClr val="0A0A0A"/>
+                    <a:lnT w="9525" cap="flat" cmpd="sng" algn="ctr">
+                      <a:solidFill>
+                        <a:srgbClr val="D6D6D6"/>
                       </a:solidFill>
                       <a:prstDash val="solid"/>
                       <a:round/>
@@ -8660,7 +9070,7 @@
                           <a:ea typeface="微软雅黑" panose="020B0503020204020204" pitchFamily="34" charset="-122"/>
                           <a:cs typeface="+mn-cs"/>
                         </a:rPr>
-                        <a:t>交易方向、机构名称、产品关键词及历史交易模式</a:t>
+                        <a:t>商户知识库标准名匹配</a:t>
                       </a:r>
                     </a:p>
                   </a:txBody>
@@ -8671,9 +9081,9 @@
                     <a:lnR>
                       <a:noFill/>
                     </a:lnR>
-                    <a:lnT w="19050" cap="flat" cmpd="sng" algn="ctr">
-                      <a:solidFill>
-                        <a:srgbClr val="0A0A0A"/>
+                    <a:lnT w="9525" cap="flat" cmpd="sng" algn="ctr">
+                      <a:solidFill>
+                        <a:srgbClr val="D6D6D6"/>
                       </a:solidFill>
                       <a:prstDash val="solid"/>
                       <a:round/>
@@ -8694,7 +9104,7 @@
                 </a:tc>
                 <a:extLst>
                   <a:ext uri="{0D108BD9-81ED-4DB2-BD59-A6C34878D82A}">
-                    <a16:rowId xmlns:a16="http://schemas.microsoft.com/office/drawing/2014/main" val="10001"/>
+                    <a16:rowId xmlns:a16="http://schemas.microsoft.com/office/drawing/2014/main" val="10003"/>
                   </a:ext>
                 </a:extLst>
               </a:tr>
@@ -8714,7 +9124,7 @@
                           <a:ea typeface="微软雅黑" panose="020B0503020204020204" pitchFamily="34" charset="-122"/>
                           <a:cs typeface="+mn-cs"/>
                         </a:rPr>
-                        <a:t>2026/03/28</a:t>
+                        <a:t>2026/04/08</a:t>
                       </a:r>
                     </a:p>
                   </a:txBody>
@@ -8757,7 +9167,7 @@
                           <a:ea typeface="微软雅黑" panose="020B0503020204020204" pitchFamily="34" charset="-122"/>
                           <a:cs typeface="+mn-cs"/>
                         </a:rPr>
-                        <a:t>MCDONALDS BRISBANE</a:t>
+                        <a:t>AMZNPRIMEA*</a:t>
                       </a:r>
                     </a:p>
                   </a:txBody>
@@ -8800,7 +9210,7 @@
                           <a:ea typeface="微软雅黑" panose="020B0503020204020204" pitchFamily="34" charset="-122"/>
                           <a:cs typeface="+mn-cs"/>
                         </a:rPr>
-                        <a:t>McDonald's</a:t>
+                        <a:t>A$8.99</a:t>
                       </a:r>
                     </a:p>
                   </a:txBody>
@@ -8820,10 +9230,14 @@
                       <a:headEnd type="none" w="med" len="med"/>
                       <a:tailEnd type="none" w="med" len="med"/>
                     </a:lnT>
-                    <a:lnB w="9525">
-                      <a:solidFill>
-                        <a:srgbClr val="D6D6D6"/>
-                      </a:solidFill>
+                    <a:lnB w="9525" cap="flat" cmpd="sng" algn="ctr">
+                      <a:solidFill>
+                        <a:srgbClr val="D6D6D6"/>
+                      </a:solidFill>
+                      <a:prstDash val="solid"/>
+                      <a:round/>
+                      <a:headEnd type="none" w="med" len="med"/>
+                      <a:tailEnd type="none" w="med" len="med"/>
                     </a:lnB>
                     <a:noFill/>
                   </a:tcPr>
@@ -8843,7 +9257,7 @@
                           <a:ea typeface="微软雅黑" panose="020B0503020204020204" pitchFamily="34" charset="-122"/>
                           <a:cs typeface="+mn-cs"/>
                         </a:rPr>
-                        <a:t>商户企业</a:t>
+                        <a:t>Amazon Prime</a:t>
                       </a:r>
                     </a:p>
                   </a:txBody>
@@ -8863,14 +9277,10 @@
                       <a:headEnd type="none" w="med" len="med"/>
                       <a:tailEnd type="none" w="med" len="med"/>
                     </a:lnT>
-                    <a:lnB w="9525" cap="flat" cmpd="sng" algn="ctr">
-                      <a:solidFill>
-                        <a:srgbClr val="D6D6D6"/>
-                      </a:solidFill>
-                      <a:prstDash val="solid"/>
-                      <a:round/>
-                      <a:headEnd type="none" w="med" len="med"/>
-                      <a:tailEnd type="none" w="med" len="med"/>
+                    <a:lnB w="9525">
+                      <a:solidFill>
+                        <a:srgbClr val="D6D6D6"/>
+                      </a:solidFill>
                     </a:lnB>
                     <a:noFill/>
                   </a:tcPr>
@@ -8890,7 +9300,7 @@
                           <a:ea typeface="微软雅黑" panose="020B0503020204020204" pitchFamily="34" charset="-122"/>
                           <a:cs typeface="+mn-cs"/>
                         </a:rPr>
-                        <a:t>消费</a:t>
+                        <a:t>商户企业</a:t>
                       </a:r>
                     </a:p>
                   </a:txBody>
@@ -8937,7 +9347,7 @@
                           <a:ea typeface="微软雅黑" panose="020B0503020204020204" pitchFamily="34" charset="-122"/>
                           <a:cs typeface="+mn-cs"/>
                         </a:rPr>
-                        <a:t>Dining Out</a:t>
+                        <a:t>订阅</a:t>
                       </a:r>
                     </a:p>
                   </a:txBody>
@@ -8984,7 +9394,7 @@
                           <a:ea typeface="微软雅黑" panose="020B0503020204020204" pitchFamily="34" charset="-122"/>
                           <a:cs typeface="+mn-cs"/>
                         </a:rPr>
-                        <a:t>消费支出</a:t>
+                        <a:t>商户知识库标准名匹配</a:t>
                       </a:r>
                     </a:p>
                   </a:txBody>
@@ -9016,6 +9426,13 @@
                     <a:noFill/>
                   </a:tcPr>
                 </a:tc>
+                <a:extLst>
+                  <a:ext uri="{0D108BD9-81ED-4DB2-BD59-A6C34878D82A}">
+                    <a16:rowId xmlns:a16="http://schemas.microsoft.com/office/drawing/2014/main" val="10004"/>
+                  </a:ext>
+                </a:extLst>
+              </a:tr>
+              <a:tr h="170373">
                 <a:tc>
                   <a:txBody>
                     <a:bodyPr/>
@@ -9031,7 +9448,7 @@
                           <a:ea typeface="微软雅黑" panose="020B0503020204020204" pitchFamily="34" charset="-122"/>
                           <a:cs typeface="+mn-cs"/>
                         </a:rPr>
-                        <a:t>A$12.40</a:t>
+                        <a:t>2026/04/10</a:t>
                       </a:r>
                     </a:p>
                   </a:txBody>
@@ -9051,7 +9468,41 @@
                       <a:headEnd type="none" w="med" len="med"/>
                       <a:tailEnd type="none" w="med" len="med"/>
                     </a:lnT>
-                    <a:lnB w="9525" cap="flat" cmpd="sng" algn="ctr">
+                    <a:lnB w="9525">
+                      <a:solidFill>
+                        <a:srgbClr val="D6D6D6"/>
+                      </a:solidFill>
+                    </a:lnB>
+                    <a:noFill/>
+                  </a:tcPr>
+                </a:tc>
+                <a:tc>
+                  <a:txBody>
+                    <a:bodyPr/>
+                    <a:lstStyle/>
+                    <a:p>
+                      <a:pPr marL="0" algn="l" defTabSz="914400" rtl="0" eaLnBrk="1" latinLnBrk="0" hangingPunct="1"/>
+                      <a:r>
+                        <a:rPr sz="800" b="0" kern="1200" dirty="0">
+                          <a:solidFill>
+                            <a:srgbClr val="0A0A0A"/>
+                          </a:solidFill>
+                          <a:latin typeface="微软雅黑" panose="020B0503020204020204" pitchFamily="34" charset="-122"/>
+                          <a:ea typeface="微软雅黑" panose="020B0503020204020204" pitchFamily="34" charset="-122"/>
+                          <a:cs typeface="+mn-cs"/>
+                        </a:rPr>
+                        <a:t>PAYROLL ACME PTY LTD</a:t>
+                      </a:r>
+                    </a:p>
+                  </a:txBody>
+                  <a:tcPr marL="27432" marR="27432" marT="9144" marB="9144">
+                    <a:lnL>
+                      <a:noFill/>
+                    </a:lnL>
+                    <a:lnR>
+                      <a:noFill/>
+                    </a:lnR>
+                    <a:lnT w="9525" cap="flat" cmpd="sng" algn="ctr">
                       <a:solidFill>
                         <a:srgbClr val="D6D6D6"/>
                       </a:solidFill>
@@ -9059,6 +9510,54 @@
                       <a:round/>
                       <a:headEnd type="none" w="med" len="med"/>
                       <a:tailEnd type="none" w="med" len="med"/>
+                    </a:lnT>
+                    <a:lnB w="9525">
+                      <a:solidFill>
+                        <a:srgbClr val="D6D6D6"/>
+                      </a:solidFill>
+                    </a:lnB>
+                    <a:noFill/>
+                  </a:tcPr>
+                </a:tc>
+                <a:tc>
+                  <a:txBody>
+                    <a:bodyPr/>
+                    <a:lstStyle/>
+                    <a:p>
+                      <a:pPr marL="0" algn="l" defTabSz="914400" rtl="0" eaLnBrk="1" latinLnBrk="0" hangingPunct="1"/>
+                      <a:r>
+                        <a:rPr sz="800" b="0" kern="1200" dirty="0">
+                          <a:solidFill>
+                            <a:srgbClr val="0A0A0A"/>
+                          </a:solidFill>
+                          <a:latin typeface="微软雅黑" panose="020B0503020204020204" pitchFamily="34" charset="-122"/>
+                          <a:ea typeface="微软雅黑" panose="020B0503020204020204" pitchFamily="34" charset="-122"/>
+                          <a:cs typeface="+mn-cs"/>
+                        </a:rPr>
+                        <a:t>A$3,420.50</a:t>
+                      </a:r>
+                    </a:p>
+                  </a:txBody>
+                  <a:tcPr marL="27432" marR="27432" marT="9144" marB="9144">
+                    <a:lnL>
+                      <a:noFill/>
+                    </a:lnL>
+                    <a:lnR>
+                      <a:noFill/>
+                    </a:lnR>
+                    <a:lnT w="9525" cap="flat" cmpd="sng" algn="ctr">
+                      <a:solidFill>
+                        <a:srgbClr val="D6D6D6"/>
+                      </a:solidFill>
+                      <a:prstDash val="solid"/>
+                      <a:round/>
+                      <a:headEnd type="none" w="med" len="med"/>
+                      <a:tailEnd type="none" w="med" len="med"/>
+                    </a:lnT>
+                    <a:lnB w="9525">
+                      <a:solidFill>
+                        <a:srgbClr val="D6D6D6"/>
+                      </a:solidFill>
                     </a:lnB>
                     <a:noFill/>
                   </a:tcPr>
@@ -9078,7 +9577,7 @@
                           <a:ea typeface="微软雅黑" panose="020B0503020204020204" pitchFamily="34" charset="-122"/>
                           <a:cs typeface="+mn-cs"/>
                         </a:rPr>
-                        <a:t>商户知识库标准名匹配</a:t>
+                        <a:t>ACME PTY LTD</a:t>
                       </a:r>
                     </a:p>
                   </a:txBody>
@@ -9098,25 +9597,14 @@
                       <a:headEnd type="none" w="med" len="med"/>
                       <a:tailEnd type="none" w="med" len="med"/>
                     </a:lnT>
-                    <a:lnB w="9525" cap="flat" cmpd="sng" algn="ctr">
-                      <a:solidFill>
-                        <a:srgbClr val="D6D6D6"/>
-                      </a:solidFill>
-                      <a:prstDash val="solid"/>
-                      <a:round/>
-                      <a:headEnd type="none" w="med" len="med"/>
-                      <a:tailEnd type="none" w="med" len="med"/>
+                    <a:lnB w="9525">
+                      <a:solidFill>
+                        <a:srgbClr val="D6D6D6"/>
+                      </a:solidFill>
                     </a:lnB>
                     <a:noFill/>
                   </a:tcPr>
                 </a:tc>
-                <a:extLst>
-                  <a:ext uri="{0D108BD9-81ED-4DB2-BD59-A6C34878D82A}">
-                    <a16:rowId xmlns:a16="http://schemas.microsoft.com/office/drawing/2014/main" val="10002"/>
-                  </a:ext>
-                </a:extLst>
-              </a:tr>
-              <a:tr h="170373">
                 <a:tc>
                   <a:txBody>
                     <a:bodyPr/>
@@ -9132,7 +9620,7 @@
                           <a:ea typeface="微软雅黑" panose="020B0503020204020204" pitchFamily="34" charset="-122"/>
                           <a:cs typeface="+mn-cs"/>
                         </a:rPr>
-                        <a:t>2026/04/02</a:t>
+                        <a:t>雇主 / 收入付款方</a:t>
                       </a:r>
                     </a:p>
                   </a:txBody>
@@ -9175,1125 +9663,7 @@
                           <a:ea typeface="微软雅黑" panose="020B0503020204020204" pitchFamily="34" charset="-122"/>
                           <a:cs typeface="+mn-cs"/>
                         </a:rPr>
-                        <a:t>CHEMIST WAREHOUSE 123</a:t>
-                      </a:r>
-                    </a:p>
-                  </a:txBody>
-                  <a:tcPr marL="27432" marR="27432" marT="9144" marB="9144">
-                    <a:lnL>
-                      <a:noFill/>
-                    </a:lnL>
-                    <a:lnR>
-                      <a:noFill/>
-                    </a:lnR>
-                    <a:lnT w="9525" cap="flat" cmpd="sng" algn="ctr">
-                      <a:solidFill>
-                        <a:srgbClr val="D6D6D6"/>
-                      </a:solidFill>
-                      <a:prstDash val="solid"/>
-                      <a:round/>
-                      <a:headEnd type="none" w="med" len="med"/>
-                      <a:tailEnd type="none" w="med" len="med"/>
-                    </a:lnT>
-                    <a:lnB w="9525">
-                      <a:solidFill>
-                        <a:srgbClr val="D6D6D6"/>
-                      </a:solidFill>
-                    </a:lnB>
-                    <a:noFill/>
-                  </a:tcPr>
-                </a:tc>
-                <a:tc>
-                  <a:txBody>
-                    <a:bodyPr/>
-                    <a:lstStyle/>
-                    <a:p>
-                      <a:pPr marL="0" algn="l" defTabSz="914400" rtl="0" eaLnBrk="1" latinLnBrk="0" hangingPunct="1"/>
-                      <a:r>
-                        <a:rPr sz="800" b="0" kern="1200">
-                          <a:solidFill>
-                            <a:srgbClr val="0A0A0A"/>
-                          </a:solidFill>
-                          <a:latin typeface="微软雅黑" panose="020B0503020204020204" pitchFamily="34" charset="-122"/>
-                          <a:ea typeface="微软雅黑" panose="020B0503020204020204" pitchFamily="34" charset="-122"/>
-                          <a:cs typeface="+mn-cs"/>
-                        </a:rPr>
-                        <a:t>Chemist Warehouse</a:t>
-                      </a:r>
-                    </a:p>
-                  </a:txBody>
-                  <a:tcPr marL="27432" marR="27432" marT="9144" marB="9144">
-                    <a:lnL>
-                      <a:noFill/>
-                    </a:lnL>
-                    <a:lnR>
-                      <a:noFill/>
-                    </a:lnR>
-                    <a:lnT w="9525" cap="flat" cmpd="sng" algn="ctr">
-                      <a:solidFill>
-                        <a:srgbClr val="D6D6D6"/>
-                      </a:solidFill>
-                      <a:prstDash val="solid"/>
-                      <a:round/>
-                      <a:headEnd type="none" w="med" len="med"/>
-                      <a:tailEnd type="none" w="med" len="med"/>
-                    </a:lnT>
-                    <a:lnB w="9525">
-                      <a:solidFill>
-                        <a:srgbClr val="D6D6D6"/>
-                      </a:solidFill>
-                    </a:lnB>
-                    <a:noFill/>
-                  </a:tcPr>
-                </a:tc>
-                <a:tc>
-                  <a:txBody>
-                    <a:bodyPr/>
-                    <a:lstStyle/>
-                    <a:p>
-                      <a:pPr marL="0" algn="l" defTabSz="914400" rtl="0" eaLnBrk="1" latinLnBrk="0" hangingPunct="1"/>
-                      <a:r>
-                        <a:rPr sz="800" b="0" kern="1200" dirty="0" err="1">
-                          <a:solidFill>
-                            <a:srgbClr val="0A0A0A"/>
-                          </a:solidFill>
-                          <a:latin typeface="微软雅黑" panose="020B0503020204020204" pitchFamily="34" charset="-122"/>
-                          <a:ea typeface="微软雅黑" panose="020B0503020204020204" pitchFamily="34" charset="-122"/>
-                          <a:cs typeface="+mn-cs"/>
-                        </a:rPr>
-                        <a:t>商户企业</a:t>
-                      </a:r>
-                      <a:endParaRPr sz="800" b="0" kern="1200" dirty="0">
-                        <a:solidFill>
-                          <a:srgbClr val="0A0A0A"/>
-                        </a:solidFill>
-                        <a:latin typeface="微软雅黑" panose="020B0503020204020204" pitchFamily="34" charset="-122"/>
-                        <a:ea typeface="微软雅黑" panose="020B0503020204020204" pitchFamily="34" charset="-122"/>
-                        <a:cs typeface="+mn-cs"/>
-                      </a:endParaRPr>
-                    </a:p>
-                  </a:txBody>
-                  <a:tcPr marL="27432" marR="27432" marT="9144" marB="9144">
-                    <a:lnL>
-                      <a:noFill/>
-                    </a:lnL>
-                    <a:lnR>
-                      <a:noFill/>
-                    </a:lnR>
-                    <a:lnT w="9525" cap="flat" cmpd="sng" algn="ctr">
-                      <a:solidFill>
-                        <a:srgbClr val="D6D6D6"/>
-                      </a:solidFill>
-                      <a:prstDash val="solid"/>
-                      <a:round/>
-                      <a:headEnd type="none" w="med" len="med"/>
-                      <a:tailEnd type="none" w="med" len="med"/>
-                    </a:lnT>
-                    <a:lnB w="9525" cap="flat" cmpd="sng" algn="ctr">
-                      <a:solidFill>
-                        <a:srgbClr val="D6D6D6"/>
-                      </a:solidFill>
-                      <a:prstDash val="solid"/>
-                      <a:round/>
-                      <a:headEnd type="none" w="med" len="med"/>
-                      <a:tailEnd type="none" w="med" len="med"/>
-                    </a:lnB>
-                    <a:noFill/>
-                  </a:tcPr>
-                </a:tc>
-                <a:tc>
-                  <a:txBody>
-                    <a:bodyPr/>
-                    <a:lstStyle/>
-                    <a:p>
-                      <a:pPr marL="0" algn="l" defTabSz="914400" rtl="0" eaLnBrk="1" latinLnBrk="0" hangingPunct="1"/>
-                      <a:r>
-                        <a:rPr sz="800" b="0" kern="1200">
-                          <a:solidFill>
-                            <a:srgbClr val="0A0A0A"/>
-                          </a:solidFill>
-                          <a:latin typeface="微软雅黑" panose="020B0503020204020204" pitchFamily="34" charset="-122"/>
-                          <a:ea typeface="微软雅黑" panose="020B0503020204020204" pitchFamily="34" charset="-122"/>
-                          <a:cs typeface="+mn-cs"/>
-                        </a:rPr>
-                        <a:t>消费</a:t>
-                      </a:r>
-                    </a:p>
-                  </a:txBody>
-                  <a:tcPr marL="27432" marR="27432" marT="9144" marB="9144">
-                    <a:lnL>
-                      <a:noFill/>
-                    </a:lnL>
-                    <a:lnR>
-                      <a:noFill/>
-                    </a:lnR>
-                    <a:lnT w="9525" cap="flat" cmpd="sng" algn="ctr">
-                      <a:solidFill>
-                        <a:srgbClr val="D6D6D6"/>
-                      </a:solidFill>
-                      <a:prstDash val="solid"/>
-                      <a:round/>
-                      <a:headEnd type="none" w="med" len="med"/>
-                      <a:tailEnd type="none" w="med" len="med"/>
-                    </a:lnT>
-                    <a:lnB w="9525" cap="flat" cmpd="sng" algn="ctr">
-                      <a:solidFill>
-                        <a:srgbClr val="D6D6D6"/>
-                      </a:solidFill>
-                      <a:prstDash val="solid"/>
-                      <a:round/>
-                      <a:headEnd type="none" w="med" len="med"/>
-                      <a:tailEnd type="none" w="med" len="med"/>
-                    </a:lnB>
-                    <a:noFill/>
-                  </a:tcPr>
-                </a:tc>
-                <a:tc>
-                  <a:txBody>
-                    <a:bodyPr/>
-                    <a:lstStyle/>
-                    <a:p>
-                      <a:pPr marL="0" algn="l" defTabSz="914400" rtl="0" eaLnBrk="1" latinLnBrk="0" hangingPunct="1"/>
-                      <a:r>
-                        <a:rPr sz="800" b="0" kern="1200">
-                          <a:solidFill>
-                            <a:srgbClr val="0A0A0A"/>
-                          </a:solidFill>
-                          <a:latin typeface="微软雅黑" panose="020B0503020204020204" pitchFamily="34" charset="-122"/>
-                          <a:ea typeface="微软雅黑" panose="020B0503020204020204" pitchFamily="34" charset="-122"/>
-                          <a:cs typeface="+mn-cs"/>
-                        </a:rPr>
-                        <a:t>Health</a:t>
-                      </a:r>
-                    </a:p>
-                  </a:txBody>
-                  <a:tcPr marL="27432" marR="27432" marT="9144" marB="9144">
-                    <a:lnL>
-                      <a:noFill/>
-                    </a:lnL>
-                    <a:lnR>
-                      <a:noFill/>
-                    </a:lnR>
-                    <a:lnT w="9525" cap="flat" cmpd="sng" algn="ctr">
-                      <a:solidFill>
-                        <a:srgbClr val="D6D6D6"/>
-                      </a:solidFill>
-                      <a:prstDash val="solid"/>
-                      <a:round/>
-                      <a:headEnd type="none" w="med" len="med"/>
-                      <a:tailEnd type="none" w="med" len="med"/>
-                    </a:lnT>
-                    <a:lnB w="9525" cap="flat" cmpd="sng" algn="ctr">
-                      <a:solidFill>
-                        <a:srgbClr val="D6D6D6"/>
-                      </a:solidFill>
-                      <a:prstDash val="solid"/>
-                      <a:round/>
-                      <a:headEnd type="none" w="med" len="med"/>
-                      <a:tailEnd type="none" w="med" len="med"/>
-                    </a:lnB>
-                    <a:noFill/>
-                  </a:tcPr>
-                </a:tc>
-                <a:tc>
-                  <a:txBody>
-                    <a:bodyPr/>
-                    <a:lstStyle/>
-                    <a:p>
-                      <a:pPr marL="0" algn="l" defTabSz="914400" rtl="0" eaLnBrk="1" latinLnBrk="0" hangingPunct="1"/>
-                      <a:r>
-                        <a:rPr sz="800" b="0" kern="1200">
-                          <a:solidFill>
-                            <a:srgbClr val="0A0A0A"/>
-                          </a:solidFill>
-                          <a:latin typeface="微软雅黑" panose="020B0503020204020204" pitchFamily="34" charset="-122"/>
-                          <a:ea typeface="微软雅黑" panose="020B0503020204020204" pitchFamily="34" charset="-122"/>
-                          <a:cs typeface="+mn-cs"/>
-                        </a:rPr>
-                        <a:t>消费支出</a:t>
-                      </a:r>
-                    </a:p>
-                  </a:txBody>
-                  <a:tcPr marL="27432" marR="27432" marT="9144" marB="9144">
-                    <a:lnL>
-                      <a:noFill/>
-                    </a:lnL>
-                    <a:lnR>
-                      <a:noFill/>
-                    </a:lnR>
-                    <a:lnT w="9525" cap="flat" cmpd="sng" algn="ctr">
-                      <a:solidFill>
-                        <a:srgbClr val="D6D6D6"/>
-                      </a:solidFill>
-                      <a:prstDash val="solid"/>
-                      <a:round/>
-                      <a:headEnd type="none" w="med" len="med"/>
-                      <a:tailEnd type="none" w="med" len="med"/>
-                    </a:lnT>
-                    <a:lnB w="9525" cap="flat" cmpd="sng" algn="ctr">
-                      <a:solidFill>
-                        <a:srgbClr val="D6D6D6"/>
-                      </a:solidFill>
-                      <a:prstDash val="solid"/>
-                      <a:round/>
-                      <a:headEnd type="none" w="med" len="med"/>
-                      <a:tailEnd type="none" w="med" len="med"/>
-                    </a:lnB>
-                    <a:noFill/>
-                  </a:tcPr>
-                </a:tc>
-                <a:tc>
-                  <a:txBody>
-                    <a:bodyPr/>
-                    <a:lstStyle/>
-                    <a:p>
-                      <a:pPr marL="0" algn="l" defTabSz="914400" rtl="0" eaLnBrk="1" latinLnBrk="0" hangingPunct="1"/>
-                      <a:r>
-                        <a:rPr sz="800" b="0" kern="1200">
-                          <a:solidFill>
-                            <a:srgbClr val="0A0A0A"/>
-                          </a:solidFill>
-                          <a:latin typeface="微软雅黑" panose="020B0503020204020204" pitchFamily="34" charset="-122"/>
-                          <a:ea typeface="微软雅黑" panose="020B0503020204020204" pitchFamily="34" charset="-122"/>
-                          <a:cs typeface="+mn-cs"/>
-                        </a:rPr>
-                        <a:t>A$35.90</a:t>
-                      </a:r>
-                    </a:p>
-                  </a:txBody>
-                  <a:tcPr marL="27432" marR="27432" marT="9144" marB="9144">
-                    <a:lnL>
-                      <a:noFill/>
-                    </a:lnL>
-                    <a:lnR>
-                      <a:noFill/>
-                    </a:lnR>
-                    <a:lnT w="9525" cap="flat" cmpd="sng" algn="ctr">
-                      <a:solidFill>
-                        <a:srgbClr val="D6D6D6"/>
-                      </a:solidFill>
-                      <a:prstDash val="solid"/>
-                      <a:round/>
-                      <a:headEnd type="none" w="med" len="med"/>
-                      <a:tailEnd type="none" w="med" len="med"/>
-                    </a:lnT>
-                    <a:lnB w="9525" cap="flat" cmpd="sng" algn="ctr">
-                      <a:solidFill>
-                        <a:srgbClr val="D6D6D6"/>
-                      </a:solidFill>
-                      <a:prstDash val="solid"/>
-                      <a:round/>
-                      <a:headEnd type="none" w="med" len="med"/>
-                      <a:tailEnd type="none" w="med" len="med"/>
-                    </a:lnB>
-                    <a:noFill/>
-                  </a:tcPr>
-                </a:tc>
-                <a:tc>
-                  <a:txBody>
-                    <a:bodyPr/>
-                    <a:lstStyle/>
-                    <a:p>
-                      <a:pPr marL="0" algn="l" defTabSz="914400" rtl="0" eaLnBrk="1" latinLnBrk="0" hangingPunct="1"/>
-                      <a:r>
-                        <a:rPr sz="800" b="0" kern="1200">
-                          <a:solidFill>
-                            <a:srgbClr val="0A0A0A"/>
-                          </a:solidFill>
-                          <a:latin typeface="微软雅黑" panose="020B0503020204020204" pitchFamily="34" charset="-122"/>
-                          <a:ea typeface="微软雅黑" panose="020B0503020204020204" pitchFamily="34" charset="-122"/>
-                          <a:cs typeface="+mn-cs"/>
-                        </a:rPr>
-                        <a:t>商户知识库标准名匹配</a:t>
-                      </a:r>
-                    </a:p>
-                  </a:txBody>
-                  <a:tcPr marL="27432" marR="27432" marT="9144" marB="9144">
-                    <a:lnL>
-                      <a:noFill/>
-                    </a:lnL>
-                    <a:lnR>
-                      <a:noFill/>
-                    </a:lnR>
-                    <a:lnT w="9525" cap="flat" cmpd="sng" algn="ctr">
-                      <a:solidFill>
-                        <a:srgbClr val="D6D6D6"/>
-                      </a:solidFill>
-                      <a:prstDash val="solid"/>
-                      <a:round/>
-                      <a:headEnd type="none" w="med" len="med"/>
-                      <a:tailEnd type="none" w="med" len="med"/>
-                    </a:lnT>
-                    <a:lnB w="9525" cap="flat" cmpd="sng" algn="ctr">
-                      <a:solidFill>
-                        <a:srgbClr val="D6D6D6"/>
-                      </a:solidFill>
-                      <a:prstDash val="solid"/>
-                      <a:round/>
-                      <a:headEnd type="none" w="med" len="med"/>
-                      <a:tailEnd type="none" w="med" len="med"/>
-                    </a:lnB>
-                    <a:noFill/>
-                  </a:tcPr>
-                </a:tc>
-                <a:extLst>
-                  <a:ext uri="{0D108BD9-81ED-4DB2-BD59-A6C34878D82A}">
-                    <a16:rowId xmlns:a16="http://schemas.microsoft.com/office/drawing/2014/main" val="10003"/>
-                  </a:ext>
-                </a:extLst>
-              </a:tr>
-              <a:tr h="170373">
-                <a:tc>
-                  <a:txBody>
-                    <a:bodyPr/>
-                    <a:lstStyle/>
-                    <a:p>
-                      <a:pPr marL="0" algn="l" defTabSz="914400" rtl="0" eaLnBrk="1" latinLnBrk="0" hangingPunct="1"/>
-                      <a:r>
-                        <a:rPr sz="800" b="0" kern="1200">
-                          <a:solidFill>
-                            <a:srgbClr val="0A0A0A"/>
-                          </a:solidFill>
-                          <a:latin typeface="微软雅黑" panose="020B0503020204020204" pitchFamily="34" charset="-122"/>
-                          <a:ea typeface="微软雅黑" panose="020B0503020204020204" pitchFamily="34" charset="-122"/>
-                          <a:cs typeface="+mn-cs"/>
-                        </a:rPr>
-                        <a:t>2026/04/08</a:t>
-                      </a:r>
-                    </a:p>
-                  </a:txBody>
-                  <a:tcPr marL="27432" marR="27432" marT="9144" marB="9144">
-                    <a:lnL>
-                      <a:noFill/>
-                    </a:lnL>
-                    <a:lnR>
-                      <a:noFill/>
-                    </a:lnR>
-                    <a:lnT w="9525" cap="flat" cmpd="sng" algn="ctr">
-                      <a:solidFill>
-                        <a:srgbClr val="D6D6D6"/>
-                      </a:solidFill>
-                      <a:prstDash val="solid"/>
-                      <a:round/>
-                      <a:headEnd type="none" w="med" len="med"/>
-                      <a:tailEnd type="none" w="med" len="med"/>
-                    </a:lnT>
-                    <a:lnB w="9525">
-                      <a:solidFill>
-                        <a:srgbClr val="D6D6D6"/>
-                      </a:solidFill>
-                    </a:lnB>
-                    <a:noFill/>
-                  </a:tcPr>
-                </a:tc>
-                <a:tc>
-                  <a:txBody>
-                    <a:bodyPr/>
-                    <a:lstStyle/>
-                    <a:p>
-                      <a:pPr marL="0" algn="l" defTabSz="914400" rtl="0" eaLnBrk="1" latinLnBrk="0" hangingPunct="1"/>
-                      <a:r>
-                        <a:rPr sz="800" b="0" kern="1200">
-                          <a:solidFill>
-                            <a:srgbClr val="0A0A0A"/>
-                          </a:solidFill>
-                          <a:latin typeface="微软雅黑" panose="020B0503020204020204" pitchFamily="34" charset="-122"/>
-                          <a:ea typeface="微软雅黑" panose="020B0503020204020204" pitchFamily="34" charset="-122"/>
-                          <a:cs typeface="+mn-cs"/>
-                        </a:rPr>
-                        <a:t>AMZNPRIMEA*</a:t>
-                      </a:r>
-                    </a:p>
-                  </a:txBody>
-                  <a:tcPr marL="27432" marR="27432" marT="9144" marB="9144">
-                    <a:lnL>
-                      <a:noFill/>
-                    </a:lnL>
-                    <a:lnR>
-                      <a:noFill/>
-                    </a:lnR>
-                    <a:lnT w="9525" cap="flat" cmpd="sng" algn="ctr">
-                      <a:solidFill>
-                        <a:srgbClr val="D6D6D6"/>
-                      </a:solidFill>
-                      <a:prstDash val="solid"/>
-                      <a:round/>
-                      <a:headEnd type="none" w="med" len="med"/>
-                      <a:tailEnd type="none" w="med" len="med"/>
-                    </a:lnT>
-                    <a:lnB w="9525">
-                      <a:solidFill>
-                        <a:srgbClr val="D6D6D6"/>
-                      </a:solidFill>
-                    </a:lnB>
-                    <a:noFill/>
-                  </a:tcPr>
-                </a:tc>
-                <a:tc>
-                  <a:txBody>
-                    <a:bodyPr/>
-                    <a:lstStyle/>
-                    <a:p>
-                      <a:pPr marL="0" algn="l" defTabSz="914400" rtl="0" eaLnBrk="1" latinLnBrk="0" hangingPunct="1"/>
-                      <a:r>
-                        <a:rPr sz="800" b="0" kern="1200">
-                          <a:solidFill>
-                            <a:srgbClr val="0A0A0A"/>
-                          </a:solidFill>
-                          <a:latin typeface="微软雅黑" panose="020B0503020204020204" pitchFamily="34" charset="-122"/>
-                          <a:ea typeface="微软雅黑" panose="020B0503020204020204" pitchFamily="34" charset="-122"/>
-                          <a:cs typeface="+mn-cs"/>
-                        </a:rPr>
-                        <a:t>Amazon Prime</a:t>
-                      </a:r>
-                    </a:p>
-                  </a:txBody>
-                  <a:tcPr marL="27432" marR="27432" marT="9144" marB="9144">
-                    <a:lnL>
-                      <a:noFill/>
-                    </a:lnL>
-                    <a:lnR>
-                      <a:noFill/>
-                    </a:lnR>
-                    <a:lnT w="9525" cap="flat" cmpd="sng" algn="ctr">
-                      <a:solidFill>
-                        <a:srgbClr val="D6D6D6"/>
-                      </a:solidFill>
-                      <a:prstDash val="solid"/>
-                      <a:round/>
-                      <a:headEnd type="none" w="med" len="med"/>
-                      <a:tailEnd type="none" w="med" len="med"/>
-                    </a:lnT>
-                    <a:lnB w="9525">
-                      <a:solidFill>
-                        <a:srgbClr val="D6D6D6"/>
-                      </a:solidFill>
-                    </a:lnB>
-                    <a:noFill/>
-                  </a:tcPr>
-                </a:tc>
-                <a:tc>
-                  <a:txBody>
-                    <a:bodyPr/>
-                    <a:lstStyle/>
-                    <a:p>
-                      <a:pPr marL="0" algn="l" defTabSz="914400" rtl="0" eaLnBrk="1" latinLnBrk="0" hangingPunct="1"/>
-                      <a:r>
-                        <a:rPr sz="800" b="0" kern="1200">
-                          <a:solidFill>
-                            <a:srgbClr val="0A0A0A"/>
-                          </a:solidFill>
-                          <a:latin typeface="微软雅黑" panose="020B0503020204020204" pitchFamily="34" charset="-122"/>
-                          <a:ea typeface="微软雅黑" panose="020B0503020204020204" pitchFamily="34" charset="-122"/>
-                          <a:cs typeface="+mn-cs"/>
-                        </a:rPr>
-                        <a:t>商户企业</a:t>
-                      </a:r>
-                    </a:p>
-                  </a:txBody>
-                  <a:tcPr marL="27432" marR="27432" marT="9144" marB="9144">
-                    <a:lnL>
-                      <a:noFill/>
-                    </a:lnL>
-                    <a:lnR>
-                      <a:noFill/>
-                    </a:lnR>
-                    <a:lnT w="9525" cap="flat" cmpd="sng" algn="ctr">
-                      <a:solidFill>
-                        <a:srgbClr val="D6D6D6"/>
-                      </a:solidFill>
-                      <a:prstDash val="solid"/>
-                      <a:round/>
-                      <a:headEnd type="none" w="med" len="med"/>
-                      <a:tailEnd type="none" w="med" len="med"/>
-                    </a:lnT>
-                    <a:lnB w="9525" cap="flat" cmpd="sng" algn="ctr">
-                      <a:solidFill>
-                        <a:srgbClr val="D6D6D6"/>
-                      </a:solidFill>
-                      <a:prstDash val="solid"/>
-                      <a:round/>
-                      <a:headEnd type="none" w="med" len="med"/>
-                      <a:tailEnd type="none" w="med" len="med"/>
-                    </a:lnB>
-                    <a:noFill/>
-                  </a:tcPr>
-                </a:tc>
-                <a:tc>
-                  <a:txBody>
-                    <a:bodyPr/>
-                    <a:lstStyle/>
-                    <a:p>
-                      <a:pPr marL="0" algn="l" defTabSz="914400" rtl="0" eaLnBrk="1" latinLnBrk="0" hangingPunct="1"/>
-                      <a:r>
-                        <a:rPr sz="800" b="0" kern="1200">
-                          <a:solidFill>
-                            <a:srgbClr val="0A0A0A"/>
-                          </a:solidFill>
-                          <a:latin typeface="微软雅黑" panose="020B0503020204020204" pitchFamily="34" charset="-122"/>
-                          <a:ea typeface="微软雅黑" panose="020B0503020204020204" pitchFamily="34" charset="-122"/>
-                          <a:cs typeface="+mn-cs"/>
-                        </a:rPr>
-                        <a:t>订阅</a:t>
-                      </a:r>
-                    </a:p>
-                  </a:txBody>
-                  <a:tcPr marL="27432" marR="27432" marT="9144" marB="9144">
-                    <a:lnL>
-                      <a:noFill/>
-                    </a:lnL>
-                    <a:lnR>
-                      <a:noFill/>
-                    </a:lnR>
-                    <a:lnT w="9525" cap="flat" cmpd="sng" algn="ctr">
-                      <a:solidFill>
-                        <a:srgbClr val="D6D6D6"/>
-                      </a:solidFill>
-                      <a:prstDash val="solid"/>
-                      <a:round/>
-                      <a:headEnd type="none" w="med" len="med"/>
-                      <a:tailEnd type="none" w="med" len="med"/>
-                    </a:lnT>
-                    <a:lnB w="9525" cap="flat" cmpd="sng" algn="ctr">
-                      <a:solidFill>
-                        <a:srgbClr val="D6D6D6"/>
-                      </a:solidFill>
-                      <a:prstDash val="solid"/>
-                      <a:round/>
-                      <a:headEnd type="none" w="med" len="med"/>
-                      <a:tailEnd type="none" w="med" len="med"/>
-                    </a:lnB>
-                    <a:noFill/>
-                  </a:tcPr>
-                </a:tc>
-                <a:tc>
-                  <a:txBody>
-                    <a:bodyPr/>
-                    <a:lstStyle/>
-                    <a:p>
-                      <a:pPr marL="0" algn="l" defTabSz="914400" rtl="0" eaLnBrk="1" latinLnBrk="0" hangingPunct="1"/>
-                      <a:r>
-                        <a:rPr sz="800" b="0" kern="1200">
-                          <a:solidFill>
-                            <a:srgbClr val="0A0A0A"/>
-                          </a:solidFill>
-                          <a:latin typeface="微软雅黑" panose="020B0503020204020204" pitchFamily="34" charset="-122"/>
-                          <a:ea typeface="微软雅黑" panose="020B0503020204020204" pitchFamily="34" charset="-122"/>
-                          <a:cs typeface="+mn-cs"/>
-                        </a:rPr>
-                        <a:t>Subscription TV</a:t>
-                      </a:r>
-                    </a:p>
-                  </a:txBody>
-                  <a:tcPr marL="27432" marR="27432" marT="9144" marB="9144">
-                    <a:lnL>
-                      <a:noFill/>
-                    </a:lnL>
-                    <a:lnR>
-                      <a:noFill/>
-                    </a:lnR>
-                    <a:lnT w="9525" cap="flat" cmpd="sng" algn="ctr">
-                      <a:solidFill>
-                        <a:srgbClr val="D6D6D6"/>
-                      </a:solidFill>
-                      <a:prstDash val="solid"/>
-                      <a:round/>
-                      <a:headEnd type="none" w="med" len="med"/>
-                      <a:tailEnd type="none" w="med" len="med"/>
-                    </a:lnT>
-                    <a:lnB w="9525" cap="flat" cmpd="sng" algn="ctr">
-                      <a:solidFill>
-                        <a:srgbClr val="D6D6D6"/>
-                      </a:solidFill>
-                      <a:prstDash val="solid"/>
-                      <a:round/>
-                      <a:headEnd type="none" w="med" len="med"/>
-                      <a:tailEnd type="none" w="med" len="med"/>
-                    </a:lnB>
-                    <a:noFill/>
-                  </a:tcPr>
-                </a:tc>
-                <a:tc>
-                  <a:txBody>
-                    <a:bodyPr/>
-                    <a:lstStyle/>
-                    <a:p>
-                      <a:pPr marL="0" algn="l" defTabSz="914400" rtl="0" eaLnBrk="1" latinLnBrk="0" hangingPunct="1"/>
-                      <a:r>
-                        <a:rPr sz="800" b="0" kern="1200" dirty="0" err="1">
-                          <a:solidFill>
-                            <a:srgbClr val="0A0A0A"/>
-                          </a:solidFill>
-                          <a:latin typeface="微软雅黑" panose="020B0503020204020204" pitchFamily="34" charset="-122"/>
-                          <a:ea typeface="微软雅黑" panose="020B0503020204020204" pitchFamily="34" charset="-122"/>
-                          <a:cs typeface="+mn-cs"/>
-                        </a:rPr>
-                        <a:t>订阅支出</a:t>
-                      </a:r>
-                      <a:endParaRPr sz="800" b="0" kern="1200" dirty="0">
-                        <a:solidFill>
-                          <a:srgbClr val="0A0A0A"/>
-                        </a:solidFill>
-                        <a:latin typeface="微软雅黑" panose="020B0503020204020204" pitchFamily="34" charset="-122"/>
-                        <a:ea typeface="微软雅黑" panose="020B0503020204020204" pitchFamily="34" charset="-122"/>
-                        <a:cs typeface="+mn-cs"/>
-                      </a:endParaRPr>
-                    </a:p>
-                  </a:txBody>
-                  <a:tcPr marL="27432" marR="27432" marT="9144" marB="9144">
-                    <a:lnL>
-                      <a:noFill/>
-                    </a:lnL>
-                    <a:lnR>
-                      <a:noFill/>
-                    </a:lnR>
-                    <a:lnT w="9525" cap="flat" cmpd="sng" algn="ctr">
-                      <a:solidFill>
-                        <a:srgbClr val="D6D6D6"/>
-                      </a:solidFill>
-                      <a:prstDash val="solid"/>
-                      <a:round/>
-                      <a:headEnd type="none" w="med" len="med"/>
-                      <a:tailEnd type="none" w="med" len="med"/>
-                    </a:lnT>
-                    <a:lnB w="9525" cap="flat" cmpd="sng" algn="ctr">
-                      <a:solidFill>
-                        <a:srgbClr val="D6D6D6"/>
-                      </a:solidFill>
-                      <a:prstDash val="solid"/>
-                      <a:round/>
-                      <a:headEnd type="none" w="med" len="med"/>
-                      <a:tailEnd type="none" w="med" len="med"/>
-                    </a:lnB>
-                    <a:noFill/>
-                  </a:tcPr>
-                </a:tc>
-                <a:tc>
-                  <a:txBody>
-                    <a:bodyPr/>
-                    <a:lstStyle/>
-                    <a:p>
-                      <a:pPr marL="0" algn="l" defTabSz="914400" rtl="0" eaLnBrk="1" latinLnBrk="0" hangingPunct="1"/>
-                      <a:r>
-                        <a:rPr sz="800" b="0" kern="1200" dirty="0">
-                          <a:solidFill>
-                            <a:srgbClr val="0A0A0A"/>
-                          </a:solidFill>
-                          <a:latin typeface="微软雅黑" panose="020B0503020204020204" pitchFamily="34" charset="-122"/>
-                          <a:ea typeface="微软雅黑" panose="020B0503020204020204" pitchFamily="34" charset="-122"/>
-                          <a:cs typeface="+mn-cs"/>
-                        </a:rPr>
-                        <a:t>A$8.99</a:t>
-                      </a:r>
-                    </a:p>
-                  </a:txBody>
-                  <a:tcPr marL="27432" marR="27432" marT="9144" marB="9144">
-                    <a:lnL>
-                      <a:noFill/>
-                    </a:lnL>
-                    <a:lnR>
-                      <a:noFill/>
-                    </a:lnR>
-                    <a:lnT w="9525" cap="flat" cmpd="sng" algn="ctr">
-                      <a:solidFill>
-                        <a:srgbClr val="D6D6D6"/>
-                      </a:solidFill>
-                      <a:prstDash val="solid"/>
-                      <a:round/>
-                      <a:headEnd type="none" w="med" len="med"/>
-                      <a:tailEnd type="none" w="med" len="med"/>
-                    </a:lnT>
-                    <a:lnB w="9525" cap="flat" cmpd="sng" algn="ctr">
-                      <a:solidFill>
-                        <a:srgbClr val="D6D6D6"/>
-                      </a:solidFill>
-                      <a:prstDash val="solid"/>
-                      <a:round/>
-                      <a:headEnd type="none" w="med" len="med"/>
-                      <a:tailEnd type="none" w="med" len="med"/>
-                    </a:lnB>
-                    <a:noFill/>
-                  </a:tcPr>
-                </a:tc>
-                <a:tc>
-                  <a:txBody>
-                    <a:bodyPr/>
-                    <a:lstStyle/>
-                    <a:p>
-                      <a:pPr marL="0" algn="l" defTabSz="914400" rtl="0" eaLnBrk="1" latinLnBrk="0" hangingPunct="1"/>
-                      <a:r>
-                        <a:rPr sz="800" b="0" kern="1200">
-                          <a:solidFill>
-                            <a:srgbClr val="0A0A0A"/>
-                          </a:solidFill>
-                          <a:latin typeface="微软雅黑" panose="020B0503020204020204" pitchFamily="34" charset="-122"/>
-                          <a:ea typeface="微软雅黑" panose="020B0503020204020204" pitchFamily="34" charset="-122"/>
-                          <a:cs typeface="+mn-cs"/>
-                        </a:rPr>
-                        <a:t>商户知识库标准名匹配</a:t>
-                      </a:r>
-                    </a:p>
-                  </a:txBody>
-                  <a:tcPr marL="27432" marR="27432" marT="9144" marB="9144">
-                    <a:lnL>
-                      <a:noFill/>
-                    </a:lnL>
-                    <a:lnR>
-                      <a:noFill/>
-                    </a:lnR>
-                    <a:lnT w="9525" cap="flat" cmpd="sng" algn="ctr">
-                      <a:solidFill>
-                        <a:srgbClr val="D6D6D6"/>
-                      </a:solidFill>
-                      <a:prstDash val="solid"/>
-                      <a:round/>
-                      <a:headEnd type="none" w="med" len="med"/>
-                      <a:tailEnd type="none" w="med" len="med"/>
-                    </a:lnT>
-                    <a:lnB w="9525" cap="flat" cmpd="sng" algn="ctr">
-                      <a:solidFill>
-                        <a:srgbClr val="D6D6D6"/>
-                      </a:solidFill>
-                      <a:prstDash val="solid"/>
-                      <a:round/>
-                      <a:headEnd type="none" w="med" len="med"/>
-                      <a:tailEnd type="none" w="med" len="med"/>
-                    </a:lnB>
-                    <a:noFill/>
-                  </a:tcPr>
-                </a:tc>
-                <a:extLst>
-                  <a:ext uri="{0D108BD9-81ED-4DB2-BD59-A6C34878D82A}">
-                    <a16:rowId xmlns:a16="http://schemas.microsoft.com/office/drawing/2014/main" val="10004"/>
-                  </a:ext>
-                </a:extLst>
-              </a:tr>
-              <a:tr h="170373">
-                <a:tc>
-                  <a:txBody>
-                    <a:bodyPr/>
-                    <a:lstStyle/>
-                    <a:p>
-                      <a:pPr marL="0" algn="l" defTabSz="914400" rtl="0" eaLnBrk="1" latinLnBrk="0" hangingPunct="1"/>
-                      <a:r>
-                        <a:rPr sz="800" b="0" kern="1200">
-                          <a:solidFill>
-                            <a:srgbClr val="0A0A0A"/>
-                          </a:solidFill>
-                          <a:latin typeface="微软雅黑" panose="020B0503020204020204" pitchFamily="34" charset="-122"/>
-                          <a:ea typeface="微软雅黑" panose="020B0503020204020204" pitchFamily="34" charset="-122"/>
-                          <a:cs typeface="+mn-cs"/>
-                        </a:rPr>
-                        <a:t>2026/04/10</a:t>
-                      </a:r>
-                    </a:p>
-                  </a:txBody>
-                  <a:tcPr marL="27432" marR="27432" marT="9144" marB="9144">
-                    <a:lnL>
-                      <a:noFill/>
-                    </a:lnL>
-                    <a:lnR>
-                      <a:noFill/>
-                    </a:lnR>
-                    <a:lnT w="9525" cap="flat" cmpd="sng" algn="ctr">
-                      <a:solidFill>
-                        <a:srgbClr val="D6D6D6"/>
-                      </a:solidFill>
-                      <a:prstDash val="solid"/>
-                      <a:round/>
-                      <a:headEnd type="none" w="med" len="med"/>
-                      <a:tailEnd type="none" w="med" len="med"/>
-                    </a:lnT>
-                    <a:lnB w="9525">
-                      <a:solidFill>
-                        <a:srgbClr val="D6D6D6"/>
-                      </a:solidFill>
-                    </a:lnB>
-                    <a:noFill/>
-                  </a:tcPr>
-                </a:tc>
-                <a:tc>
-                  <a:txBody>
-                    <a:bodyPr/>
-                    <a:lstStyle/>
-                    <a:p>
-                      <a:pPr marL="0" algn="l" defTabSz="914400" rtl="0" eaLnBrk="1" latinLnBrk="0" hangingPunct="1"/>
-                      <a:r>
-                        <a:rPr sz="800" b="0" kern="1200">
-                          <a:solidFill>
-                            <a:srgbClr val="0A0A0A"/>
-                          </a:solidFill>
-                          <a:latin typeface="微软雅黑" panose="020B0503020204020204" pitchFamily="34" charset="-122"/>
-                          <a:ea typeface="微软雅黑" panose="020B0503020204020204" pitchFamily="34" charset="-122"/>
-                          <a:cs typeface="+mn-cs"/>
-                        </a:rPr>
-                        <a:t>PAYROLL ACME PTY LTD</a:t>
-                      </a:r>
-                    </a:p>
-                  </a:txBody>
-                  <a:tcPr marL="27432" marR="27432" marT="9144" marB="9144">
-                    <a:lnL>
-                      <a:noFill/>
-                    </a:lnL>
-                    <a:lnR>
-                      <a:noFill/>
-                    </a:lnR>
-                    <a:lnT w="9525" cap="flat" cmpd="sng" algn="ctr">
-                      <a:solidFill>
-                        <a:srgbClr val="D6D6D6"/>
-                      </a:solidFill>
-                      <a:prstDash val="solid"/>
-                      <a:round/>
-                      <a:headEnd type="none" w="med" len="med"/>
-                      <a:tailEnd type="none" w="med" len="med"/>
-                    </a:lnT>
-                    <a:lnB w="9525">
-                      <a:solidFill>
-                        <a:srgbClr val="D6D6D6"/>
-                      </a:solidFill>
-                    </a:lnB>
-                    <a:noFill/>
-                  </a:tcPr>
-                </a:tc>
-                <a:tc>
-                  <a:txBody>
-                    <a:bodyPr/>
-                    <a:lstStyle/>
-                    <a:p>
-                      <a:pPr marL="0" algn="l" defTabSz="914400" rtl="0" eaLnBrk="1" latinLnBrk="0" hangingPunct="1"/>
-                      <a:r>
-                        <a:rPr sz="800" b="0" kern="1200">
-                          <a:solidFill>
-                            <a:srgbClr val="0A0A0A"/>
-                          </a:solidFill>
-                          <a:latin typeface="微软雅黑" panose="020B0503020204020204" pitchFamily="34" charset="-122"/>
-                          <a:ea typeface="微软雅黑" panose="020B0503020204020204" pitchFamily="34" charset="-122"/>
-                          <a:cs typeface="+mn-cs"/>
-                        </a:rPr>
-                        <a:t>ACME PTY LTD</a:t>
-                      </a:r>
-                    </a:p>
-                  </a:txBody>
-                  <a:tcPr marL="27432" marR="27432" marT="9144" marB="9144">
-                    <a:lnL>
-                      <a:noFill/>
-                    </a:lnL>
-                    <a:lnR>
-                      <a:noFill/>
-                    </a:lnR>
-                    <a:lnT w="9525" cap="flat" cmpd="sng" algn="ctr">
-                      <a:solidFill>
-                        <a:srgbClr val="D6D6D6"/>
-                      </a:solidFill>
-                      <a:prstDash val="solid"/>
-                      <a:round/>
-                      <a:headEnd type="none" w="med" len="med"/>
-                      <a:tailEnd type="none" w="med" len="med"/>
-                    </a:lnT>
-                    <a:lnB w="9525">
-                      <a:solidFill>
-                        <a:srgbClr val="D6D6D6"/>
-                      </a:solidFill>
-                    </a:lnB>
-                    <a:noFill/>
-                  </a:tcPr>
-                </a:tc>
-                <a:tc>
-                  <a:txBody>
-                    <a:bodyPr/>
-                    <a:lstStyle/>
-                    <a:p>
-                      <a:pPr marL="0" algn="l" defTabSz="914400" rtl="0" eaLnBrk="1" latinLnBrk="0" hangingPunct="1"/>
-                      <a:r>
-                        <a:rPr sz="800" b="0" kern="1200">
-                          <a:solidFill>
-                            <a:srgbClr val="0A0A0A"/>
-                          </a:solidFill>
-                          <a:latin typeface="微软雅黑" panose="020B0503020204020204" pitchFamily="34" charset="-122"/>
-                          <a:ea typeface="微软雅黑" panose="020B0503020204020204" pitchFamily="34" charset="-122"/>
-                          <a:cs typeface="+mn-cs"/>
-                        </a:rPr>
-                        <a:t>雇主 / 收入付款方</a:t>
-                      </a:r>
-                    </a:p>
-                  </a:txBody>
-                  <a:tcPr marL="27432" marR="27432" marT="9144" marB="9144">
-                    <a:lnL>
-                      <a:noFill/>
-                    </a:lnL>
-                    <a:lnR>
-                      <a:noFill/>
-                    </a:lnR>
-                    <a:lnT w="9525" cap="flat" cmpd="sng" algn="ctr">
-                      <a:solidFill>
-                        <a:srgbClr val="D6D6D6"/>
-                      </a:solidFill>
-                      <a:prstDash val="solid"/>
-                      <a:round/>
-                      <a:headEnd type="none" w="med" len="med"/>
-                      <a:tailEnd type="none" w="med" len="med"/>
-                    </a:lnT>
-                    <a:lnB w="9525">
-                      <a:solidFill>
-                        <a:srgbClr val="D6D6D6"/>
-                      </a:solidFill>
-                    </a:lnB>
-                    <a:noFill/>
-                  </a:tcPr>
-                </a:tc>
-                <a:tc>
-                  <a:txBody>
-                    <a:bodyPr/>
-                    <a:lstStyle/>
-                    <a:p>
-                      <a:pPr marL="0" algn="l" defTabSz="914400" rtl="0" eaLnBrk="1" latinLnBrk="0" hangingPunct="1"/>
-                      <a:r>
-                        <a:rPr sz="800" b="0" kern="1200">
-                          <a:solidFill>
-                            <a:srgbClr val="0A0A0A"/>
-                          </a:solidFill>
-                          <a:latin typeface="微软雅黑" panose="020B0503020204020204" pitchFamily="34" charset="-122"/>
-                          <a:ea typeface="微软雅黑" panose="020B0503020204020204" pitchFamily="34" charset="-122"/>
-                          <a:cs typeface="+mn-cs"/>
-                        </a:rPr>
                         <a:t>收入</a:t>
-                      </a:r>
-                    </a:p>
-                  </a:txBody>
-                  <a:tcPr marL="27432" marR="27432" marT="9144" marB="9144">
-                    <a:lnL>
-                      <a:noFill/>
-                    </a:lnL>
-                    <a:lnR>
-                      <a:noFill/>
-                    </a:lnR>
-                    <a:lnT w="9525" cap="flat" cmpd="sng" algn="ctr">
-                      <a:solidFill>
-                        <a:srgbClr val="D6D6D6"/>
-                      </a:solidFill>
-                      <a:prstDash val="solid"/>
-                      <a:round/>
-                      <a:headEnd type="none" w="med" len="med"/>
-                      <a:tailEnd type="none" w="med" len="med"/>
-                    </a:lnT>
-                    <a:lnB w="9525">
-                      <a:solidFill>
-                        <a:srgbClr val="D6D6D6"/>
-                      </a:solidFill>
-                    </a:lnB>
-                    <a:noFill/>
-                  </a:tcPr>
-                </a:tc>
-                <a:tc>
-                  <a:txBody>
-                    <a:bodyPr/>
-                    <a:lstStyle/>
-                    <a:p>
-                      <a:pPr marL="0" algn="l" defTabSz="914400" rtl="0" eaLnBrk="1" latinLnBrk="0" hangingPunct="1"/>
-                      <a:r>
-                        <a:rPr sz="800" b="0" kern="1200" dirty="0" err="1">
-                          <a:solidFill>
-                            <a:srgbClr val="0A0A0A"/>
-                          </a:solidFill>
-                          <a:latin typeface="微软雅黑" panose="020B0503020204020204" pitchFamily="34" charset="-122"/>
-                          <a:ea typeface="微软雅黑" panose="020B0503020204020204" pitchFamily="34" charset="-122"/>
-                          <a:cs typeface="+mn-cs"/>
-                        </a:rPr>
-                        <a:t>salary_payg</a:t>
-                      </a:r>
-                      <a:endParaRPr sz="800" b="0" kern="1200" dirty="0">
-                        <a:solidFill>
-                          <a:srgbClr val="0A0A0A"/>
-                        </a:solidFill>
-                        <a:latin typeface="微软雅黑" panose="020B0503020204020204" pitchFamily="34" charset="-122"/>
-                        <a:ea typeface="微软雅黑" panose="020B0503020204020204" pitchFamily="34" charset="-122"/>
-                        <a:cs typeface="+mn-cs"/>
-                      </a:endParaRPr>
-                    </a:p>
-                  </a:txBody>
-                  <a:tcPr marL="27432" marR="27432" marT="9144" marB="9144">
-                    <a:lnL>
-                      <a:noFill/>
-                    </a:lnL>
-                    <a:lnR>
-                      <a:noFill/>
-                    </a:lnR>
-                    <a:lnT w="9525" cap="flat" cmpd="sng" algn="ctr">
-                      <a:solidFill>
-                        <a:srgbClr val="D6D6D6"/>
-                      </a:solidFill>
-                      <a:prstDash val="solid"/>
-                      <a:round/>
-                      <a:headEnd type="none" w="med" len="med"/>
-                      <a:tailEnd type="none" w="med" len="med"/>
-                    </a:lnT>
-                    <a:lnB w="9525">
-                      <a:solidFill>
-                        <a:srgbClr val="D6D6D6"/>
-                      </a:solidFill>
-                    </a:lnB>
-                    <a:noFill/>
-                  </a:tcPr>
-                </a:tc>
-                <a:tc>
-                  <a:txBody>
-                    <a:bodyPr/>
-                    <a:lstStyle/>
-                    <a:p>
-                      <a:pPr marL="0" algn="l" defTabSz="914400" rtl="0" eaLnBrk="1" latinLnBrk="0" hangingPunct="1"/>
-                      <a:r>
-                        <a:rPr sz="800" b="0" kern="1200">
-                          <a:solidFill>
-                            <a:srgbClr val="0A0A0A"/>
-                          </a:solidFill>
-                          <a:latin typeface="微软雅黑" panose="020B0503020204020204" pitchFamily="34" charset="-122"/>
-                          <a:ea typeface="微软雅黑" panose="020B0503020204020204" pitchFamily="34" charset="-122"/>
-                          <a:cs typeface="+mn-cs"/>
-                        </a:rPr>
-                        <a:t>工资收入</a:t>
-                      </a:r>
-                    </a:p>
-                  </a:txBody>
-                  <a:tcPr marL="27432" marR="27432" marT="9144" marB="9144">
-                    <a:lnL>
-                      <a:noFill/>
-                    </a:lnL>
-                    <a:lnR>
-                      <a:noFill/>
-                    </a:lnR>
-                    <a:lnT w="9525" cap="flat" cmpd="sng" algn="ctr">
-                      <a:solidFill>
-                        <a:srgbClr val="D6D6D6"/>
-                      </a:solidFill>
-                      <a:prstDash val="solid"/>
-                      <a:round/>
-                      <a:headEnd type="none" w="med" len="med"/>
-                      <a:tailEnd type="none" w="med" len="med"/>
-                    </a:lnT>
-                    <a:lnB w="9525">
-                      <a:solidFill>
-                        <a:srgbClr val="D6D6D6"/>
-                      </a:solidFill>
-                    </a:lnB>
-                    <a:noFill/>
-                  </a:tcPr>
-                </a:tc>
-                <a:tc>
-                  <a:txBody>
-                    <a:bodyPr/>
-                    <a:lstStyle/>
-                    <a:p>
-                      <a:pPr marL="0" algn="l" defTabSz="914400" rtl="0" eaLnBrk="1" latinLnBrk="0" hangingPunct="1"/>
-                      <a:r>
-                        <a:rPr sz="800" b="0" kern="1200">
-                          <a:solidFill>
-                            <a:srgbClr val="0A0A0A"/>
-                          </a:solidFill>
-                          <a:latin typeface="微软雅黑" panose="020B0503020204020204" pitchFamily="34" charset="-122"/>
-                          <a:ea typeface="微软雅黑" panose="020B0503020204020204" pitchFamily="34" charset="-122"/>
-                          <a:cs typeface="+mn-cs"/>
-                        </a:rPr>
-                        <a:t>A$3,420.50</a:t>
                       </a:r>
                     </a:p>
                   </a:txBody>
@@ -10441,14 +9811,14 @@
           <p:nvPr>
             <p:extLst>
               <p:ext uri="{D42A27DB-BD31-4B8C-83A1-F6EECF244321}">
-                <p14:modId xmlns:p14="http://schemas.microsoft.com/office/powerpoint/2010/main" val="1273557807"/>
+                <p14:modId xmlns:p14="http://schemas.microsoft.com/office/powerpoint/2010/main" val="1359014883"/>
               </p:ext>
             </p:extLst>
           </p:nvPr>
         </p:nvGraphicFramePr>
         <p:xfrm>
-          <a:off x="2024032" y="4292600"/>
-          <a:ext cx="3127663" cy="2293486"/>
+          <a:off x="1573182" y="4380696"/>
+          <a:ext cx="3127663" cy="2082800"/>
         </p:xfrm>
         <a:graphic>
           <a:graphicData uri="http://schemas.openxmlformats.org/drawingml/2006/table">
@@ -11593,14 +10963,14 @@
           <p:nvPr>
             <p:extLst>
               <p:ext uri="{D42A27DB-BD31-4B8C-83A1-F6EECF244321}">
-                <p14:modId xmlns:p14="http://schemas.microsoft.com/office/powerpoint/2010/main" val="743752341"/>
+                <p14:modId xmlns:p14="http://schemas.microsoft.com/office/powerpoint/2010/main" val="2975090616"/>
               </p:ext>
             </p:extLst>
           </p:nvPr>
         </p:nvGraphicFramePr>
         <p:xfrm>
-          <a:off x="7749192" y="4292600"/>
-          <a:ext cx="3127663" cy="2293486"/>
+          <a:off x="7374542" y="4380696"/>
+          <a:ext cx="3127663" cy="2082800"/>
         </p:xfrm>
         <a:graphic>
           <a:graphicData uri="http://schemas.openxmlformats.org/drawingml/2006/table">
@@ -12774,7 +12144,7 @@
         </p:nvSpPr>
         <p:spPr>
           <a:xfrm>
-            <a:off x="1453896" y="4800600"/>
+            <a:off x="1003046" y="4888696"/>
             <a:ext cx="384048" cy="1097280"/>
           </a:xfrm>
           <a:prstGeom prst="rect">
@@ -12872,7 +12242,7 @@
         </p:nvSpPr>
         <p:spPr>
           <a:xfrm>
-            <a:off x="7178040" y="4800600"/>
+            <a:off x="6803390" y="4888696"/>
             <a:ext cx="384048" cy="1097280"/>
           </a:xfrm>
           <a:prstGeom prst="rect">
@@ -12964,7 +12334,7 @@
         </p:nvSpPr>
         <p:spPr>
           <a:xfrm>
-            <a:off x="1399032" y="4800600"/>
+            <a:off x="948182" y="4888696"/>
             <a:ext cx="54864" cy="1097280"/>
           </a:xfrm>
           <a:prstGeom prst="rect">
@@ -13009,7 +12379,7 @@
         </p:nvSpPr>
         <p:spPr>
           <a:xfrm>
-            <a:off x="7123176" y="4800600"/>
+            <a:off x="6748526" y="4888696"/>
             <a:ext cx="54864" cy="1097280"/>
           </a:xfrm>
           <a:prstGeom prst="rect">
@@ -13043,151 +12413,6 @@
           <a:p>
             <a:pPr algn="ctr"/>
             <a:endParaRPr/>
-          </a:p>
-        </p:txBody>
-      </p:sp>
-      <p:sp>
-        <p:nvSpPr>
-          <p:cNvPr id="23" name="Rectangle 22"/>
-          <p:cNvSpPr/>
-          <p:nvPr/>
-        </p:nvSpPr>
-        <p:spPr>
-          <a:xfrm>
-            <a:off x="749808" y="6446520"/>
-            <a:ext cx="9198864" cy="365760"/>
-          </a:xfrm>
-          <a:prstGeom prst="rect">
-            <a:avLst/>
-          </a:prstGeom>
-          <a:solidFill>
-            <a:srgbClr val="FAF3E0"/>
-          </a:solidFill>
-          <a:ln>
-            <a:noFill/>
-          </a:ln>
-          <a:effectLst/>
-        </p:spPr>
-        <p:style>
-          <a:lnRef idx="1">
-            <a:schemeClr val="accent1"/>
-          </a:lnRef>
-          <a:fillRef idx="3">
-            <a:schemeClr val="accent1"/>
-          </a:fillRef>
-          <a:effectRef idx="2">
-            <a:schemeClr val="accent1"/>
-          </a:effectRef>
-          <a:fontRef idx="minor">
-            <a:schemeClr val="lt1"/>
-          </a:fontRef>
-        </p:style>
-        <p:txBody>
-          <a:bodyPr lIns="190500" tIns="0" rIns="101600" bIns="0" rtlCol="0" anchor="ctr"/>
-          <a:lstStyle/>
-          <a:p>
-            <a:pPr algn="ctr"/>
-            <a:r>
-              <a:rPr lang="zh-CN" altLang="en-US" sz="900" b="1">
-                <a:solidFill>
-                  <a:srgbClr val="000000"/>
-                </a:solidFill>
-                <a:latin typeface="微软雅黑" panose="020B0503020204020204" pitchFamily="34" charset="-122"/>
-              </a:rPr>
-              <a:t>平均月还款金额 </a:t>
-            </a:r>
-            <a:r>
-              <a:rPr lang="en-US" sz="900" b="1">
-                <a:solidFill>
-                  <a:srgbClr val="000000"/>
-                </a:solidFill>
-                <a:latin typeface="微软雅黑" panose="020B0503020204020204" pitchFamily="34" charset="-122"/>
-              </a:rPr>
-              <a:t>A$428 </a:t>
-            </a:r>
-            <a:r>
-              <a:rPr lang="zh-CN" altLang="en-US" sz="900" b="1">
-                <a:solidFill>
-                  <a:srgbClr val="000000"/>
-                </a:solidFill>
-                <a:latin typeface="微软雅黑" panose="020B0503020204020204" pitchFamily="34" charset="-122"/>
-              </a:rPr>
-              <a:t>直接进入 </a:t>
-            </a:r>
-            <a:r>
-              <a:rPr lang="en-US" sz="900" b="1">
-                <a:solidFill>
-                  <a:srgbClr val="000000"/>
-                </a:solidFill>
-                <a:latin typeface="微软雅黑" panose="020B0503020204020204" pitchFamily="34" charset="-122"/>
-              </a:rPr>
-              <a:t>Serviceability </a:t>
-            </a:r>
-            <a:r>
-              <a:rPr lang="zh-CN" altLang="en-US" sz="900" b="1">
-                <a:solidFill>
-                  <a:srgbClr val="000000"/>
-                </a:solidFill>
-                <a:latin typeface="微软雅黑" panose="020B0503020204020204" pitchFamily="34" charset="-122"/>
-              </a:rPr>
-              <a:t>计算，作为新增还款能力评估的核心输入</a:t>
-            </a:r>
-            <a:endParaRPr sz="900" b="1">
-              <a:solidFill>
-                <a:srgbClr val="000000"/>
-              </a:solidFill>
-              <a:latin typeface="微软雅黑" panose="020B0503020204020204" pitchFamily="34" charset="-122"/>
-            </a:endParaRPr>
-          </a:p>
-        </p:txBody>
-      </p:sp>
-      <p:sp>
-        <p:nvSpPr>
-          <p:cNvPr id="24" name="Rectangle 23"/>
-          <p:cNvSpPr/>
-          <p:nvPr/>
-        </p:nvSpPr>
-        <p:spPr>
-          <a:xfrm>
-            <a:off x="749808" y="6446520"/>
-            <a:ext cx="64008" cy="365760"/>
-          </a:xfrm>
-          <a:prstGeom prst="rect">
-            <a:avLst/>
-          </a:prstGeom>
-          <a:solidFill>
-            <a:srgbClr val="D6A000"/>
-          </a:solidFill>
-          <a:ln>
-            <a:noFill/>
-          </a:ln>
-          <a:effectLst/>
-        </p:spPr>
-        <p:style>
-          <a:lnRef idx="1">
-            <a:schemeClr val="accent1"/>
-          </a:lnRef>
-          <a:fillRef idx="3">
-            <a:schemeClr val="accent1"/>
-          </a:fillRef>
-          <a:effectRef idx="2">
-            <a:schemeClr val="accent1"/>
-          </a:effectRef>
-          <a:fontRef idx="minor">
-            <a:schemeClr val="lt1"/>
-          </a:fontRef>
-        </p:style>
-        <p:txBody>
-          <a:bodyPr wrap="square" lIns="182880" tIns="0" rIns="109728" bIns="0" rtlCol="0" anchor="t"/>
-          <a:lstStyle/>
-          <a:p>
-            <a:pPr algn="l"/>
-            <a:endParaRPr sz="900" b="1">
-              <a:solidFill>
-                <a:srgbClr val="0A0A0A"/>
-              </a:solidFill>
-              <a:latin typeface="微软雅黑"/>
-            </a:endParaRPr>
           </a:p>
         </p:txBody>
       </p:sp>
@@ -13528,4870 +12753,6 @@
                         <a:srgbClr val="0A0A0A"/>
                       </a:solidFill>
                     </a:lnB>
-                    <a:noFill/>
-                  </a:tcPr>
-                </a:tc>
-                <a:tc>
-                  <a:txBody>
-                    <a:bodyPr/>
-                    <a:lstStyle/>
-                    <a:p>
-                      <a:pPr algn="l"/>
-                      <a:r>
-                        <a:rPr lang="en-US" sz="800" b="1" noProof="1">
-                          <a:solidFill>
-                            <a:srgbClr val="0A0A0A"/>
-                          </a:solidFill>
-                          <a:latin typeface="微软雅黑" panose="020B0503020204020204" pitchFamily="34" charset="-122"/>
-                          <a:ea typeface="微软雅黑" panose="020B0503020204020204" pitchFamily="34" charset="-122"/>
-                        </a:rPr>
-                        <a:t>关键词／别名</a:t>
-                      </a:r>
-                    </a:p>
-                  </a:txBody>
-                  <a:tcPr anchor="ctr">
-                    <a:lnL>
-                      <a:noFill/>
-                    </a:lnL>
-                    <a:lnR>
-                      <a:noFill/>
-                    </a:lnR>
-                    <a:lnT>
-                      <a:noFill/>
-                    </a:lnT>
-                    <a:lnB w="19050">
-                      <a:solidFill>
-                        <a:srgbClr val="0A0A0A"/>
-                      </a:solidFill>
-                    </a:lnB>
-                    <a:noFill/>
-                  </a:tcPr>
-                </a:tc>
-                <a:tc>
-                  <a:txBody>
-                    <a:bodyPr/>
-                    <a:lstStyle/>
-                    <a:p>
-                      <a:pPr algn="l"/>
-                      <a:r>
-                        <a:rPr lang="en-US" sz="800" b="1" noProof="1">
-                          <a:solidFill>
-                            <a:srgbClr val="0A0A0A"/>
-                          </a:solidFill>
-                          <a:latin typeface="微软雅黑" panose="020B0503020204020204" pitchFamily="34" charset="-122"/>
-                          <a:ea typeface="微软雅黑" panose="020B0503020204020204" pitchFamily="34" charset="-122"/>
-                        </a:rPr>
-                        <a:t>类别</a:t>
-                      </a:r>
-                    </a:p>
-                  </a:txBody>
-                  <a:tcPr anchor="ctr">
-                    <a:lnL>
-                      <a:noFill/>
-                    </a:lnL>
-                    <a:lnR>
-                      <a:noFill/>
-                    </a:lnR>
-                    <a:lnT>
-                      <a:noFill/>
-                    </a:lnT>
-                    <a:lnB w="19050">
-                      <a:solidFill>
-                        <a:srgbClr val="0A0A0A"/>
-                      </a:solidFill>
-                    </a:lnB>
-                    <a:noFill/>
-                  </a:tcPr>
-                </a:tc>
-                <a:extLst>
-                  <a:ext uri="{0D108BD9-81ED-4DB2-BD59-A6C34878D82A}">
-                    <a16:rowId xmlns:a16="http://schemas.microsoft.com/office/drawing/2014/main" val="10000"/>
-                  </a:ext>
-                </a:extLst>
-              </a:tr>
-              <a:tr h="173695">
-                <a:tc>
-                  <a:txBody>
-                    <a:bodyPr/>
-                    <a:lstStyle/>
-                    <a:p>
-                      <a:pPr algn="l"/>
-                      <a:r>
-                        <a:rPr lang="en-US" sz="800" b="1" noProof="1">
-                          <a:solidFill>
-                            <a:srgbClr val="0A0A0A"/>
-                          </a:solidFill>
-                          <a:latin typeface="微软雅黑" panose="020B0503020204020204" pitchFamily="34" charset="-122"/>
-                          <a:ea typeface="微软雅黑" panose="020B0503020204020204" pitchFamily="34" charset="-122"/>
-                        </a:rPr>
-                        <a:t>Temu</a:t>
-                      </a:r>
-                    </a:p>
-                  </a:txBody>
-                  <a:tcPr anchor="ctr">
-                    <a:lnL>
-                      <a:noFill/>
-                    </a:lnL>
-                    <a:lnR>
-                      <a:noFill/>
-                    </a:lnR>
-                    <a:lnT w="19050" cap="flat" cmpd="sng" algn="ctr">
-                      <a:solidFill>
-                        <a:srgbClr val="0A0A0A"/>
-                      </a:solidFill>
-                      <a:prstDash val="solid"/>
-                      <a:round/>
-                      <a:headEnd type="none" w="med" len="med"/>
-                      <a:tailEnd type="none" w="med" len="med"/>
-                    </a:lnT>
-                    <a:lnB w="9525">
-                      <a:solidFill>
-                        <a:srgbClr val="D6D6D6"/>
-                      </a:solidFill>
-                    </a:lnB>
-                    <a:noFill/>
-                  </a:tcPr>
-                </a:tc>
-                <a:tc>
-                  <a:txBody>
-                    <a:bodyPr/>
-                    <a:lstStyle/>
-                    <a:p>
-                      <a:pPr algn="l"/>
-                      <a:r>
-                        <a:rPr lang="en-US" sz="800" noProof="1">
-                          <a:solidFill>
-                            <a:srgbClr val="3D3C3A"/>
-                          </a:solidFill>
-                          <a:latin typeface="微软雅黑" panose="020B0503020204020204" pitchFamily="34" charset="-122"/>
-                          <a:ea typeface="微软雅黑" panose="020B0503020204020204" pitchFamily="34" charset="-122"/>
-                        </a:rPr>
-                        <a:t>TEMU.COM、TEMU</a:t>
-                      </a:r>
-                    </a:p>
-                  </a:txBody>
-                  <a:tcPr anchor="ctr">
-                    <a:lnL>
-                      <a:noFill/>
-                    </a:lnL>
-                    <a:lnR>
-                      <a:noFill/>
-                    </a:lnR>
-                    <a:lnT w="19050" cap="flat" cmpd="sng" algn="ctr">
-                      <a:solidFill>
-                        <a:srgbClr val="0A0A0A"/>
-                      </a:solidFill>
-                      <a:prstDash val="solid"/>
-                      <a:round/>
-                      <a:headEnd type="none" w="med" len="med"/>
-                      <a:tailEnd type="none" w="med" len="med"/>
-                    </a:lnT>
-                    <a:lnB w="9525">
-                      <a:solidFill>
-                        <a:srgbClr val="D6D6D6"/>
-                      </a:solidFill>
-                    </a:lnB>
-                    <a:noFill/>
-                  </a:tcPr>
-                </a:tc>
-                <a:tc>
-                  <a:txBody>
-                    <a:bodyPr/>
-                    <a:lstStyle/>
-                    <a:p>
-                      <a:pPr algn="l"/>
-                      <a:r>
-                        <a:rPr lang="en-US" sz="800" noProof="1">
-                          <a:solidFill>
-                            <a:srgbClr val="3D3C3A"/>
-                          </a:solidFill>
-                          <a:latin typeface="微软雅黑" panose="020B0503020204020204" pitchFamily="34" charset="-122"/>
-                          <a:ea typeface="微软雅黑" panose="020B0503020204020204" pitchFamily="34" charset="-122"/>
-                        </a:rPr>
-                        <a:t>Online Shopping</a:t>
-                      </a:r>
-                    </a:p>
-                  </a:txBody>
-                  <a:tcPr anchor="ctr">
-                    <a:lnL>
-                      <a:noFill/>
-                    </a:lnL>
-                    <a:lnR>
-                      <a:noFill/>
-                    </a:lnR>
-                    <a:lnT w="19050" cap="flat" cmpd="sng" algn="ctr">
-                      <a:solidFill>
-                        <a:srgbClr val="0A0A0A"/>
-                      </a:solidFill>
-                      <a:prstDash val="solid"/>
-                      <a:round/>
-                      <a:headEnd type="none" w="med" len="med"/>
-                      <a:tailEnd type="none" w="med" len="med"/>
-                    </a:lnT>
-                    <a:lnB w="9525">
-                      <a:solidFill>
-                        <a:srgbClr val="D6D6D6"/>
-                      </a:solidFill>
-                    </a:lnB>
-                    <a:noFill/>
-                  </a:tcPr>
-                </a:tc>
-                <a:extLst>
-                  <a:ext uri="{0D108BD9-81ED-4DB2-BD59-A6C34878D82A}">
-                    <a16:rowId xmlns:a16="http://schemas.microsoft.com/office/drawing/2014/main" val="10001"/>
-                  </a:ext>
-                </a:extLst>
-              </a:tr>
-              <a:tr h="173695">
-                <a:tc>
-                  <a:txBody>
-                    <a:bodyPr/>
-                    <a:lstStyle/>
-                    <a:p>
-                      <a:pPr algn="l"/>
-                      <a:r>
-                        <a:rPr lang="en-US" sz="800" b="1" noProof="1">
-                          <a:solidFill>
-                            <a:srgbClr val="0A0A0A"/>
-                          </a:solidFill>
-                          <a:latin typeface="微软雅黑" panose="020B0503020204020204" pitchFamily="34" charset="-122"/>
-                          <a:ea typeface="微软雅黑" panose="020B0503020204020204" pitchFamily="34" charset="-122"/>
-                        </a:rPr>
-                        <a:t>Uber Eats</a:t>
-                      </a:r>
-                    </a:p>
-                  </a:txBody>
-                  <a:tcPr anchor="ctr">
-                    <a:lnL>
-                      <a:noFill/>
-                    </a:lnL>
-                    <a:lnR>
-                      <a:noFill/>
-                    </a:lnR>
-                    <a:lnT w="9525" cap="flat" cmpd="sng" algn="ctr">
-                      <a:solidFill>
-                        <a:srgbClr val="D6D6D6"/>
-                      </a:solidFill>
-                      <a:prstDash val="solid"/>
-                      <a:round/>
-                      <a:headEnd type="none" w="med" len="med"/>
-                      <a:tailEnd type="none" w="med" len="med"/>
-                    </a:lnT>
-                    <a:lnB w="9525">
-                      <a:solidFill>
-                        <a:srgbClr val="D6D6D6"/>
-                      </a:solidFill>
-                    </a:lnB>
-                    <a:noFill/>
-                  </a:tcPr>
-                </a:tc>
-                <a:tc>
-                  <a:txBody>
-                    <a:bodyPr/>
-                    <a:lstStyle/>
-                    <a:p>
-                      <a:pPr algn="l"/>
-                      <a:r>
-                        <a:rPr lang="en-US" sz="800" noProof="1">
-                          <a:solidFill>
-                            <a:srgbClr val="3D3C3A"/>
-                          </a:solidFill>
-                          <a:latin typeface="微软雅黑" panose="020B0503020204020204" pitchFamily="34" charset="-122"/>
-                          <a:ea typeface="微软雅黑" panose="020B0503020204020204" pitchFamily="34" charset="-122"/>
-                        </a:rPr>
-                        <a:t>UBER EATS</a:t>
-                      </a:r>
-                    </a:p>
-                  </a:txBody>
-                  <a:tcPr anchor="ctr">
-                    <a:lnL>
-                      <a:noFill/>
-                    </a:lnL>
-                    <a:lnR>
-                      <a:noFill/>
-                    </a:lnR>
-                    <a:lnT w="9525" cap="flat" cmpd="sng" algn="ctr">
-                      <a:solidFill>
-                        <a:srgbClr val="D6D6D6"/>
-                      </a:solidFill>
-                      <a:prstDash val="solid"/>
-                      <a:round/>
-                      <a:headEnd type="none" w="med" len="med"/>
-                      <a:tailEnd type="none" w="med" len="med"/>
-                    </a:lnT>
-                    <a:lnB w="9525">
-                      <a:solidFill>
-                        <a:srgbClr val="D6D6D6"/>
-                      </a:solidFill>
-                    </a:lnB>
-                    <a:noFill/>
-                  </a:tcPr>
-                </a:tc>
-                <a:tc>
-                  <a:txBody>
-                    <a:bodyPr/>
-                    <a:lstStyle/>
-                    <a:p>
-                      <a:pPr algn="l"/>
-                      <a:r>
-                        <a:rPr lang="en-US" sz="800" noProof="1">
-                          <a:solidFill>
-                            <a:srgbClr val="3D3C3A"/>
-                          </a:solidFill>
-                          <a:latin typeface="微软雅黑" panose="020B0503020204020204" pitchFamily="34" charset="-122"/>
-                          <a:ea typeface="微软雅黑" panose="020B0503020204020204" pitchFamily="34" charset="-122"/>
-                        </a:rPr>
-                        <a:t>Dining Out</a:t>
-                      </a:r>
-                    </a:p>
-                  </a:txBody>
-                  <a:tcPr anchor="ctr">
-                    <a:lnL>
-                      <a:noFill/>
-                    </a:lnL>
-                    <a:lnR>
-                      <a:noFill/>
-                    </a:lnR>
-                    <a:lnT w="9525" cap="flat" cmpd="sng" algn="ctr">
-                      <a:solidFill>
-                        <a:srgbClr val="D6D6D6"/>
-                      </a:solidFill>
-                      <a:prstDash val="solid"/>
-                      <a:round/>
-                      <a:headEnd type="none" w="med" len="med"/>
-                      <a:tailEnd type="none" w="med" len="med"/>
-                    </a:lnT>
-                    <a:lnB w="9525">
-                      <a:solidFill>
-                        <a:srgbClr val="D6D6D6"/>
-                      </a:solidFill>
-                    </a:lnB>
-                    <a:noFill/>
-                  </a:tcPr>
-                </a:tc>
-                <a:extLst>
-                  <a:ext uri="{0D108BD9-81ED-4DB2-BD59-A6C34878D82A}">
-                    <a16:rowId xmlns:a16="http://schemas.microsoft.com/office/drawing/2014/main" val="10002"/>
-                  </a:ext>
-                </a:extLst>
-              </a:tr>
-              <a:tr h="173695">
-                <a:tc>
-                  <a:txBody>
-                    <a:bodyPr/>
-                    <a:lstStyle/>
-                    <a:p>
-                      <a:pPr algn="l"/>
-                      <a:r>
-                        <a:rPr lang="en-US" sz="800" b="1" noProof="1">
-                          <a:solidFill>
-                            <a:srgbClr val="0A0A0A"/>
-                          </a:solidFill>
-                          <a:latin typeface="微软雅黑" panose="020B0503020204020204" pitchFamily="34" charset="-122"/>
-                          <a:ea typeface="微软雅黑" panose="020B0503020204020204" pitchFamily="34" charset="-122"/>
-                        </a:rPr>
-                        <a:t>Netflix</a:t>
-                      </a:r>
-                    </a:p>
-                  </a:txBody>
-                  <a:tcPr anchor="ctr">
-                    <a:lnL>
-                      <a:noFill/>
-                    </a:lnL>
-                    <a:lnR>
-                      <a:noFill/>
-                    </a:lnR>
-                    <a:lnT w="9525" cap="flat" cmpd="sng" algn="ctr">
-                      <a:solidFill>
-                        <a:srgbClr val="D6D6D6"/>
-                      </a:solidFill>
-                      <a:prstDash val="solid"/>
-                      <a:round/>
-                      <a:headEnd type="none" w="med" len="med"/>
-                      <a:tailEnd type="none" w="med" len="med"/>
-                    </a:lnT>
-                    <a:lnB w="9525">
-                      <a:solidFill>
-                        <a:srgbClr val="D6D6D6"/>
-                      </a:solidFill>
-                    </a:lnB>
-                    <a:noFill/>
-                  </a:tcPr>
-                </a:tc>
-                <a:tc>
-                  <a:txBody>
-                    <a:bodyPr/>
-                    <a:lstStyle/>
-                    <a:p>
-                      <a:pPr algn="l"/>
-                      <a:r>
-                        <a:rPr lang="en-US" sz="800" noProof="1">
-                          <a:solidFill>
-                            <a:srgbClr val="3D3C3A"/>
-                          </a:solidFill>
-                          <a:latin typeface="微软雅黑" panose="020B0503020204020204" pitchFamily="34" charset="-122"/>
-                          <a:ea typeface="微软雅黑" panose="020B0503020204020204" pitchFamily="34" charset="-122"/>
-                        </a:rPr>
-                        <a:t>NETFLIX.COM、NETFLIX</a:t>
-                      </a:r>
-                    </a:p>
-                  </a:txBody>
-                  <a:tcPr anchor="ctr">
-                    <a:lnL>
-                      <a:noFill/>
-                    </a:lnL>
-                    <a:lnR>
-                      <a:noFill/>
-                    </a:lnR>
-                    <a:lnT w="9525" cap="flat" cmpd="sng" algn="ctr">
-                      <a:solidFill>
-                        <a:srgbClr val="D6D6D6"/>
-                      </a:solidFill>
-                      <a:prstDash val="solid"/>
-                      <a:round/>
-                      <a:headEnd type="none" w="med" len="med"/>
-                      <a:tailEnd type="none" w="med" len="med"/>
-                    </a:lnT>
-                    <a:lnB w="9525">
-                      <a:solidFill>
-                        <a:srgbClr val="D6D6D6"/>
-                      </a:solidFill>
-                    </a:lnB>
-                    <a:noFill/>
-                  </a:tcPr>
-                </a:tc>
-                <a:tc>
-                  <a:txBody>
-                    <a:bodyPr/>
-                    <a:lstStyle/>
-                    <a:p>
-                      <a:pPr algn="l"/>
-                      <a:r>
-                        <a:rPr lang="en-US" sz="800" noProof="1">
-                          <a:solidFill>
-                            <a:srgbClr val="3D3C3A"/>
-                          </a:solidFill>
-                          <a:latin typeface="微软雅黑" panose="020B0503020204020204" pitchFamily="34" charset="-122"/>
-                          <a:ea typeface="微软雅黑" panose="020B0503020204020204" pitchFamily="34" charset="-122"/>
-                        </a:rPr>
-                        <a:t>Subscription TV</a:t>
-                      </a:r>
-                    </a:p>
-                  </a:txBody>
-                  <a:tcPr anchor="ctr">
-                    <a:lnL>
-                      <a:noFill/>
-                    </a:lnL>
-                    <a:lnR>
-                      <a:noFill/>
-                    </a:lnR>
-                    <a:lnT w="9525" cap="flat" cmpd="sng" algn="ctr">
-                      <a:solidFill>
-                        <a:srgbClr val="D6D6D6"/>
-                      </a:solidFill>
-                      <a:prstDash val="solid"/>
-                      <a:round/>
-                      <a:headEnd type="none" w="med" len="med"/>
-                      <a:tailEnd type="none" w="med" len="med"/>
-                    </a:lnT>
-                    <a:lnB w="9525">
-                      <a:solidFill>
-                        <a:srgbClr val="D6D6D6"/>
-                      </a:solidFill>
-                    </a:lnB>
-                    <a:noFill/>
-                  </a:tcPr>
-                </a:tc>
-                <a:extLst>
-                  <a:ext uri="{0D108BD9-81ED-4DB2-BD59-A6C34878D82A}">
-                    <a16:rowId xmlns:a16="http://schemas.microsoft.com/office/drawing/2014/main" val="10003"/>
-                  </a:ext>
-                </a:extLst>
-              </a:tr>
-              <a:tr h="173695">
-                <a:tc>
-                  <a:txBody>
-                    <a:bodyPr/>
-                    <a:lstStyle/>
-                    <a:p>
-                      <a:pPr algn="l"/>
-                      <a:r>
-                        <a:rPr lang="en-US" sz="800" b="1" noProof="1">
-                          <a:solidFill>
-                            <a:srgbClr val="0A0A0A"/>
-                          </a:solidFill>
-                          <a:latin typeface="微软雅黑" panose="020B0503020204020204" pitchFamily="34" charset="-122"/>
-                          <a:ea typeface="微软雅黑" panose="020B0503020204020204" pitchFamily="34" charset="-122"/>
-                        </a:rPr>
-                        <a:t>Spotify</a:t>
-                      </a:r>
-                    </a:p>
-                  </a:txBody>
-                  <a:tcPr anchor="ctr">
-                    <a:lnL>
-                      <a:noFill/>
-                    </a:lnL>
-                    <a:lnR>
-                      <a:noFill/>
-                    </a:lnR>
-                    <a:lnT w="9525" cap="flat" cmpd="sng" algn="ctr">
-                      <a:solidFill>
-                        <a:srgbClr val="D6D6D6"/>
-                      </a:solidFill>
-                      <a:prstDash val="solid"/>
-                      <a:round/>
-                      <a:headEnd type="none" w="med" len="med"/>
-                      <a:tailEnd type="none" w="med" len="med"/>
-                    </a:lnT>
-                    <a:lnB w="9525">
-                      <a:solidFill>
-                        <a:srgbClr val="D6D6D6"/>
-                      </a:solidFill>
-                    </a:lnB>
-                    <a:noFill/>
-                  </a:tcPr>
-                </a:tc>
-                <a:tc>
-                  <a:txBody>
-                    <a:bodyPr/>
-                    <a:lstStyle/>
-                    <a:p>
-                      <a:pPr algn="l"/>
-                      <a:r>
-                        <a:rPr lang="en-US" sz="800" noProof="1">
-                          <a:solidFill>
-                            <a:srgbClr val="3D3C3A"/>
-                          </a:solidFill>
-                          <a:latin typeface="微软雅黑" panose="020B0503020204020204" pitchFamily="34" charset="-122"/>
-                          <a:ea typeface="微软雅黑" panose="020B0503020204020204" pitchFamily="34" charset="-122"/>
-                        </a:rPr>
-                        <a:t>SPOTIFY</a:t>
-                      </a:r>
-                    </a:p>
-                  </a:txBody>
-                  <a:tcPr anchor="ctr">
-                    <a:lnL>
-                      <a:noFill/>
-                    </a:lnL>
-                    <a:lnR>
-                      <a:noFill/>
-                    </a:lnR>
-                    <a:lnT w="9525" cap="flat" cmpd="sng" algn="ctr">
-                      <a:solidFill>
-                        <a:srgbClr val="D6D6D6"/>
-                      </a:solidFill>
-                      <a:prstDash val="solid"/>
-                      <a:round/>
-                      <a:headEnd type="none" w="med" len="med"/>
-                      <a:tailEnd type="none" w="med" len="med"/>
-                    </a:lnT>
-                    <a:lnB w="9525">
-                      <a:solidFill>
-                        <a:srgbClr val="D6D6D6"/>
-                      </a:solidFill>
-                    </a:lnB>
-                    <a:noFill/>
-                  </a:tcPr>
-                </a:tc>
-                <a:tc>
-                  <a:txBody>
-                    <a:bodyPr/>
-                    <a:lstStyle/>
-                    <a:p>
-                      <a:pPr algn="l"/>
-                      <a:r>
-                        <a:rPr lang="en-US" sz="800" noProof="1">
-                          <a:solidFill>
-                            <a:srgbClr val="3D3C3A"/>
-                          </a:solidFill>
-                          <a:latin typeface="微软雅黑" panose="020B0503020204020204" pitchFamily="34" charset="-122"/>
-                          <a:ea typeface="微软雅黑" panose="020B0503020204020204" pitchFamily="34" charset="-122"/>
-                        </a:rPr>
-                        <a:t>Entertainment</a:t>
-                      </a:r>
-                    </a:p>
-                  </a:txBody>
-                  <a:tcPr anchor="ctr">
-                    <a:lnL>
-                      <a:noFill/>
-                    </a:lnL>
-                    <a:lnR>
-                      <a:noFill/>
-                    </a:lnR>
-                    <a:lnT w="9525" cap="flat" cmpd="sng" algn="ctr">
-                      <a:solidFill>
-                        <a:srgbClr val="D6D6D6"/>
-                      </a:solidFill>
-                      <a:prstDash val="solid"/>
-                      <a:round/>
-                      <a:headEnd type="none" w="med" len="med"/>
-                      <a:tailEnd type="none" w="med" len="med"/>
-                    </a:lnT>
-                    <a:lnB w="9525">
-                      <a:solidFill>
-                        <a:srgbClr val="D6D6D6"/>
-                      </a:solidFill>
-                    </a:lnB>
-                    <a:noFill/>
-                  </a:tcPr>
-                </a:tc>
-                <a:extLst>
-                  <a:ext uri="{0D108BD9-81ED-4DB2-BD59-A6C34878D82A}">
-                    <a16:rowId xmlns:a16="http://schemas.microsoft.com/office/drawing/2014/main" val="10004"/>
-                  </a:ext>
-                </a:extLst>
-              </a:tr>
-              <a:tr h="173695">
-                <a:tc>
-                  <a:txBody>
-                    <a:bodyPr/>
-                    <a:lstStyle/>
-                    <a:p>
-                      <a:pPr algn="l"/>
-                      <a:r>
-                        <a:rPr lang="en-US" sz="800" b="1" noProof="1">
-                          <a:solidFill>
-                            <a:srgbClr val="0A0A0A"/>
-                          </a:solidFill>
-                          <a:latin typeface="微软雅黑" panose="020B0503020204020204" pitchFamily="34" charset="-122"/>
-                          <a:ea typeface="微软雅黑" panose="020B0503020204020204" pitchFamily="34" charset="-122"/>
-                        </a:rPr>
-                        <a:t>OpenAI</a:t>
-                      </a:r>
-                    </a:p>
-                  </a:txBody>
-                  <a:tcPr anchor="ctr">
-                    <a:lnL>
-                      <a:noFill/>
-                    </a:lnL>
-                    <a:lnR>
-                      <a:noFill/>
-                    </a:lnR>
-                    <a:lnT w="9525" cap="flat" cmpd="sng" algn="ctr">
-                      <a:solidFill>
-                        <a:srgbClr val="D6D6D6"/>
-                      </a:solidFill>
-                      <a:prstDash val="solid"/>
-                      <a:round/>
-                      <a:headEnd type="none" w="med" len="med"/>
-                      <a:tailEnd type="none" w="med" len="med"/>
-                    </a:lnT>
-                    <a:lnB w="9525">
-                      <a:solidFill>
-                        <a:srgbClr val="D6D6D6"/>
-                      </a:solidFill>
-                    </a:lnB>
-                    <a:noFill/>
-                  </a:tcPr>
-                </a:tc>
-                <a:tc>
-                  <a:txBody>
-                    <a:bodyPr/>
-                    <a:lstStyle/>
-                    <a:p>
-                      <a:pPr algn="l"/>
-                      <a:r>
-                        <a:rPr lang="en-US" sz="800" noProof="1">
-                          <a:solidFill>
-                            <a:srgbClr val="3D3C3A"/>
-                          </a:solidFill>
-                          <a:latin typeface="微软雅黑" panose="020B0503020204020204" pitchFamily="34" charset="-122"/>
-                          <a:ea typeface="微软雅黑" panose="020B0503020204020204" pitchFamily="34" charset="-122"/>
-                        </a:rPr>
-                        <a:t>OPENAI *CHATGPT</a:t>
-                      </a:r>
-                    </a:p>
-                  </a:txBody>
-                  <a:tcPr anchor="ctr">
-                    <a:lnL>
-                      <a:noFill/>
-                    </a:lnL>
-                    <a:lnR>
-                      <a:noFill/>
-                    </a:lnR>
-                    <a:lnT w="9525" cap="flat" cmpd="sng" algn="ctr">
-                      <a:solidFill>
-                        <a:srgbClr val="D6D6D6"/>
-                      </a:solidFill>
-                      <a:prstDash val="solid"/>
-                      <a:round/>
-                      <a:headEnd type="none" w="med" len="med"/>
-                      <a:tailEnd type="none" w="med" len="med"/>
-                    </a:lnT>
-                    <a:lnB w="9525">
-                      <a:solidFill>
-                        <a:srgbClr val="D6D6D6"/>
-                      </a:solidFill>
-                    </a:lnB>
-                    <a:noFill/>
-                  </a:tcPr>
-                </a:tc>
-                <a:tc>
-                  <a:txBody>
-                    <a:bodyPr/>
-                    <a:lstStyle/>
-                    <a:p>
-                      <a:pPr algn="l"/>
-                      <a:r>
-                        <a:rPr lang="en-US" sz="800" noProof="1">
-                          <a:solidFill>
-                            <a:srgbClr val="3D3C3A"/>
-                          </a:solidFill>
-                          <a:latin typeface="微软雅黑" panose="020B0503020204020204" pitchFamily="34" charset="-122"/>
-                          <a:ea typeface="微软雅黑" panose="020B0503020204020204" pitchFamily="34" charset="-122"/>
-                        </a:rPr>
-                        <a:t>Information</a:t>
-                      </a:r>
-                    </a:p>
-                  </a:txBody>
-                  <a:tcPr anchor="ctr">
-                    <a:lnL>
-                      <a:noFill/>
-                    </a:lnL>
-                    <a:lnR>
-                      <a:noFill/>
-                    </a:lnR>
-                    <a:lnT w="9525" cap="flat" cmpd="sng" algn="ctr">
-                      <a:solidFill>
-                        <a:srgbClr val="D6D6D6"/>
-                      </a:solidFill>
-                      <a:prstDash val="solid"/>
-                      <a:round/>
-                      <a:headEnd type="none" w="med" len="med"/>
-                      <a:tailEnd type="none" w="med" len="med"/>
-                    </a:lnT>
-                    <a:lnB w="9525">
-                      <a:solidFill>
-                        <a:srgbClr val="D6D6D6"/>
-                      </a:solidFill>
-                    </a:lnB>
-                    <a:noFill/>
-                  </a:tcPr>
-                </a:tc>
-                <a:extLst>
-                  <a:ext uri="{0D108BD9-81ED-4DB2-BD59-A6C34878D82A}">
-                    <a16:rowId xmlns:a16="http://schemas.microsoft.com/office/drawing/2014/main" val="10005"/>
-                  </a:ext>
-                </a:extLst>
-              </a:tr>
-            </a:tbl>
-          </a:graphicData>
-        </a:graphic>
-      </p:graphicFrame>
-      <p:sp>
-        <p:nvSpPr>
-          <p:cNvPr id="9" name="income-capsule">
-            <a:extLst>
-              <a:ext uri="{FF2B5EF4-FFF2-40B4-BE49-F238E27FC236}">
-                <a16:creationId xmlns:a16="http://schemas.microsoft.com/office/drawing/2014/main" id="{B4CB0565-A9AE-4A45-8F6A-44E49726E461}"/>
-              </a:ext>
-            </a:extLst>
-          </p:cNvPr>
-          <p:cNvSpPr/>
-          <p:nvPr/>
-        </p:nvSpPr>
-        <p:spPr>
-          <a:xfrm>
-            <a:off x="557541" y="3610392"/>
-            <a:ext cx="1295400" cy="228600"/>
-          </a:xfrm>
-          <a:prstGeom prst="roundRect">
-            <a:avLst>
-              <a:gd name="adj" fmla="val 50000"/>
-            </a:avLst>
-          </a:prstGeom>
-          <a:solidFill>
-            <a:srgbClr val="D6A000"/>
-          </a:solidFill>
-          <a:ln>
-            <a:noFill/>
-          </a:ln>
-        </p:spPr>
-        <p:txBody>
-          <a:bodyPr/>
-          <a:lstStyle/>
-          <a:p>
-            <a:endParaRPr/>
-          </a:p>
-        </p:txBody>
-      </p:sp>
-      <p:sp>
-        <p:nvSpPr>
-          <p:cNvPr id="10" name="income-capsule-text">
-            <a:extLst>
-              <a:ext uri="{FF2B5EF4-FFF2-40B4-BE49-F238E27FC236}">
-                <a16:creationId xmlns:a16="http://schemas.microsoft.com/office/drawing/2014/main" id="{3B41C0CB-B265-49B8-8346-7A67CD243C57}"/>
-              </a:ext>
-            </a:extLst>
-          </p:cNvPr>
-          <p:cNvSpPr txBox="1"/>
-          <p:nvPr/>
-        </p:nvSpPr>
-        <p:spPr>
-          <a:xfrm>
-            <a:off x="557541" y="3610392"/>
-            <a:ext cx="1295400" cy="228600"/>
-          </a:xfrm>
-          <a:prstGeom prst="rect">
-            <a:avLst/>
-          </a:prstGeom>
-          <a:noFill/>
-          <a:ln>
-            <a:noFill/>
-          </a:ln>
-        </p:spPr>
-        <p:txBody>
-          <a:bodyPr wrap="none" lIns="0" tIns="0" rIns="0" bIns="0" rtlCol="0" anchor="ctr"/>
-          <a:lstStyle/>
-          <a:p>
-            <a:pPr algn="ctr">
-              <a:lnSpc>
-                <a:spcPct val="120000"/>
-              </a:lnSpc>
-            </a:pPr>
-            <a:r>
-              <a:rPr lang="zh-CN" altLang="en-US" sz="1050" b="1" noProof="1">
-                <a:solidFill>
-                  <a:srgbClr val="FFFFFF"/>
-                </a:solidFill>
-                <a:latin typeface="微软雅黑" panose="020B0503020204020204" pitchFamily="34" charset="-122"/>
-                <a:ea typeface="微软雅黑" panose="020B0503020204020204" pitchFamily="34" charset="-122"/>
-              </a:rPr>
-              <a:t>收入识别库</a:t>
-            </a:r>
-            <a:endParaRPr lang="en-US" altLang="zh-CN" sz="1050" noProof="1">
-              <a:latin typeface="微软雅黑" panose="020B0503020204020204" pitchFamily="34" charset="-122"/>
-              <a:ea typeface="微软雅黑" panose="020B0503020204020204" pitchFamily="34" charset="-122"/>
-            </a:endParaRPr>
-          </a:p>
-        </p:txBody>
-      </p:sp>
-      <p:graphicFrame>
-        <p:nvGraphicFramePr>
-          <p:cNvPr id="11" name="income-table">
-            <a:extLst>
-              <a:ext uri="{FF2B5EF4-FFF2-40B4-BE49-F238E27FC236}">
-                <a16:creationId xmlns:a16="http://schemas.microsoft.com/office/drawing/2014/main" id="{437DE33D-539A-4A03-AC67-AB16184E7F7A}"/>
-              </a:ext>
-            </a:extLst>
-          </p:cNvPr>
-          <p:cNvGraphicFramePr>
-            <a:graphicFrameLocks noGrp="1"/>
-          </p:cNvGraphicFramePr>
-          <p:nvPr>
-            <p:extLst>
-              <p:ext uri="{D42A27DB-BD31-4B8C-83A1-F6EECF244321}">
-                <p14:modId xmlns:p14="http://schemas.microsoft.com/office/powerpoint/2010/main" val="850780107"/>
-              </p:ext>
-            </p:extLst>
-          </p:nvPr>
-        </p:nvGraphicFramePr>
-        <p:xfrm>
-          <a:off x="541547" y="3918704"/>
-          <a:ext cx="5222483" cy="1066800"/>
-        </p:xfrm>
-        <a:graphic>
-          <a:graphicData uri="http://schemas.openxmlformats.org/drawingml/2006/table">
-            <a:tbl>
-              <a:tblPr/>
-              <a:tblGrid>
-                <a:gridCol w="1252461">
-                  <a:extLst>
-                    <a:ext uri="{9D8B030D-6E8A-4147-A177-3AD203B41FA5}">
-                      <a16:colId xmlns:a16="http://schemas.microsoft.com/office/drawing/2014/main" val="20000"/>
-                    </a:ext>
-                  </a:extLst>
-                </a:gridCol>
-                <a:gridCol w="1875202">
-                  <a:extLst>
-                    <a:ext uri="{9D8B030D-6E8A-4147-A177-3AD203B41FA5}">
-                      <a16:colId xmlns:a16="http://schemas.microsoft.com/office/drawing/2014/main" val="20001"/>
-                    </a:ext>
-                  </a:extLst>
-                </a:gridCol>
-                <a:gridCol w="2094820">
-                  <a:extLst>
-                    <a:ext uri="{9D8B030D-6E8A-4147-A177-3AD203B41FA5}">
-                      <a16:colId xmlns:a16="http://schemas.microsoft.com/office/drawing/2014/main" val="20002"/>
-                    </a:ext>
-                  </a:extLst>
-                </a:gridCol>
-              </a:tblGrid>
-              <a:tr h="184136">
-                <a:tc>
-                  <a:txBody>
-                    <a:bodyPr/>
-                    <a:lstStyle/>
-                    <a:p>
-                      <a:pPr algn="l"/>
-                      <a:r>
-                        <a:rPr lang="en-US" sz="800" b="1" noProof="1">
-                          <a:solidFill>
-                            <a:srgbClr val="0A0A0A"/>
-                          </a:solidFill>
-                          <a:latin typeface="微软雅黑" panose="020B0503020204020204" pitchFamily="34" charset="-122"/>
-                          <a:ea typeface="微软雅黑" panose="020B0503020204020204" pitchFamily="34" charset="-122"/>
-                        </a:rPr>
-                        <a:t>场景</a:t>
-                      </a:r>
-                    </a:p>
-                  </a:txBody>
-                  <a:tcPr anchor="ctr">
-                    <a:lnL>
-                      <a:noFill/>
-                    </a:lnL>
-                    <a:lnR>
-                      <a:noFill/>
-                    </a:lnR>
-                    <a:lnT>
-                      <a:noFill/>
-                    </a:lnT>
-                    <a:lnB w="19050">
-                      <a:solidFill>
-                        <a:srgbClr val="0A0A0A"/>
-                      </a:solidFill>
-                    </a:lnB>
-                    <a:noFill/>
-                  </a:tcPr>
-                </a:tc>
-                <a:tc>
-                  <a:txBody>
-                    <a:bodyPr/>
-                    <a:lstStyle/>
-                    <a:p>
-                      <a:pPr algn="l"/>
-                      <a:r>
-                        <a:rPr lang="en-US" sz="800" b="1" noProof="1">
-                          <a:solidFill>
-                            <a:srgbClr val="0A0A0A"/>
-                          </a:solidFill>
-                          <a:latin typeface="微软雅黑" panose="020B0503020204020204" pitchFamily="34" charset="-122"/>
-                          <a:ea typeface="微软雅黑" panose="020B0503020204020204" pitchFamily="34" charset="-122"/>
-                        </a:rPr>
-                        <a:t>交易描述与线索</a:t>
-                      </a:r>
-                    </a:p>
-                  </a:txBody>
-                  <a:tcPr anchor="ctr">
-                    <a:lnL>
-                      <a:noFill/>
-                    </a:lnL>
-                    <a:lnR>
-                      <a:noFill/>
-                    </a:lnR>
-                    <a:lnT>
-                      <a:noFill/>
-                    </a:lnT>
-                    <a:lnB w="19050">
-                      <a:solidFill>
-                        <a:srgbClr val="0A0A0A"/>
-                      </a:solidFill>
-                    </a:lnB>
-                    <a:noFill/>
-                  </a:tcPr>
-                </a:tc>
-                <a:tc>
-                  <a:txBody>
-                    <a:bodyPr/>
-                    <a:lstStyle/>
-                    <a:p>
-                      <a:pPr algn="l"/>
-                      <a:r>
-                        <a:rPr lang="en-US" sz="800" b="1" noProof="1">
-                          <a:solidFill>
-                            <a:srgbClr val="0A0A0A"/>
-                          </a:solidFill>
-                          <a:latin typeface="微软雅黑" panose="020B0503020204020204" pitchFamily="34" charset="-122"/>
-                          <a:ea typeface="微软雅黑" panose="020B0503020204020204" pitchFamily="34" charset="-122"/>
-                        </a:rPr>
-                        <a:t>命中的知识</a:t>
-                      </a:r>
-                    </a:p>
-                  </a:txBody>
-                  <a:tcPr anchor="ctr">
-                    <a:lnL>
-                      <a:noFill/>
-                    </a:lnL>
-                    <a:lnR>
-                      <a:noFill/>
-                    </a:lnR>
-                    <a:lnT>
-                      <a:noFill/>
-                    </a:lnT>
-                    <a:lnB w="19050">
-                      <a:solidFill>
-                        <a:srgbClr val="0A0A0A"/>
-                      </a:solidFill>
-                    </a:lnB>
-                    <a:noFill/>
-                  </a:tcPr>
-                </a:tc>
-                <a:extLst>
-                  <a:ext uri="{0D108BD9-81ED-4DB2-BD59-A6C34878D82A}">
-                    <a16:rowId xmlns:a16="http://schemas.microsoft.com/office/drawing/2014/main" val="10000"/>
-                  </a:ext>
-                </a:extLst>
-              </a:tr>
-              <a:tr h="210935">
-                <a:tc>
-                  <a:txBody>
-                    <a:bodyPr/>
-                    <a:lstStyle/>
-                    <a:p>
-                      <a:pPr algn="l"/>
-                      <a:r>
-                        <a:rPr lang="en-US" sz="800" b="1" noProof="1">
-                          <a:solidFill>
-                            <a:srgbClr val="0A0A0A"/>
-                          </a:solidFill>
-                          <a:latin typeface="微软雅黑" panose="020B0503020204020204" pitchFamily="34" charset="-122"/>
-                          <a:ea typeface="微软雅黑" panose="020B0503020204020204" pitchFamily="34" charset="-122"/>
-                        </a:rPr>
-                        <a:t>普通工资</a:t>
-                      </a:r>
-                    </a:p>
-                  </a:txBody>
-                  <a:tcPr anchor="ctr">
-                    <a:lnL>
-                      <a:noFill/>
-                    </a:lnL>
-                    <a:lnR>
-                      <a:noFill/>
-                    </a:lnR>
-                    <a:lnT w="19050" cap="flat" cmpd="sng" algn="ctr">
-                      <a:solidFill>
-                        <a:srgbClr val="0A0A0A"/>
-                      </a:solidFill>
-                      <a:prstDash val="solid"/>
-                      <a:round/>
-                      <a:headEnd type="none" w="med" len="med"/>
-                      <a:tailEnd type="none" w="med" len="med"/>
-                    </a:lnT>
-                    <a:lnB w="9525">
-                      <a:solidFill>
-                        <a:srgbClr val="D6D6D6"/>
-                      </a:solidFill>
-                    </a:lnB>
-                    <a:noFill/>
-                  </a:tcPr>
-                </a:tc>
-                <a:tc>
-                  <a:txBody>
-                    <a:bodyPr/>
-                    <a:lstStyle/>
-                    <a:p>
-                      <a:pPr algn="l"/>
-                      <a:r>
-                        <a:rPr lang="en-US" sz="800" noProof="1">
-                          <a:solidFill>
-                            <a:srgbClr val="3D3C3A"/>
-                          </a:solidFill>
-                          <a:latin typeface="微软雅黑" panose="020B0503020204020204" pitchFamily="34" charset="-122"/>
-                          <a:ea typeface="微软雅黑" panose="020B0503020204020204" pitchFamily="34" charset="-122"/>
-                        </a:rPr>
-                        <a:t>PAYROLL ACME 双周入账</a:t>
-                      </a:r>
-                    </a:p>
-                  </a:txBody>
-                  <a:tcPr anchor="ctr">
-                    <a:lnL>
-                      <a:noFill/>
-                    </a:lnL>
-                    <a:lnR>
-                      <a:noFill/>
-                    </a:lnR>
-                    <a:lnT w="19050" cap="flat" cmpd="sng" algn="ctr">
-                      <a:solidFill>
-                        <a:srgbClr val="0A0A0A"/>
-                      </a:solidFill>
-                      <a:prstDash val="solid"/>
-                      <a:round/>
-                      <a:headEnd type="none" w="med" len="med"/>
-                      <a:tailEnd type="none" w="med" len="med"/>
-                    </a:lnT>
-                    <a:lnB w="9525">
-                      <a:solidFill>
-                        <a:srgbClr val="D6D6D6"/>
-                      </a:solidFill>
-                    </a:lnB>
-                    <a:noFill/>
-                  </a:tcPr>
-                </a:tc>
-                <a:tc>
-                  <a:txBody>
-                    <a:bodyPr/>
-                    <a:lstStyle/>
-                    <a:p>
-                      <a:pPr algn="l"/>
-                      <a:r>
-                        <a:rPr lang="en-US" sz="800" noProof="1">
-                          <a:solidFill>
-                            <a:srgbClr val="3D3C3A"/>
-                          </a:solidFill>
-                          <a:latin typeface="微软雅黑" panose="020B0503020204020204" pitchFamily="34" charset="-122"/>
-                          <a:ea typeface="微软雅黑" panose="020B0503020204020204" pitchFamily="34" charset="-122"/>
-                        </a:rPr>
-                        <a:t>Payroll 模式＋周期＋稳定阈值</a:t>
-                      </a:r>
-                    </a:p>
-                  </a:txBody>
-                  <a:tcPr anchor="ctr">
-                    <a:lnL>
-                      <a:noFill/>
-                    </a:lnL>
-                    <a:lnR>
-                      <a:noFill/>
-                    </a:lnR>
-                    <a:lnT w="19050" cap="flat" cmpd="sng" algn="ctr">
-                      <a:solidFill>
-                        <a:srgbClr val="0A0A0A"/>
-                      </a:solidFill>
-                      <a:prstDash val="solid"/>
-                      <a:round/>
-                      <a:headEnd type="none" w="med" len="med"/>
-                      <a:tailEnd type="none" w="med" len="med"/>
-                    </a:lnT>
-                    <a:lnB w="9525">
-                      <a:solidFill>
-                        <a:srgbClr val="D6D6D6"/>
-                      </a:solidFill>
-                    </a:lnB>
-                    <a:noFill/>
-                  </a:tcPr>
-                </a:tc>
-                <a:extLst>
-                  <a:ext uri="{0D108BD9-81ED-4DB2-BD59-A6C34878D82A}">
-                    <a16:rowId xmlns:a16="http://schemas.microsoft.com/office/drawing/2014/main" val="10001"/>
-                  </a:ext>
-                </a:extLst>
-              </a:tr>
-              <a:tr h="210935">
-                <a:tc>
-                  <a:txBody>
-                    <a:bodyPr/>
-                    <a:lstStyle/>
-                    <a:p>
-                      <a:pPr algn="l"/>
-                      <a:r>
-                        <a:rPr lang="en-US" sz="800" b="1" noProof="1">
-                          <a:solidFill>
-                            <a:srgbClr val="0A0A0A"/>
-                          </a:solidFill>
-                          <a:latin typeface="微软雅黑" panose="020B0503020204020204" pitchFamily="34" charset="-122"/>
-                          <a:ea typeface="微软雅黑" panose="020B0503020204020204" pitchFamily="34" charset="-122"/>
-                        </a:rPr>
-                        <a:t>薪酬包装</a:t>
-                      </a:r>
-                    </a:p>
-                  </a:txBody>
-                  <a:tcPr anchor="ctr">
-                    <a:lnL>
-                      <a:noFill/>
-                    </a:lnL>
-                    <a:lnR>
-                      <a:noFill/>
-                    </a:lnR>
-                    <a:lnT w="9525" cap="flat" cmpd="sng" algn="ctr">
-                      <a:solidFill>
-                        <a:srgbClr val="D6D6D6"/>
-                      </a:solidFill>
-                      <a:prstDash val="solid"/>
-                      <a:round/>
-                      <a:headEnd type="none" w="med" len="med"/>
-                      <a:tailEnd type="none" w="med" len="med"/>
-                    </a:lnT>
-                    <a:lnB w="9525">
-                      <a:solidFill>
-                        <a:srgbClr val="D6D6D6"/>
-                      </a:solidFill>
-                    </a:lnB>
-                    <a:noFill/>
-                  </a:tcPr>
-                </a:tc>
-                <a:tc>
-                  <a:txBody>
-                    <a:bodyPr/>
-                    <a:lstStyle/>
-                    <a:p>
-                      <a:pPr algn="l"/>
-                      <a:r>
-                        <a:rPr lang="en-US" sz="800" noProof="1">
-                          <a:solidFill>
-                            <a:srgbClr val="3D3C3A"/>
-                          </a:solidFill>
-                          <a:latin typeface="微软雅黑" panose="020B0503020204020204" pitchFamily="34" charset="-122"/>
-                          <a:ea typeface="微软雅黑" panose="020B0503020204020204" pitchFamily="34" charset="-122"/>
-                        </a:rPr>
-                        <a:t>SALARY PACKAGING ...</a:t>
-                      </a:r>
-                    </a:p>
-                  </a:txBody>
-                  <a:tcPr anchor="ctr">
-                    <a:lnL>
-                      <a:noFill/>
-                    </a:lnL>
-                    <a:lnR>
-                      <a:noFill/>
-                    </a:lnR>
-                    <a:lnT w="9525" cap="flat" cmpd="sng" algn="ctr">
-                      <a:solidFill>
-                        <a:srgbClr val="D6D6D6"/>
-                      </a:solidFill>
-                      <a:prstDash val="solid"/>
-                      <a:round/>
-                      <a:headEnd type="none" w="med" len="med"/>
-                      <a:tailEnd type="none" w="med" len="med"/>
-                    </a:lnT>
-                    <a:lnB w="9525">
-                      <a:solidFill>
-                        <a:srgbClr val="D6D6D6"/>
-                      </a:solidFill>
-                    </a:lnB>
-                    <a:noFill/>
-                  </a:tcPr>
-                </a:tc>
-                <a:tc>
-                  <a:txBody>
-                    <a:bodyPr/>
-                    <a:lstStyle/>
-                    <a:p>
-                      <a:pPr algn="l"/>
-                      <a:r>
-                        <a:rPr lang="en-US" sz="800" noProof="1">
-                          <a:solidFill>
-                            <a:srgbClr val="3D3C3A"/>
-                          </a:solidFill>
-                          <a:latin typeface="微软雅黑" panose="020B0503020204020204" pitchFamily="34" charset="-122"/>
-                          <a:ea typeface="微软雅黑" panose="020B0503020204020204" pitchFamily="34" charset="-122"/>
-                        </a:rPr>
-                        <a:t>薪酬包装模式优先于普通工资</a:t>
-                      </a:r>
-                    </a:p>
-                  </a:txBody>
-                  <a:tcPr anchor="ctr">
-                    <a:lnL>
-                      <a:noFill/>
-                    </a:lnL>
-                    <a:lnR>
-                      <a:noFill/>
-                    </a:lnR>
-                    <a:lnT w="9525" cap="flat" cmpd="sng" algn="ctr">
-                      <a:solidFill>
-                        <a:srgbClr val="D6D6D6"/>
-                      </a:solidFill>
-                      <a:prstDash val="solid"/>
-                      <a:round/>
-                      <a:headEnd type="none" w="med" len="med"/>
-                      <a:tailEnd type="none" w="med" len="med"/>
-                    </a:lnT>
-                    <a:lnB w="9525">
-                      <a:solidFill>
-                        <a:srgbClr val="D6D6D6"/>
-                      </a:solidFill>
-                    </a:lnB>
-                    <a:noFill/>
-                  </a:tcPr>
-                </a:tc>
-                <a:extLst>
-                  <a:ext uri="{0D108BD9-81ED-4DB2-BD59-A6C34878D82A}">
-                    <a16:rowId xmlns:a16="http://schemas.microsoft.com/office/drawing/2014/main" val="10002"/>
-                  </a:ext>
-                </a:extLst>
-              </a:tr>
-              <a:tr h="210935">
-                <a:tc>
-                  <a:txBody>
-                    <a:bodyPr/>
-                    <a:lstStyle/>
-                    <a:p>
-                      <a:pPr algn="l"/>
-                      <a:r>
-                        <a:rPr lang="en-US" sz="800" b="1" noProof="1">
-                          <a:solidFill>
-                            <a:srgbClr val="0A0A0A"/>
-                          </a:solidFill>
-                          <a:latin typeface="微软雅黑" panose="020B0503020204020204" pitchFamily="34" charset="-122"/>
-                          <a:ea typeface="微软雅黑" panose="020B0503020204020204" pitchFamily="34" charset="-122"/>
-                        </a:rPr>
-                        <a:t>政府补助</a:t>
-                      </a:r>
-                    </a:p>
-                  </a:txBody>
-                  <a:tcPr anchor="ctr">
-                    <a:lnL>
-                      <a:noFill/>
-                    </a:lnL>
-                    <a:lnR>
-                      <a:noFill/>
-                    </a:lnR>
-                    <a:lnT w="9525" cap="flat" cmpd="sng" algn="ctr">
-                      <a:solidFill>
-                        <a:srgbClr val="D6D6D6"/>
-                      </a:solidFill>
-                      <a:prstDash val="solid"/>
-                      <a:round/>
-                      <a:headEnd type="none" w="med" len="med"/>
-                      <a:tailEnd type="none" w="med" len="med"/>
-                    </a:lnT>
-                    <a:lnB w="9525">
-                      <a:solidFill>
-                        <a:srgbClr val="D6D6D6"/>
-                      </a:solidFill>
-                    </a:lnB>
-                    <a:noFill/>
-                  </a:tcPr>
-                </a:tc>
-                <a:tc>
-                  <a:txBody>
-                    <a:bodyPr/>
-                    <a:lstStyle/>
-                    <a:p>
-                      <a:pPr algn="l"/>
-                      <a:r>
-                        <a:rPr lang="en-US" sz="800" noProof="1">
-                          <a:solidFill>
-                            <a:srgbClr val="3D3C3A"/>
-                          </a:solidFill>
-                          <a:latin typeface="微软雅黑" panose="020B0503020204020204" pitchFamily="34" charset="-122"/>
-                          <a:ea typeface="微软雅黑" panose="020B0503020204020204" pitchFamily="34" charset="-122"/>
-                        </a:rPr>
-                        <a:t>CENTRELINK ...</a:t>
-                      </a:r>
-                    </a:p>
-                  </a:txBody>
-                  <a:tcPr anchor="ctr">
-                    <a:lnL>
-                      <a:noFill/>
-                    </a:lnL>
-                    <a:lnR>
-                      <a:noFill/>
-                    </a:lnR>
-                    <a:lnT w="9525" cap="flat" cmpd="sng" algn="ctr">
-                      <a:solidFill>
-                        <a:srgbClr val="D6D6D6"/>
-                      </a:solidFill>
-                      <a:prstDash val="solid"/>
-                      <a:round/>
-                      <a:headEnd type="none" w="med" len="med"/>
-                      <a:tailEnd type="none" w="med" len="med"/>
-                    </a:lnT>
-                    <a:lnB w="9525">
-                      <a:solidFill>
-                        <a:srgbClr val="D6D6D6"/>
-                      </a:solidFill>
-                    </a:lnB>
-                    <a:noFill/>
-                  </a:tcPr>
-                </a:tc>
-                <a:tc>
-                  <a:txBody>
-                    <a:bodyPr/>
-                    <a:lstStyle/>
-                    <a:p>
-                      <a:pPr algn="l"/>
-                      <a:r>
-                        <a:rPr lang="en-US" sz="800" noProof="1">
-                          <a:solidFill>
-                            <a:srgbClr val="3D3C3A"/>
-                          </a:solidFill>
-                          <a:latin typeface="微软雅黑" panose="020B0503020204020204" pitchFamily="34" charset="-122"/>
-                          <a:ea typeface="微软雅黑" panose="020B0503020204020204" pitchFamily="34" charset="-122"/>
-                        </a:rPr>
-                        <a:t>Centrelink 专项模式</a:t>
-                      </a:r>
-                    </a:p>
-                  </a:txBody>
-                  <a:tcPr anchor="ctr">
-                    <a:lnL>
-                      <a:noFill/>
-                    </a:lnL>
-                    <a:lnR>
-                      <a:noFill/>
-                    </a:lnR>
-                    <a:lnT w="9525" cap="flat" cmpd="sng" algn="ctr">
-                      <a:solidFill>
-                        <a:srgbClr val="D6D6D6"/>
-                      </a:solidFill>
-                      <a:prstDash val="solid"/>
-                      <a:round/>
-                      <a:headEnd type="none" w="med" len="med"/>
-                      <a:tailEnd type="none" w="med" len="med"/>
-                    </a:lnT>
-                    <a:lnB w="9525">
-                      <a:solidFill>
-                        <a:srgbClr val="D6D6D6"/>
-                      </a:solidFill>
-                    </a:lnB>
-                    <a:noFill/>
-                  </a:tcPr>
-                </a:tc>
-                <a:extLst>
-                  <a:ext uri="{0D108BD9-81ED-4DB2-BD59-A6C34878D82A}">
-                    <a16:rowId xmlns:a16="http://schemas.microsoft.com/office/drawing/2014/main" val="10003"/>
-                  </a:ext>
-                </a:extLst>
-              </a:tr>
-              <a:tr h="210935">
-                <a:tc>
-                  <a:txBody>
-                    <a:bodyPr/>
-                    <a:lstStyle/>
-                    <a:p>
-                      <a:pPr algn="l"/>
-                      <a:r>
-                        <a:rPr lang="en-US" sz="800" b="1" noProof="1">
-                          <a:solidFill>
-                            <a:srgbClr val="0A0A0A"/>
-                          </a:solidFill>
-                          <a:latin typeface="微软雅黑" panose="020B0503020204020204" pitchFamily="34" charset="-122"/>
-                          <a:ea typeface="微软雅黑" panose="020B0503020204020204" pitchFamily="34" charset="-122"/>
-                        </a:rPr>
-                        <a:t>零工收入</a:t>
-                      </a:r>
-                    </a:p>
-                  </a:txBody>
-                  <a:tcPr anchor="ctr">
-                    <a:lnL>
-                      <a:noFill/>
-                    </a:lnL>
-                    <a:lnR>
-                      <a:noFill/>
-                    </a:lnR>
-                    <a:lnT w="9525" cap="flat" cmpd="sng" algn="ctr">
-                      <a:solidFill>
-                        <a:srgbClr val="D6D6D6"/>
-                      </a:solidFill>
-                      <a:prstDash val="solid"/>
-                      <a:round/>
-                      <a:headEnd type="none" w="med" len="med"/>
-                      <a:tailEnd type="none" w="med" len="med"/>
-                    </a:lnT>
-                    <a:lnB w="9525">
-                      <a:solidFill>
-                        <a:srgbClr val="D6D6D6"/>
-                      </a:solidFill>
-                    </a:lnB>
-                    <a:noFill/>
-                  </a:tcPr>
-                </a:tc>
-                <a:tc>
-                  <a:txBody>
-                    <a:bodyPr/>
-                    <a:lstStyle/>
-                    <a:p>
-                      <a:pPr algn="l"/>
-                      <a:r>
-                        <a:rPr lang="en-US" sz="800" noProof="1">
-                          <a:solidFill>
-                            <a:srgbClr val="3D3C3A"/>
-                          </a:solidFill>
-                          <a:latin typeface="微软雅黑" panose="020B0503020204020204" pitchFamily="34" charset="-122"/>
-                          <a:ea typeface="微软雅黑" panose="020B0503020204020204" pitchFamily="34" charset="-122"/>
-                        </a:rPr>
-                        <a:t>UBER 入账，无退款信号</a:t>
-                      </a:r>
-                    </a:p>
-                  </a:txBody>
-                  <a:tcPr anchor="ctr">
-                    <a:lnL>
-                      <a:noFill/>
-                    </a:lnL>
-                    <a:lnR>
-                      <a:noFill/>
-                    </a:lnR>
-                    <a:lnT w="9525" cap="flat" cmpd="sng" algn="ctr">
-                      <a:solidFill>
-                        <a:srgbClr val="D6D6D6"/>
-                      </a:solidFill>
-                      <a:prstDash val="solid"/>
-                      <a:round/>
-                      <a:headEnd type="none" w="med" len="med"/>
-                      <a:tailEnd type="none" w="med" len="med"/>
-                    </a:lnT>
-                    <a:lnB w="9525">
-                      <a:solidFill>
-                        <a:srgbClr val="D6D6D6"/>
-                      </a:solidFill>
-                    </a:lnB>
-                    <a:noFill/>
-                  </a:tcPr>
-                </a:tc>
-                <a:tc>
-                  <a:txBody>
-                    <a:bodyPr/>
-                    <a:lstStyle/>
-                    <a:p>
-                      <a:pPr algn="l"/>
-                      <a:r>
-                        <a:rPr lang="en-US" sz="800" noProof="1">
-                          <a:solidFill>
-                            <a:srgbClr val="3D3C3A"/>
-                          </a:solidFill>
-                          <a:latin typeface="微软雅黑" panose="020B0503020204020204" pitchFamily="34" charset="-122"/>
-                          <a:ea typeface="微软雅黑" panose="020B0503020204020204" pitchFamily="34" charset="-122"/>
-                        </a:rPr>
-                        <a:t>零工模式＋入账方向＋排除规则</a:t>
-                      </a:r>
-                    </a:p>
-                  </a:txBody>
-                  <a:tcPr anchor="ctr">
-                    <a:lnL>
-                      <a:noFill/>
-                    </a:lnL>
-                    <a:lnR>
-                      <a:noFill/>
-                    </a:lnR>
-                    <a:lnT w="9525" cap="flat" cmpd="sng" algn="ctr">
-                      <a:solidFill>
-                        <a:srgbClr val="D6D6D6"/>
-                      </a:solidFill>
-                      <a:prstDash val="solid"/>
-                      <a:round/>
-                      <a:headEnd type="none" w="med" len="med"/>
-                      <a:tailEnd type="none" w="med" len="med"/>
-                    </a:lnT>
-                    <a:lnB w="9525">
-                      <a:solidFill>
-                        <a:srgbClr val="D6D6D6"/>
-                      </a:solidFill>
-                    </a:lnB>
-                    <a:noFill/>
-                  </a:tcPr>
-                </a:tc>
-                <a:extLst>
-                  <a:ext uri="{0D108BD9-81ED-4DB2-BD59-A6C34878D82A}">
-                    <a16:rowId xmlns:a16="http://schemas.microsoft.com/office/drawing/2014/main" val="10004"/>
-                  </a:ext>
-                </a:extLst>
-              </a:tr>
-            </a:tbl>
-          </a:graphicData>
-        </a:graphic>
-      </p:graphicFrame>
-      <p:sp>
-        <p:nvSpPr>
-          <p:cNvPr id="13" name="liab-capsule">
-            <a:extLst>
-              <a:ext uri="{FF2B5EF4-FFF2-40B4-BE49-F238E27FC236}">
-                <a16:creationId xmlns:a16="http://schemas.microsoft.com/office/drawing/2014/main" id="{A571CED0-8DA4-453B-8B62-551D2F39A966}"/>
-              </a:ext>
-            </a:extLst>
-          </p:cNvPr>
-          <p:cNvSpPr/>
-          <p:nvPr/>
-        </p:nvSpPr>
-        <p:spPr>
-          <a:xfrm>
-            <a:off x="511115" y="5015663"/>
-            <a:ext cx="1295400" cy="228600"/>
-          </a:xfrm>
-          <a:prstGeom prst="roundRect">
-            <a:avLst>
-              <a:gd name="adj" fmla="val 50000"/>
-            </a:avLst>
-          </a:prstGeom>
-          <a:solidFill>
-            <a:srgbClr val="D6A000"/>
-          </a:solidFill>
-          <a:ln>
-            <a:noFill/>
-          </a:ln>
-        </p:spPr>
-        <p:txBody>
-          <a:bodyPr/>
-          <a:lstStyle/>
-          <a:p>
-            <a:endParaRPr/>
-          </a:p>
-        </p:txBody>
-      </p:sp>
-      <p:sp>
-        <p:nvSpPr>
-          <p:cNvPr id="14" name="liab-capsule-text">
-            <a:extLst>
-              <a:ext uri="{FF2B5EF4-FFF2-40B4-BE49-F238E27FC236}">
-                <a16:creationId xmlns:a16="http://schemas.microsoft.com/office/drawing/2014/main" id="{671DCB91-F81B-448D-8287-02975156DBAA}"/>
-              </a:ext>
-            </a:extLst>
-          </p:cNvPr>
-          <p:cNvSpPr txBox="1"/>
-          <p:nvPr/>
-        </p:nvSpPr>
-        <p:spPr>
-          <a:xfrm>
-            <a:off x="511115" y="5015663"/>
-            <a:ext cx="1295400" cy="228600"/>
-          </a:xfrm>
-          <a:prstGeom prst="rect">
-            <a:avLst/>
-          </a:prstGeom>
-          <a:noFill/>
-          <a:ln>
-            <a:noFill/>
-          </a:ln>
-        </p:spPr>
-        <p:txBody>
-          <a:bodyPr wrap="none" lIns="0" tIns="0" rIns="0" bIns="0" rtlCol="0" anchor="ctr"/>
-          <a:lstStyle/>
-          <a:p>
-            <a:pPr algn="ctr">
-              <a:lnSpc>
-                <a:spcPct val="120000"/>
-              </a:lnSpc>
-            </a:pPr>
-            <a:r>
-              <a:rPr lang="zh-CN" altLang="en-US" sz="1050" b="1" noProof="1">
-                <a:solidFill>
-                  <a:srgbClr val="FFFFFF"/>
-                </a:solidFill>
-                <a:latin typeface="微软雅黑" panose="020B0503020204020204" pitchFamily="34" charset="-122"/>
-                <a:ea typeface="微软雅黑" panose="020B0503020204020204" pitchFamily="34" charset="-122"/>
-              </a:rPr>
-              <a:t>贷款识别库</a:t>
-            </a:r>
-            <a:endParaRPr lang="en-US" altLang="zh-CN" sz="1050" noProof="1">
-              <a:latin typeface="微软雅黑" panose="020B0503020204020204" pitchFamily="34" charset="-122"/>
-              <a:ea typeface="微软雅黑" panose="020B0503020204020204" pitchFamily="34" charset="-122"/>
-            </a:endParaRPr>
-          </a:p>
-        </p:txBody>
-      </p:sp>
-      <p:graphicFrame>
-        <p:nvGraphicFramePr>
-          <p:cNvPr id="15" name="liab-table">
-            <a:extLst>
-              <a:ext uri="{FF2B5EF4-FFF2-40B4-BE49-F238E27FC236}">
-                <a16:creationId xmlns:a16="http://schemas.microsoft.com/office/drawing/2014/main" id="{D9D16F0A-2CA9-444A-9C30-0D63C131C933}"/>
-              </a:ext>
-            </a:extLst>
-          </p:cNvPr>
-          <p:cNvGraphicFramePr>
-            <a:graphicFrameLocks noGrp="1"/>
-          </p:cNvGraphicFramePr>
-          <p:nvPr>
-            <p:extLst>
-              <p:ext uri="{D42A27DB-BD31-4B8C-83A1-F6EECF244321}">
-                <p14:modId xmlns:p14="http://schemas.microsoft.com/office/powerpoint/2010/main" val="3351406915"/>
-              </p:ext>
-            </p:extLst>
-          </p:nvPr>
-        </p:nvGraphicFramePr>
-        <p:xfrm>
-          <a:off x="511115" y="5244263"/>
-          <a:ext cx="5540237" cy="1426464"/>
-        </p:xfrm>
-        <a:graphic>
-          <a:graphicData uri="http://schemas.openxmlformats.org/drawingml/2006/table">
-            <a:tbl>
-              <a:tblPr/>
-              <a:tblGrid>
-                <a:gridCol w="1627753">
-                  <a:extLst>
-                    <a:ext uri="{9D8B030D-6E8A-4147-A177-3AD203B41FA5}">
-                      <a16:colId xmlns:a16="http://schemas.microsoft.com/office/drawing/2014/main" val="20000"/>
-                    </a:ext>
-                  </a:extLst>
-                </a:gridCol>
-                <a:gridCol w="1651632">
-                  <a:extLst>
-                    <a:ext uri="{9D8B030D-6E8A-4147-A177-3AD203B41FA5}">
-                      <a16:colId xmlns:a16="http://schemas.microsoft.com/office/drawing/2014/main" val="20001"/>
-                    </a:ext>
-                  </a:extLst>
-                </a:gridCol>
-                <a:gridCol w="2260852">
-                  <a:extLst>
-                    <a:ext uri="{9D8B030D-6E8A-4147-A177-3AD203B41FA5}">
-                      <a16:colId xmlns:a16="http://schemas.microsoft.com/office/drawing/2014/main" val="20002"/>
-                    </a:ext>
-                  </a:extLst>
-                </a:gridCol>
-              </a:tblGrid>
-              <a:tr h="237744">
-                <a:tc>
-                  <a:txBody>
-                    <a:bodyPr/>
-                    <a:lstStyle/>
-                    <a:p>
-                      <a:pPr algn="l"/>
-                      <a:r>
-                        <a:rPr lang="en-US" sz="800" b="1" noProof="1">
-                          <a:solidFill>
-                            <a:srgbClr val="0A0A0A"/>
-                          </a:solidFill>
-                          <a:latin typeface="微软雅黑" panose="020B0503020204020204" pitchFamily="34" charset="-122"/>
-                          <a:ea typeface="微软雅黑" panose="020B0503020204020204" pitchFamily="34" charset="-122"/>
-                        </a:rPr>
-                        <a:t>知识库／场景</a:t>
-                      </a:r>
-                    </a:p>
-                  </a:txBody>
-                  <a:tcPr anchor="ctr">
-                    <a:lnL>
-                      <a:noFill/>
-                    </a:lnL>
-                    <a:lnR>
-                      <a:noFill/>
-                    </a:lnR>
-                    <a:lnT>
-                      <a:noFill/>
-                    </a:lnT>
-                    <a:lnB w="19050">
-                      <a:solidFill>
-                        <a:srgbClr val="0A0A0A"/>
-                      </a:solidFill>
-                    </a:lnB>
-                    <a:noFill/>
-                  </a:tcPr>
-                </a:tc>
-                <a:tc>
-                  <a:txBody>
-                    <a:bodyPr/>
-                    <a:lstStyle/>
-                    <a:p>
-                      <a:pPr algn="l"/>
-                      <a:r>
-                        <a:rPr lang="en-US" sz="800" b="1" noProof="1">
-                          <a:solidFill>
-                            <a:srgbClr val="0A0A0A"/>
-                          </a:solidFill>
-                          <a:latin typeface="微软雅黑" panose="020B0503020204020204" pitchFamily="34" charset="-122"/>
-                          <a:ea typeface="微软雅黑" panose="020B0503020204020204" pitchFamily="34" charset="-122"/>
-                        </a:rPr>
-                        <a:t>交易描述示例</a:t>
-                      </a:r>
-                    </a:p>
-                  </a:txBody>
-                  <a:tcPr anchor="ctr">
-                    <a:lnL>
-                      <a:noFill/>
-                    </a:lnL>
-                    <a:lnR>
-                      <a:noFill/>
-                    </a:lnR>
-                    <a:lnT>
-                      <a:noFill/>
-                    </a:lnT>
-                    <a:lnB w="19050">
-                      <a:solidFill>
-                        <a:srgbClr val="0A0A0A"/>
-                      </a:solidFill>
-                    </a:lnB>
-                    <a:noFill/>
-                  </a:tcPr>
-                </a:tc>
-                <a:tc>
-                  <a:txBody>
-                    <a:bodyPr/>
-                    <a:lstStyle/>
-                    <a:p>
-                      <a:pPr algn="l"/>
-                      <a:r>
-                        <a:rPr lang="en-US" altLang="zh-CN" sz="800" b="1" noProof="1">
-                          <a:solidFill>
-                            <a:srgbClr val="0A0A0A"/>
-                          </a:solidFill>
-                          <a:latin typeface="微软雅黑" panose="020B0503020204020204" pitchFamily="34" charset="-122"/>
-                          <a:ea typeface="微软雅黑" panose="020B0503020204020204" pitchFamily="34" charset="-122"/>
-                        </a:rPr>
-                        <a:t>命中的知识</a:t>
-                      </a:r>
-                    </a:p>
-                  </a:txBody>
-                  <a:tcPr anchor="ctr">
-                    <a:lnL>
-                      <a:noFill/>
-                    </a:lnL>
-                    <a:lnR>
-                      <a:noFill/>
-                    </a:lnR>
-                    <a:lnT>
-                      <a:noFill/>
-                    </a:lnT>
-                    <a:lnB w="19050">
-                      <a:solidFill>
-                        <a:srgbClr val="0A0A0A"/>
-                      </a:solidFill>
-                    </a:lnB>
-                    <a:noFill/>
-                  </a:tcPr>
-                </a:tc>
-                <a:extLst>
-                  <a:ext uri="{0D108BD9-81ED-4DB2-BD59-A6C34878D82A}">
-                    <a16:rowId xmlns:a16="http://schemas.microsoft.com/office/drawing/2014/main" val="10000"/>
-                  </a:ext>
-                </a:extLst>
-              </a:tr>
-              <a:tr h="237744">
-                <a:tc>
-                  <a:txBody>
-                    <a:bodyPr/>
-                    <a:lstStyle/>
-                    <a:p>
-                      <a:pPr algn="l"/>
-                      <a:r>
-                        <a:rPr lang="en-US" sz="800" b="1" noProof="1">
-                          <a:solidFill>
-                            <a:srgbClr val="0A0A0A"/>
-                          </a:solidFill>
-                          <a:latin typeface="微软雅黑" panose="020B0503020204020204" pitchFamily="34" charset="-122"/>
-                          <a:ea typeface="微软雅黑" panose="020B0503020204020204" pitchFamily="34" charset="-122"/>
-                        </a:rPr>
-                        <a:t>BNPL 对手库</a:t>
-                      </a:r>
-                    </a:p>
-                  </a:txBody>
-                  <a:tcPr anchor="ctr">
-                    <a:lnL>
-                      <a:noFill/>
-                    </a:lnL>
-                    <a:lnR>
-                      <a:noFill/>
-                    </a:lnR>
-                    <a:lnT w="19050" cap="flat" cmpd="sng" algn="ctr">
-                      <a:solidFill>
-                        <a:srgbClr val="0A0A0A"/>
-                      </a:solidFill>
-                      <a:prstDash val="solid"/>
-                      <a:round/>
-                      <a:headEnd type="none" w="med" len="med"/>
-                      <a:tailEnd type="none" w="med" len="med"/>
-                    </a:lnT>
-                    <a:lnB w="9525">
-                      <a:solidFill>
-                        <a:srgbClr val="D6D6D6"/>
-                      </a:solidFill>
-                    </a:lnB>
-                    <a:noFill/>
-                  </a:tcPr>
-                </a:tc>
-                <a:tc>
-                  <a:txBody>
-                    <a:bodyPr/>
-                    <a:lstStyle/>
-                    <a:p>
-                      <a:pPr algn="l"/>
-                      <a:r>
-                        <a:rPr lang="en-US" sz="800" noProof="1">
-                          <a:solidFill>
-                            <a:srgbClr val="3D3C3A"/>
-                          </a:solidFill>
-                          <a:latin typeface="微软雅黑" panose="020B0503020204020204" pitchFamily="34" charset="-122"/>
-                          <a:ea typeface="微软雅黑" panose="020B0503020204020204" pitchFamily="34" charset="-122"/>
-                        </a:rPr>
-                        <a:t>DIRECT DEBIT AFTERPAY</a:t>
-                      </a:r>
-                    </a:p>
-                  </a:txBody>
-                  <a:tcPr anchor="ctr">
-                    <a:lnL>
-                      <a:noFill/>
-                    </a:lnL>
-                    <a:lnR>
-                      <a:noFill/>
-                    </a:lnR>
-                    <a:lnT w="19050" cap="flat" cmpd="sng" algn="ctr">
-                      <a:solidFill>
-                        <a:srgbClr val="0A0A0A"/>
-                      </a:solidFill>
-                      <a:prstDash val="solid"/>
-                      <a:round/>
-                      <a:headEnd type="none" w="med" len="med"/>
-                      <a:tailEnd type="none" w="med" len="med"/>
-                    </a:lnT>
-                    <a:lnB w="9525">
-                      <a:solidFill>
-                        <a:srgbClr val="D6D6D6"/>
-                      </a:solidFill>
-                    </a:lnB>
-                    <a:noFill/>
-                  </a:tcPr>
-                </a:tc>
-                <a:tc>
-                  <a:txBody>
-                    <a:bodyPr/>
-                    <a:lstStyle/>
-                    <a:p>
-                      <a:pPr algn="l"/>
-                      <a:r>
-                        <a:rPr lang="en-US" sz="800" noProof="1">
-                          <a:solidFill>
-                            <a:srgbClr val="3D3C3A"/>
-                          </a:solidFill>
-                          <a:latin typeface="微软雅黑" panose="020B0503020204020204" pitchFamily="34" charset="-122"/>
-                          <a:ea typeface="微软雅黑" panose="020B0503020204020204" pitchFamily="34" charset="-122"/>
-                        </a:rPr>
-                        <a:t>BNPL 交易对手关键词</a:t>
-                      </a:r>
-                    </a:p>
-                  </a:txBody>
-                  <a:tcPr anchor="ctr">
-                    <a:lnL>
-                      <a:noFill/>
-                    </a:lnL>
-                    <a:lnR>
-                      <a:noFill/>
-                    </a:lnR>
-                    <a:lnT w="19050" cap="flat" cmpd="sng" algn="ctr">
-                      <a:solidFill>
-                        <a:srgbClr val="0A0A0A"/>
-                      </a:solidFill>
-                      <a:prstDash val="solid"/>
-                      <a:round/>
-                      <a:headEnd type="none" w="med" len="med"/>
-                      <a:tailEnd type="none" w="med" len="med"/>
-                    </a:lnT>
-                    <a:lnB w="9525">
-                      <a:solidFill>
-                        <a:srgbClr val="D6D6D6"/>
-                      </a:solidFill>
-                    </a:lnB>
-                    <a:noFill/>
-                  </a:tcPr>
-                </a:tc>
-                <a:extLst>
-                  <a:ext uri="{0D108BD9-81ED-4DB2-BD59-A6C34878D82A}">
-                    <a16:rowId xmlns:a16="http://schemas.microsoft.com/office/drawing/2014/main" val="10001"/>
-                  </a:ext>
-                </a:extLst>
-              </a:tr>
-              <a:tr h="237744">
-                <a:tc>
-                  <a:txBody>
-                    <a:bodyPr/>
-                    <a:lstStyle/>
-                    <a:p>
-                      <a:pPr algn="l"/>
-                      <a:r>
-                        <a:rPr lang="en-US" sz="800" b="1" noProof="1">
-                          <a:solidFill>
-                            <a:srgbClr val="0A0A0A"/>
-                          </a:solidFill>
-                          <a:latin typeface="微软雅黑" panose="020B0503020204020204" pitchFamily="34" charset="-122"/>
-                          <a:ea typeface="微软雅黑" panose="020B0503020204020204" pitchFamily="34" charset="-122"/>
-                        </a:rPr>
-                        <a:t>信用卡规则库</a:t>
-                      </a:r>
-                    </a:p>
-                  </a:txBody>
-                  <a:tcPr anchor="ctr">
-                    <a:lnL>
-                      <a:noFill/>
-                    </a:lnL>
-                    <a:lnR>
-                      <a:noFill/>
-                    </a:lnR>
-                    <a:lnT w="9525" cap="flat" cmpd="sng" algn="ctr">
-                      <a:solidFill>
-                        <a:srgbClr val="D6D6D6"/>
-                      </a:solidFill>
-                      <a:prstDash val="solid"/>
-                      <a:round/>
-                      <a:headEnd type="none" w="med" len="med"/>
-                      <a:tailEnd type="none" w="med" len="med"/>
-                    </a:lnT>
-                    <a:lnB w="9525">
-                      <a:solidFill>
-                        <a:srgbClr val="D6D6D6"/>
-                      </a:solidFill>
-                    </a:lnB>
-                    <a:noFill/>
-                  </a:tcPr>
-                </a:tc>
-                <a:tc>
-                  <a:txBody>
-                    <a:bodyPr/>
-                    <a:lstStyle/>
-                    <a:p>
-                      <a:pPr algn="l"/>
-                      <a:r>
-                        <a:rPr lang="en-US" sz="800" noProof="1">
-                          <a:solidFill>
-                            <a:srgbClr val="3D3C3A"/>
-                          </a:solidFill>
-                          <a:latin typeface="微软雅黑" panose="020B0503020204020204" pitchFamily="34" charset="-122"/>
-                          <a:ea typeface="微软雅黑" panose="020B0503020204020204" pitchFamily="34" charset="-122"/>
-                        </a:rPr>
-                        <a:t>BPAY ... ANZ CARDS</a:t>
-                      </a:r>
-                    </a:p>
-                  </a:txBody>
-                  <a:tcPr anchor="ctr">
-                    <a:lnL>
-                      <a:noFill/>
-                    </a:lnL>
-                    <a:lnR>
-                      <a:noFill/>
-                    </a:lnR>
-                    <a:lnT w="9525" cap="flat" cmpd="sng" algn="ctr">
-                      <a:solidFill>
-                        <a:srgbClr val="D6D6D6"/>
-                      </a:solidFill>
-                      <a:prstDash val="solid"/>
-                      <a:round/>
-                      <a:headEnd type="none" w="med" len="med"/>
-                      <a:tailEnd type="none" w="med" len="med"/>
-                    </a:lnT>
-                    <a:lnB w="9525">
-                      <a:solidFill>
-                        <a:srgbClr val="D6D6D6"/>
-                      </a:solidFill>
-                    </a:lnB>
-                    <a:noFill/>
-                  </a:tcPr>
-                </a:tc>
-                <a:tc>
-                  <a:txBody>
-                    <a:bodyPr/>
-                    <a:lstStyle/>
-                    <a:p>
-                      <a:pPr algn="l"/>
-                      <a:r>
-                        <a:rPr lang="en-US" sz="800" noProof="1">
-                          <a:solidFill>
-                            <a:srgbClr val="3D3C3A"/>
-                          </a:solidFill>
-                          <a:latin typeface="微软雅黑" panose="020B0503020204020204" pitchFamily="34" charset="-122"/>
-                          <a:ea typeface="微软雅黑" panose="020B0503020204020204" pitchFamily="34" charset="-122"/>
-                        </a:rPr>
-                        <a:t>银行、账户类型、方向与文本共同匹配</a:t>
-                      </a:r>
-                    </a:p>
-                  </a:txBody>
-                  <a:tcPr anchor="ctr">
-                    <a:lnL>
-                      <a:noFill/>
-                    </a:lnL>
-                    <a:lnR>
-                      <a:noFill/>
-                    </a:lnR>
-                    <a:lnT w="9525" cap="flat" cmpd="sng" algn="ctr">
-                      <a:solidFill>
-                        <a:srgbClr val="D6D6D6"/>
-                      </a:solidFill>
-                      <a:prstDash val="solid"/>
-                      <a:round/>
-                      <a:headEnd type="none" w="med" len="med"/>
-                      <a:tailEnd type="none" w="med" len="med"/>
-                    </a:lnT>
-                    <a:lnB w="9525">
-                      <a:solidFill>
-                        <a:srgbClr val="D6D6D6"/>
-                      </a:solidFill>
-                    </a:lnB>
-                    <a:noFill/>
-                  </a:tcPr>
-                </a:tc>
-                <a:extLst>
-                  <a:ext uri="{0D108BD9-81ED-4DB2-BD59-A6C34878D82A}">
-                    <a16:rowId xmlns:a16="http://schemas.microsoft.com/office/drawing/2014/main" val="10002"/>
-                  </a:ext>
-                </a:extLst>
-              </a:tr>
-              <a:tr h="237744">
-                <a:tc>
-                  <a:txBody>
-                    <a:bodyPr/>
-                    <a:lstStyle/>
-                    <a:p>
-                      <a:pPr algn="l"/>
-                      <a:r>
-                        <a:rPr lang="en-US" sz="800" b="1" noProof="1">
-                          <a:solidFill>
-                            <a:srgbClr val="0A0A0A"/>
-                          </a:solidFill>
-                          <a:latin typeface="微软雅黑" panose="020B0503020204020204" pitchFamily="34" charset="-122"/>
-                          <a:ea typeface="微软雅黑" panose="020B0503020204020204" pitchFamily="34" charset="-122"/>
-                        </a:rPr>
-                        <a:t>房贷规则库</a:t>
-                      </a:r>
-                    </a:p>
-                  </a:txBody>
-                  <a:tcPr anchor="ctr">
-                    <a:lnL>
-                      <a:noFill/>
-                    </a:lnL>
-                    <a:lnR>
-                      <a:noFill/>
-                    </a:lnR>
-                    <a:lnT w="9525" cap="flat" cmpd="sng" algn="ctr">
-                      <a:solidFill>
-                        <a:srgbClr val="D6D6D6"/>
-                      </a:solidFill>
-                      <a:prstDash val="solid"/>
-                      <a:round/>
-                      <a:headEnd type="none" w="med" len="med"/>
-                      <a:tailEnd type="none" w="med" len="med"/>
-                    </a:lnT>
-                    <a:lnB w="9525">
-                      <a:solidFill>
-                        <a:srgbClr val="D6D6D6"/>
-                      </a:solidFill>
-                    </a:lnB>
-                    <a:noFill/>
-                  </a:tcPr>
-                </a:tc>
-                <a:tc>
-                  <a:txBody>
-                    <a:bodyPr/>
-                    <a:lstStyle/>
-                    <a:p>
-                      <a:pPr algn="l"/>
-                      <a:r>
-                        <a:rPr lang="en-US" sz="800" noProof="1">
-                          <a:solidFill>
-                            <a:srgbClr val="3D3C3A"/>
-                          </a:solidFill>
-                          <a:latin typeface="微软雅黑" panose="020B0503020204020204" pitchFamily="34" charset="-122"/>
-                          <a:ea typeface="微软雅黑" panose="020B0503020204020204" pitchFamily="34" charset="-122"/>
-                        </a:rPr>
-                        <a:t>MORTGAGE REPAYMENT</a:t>
-                      </a:r>
-                    </a:p>
-                  </a:txBody>
-                  <a:tcPr anchor="ctr">
-                    <a:lnL>
-                      <a:noFill/>
-                    </a:lnL>
-                    <a:lnR>
-                      <a:noFill/>
-                    </a:lnR>
-                    <a:lnT w="9525" cap="flat" cmpd="sng" algn="ctr">
-                      <a:solidFill>
-                        <a:srgbClr val="D6D6D6"/>
-                      </a:solidFill>
-                      <a:prstDash val="solid"/>
-                      <a:round/>
-                      <a:headEnd type="none" w="med" len="med"/>
-                      <a:tailEnd type="none" w="med" len="med"/>
-                    </a:lnT>
-                    <a:lnB w="9525">
-                      <a:solidFill>
-                        <a:srgbClr val="D6D6D6"/>
-                      </a:solidFill>
-                    </a:lnB>
-                    <a:noFill/>
-                  </a:tcPr>
-                </a:tc>
-                <a:tc>
-                  <a:txBody>
-                    <a:bodyPr/>
-                    <a:lstStyle/>
-                    <a:p>
-                      <a:pPr algn="l"/>
-                      <a:r>
-                        <a:rPr lang="en-US" sz="800" noProof="1">
-                          <a:solidFill>
-                            <a:srgbClr val="3D3C3A"/>
-                          </a:solidFill>
-                          <a:latin typeface="微软雅黑" panose="020B0503020204020204" pitchFamily="34" charset="-122"/>
-                          <a:ea typeface="微软雅黑" panose="020B0503020204020204" pitchFamily="34" charset="-122"/>
-                        </a:rPr>
-                        <a:t>Mortgage、Home Loan 关键词</a:t>
-                      </a:r>
-                    </a:p>
-                  </a:txBody>
-                  <a:tcPr anchor="ctr">
-                    <a:lnL>
-                      <a:noFill/>
-                    </a:lnL>
-                    <a:lnR>
-                      <a:noFill/>
-                    </a:lnR>
-                    <a:lnT w="9525" cap="flat" cmpd="sng" algn="ctr">
-                      <a:solidFill>
-                        <a:srgbClr val="D6D6D6"/>
-                      </a:solidFill>
-                      <a:prstDash val="solid"/>
-                      <a:round/>
-                      <a:headEnd type="none" w="med" len="med"/>
-                      <a:tailEnd type="none" w="med" len="med"/>
-                    </a:lnT>
-                    <a:lnB w="9525">
-                      <a:solidFill>
-                        <a:srgbClr val="D6D6D6"/>
-                      </a:solidFill>
-                    </a:lnB>
-                    <a:noFill/>
-                  </a:tcPr>
-                </a:tc>
-                <a:extLst>
-                  <a:ext uri="{0D108BD9-81ED-4DB2-BD59-A6C34878D82A}">
-                    <a16:rowId xmlns:a16="http://schemas.microsoft.com/office/drawing/2014/main" val="10003"/>
-                  </a:ext>
-                </a:extLst>
-              </a:tr>
-              <a:tr h="237744">
-                <a:tc>
-                  <a:txBody>
-                    <a:bodyPr/>
-                    <a:lstStyle/>
-                    <a:p>
-                      <a:pPr algn="l"/>
-                      <a:r>
-                        <a:rPr lang="en-US" sz="800" b="1" noProof="1">
-                          <a:solidFill>
-                            <a:srgbClr val="0A0A0A"/>
-                          </a:solidFill>
-                          <a:latin typeface="微软雅黑" panose="020B0503020204020204" pitchFamily="34" charset="-122"/>
-                          <a:ea typeface="微软雅黑" panose="020B0503020204020204" pitchFamily="34" charset="-122"/>
-                        </a:rPr>
-                        <a:t>车贷规则库</a:t>
-                      </a:r>
-                    </a:p>
-                  </a:txBody>
-                  <a:tcPr anchor="ctr">
-                    <a:lnL>
-                      <a:noFill/>
-                    </a:lnL>
-                    <a:lnR>
-                      <a:noFill/>
-                    </a:lnR>
-                    <a:lnT w="9525" cap="flat" cmpd="sng" algn="ctr">
-                      <a:solidFill>
-                        <a:srgbClr val="D6D6D6"/>
-                      </a:solidFill>
-                      <a:prstDash val="solid"/>
-                      <a:round/>
-                      <a:headEnd type="none" w="med" len="med"/>
-                      <a:tailEnd type="none" w="med" len="med"/>
-                    </a:lnT>
-                    <a:lnB w="9525">
-                      <a:solidFill>
-                        <a:srgbClr val="D6D6D6"/>
-                      </a:solidFill>
-                    </a:lnB>
-                    <a:noFill/>
-                  </a:tcPr>
-                </a:tc>
-                <a:tc>
-                  <a:txBody>
-                    <a:bodyPr/>
-                    <a:lstStyle/>
-                    <a:p>
-                      <a:pPr algn="l"/>
-                      <a:r>
-                        <a:rPr lang="en-US" sz="800" noProof="1">
-                          <a:solidFill>
-                            <a:srgbClr val="3D3C3A"/>
-                          </a:solidFill>
-                          <a:latin typeface="微软雅黑" panose="020B0503020204020204" pitchFamily="34" charset="-122"/>
-                          <a:ea typeface="微软雅黑" panose="020B0503020204020204" pitchFamily="34" charset="-122"/>
-                        </a:rPr>
-                        <a:t>车贷机构或专用描述扣款</a:t>
-                      </a:r>
-                    </a:p>
-                  </a:txBody>
-                  <a:tcPr anchor="ctr">
-                    <a:lnL>
-                      <a:noFill/>
-                    </a:lnL>
-                    <a:lnR>
-                      <a:noFill/>
-                    </a:lnR>
-                    <a:lnT w="9525" cap="flat" cmpd="sng" algn="ctr">
-                      <a:solidFill>
-                        <a:srgbClr val="D6D6D6"/>
-                      </a:solidFill>
-                      <a:prstDash val="solid"/>
-                      <a:round/>
-                      <a:headEnd type="none" w="med" len="med"/>
-                      <a:tailEnd type="none" w="med" len="med"/>
-                    </a:lnT>
-                    <a:lnB w="9525">
-                      <a:solidFill>
-                        <a:srgbClr val="D6D6D6"/>
-                      </a:solidFill>
-                    </a:lnB>
-                    <a:noFill/>
-                  </a:tcPr>
-                </a:tc>
-                <a:tc>
-                  <a:txBody>
-                    <a:bodyPr/>
-                    <a:lstStyle/>
-                    <a:p>
-                      <a:pPr algn="l"/>
-                      <a:r>
-                        <a:rPr lang="en-US" sz="800" noProof="1">
-                          <a:solidFill>
-                            <a:srgbClr val="3D3C3A"/>
-                          </a:solidFill>
-                          <a:latin typeface="微软雅黑" panose="020B0503020204020204" pitchFamily="34" charset="-122"/>
-                          <a:ea typeface="微软雅黑" panose="020B0503020204020204" pitchFamily="34" charset="-122"/>
-                        </a:rPr>
-                        <a:t>车贷标记＋交易对手规则</a:t>
-                      </a:r>
-                    </a:p>
-                  </a:txBody>
-                  <a:tcPr anchor="ctr">
-                    <a:lnL>
-                      <a:noFill/>
-                    </a:lnL>
-                    <a:lnR>
-                      <a:noFill/>
-                    </a:lnR>
-                    <a:lnT w="9525" cap="flat" cmpd="sng" algn="ctr">
-                      <a:solidFill>
-                        <a:srgbClr val="D6D6D6"/>
-                      </a:solidFill>
-                      <a:prstDash val="solid"/>
-                      <a:round/>
-                      <a:headEnd type="none" w="med" len="med"/>
-                      <a:tailEnd type="none" w="med" len="med"/>
-                    </a:lnT>
-                    <a:lnB w="9525">
-                      <a:solidFill>
-                        <a:srgbClr val="D6D6D6"/>
-                      </a:solidFill>
-                    </a:lnB>
-                    <a:noFill/>
-                  </a:tcPr>
-                </a:tc>
-                <a:extLst>
-                  <a:ext uri="{0D108BD9-81ED-4DB2-BD59-A6C34878D82A}">
-                    <a16:rowId xmlns:a16="http://schemas.microsoft.com/office/drawing/2014/main" val="10004"/>
-                  </a:ext>
-                </a:extLst>
-              </a:tr>
-              <a:tr h="237744">
-                <a:tc>
-                  <a:txBody>
-                    <a:bodyPr/>
-                    <a:lstStyle/>
-                    <a:p>
-                      <a:pPr algn="l"/>
-                      <a:r>
-                        <a:rPr lang="en-US" sz="800" b="1" noProof="1">
-                          <a:solidFill>
-                            <a:srgbClr val="0A0A0A"/>
-                          </a:solidFill>
-                          <a:latin typeface="微软雅黑" panose="020B0503020204020204" pitchFamily="34" charset="-122"/>
-                          <a:ea typeface="微软雅黑" panose="020B0503020204020204" pitchFamily="34" charset="-122"/>
-                        </a:rPr>
-                        <a:t>催收／债务整合</a:t>
-                      </a:r>
-                    </a:p>
-                  </a:txBody>
-                  <a:tcPr anchor="ctr">
-                    <a:lnL>
-                      <a:noFill/>
-                    </a:lnL>
-                    <a:lnR>
-                      <a:noFill/>
-                    </a:lnR>
-                    <a:lnT w="9525" cap="flat" cmpd="sng" algn="ctr">
-                      <a:solidFill>
-                        <a:srgbClr val="D6D6D6"/>
-                      </a:solidFill>
-                      <a:prstDash val="solid"/>
-                      <a:round/>
-                      <a:headEnd type="none" w="med" len="med"/>
-                      <a:tailEnd type="none" w="med" len="med"/>
-                    </a:lnT>
-                    <a:lnB w="9525">
-                      <a:solidFill>
-                        <a:srgbClr val="D6D6D6"/>
-                      </a:solidFill>
-                    </a:lnB>
-                    <a:noFill/>
-                  </a:tcPr>
-                </a:tc>
-                <a:tc>
-                  <a:txBody>
-                    <a:bodyPr/>
-                    <a:lstStyle/>
-                    <a:p>
-                      <a:pPr algn="l"/>
-                      <a:r>
-                        <a:rPr lang="en-US" sz="800" noProof="1">
-                          <a:solidFill>
-                            <a:srgbClr val="3D3C3A"/>
-                          </a:solidFill>
-                          <a:latin typeface="微软雅黑" panose="020B0503020204020204" pitchFamily="34" charset="-122"/>
-                          <a:ea typeface="微软雅黑" panose="020B0503020204020204" pitchFamily="34" charset="-122"/>
-                        </a:rPr>
-                        <a:t>已知催收机构或整合描述</a:t>
-                      </a:r>
-                    </a:p>
-                  </a:txBody>
-                  <a:tcPr anchor="ctr">
-                    <a:lnL>
-                      <a:noFill/>
-                    </a:lnL>
-                    <a:lnR>
-                      <a:noFill/>
-                    </a:lnR>
-                    <a:lnT w="9525" cap="flat" cmpd="sng" algn="ctr">
-                      <a:solidFill>
-                        <a:srgbClr val="D6D6D6"/>
-                      </a:solidFill>
-                      <a:prstDash val="solid"/>
-                      <a:round/>
-                      <a:headEnd type="none" w="med" len="med"/>
-                      <a:tailEnd type="none" w="med" len="med"/>
-                    </a:lnT>
-                    <a:lnB w="9525">
-                      <a:solidFill>
-                        <a:srgbClr val="D6D6D6"/>
-                      </a:solidFill>
-                    </a:lnB>
-                    <a:noFill/>
-                  </a:tcPr>
-                </a:tc>
-                <a:tc>
-                  <a:txBody>
-                    <a:bodyPr/>
-                    <a:lstStyle/>
-                    <a:p>
-                      <a:pPr algn="l"/>
-                      <a:r>
-                        <a:rPr lang="en-US" sz="800" noProof="1">
-                          <a:solidFill>
-                            <a:srgbClr val="3D3C3A"/>
-                          </a:solidFill>
-                          <a:latin typeface="微软雅黑" panose="020B0503020204020204" pitchFamily="34" charset="-122"/>
-                          <a:ea typeface="微软雅黑" panose="020B0503020204020204" pitchFamily="34" charset="-122"/>
-                        </a:rPr>
-                        <a:t>催收、整合关键词与专项标记</a:t>
-                      </a:r>
-                    </a:p>
-                  </a:txBody>
-                  <a:tcPr anchor="ctr">
-                    <a:lnL>
-                      <a:noFill/>
-                    </a:lnL>
-                    <a:lnR>
-                      <a:noFill/>
-                    </a:lnR>
-                    <a:lnT w="9525" cap="flat" cmpd="sng" algn="ctr">
-                      <a:solidFill>
-                        <a:srgbClr val="D6D6D6"/>
-                      </a:solidFill>
-                      <a:prstDash val="solid"/>
-                      <a:round/>
-                      <a:headEnd type="none" w="med" len="med"/>
-                      <a:tailEnd type="none" w="med" len="med"/>
-                    </a:lnT>
-                    <a:lnB w="9525">
-                      <a:solidFill>
-                        <a:srgbClr val="D6D6D6"/>
-                      </a:solidFill>
-                    </a:lnB>
-                    <a:noFill/>
-                  </a:tcPr>
-                </a:tc>
-                <a:extLst>
-                  <a:ext uri="{0D108BD9-81ED-4DB2-BD59-A6C34878D82A}">
-                    <a16:rowId xmlns:a16="http://schemas.microsoft.com/office/drawing/2014/main" val="10005"/>
-                  </a:ext>
-                </a:extLst>
-              </a:tr>
-            </a:tbl>
-          </a:graphicData>
-        </a:graphic>
-      </p:graphicFrame>
-      <p:sp>
-        <p:nvSpPr>
-          <p:cNvPr id="23" name="income-capsule">
-            <a:extLst>
-              <a:ext uri="{FF2B5EF4-FFF2-40B4-BE49-F238E27FC236}">
-                <a16:creationId xmlns:a16="http://schemas.microsoft.com/office/drawing/2014/main" id="{CFEC0F35-840B-44A5-BDAF-0D56EDB6D11F}"/>
-              </a:ext>
-            </a:extLst>
-          </p:cNvPr>
-          <p:cNvSpPr/>
-          <p:nvPr/>
-        </p:nvSpPr>
-        <p:spPr>
-          <a:xfrm>
-            <a:off x="541547" y="2003724"/>
-            <a:ext cx="1295400" cy="228600"/>
-          </a:xfrm>
-          <a:prstGeom prst="roundRect">
-            <a:avLst>
-              <a:gd name="adj" fmla="val 50000"/>
-            </a:avLst>
-          </a:prstGeom>
-          <a:solidFill>
-            <a:srgbClr val="D6A000"/>
-          </a:solidFill>
-          <a:ln>
-            <a:noFill/>
-          </a:ln>
-        </p:spPr>
-        <p:txBody>
-          <a:bodyPr/>
-          <a:lstStyle/>
-          <a:p>
-            <a:endParaRPr/>
-          </a:p>
-        </p:txBody>
-      </p:sp>
-      <p:sp>
-        <p:nvSpPr>
-          <p:cNvPr id="24" name="income-capsule-text">
-            <a:extLst>
-              <a:ext uri="{FF2B5EF4-FFF2-40B4-BE49-F238E27FC236}">
-                <a16:creationId xmlns:a16="http://schemas.microsoft.com/office/drawing/2014/main" id="{455365E2-0360-47A7-B894-12DC05DCC697}"/>
-              </a:ext>
-            </a:extLst>
-          </p:cNvPr>
-          <p:cNvSpPr txBox="1"/>
-          <p:nvPr/>
-        </p:nvSpPr>
-        <p:spPr>
-          <a:xfrm>
-            <a:off x="541547" y="2003724"/>
-            <a:ext cx="1295400" cy="228600"/>
-          </a:xfrm>
-          <a:prstGeom prst="rect">
-            <a:avLst/>
-          </a:prstGeom>
-          <a:noFill/>
-          <a:ln>
-            <a:noFill/>
-          </a:ln>
-        </p:spPr>
-        <p:txBody>
-          <a:bodyPr wrap="none" lIns="0" tIns="0" rIns="0" bIns="0" rtlCol="0" anchor="ctr"/>
-          <a:lstStyle/>
-          <a:p>
-            <a:pPr algn="ctr">
-              <a:lnSpc>
-                <a:spcPct val="120000"/>
-              </a:lnSpc>
-            </a:pPr>
-            <a:r>
-              <a:rPr lang="zh-CN" altLang="en-US" sz="1050" b="1" noProof="1">
-                <a:solidFill>
-                  <a:srgbClr val="FFFFFF"/>
-                </a:solidFill>
-                <a:latin typeface="微软雅黑" panose="020B0503020204020204" pitchFamily="34" charset="-122"/>
-                <a:ea typeface="微软雅黑" panose="020B0503020204020204" pitchFamily="34" charset="-122"/>
-              </a:rPr>
-              <a:t>澳洲企业库</a:t>
-            </a:r>
-            <a:endParaRPr lang="en-US" sz="1050" noProof="1">
-              <a:latin typeface="微软雅黑" panose="020B0503020204020204" pitchFamily="34" charset="-122"/>
-              <a:ea typeface="微软雅黑" panose="020B0503020204020204" pitchFamily="34" charset="-122"/>
-            </a:endParaRPr>
-          </a:p>
-        </p:txBody>
-      </p:sp>
-      <p:sp>
-        <p:nvSpPr>
-          <p:cNvPr id="27" name="Rectangle 3">
-            <a:extLst>
-              <a:ext uri="{FF2B5EF4-FFF2-40B4-BE49-F238E27FC236}">
-                <a16:creationId xmlns:a16="http://schemas.microsoft.com/office/drawing/2014/main" id="{BAB8C997-F392-44D6-BD9C-9CC639AE4236}"/>
-              </a:ext>
-            </a:extLst>
-          </p:cNvPr>
-          <p:cNvSpPr>
-            <a:spLocks noChangeArrowheads="1"/>
-          </p:cNvSpPr>
-          <p:nvPr/>
-        </p:nvSpPr>
-        <p:spPr bwMode="auto">
-          <a:xfrm>
-            <a:off x="557541" y="1241953"/>
-            <a:ext cx="10898112" cy="276999"/>
-          </a:xfrm>
-          <a:prstGeom prst="rect">
-            <a:avLst/>
-          </a:prstGeom>
-          <a:noFill/>
-          <a:ln>
-            <a:noFill/>
-          </a:ln>
-          <a:effectLst/>
-          <a:extLst>
-            <a:ext uri="{909E8E84-426E-40DD-AFC4-6F175D3DCCD1}">
-              <a14:hiddenFill xmlns:a14="http://schemas.microsoft.com/office/drawing/2010/main">
-                <a:solidFill>
-                  <a:schemeClr val="accent1"/>
-                </a:solidFill>
-              </a14:hiddenFill>
-            </a:ext>
-            <a:ext uri="{91240B29-F687-4F45-9708-019B960494DF}">
-              <a14:hiddenLine xmlns:a14="http://schemas.microsoft.com/office/drawing/2010/main" w="9525">
-                <a:solidFill>
-                  <a:schemeClr val="tx1"/>
-                </a:solidFill>
-                <a:miter lim="800000"/>
-                <a:headEnd/>
-                <a:tailEnd/>
-              </a14:hiddenLine>
-            </a:ext>
-            <a:ext uri="{AF507438-7753-43E0-B8FC-AC1667EBCBE1}">
-              <a14:hiddenEffects xmlns:a14="http://schemas.microsoft.com/office/drawing/2010/main">
-                <a:effectLst>
-                  <a:outerShdw dist="35921" dir="2700000" algn="ctr" rotWithShape="0">
-                    <a:schemeClr val="bg2"/>
-                  </a:outerShdw>
-                </a:effectLst>
-              </a14:hiddenEffects>
-            </a:ext>
-          </a:extLst>
-        </p:spPr>
-        <p:txBody>
-          <a:bodyPr vert="horz" wrap="none" lIns="91440" tIns="45720" rIns="91440" bIns="45720" numCol="1" anchor="ctr" anchorCtr="0" compatLnSpc="1">
-            <a:prstTxWarp prst="textNoShape">
-              <a:avLst/>
-            </a:prstTxWarp>
-            <a:spAutoFit/>
-          </a:bodyPr>
-          <a:lstStyle/>
-          <a:p>
-            <a:pPr marL="0" marR="0" lvl="0" indent="0" algn="l" defTabSz="914400" rtl="0" eaLnBrk="0" fontAlgn="base" latinLnBrk="0" hangingPunct="0">
-              <a:lnSpc>
-                <a:spcPct val="100000"/>
-              </a:lnSpc>
-              <a:spcBef>
-                <a:spcPct val="0"/>
-              </a:spcBef>
-              <a:spcAft>
-                <a:spcPct val="0"/>
-              </a:spcAft>
-              <a:buClrTx/>
-              <a:buSzTx/>
-              <a:buFontTx/>
-              <a:buNone/>
-              <a:tabLst/>
-            </a:pPr>
-            <a:r>
-              <a:rPr lang="zh-CN" altLang="zh-CN" sz="1200" b="1" dirty="0">
-                <a:latin typeface="微软雅黑" panose="020B0503020204020204" pitchFamily="34" charset="-122"/>
-                <a:ea typeface="微软雅黑" panose="020B0503020204020204" pitchFamily="34" charset="-122"/>
-              </a:rPr>
-              <a:t>引擎流程：</a:t>
-            </a:r>
-            <a:r>
-              <a:rPr lang="en-US" altLang="zh-CN" sz="1200" b="1" dirty="0">
-                <a:latin typeface="微软雅黑" panose="020B0503020204020204" pitchFamily="34" charset="-122"/>
-                <a:ea typeface="微软雅黑" panose="020B0503020204020204" pitchFamily="34" charset="-122"/>
-              </a:rPr>
-              <a:t>Init → Income → Liability → Other Engines (</a:t>
-            </a:r>
-            <a:r>
-              <a:rPr lang="en-US" altLang="zh-CN" sz="1200" b="1" dirty="0" err="1">
-                <a:latin typeface="微软雅黑" panose="020B0503020204020204" pitchFamily="34" charset="-122"/>
-                <a:ea typeface="微软雅黑" panose="020B0503020204020204" pitchFamily="34" charset="-122"/>
-              </a:rPr>
-              <a:t>Transfers,Gambling</a:t>
-            </a:r>
-            <a:r>
-              <a:rPr lang="en-US" altLang="zh-CN" sz="1200" b="1" dirty="0">
-                <a:latin typeface="微软雅黑" panose="020B0503020204020204" pitchFamily="34" charset="-122"/>
-                <a:ea typeface="微软雅黑" panose="020B0503020204020204" pitchFamily="34" charset="-122"/>
-              </a:rPr>
-              <a:t>, and Rent) → Quality Review &amp; Optimization</a:t>
-            </a:r>
-            <a:r>
-              <a:rPr lang="zh-CN" altLang="zh-CN" sz="1200" b="1" dirty="0">
-                <a:latin typeface="微软雅黑" panose="020B0503020204020204" pitchFamily="34" charset="-122"/>
-                <a:ea typeface="微软雅黑" panose="020B0503020204020204" pitchFamily="34" charset="-122"/>
-              </a:rPr>
-              <a:t>→ 质量评估</a:t>
-            </a:r>
-            <a:r>
-              <a:rPr kumimoji="0" lang="zh-CN" altLang="zh-CN" sz="1200" b="1" i="0" u="none" strike="noStrike" cap="none" normalizeH="0" baseline="0" dirty="0">
-                <a:ln>
-                  <a:noFill/>
-                </a:ln>
-                <a:solidFill>
-                  <a:schemeClr val="tx1"/>
-                </a:solidFill>
-                <a:effectLst/>
-                <a:latin typeface="微软雅黑" panose="020B0503020204020204" pitchFamily="34" charset="-122"/>
-                <a:ea typeface="微软雅黑" panose="020B0503020204020204" pitchFamily="34" charset="-122"/>
-              </a:rPr>
-              <a:t>与优化闭环</a:t>
-            </a:r>
-          </a:p>
-        </p:txBody>
-      </p:sp>
-      <p:sp>
-        <p:nvSpPr>
-          <p:cNvPr id="4" name="文本框 3">
-            <a:extLst>
-              <a:ext uri="{FF2B5EF4-FFF2-40B4-BE49-F238E27FC236}">
-                <a16:creationId xmlns:a16="http://schemas.microsoft.com/office/drawing/2014/main" id="{3E2A69DA-792E-4EF6-BBB2-2066D247A0B4}"/>
-              </a:ext>
-            </a:extLst>
-          </p:cNvPr>
-          <p:cNvSpPr txBox="1"/>
-          <p:nvPr/>
-        </p:nvSpPr>
-        <p:spPr>
-          <a:xfrm>
-            <a:off x="6311257" y="1975104"/>
-            <a:ext cx="5540237" cy="1792224"/>
-          </a:xfrm>
-          <a:prstGeom prst="rect">
-            <a:avLst/>
-          </a:prstGeom>
-          <a:noFill/>
-        </p:spPr>
-        <p:txBody>
-          <a:bodyPr wrap="square" rtlCol="0" anchor="t">
-            <a:spAutoFit/>
-          </a:bodyPr>
-          <a:lstStyle/>
-          <a:p>
-            <a:pPr algn="l">
-              <a:lnSpc>
-                <a:spcPct val="100000"/>
-              </a:lnSpc>
-              <a:spcBef>
-                <a:spcPts val="0"/>
-              </a:spcBef>
-              <a:spcAft>
-                <a:spcPts val="100"/>
-              </a:spcAft>
-            </a:pPr>
-            <a:r>
-              <a:rPr sz="1000" b="1">
-                <a:solidFill>
-                  <a:srgbClr val="1F4E79"/>
-                </a:solidFill>
-                <a:latin typeface="微软雅黑"/>
-              </a:rPr>
-              <a:t>① 监控</a:t>
-            </a:r>
-          </a:p>
-          <a:p>
-            <a:pPr algn="l">
-              <a:lnSpc>
-                <a:spcPct val="100000"/>
-              </a:lnSpc>
-              <a:spcBef>
-                <a:spcPts val="0"/>
-              </a:spcBef>
-              <a:spcAft>
-                <a:spcPts val="300"/>
-              </a:spcAft>
-            </a:pPr>
-            <a:r>
-              <a:rPr sz="850" b="0">
-                <a:solidFill>
-                  <a:srgbClr val="3D3C3A"/>
-                </a:solidFill>
-                <a:latin typeface="微软雅黑"/>
-              </a:rPr>
-              <a:t>捕捉分类批量漂移、同一交易对手归类不一致、覆盖率或命中率明显下降、新描述未被任何引擎识别等异常信号。</a:t>
-            </a:r>
-          </a:p>
-          <a:p>
-            <a:pPr algn="l">
-              <a:lnSpc>
-                <a:spcPct val="100000"/>
-              </a:lnSpc>
-              <a:spcBef>
-                <a:spcPts val="0"/>
-              </a:spcBef>
-              <a:spcAft>
-                <a:spcPts val="100"/>
-              </a:spcAft>
-            </a:pPr>
-            <a:r>
-              <a:rPr sz="1000" b="1">
-                <a:solidFill>
-                  <a:srgbClr val="1F4E79"/>
-                </a:solidFill>
-                <a:latin typeface="微软雅黑"/>
-              </a:rPr>
-              <a:t>② 定位</a:t>
-            </a:r>
-          </a:p>
-          <a:p>
-            <a:pPr algn="l">
-              <a:lnSpc>
-                <a:spcPct val="100000"/>
-              </a:lnSpc>
-              <a:spcBef>
-                <a:spcPts val="0"/>
-              </a:spcBef>
-              <a:spcAft>
-                <a:spcPts val="300"/>
-              </a:spcAft>
-            </a:pPr>
-            <a:r>
-              <a:rPr sz="850" b="0">
-                <a:solidFill>
-                  <a:srgbClr val="3D3C3A"/>
-                </a:solidFill>
-                <a:latin typeface="微软雅黑"/>
-              </a:rPr>
-              <a:t>对异常逐笔细挖交易描述、金额、方向、交易对手、命中引擎和分类依据，归类为五类原因。</a:t>
-            </a:r>
-          </a:p>
-          <a:p>
-            <a:pPr algn="l">
-              <a:lnSpc>
-                <a:spcPct val="100000"/>
-              </a:lnSpc>
-              <a:spcBef>
-                <a:spcPts val="0"/>
-              </a:spcBef>
-              <a:spcAft>
-                <a:spcPts val="100"/>
-              </a:spcAft>
-            </a:pPr>
-            <a:r>
-              <a:rPr sz="1000" b="1">
-                <a:solidFill>
-                  <a:srgbClr val="1F4E79"/>
-                </a:solidFill>
-                <a:latin typeface="微软雅黑"/>
-              </a:rPr>
-              <a:t>③ 输出</a:t>
-            </a:r>
-          </a:p>
-          <a:p>
-            <a:pPr algn="l">
-              <a:lnSpc>
-                <a:spcPct val="100000"/>
-              </a:lnSpc>
-              <a:spcBef>
-                <a:spcPts val="0"/>
-              </a:spcBef>
-              <a:spcAft>
-                <a:spcPts val="300"/>
-              </a:spcAft>
-            </a:pPr>
-            <a:r>
-              <a:rPr sz="850" b="0">
-                <a:solidFill>
-                  <a:srgbClr val="3D3C3A"/>
-                </a:solidFill>
-                <a:latin typeface="微软雅黑"/>
-              </a:rPr>
-              <a:t>生成按优先级排序的诊断报告，直接标明问题引擎、需检查的规则、缺失的商户／关键词及应补充的知识库，供业务确认。</a:t>
-            </a:r>
-          </a:p>
-        </p:txBody>
-      </p:sp>
-      <p:sp>
-        <p:nvSpPr>
-          <p:cNvPr id="25" name="s1-bar">
-            <a:extLst>
-              <a:ext uri="{FF2B5EF4-FFF2-40B4-BE49-F238E27FC236}">
-                <a16:creationId xmlns:a16="http://schemas.microsoft.com/office/drawing/2014/main" id="{A8EBEEE2-E859-4ED2-B0ED-270FD3E8E714}"/>
-              </a:ext>
-            </a:extLst>
-          </p:cNvPr>
-          <p:cNvSpPr/>
-          <p:nvPr/>
-        </p:nvSpPr>
-        <p:spPr>
-          <a:xfrm>
-            <a:off x="6285857" y="1737516"/>
-            <a:ext cx="50800" cy="165100"/>
-          </a:xfrm>
-          <a:prstGeom prst="rect">
-            <a:avLst/>
-          </a:prstGeom>
-          <a:solidFill>
-            <a:srgbClr val="D6A000"/>
-          </a:solidFill>
-          <a:ln>
-            <a:noFill/>
-          </a:ln>
-        </p:spPr>
-      </p:sp>
-      <p:sp>
-        <p:nvSpPr>
-          <p:cNvPr id="26" name="s1-title">
-            <a:extLst>
-              <a:ext uri="{FF2B5EF4-FFF2-40B4-BE49-F238E27FC236}">
-                <a16:creationId xmlns:a16="http://schemas.microsoft.com/office/drawing/2014/main" id="{04C828B8-086B-404C-8643-9D85D8368225}"/>
-              </a:ext>
-            </a:extLst>
-          </p:cNvPr>
-          <p:cNvSpPr txBox="1"/>
-          <p:nvPr/>
-        </p:nvSpPr>
-        <p:spPr>
-          <a:xfrm>
-            <a:off x="6438257" y="1699416"/>
-            <a:ext cx="4064000" cy="228600"/>
-          </a:xfrm>
-          <a:prstGeom prst="rect">
-            <a:avLst/>
-          </a:prstGeom>
-          <a:noFill/>
-          <a:ln>
-            <a:noFill/>
-          </a:ln>
-        </p:spPr>
-        <p:txBody>
-          <a:bodyPr wrap="none" lIns="0" tIns="0" rIns="0" bIns="0" rtlCol="0" anchor="ctr"/>
-          <a:lstStyle/>
-          <a:p>
-            <a:pPr algn="l">
-              <a:lnSpc>
-                <a:spcPct val="125000"/>
-              </a:lnSpc>
-            </a:pPr>
-            <a:r>
-              <a:rPr sz="1400" b="1">
-                <a:solidFill>
-                  <a:srgbClr val="0A0A0A"/>
-                </a:solidFill>
-                <a:latin typeface="微软雅黑"/>
-                <a:ea typeface="微软雅黑"/>
-              </a:rPr>
-              <a:t>2. AI 质检 Agent：监控分类波动并输出诊断报告</a:t>
-            </a:r>
-            <a:endParaRPr lang="en-US" sz="1400" noProof="1">
-              <a:latin typeface="微软雅黑" panose="020B0503020204020204" pitchFamily="34" charset="-122"/>
-              <a:ea typeface="微软雅黑" panose="020B0503020204020204" pitchFamily="34" charset="-122"/>
-            </a:endParaRPr>
-          </a:p>
-        </p:txBody>
-      </p:sp>
-      <p:graphicFrame>
-        <p:nvGraphicFramePr>
-          <p:cNvPr id="29" name="Table 28"/>
-          <p:cNvGraphicFramePr>
-            <a:graphicFrameLocks noGrp="1"/>
-          </p:cNvGraphicFramePr>
-          <p:nvPr>
-            <p:extLst>
-              <p:ext uri="{D42A27DB-BD31-4B8C-83A1-F6EECF244321}">
-                <p14:modId xmlns:p14="http://schemas.microsoft.com/office/powerpoint/2010/main" val="1945025288"/>
-              </p:ext>
-            </p:extLst>
-          </p:nvPr>
-        </p:nvGraphicFramePr>
-        <p:xfrm>
-          <a:off x="6311255" y="4049611"/>
-          <a:ext cx="5540236" cy="1042416"/>
-        </p:xfrm>
-        <a:graphic>
-          <a:graphicData uri="http://schemas.openxmlformats.org/drawingml/2006/table">
-            <a:tbl>
-              <a:tblPr/>
-              <a:tblGrid>
-                <a:gridCol w="923372">
-                  <a:extLst>
-                    <a:ext uri="{9D8B030D-6E8A-4147-A177-3AD203B41FA5}">
-                      <a16:colId xmlns:a16="http://schemas.microsoft.com/office/drawing/2014/main" val="20000"/>
-                    </a:ext>
-                  </a:extLst>
-                </a:gridCol>
-                <a:gridCol w="4616864">
-                  <a:extLst>
-                    <a:ext uri="{9D8B030D-6E8A-4147-A177-3AD203B41FA5}">
-                      <a16:colId xmlns:a16="http://schemas.microsoft.com/office/drawing/2014/main" val="20001"/>
-                    </a:ext>
-                  </a:extLst>
-                </a:gridCol>
-              </a:tblGrid>
-              <a:tr h="173736">
-                <a:tc>
-                  <a:txBody>
-                    <a:bodyPr/>
-                    <a:lstStyle/>
-                    <a:p>
-                      <a:pPr algn="l"/>
-                      <a:r>
-                        <a:rPr sz="800" b="1">
-                          <a:solidFill>
-                            <a:srgbClr val="0A0A0A"/>
-                          </a:solidFill>
-                          <a:latin typeface="微软雅黑"/>
-                          <a:ea typeface="微软雅黑"/>
-                        </a:rPr>
-                        <a:t>定位原因</a:t>
-                      </a:r>
-                    </a:p>
-                  </a:txBody>
-                  <a:tcPr marL="27432" marR="27432" marT="9144" marB="9144">
-                    <a:lnL>
-                      <a:noFill/>
-                    </a:lnL>
-                    <a:lnR>
-                      <a:noFill/>
-                    </a:lnR>
-                    <a:lnT>
-                      <a:noFill/>
-                    </a:lnT>
-                    <a:lnB w="19050" cap="flat">
-                      <a:solidFill>
-                        <a:srgbClr val="0A0A0A"/>
-                      </a:solidFill>
-                    </a:lnB>
-                  </a:tcPr>
-                </a:tc>
-                <a:tc>
-                  <a:txBody>
-                    <a:bodyPr/>
-                    <a:lstStyle/>
-                    <a:p>
-                      <a:pPr algn="l"/>
-                      <a:r>
-                        <a:rPr sz="800" b="1">
-                          <a:solidFill>
-                            <a:srgbClr val="0A0A0A"/>
-                          </a:solidFill>
-                          <a:latin typeface="微软雅黑"/>
-                          <a:ea typeface="微软雅黑"/>
-                        </a:rPr>
-                        <a:t>示例场景</a:t>
-                      </a:r>
-                    </a:p>
-                  </a:txBody>
-                  <a:tcPr marL="27432" marR="27432" marT="9144" marB="9144">
-                    <a:lnL>
-                      <a:noFill/>
-                    </a:lnL>
-                    <a:lnR>
-                      <a:noFill/>
-                    </a:lnR>
-                    <a:lnT>
-                      <a:noFill/>
-                    </a:lnT>
-                    <a:lnB w="19050" cap="flat">
-                      <a:solidFill>
-                        <a:srgbClr val="0A0A0A"/>
-                      </a:solidFill>
-                    </a:lnB>
-                  </a:tcPr>
-                </a:tc>
-                <a:extLst>
-                  <a:ext uri="{0D108BD9-81ED-4DB2-BD59-A6C34878D82A}">
-                    <a16:rowId xmlns:a16="http://schemas.microsoft.com/office/drawing/2014/main" val="10000"/>
-                  </a:ext>
-                </a:extLst>
-              </a:tr>
-              <a:tr h="173736">
-                <a:tc>
-                  <a:txBody>
-                    <a:bodyPr/>
-                    <a:lstStyle/>
-                    <a:p>
-                      <a:pPr algn="l"/>
-                      <a:r>
-                        <a:rPr sz="800" b="1">
-                          <a:solidFill>
-                            <a:srgbClr val="3D3C3A"/>
-                          </a:solidFill>
-                          <a:latin typeface="微软雅黑"/>
-                          <a:ea typeface="微软雅黑"/>
-                        </a:rPr>
-                        <a:t>引擎规则问题</a:t>
-                      </a:r>
-                    </a:p>
-                  </a:txBody>
-                  <a:tcPr marL="27432" marR="27432" marT="9144" marB="9144">
-                    <a:lnL>
-                      <a:noFill/>
-                    </a:lnL>
-                    <a:lnR>
-                      <a:noFill/>
-                    </a:lnR>
-                    <a:lnT w="19050" cap="flat">
-                      <a:solidFill>
-                        <a:srgbClr val="0A0A0A"/>
-                      </a:solidFill>
-                    </a:lnT>
-                    <a:lnB w="9525" cap="flat">
-                      <a:solidFill>
-                        <a:srgbClr val="D6D6D6"/>
-                      </a:solidFill>
-                    </a:lnB>
-                  </a:tcPr>
-                </a:tc>
-                <a:tc>
-                  <a:txBody>
-                    <a:bodyPr/>
-                    <a:lstStyle/>
-                    <a:p>
-                      <a:pPr algn="l"/>
-                      <a:r>
-                        <a:rPr sz="800" b="0">
-                          <a:solidFill>
-                            <a:srgbClr val="3D3C3A"/>
-                          </a:solidFill>
-                          <a:latin typeface="微软雅黑"/>
-                          <a:ea typeface="微软雅黑"/>
-                        </a:rPr>
-                        <a:t>排除规则过宽，房租、保险、水电被误归为内部转账，导致租金支出在支出计算中漏算</a:t>
-                      </a:r>
-                    </a:p>
-                  </a:txBody>
-                  <a:tcPr marL="27432" marR="27432" marT="9144" marB="9144">
-                    <a:lnL>
-                      <a:noFill/>
-                    </a:lnL>
-                    <a:lnR>
-                      <a:noFill/>
-                    </a:lnR>
-                    <a:lnT w="19050" cap="flat">
-                      <a:solidFill>
-                        <a:srgbClr val="0A0A0A"/>
-                      </a:solidFill>
-                    </a:lnT>
-                    <a:lnB w="9525" cap="flat">
-                      <a:solidFill>
-                        <a:srgbClr val="D6D6D6"/>
-                      </a:solidFill>
-                    </a:lnB>
-                  </a:tcPr>
-                </a:tc>
-                <a:extLst>
-                  <a:ext uri="{0D108BD9-81ED-4DB2-BD59-A6C34878D82A}">
-                    <a16:rowId xmlns:a16="http://schemas.microsoft.com/office/drawing/2014/main" val="10001"/>
-                  </a:ext>
-                </a:extLst>
-              </a:tr>
-              <a:tr h="173736">
-                <a:tc>
-                  <a:txBody>
-                    <a:bodyPr/>
-                    <a:lstStyle/>
-                    <a:p>
-                      <a:pPr algn="l"/>
-                      <a:r>
-                        <a:rPr sz="800" b="1">
-                          <a:solidFill>
-                            <a:srgbClr val="3D3C3A"/>
-                          </a:solidFill>
-                          <a:latin typeface="微软雅黑"/>
-                          <a:ea typeface="微软雅黑"/>
-                        </a:rPr>
-                        <a:t>知识库不足</a:t>
-                      </a:r>
-                    </a:p>
-                  </a:txBody>
-                  <a:tcPr marL="27432" marR="27432" marT="9144" marB="9144">
-                    <a:lnL>
-                      <a:noFill/>
-                    </a:lnL>
-                    <a:lnR>
-                      <a:noFill/>
-                    </a:lnR>
-                    <a:lnT w="9525" cap="flat" cmpd="sng" algn="ctr">
-                      <a:solidFill>
-                        <a:srgbClr val="D6D6D6"/>
-                      </a:solidFill>
-                      <a:prstDash val="solid"/>
-                      <a:round/>
-                      <a:headEnd type="none" w="med" len="med"/>
-                      <a:tailEnd type="none" w="med" len="med"/>
-                    </a:lnT>
-                    <a:lnB w="9525" cap="flat">
-                      <a:solidFill>
-                        <a:srgbClr val="D6D6D6"/>
-                      </a:solidFill>
-                    </a:lnB>
-                  </a:tcPr>
-                </a:tc>
-                <a:tc>
-                  <a:txBody>
-                    <a:bodyPr/>
-                    <a:lstStyle/>
-                    <a:p>
-                      <a:pPr algn="l"/>
-                      <a:r>
-                        <a:rPr sz="800" b="0" dirty="0" err="1">
-                          <a:solidFill>
-                            <a:srgbClr val="3D3C3A"/>
-                          </a:solidFill>
-                          <a:latin typeface="微软雅黑"/>
-                          <a:ea typeface="微软雅黑"/>
-                        </a:rPr>
-                        <a:t>新开业商户或新兴</a:t>
-                      </a:r>
-                      <a:r>
-                        <a:rPr sz="800" b="0" dirty="0">
-                          <a:solidFill>
-                            <a:srgbClr val="3D3C3A"/>
-                          </a:solidFill>
-                          <a:latin typeface="微软雅黑"/>
-                          <a:ea typeface="微软雅黑"/>
-                        </a:rPr>
-                        <a:t> BNPL </a:t>
-                      </a:r>
-                      <a:r>
-                        <a:rPr sz="800" b="0" dirty="0" err="1">
-                          <a:solidFill>
-                            <a:srgbClr val="3D3C3A"/>
-                          </a:solidFill>
-                          <a:latin typeface="微软雅黑"/>
-                          <a:ea typeface="微软雅黑"/>
-                        </a:rPr>
-                        <a:t>平台的交易描述未收录，落入</a:t>
-                      </a:r>
-                      <a:r>
-                        <a:rPr sz="800" b="0" dirty="0">
-                          <a:solidFill>
-                            <a:srgbClr val="3D3C3A"/>
-                          </a:solidFill>
-                          <a:latin typeface="微软雅黑"/>
-                          <a:ea typeface="微软雅黑"/>
-                        </a:rPr>
-                        <a:t> Other </a:t>
-                      </a:r>
-                      <a:r>
-                        <a:rPr sz="800" b="0" dirty="0" err="1">
-                          <a:solidFill>
-                            <a:srgbClr val="3D3C3A"/>
-                          </a:solidFill>
-                          <a:latin typeface="微软雅黑"/>
-                          <a:ea typeface="微软雅黑"/>
-                        </a:rPr>
-                        <a:t>或无法归集为负债流</a:t>
-                      </a:r>
-                      <a:endParaRPr sz="700" b="0" dirty="0">
-                        <a:solidFill>
-                          <a:srgbClr val="3D3C3A"/>
-                        </a:solidFill>
-                        <a:latin typeface="微软雅黑"/>
-                        <a:ea typeface="微软雅黑"/>
-                      </a:endParaRPr>
-                    </a:p>
-                  </a:txBody>
-                  <a:tcPr marL="27432" marR="27432" marT="9144" marB="9144">
-                    <a:lnL>
-                      <a:noFill/>
-                    </a:lnL>
-                    <a:lnR>
-                      <a:noFill/>
-                    </a:lnR>
-                    <a:lnT w="9525" cap="flat" cmpd="sng" algn="ctr">
-                      <a:solidFill>
-                        <a:srgbClr val="D6D6D6"/>
-                      </a:solidFill>
-                      <a:prstDash val="solid"/>
-                      <a:round/>
-                      <a:headEnd type="none" w="med" len="med"/>
-                      <a:tailEnd type="none" w="med" len="med"/>
-                    </a:lnT>
-                    <a:lnB w="9525" cap="flat">
-                      <a:solidFill>
-                        <a:srgbClr val="D6D6D6"/>
-                      </a:solidFill>
-                    </a:lnB>
-                  </a:tcPr>
-                </a:tc>
-                <a:extLst>
-                  <a:ext uri="{0D108BD9-81ED-4DB2-BD59-A6C34878D82A}">
-                    <a16:rowId xmlns:a16="http://schemas.microsoft.com/office/drawing/2014/main" val="10002"/>
-                  </a:ext>
-                </a:extLst>
-              </a:tr>
-              <a:tr h="173736">
-                <a:tc>
-                  <a:txBody>
-                    <a:bodyPr/>
-                    <a:lstStyle/>
-                    <a:p>
-                      <a:pPr algn="l"/>
-                      <a:r>
-                        <a:rPr sz="800" b="1">
-                          <a:solidFill>
-                            <a:srgbClr val="3D3C3A"/>
-                          </a:solidFill>
-                          <a:latin typeface="微软雅黑"/>
-                          <a:ea typeface="微软雅黑"/>
-                        </a:rPr>
-                        <a:t>数据本身异常</a:t>
-                      </a:r>
-                    </a:p>
-                  </a:txBody>
-                  <a:tcPr marL="27432" marR="27432" marT="9144" marB="9144">
-                    <a:lnL>
-                      <a:noFill/>
-                    </a:lnL>
-                    <a:lnR>
-                      <a:noFill/>
-                    </a:lnR>
-                    <a:lnT w="9525" cap="flat" cmpd="sng" algn="ctr">
-                      <a:solidFill>
-                        <a:srgbClr val="D6D6D6"/>
-                      </a:solidFill>
-                      <a:prstDash val="solid"/>
-                      <a:round/>
-                      <a:headEnd type="none" w="med" len="med"/>
-                      <a:tailEnd type="none" w="med" len="med"/>
-                    </a:lnT>
-                    <a:lnB w="9525" cap="flat">
-                      <a:solidFill>
-                        <a:srgbClr val="D6D6D6"/>
-                      </a:solidFill>
-                    </a:lnB>
-                  </a:tcPr>
-                </a:tc>
-                <a:tc>
-                  <a:txBody>
-                    <a:bodyPr/>
-                    <a:lstStyle/>
-                    <a:p>
-                      <a:pPr algn="l"/>
-                      <a:r>
-                        <a:rPr sz="800" b="0">
-                          <a:solidFill>
-                            <a:srgbClr val="3D3C3A"/>
-                          </a:solidFill>
-                          <a:latin typeface="微软雅黑"/>
-                          <a:ea typeface="微软雅黑"/>
-                        </a:rPr>
-                        <a:t>银行返回描述被截断（仅剩 EFTPOS *）、金额与方向矛盾、同一笔交易重复入账</a:t>
-                      </a:r>
-                    </a:p>
-                  </a:txBody>
-                  <a:tcPr marL="27432" marR="27432" marT="9144" marB="9144">
-                    <a:lnL>
-                      <a:noFill/>
-                    </a:lnL>
-                    <a:lnR>
-                      <a:noFill/>
-                    </a:lnR>
-                    <a:lnT w="9525" cap="flat" cmpd="sng" algn="ctr">
-                      <a:solidFill>
-                        <a:srgbClr val="D6D6D6"/>
-                      </a:solidFill>
-                      <a:prstDash val="solid"/>
-                      <a:round/>
-                      <a:headEnd type="none" w="med" len="med"/>
-                      <a:tailEnd type="none" w="med" len="med"/>
-                    </a:lnT>
-                    <a:lnB w="9525" cap="flat">
-                      <a:solidFill>
-                        <a:srgbClr val="D6D6D6"/>
-                      </a:solidFill>
-                    </a:lnB>
-                  </a:tcPr>
-                </a:tc>
-                <a:extLst>
-                  <a:ext uri="{0D108BD9-81ED-4DB2-BD59-A6C34878D82A}">
-                    <a16:rowId xmlns:a16="http://schemas.microsoft.com/office/drawing/2014/main" val="10003"/>
-                  </a:ext>
-                </a:extLst>
-              </a:tr>
-              <a:tr h="173736">
-                <a:tc>
-                  <a:txBody>
-                    <a:bodyPr/>
-                    <a:lstStyle/>
-                    <a:p>
-                      <a:pPr algn="l"/>
-                      <a:r>
-                        <a:rPr sz="800" b="1">
-                          <a:solidFill>
-                            <a:srgbClr val="3D3C3A"/>
-                          </a:solidFill>
-                          <a:latin typeface="微软雅黑"/>
-                          <a:ea typeface="微软雅黑"/>
-                        </a:rPr>
-                        <a:t>多引擎冲突</a:t>
-                      </a:r>
-                    </a:p>
-                  </a:txBody>
-                  <a:tcPr marL="27432" marR="27432" marT="9144" marB="9144">
-                    <a:lnL>
-                      <a:noFill/>
-                    </a:lnL>
-                    <a:lnR>
-                      <a:noFill/>
-                    </a:lnR>
-                    <a:lnT w="9525" cap="flat" cmpd="sng" algn="ctr">
-                      <a:solidFill>
-                        <a:srgbClr val="D6D6D6"/>
-                      </a:solidFill>
-                      <a:prstDash val="solid"/>
-                      <a:round/>
-                      <a:headEnd type="none" w="med" len="med"/>
-                      <a:tailEnd type="none" w="med" len="med"/>
-                    </a:lnT>
-                    <a:lnB w="9525" cap="flat">
-                      <a:solidFill>
-                        <a:srgbClr val="D6D6D6"/>
-                      </a:solidFill>
-                    </a:lnB>
-                  </a:tcPr>
-                </a:tc>
-                <a:tc>
-                  <a:txBody>
-                    <a:bodyPr/>
-                    <a:lstStyle/>
-                    <a:p>
-                      <a:pPr algn="l"/>
-                      <a:r>
-                        <a:rPr sz="800" b="0">
-                          <a:solidFill>
-                            <a:srgbClr val="3D3C3A"/>
-                          </a:solidFill>
-                          <a:latin typeface="微软雅黑"/>
-                          <a:ea typeface="微软雅黑"/>
-                        </a:rPr>
-                        <a:t>同一笔 BPAY ... 被 Transfer 归为转账、被 Liability 识别为还款，需按业务语义裁决</a:t>
-                      </a:r>
-                    </a:p>
-                  </a:txBody>
-                  <a:tcPr marL="27432" marR="27432" marT="9144" marB="9144">
-                    <a:lnL>
-                      <a:noFill/>
-                    </a:lnL>
-                    <a:lnR>
-                      <a:noFill/>
-                    </a:lnR>
-                    <a:lnT w="9525" cap="flat" cmpd="sng" algn="ctr">
-                      <a:solidFill>
-                        <a:srgbClr val="D6D6D6"/>
-                      </a:solidFill>
-                      <a:prstDash val="solid"/>
-                      <a:round/>
-                      <a:headEnd type="none" w="med" len="med"/>
-                      <a:tailEnd type="none" w="med" len="med"/>
-                    </a:lnT>
-                    <a:lnB w="9525" cap="flat">
-                      <a:solidFill>
-                        <a:srgbClr val="D6D6D6"/>
-                      </a:solidFill>
-                    </a:lnB>
-                  </a:tcPr>
-                </a:tc>
-                <a:extLst>
-                  <a:ext uri="{0D108BD9-81ED-4DB2-BD59-A6C34878D82A}">
-                    <a16:rowId xmlns:a16="http://schemas.microsoft.com/office/drawing/2014/main" val="10004"/>
-                  </a:ext>
-                </a:extLst>
-              </a:tr>
-              <a:tr h="173736">
-                <a:tc>
-                  <a:txBody>
-                    <a:bodyPr/>
-                    <a:lstStyle/>
-                    <a:p>
-                      <a:pPr algn="l"/>
-                      <a:r>
-                        <a:rPr sz="800" b="1">
-                          <a:solidFill>
-                            <a:srgbClr val="3D3C3A"/>
-                          </a:solidFill>
-                          <a:latin typeface="微软雅黑"/>
-                          <a:ea typeface="微软雅黑"/>
-                        </a:rPr>
-                        <a:t>正常波动</a:t>
-                      </a:r>
-                    </a:p>
-                  </a:txBody>
-                  <a:tcPr marL="27432" marR="27432" marT="9144" marB="9144">
-                    <a:lnL>
-                      <a:noFill/>
-                    </a:lnL>
-                    <a:lnR>
-                      <a:noFill/>
-                    </a:lnR>
-                    <a:lnT w="9525" cap="flat" cmpd="sng" algn="ctr">
-                      <a:solidFill>
-                        <a:srgbClr val="D6D6D6"/>
-                      </a:solidFill>
-                      <a:prstDash val="solid"/>
-                      <a:round/>
-                      <a:headEnd type="none" w="med" len="med"/>
-                      <a:tailEnd type="none" w="med" len="med"/>
-                    </a:lnT>
-                    <a:lnB w="9525" cap="flat">
-                      <a:solidFill>
-                        <a:srgbClr val="D6D6D6"/>
-                      </a:solidFill>
-                    </a:lnB>
-                  </a:tcPr>
-                </a:tc>
-                <a:tc>
-                  <a:txBody>
-                    <a:bodyPr/>
-                    <a:lstStyle/>
-                    <a:p>
-                      <a:pPr algn="l"/>
-                      <a:r>
-                        <a:rPr sz="800" b="0" dirty="0" err="1">
-                          <a:solidFill>
-                            <a:srgbClr val="3D3C3A"/>
-                          </a:solidFill>
-                          <a:latin typeface="微软雅黑"/>
-                          <a:ea typeface="微软雅黑"/>
-                        </a:rPr>
-                        <a:t>月初集中缴费、节假日消费高峰导致某类别占比短期上升，属正常范围，无需干预</a:t>
-                      </a:r>
-                      <a:endParaRPr sz="700" b="0" dirty="0">
-                        <a:solidFill>
-                          <a:srgbClr val="3D3C3A"/>
-                        </a:solidFill>
-                        <a:latin typeface="微软雅黑"/>
-                        <a:ea typeface="微软雅黑"/>
-                      </a:endParaRPr>
-                    </a:p>
-                  </a:txBody>
-                  <a:tcPr marL="27432" marR="27432" marT="9144" marB="9144">
-                    <a:lnL>
-                      <a:noFill/>
-                    </a:lnL>
-                    <a:lnR>
-                      <a:noFill/>
-                    </a:lnR>
-                    <a:lnT w="9525" cap="flat" cmpd="sng" algn="ctr">
-                      <a:solidFill>
-                        <a:srgbClr val="D6D6D6"/>
-                      </a:solidFill>
-                      <a:prstDash val="solid"/>
-                      <a:round/>
-                      <a:headEnd type="none" w="med" len="med"/>
-                      <a:tailEnd type="none" w="med" len="med"/>
-                    </a:lnT>
-                    <a:lnB w="9525" cap="flat">
-                      <a:solidFill>
-                        <a:srgbClr val="D6D6D6"/>
-                      </a:solidFill>
-                    </a:lnB>
-                  </a:tcPr>
-                </a:tc>
-                <a:extLst>
-                  <a:ext uri="{0D108BD9-81ED-4DB2-BD59-A6C34878D82A}">
-                    <a16:rowId xmlns:a16="http://schemas.microsoft.com/office/drawing/2014/main" val="10005"/>
-                  </a:ext>
-                </a:extLst>
-              </a:tr>
-            </a:tbl>
-          </a:graphicData>
-        </a:graphic>
-      </p:graphicFrame>
-      <p:sp>
-        <p:nvSpPr>
-          <p:cNvPr id="30" name="TextBox 29"/>
-          <p:cNvSpPr txBox="1"/>
-          <p:nvPr/>
-        </p:nvSpPr>
-        <p:spPr>
-          <a:xfrm>
-            <a:off x="6281928" y="5285232"/>
-            <a:ext cx="5029200" cy="256032"/>
-          </a:xfrm>
-          <a:prstGeom prst="rect">
-            <a:avLst/>
-          </a:prstGeom>
-          <a:noFill/>
-        </p:spPr>
-        <p:txBody>
-          <a:bodyPr wrap="square">
-            <a:spAutoFit/>
-          </a:bodyPr>
-          <a:lstStyle/>
-          <a:p>
-            <a:pPr algn="l"/>
-            <a:r>
-              <a:rPr sz="1200" b="1" dirty="0" err="1">
-                <a:solidFill>
-                  <a:srgbClr val="0A0A0A"/>
-                </a:solidFill>
-                <a:latin typeface="微软雅黑"/>
-                <a:ea typeface="微软雅黑"/>
-              </a:rPr>
-              <a:t>诊断报告输出示例</a:t>
-            </a:r>
-            <a:endParaRPr sz="900" b="1" dirty="0">
-              <a:solidFill>
-                <a:srgbClr val="0A0A0A"/>
-              </a:solidFill>
-              <a:latin typeface="微软雅黑"/>
-              <a:ea typeface="微软雅黑"/>
-            </a:endParaRPr>
-          </a:p>
-        </p:txBody>
-      </p:sp>
-      <p:graphicFrame>
-        <p:nvGraphicFramePr>
-          <p:cNvPr id="31" name="Table 30"/>
-          <p:cNvGraphicFramePr>
-            <a:graphicFrameLocks noGrp="1"/>
-          </p:cNvGraphicFramePr>
-          <p:nvPr/>
-        </p:nvGraphicFramePr>
-        <p:xfrm>
-          <a:off x="6311257" y="5556879"/>
-          <a:ext cx="5540234" cy="694944"/>
-        </p:xfrm>
-        <a:graphic>
-          <a:graphicData uri="http://schemas.openxmlformats.org/drawingml/2006/table">
-            <a:tbl>
-              <a:tblPr/>
-              <a:tblGrid>
-                <a:gridCol w="554023">
-                  <a:extLst>
-                    <a:ext uri="{9D8B030D-6E8A-4147-A177-3AD203B41FA5}">
-                      <a16:colId xmlns:a16="http://schemas.microsoft.com/office/drawing/2014/main" val="20000"/>
-                    </a:ext>
-                  </a:extLst>
-                </a:gridCol>
-                <a:gridCol w="1846745">
-                  <a:extLst>
-                    <a:ext uri="{9D8B030D-6E8A-4147-A177-3AD203B41FA5}">
-                      <a16:colId xmlns:a16="http://schemas.microsoft.com/office/drawing/2014/main" val="20001"/>
-                    </a:ext>
-                  </a:extLst>
-                </a:gridCol>
-                <a:gridCol w="923372">
-                  <a:extLst>
-                    <a:ext uri="{9D8B030D-6E8A-4147-A177-3AD203B41FA5}">
-                      <a16:colId xmlns:a16="http://schemas.microsoft.com/office/drawing/2014/main" val="20002"/>
-                    </a:ext>
-                  </a:extLst>
-                </a:gridCol>
-                <a:gridCol w="2216094">
-                  <a:extLst>
-                    <a:ext uri="{9D8B030D-6E8A-4147-A177-3AD203B41FA5}">
-                      <a16:colId xmlns:a16="http://schemas.microsoft.com/office/drawing/2014/main" val="20003"/>
-                    </a:ext>
-                  </a:extLst>
-                </a:gridCol>
-              </a:tblGrid>
-              <a:tr h="173736">
-                <a:tc>
-                  <a:txBody>
-                    <a:bodyPr/>
-                    <a:lstStyle/>
-                    <a:p>
-                      <a:pPr algn="l"/>
-                      <a:r>
-                        <a:rPr sz="800" b="1">
-                          <a:solidFill>
-                            <a:srgbClr val="0A0A0A"/>
-                          </a:solidFill>
-                          <a:latin typeface="微软雅黑"/>
-                          <a:ea typeface="微软雅黑"/>
-                        </a:rPr>
-                        <a:t>优先级</a:t>
-                      </a:r>
-                    </a:p>
-                  </a:txBody>
-                  <a:tcPr marL="27432" marR="27432" marT="9144" marB="9144">
-                    <a:lnL>
-                      <a:noFill/>
-                    </a:lnL>
-                    <a:lnR>
-                      <a:noFill/>
-                    </a:lnR>
-                    <a:lnT>
-                      <a:noFill/>
-                    </a:lnT>
-                    <a:lnB w="19050" cap="flat">
-                      <a:solidFill>
-                        <a:srgbClr val="0A0A0A"/>
-                      </a:solidFill>
-                    </a:lnB>
-                  </a:tcPr>
-                </a:tc>
-                <a:tc>
-                  <a:txBody>
-                    <a:bodyPr/>
-                    <a:lstStyle/>
-                    <a:p>
-                      <a:pPr algn="l"/>
-                      <a:r>
-                        <a:rPr sz="800" b="1">
-                          <a:solidFill>
-                            <a:srgbClr val="0A0A0A"/>
-                          </a:solidFill>
-                          <a:latin typeface="微软雅黑"/>
-                          <a:ea typeface="微软雅黑"/>
-                        </a:rPr>
-                        <a:t>问题描述</a:t>
-                      </a:r>
-                    </a:p>
-                  </a:txBody>
-                  <a:tcPr marL="27432" marR="27432" marT="9144" marB="9144">
-                    <a:lnL>
-                      <a:noFill/>
-                    </a:lnL>
-                    <a:lnR>
-                      <a:noFill/>
-                    </a:lnR>
-                    <a:lnT>
-                      <a:noFill/>
-                    </a:lnT>
-                    <a:lnB w="19050" cap="flat">
-                      <a:solidFill>
-                        <a:srgbClr val="0A0A0A"/>
-                      </a:solidFill>
-                    </a:lnB>
-                  </a:tcPr>
-                </a:tc>
-                <a:tc>
-                  <a:txBody>
-                    <a:bodyPr/>
-                    <a:lstStyle/>
-                    <a:p>
-                      <a:pPr algn="l"/>
-                      <a:r>
-                        <a:rPr sz="800" b="1">
-                          <a:solidFill>
-                            <a:srgbClr val="0A0A0A"/>
-                          </a:solidFill>
-                          <a:latin typeface="微软雅黑"/>
-                          <a:ea typeface="微软雅黑"/>
-                        </a:rPr>
-                        <a:t>定位原因</a:t>
-                      </a:r>
-                    </a:p>
-                  </a:txBody>
-                  <a:tcPr marL="27432" marR="27432" marT="9144" marB="9144">
-                    <a:lnL>
-                      <a:noFill/>
-                    </a:lnL>
-                    <a:lnR>
-                      <a:noFill/>
-                    </a:lnR>
-                    <a:lnT>
-                      <a:noFill/>
-                    </a:lnT>
-                    <a:lnB w="19050" cap="flat">
-                      <a:solidFill>
-                        <a:srgbClr val="0A0A0A"/>
-                      </a:solidFill>
-                    </a:lnB>
-                  </a:tcPr>
-                </a:tc>
-                <a:tc>
-                  <a:txBody>
-                    <a:bodyPr/>
-                    <a:lstStyle/>
-                    <a:p>
-                      <a:pPr algn="l"/>
-                      <a:r>
-                        <a:rPr sz="800" b="1">
-                          <a:solidFill>
-                            <a:srgbClr val="0A0A0A"/>
-                          </a:solidFill>
-                          <a:latin typeface="微软雅黑"/>
-                          <a:ea typeface="微软雅黑"/>
-                        </a:rPr>
-                        <a:t>建议动作</a:t>
-                      </a:r>
-                    </a:p>
-                  </a:txBody>
-                  <a:tcPr marL="27432" marR="27432" marT="9144" marB="9144">
-                    <a:lnL>
-                      <a:noFill/>
-                    </a:lnL>
-                    <a:lnR>
-                      <a:noFill/>
-                    </a:lnR>
-                    <a:lnT>
-                      <a:noFill/>
-                    </a:lnT>
-                    <a:lnB w="19050" cap="flat">
-                      <a:solidFill>
-                        <a:srgbClr val="0A0A0A"/>
-                      </a:solidFill>
-                    </a:lnB>
-                  </a:tcPr>
-                </a:tc>
-                <a:extLst>
-                  <a:ext uri="{0D108BD9-81ED-4DB2-BD59-A6C34878D82A}">
-                    <a16:rowId xmlns:a16="http://schemas.microsoft.com/office/drawing/2014/main" val="10000"/>
-                  </a:ext>
-                </a:extLst>
-              </a:tr>
-              <a:tr h="173736">
-                <a:tc>
-                  <a:txBody>
-                    <a:bodyPr/>
-                    <a:lstStyle/>
-                    <a:p>
-                      <a:pPr algn="l"/>
-                      <a:r>
-                        <a:rPr sz="800" b="1">
-                          <a:solidFill>
-                            <a:srgbClr val="3D3C3A"/>
-                          </a:solidFill>
-                          <a:latin typeface="微软雅黑"/>
-                          <a:ea typeface="微软雅黑"/>
-                        </a:rPr>
-                        <a:t>P0</a:t>
-                      </a:r>
-                    </a:p>
-                  </a:txBody>
-                  <a:tcPr marL="27432" marR="27432" marT="9144" marB="9144">
-                    <a:lnL>
-                      <a:noFill/>
-                    </a:lnL>
-                    <a:lnR>
-                      <a:noFill/>
-                    </a:lnR>
-                    <a:lnT w="19050" cap="flat">
-                      <a:solidFill>
-                        <a:srgbClr val="0A0A0A"/>
-                      </a:solidFill>
-                    </a:lnT>
-                    <a:lnB w="9525" cap="flat">
-                      <a:solidFill>
-                        <a:srgbClr val="D6D6D6"/>
-                      </a:solidFill>
-                    </a:lnB>
-                  </a:tcPr>
-                </a:tc>
-                <a:tc>
-                  <a:txBody>
-                    <a:bodyPr/>
-                    <a:lstStyle/>
-                    <a:p>
-                      <a:pPr algn="l"/>
-                      <a:r>
-                        <a:rPr sz="800" b="0">
-                          <a:solidFill>
-                            <a:srgbClr val="3D3C3A"/>
-                          </a:solidFill>
-                          <a:latin typeface="微软雅黑"/>
-                          <a:ea typeface="微软雅黑"/>
-                        </a:rPr>
-                        <a:t>房租交易批量被归为内部转账</a:t>
-                      </a:r>
-                    </a:p>
-                  </a:txBody>
-                  <a:tcPr marL="27432" marR="27432" marT="9144" marB="9144">
-                    <a:lnL>
-                      <a:noFill/>
-                    </a:lnL>
-                    <a:lnR>
-                      <a:noFill/>
-                    </a:lnR>
-                    <a:lnT w="19050" cap="flat">
-                      <a:solidFill>
-                        <a:srgbClr val="0A0A0A"/>
-                      </a:solidFill>
-                    </a:lnT>
-                    <a:lnB w="9525" cap="flat">
-                      <a:solidFill>
-                        <a:srgbClr val="D6D6D6"/>
-                      </a:solidFill>
-                    </a:lnB>
-                  </a:tcPr>
-                </a:tc>
-                <a:tc>
-                  <a:txBody>
-                    <a:bodyPr/>
-                    <a:lstStyle/>
-                    <a:p>
-                      <a:pPr algn="l"/>
-                      <a:r>
-                        <a:rPr sz="800" b="0">
-                          <a:solidFill>
-                            <a:srgbClr val="3D3C3A"/>
-                          </a:solidFill>
-                          <a:latin typeface="微软雅黑"/>
-                          <a:ea typeface="微软雅黑"/>
-                        </a:rPr>
-                        <a:t>引擎规则问题</a:t>
-                      </a:r>
-                    </a:p>
-                  </a:txBody>
-                  <a:tcPr marL="27432" marR="27432" marT="9144" marB="9144">
-                    <a:lnL>
-                      <a:noFill/>
-                    </a:lnL>
-                    <a:lnR>
-                      <a:noFill/>
-                    </a:lnR>
-                    <a:lnT w="19050" cap="flat">
-                      <a:solidFill>
-                        <a:srgbClr val="0A0A0A"/>
-                      </a:solidFill>
-                    </a:lnT>
-                    <a:lnB w="9525" cap="flat">
-                      <a:solidFill>
-                        <a:srgbClr val="D6D6D6"/>
-                      </a:solidFill>
-                    </a:lnB>
-                  </a:tcPr>
-                </a:tc>
-                <a:tc>
-                  <a:txBody>
-                    <a:bodyPr/>
-                    <a:lstStyle/>
-                    <a:p>
-                      <a:pPr algn="l"/>
-                      <a:r>
-                        <a:rPr sz="800" b="0">
-                          <a:solidFill>
-                            <a:srgbClr val="3D3C3A"/>
-                          </a:solidFill>
-                          <a:latin typeface="微软雅黑"/>
-                          <a:ea typeface="微软雅黑"/>
-                        </a:rPr>
-                        <a:t>优化 Transfer 排除规则并补充回归用例</a:t>
-                      </a:r>
-                    </a:p>
-                  </a:txBody>
-                  <a:tcPr marL="27432" marR="27432" marT="9144" marB="9144">
-                    <a:lnL>
-                      <a:noFill/>
-                    </a:lnL>
-                    <a:lnR>
-                      <a:noFill/>
-                    </a:lnR>
-                    <a:lnT w="19050" cap="flat">
-                      <a:solidFill>
-                        <a:srgbClr val="0A0A0A"/>
-                      </a:solidFill>
-                    </a:lnT>
-                    <a:lnB w="9525" cap="flat">
-                      <a:solidFill>
-                        <a:srgbClr val="D6D6D6"/>
-                      </a:solidFill>
-                    </a:lnB>
-                  </a:tcPr>
-                </a:tc>
-                <a:extLst>
-                  <a:ext uri="{0D108BD9-81ED-4DB2-BD59-A6C34878D82A}">
-                    <a16:rowId xmlns:a16="http://schemas.microsoft.com/office/drawing/2014/main" val="10001"/>
-                  </a:ext>
-                </a:extLst>
-              </a:tr>
-              <a:tr h="173736">
-                <a:tc>
-                  <a:txBody>
-                    <a:bodyPr/>
-                    <a:lstStyle/>
-                    <a:p>
-                      <a:pPr algn="l"/>
-                      <a:r>
-                        <a:rPr sz="800" b="1">
-                          <a:solidFill>
-                            <a:srgbClr val="3D3C3A"/>
-                          </a:solidFill>
-                          <a:latin typeface="微软雅黑"/>
-                          <a:ea typeface="微软雅黑"/>
-                        </a:rPr>
-                        <a:t>P1</a:t>
-                      </a:r>
-                    </a:p>
-                  </a:txBody>
-                  <a:tcPr marL="27432" marR="27432" marT="9144" marB="9144">
-                    <a:lnL>
-                      <a:noFill/>
-                    </a:lnL>
-                    <a:lnR>
-                      <a:noFill/>
-                    </a:lnR>
-                    <a:lnT w="9525" cap="flat" cmpd="sng" algn="ctr">
-                      <a:solidFill>
-                        <a:srgbClr val="D6D6D6"/>
-                      </a:solidFill>
-                      <a:prstDash val="solid"/>
-                      <a:round/>
-                      <a:headEnd type="none" w="med" len="med"/>
-                      <a:tailEnd type="none" w="med" len="med"/>
-                    </a:lnT>
-                    <a:lnB w="9525" cap="flat">
-                      <a:solidFill>
-                        <a:srgbClr val="D6D6D6"/>
-                      </a:solidFill>
-                    </a:lnB>
-                  </a:tcPr>
-                </a:tc>
-                <a:tc>
-                  <a:txBody>
-                    <a:bodyPr/>
-                    <a:lstStyle/>
-                    <a:p>
-                      <a:pPr algn="l"/>
-                      <a:r>
-                        <a:rPr sz="800" b="0">
-                          <a:solidFill>
-                            <a:srgbClr val="3D3C3A"/>
-                          </a:solidFill>
-                          <a:latin typeface="微软雅黑"/>
-                          <a:ea typeface="微软雅黑"/>
-                        </a:rPr>
-                        <a:t>新 BNPL 平台还款未被识别</a:t>
-                      </a:r>
-                    </a:p>
-                  </a:txBody>
-                  <a:tcPr marL="27432" marR="27432" marT="9144" marB="9144">
-                    <a:lnL>
-                      <a:noFill/>
-                    </a:lnL>
-                    <a:lnR>
-                      <a:noFill/>
-                    </a:lnR>
-                    <a:lnT w="9525" cap="flat" cmpd="sng" algn="ctr">
-                      <a:solidFill>
-                        <a:srgbClr val="D6D6D6"/>
-                      </a:solidFill>
-                      <a:prstDash val="solid"/>
-                      <a:round/>
-                      <a:headEnd type="none" w="med" len="med"/>
-                      <a:tailEnd type="none" w="med" len="med"/>
-                    </a:lnT>
-                    <a:lnB w="9525" cap="flat">
-                      <a:solidFill>
-                        <a:srgbClr val="D6D6D6"/>
-                      </a:solidFill>
-                    </a:lnB>
-                  </a:tcPr>
-                </a:tc>
-                <a:tc>
-                  <a:txBody>
-                    <a:bodyPr/>
-                    <a:lstStyle/>
-                    <a:p>
-                      <a:pPr algn="l"/>
-                      <a:r>
-                        <a:rPr sz="800" b="0">
-                          <a:solidFill>
-                            <a:srgbClr val="3D3C3A"/>
-                          </a:solidFill>
-                          <a:latin typeface="微软雅黑"/>
-                          <a:ea typeface="微软雅黑"/>
-                        </a:rPr>
-                        <a:t>知识库不足</a:t>
-                      </a:r>
-                    </a:p>
-                  </a:txBody>
-                  <a:tcPr marL="27432" marR="27432" marT="9144" marB="9144">
-                    <a:lnL>
-                      <a:noFill/>
-                    </a:lnL>
-                    <a:lnR>
-                      <a:noFill/>
-                    </a:lnR>
-                    <a:lnT w="9525" cap="flat" cmpd="sng" algn="ctr">
-                      <a:solidFill>
-                        <a:srgbClr val="D6D6D6"/>
-                      </a:solidFill>
-                      <a:prstDash val="solid"/>
-                      <a:round/>
-                      <a:headEnd type="none" w="med" len="med"/>
-                      <a:tailEnd type="none" w="med" len="med"/>
-                    </a:lnT>
-                    <a:lnB w="9525" cap="flat">
-                      <a:solidFill>
-                        <a:srgbClr val="D6D6D6"/>
-                      </a:solidFill>
-                    </a:lnB>
-                  </a:tcPr>
-                </a:tc>
-                <a:tc>
-                  <a:txBody>
-                    <a:bodyPr/>
-                    <a:lstStyle/>
-                    <a:p>
-                      <a:pPr algn="l"/>
-                      <a:r>
-                        <a:rPr sz="800" b="0">
-                          <a:solidFill>
-                            <a:srgbClr val="3D3C3A"/>
-                          </a:solidFill>
-                          <a:latin typeface="微软雅黑"/>
-                          <a:ea typeface="微软雅黑"/>
-                        </a:rPr>
-                        <a:t>补充平台名称及扣款描述关键词</a:t>
-                      </a:r>
-                    </a:p>
-                  </a:txBody>
-                  <a:tcPr marL="27432" marR="27432" marT="9144" marB="9144">
-                    <a:lnL>
-                      <a:noFill/>
-                    </a:lnL>
-                    <a:lnR>
-                      <a:noFill/>
-                    </a:lnR>
-                    <a:lnT w="9525" cap="flat" cmpd="sng" algn="ctr">
-                      <a:solidFill>
-                        <a:srgbClr val="D6D6D6"/>
-                      </a:solidFill>
-                      <a:prstDash val="solid"/>
-                      <a:round/>
-                      <a:headEnd type="none" w="med" len="med"/>
-                      <a:tailEnd type="none" w="med" len="med"/>
-                    </a:lnT>
-                    <a:lnB w="9525" cap="flat">
-                      <a:solidFill>
-                        <a:srgbClr val="D6D6D6"/>
-                      </a:solidFill>
-                    </a:lnB>
-                  </a:tcPr>
-                </a:tc>
-                <a:extLst>
-                  <a:ext uri="{0D108BD9-81ED-4DB2-BD59-A6C34878D82A}">
-                    <a16:rowId xmlns:a16="http://schemas.microsoft.com/office/drawing/2014/main" val="10002"/>
-                  </a:ext>
-                </a:extLst>
-              </a:tr>
-              <a:tr h="173736">
-                <a:tc>
-                  <a:txBody>
-                    <a:bodyPr/>
-                    <a:lstStyle/>
-                    <a:p>
-                      <a:pPr algn="l"/>
-                      <a:r>
-                        <a:rPr sz="800" b="1">
-                          <a:solidFill>
-                            <a:srgbClr val="3D3C3A"/>
-                          </a:solidFill>
-                          <a:latin typeface="微软雅黑"/>
-                          <a:ea typeface="微软雅黑"/>
-                        </a:rPr>
-                        <a:t>P2</a:t>
-                      </a:r>
-                    </a:p>
-                  </a:txBody>
-                  <a:tcPr marL="27432" marR="27432" marT="9144" marB="9144">
-                    <a:lnL>
-                      <a:noFill/>
-                    </a:lnL>
-                    <a:lnR>
-                      <a:noFill/>
-                    </a:lnR>
-                    <a:lnT w="9525" cap="flat" cmpd="sng" algn="ctr">
-                      <a:solidFill>
-                        <a:srgbClr val="D6D6D6"/>
-                      </a:solidFill>
-                      <a:prstDash val="solid"/>
-                      <a:round/>
-                      <a:headEnd type="none" w="med" len="med"/>
-                      <a:tailEnd type="none" w="med" len="med"/>
-                    </a:lnT>
-                    <a:lnB w="9525" cap="flat">
-                      <a:solidFill>
-                        <a:srgbClr val="D6D6D6"/>
-                      </a:solidFill>
-                    </a:lnB>
-                  </a:tcPr>
-                </a:tc>
-                <a:tc>
-                  <a:txBody>
-                    <a:bodyPr/>
-                    <a:lstStyle/>
-                    <a:p>
-                      <a:pPr algn="l"/>
-                      <a:r>
-                        <a:rPr sz="800" b="0">
-                          <a:solidFill>
-                            <a:srgbClr val="3D3C3A"/>
-                          </a:solidFill>
-                          <a:latin typeface="微软雅黑"/>
-                          <a:ea typeface="微软雅黑"/>
-                        </a:rPr>
-                        <a:t>某商户 7 月分类占比短期上升</a:t>
-                      </a:r>
-                    </a:p>
-                  </a:txBody>
-                  <a:tcPr marL="27432" marR="27432" marT="9144" marB="9144">
-                    <a:lnL>
-                      <a:noFill/>
-                    </a:lnL>
-                    <a:lnR>
-                      <a:noFill/>
-                    </a:lnR>
-                    <a:lnT w="9525" cap="flat" cmpd="sng" algn="ctr">
-                      <a:solidFill>
-                        <a:srgbClr val="D6D6D6"/>
-                      </a:solidFill>
-                      <a:prstDash val="solid"/>
-                      <a:round/>
-                      <a:headEnd type="none" w="med" len="med"/>
-                      <a:tailEnd type="none" w="med" len="med"/>
-                    </a:lnT>
-                    <a:lnB w="9525" cap="flat">
-                      <a:solidFill>
-                        <a:srgbClr val="D6D6D6"/>
-                      </a:solidFill>
-                    </a:lnB>
-                  </a:tcPr>
-                </a:tc>
-                <a:tc>
-                  <a:txBody>
-                    <a:bodyPr/>
-                    <a:lstStyle/>
-                    <a:p>
-                      <a:pPr algn="l"/>
-                      <a:r>
-                        <a:rPr sz="800" b="0">
-                          <a:solidFill>
-                            <a:srgbClr val="3D3C3A"/>
-                          </a:solidFill>
-                          <a:latin typeface="微软雅黑"/>
-                          <a:ea typeface="微软雅黑"/>
-                        </a:rPr>
-                        <a:t>正常波动</a:t>
-                      </a:r>
-                    </a:p>
-                  </a:txBody>
-                  <a:tcPr marL="27432" marR="27432" marT="9144" marB="9144">
-                    <a:lnL>
-                      <a:noFill/>
-                    </a:lnL>
-                    <a:lnR>
-                      <a:noFill/>
-                    </a:lnR>
-                    <a:lnT w="9525" cap="flat" cmpd="sng" algn="ctr">
-                      <a:solidFill>
-                        <a:srgbClr val="D6D6D6"/>
-                      </a:solidFill>
-                      <a:prstDash val="solid"/>
-                      <a:round/>
-                      <a:headEnd type="none" w="med" len="med"/>
-                      <a:tailEnd type="none" w="med" len="med"/>
-                    </a:lnT>
-                    <a:lnB w="9525" cap="flat">
-                      <a:solidFill>
-                        <a:srgbClr val="D6D6D6"/>
-                      </a:solidFill>
-                    </a:lnB>
-                  </a:tcPr>
-                </a:tc>
-                <a:tc>
-                  <a:txBody>
-                    <a:bodyPr/>
-                    <a:lstStyle/>
-                    <a:p>
-                      <a:pPr algn="l"/>
-                      <a:r>
-                        <a:rPr sz="800" b="0" dirty="0" err="1">
-                          <a:solidFill>
-                            <a:srgbClr val="3D3C3A"/>
-                          </a:solidFill>
-                          <a:latin typeface="微软雅黑"/>
-                          <a:ea typeface="微软雅黑"/>
-                        </a:rPr>
-                        <a:t>无需处理，持续观察</a:t>
-                      </a:r>
-                      <a:endParaRPr sz="700" b="0" dirty="0">
-                        <a:solidFill>
-                          <a:srgbClr val="3D3C3A"/>
-                        </a:solidFill>
-                        <a:latin typeface="微软雅黑"/>
-                        <a:ea typeface="微软雅黑"/>
-                      </a:endParaRPr>
-                    </a:p>
-                  </a:txBody>
-                  <a:tcPr marL="27432" marR="27432" marT="9144" marB="9144">
-                    <a:lnL>
-                      <a:noFill/>
-                    </a:lnL>
-                    <a:lnR>
-                      <a:noFill/>
-                    </a:lnR>
-                    <a:lnT w="9525" cap="flat" cmpd="sng" algn="ctr">
-                      <a:solidFill>
-                        <a:srgbClr val="D6D6D6"/>
-                      </a:solidFill>
-                      <a:prstDash val="solid"/>
-                      <a:round/>
-                      <a:headEnd type="none" w="med" len="med"/>
-                      <a:tailEnd type="none" w="med" len="med"/>
-                    </a:lnT>
-                    <a:lnB w="9525" cap="flat">
-                      <a:solidFill>
-                        <a:srgbClr val="D6D6D6"/>
-                      </a:solidFill>
-                    </a:lnB>
-                  </a:tcPr>
-                </a:tc>
-                <a:extLst>
-                  <a:ext uri="{0D108BD9-81ED-4DB2-BD59-A6C34878D82A}">
-                    <a16:rowId xmlns:a16="http://schemas.microsoft.com/office/drawing/2014/main" val="10003"/>
-                  </a:ext>
-                </a:extLst>
-              </a:tr>
-            </a:tbl>
-          </a:graphicData>
-        </a:graphic>
-      </p:graphicFrame>
-      <p:sp>
-        <p:nvSpPr>
-          <p:cNvPr id="32" name="TextBox 29">
-            <a:extLst>
-              <a:ext uri="{FF2B5EF4-FFF2-40B4-BE49-F238E27FC236}">
-                <a16:creationId xmlns:a16="http://schemas.microsoft.com/office/drawing/2014/main" id="{59843E63-6597-4DF7-94AC-310E51A426D8}"/>
-              </a:ext>
-            </a:extLst>
-          </p:cNvPr>
-          <p:cNvSpPr txBox="1"/>
-          <p:nvPr/>
-        </p:nvSpPr>
-        <p:spPr>
-          <a:xfrm>
-            <a:off x="6281928" y="3776472"/>
-            <a:ext cx="5029200" cy="256032"/>
-          </a:xfrm>
-          <a:prstGeom prst="rect">
-            <a:avLst/>
-          </a:prstGeom>
-          <a:noFill/>
-        </p:spPr>
-        <p:txBody>
-          <a:bodyPr wrap="square">
-            <a:spAutoFit/>
-          </a:bodyPr>
-          <a:lstStyle/>
-          <a:p>
-            <a:pPr algn="l">
-              <a:spcAft>
-                <a:spcPts val="300"/>
-              </a:spcAft>
-            </a:pPr>
-            <a:r>
-              <a:rPr lang="zh-CN" altLang="en-US" sz="1200" b="1" dirty="0">
-                <a:solidFill>
-                  <a:srgbClr val="0A0A0A"/>
-                </a:solidFill>
-                <a:latin typeface="微软雅黑"/>
-                <a:ea typeface="微软雅黑"/>
-              </a:rPr>
-              <a:t>五类定位原因示例</a:t>
-            </a:r>
-          </a:p>
-        </p:txBody>
-      </p:sp>
-      <p:sp>
-        <p:nvSpPr>
-          <p:cNvPr id="33" name="Rectangle 32"/>
-          <p:cNvSpPr/>
-          <p:nvPr/>
-        </p:nvSpPr>
-        <p:spPr>
-          <a:xfrm>
-            <a:off x="6217920" y="3776472"/>
-            <a:ext cx="54864" cy="228600"/>
-          </a:xfrm>
-          <a:prstGeom prst="rect">
-            <a:avLst/>
-          </a:prstGeom>
-          <a:solidFill>
-            <a:srgbClr val="D6A000"/>
-          </a:solidFill>
-          <a:ln>
-            <a:noFill/>
-          </a:ln>
-          <a:effectLst/>
-        </p:spPr>
-        <p:style>
-          <a:lnRef idx="1">
-            <a:schemeClr val="accent1"/>
-          </a:lnRef>
-          <a:fillRef idx="3">
-            <a:schemeClr val="accent1"/>
-          </a:fillRef>
-          <a:effectRef idx="2">
-            <a:schemeClr val="accent1"/>
-          </a:effectRef>
-          <a:fontRef idx="minor">
-            <a:schemeClr val="lt1"/>
-          </a:fontRef>
-        </p:style>
-        <p:txBody>
-          <a:bodyPr rtlCol="0" anchor="ctr"/>
-          <a:lstStyle/>
-          <a:p>
-            <a:pPr algn="ctr"/>
-          </a:p>
-        </p:txBody>
-      </p:sp>
-      <p:sp>
-        <p:nvSpPr>
-          <p:cNvPr id="34" name="Rectangle 33"/>
-          <p:cNvSpPr/>
-          <p:nvPr/>
-        </p:nvSpPr>
-        <p:spPr>
-          <a:xfrm>
-            <a:off x="6217920" y="5285232"/>
-            <a:ext cx="54864" cy="228600"/>
-          </a:xfrm>
-          <a:prstGeom prst="rect">
-            <a:avLst/>
-          </a:prstGeom>
-          <a:solidFill>
-            <a:srgbClr val="D6A000"/>
-          </a:solidFill>
-          <a:ln>
-            <a:noFill/>
-          </a:ln>
-          <a:effectLst/>
-        </p:spPr>
-        <p:style>
-          <a:lnRef idx="1">
-            <a:schemeClr val="accent1"/>
-          </a:lnRef>
-          <a:fillRef idx="3">
-            <a:schemeClr val="accent1"/>
-          </a:fillRef>
-          <a:effectRef idx="2">
-            <a:schemeClr val="accent1"/>
-          </a:effectRef>
-          <a:fontRef idx="minor">
-            <a:schemeClr val="lt1"/>
-          </a:fontRef>
-        </p:style>
-        <p:txBody>
-          <a:bodyPr rtlCol="0" anchor="ctr"/>
-          <a:lstStyle/>
-          <a:p>
-            <a:pPr algn="ctr"/>
-          </a:p>
-        </p:txBody>
-      </p:sp>
-      <p:sp>
-        <p:nvSpPr>
-          <p:cNvPr id="35" name="Rectangle 34"/>
-          <p:cNvSpPr/>
-          <p:nvPr/>
-        </p:nvSpPr>
-        <p:spPr>
-          <a:xfrm>
-            <a:off x="6281928" y="6327648"/>
-            <a:ext cx="5541264" cy="384048"/>
-          </a:xfrm>
-          <a:prstGeom prst="rect">
-            <a:avLst/>
-          </a:prstGeom>
-          <a:solidFill>
-            <a:srgbClr val="FAF3E0"/>
-          </a:solidFill>
-          <a:ln>
-            <a:noFill/>
-          </a:ln>
-          <a:effectLst/>
-        </p:spPr>
-        <p:style>
-          <a:lnRef idx="1">
-            <a:schemeClr val="accent1"/>
-          </a:lnRef>
-          <a:fillRef idx="3">
-            <a:schemeClr val="accent1"/>
-          </a:fillRef>
-          <a:effectRef idx="2">
-            <a:schemeClr val="accent1"/>
-          </a:effectRef>
-          <a:fontRef idx="minor">
-            <a:schemeClr val="lt1"/>
-          </a:fontRef>
-        </p:style>
-        <p:txBody>
-          <a:bodyPr rtlCol="0" anchor="ctr"/>
-          <a:lstStyle/>
-          <a:p>
-            <a:pPr algn="ctr"/>
-          </a:p>
-        </p:txBody>
-      </p:sp>
-      <p:sp>
-        <p:nvSpPr>
-          <p:cNvPr id="36" name="Rectangle 35"/>
-          <p:cNvSpPr/>
-          <p:nvPr/>
-        </p:nvSpPr>
-        <p:spPr>
-          <a:xfrm>
-            <a:off x="6217920" y="6327648"/>
-            <a:ext cx="54864" cy="384048"/>
-          </a:xfrm>
-          <a:prstGeom prst="rect">
-            <a:avLst/>
-          </a:prstGeom>
-          <a:solidFill>
-            <a:srgbClr val="D6A000"/>
-          </a:solidFill>
-          <a:ln>
-            <a:noFill/>
-          </a:ln>
-          <a:effectLst/>
-        </p:spPr>
-        <p:style>
-          <a:lnRef idx="1">
-            <a:schemeClr val="accent1"/>
-          </a:lnRef>
-          <a:fillRef idx="3">
-            <a:schemeClr val="accent1"/>
-          </a:fillRef>
-          <a:effectRef idx="2">
-            <a:schemeClr val="accent1"/>
-          </a:effectRef>
-          <a:fontRef idx="minor">
-            <a:schemeClr val="lt1"/>
-          </a:fontRef>
-        </p:style>
-        <p:txBody>
-          <a:bodyPr rtlCol="0" anchor="ctr"/>
-          <a:lstStyle/>
-          <a:p>
-            <a:pPr algn="ctr"/>
-          </a:p>
-        </p:txBody>
-      </p:sp>
-      <p:sp>
-        <p:nvSpPr>
-          <p:cNvPr id="37" name="TextBox 36"/>
-          <p:cNvSpPr txBox="1"/>
-          <p:nvPr/>
-        </p:nvSpPr>
-        <p:spPr>
-          <a:xfrm>
-            <a:off x="6373368" y="6327648"/>
-            <a:ext cx="5349240" cy="384048"/>
-          </a:xfrm>
-          <a:prstGeom prst="rect">
-            <a:avLst/>
-          </a:prstGeom>
-          <a:noFill/>
-        </p:spPr>
-        <p:txBody>
-          <a:bodyPr wrap="square" lIns="0" rIns="0" tIns="0" bIns="0" anchor="ctr">
-            <a:spAutoFit/>
-          </a:bodyPr>
-          <a:lstStyle/>
-          <a:p>
-            <a:pPr algn="l"/>
-            <a:r>
-              <a:rPr sz="900" b="1">
-                <a:solidFill>
-                  <a:srgbClr val="0A0A0A"/>
-                </a:solidFill>
-              </a:rPr>
-              <a:t>知识库随注册商户的新增、变更、失效持续更新，并从真实交易中补齐注册数据未覆盖的支付描述和商户别名。由此形成“分类 → 监控 → 定位 → 输出 → 更新 → 再分类”的持续优化闭环。</a:t>
-            </a:r>
-          </a:p>
-        </p:txBody>
-      </p:sp>
-    </p:spTree>
-    <p:extLst>
-      <p:ext uri="{BB962C8B-B14F-4D97-AF65-F5344CB8AC3E}">
-        <p14:creationId xmlns:p14="http://schemas.microsoft.com/office/powerpoint/2010/main" val="2946827745"/>
-      </p:ext>
-    </p:extLst>
-  </p:cSld>
-  <p:clrMapOvr>
-    <a:masterClrMapping/>
-  </p:clrMapOvr>
-</p:sld>
-</file>
-
-<file path=ppt/slides/slide4.xml><?xml version="1.0" encoding="utf-8"?>
-<p:sld xmlns:a="http://schemas.openxmlformats.org/drawingml/2006/main" xmlns:p="http://schemas.openxmlformats.org/presentationml/2006/main" xmlns:r="http://schemas.openxmlformats.org/officeDocument/2006/relationships">
-  <p:cSld>
-    <p:spTree>
-      <p:nvGrpSpPr>
-        <p:cNvPr id="1" name=""/>
-        <p:cNvGrpSpPr/>
-        <p:nvPr/>
-      </p:nvGrpSpPr>
-      <p:grpSpPr/>
-      <p:sp>
-        <p:nvSpPr>
-          <p:cNvPr id="28" name="band-bg">
-            <a:extLst>
-              <a:ext uri="{FF2B5EF4-FFF2-40B4-BE49-F238E27FC236}">
-                <a16:creationId xmlns:a16="http://schemas.microsoft.com/office/drawing/2014/main" id="{D6429189-C8AA-4544-BEC8-9DF6FD837EF5}"/>
-              </a:ext>
-            </a:extLst>
-          </p:cNvPr>
-          <p:cNvSpPr/>
-          <p:nvPr/>
-        </p:nvSpPr>
-        <p:spPr>
-          <a:xfrm>
-            <a:off x="584453" y="1105291"/>
-            <a:ext cx="10871200" cy="505124"/>
-          </a:xfrm>
-          <a:prstGeom prst="rect">
-            <a:avLst/>
-          </a:prstGeom>
-          <a:solidFill>
-            <a:srgbClr val="F0F0F0"/>
-          </a:solidFill>
-          <a:ln>
-            <a:noFill/>
-          </a:ln>
-        </p:spPr>
-        <p:txBody>
-          <a:bodyPr/>
-          <a:lstStyle/>
-          <a:p>
-            <a:endParaRPr/>
-          </a:p>
-        </p:txBody>
-      </p:sp>
-      <p:sp>
-        <p:nvSpPr>
-          <p:cNvPr id="2" name="title">
-            <a:extLst>
-              <a:ext uri="{FF2B5EF4-FFF2-40B4-BE49-F238E27FC236}">
-                <a16:creationId xmlns:a16="http://schemas.microsoft.com/office/drawing/2014/main" id="{2D6C6528-4DFB-4D29-B578-BC3E760E6C21}"/>
-              </a:ext>
-            </a:extLst>
-          </p:cNvPr>
-          <p:cNvSpPr txBox="1"/>
-          <p:nvPr/>
-        </p:nvSpPr>
-        <p:spPr>
-          <a:xfrm>
-            <a:off x="600015" y="214702"/>
-            <a:ext cx="8890000" cy="355600"/>
-          </a:xfrm>
-          <a:prstGeom prst="rect">
-            <a:avLst/>
-          </a:prstGeom>
-          <a:noFill/>
-          <a:ln>
-            <a:noFill/>
-          </a:ln>
-        </p:spPr>
-        <p:txBody>
-          <a:bodyPr wrap="none" lIns="0" tIns="0" rIns="0" bIns="0" rtlCol="0" anchor="ctr"/>
-          <a:lstStyle/>
-          <a:p>
-            <a:pPr algn="l">
-              <a:lnSpc>
-                <a:spcPct val="130000"/>
-              </a:lnSpc>
-            </a:pPr>
-            <a:r>
-              <a:rPr lang="en-US" altLang="zh-CN" sz="2000" b="1" noProof="1">
-                <a:solidFill>
-                  <a:srgbClr val="0A0A0A"/>
-                </a:solidFill>
-                <a:latin typeface="微软雅黑" panose="020B0503020204020204" pitchFamily="34" charset="-122"/>
-                <a:ea typeface="微软雅黑" panose="020B0503020204020204" pitchFamily="34" charset="-122"/>
-              </a:rPr>
-              <a:t>多引擎分工分类，AI 建设与维护知识库并驱动持续优化闭环</a:t>
-            </a:r>
-            <a:endParaRPr lang="en-US" altLang="zh-CN" sz="2000" noProof="1">
-              <a:latin typeface="微软雅黑" panose="020B0503020204020204" pitchFamily="34" charset="-122"/>
-              <a:ea typeface="微软雅黑" panose="020B0503020204020204" pitchFamily="34" charset="-122"/>
-            </a:endParaRPr>
-          </a:p>
-        </p:txBody>
-      </p:sp>
-      <p:sp>
-        <p:nvSpPr>
-          <p:cNvPr id="3" name="文本框 2">
-            <a:extLst>
-              <a:ext uri="{FF2B5EF4-FFF2-40B4-BE49-F238E27FC236}">
-                <a16:creationId xmlns:a16="http://schemas.microsoft.com/office/drawing/2014/main" id="{4D96AA42-FD16-4226-8E79-584F342FB5EE}"/>
-              </a:ext>
-            </a:extLst>
-          </p:cNvPr>
-          <p:cNvSpPr txBox="1"/>
-          <p:nvPr/>
-        </p:nvSpPr>
-        <p:spPr>
-          <a:xfrm>
-            <a:off x="511115" y="570302"/>
-            <a:ext cx="10901632" cy="438133"/>
-          </a:xfrm>
-          <a:prstGeom prst="rect">
-            <a:avLst/>
-          </a:prstGeom>
-          <a:noFill/>
-        </p:spPr>
-        <p:txBody>
-          <a:bodyPr wrap="square">
-            <a:spAutoFit/>
-          </a:bodyPr>
-          <a:lstStyle/>
-          <a:p>
-            <a:pPr algn="l">
-              <a:lnSpc>
-                <a:spcPct val="140000"/>
-              </a:lnSpc>
-            </a:pPr>
-            <a:r>
-              <a:rPr lang="en-US" altLang="zh-CN" sz="1800" noProof="1">
-                <a:solidFill>
-                  <a:srgbClr val="606060"/>
-                </a:solidFill>
-                <a:latin typeface="微软雅黑" panose="020B0503020204020204" pitchFamily="34" charset="-122"/>
-                <a:ea typeface="微软雅黑" panose="020B0503020204020204" pitchFamily="34" charset="-122"/>
-              </a:rPr>
-              <a:t>流水依次经过多个分类引擎，各引擎输出交易类别、交易对手，后续引擎发现更明确证据可修正前序分类</a:t>
-            </a:r>
-            <a:endParaRPr lang="en-US" altLang="zh-CN" sz="1800" noProof="1">
-              <a:latin typeface="微软雅黑" panose="020B0503020204020204" pitchFamily="34" charset="-122"/>
-              <a:ea typeface="微软雅黑" panose="020B0503020204020204" pitchFamily="34" charset="-122"/>
-            </a:endParaRPr>
-          </a:p>
-        </p:txBody>
-      </p:sp>
-      <p:sp>
-        <p:nvSpPr>
-          <p:cNvPr id="5" name="s1-bar">
-            <a:extLst>
-              <a:ext uri="{FF2B5EF4-FFF2-40B4-BE49-F238E27FC236}">
-                <a16:creationId xmlns:a16="http://schemas.microsoft.com/office/drawing/2014/main" id="{91A77EEA-A124-4DAB-9FE8-7A3DD468C350}"/>
-              </a:ext>
-            </a:extLst>
-          </p:cNvPr>
-          <p:cNvSpPr/>
-          <p:nvPr/>
-        </p:nvSpPr>
-        <p:spPr>
-          <a:xfrm>
-            <a:off x="568717" y="1732980"/>
-            <a:ext cx="50800" cy="165100"/>
-          </a:xfrm>
-          <a:prstGeom prst="rect">
-            <a:avLst/>
-          </a:prstGeom>
-          <a:solidFill>
-            <a:srgbClr val="D6A000"/>
-          </a:solidFill>
-          <a:ln>
-            <a:noFill/>
-          </a:ln>
-        </p:spPr>
-        <p:txBody>
-          <a:bodyPr/>
-          <a:lstStyle/>
-          <a:p>
-            <a:endParaRPr/>
-          </a:p>
-        </p:txBody>
-      </p:sp>
-      <p:sp>
-        <p:nvSpPr>
-          <p:cNvPr id="6" name="s1-title">
-            <a:extLst>
-              <a:ext uri="{FF2B5EF4-FFF2-40B4-BE49-F238E27FC236}">
-                <a16:creationId xmlns:a16="http://schemas.microsoft.com/office/drawing/2014/main" id="{2E0EF8C0-7EE5-4A89-9BFB-5F574061D5AA}"/>
-              </a:ext>
-            </a:extLst>
-          </p:cNvPr>
-          <p:cNvSpPr txBox="1"/>
-          <p:nvPr/>
-        </p:nvSpPr>
-        <p:spPr>
-          <a:xfrm>
-            <a:off x="721117" y="1694880"/>
-            <a:ext cx="4064000" cy="228600"/>
-          </a:xfrm>
-          <a:prstGeom prst="rect">
-            <a:avLst/>
-          </a:prstGeom>
-          <a:noFill/>
-          <a:ln>
-            <a:noFill/>
-          </a:ln>
-        </p:spPr>
-        <p:txBody>
-          <a:bodyPr wrap="none" lIns="0" tIns="0" rIns="0" bIns="0" rtlCol="0" anchor="ctr"/>
-          <a:lstStyle/>
-          <a:p>
-            <a:pPr algn="l">
-              <a:lnSpc>
-                <a:spcPct val="125000"/>
-              </a:lnSpc>
-            </a:pPr>
-            <a:r>
-              <a:rPr sz="1400" b="1">
-                <a:solidFill>
-                  <a:srgbClr val="0A0A0A"/>
-                </a:solidFill>
-                <a:latin typeface="微软雅黑"/>
-                <a:ea typeface="微软雅黑"/>
-              </a:rPr>
-              <a:t>1. AI 建设与维护知识库</a:t>
-            </a:r>
-            <a:endParaRPr lang="en-US" sz="1400" noProof="1">
-              <a:latin typeface="微软雅黑" panose="020B0503020204020204" pitchFamily="34" charset="-122"/>
-              <a:ea typeface="微软雅黑" panose="020B0503020204020204" pitchFamily="34" charset="-122"/>
-            </a:endParaRPr>
-          </a:p>
-        </p:txBody>
-      </p:sp>
-      <p:graphicFrame>
-        <p:nvGraphicFramePr>
-          <p:cNvPr id="7" name="init-table">
-            <a:extLst>
-              <a:ext uri="{FF2B5EF4-FFF2-40B4-BE49-F238E27FC236}">
-                <a16:creationId xmlns:a16="http://schemas.microsoft.com/office/drawing/2014/main" id="{296C6557-7410-4A1E-A4E0-C1913FA164B3}"/>
-              </a:ext>
-            </a:extLst>
-          </p:cNvPr>
-          <p:cNvGraphicFramePr>
-            <a:graphicFrameLocks noGrp="1"/>
-          </p:cNvGraphicFramePr>
-          <p:nvPr>
-            <p:extLst>
-              <p:ext uri="{D42A27DB-BD31-4B8C-83A1-F6EECF244321}">
-                <p14:modId xmlns:p14="http://schemas.microsoft.com/office/powerpoint/2010/main" val="2055821530"/>
-              </p:ext>
-            </p:extLst>
-          </p:nvPr>
-        </p:nvGraphicFramePr>
-        <p:xfrm>
-          <a:off x="568716" y="2274555"/>
-          <a:ext cx="5222483" cy="1280160"/>
-        </p:xfrm>
-        <a:graphic>
-          <a:graphicData uri="http://schemas.openxmlformats.org/drawingml/2006/table">
-            <a:tbl>
-              <a:tblPr/>
-              <a:tblGrid>
-                <a:gridCol w="1314156">
-                  <a:extLst>
-                    <a:ext uri="{9D8B030D-6E8A-4147-A177-3AD203B41FA5}">
-                      <a16:colId xmlns:a16="http://schemas.microsoft.com/office/drawing/2014/main" val="20000"/>
-                    </a:ext>
-                  </a:extLst>
-                </a:gridCol>
-                <a:gridCol w="2341582">
-                  <a:extLst>
-                    <a:ext uri="{9D8B030D-6E8A-4147-A177-3AD203B41FA5}">
-                      <a16:colId xmlns:a16="http://schemas.microsoft.com/office/drawing/2014/main" val="20001"/>
-                    </a:ext>
-                  </a:extLst>
-                </a:gridCol>
-                <a:gridCol w="1566745">
-                  <a:extLst>
-                    <a:ext uri="{9D8B030D-6E8A-4147-A177-3AD203B41FA5}">
-                      <a16:colId xmlns:a16="http://schemas.microsoft.com/office/drawing/2014/main" val="20002"/>
-                    </a:ext>
-                  </a:extLst>
-                </a:gridCol>
-              </a:tblGrid>
-              <a:tr h="173695">
-                <a:tc>
-                  <a:txBody>
-                    <a:bodyPr/>
-                    <a:lstStyle/>
-                    <a:p>
-                      <a:pPr algn="l"/>
-                      <a:r>
-                        <a:rPr lang="en-US" sz="800" b="1" noProof="1">
-                          <a:solidFill>
-                            <a:srgbClr val="0A0A0A"/>
-                          </a:solidFill>
-                          <a:latin typeface="微软雅黑" panose="020B0503020204020204" pitchFamily="34" charset="-122"/>
-                          <a:ea typeface="微软雅黑" panose="020B0503020204020204" pitchFamily="34" charset="-122"/>
-                        </a:rPr>
-                        <a:t>标准商户</a:t>
-                      </a:r>
-                    </a:p>
-                  </a:txBody>
-                  <a:tcPr anchor="ctr">
-                    <a:lnL>
-                      <a:noFill/>
-                    </a:lnL>
-                    <a:lnR>
-                      <a:noFill/>
-                    </a:lnR>
-                    <a:lnT>
-                      <a:noFill/>
-                    </a:lnT>
-                    <a:lnB w="19050">
-                      <a:solidFill>
-                        <a:srgbClr val="0A0A0A"/>
-                      </a:solidFill>
-                    </a:lnB>
                   </a:tcPr>
                 </a:tc>
                 <a:tc>
@@ -21096,7 +15457,10 @@
         </p:spPr>
         <p:txBody>
           <a:bodyPr/>
-          <a:p/>
+          <a:lstStyle/>
+          <a:p>
+            <a:endParaRPr/>
+          </a:p>
         </p:txBody>
       </p:sp>
       <p:sp>
@@ -22591,6 +16955,7 @@
           <a:lstStyle/>
           <a:p>
             <a:pPr algn="ctr"/>
+            <a:endParaRPr/>
           </a:p>
         </p:txBody>
       </p:sp>
@@ -22635,6 +17000,7 @@
           <a:lstStyle/>
           <a:p>
             <a:pPr algn="ctr"/>
+            <a:endParaRPr/>
           </a:p>
         </p:txBody>
       </p:sp>
@@ -22679,6 +17045,7 @@
           <a:lstStyle/>
           <a:p>
             <a:pPr algn="ctr"/>
+            <a:endParaRPr/>
           </a:p>
         </p:txBody>
       </p:sp>
@@ -22723,6 +17090,7 @@
           <a:lstStyle/>
           <a:p>
             <a:pPr algn="ctr"/>
+            <a:endParaRPr/>
           </a:p>
         </p:txBody>
       </p:sp>
@@ -22743,7 +17111,7 @@
           <a:noFill/>
         </p:spPr>
         <p:txBody>
-          <a:bodyPr wrap="square" lIns="0" rIns="0" tIns="0" bIns="0" anchor="ctr">
+          <a:bodyPr wrap="square" lIns="0" tIns="0" rIns="0" bIns="0" anchor="ctr">
             <a:spAutoFit/>
           </a:bodyPr>
           <a:lstStyle/>
@@ -22797,12 +17165,12 @@
           </a:fontRef>
         </p:style>
         <p:txBody>
-          <a:bodyPr rtlCol="0" anchor="ctr" wrap="square" lIns="128016" rIns="73152" bIns="36576"/>
+          <a:bodyPr wrap="square" lIns="128016" rIns="73152" bIns="36576" rtlCol="0" anchor="ctr"/>
           <a:lstStyle/>
           <a:p>
             <a:pPr latinLnBrk="1"/>
             <a:r>
-              <a:rPr sz="1100" b="1" lang="zh-CN">
+              <a:rPr lang="zh-CN" sz="1100" b="1">
                 <a:solidFill>
                   <a:srgbClr val="1F4E79"/>
                 </a:solidFill>
@@ -22814,7 +17182,7 @@
           <a:p>
             <a:pPr latinLnBrk="1"/>
             <a:r>
-              <a:rPr sz="850" b="0" lang="zh-CN">
+              <a:rPr lang="zh-CN" sz="850" b="0">
                 <a:solidFill>
                   <a:srgbClr val="3D3C3A"/>
                 </a:solidFill>
@@ -22866,6 +17234,7 @@
           <a:lstStyle/>
           <a:p>
             <a:pPr algn="ctr"/>
+            <a:endParaRPr/>
           </a:p>
         </p:txBody>
       </p:sp>
@@ -22906,12 +17275,12 @@
           </a:fontRef>
         </p:style>
         <p:txBody>
-          <a:bodyPr rtlCol="0" anchor="ctr" wrap="square" lIns="128016" rIns="73152" bIns="36576"/>
+          <a:bodyPr wrap="square" lIns="128016" rIns="73152" bIns="36576" rtlCol="0" anchor="ctr"/>
           <a:lstStyle/>
           <a:p>
             <a:pPr latinLnBrk="1"/>
             <a:r>
-              <a:rPr sz="1100" b="1" lang="zh-CN">
+              <a:rPr lang="zh-CN" sz="1100" b="1">
                 <a:solidFill>
                   <a:srgbClr val="1F4E79"/>
                 </a:solidFill>
@@ -22923,7 +17292,7 @@
           <a:p>
             <a:pPr latinLnBrk="1"/>
             <a:r>
-              <a:rPr sz="850" b="0" lang="zh-CN">
+              <a:rPr lang="zh-CN" sz="850" b="0">
                 <a:solidFill>
                   <a:srgbClr val="3D3C3A"/>
                 </a:solidFill>
@@ -22975,6 +17344,7 @@
           <a:lstStyle/>
           <a:p>
             <a:pPr algn="ctr"/>
+            <a:endParaRPr/>
           </a:p>
         </p:txBody>
       </p:sp>
@@ -23015,12 +17385,12 @@
           </a:fontRef>
         </p:style>
         <p:txBody>
-          <a:bodyPr rtlCol="0" anchor="ctr" wrap="square" lIns="128016" rIns="73152" bIns="36576"/>
+          <a:bodyPr wrap="square" lIns="128016" rIns="73152" bIns="36576" rtlCol="0" anchor="ctr"/>
           <a:lstStyle/>
           <a:p>
             <a:pPr latinLnBrk="1"/>
             <a:r>
-              <a:rPr sz="1100" b="1" lang="zh-CN">
+              <a:rPr lang="zh-CN" sz="1100" b="1">
                 <a:solidFill>
                   <a:srgbClr val="1F4E79"/>
                 </a:solidFill>
@@ -23032,7 +17402,7 @@
           <a:p>
             <a:pPr latinLnBrk="1"/>
             <a:r>
-              <a:rPr sz="850" b="0" lang="zh-CN">
+              <a:rPr lang="zh-CN" sz="850" b="0">
                 <a:solidFill>
                   <a:srgbClr val="3D3C3A"/>
                 </a:solidFill>
@@ -23084,6 +17454,7 @@
           <a:lstStyle/>
           <a:p>
             <a:pPr algn="ctr"/>
+            <a:endParaRPr/>
           </a:p>
         </p:txBody>
       </p:sp>
@@ -23095,7 +17466,7 @@
 </p:sld>
 </file>
 
-<file path=ppt/slides/slide5.xml><?xml version="1.0" encoding="utf-8"?>
+<file path=ppt/slides/slide4.xml><?xml version="1.0" encoding="utf-8"?>
 <p:sld xmlns:a="http://schemas.openxmlformats.org/drawingml/2006/main" xmlns:r="http://schemas.openxmlformats.org/officeDocument/2006/relationships" xmlns:p="http://schemas.openxmlformats.org/presentationml/2006/main">
   <p:cSld>
     <p:spTree>

--- a/银行流水分享_V1.7.pptx
+++ b/银行流水分享_V1.7.pptx
@@ -7,6 +7,7 @@
   <p:sldIdLst>
     <p:sldId id="260" r:id="rId2"/>
     <p:sldId id="269" r:id="rId3"/>
+    <p:sldId id="281" r:id="rId15"/>
     <p:sldId id="280" r:id="rId4"/>
     <p:sldId id="279" r:id="rId5"/>
   </p:sldIdLst>
@@ -9796,6 +9797,5420 @@
           </a:graphicData>
         </a:graphic>
       </p:graphicFrame>
+      <p:sp>
+        <p:nvSpPr>
+          <p:cNvPr id="17" name="用户-bg"/>
+          <p:cNvSpPr/>
+          <p:nvPr/>
+        </p:nvSpPr>
+        <p:spPr>
+          <a:xfrm>
+            <a:off x="566928" y="4297680"/>
+            <a:ext cx="5376672" cy="1956816"/>
+          </a:xfrm>
+          <a:prstGeom prst="rect">
+            <a:avLst/>
+          </a:prstGeom>
+          <a:solidFill>
+            <a:srgbClr val="E3EBF4"/>
+          </a:solidFill>
+          <a:ln>
+            <a:noFill/>
+          </a:ln>
+          <a:effectLst/>
+        </p:spPr>
+        <p:style>
+          <a:lnRef idx="1">
+            <a:schemeClr val="accent1"/>
+          </a:lnRef>
+          <a:fillRef idx="3">
+            <a:schemeClr val="accent1"/>
+          </a:fillRef>
+          <a:effectRef idx="2">
+            <a:schemeClr val="accent1"/>
+          </a:effectRef>
+          <a:fontRef idx="minor">
+            <a:schemeClr val="lt1"/>
+          </a:fontRef>
+        </p:style>
+        <p:txBody>
+          <a:bodyPr rtlCol="0" anchor="ctr"/>
+          <a:lstStyle/>
+          <a:p>
+            <a:pPr algn="ctr"/>
+          </a:p>
+        </p:txBody>
+      </p:sp>
+      <p:sp>
+        <p:nvSpPr>
+          <p:cNvPr id="18" name="用户-bar"/>
+          <p:cNvSpPr/>
+          <p:nvPr/>
+        </p:nvSpPr>
+        <p:spPr>
+          <a:xfrm>
+            <a:off x="566928" y="4297680"/>
+            <a:ext cx="5376672" cy="54864"/>
+          </a:xfrm>
+          <a:prstGeom prst="rect">
+            <a:avLst/>
+          </a:prstGeom>
+          <a:solidFill>
+            <a:srgbClr val="1F4E79"/>
+          </a:solidFill>
+          <a:ln>
+            <a:noFill/>
+          </a:ln>
+          <a:effectLst/>
+        </p:spPr>
+        <p:style>
+          <a:lnRef idx="1">
+            <a:schemeClr val="accent1"/>
+          </a:lnRef>
+          <a:fillRef idx="3">
+            <a:schemeClr val="accent1"/>
+          </a:fillRef>
+          <a:effectRef idx="2">
+            <a:schemeClr val="accent1"/>
+          </a:effectRef>
+          <a:fontRef idx="minor">
+            <a:schemeClr val="lt1"/>
+          </a:fontRef>
+        </p:style>
+        <p:txBody>
+          <a:bodyPr rtlCol="0" anchor="ctr"/>
+          <a:lstStyle/>
+          <a:p>
+            <a:pPr algn="ctr"/>
+          </a:p>
+        </p:txBody>
+      </p:sp>
+      <p:sp>
+        <p:nvSpPr>
+          <p:cNvPr id="19" name="用户-title"/>
+          <p:cNvSpPr txBox="1"/>
+          <p:nvPr/>
+        </p:nvSpPr>
+        <p:spPr>
+          <a:xfrm>
+            <a:off x="749808" y="4398264"/>
+            <a:ext cx="5010912" cy="201168"/>
+          </a:xfrm>
+          <a:prstGeom prst="rect">
+            <a:avLst/>
+          </a:prstGeom>
+          <a:noFill/>
+        </p:spPr>
+        <p:txBody>
+          <a:bodyPr wrap="square" lIns="0" rIns="0" tIns="0" bIns="0">
+            <a:spAutoFit/>
+          </a:bodyPr>
+          <a:lstStyle/>
+          <a:p>
+            <a:pPr algn="l"/>
+            <a:r>
+              <a:rPr sz="1050" b="1" lang="zh-CN">
+                <a:solidFill>
+                  <a:srgbClr val="0A0A0A"/>
+                </a:solidFill>
+                <a:latin typeface="微软雅黑"/>
+                <a:ea typeface="微软雅黑"/>
+              </a:rPr>
+              <a:t>用户整体负债画像</a:t>
+            </a:r>
+          </a:p>
+        </p:txBody>
+      </p:sp>
+      <p:sp>
+        <p:nvSpPr>
+          <p:cNvPr id="20" name="用户-k1"/>
+          <p:cNvSpPr txBox="1"/>
+          <p:nvPr/>
+        </p:nvSpPr>
+        <p:spPr>
+          <a:xfrm>
+            <a:off x="749808" y="4645152"/>
+            <a:ext cx="1645920" cy="548640"/>
+          </a:xfrm>
+          <a:prstGeom prst="rect">
+            <a:avLst/>
+          </a:prstGeom>
+          <a:noFill/>
+        </p:spPr>
+        <p:txBody>
+          <a:bodyPr wrap="square" lIns="0" rIns="0" tIns="0" bIns="0">
+            <a:spAutoFit/>
+          </a:bodyPr>
+          <a:lstStyle/>
+          <a:p>
+            <a:pPr algn="l"/>
+            <a:r>
+              <a:rPr sz="800" b="0" lang="zh-CN">
+                <a:solidFill>
+                  <a:srgbClr val="606060"/>
+                </a:solidFill>
+                <a:latin typeface="微软雅黑"/>
+                <a:ea typeface="微软雅黑"/>
+              </a:rPr>
+              <a:t>平均月还款金额</a:t>
+            </a:r>
+          </a:p>
+          <a:p>
+            <a:pPr algn="l"/>
+            <a:r>
+              <a:rPr sz="1500" b="1" lang="zh-CN">
+                <a:solidFill>
+                  <a:srgbClr val="1F4E79"/>
+                </a:solidFill>
+                <a:latin typeface="微软雅黑"/>
+                <a:ea typeface="微软雅黑"/>
+              </a:rPr>
+              <a:t>A$428</a:t>
+            </a:r>
+          </a:p>
+        </p:txBody>
+      </p:sp>
+      <p:sp>
+        <p:nvSpPr>
+          <p:cNvPr id="21" name="用户-k2"/>
+          <p:cNvSpPr txBox="1"/>
+          <p:nvPr/>
+        </p:nvSpPr>
+        <p:spPr>
+          <a:xfrm>
+            <a:off x="2505456" y="4645152"/>
+            <a:ext cx="1645920" cy="548640"/>
+          </a:xfrm>
+          <a:prstGeom prst="rect">
+            <a:avLst/>
+          </a:prstGeom>
+          <a:noFill/>
+        </p:spPr>
+        <p:txBody>
+          <a:bodyPr wrap="square" lIns="0" rIns="0" tIns="0" bIns="0">
+            <a:spAutoFit/>
+          </a:bodyPr>
+          <a:lstStyle/>
+          <a:p>
+            <a:pPr algn="l"/>
+            <a:r>
+              <a:rPr sz="800" b="0" lang="zh-CN">
+                <a:solidFill>
+                  <a:srgbClr val="606060"/>
+                </a:solidFill>
+                <a:latin typeface="微软雅黑"/>
+                <a:ea typeface="微软雅黑"/>
+              </a:rPr>
+              <a:t>预计待还金额</a:t>
+            </a:r>
+          </a:p>
+          <a:p>
+            <a:pPr algn="l"/>
+            <a:r>
+              <a:rPr sz="1500" b="1" lang="zh-CN">
+                <a:solidFill>
+                  <a:srgbClr val="1F4E79"/>
+                </a:solidFill>
+                <a:latin typeface="微软雅黑"/>
+                <a:ea typeface="微软雅黑"/>
+              </a:rPr>
+              <a:t>A$1,016</a:t>
+            </a:r>
+          </a:p>
+        </p:txBody>
+      </p:sp>
+      <p:sp>
+        <p:nvSpPr>
+          <p:cNvPr id="22" name="用户-k3"/>
+          <p:cNvSpPr txBox="1"/>
+          <p:nvPr/>
+        </p:nvSpPr>
+        <p:spPr>
+          <a:xfrm>
+            <a:off x="4261104" y="4645152"/>
+            <a:ext cx="1645920" cy="548640"/>
+          </a:xfrm>
+          <a:prstGeom prst="rect">
+            <a:avLst/>
+          </a:prstGeom>
+          <a:noFill/>
+        </p:spPr>
+        <p:txBody>
+          <a:bodyPr wrap="square" lIns="0" rIns="0" tIns="0" bIns="0">
+            <a:spAutoFit/>
+          </a:bodyPr>
+          <a:lstStyle/>
+          <a:p>
+            <a:pPr algn="l"/>
+            <a:r>
+              <a:rPr sz="800" b="0" lang="zh-CN">
+                <a:solidFill>
+                  <a:srgbClr val="606060"/>
+                </a:solidFill>
+                <a:latin typeface="微软雅黑"/>
+                <a:ea typeface="微软雅黑"/>
+              </a:rPr>
+              <a:t>贷款机构数量</a:t>
+            </a:r>
+          </a:p>
+          <a:p>
+            <a:pPr algn="l"/>
+            <a:r>
+              <a:rPr sz="1500" b="1" lang="zh-CN">
+                <a:solidFill>
+                  <a:srgbClr val="1F4E79"/>
+                </a:solidFill>
+                <a:latin typeface="微软雅黑"/>
+                <a:ea typeface="微软雅黑"/>
+              </a:rPr>
+              <a:t>2 家</a:t>
+            </a:r>
+          </a:p>
+        </p:txBody>
+      </p:sp>
+      <p:graphicFrame>
+        <p:nvGraphicFramePr>
+          <p:cNvPr id="23" name="用户-kv"/>
+          <p:cNvGraphicFramePr>
+            <a:graphicFrameLocks noGrp="1"/>
+          </p:cNvGraphicFramePr>
+          <p:nvPr/>
+        </p:nvGraphicFramePr>
+        <p:xfrm>
+          <a:off x="749808" y="5193792"/>
+          <a:ext cx="5010912" cy="960120"/>
+        </p:xfrm>
+        <a:graphic>
+          <a:graphicData uri="http://schemas.openxmlformats.org/drawingml/2006/table">
+            <a:tbl>
+              <a:tblPr firstRow="1" bandRow="1">
+                <a:tableStyleId>{5C22544A-7EE6-4342-B048-85BDC9FD1C3A}</a:tableStyleId>
+              </a:tblPr>
+              <a:tblGrid>
+                <a:gridCol w="1371600"/>
+                <a:gridCol w="3639312"/>
+              </a:tblGrid>
+              <a:tr h="137160">
+                <a:tc>
+                  <a:txBody>
+                    <a:bodyPr wrap="square"/>
+                    <a:lstStyle/>
+                    <a:p>
+                      <a:pPr algn="l"/>
+                      <a:r>
+                        <a:rPr sz="800" b="0" lang="zh-CN">
+                          <a:solidFill>
+                            <a:srgbClr val="3D3C3A"/>
+                          </a:solidFill>
+                          <a:latin typeface="微软雅黑"/>
+                          <a:ea typeface="微软雅黑"/>
+                        </a:rPr>
+                        <a:t>90 天借款金额</a:t>
+                      </a:r>
+                    </a:p>
+                  </a:txBody>
+                  <a:tcPr marL="18288" marR="18288" marT="4572" marB="4572" anchor="ctr">
+                    <a:lnL>
+                      <a:noFill/>
+                    </a:lnL>
+                    <a:lnR>
+                      <a:noFill/>
+                    </a:lnR>
+                    <a:lnB w="12700">
+                      <a:solidFill>
+                        <a:srgbClr val="D6D6D6"/>
+                      </a:solidFill>
+                    </a:lnB>
+                    <a:lnT>
+                      <a:noFill/>
+                    </a:lnT>
+                  </a:tcPr>
+                </a:tc>
+                <a:tc>
+                  <a:txBody>
+                    <a:bodyPr wrap="square"/>
+                    <a:lstStyle/>
+                    <a:p>
+                      <a:pPr algn="l"/>
+                      <a:r>
+                        <a:rPr sz="800" b="0" lang="zh-CN">
+                          <a:solidFill>
+                            <a:srgbClr val="3D3C3A"/>
+                          </a:solidFill>
+                          <a:latin typeface="微软雅黑"/>
+                          <a:ea typeface="微软雅黑"/>
+                        </a:rPr>
+                        <a:t>A$2,300</a:t>
+                      </a:r>
+                    </a:p>
+                  </a:txBody>
+                  <a:tcPr marL="18288" marR="18288" marT="4572" marB="4572" anchor="ctr">
+                    <a:lnL>
+                      <a:noFill/>
+                    </a:lnL>
+                    <a:lnR>
+                      <a:noFill/>
+                    </a:lnR>
+                    <a:lnB w="12700">
+                      <a:solidFill>
+                        <a:srgbClr val="D6D6D6"/>
+                      </a:solidFill>
+                    </a:lnB>
+                    <a:lnT>
+                      <a:noFill/>
+                    </a:lnT>
+                  </a:tcPr>
+                </a:tc>
+              </a:tr>
+              <a:tr h="137160">
+                <a:tc>
+                  <a:txBody>
+                    <a:bodyPr wrap="square"/>
+                    <a:lstStyle/>
+                    <a:p>
+                      <a:pPr algn="l"/>
+                      <a:r>
+                        <a:rPr sz="800" b="0" lang="zh-CN">
+                          <a:solidFill>
+                            <a:srgbClr val="3D3C3A"/>
+                          </a:solidFill>
+                          <a:latin typeface="微软雅黑"/>
+                          <a:ea typeface="微软雅黑"/>
+                        </a:rPr>
+                        <a:t>90 天还款金额</a:t>
+                      </a:r>
+                    </a:p>
+                  </a:txBody>
+                  <a:tcPr marL="18288" marR="18288" marT="4572" marB="4572" anchor="ctr">
+                    <a:lnL>
+                      <a:noFill/>
+                    </a:lnL>
+                    <a:lnR>
+                      <a:noFill/>
+                    </a:lnR>
+                    <a:lnB w="12700">
+                      <a:solidFill>
+                        <a:srgbClr val="D6D6D6"/>
+                      </a:solidFill>
+                    </a:lnB>
+                    <a:lnT>
+                      <a:noFill/>
+                    </a:lnT>
+                  </a:tcPr>
+                </a:tc>
+                <a:tc>
+                  <a:txBody>
+                    <a:bodyPr wrap="square"/>
+                    <a:lstStyle/>
+                    <a:p>
+                      <a:pPr algn="l"/>
+                      <a:r>
+                        <a:rPr sz="800" b="0" lang="zh-CN">
+                          <a:solidFill>
+                            <a:srgbClr val="3D3C3A"/>
+                          </a:solidFill>
+                          <a:latin typeface="微软雅黑"/>
+                          <a:ea typeface="微软雅黑"/>
+                        </a:rPr>
+                        <a:t>A$1,284</a:t>
+                      </a:r>
+                    </a:p>
+                  </a:txBody>
+                  <a:tcPr marL="18288" marR="18288" marT="4572" marB="4572" anchor="ctr">
+                    <a:lnL>
+                      <a:noFill/>
+                    </a:lnL>
+                    <a:lnR>
+                      <a:noFill/>
+                    </a:lnR>
+                    <a:lnB w="12700">
+                      <a:solidFill>
+                        <a:srgbClr val="D6D6D6"/>
+                      </a:solidFill>
+                    </a:lnB>
+                    <a:lnT>
+                      <a:noFill/>
+                    </a:lnT>
+                  </a:tcPr>
+                </a:tc>
+              </a:tr>
+              <a:tr h="137160">
+                <a:tc>
+                  <a:txBody>
+                    <a:bodyPr wrap="square"/>
+                    <a:lstStyle/>
+                    <a:p>
+                      <a:pPr algn="l"/>
+                      <a:r>
+                        <a:rPr sz="800" b="0" lang="zh-CN">
+                          <a:solidFill>
+                            <a:srgbClr val="3D3C3A"/>
+                          </a:solidFill>
+                          <a:latin typeface="微软雅黑"/>
+                          <a:ea typeface="微软雅黑"/>
+                        </a:rPr>
+                        <a:t>还款次数</a:t>
+                      </a:r>
+                    </a:p>
+                  </a:txBody>
+                  <a:tcPr marL="18288" marR="18288" marT="4572" marB="4572" anchor="ctr">
+                    <a:lnL>
+                      <a:noFill/>
+                    </a:lnL>
+                    <a:lnR>
+                      <a:noFill/>
+                    </a:lnR>
+                    <a:lnB w="12700">
+                      <a:solidFill>
+                        <a:srgbClr val="D6D6D6"/>
+                      </a:solidFill>
+                    </a:lnB>
+                    <a:lnT>
+                      <a:noFill/>
+                    </a:lnT>
+                  </a:tcPr>
+                </a:tc>
+                <a:tc>
+                  <a:txBody>
+                    <a:bodyPr wrap="square"/>
+                    <a:lstStyle/>
+                    <a:p>
+                      <a:pPr algn="l"/>
+                      <a:r>
+                        <a:rPr sz="800" b="0" lang="zh-CN">
+                          <a:solidFill>
+                            <a:srgbClr val="3D3C3A"/>
+                          </a:solidFill>
+                          <a:latin typeface="微软雅黑"/>
+                          <a:ea typeface="微软雅黑"/>
+                        </a:rPr>
+                        <a:t>9 次</a:t>
+                      </a:r>
+                    </a:p>
+                  </a:txBody>
+                  <a:tcPr marL="18288" marR="18288" marT="4572" marB="4572" anchor="ctr">
+                    <a:lnL>
+                      <a:noFill/>
+                    </a:lnL>
+                    <a:lnR>
+                      <a:noFill/>
+                    </a:lnR>
+                    <a:lnB w="12700">
+                      <a:solidFill>
+                        <a:srgbClr val="D6D6D6"/>
+                      </a:solidFill>
+                    </a:lnB>
+                    <a:lnT>
+                      <a:noFill/>
+                    </a:lnT>
+                  </a:tcPr>
+                </a:tc>
+              </a:tr>
+              <a:tr h="137160">
+                <a:tc>
+                  <a:txBody>
+                    <a:bodyPr wrap="square"/>
+                    <a:lstStyle/>
+                    <a:p>
+                      <a:pPr algn="l"/>
+                      <a:r>
+                        <a:rPr sz="800" b="0" lang="zh-CN">
+                          <a:solidFill>
+                            <a:srgbClr val="3D3C3A"/>
+                          </a:solidFill>
+                          <a:latin typeface="微软雅黑"/>
+                          <a:ea typeface="微软雅黑"/>
+                        </a:rPr>
+                        <a:t>是否存在 SACC 贷款</a:t>
+                      </a:r>
+                    </a:p>
+                  </a:txBody>
+                  <a:tcPr marL="18288" marR="18288" marT="4572" marB="4572" anchor="ctr">
+                    <a:lnL>
+                      <a:noFill/>
+                    </a:lnL>
+                    <a:lnR>
+                      <a:noFill/>
+                    </a:lnR>
+                    <a:lnB w="12700">
+                      <a:solidFill>
+                        <a:srgbClr val="D6D6D6"/>
+                      </a:solidFill>
+                    </a:lnB>
+                    <a:lnT>
+                      <a:noFill/>
+                    </a:lnT>
+                  </a:tcPr>
+                </a:tc>
+                <a:tc>
+                  <a:txBody>
+                    <a:bodyPr wrap="square"/>
+                    <a:lstStyle/>
+                    <a:p>
+                      <a:pPr algn="l"/>
+                      <a:r>
+                        <a:rPr sz="800" b="0" lang="zh-CN">
+                          <a:solidFill>
+                            <a:srgbClr val="3D3C3A"/>
+                          </a:solidFill>
+                          <a:latin typeface="微软雅黑"/>
+                          <a:ea typeface="微软雅黑"/>
+                        </a:rPr>
+                        <a:t>是</a:t>
+                      </a:r>
+                    </a:p>
+                  </a:txBody>
+                  <a:tcPr marL="18288" marR="18288" marT="4572" marB="4572" anchor="ctr">
+                    <a:lnL>
+                      <a:noFill/>
+                    </a:lnL>
+                    <a:lnR>
+                      <a:noFill/>
+                    </a:lnR>
+                    <a:lnB w="12700">
+                      <a:solidFill>
+                        <a:srgbClr val="D6D6D6"/>
+                      </a:solidFill>
+                    </a:lnB>
+                    <a:lnT>
+                      <a:noFill/>
+                    </a:lnT>
+                  </a:tcPr>
+                </a:tc>
+              </a:tr>
+              <a:tr h="137160">
+                <a:tc>
+                  <a:txBody>
+                    <a:bodyPr wrap="square"/>
+                    <a:lstStyle/>
+                    <a:p>
+                      <a:pPr algn="l"/>
+                      <a:r>
+                        <a:rPr sz="800" b="0" lang="zh-CN">
+                          <a:solidFill>
+                            <a:srgbClr val="3D3C3A"/>
+                          </a:solidFill>
+                          <a:latin typeface="微软雅黑"/>
+                          <a:ea typeface="微软雅黑"/>
+                        </a:rPr>
+                        <a:t>是否存在多头借贷</a:t>
+                      </a:r>
+                    </a:p>
+                  </a:txBody>
+                  <a:tcPr marL="18288" marR="18288" marT="4572" marB="4572" anchor="ctr">
+                    <a:lnL>
+                      <a:noFill/>
+                    </a:lnL>
+                    <a:lnR>
+                      <a:noFill/>
+                    </a:lnR>
+                    <a:lnB w="12700">
+                      <a:solidFill>
+                        <a:srgbClr val="D6D6D6"/>
+                      </a:solidFill>
+                    </a:lnB>
+                    <a:lnT>
+                      <a:noFill/>
+                    </a:lnT>
+                  </a:tcPr>
+                </a:tc>
+                <a:tc>
+                  <a:txBody>
+                    <a:bodyPr wrap="square"/>
+                    <a:lstStyle/>
+                    <a:p>
+                      <a:pPr algn="l"/>
+                      <a:r>
+                        <a:rPr sz="800" b="0" lang="zh-CN">
+                          <a:solidFill>
+                            <a:srgbClr val="3D3C3A"/>
+                          </a:solidFill>
+                          <a:latin typeface="微软雅黑"/>
+                          <a:ea typeface="微软雅黑"/>
+                        </a:rPr>
+                        <a:t>是</a:t>
+                      </a:r>
+                    </a:p>
+                  </a:txBody>
+                  <a:tcPr marL="18288" marR="18288" marT="4572" marB="4572" anchor="ctr">
+                    <a:lnL>
+                      <a:noFill/>
+                    </a:lnL>
+                    <a:lnR>
+                      <a:noFill/>
+                    </a:lnR>
+                    <a:lnB w="12700">
+                      <a:solidFill>
+                        <a:srgbClr val="D6D6D6"/>
+                      </a:solidFill>
+                    </a:lnB>
+                    <a:lnT>
+                      <a:noFill/>
+                    </a:lnT>
+                  </a:tcPr>
+                </a:tc>
+              </a:tr>
+              <a:tr h="137160">
+                <a:tc>
+                  <a:txBody>
+                    <a:bodyPr wrap="square"/>
+                    <a:lstStyle/>
+                    <a:p>
+                      <a:pPr algn="l"/>
+                      <a:r>
+                        <a:rPr sz="800" b="0" lang="zh-CN">
+                          <a:solidFill>
+                            <a:srgbClr val="3D3C3A"/>
+                          </a:solidFill>
+                          <a:latin typeface="微软雅黑"/>
+                          <a:ea typeface="微软雅黑"/>
+                        </a:rPr>
+                        <a:t>是否持续还款</a:t>
+                      </a:r>
+                    </a:p>
+                  </a:txBody>
+                  <a:tcPr marL="18288" marR="18288" marT="4572" marB="4572" anchor="ctr">
+                    <a:lnL>
+                      <a:noFill/>
+                    </a:lnL>
+                    <a:lnR>
+                      <a:noFill/>
+                    </a:lnR>
+                    <a:lnB w="12700">
+                      <a:solidFill>
+                        <a:srgbClr val="D6D6D6"/>
+                      </a:solidFill>
+                    </a:lnB>
+                    <a:lnT>
+                      <a:noFill/>
+                    </a:lnT>
+                  </a:tcPr>
+                </a:tc>
+                <a:tc>
+                  <a:txBody>
+                    <a:bodyPr wrap="square"/>
+                    <a:lstStyle/>
+                    <a:p>
+                      <a:pPr algn="l"/>
+                      <a:r>
+                        <a:rPr sz="800" b="0" lang="zh-CN">
+                          <a:solidFill>
+                            <a:srgbClr val="3D3C3A"/>
+                          </a:solidFill>
+                          <a:latin typeface="微软雅黑"/>
+                          <a:ea typeface="微软雅黑"/>
+                        </a:rPr>
+                        <a:t>是</a:t>
+                      </a:r>
+                    </a:p>
+                  </a:txBody>
+                  <a:tcPr marL="18288" marR="18288" marT="4572" marB="4572" anchor="ctr">
+                    <a:lnL>
+                      <a:noFill/>
+                    </a:lnL>
+                    <a:lnR>
+                      <a:noFill/>
+                    </a:lnR>
+                    <a:lnB w="12700">
+                      <a:solidFill>
+                        <a:srgbClr val="D6D6D6"/>
+                      </a:solidFill>
+                    </a:lnB>
+                    <a:lnT>
+                      <a:noFill/>
+                    </a:lnT>
+                  </a:tcPr>
+                </a:tc>
+              </a:tr>
+              <a:tr h="137160">
+                <a:tc>
+                  <a:txBody>
+                    <a:bodyPr wrap="square"/>
+                    <a:lstStyle/>
+                    <a:p>
+                      <a:pPr algn="l"/>
+                      <a:r>
+                        <a:rPr sz="800" b="0" lang="zh-CN">
+                          <a:solidFill>
+                            <a:srgbClr val="3D3C3A"/>
+                          </a:solidFill>
+                          <a:latin typeface="微软雅黑"/>
+                          <a:ea typeface="微软雅黑"/>
+                        </a:rPr>
+                        <a:t>是否出现还款中断</a:t>
+                      </a:r>
+                    </a:p>
+                  </a:txBody>
+                  <a:tcPr marL="18288" marR="18288" marT="4572" marB="4572" anchor="ctr">
+                    <a:lnL>
+                      <a:noFill/>
+                    </a:lnL>
+                    <a:lnR>
+                      <a:noFill/>
+                    </a:lnR>
+                    <a:lnB w="12700">
+                      <a:solidFill>
+                        <a:srgbClr val="D6D6D6"/>
+                      </a:solidFill>
+                    </a:lnB>
+                    <a:lnT>
+                      <a:noFill/>
+                    </a:lnT>
+                  </a:tcPr>
+                </a:tc>
+                <a:tc>
+                  <a:txBody>
+                    <a:bodyPr wrap="square"/>
+                    <a:lstStyle/>
+                    <a:p>
+                      <a:pPr algn="l"/>
+                      <a:r>
+                        <a:rPr sz="800" b="0" lang="zh-CN">
+                          <a:solidFill>
+                            <a:srgbClr val="3D3C3A"/>
+                          </a:solidFill>
+                          <a:latin typeface="微软雅黑"/>
+                          <a:ea typeface="微软雅黑"/>
+                        </a:rPr>
+                        <a:t>否</a:t>
+                      </a:r>
+                    </a:p>
+                  </a:txBody>
+                  <a:tcPr marL="18288" marR="18288" marT="4572" marB="4572" anchor="ctr">
+                    <a:lnL>
+                      <a:noFill/>
+                    </a:lnL>
+                    <a:lnR>
+                      <a:noFill/>
+                    </a:lnR>
+                    <a:lnB w="12700">
+                      <a:solidFill>
+                        <a:srgbClr val="D6D6D6"/>
+                      </a:solidFill>
+                    </a:lnB>
+                    <a:lnT>
+                      <a:noFill/>
+                    </a:lnT>
+                  </a:tcPr>
+                </a:tc>
+              </a:tr>
+            </a:tbl>
+          </a:graphicData>
+        </a:graphic>
+      </p:graphicFrame>
+      <p:sp>
+        <p:nvSpPr>
+          <p:cNvPr id="24" name="Fa-bg"/>
+          <p:cNvSpPr/>
+          <p:nvPr/>
+        </p:nvSpPr>
+        <p:spPr>
+          <a:xfrm>
+            <a:off x="6217920" y="4297680"/>
+            <a:ext cx="5376672" cy="1956816"/>
+          </a:xfrm>
+          <a:prstGeom prst="rect">
+            <a:avLst/>
+          </a:prstGeom>
+          <a:solidFill>
+            <a:srgbClr val="E3EBF4"/>
+          </a:solidFill>
+          <a:ln>
+            <a:noFill/>
+          </a:ln>
+          <a:effectLst/>
+        </p:spPr>
+        <p:style>
+          <a:lnRef idx="1">
+            <a:schemeClr val="accent1"/>
+          </a:lnRef>
+          <a:fillRef idx="3">
+            <a:schemeClr val="accent1"/>
+          </a:fillRef>
+          <a:effectRef idx="2">
+            <a:schemeClr val="accent1"/>
+          </a:effectRef>
+          <a:fontRef idx="minor">
+            <a:schemeClr val="lt1"/>
+          </a:fontRef>
+        </p:style>
+        <p:txBody>
+          <a:bodyPr rtlCol="0" anchor="ctr"/>
+          <a:lstStyle/>
+          <a:p>
+            <a:pPr algn="ctr"/>
+          </a:p>
+        </p:txBody>
+      </p:sp>
+      <p:sp>
+        <p:nvSpPr>
+          <p:cNvPr id="25" name="Fa-bar"/>
+          <p:cNvSpPr/>
+          <p:nvPr/>
+        </p:nvSpPr>
+        <p:spPr>
+          <a:xfrm>
+            <a:off x="6217920" y="4297680"/>
+            <a:ext cx="5376672" cy="54864"/>
+          </a:xfrm>
+          <a:prstGeom prst="rect">
+            <a:avLst/>
+          </a:prstGeom>
+          <a:solidFill>
+            <a:srgbClr val="1F4E79"/>
+          </a:solidFill>
+          <a:ln>
+            <a:noFill/>
+          </a:ln>
+          <a:effectLst/>
+        </p:spPr>
+        <p:style>
+          <a:lnRef idx="1">
+            <a:schemeClr val="accent1"/>
+          </a:lnRef>
+          <a:fillRef idx="3">
+            <a:schemeClr val="accent1"/>
+          </a:fillRef>
+          <a:effectRef idx="2">
+            <a:schemeClr val="accent1"/>
+          </a:effectRef>
+          <a:fontRef idx="minor">
+            <a:schemeClr val="lt1"/>
+          </a:fontRef>
+        </p:style>
+        <p:txBody>
+          <a:bodyPr rtlCol="0" anchor="ctr"/>
+          <a:lstStyle/>
+          <a:p>
+            <a:pPr algn="ctr"/>
+          </a:p>
+        </p:txBody>
+      </p:sp>
+      <p:sp>
+        <p:nvSpPr>
+          <p:cNvPr id="26" name="Fa-title"/>
+          <p:cNvSpPr txBox="1"/>
+          <p:nvPr/>
+        </p:nvSpPr>
+        <p:spPr>
+          <a:xfrm>
+            <a:off x="6400800" y="4398264"/>
+            <a:ext cx="5010912" cy="201168"/>
+          </a:xfrm>
+          <a:prstGeom prst="rect">
+            <a:avLst/>
+          </a:prstGeom>
+          <a:noFill/>
+        </p:spPr>
+        <p:txBody>
+          <a:bodyPr wrap="square" lIns="0" rIns="0" tIns="0" bIns="0">
+            <a:spAutoFit/>
+          </a:bodyPr>
+          <a:lstStyle/>
+          <a:p>
+            <a:pPr algn="l"/>
+            <a:r>
+              <a:rPr sz="1050" b="1" lang="zh-CN">
+                <a:solidFill>
+                  <a:srgbClr val="0A0A0A"/>
+                </a:solidFill>
+                <a:latin typeface="微软雅黑"/>
+                <a:ea typeface="微软雅黑"/>
+              </a:rPr>
+              <a:t>Fair Go Finance 单笔贷款画像</a:t>
+            </a:r>
+          </a:p>
+        </p:txBody>
+      </p:sp>
+      <p:sp>
+        <p:nvSpPr>
+          <p:cNvPr id="27" name="Fa-k1"/>
+          <p:cNvSpPr txBox="1"/>
+          <p:nvPr/>
+        </p:nvSpPr>
+        <p:spPr>
+          <a:xfrm>
+            <a:off x="6400800" y="4645152"/>
+            <a:ext cx="1645920" cy="548640"/>
+          </a:xfrm>
+          <a:prstGeom prst="rect">
+            <a:avLst/>
+          </a:prstGeom>
+          <a:noFill/>
+        </p:spPr>
+        <p:txBody>
+          <a:bodyPr wrap="square" lIns="0" rIns="0" tIns="0" bIns="0">
+            <a:spAutoFit/>
+          </a:bodyPr>
+          <a:lstStyle/>
+          <a:p>
+            <a:pPr algn="l"/>
+            <a:r>
+              <a:rPr sz="800" b="0" lang="zh-CN">
+                <a:solidFill>
+                  <a:srgbClr val="606060"/>
+                </a:solidFill>
+                <a:latin typeface="微软雅黑"/>
+                <a:ea typeface="微软雅黑"/>
+              </a:rPr>
+              <a:t>借款金额</a:t>
+            </a:r>
+          </a:p>
+          <a:p>
+            <a:pPr algn="l"/>
+            <a:r>
+              <a:rPr sz="1500" b="1" lang="zh-CN">
+                <a:solidFill>
+                  <a:srgbClr val="1F4E79"/>
+                </a:solidFill>
+                <a:latin typeface="微软雅黑"/>
+                <a:ea typeface="微软雅黑"/>
+              </a:rPr>
+              <a:t>A$1,500</a:t>
+            </a:r>
+          </a:p>
+        </p:txBody>
+      </p:sp>
+      <p:sp>
+        <p:nvSpPr>
+          <p:cNvPr id="28" name="Fa-k2"/>
+          <p:cNvSpPr txBox="1"/>
+          <p:nvPr/>
+        </p:nvSpPr>
+        <p:spPr>
+          <a:xfrm>
+            <a:off x="8156448" y="4645152"/>
+            <a:ext cx="1645920" cy="548640"/>
+          </a:xfrm>
+          <a:prstGeom prst="rect">
+            <a:avLst/>
+          </a:prstGeom>
+          <a:noFill/>
+        </p:spPr>
+        <p:txBody>
+          <a:bodyPr wrap="square" lIns="0" rIns="0" tIns="0" bIns="0">
+            <a:spAutoFit/>
+          </a:bodyPr>
+          <a:lstStyle/>
+          <a:p>
+            <a:pPr algn="l"/>
+            <a:r>
+              <a:rPr sz="800" b="0" lang="zh-CN">
+                <a:solidFill>
+                  <a:srgbClr val="606060"/>
+                </a:solidFill>
+                <a:latin typeface="微软雅黑"/>
+                <a:ea typeface="微软雅黑"/>
+              </a:rPr>
+              <a:t>月还款金额</a:t>
+            </a:r>
+          </a:p>
+          <a:p>
+            <a:pPr algn="l"/>
+            <a:r>
+              <a:rPr sz="1500" b="1" lang="zh-CN">
+                <a:solidFill>
+                  <a:srgbClr val="1F4E79"/>
+                </a:solidFill>
+                <a:latin typeface="微软雅黑"/>
+                <a:ea typeface="微软雅黑"/>
+              </a:rPr>
+              <a:t>约 A$338</a:t>
+            </a:r>
+          </a:p>
+          <a:p>
+            <a:pPr algn="l"/>
+            <a:r>
+              <a:rPr sz="750" b="0" lang="zh-CN">
+                <a:solidFill>
+                  <a:srgbClr val="606060"/>
+                </a:solidFill>
+                <a:latin typeface="微软雅黑"/>
+                <a:ea typeface="微软雅黑"/>
+              </a:rPr>
+              <a:t>A$156 × 26/12</a:t>
+            </a:r>
+          </a:p>
+        </p:txBody>
+      </p:sp>
+      <p:sp>
+        <p:nvSpPr>
+          <p:cNvPr id="29" name="Fa-k3"/>
+          <p:cNvSpPr txBox="1"/>
+          <p:nvPr/>
+        </p:nvSpPr>
+        <p:spPr>
+          <a:xfrm>
+            <a:off x="9912096" y="4645152"/>
+            <a:ext cx="1645920" cy="548640"/>
+          </a:xfrm>
+          <a:prstGeom prst="rect">
+            <a:avLst/>
+          </a:prstGeom>
+          <a:noFill/>
+        </p:spPr>
+        <p:txBody>
+          <a:bodyPr wrap="square" lIns="0" rIns="0" tIns="0" bIns="0">
+            <a:spAutoFit/>
+          </a:bodyPr>
+          <a:lstStyle/>
+          <a:p>
+            <a:pPr algn="l"/>
+            <a:r>
+              <a:rPr sz="800" b="0" lang="zh-CN">
+                <a:solidFill>
+                  <a:srgbClr val="606060"/>
+                </a:solidFill>
+                <a:latin typeface="微软雅黑"/>
+                <a:ea typeface="微软雅黑"/>
+              </a:rPr>
+              <a:t>预计待还金额</a:t>
+            </a:r>
+          </a:p>
+          <a:p>
+            <a:pPr algn="l"/>
+            <a:r>
+              <a:rPr sz="1500" b="1" lang="zh-CN">
+                <a:solidFill>
+                  <a:srgbClr val="1F4E79"/>
+                </a:solidFill>
+                <a:latin typeface="微软雅黑"/>
+                <a:ea typeface="微软雅黑"/>
+              </a:rPr>
+              <a:t>A$564</a:t>
+            </a:r>
+          </a:p>
+        </p:txBody>
+      </p:sp>
+      <p:graphicFrame>
+        <p:nvGraphicFramePr>
+          <p:cNvPr id="30" name="Fa-kv"/>
+          <p:cNvGraphicFramePr>
+            <a:graphicFrameLocks noGrp="1"/>
+          </p:cNvGraphicFramePr>
+          <p:nvPr/>
+        </p:nvGraphicFramePr>
+        <p:xfrm>
+          <a:off x="6400800" y="5193792"/>
+          <a:ext cx="5010912" cy="960120"/>
+        </p:xfrm>
+        <a:graphic>
+          <a:graphicData uri="http://schemas.openxmlformats.org/drawingml/2006/table">
+            <a:tbl>
+              <a:tblPr firstRow="1" bandRow="1">
+                <a:tableStyleId>{5C22544A-7EE6-4342-B048-85BDC9FD1C3A}</a:tableStyleId>
+              </a:tblPr>
+              <a:tblGrid>
+                <a:gridCol w="1371600"/>
+                <a:gridCol w="3639312"/>
+              </a:tblGrid>
+              <a:tr h="137160">
+                <a:tc>
+                  <a:txBody>
+                    <a:bodyPr wrap="square"/>
+                    <a:lstStyle/>
+                    <a:p>
+                      <a:pPr algn="l"/>
+                      <a:r>
+                        <a:rPr sz="800" b="0" lang="zh-CN">
+                          <a:solidFill>
+                            <a:srgbClr val="3D3C3A"/>
+                          </a:solidFill>
+                          <a:latin typeface="微软雅黑"/>
+                          <a:ea typeface="微软雅黑"/>
+                        </a:rPr>
+                        <a:t>贷款类型</a:t>
+                      </a:r>
+                    </a:p>
+                  </a:txBody>
+                  <a:tcPr marL="18288" marR="18288" marT="4572" marB="4572" anchor="ctr">
+                    <a:lnL>
+                      <a:noFill/>
+                    </a:lnL>
+                    <a:lnR>
+                      <a:noFill/>
+                    </a:lnR>
+                    <a:lnB w="12700">
+                      <a:solidFill>
+                        <a:srgbClr val="D6D6D6"/>
+                      </a:solidFill>
+                    </a:lnB>
+                    <a:lnT>
+                      <a:noFill/>
+                    </a:lnT>
+                  </a:tcPr>
+                </a:tc>
+                <a:tc>
+                  <a:txBody>
+                    <a:bodyPr wrap="square"/>
+                    <a:lstStyle/>
+                    <a:p>
+                      <a:pPr algn="l"/>
+                      <a:r>
+                        <a:rPr sz="800" b="0" lang="zh-CN">
+                          <a:solidFill>
+                            <a:srgbClr val="3D3C3A"/>
+                          </a:solidFill>
+                          <a:latin typeface="微软雅黑"/>
+                          <a:ea typeface="微软雅黑"/>
+                        </a:rPr>
+                        <a:t>SACC</a:t>
+                      </a:r>
+                    </a:p>
+                  </a:txBody>
+                  <a:tcPr marL="18288" marR="18288" marT="4572" marB="4572" anchor="ctr">
+                    <a:lnL>
+                      <a:noFill/>
+                    </a:lnL>
+                    <a:lnR>
+                      <a:noFill/>
+                    </a:lnR>
+                    <a:lnB w="12700">
+                      <a:solidFill>
+                        <a:srgbClr val="D6D6D6"/>
+                      </a:solidFill>
+                    </a:lnB>
+                    <a:lnT>
+                      <a:noFill/>
+                    </a:lnT>
+                  </a:tcPr>
+                </a:tc>
+              </a:tr>
+              <a:tr h="137160">
+                <a:tc>
+                  <a:txBody>
+                    <a:bodyPr wrap="square"/>
+                    <a:lstStyle/>
+                    <a:p>
+                      <a:pPr algn="l"/>
+                      <a:r>
+                        <a:rPr sz="800" b="0" lang="zh-CN">
+                          <a:solidFill>
+                            <a:srgbClr val="3D3C3A"/>
+                          </a:solidFill>
+                          <a:latin typeface="微软雅黑"/>
+                          <a:ea typeface="微软雅黑"/>
+                        </a:rPr>
+                        <a:t>90 天已还金额</a:t>
+                      </a:r>
+                    </a:p>
+                  </a:txBody>
+                  <a:tcPr marL="18288" marR="18288" marT="4572" marB="4572" anchor="ctr">
+                    <a:lnL>
+                      <a:noFill/>
+                    </a:lnL>
+                    <a:lnR>
+                      <a:noFill/>
+                    </a:lnR>
+                    <a:lnB w="12700">
+                      <a:solidFill>
+                        <a:srgbClr val="D6D6D6"/>
+                      </a:solidFill>
+                    </a:lnB>
+                    <a:lnT>
+                      <a:noFill/>
+                    </a:lnT>
+                  </a:tcPr>
+                </a:tc>
+                <a:tc>
+                  <a:txBody>
+                    <a:bodyPr wrap="square"/>
+                    <a:lstStyle/>
+                    <a:p>
+                      <a:pPr algn="l"/>
+                      <a:r>
+                        <a:rPr sz="800" b="0" lang="zh-CN">
+                          <a:solidFill>
+                            <a:srgbClr val="3D3C3A"/>
+                          </a:solidFill>
+                          <a:latin typeface="微软雅黑"/>
+                          <a:ea typeface="微软雅黑"/>
+                        </a:rPr>
+                        <a:t>A$936</a:t>
+                      </a:r>
+                    </a:p>
+                  </a:txBody>
+                  <a:tcPr marL="18288" marR="18288" marT="4572" marB="4572" anchor="ctr">
+                    <a:lnL>
+                      <a:noFill/>
+                    </a:lnL>
+                    <a:lnR>
+                      <a:noFill/>
+                    </a:lnR>
+                    <a:lnB w="12700">
+                      <a:solidFill>
+                        <a:srgbClr val="D6D6D6"/>
+                      </a:solidFill>
+                    </a:lnB>
+                    <a:lnT>
+                      <a:noFill/>
+                    </a:lnT>
+                  </a:tcPr>
+                </a:tc>
+              </a:tr>
+              <a:tr h="137160">
+                <a:tc>
+                  <a:txBody>
+                    <a:bodyPr wrap="square"/>
+                    <a:lstStyle/>
+                    <a:p>
+                      <a:pPr algn="l"/>
+                      <a:r>
+                        <a:rPr sz="800" b="0" lang="zh-CN">
+                          <a:solidFill>
+                            <a:srgbClr val="3D3C3A"/>
+                          </a:solidFill>
+                          <a:latin typeface="微软雅黑"/>
+                          <a:ea typeface="微软雅黑"/>
+                        </a:rPr>
+                        <a:t>还款频率</a:t>
+                      </a:r>
+                    </a:p>
+                  </a:txBody>
+                  <a:tcPr marL="18288" marR="18288" marT="4572" marB="4572" anchor="ctr">
+                    <a:lnL>
+                      <a:noFill/>
+                    </a:lnL>
+                    <a:lnR>
+                      <a:noFill/>
+                    </a:lnR>
+                    <a:lnB w="12700">
+                      <a:solidFill>
+                        <a:srgbClr val="D6D6D6"/>
+                      </a:solidFill>
+                    </a:lnB>
+                    <a:lnT>
+                      <a:noFill/>
+                    </a:lnT>
+                  </a:tcPr>
+                </a:tc>
+                <a:tc>
+                  <a:txBody>
+                    <a:bodyPr wrap="square"/>
+                    <a:lstStyle/>
+                    <a:p>
+                      <a:pPr algn="l"/>
+                      <a:r>
+                        <a:rPr sz="800" b="0" lang="zh-CN">
+                          <a:solidFill>
+                            <a:srgbClr val="3D3C3A"/>
+                          </a:solidFill>
+                          <a:latin typeface="微软雅黑"/>
+                          <a:ea typeface="微软雅黑"/>
+                        </a:rPr>
+                        <a:t>每两周 A$156</a:t>
+                      </a:r>
+                    </a:p>
+                  </a:txBody>
+                  <a:tcPr marL="18288" marR="18288" marT="4572" marB="4572" anchor="ctr">
+                    <a:lnL>
+                      <a:noFill/>
+                    </a:lnL>
+                    <a:lnR>
+                      <a:noFill/>
+                    </a:lnR>
+                    <a:lnB w="12700">
+                      <a:solidFill>
+                        <a:srgbClr val="D6D6D6"/>
+                      </a:solidFill>
+                    </a:lnB>
+                    <a:lnT>
+                      <a:noFill/>
+                    </a:lnT>
+                  </a:tcPr>
+                </a:tc>
+              </a:tr>
+              <a:tr h="137160">
+                <a:tc>
+                  <a:txBody>
+                    <a:bodyPr wrap="square"/>
+                    <a:lstStyle/>
+                    <a:p>
+                      <a:pPr algn="l"/>
+                      <a:r>
+                        <a:rPr sz="800" b="0" lang="zh-CN">
+                          <a:solidFill>
+                            <a:srgbClr val="3D3C3A"/>
+                          </a:solidFill>
+                          <a:latin typeface="微软雅黑"/>
+                          <a:ea typeface="微软雅黑"/>
+                        </a:rPr>
+                        <a:t>90 天还款次数</a:t>
+                      </a:r>
+                    </a:p>
+                  </a:txBody>
+                  <a:tcPr marL="18288" marR="18288" marT="4572" marB="4572" anchor="ctr">
+                    <a:lnL>
+                      <a:noFill/>
+                    </a:lnL>
+                    <a:lnR>
+                      <a:noFill/>
+                    </a:lnR>
+                    <a:lnB w="12700">
+                      <a:solidFill>
+                        <a:srgbClr val="D6D6D6"/>
+                      </a:solidFill>
+                    </a:lnB>
+                    <a:lnT>
+                      <a:noFill/>
+                    </a:lnT>
+                  </a:tcPr>
+                </a:tc>
+                <a:tc>
+                  <a:txBody>
+                    <a:bodyPr wrap="square"/>
+                    <a:lstStyle/>
+                    <a:p>
+                      <a:pPr algn="l"/>
+                      <a:r>
+                        <a:rPr sz="800" b="0" lang="zh-CN">
+                          <a:solidFill>
+                            <a:srgbClr val="3D3C3A"/>
+                          </a:solidFill>
+                          <a:latin typeface="微软雅黑"/>
+                          <a:ea typeface="微软雅黑"/>
+                        </a:rPr>
+                        <a:t>6 次</a:t>
+                      </a:r>
+                    </a:p>
+                  </a:txBody>
+                  <a:tcPr marL="18288" marR="18288" marT="4572" marB="4572" anchor="ctr">
+                    <a:lnL>
+                      <a:noFill/>
+                    </a:lnL>
+                    <a:lnR>
+                      <a:noFill/>
+                    </a:lnR>
+                    <a:lnB w="12700">
+                      <a:solidFill>
+                        <a:srgbClr val="D6D6D6"/>
+                      </a:solidFill>
+                    </a:lnB>
+                    <a:lnT>
+                      <a:noFill/>
+                    </a:lnT>
+                  </a:tcPr>
+                </a:tc>
+              </a:tr>
+              <a:tr h="137160">
+                <a:tc>
+                  <a:txBody>
+                    <a:bodyPr wrap="square"/>
+                    <a:lstStyle/>
+                    <a:p>
+                      <a:pPr algn="l"/>
+                      <a:r>
+                        <a:rPr sz="800" b="0" lang="zh-CN">
+                          <a:solidFill>
+                            <a:srgbClr val="3D3C3A"/>
+                          </a:solidFill>
+                          <a:latin typeface="微软雅黑"/>
+                          <a:ea typeface="微软雅黑"/>
+                        </a:rPr>
+                        <a:t>当前状态</a:t>
+                      </a:r>
+                    </a:p>
+                  </a:txBody>
+                  <a:tcPr marL="18288" marR="18288" marT="4572" marB="4572" anchor="ctr">
+                    <a:lnL>
+                      <a:noFill/>
+                    </a:lnL>
+                    <a:lnR>
+                      <a:noFill/>
+                    </a:lnR>
+                    <a:lnB w="12700">
+                      <a:solidFill>
+                        <a:srgbClr val="D6D6D6"/>
+                      </a:solidFill>
+                    </a:lnB>
+                    <a:lnT>
+                      <a:noFill/>
+                    </a:lnT>
+                  </a:tcPr>
+                </a:tc>
+                <a:tc>
+                  <a:txBody>
+                    <a:bodyPr wrap="square"/>
+                    <a:lstStyle/>
+                    <a:p>
+                      <a:pPr algn="l"/>
+                      <a:r>
+                        <a:rPr sz="800" b="0" lang="zh-CN">
+                          <a:solidFill>
+                            <a:srgbClr val="3D3C3A"/>
+                          </a:solidFill>
+                          <a:latin typeface="微软雅黑"/>
+                          <a:ea typeface="微软雅黑"/>
+                        </a:rPr>
+                        <a:t>在贷</a:t>
+                      </a:r>
+                    </a:p>
+                  </a:txBody>
+                  <a:tcPr marL="18288" marR="18288" marT="4572" marB="4572" anchor="ctr">
+                    <a:lnL>
+                      <a:noFill/>
+                    </a:lnL>
+                    <a:lnR>
+                      <a:noFill/>
+                    </a:lnR>
+                    <a:lnB w="12700">
+                      <a:solidFill>
+                        <a:srgbClr val="D6D6D6"/>
+                      </a:solidFill>
+                    </a:lnB>
+                    <a:lnT>
+                      <a:noFill/>
+                    </a:lnT>
+                  </a:tcPr>
+                </a:tc>
+              </a:tr>
+              <a:tr h="137160">
+                <a:tc>
+                  <a:txBody>
+                    <a:bodyPr wrap="square"/>
+                    <a:lstStyle/>
+                    <a:p>
+                      <a:pPr algn="l"/>
+                      <a:r>
+                        <a:rPr sz="800" b="0" lang="zh-CN">
+                          <a:solidFill>
+                            <a:srgbClr val="3D3C3A"/>
+                          </a:solidFill>
+                          <a:latin typeface="微软雅黑"/>
+                          <a:ea typeface="微软雅黑"/>
+                        </a:rPr>
+                        <a:t>扣款失败</a:t>
+                      </a:r>
+                    </a:p>
+                  </a:txBody>
+                  <a:tcPr marL="18288" marR="18288" marT="4572" marB="4572" anchor="ctr">
+                    <a:lnL>
+                      <a:noFill/>
+                    </a:lnL>
+                    <a:lnR>
+                      <a:noFill/>
+                    </a:lnR>
+                    <a:lnB w="12700">
+                      <a:solidFill>
+                        <a:srgbClr val="D6D6D6"/>
+                      </a:solidFill>
+                    </a:lnB>
+                    <a:lnT>
+                      <a:noFill/>
+                    </a:lnT>
+                  </a:tcPr>
+                </a:tc>
+                <a:tc>
+                  <a:txBody>
+                    <a:bodyPr wrap="square"/>
+                    <a:lstStyle/>
+                    <a:p>
+                      <a:pPr algn="l"/>
+                      <a:r>
+                        <a:rPr sz="800" b="0" lang="zh-CN">
+                          <a:solidFill>
+                            <a:srgbClr val="3D3C3A"/>
+                          </a:solidFill>
+                          <a:latin typeface="微软雅黑"/>
+                          <a:ea typeface="微软雅黑"/>
+                        </a:rPr>
+                        <a:t>否</a:t>
+                      </a:r>
+                    </a:p>
+                  </a:txBody>
+                  <a:tcPr marL="18288" marR="18288" marT="4572" marB="4572" anchor="ctr">
+                    <a:lnL>
+                      <a:noFill/>
+                    </a:lnL>
+                    <a:lnR>
+                      <a:noFill/>
+                    </a:lnR>
+                    <a:lnB w="12700">
+                      <a:solidFill>
+                        <a:srgbClr val="D6D6D6"/>
+                      </a:solidFill>
+                    </a:lnB>
+                    <a:lnT>
+                      <a:noFill/>
+                    </a:lnT>
+                  </a:tcPr>
+                </a:tc>
+              </a:tr>
+              <a:tr h="137160">
+                <a:tc>
+                  <a:txBody>
+                    <a:bodyPr wrap="square"/>
+                    <a:lstStyle/>
+                    <a:p>
+                      <a:pPr algn="l"/>
+                      <a:r>
+                        <a:rPr sz="800" b="0" lang="zh-CN">
+                          <a:solidFill>
+                            <a:srgbClr val="3D3C3A"/>
+                          </a:solidFill>
+                          <a:latin typeface="微软雅黑"/>
+                          <a:ea typeface="微软雅黑"/>
+                        </a:rPr>
+                        <a:t>年化利率（APR）</a:t>
+                      </a:r>
+                    </a:p>
+                  </a:txBody>
+                  <a:tcPr marL="18288" marR="18288" marT="4572" marB="4572" anchor="ctr">
+                    <a:lnL>
+                      <a:noFill/>
+                    </a:lnL>
+                    <a:lnR>
+                      <a:noFill/>
+                    </a:lnR>
+                    <a:lnB w="12700">
+                      <a:solidFill>
+                        <a:srgbClr val="D6D6D6"/>
+                      </a:solidFill>
+                    </a:lnB>
+                    <a:lnT>
+                      <a:noFill/>
+                    </a:lnT>
+                  </a:tcPr>
+                </a:tc>
+                <a:tc>
+                  <a:txBody>
+                    <a:bodyPr wrap="square"/>
+                    <a:lstStyle/>
+                    <a:p>
+                      <a:pPr algn="l"/>
+                      <a:r>
+                        <a:rPr sz="800" b="0" lang="zh-CN">
+                          <a:solidFill>
+                            <a:srgbClr val="3D3C3A"/>
+                          </a:solidFill>
+                          <a:latin typeface="微软雅黑"/>
+                          <a:ea typeface="微软雅黑"/>
+                        </a:rPr>
+                        <a:t>【待补充】</a:t>
+                      </a:r>
+                    </a:p>
+                  </a:txBody>
+                  <a:tcPr marL="18288" marR="18288" marT="4572" marB="4572" anchor="ctr">
+                    <a:lnL>
+                      <a:noFill/>
+                    </a:lnL>
+                    <a:lnR>
+                      <a:noFill/>
+                    </a:lnR>
+                    <a:lnB w="12700">
+                      <a:solidFill>
+                        <a:srgbClr val="D6D6D6"/>
+                      </a:solidFill>
+                    </a:lnB>
+                    <a:lnT>
+                      <a:noFill/>
+                    </a:lnT>
+                  </a:tcPr>
+                </a:tc>
+              </a:tr>
+            </a:tbl>
+          </a:graphicData>
+        </a:graphic>
+      </p:graphicFrame>
+      <p:sp>
+        <p:nvSpPr>
+          <p:cNvPr id="31" name="concl-bar"/>
+          <p:cNvSpPr/>
+          <p:nvPr/>
+        </p:nvSpPr>
+        <p:spPr>
+          <a:xfrm>
+            <a:off x="566928" y="6327648"/>
+            <a:ext cx="11045952" cy="402336"/>
+          </a:xfrm>
+          <a:prstGeom prst="rect">
+            <a:avLst/>
+          </a:prstGeom>
+          <a:solidFill>
+            <a:srgbClr val="FAF3E0"/>
+          </a:solidFill>
+          <a:ln>
+            <a:noFill/>
+          </a:ln>
+          <a:effectLst/>
+        </p:spPr>
+        <p:style>
+          <a:lnRef idx="1">
+            <a:schemeClr val="accent1"/>
+          </a:lnRef>
+          <a:fillRef idx="3">
+            <a:schemeClr val="accent1"/>
+          </a:fillRef>
+          <a:effectRef idx="2">
+            <a:schemeClr val="accent1"/>
+          </a:effectRef>
+          <a:fontRef idx="minor">
+            <a:schemeClr val="lt1"/>
+          </a:fontRef>
+        </p:style>
+        <p:txBody>
+          <a:bodyPr rtlCol="0" anchor="ctr"/>
+          <a:lstStyle/>
+          <a:p>
+            <a:pPr algn="ctr"/>
+          </a:p>
+        </p:txBody>
+      </p:sp>
+      <p:sp>
+        <p:nvSpPr>
+          <p:cNvPr id="32" name="concl-bar-line"/>
+          <p:cNvSpPr/>
+          <p:nvPr/>
+        </p:nvSpPr>
+        <p:spPr>
+          <a:xfrm>
+            <a:off x="566928" y="6327648"/>
+            <a:ext cx="64008" cy="402336"/>
+          </a:xfrm>
+          <a:prstGeom prst="rect">
+            <a:avLst/>
+          </a:prstGeom>
+          <a:solidFill>
+            <a:srgbClr val="D6A000"/>
+          </a:solidFill>
+          <a:ln>
+            <a:noFill/>
+          </a:ln>
+          <a:effectLst/>
+        </p:spPr>
+        <p:style>
+          <a:lnRef idx="1">
+            <a:schemeClr val="accent1"/>
+          </a:lnRef>
+          <a:fillRef idx="3">
+            <a:schemeClr val="accent1"/>
+          </a:fillRef>
+          <a:effectRef idx="2">
+            <a:schemeClr val="accent1"/>
+          </a:effectRef>
+          <a:fontRef idx="minor">
+            <a:schemeClr val="lt1"/>
+          </a:fontRef>
+        </p:style>
+        <p:txBody>
+          <a:bodyPr rtlCol="0" anchor="ctr"/>
+          <a:lstStyle/>
+          <a:p>
+            <a:pPr algn="ctr"/>
+          </a:p>
+        </p:txBody>
+      </p:sp>
+      <p:sp>
+        <p:nvSpPr>
+          <p:cNvPr id="33" name="concl-text"/>
+          <p:cNvSpPr txBox="1"/>
+          <p:nvPr/>
+        </p:nvSpPr>
+        <p:spPr>
+          <a:xfrm>
+            <a:off x="749808" y="6382512"/>
+            <a:ext cx="10698480" cy="292608"/>
+          </a:xfrm>
+          <a:prstGeom prst="rect">
+            <a:avLst/>
+          </a:prstGeom>
+          <a:noFill/>
+        </p:spPr>
+        <p:txBody>
+          <a:bodyPr wrap="square" lIns="0" rIns="0" tIns="0" bIns="0">
+            <a:spAutoFit/>
+          </a:bodyPr>
+          <a:lstStyle/>
+          <a:p>
+            <a:pPr algn="l"/>
+            <a:r>
+              <a:rPr sz="900" b="1" lang="zh-CN">
+                <a:solidFill>
+                  <a:srgbClr val="0A0A0A"/>
+                </a:solidFill>
+                <a:latin typeface="微软雅黑"/>
+                <a:ea typeface="微软雅黑"/>
+              </a:rPr>
+              <a:t>识别贷款 → 计算剩余负债与月还款额（平均月还款金额 A$428）→ 支撑新增还款能力判断</a:t>
+            </a:r>
+          </a:p>
+        </p:txBody>
+      </p:sp>
+    </p:spTree>
+    <p:extLst>
+      <p:ext uri="{BB962C8B-B14F-4D97-AF65-F5344CB8AC3E}">
+        <p14:creationId xmlns:p14="http://schemas.microsoft.com/office/powerpoint/2010/main" val="932786264"/>
+      </p:ext>
+    </p:extLst>
+  </p:cSld>
+  <p:clrMapOvr>
+    <a:masterClrMapping/>
+  </p:clrMapOvr>
+</p:sld>
+</file>
+
+<file path=ppt/slides/slide3.xml><?xml version="1.0" encoding="utf-8"?>
+<p:sld xmlns:a="http://schemas.openxmlformats.org/drawingml/2006/main" xmlns:r="http://schemas.openxmlformats.org/officeDocument/2006/relationships" xmlns:p="http://schemas.openxmlformats.org/presentationml/2006/main">
+  <p:cSld>
+    <p:spTree>
+      <p:nvGrpSpPr>
+        <p:cNvPr id="1" name=""/>
+        <p:cNvGrpSpPr/>
+        <p:nvPr/>
+      </p:nvGrpSpPr>
+      <p:grpSpPr>
+        <a:xfrm>
+          <a:off x="0" y="0"/>
+          <a:ext cx="0" cy="0"/>
+          <a:chOff x="0" y="0"/>
+          <a:chExt cx="0" cy="0"/>
+        </a:xfrm>
+      </p:grpSpPr>
+      <p:sp>
+        <p:nvSpPr>
+          <p:cNvPr id="2" name="title">
+            <a:extLst>
+              <a:ext uri="{FF2B5EF4-FFF2-40B4-BE49-F238E27FC236}">
+                <a16:creationId xmlns:a16="http://schemas.microsoft.com/office/drawing/2014/main" id="{8355AB41-3856-43D4-91F4-2CF8E6943019}"/>
+              </a:ext>
+            </a:extLst>
+          </p:cNvPr>
+          <p:cNvSpPr txBox="1"/>
+          <p:nvPr/>
+        </p:nvSpPr>
+        <p:spPr>
+          <a:xfrm>
+            <a:off x="603504" y="65149"/>
+            <a:ext cx="10972800" cy="621792"/>
+          </a:xfrm>
+          <a:prstGeom prst="rect">
+            <a:avLst/>
+          </a:prstGeom>
+          <a:noFill/>
+          <a:ln>
+            <a:noFill/>
+          </a:ln>
+        </p:spPr>
+        <p:txBody>
+          <a:bodyPr wrap="square" lIns="0" tIns="0" rIns="0" bIns="0" rtlCol="0" anchor="ctr"/>
+          <a:lstStyle/>
+          <a:p>
+            <a:pPr marL="0" marR="0" lvl="0" indent="0" algn="l" defTabSz="914400" rtl="0" eaLnBrk="1" fontAlgn="auto" latinLnBrk="1" hangingPunct="1">
+              <a:lnSpc>
+                <a:spcPct val="130000"/>
+              </a:lnSpc>
+              <a:spcBef>
+                <a:spcPts val="0"/>
+              </a:spcBef>
+              <a:spcAft>
+                <a:spcPts val="0"/>
+              </a:spcAft>
+              <a:buClrTx/>
+              <a:buSzTx/>
+              <a:buFontTx/>
+              <a:buNone/>
+              <a:tabLst/>
+              <a:defRPr/>
+            </a:pPr>
+            <a:r>
+              <a:rPr lang="zh-CN" altLang="en-US" sz="2000" b="1" noProof="1">
+                <a:solidFill>
+                  <a:srgbClr val="0A0A0A"/>
+                </a:solidFill>
+                <a:ea typeface="微软雅黑" panose="020B0503020204020204" pitchFamily="34" charset="-122"/>
+              </a:rPr>
+              <a:t>从一笔交易到完整客户财务画像直接回答新增还款能力</a:t>
+            </a:r>
+          </a:p>
+        </p:txBody>
+      </p:sp>
+      <p:sp>
+        <p:nvSpPr>
+          <p:cNvPr id="3" name="文本框 2">
+            <a:extLst>
+              <a:ext uri="{FF2B5EF4-FFF2-40B4-BE49-F238E27FC236}">
+                <a16:creationId xmlns:a16="http://schemas.microsoft.com/office/drawing/2014/main" id="{63E6C3C0-EF83-43D9-A24C-47B1A5AB43C9}"/>
+              </a:ext>
+            </a:extLst>
+          </p:cNvPr>
+          <p:cNvSpPr txBox="1"/>
+          <p:nvPr/>
+        </p:nvSpPr>
+        <p:spPr>
+          <a:xfrm>
+            <a:off x="511115" y="566724"/>
+            <a:ext cx="10901632" cy="443391"/>
+          </a:xfrm>
+          <a:prstGeom prst="rect">
+            <a:avLst/>
+          </a:prstGeom>
+          <a:noFill/>
+        </p:spPr>
+        <p:txBody>
+          <a:bodyPr wrap="square">
+            <a:spAutoFit/>
+          </a:bodyPr>
+          <a:lstStyle/>
+          <a:p>
+            <a:pPr marL="0" marR="0" lvl="0" indent="0" algn="l" defTabSz="914400" rtl="0" eaLnBrk="1" fontAlgn="auto" latinLnBrk="0" hangingPunct="1">
+              <a:lnSpc>
+                <a:spcPct val="140000"/>
+              </a:lnSpc>
+              <a:spcBef>
+                <a:spcPts val="0"/>
+              </a:spcBef>
+              <a:spcAft>
+                <a:spcPts val="0"/>
+              </a:spcAft>
+              <a:buClrTx/>
+              <a:buSzTx/>
+              <a:buFontTx/>
+              <a:buNone/>
+              <a:tabLst/>
+              <a:defRPr/>
+            </a:pPr>
+            <a:r>
+              <a:rPr lang="zh-CN" altLang="en-US" dirty="0"/>
+              <a:t>原始流水 → 单笔交易识别 → 用户</a:t>
+            </a:r>
+            <a:r>
+              <a:rPr lang="en-US" altLang="zh-CN" dirty="0"/>
+              <a:t>/</a:t>
+            </a:r>
+            <a:r>
+              <a:rPr lang="zh-CN" altLang="en-US" dirty="0"/>
+              <a:t>贷款汇总</a:t>
+            </a:r>
+            <a:endParaRPr kumimoji="0" lang="en-US" altLang="zh-CN" sz="1800" b="0" i="0" u="none" strike="noStrike" kern="1200" cap="none" spc="0" normalizeH="0" baseline="0" noProof="1">
+              <a:ln>
+                <a:noFill/>
+              </a:ln>
+              <a:solidFill>
+                <a:prstClr val="black"/>
+              </a:solidFill>
+              <a:effectLst/>
+              <a:uLnTx/>
+              <a:uFillTx/>
+              <a:latin typeface="微软雅黑" panose="020B0503020204020204" pitchFamily="34" charset="-122"/>
+              <a:ea typeface="微软雅黑" panose="020B0503020204020204" pitchFamily="34" charset="-122"/>
+              <a:cs typeface="+mn-cs"/>
+            </a:endParaRPr>
+          </a:p>
+        </p:txBody>
+      </p:sp>
+      <p:sp>
+        <p:nvSpPr>
+          <p:cNvPr id="6" name="s1-title">
+            <a:extLst>
+              <a:ext uri="{FF2B5EF4-FFF2-40B4-BE49-F238E27FC236}">
+                <a16:creationId xmlns:a16="http://schemas.microsoft.com/office/drawing/2014/main" id="{048C4CBE-160F-411B-AF93-58FE8230110E}"/>
+              </a:ext>
+            </a:extLst>
+          </p:cNvPr>
+          <p:cNvSpPr txBox="1"/>
+          <p:nvPr/>
+        </p:nvSpPr>
+        <p:spPr>
+          <a:xfrm>
+            <a:off x="568385" y="1113405"/>
+            <a:ext cx="3810000" cy="228600"/>
+          </a:xfrm>
+          <a:prstGeom prst="rect">
+            <a:avLst/>
+          </a:prstGeom>
+          <a:noFill/>
+          <a:ln>
+            <a:noFill/>
+          </a:ln>
+        </p:spPr>
+        <p:txBody>
+          <a:bodyPr wrap="none" lIns="0" tIns="0" rIns="0" bIns="0" rtlCol="0" anchor="ctr"/>
+          <a:lstStyle/>
+          <a:p>
+            <a:pPr marL="0" marR="0" lvl="0" indent="0" algn="l" defTabSz="914400" rtl="0" eaLnBrk="1" fontAlgn="auto" latinLnBrk="0" hangingPunct="1">
+              <a:lnSpc>
+                <a:spcPct val="125000"/>
+              </a:lnSpc>
+              <a:spcBef>
+                <a:spcPts val="0"/>
+              </a:spcBef>
+              <a:spcAft>
+                <a:spcPts val="0"/>
+              </a:spcAft>
+              <a:buClrTx/>
+              <a:buSzTx/>
+              <a:buFontTx/>
+              <a:buNone/>
+              <a:tabLst/>
+              <a:defRPr/>
+            </a:pPr>
+            <a:r>
+              <a:rPr kumimoji="0" lang="en-US" altLang="zh-CN" sz="1200" b="1" i="0" u="none" strike="noStrike" kern="1200" cap="none" spc="0" normalizeH="0" baseline="0" noProof="0" dirty="0">
+                <a:ln>
+                  <a:noFill/>
+                </a:ln>
+                <a:solidFill>
+                  <a:srgbClr val="0A0A0A"/>
+                </a:solidFill>
+                <a:effectLst/>
+                <a:uLnTx/>
+                <a:uFillTx/>
+                <a:latin typeface="微软雅黑"/>
+                <a:ea typeface="微软雅黑"/>
+                <a:cs typeface="+mn-cs"/>
+              </a:rPr>
+              <a:t>1. </a:t>
+            </a:r>
+            <a:r>
+              <a:rPr kumimoji="0" lang="zh-CN" altLang="en-US" sz="1200" b="1" i="0" u="none" strike="noStrike" kern="1200" cap="none" spc="0" normalizeH="0" baseline="0" noProof="0" dirty="0">
+                <a:ln>
+                  <a:noFill/>
+                </a:ln>
+                <a:solidFill>
+                  <a:srgbClr val="0A0A0A"/>
+                </a:solidFill>
+                <a:effectLst/>
+                <a:uLnTx/>
+                <a:uFillTx/>
+                <a:latin typeface="微软雅黑"/>
+                <a:ea typeface="微软雅黑"/>
+                <a:cs typeface="+mn-cs"/>
+              </a:rPr>
+              <a:t>原始银行流水（输入示例）</a:t>
+            </a:r>
+            <a:endParaRPr kumimoji="0" lang="en-US" sz="1200" b="0" i="0" u="none" strike="noStrike" kern="1200" cap="none" spc="0" normalizeH="0" baseline="0" noProof="1">
+              <a:ln>
+                <a:noFill/>
+              </a:ln>
+              <a:solidFill>
+                <a:prstClr val="black"/>
+              </a:solidFill>
+              <a:effectLst/>
+              <a:uLnTx/>
+              <a:uFillTx/>
+              <a:latin typeface="微软雅黑" panose="020B0503020204020204" pitchFamily="34" charset="-122"/>
+              <a:ea typeface="微软雅黑" panose="020B0503020204020204" pitchFamily="34" charset="-122"/>
+              <a:cs typeface="+mn-cs"/>
+            </a:endParaRPr>
+          </a:p>
+        </p:txBody>
+      </p:sp>
+      <p:sp>
+        <p:nvSpPr>
+          <p:cNvPr id="10" name="s2-title">
+            <a:extLst>
+              <a:ext uri="{FF2B5EF4-FFF2-40B4-BE49-F238E27FC236}">
+                <a16:creationId xmlns:a16="http://schemas.microsoft.com/office/drawing/2014/main" id="{C74CD74D-A21D-4088-B06A-64E758567EE9}"/>
+              </a:ext>
+            </a:extLst>
+          </p:cNvPr>
+          <p:cNvSpPr txBox="1"/>
+          <p:nvPr/>
+        </p:nvSpPr>
+        <p:spPr>
+          <a:xfrm>
+            <a:off x="568386" y="2523256"/>
+            <a:ext cx="5943600" cy="228600"/>
+          </a:xfrm>
+          <a:prstGeom prst="rect">
+            <a:avLst/>
+          </a:prstGeom>
+          <a:noFill/>
+          <a:ln>
+            <a:noFill/>
+          </a:ln>
+        </p:spPr>
+        <p:txBody>
+          <a:bodyPr wrap="none" lIns="0" tIns="0" rIns="0" bIns="0" rtlCol="0" anchor="ctr"/>
+          <a:lstStyle/>
+          <a:p>
+            <a:pPr marL="0" marR="0" lvl="0" indent="0" algn="l" defTabSz="914400" rtl="0" eaLnBrk="1" fontAlgn="auto" latinLnBrk="0" hangingPunct="1">
+              <a:lnSpc>
+                <a:spcPct val="125000"/>
+              </a:lnSpc>
+              <a:spcBef>
+                <a:spcPts val="0"/>
+              </a:spcBef>
+              <a:spcAft>
+                <a:spcPts val="0"/>
+              </a:spcAft>
+              <a:buClrTx/>
+              <a:buSzTx/>
+              <a:buFontTx/>
+              <a:buNone/>
+              <a:tabLst/>
+              <a:defRPr/>
+            </a:pPr>
+            <a:r>
+              <a:rPr kumimoji="0" lang="en-US" altLang="zh-CN" sz="1200" b="1" i="0" u="none" strike="noStrike" kern="1200" cap="none" spc="0" normalizeH="0" baseline="0" noProof="0">
+                <a:ln>
+                  <a:noFill/>
+                </a:ln>
+                <a:solidFill>
+                  <a:srgbClr val="0A0A0A"/>
+                </a:solidFill>
+                <a:effectLst/>
+                <a:uLnTx/>
+                <a:uFillTx/>
+                <a:latin typeface="微软雅黑"/>
+                <a:ea typeface="微软雅黑"/>
+                <a:cs typeface="+mn-cs"/>
+              </a:rPr>
+              <a:t>2. </a:t>
+            </a:r>
+            <a:r>
+              <a:rPr kumimoji="0" lang="zh-CN" altLang="en-US" sz="1200" b="1" i="0" u="none" strike="noStrike" kern="1200" cap="none" spc="0" normalizeH="0" baseline="0" noProof="0">
+                <a:ln>
+                  <a:noFill/>
+                </a:ln>
+                <a:solidFill>
+                  <a:srgbClr val="0A0A0A"/>
+                </a:solidFill>
+                <a:effectLst/>
+                <a:uLnTx/>
+                <a:uFillTx/>
+                <a:latin typeface="微软雅黑"/>
+                <a:ea typeface="微软雅黑"/>
+                <a:cs typeface="+mn-cs"/>
+              </a:rPr>
+              <a:t>交易明细维度：理解每一笔交易（输出示例）</a:t>
+            </a:r>
+            <a:endParaRPr kumimoji="0" lang="en-US" sz="1200" b="1" i="0" u="none" strike="noStrike" kern="1200" cap="none" spc="0" normalizeH="0" baseline="0" noProof="1">
+              <a:ln>
+                <a:noFill/>
+              </a:ln>
+              <a:solidFill>
+                <a:srgbClr val="0A0A0A"/>
+              </a:solidFill>
+              <a:effectLst/>
+              <a:uLnTx/>
+              <a:uFillTx/>
+              <a:latin typeface="微软雅黑"/>
+              <a:ea typeface="微软雅黑"/>
+              <a:cs typeface="+mn-cs"/>
+            </a:endParaRPr>
+          </a:p>
+        </p:txBody>
+      </p:sp>
+      <p:sp>
+        <p:nvSpPr>
+          <p:cNvPr id="13" name="s3-title">
+            <a:extLst>
+              <a:ext uri="{FF2B5EF4-FFF2-40B4-BE49-F238E27FC236}">
+                <a16:creationId xmlns:a16="http://schemas.microsoft.com/office/drawing/2014/main" id="{B2B5F18D-2962-46FD-9E6E-562ACD32D72F}"/>
+              </a:ext>
+            </a:extLst>
+          </p:cNvPr>
+          <p:cNvSpPr txBox="1"/>
+          <p:nvPr/>
+        </p:nvSpPr>
+        <p:spPr>
+          <a:xfrm>
+            <a:off x="568385" y="3989324"/>
+            <a:ext cx="5943600" cy="228600"/>
+          </a:xfrm>
+          <a:prstGeom prst="rect">
+            <a:avLst/>
+          </a:prstGeom>
+          <a:noFill/>
+          <a:ln>
+            <a:noFill/>
+          </a:ln>
+        </p:spPr>
+        <p:txBody>
+          <a:bodyPr wrap="none" lIns="0" tIns="0" rIns="0" bIns="0" rtlCol="0" anchor="ctr"/>
+          <a:lstStyle/>
+          <a:p>
+            <a:pPr marL="0" marR="0" lvl="0" indent="0" algn="l" defTabSz="914400" rtl="0" eaLnBrk="1" fontAlgn="auto" latinLnBrk="0" hangingPunct="1">
+              <a:lnSpc>
+                <a:spcPct val="125000"/>
+              </a:lnSpc>
+              <a:spcBef>
+                <a:spcPts val="0"/>
+              </a:spcBef>
+              <a:spcAft>
+                <a:spcPts val="0"/>
+              </a:spcAft>
+              <a:buClrTx/>
+              <a:buSzTx/>
+              <a:buFontTx/>
+              <a:buNone/>
+              <a:tabLst/>
+              <a:defRPr/>
+            </a:pPr>
+            <a:r>
+              <a:rPr kumimoji="0" lang="en-US" altLang="zh-CN" sz="1200" b="1" i="0" u="none" strike="noStrike" kern="1200" cap="none" spc="0" normalizeH="0" baseline="0" noProof="0" dirty="0">
+                <a:ln>
+                  <a:noFill/>
+                </a:ln>
+                <a:solidFill>
+                  <a:srgbClr val="0A0A0A"/>
+                </a:solidFill>
+                <a:effectLst/>
+                <a:uLnTx/>
+                <a:uFillTx/>
+                <a:latin typeface="微软雅黑"/>
+                <a:ea typeface="微软雅黑"/>
+                <a:cs typeface="+mn-cs"/>
+              </a:rPr>
+              <a:t>3. </a:t>
+            </a:r>
+            <a:r>
+              <a:rPr kumimoji="0" lang="zh-CN" altLang="en-US" sz="1200" b="1" i="0" u="none" strike="noStrike" kern="1200" cap="none" spc="0" normalizeH="0" baseline="0" noProof="0" dirty="0">
+                <a:ln>
+                  <a:noFill/>
+                </a:ln>
+                <a:solidFill>
+                  <a:srgbClr val="0A0A0A"/>
+                </a:solidFill>
+                <a:effectLst/>
+                <a:uLnTx/>
+                <a:uFillTx/>
+                <a:latin typeface="微软雅黑"/>
+                <a:ea typeface="微软雅黑"/>
+                <a:cs typeface="+mn-cs"/>
+              </a:rPr>
+              <a:t>用户汇总维度：形成完整负债画像（输出示例）</a:t>
+            </a:r>
+            <a:endParaRPr kumimoji="0" lang="en-US" sz="1200" b="1" i="0" u="none" strike="noStrike" kern="1200" cap="none" spc="0" normalizeH="0" baseline="0" noProof="1">
+              <a:ln>
+                <a:noFill/>
+              </a:ln>
+              <a:solidFill>
+                <a:srgbClr val="0A0A0A"/>
+              </a:solidFill>
+              <a:effectLst/>
+              <a:uLnTx/>
+              <a:uFillTx/>
+              <a:latin typeface="微软雅黑"/>
+              <a:ea typeface="微软雅黑"/>
+              <a:cs typeface="+mn-cs"/>
+            </a:endParaRPr>
+          </a:p>
+        </p:txBody>
+      </p:sp>
+      <p:graphicFrame>
+        <p:nvGraphicFramePr>
+          <p:cNvPr id="15" name="init-table">
+            <a:extLst>
+              <a:ext uri="{FF2B5EF4-FFF2-40B4-BE49-F238E27FC236}">
+                <a16:creationId xmlns:a16="http://schemas.microsoft.com/office/drawing/2014/main" id="{B20AEE83-7381-40E9-867F-987DE9C5BE2C}"/>
+              </a:ext>
+            </a:extLst>
+          </p:cNvPr>
+          <p:cNvGraphicFramePr>
+            <a:graphicFrameLocks noGrp="1"/>
+          </p:cNvGraphicFramePr>
+          <p:nvPr>
+            <p:extLst>
+              <p:ext uri="{D42A27DB-BD31-4B8C-83A1-F6EECF244321}">
+                <p14:modId xmlns:p14="http://schemas.microsoft.com/office/powerpoint/2010/main" val="4096992607"/>
+              </p:ext>
+            </p:extLst>
+          </p:nvPr>
+        </p:nvGraphicFramePr>
+        <p:xfrm>
+          <a:off x="568385" y="1435904"/>
+          <a:ext cx="10901630" cy="1022238"/>
+        </p:xfrm>
+        <a:graphic>
+          <a:graphicData uri="http://schemas.openxmlformats.org/drawingml/2006/table">
+            <a:tbl>
+              <a:tblPr/>
+              <a:tblGrid>
+                <a:gridCol w="1326689">
+                  <a:extLst>
+                    <a:ext uri="{9D8B030D-6E8A-4147-A177-3AD203B41FA5}">
+                      <a16:colId xmlns:a16="http://schemas.microsoft.com/office/drawing/2014/main" val="20000"/>
+                    </a:ext>
+                  </a:extLst>
+                </a:gridCol>
+                <a:gridCol w="1679834">
+                  <a:extLst>
+                    <a:ext uri="{9D8B030D-6E8A-4147-A177-3AD203B41FA5}">
+                      <a16:colId xmlns:a16="http://schemas.microsoft.com/office/drawing/2014/main" val="20001"/>
+                    </a:ext>
+                  </a:extLst>
+                </a:gridCol>
+                <a:gridCol w="1738206">
+                  <a:extLst>
+                    <a:ext uri="{9D8B030D-6E8A-4147-A177-3AD203B41FA5}">
+                      <a16:colId xmlns:a16="http://schemas.microsoft.com/office/drawing/2014/main" val="20002"/>
+                    </a:ext>
+                  </a:extLst>
+                </a:gridCol>
+                <a:gridCol w="6156901">
+                  <a:extLst>
+                    <a:ext uri="{9D8B030D-6E8A-4147-A177-3AD203B41FA5}">
+                      <a16:colId xmlns:a16="http://schemas.microsoft.com/office/drawing/2014/main" val="4140160165"/>
+                    </a:ext>
+                  </a:extLst>
+                </a:gridCol>
+              </a:tblGrid>
+              <a:tr h="170373">
+                <a:tc>
+                  <a:txBody>
+                    <a:bodyPr/>
+                    <a:lstStyle/>
+                    <a:p>
+                      <a:pPr marL="0" algn="ctr" defTabSz="914400" rtl="0" eaLnBrk="1" latinLnBrk="0" hangingPunct="1"/>
+                      <a:r>
+                        <a:rPr sz="800" b="1" kern="1200" dirty="0" err="1">
+                          <a:solidFill>
+                            <a:srgbClr val="0A0A0A"/>
+                          </a:solidFill>
+                          <a:latin typeface="微软雅黑" panose="020B0503020204020204" pitchFamily="34" charset="-122"/>
+                          <a:ea typeface="微软雅黑" panose="020B0503020204020204" pitchFamily="34" charset="-122"/>
+                          <a:cs typeface="+mn-cs"/>
+                        </a:rPr>
+                        <a:t>日期</a:t>
+                      </a:r>
+                      <a:endParaRPr sz="800" b="1" kern="1200" dirty="0">
+                        <a:solidFill>
+                          <a:srgbClr val="0A0A0A"/>
+                        </a:solidFill>
+                        <a:latin typeface="微软雅黑" panose="020B0503020204020204" pitchFamily="34" charset="-122"/>
+                        <a:ea typeface="微软雅黑" panose="020B0503020204020204" pitchFamily="34" charset="-122"/>
+                        <a:cs typeface="+mn-cs"/>
+                      </a:endParaRPr>
+                    </a:p>
+                  </a:txBody>
+                  <a:tcPr marL="27432" marR="27432" marT="9144" marB="9144">
+                    <a:lnL>
+                      <a:noFill/>
+                    </a:lnL>
+                    <a:lnR>
+                      <a:noFill/>
+                    </a:lnR>
+                    <a:lnT>
+                      <a:noFill/>
+                    </a:lnT>
+                    <a:lnB w="19050">
+                      <a:solidFill>
+                        <a:srgbClr val="0A0A0A"/>
+                      </a:solidFill>
+                    </a:lnB>
+                    <a:noFill/>
+                  </a:tcPr>
+                </a:tc>
+                <a:tc>
+                  <a:txBody>
+                    <a:bodyPr/>
+                    <a:lstStyle/>
+                    <a:p>
+                      <a:pPr marL="0" algn="ctr" defTabSz="914400" rtl="0" eaLnBrk="1" latinLnBrk="0" hangingPunct="1"/>
+                      <a:r>
+                        <a:rPr sz="800" b="1" kern="1200" dirty="0" err="1">
+                          <a:solidFill>
+                            <a:srgbClr val="0A0A0A"/>
+                          </a:solidFill>
+                          <a:latin typeface="微软雅黑" panose="020B0503020204020204" pitchFamily="34" charset="-122"/>
+                          <a:ea typeface="微软雅黑" panose="020B0503020204020204" pitchFamily="34" charset="-122"/>
+                          <a:cs typeface="+mn-cs"/>
+                        </a:rPr>
+                        <a:t>金额</a:t>
+                      </a:r>
+                      <a:endParaRPr sz="800" b="1" kern="1200" dirty="0">
+                        <a:solidFill>
+                          <a:srgbClr val="0A0A0A"/>
+                        </a:solidFill>
+                        <a:latin typeface="微软雅黑" panose="020B0503020204020204" pitchFamily="34" charset="-122"/>
+                        <a:ea typeface="微软雅黑" panose="020B0503020204020204" pitchFamily="34" charset="-122"/>
+                        <a:cs typeface="+mn-cs"/>
+                      </a:endParaRPr>
+                    </a:p>
+                  </a:txBody>
+                  <a:tcPr marL="27432" marR="27432" marT="9144" marB="9144">
+                    <a:lnL>
+                      <a:noFill/>
+                    </a:lnL>
+                    <a:lnR>
+                      <a:noFill/>
+                    </a:lnR>
+                    <a:lnT>
+                      <a:noFill/>
+                    </a:lnT>
+                    <a:lnB w="19050">
+                      <a:solidFill>
+                        <a:srgbClr val="0A0A0A"/>
+                      </a:solidFill>
+                    </a:lnB>
+                    <a:noFill/>
+                  </a:tcPr>
+                </a:tc>
+                <a:tc>
+                  <a:txBody>
+                    <a:bodyPr/>
+                    <a:lstStyle/>
+                    <a:p>
+                      <a:pPr marL="0" algn="ctr" defTabSz="914400" rtl="0" eaLnBrk="1" latinLnBrk="0" hangingPunct="1"/>
+                      <a:r>
+                        <a:rPr sz="800" b="1" kern="1200" dirty="0" err="1">
+                          <a:solidFill>
+                            <a:srgbClr val="0A0A0A"/>
+                          </a:solidFill>
+                          <a:latin typeface="微软雅黑" panose="020B0503020204020204" pitchFamily="34" charset="-122"/>
+                          <a:ea typeface="微软雅黑" panose="020B0503020204020204" pitchFamily="34" charset="-122"/>
+                          <a:cs typeface="+mn-cs"/>
+                        </a:rPr>
+                        <a:t>方向</a:t>
+                      </a:r>
+                      <a:endParaRPr sz="800" b="1" kern="1200" dirty="0">
+                        <a:solidFill>
+                          <a:srgbClr val="0A0A0A"/>
+                        </a:solidFill>
+                        <a:latin typeface="微软雅黑" panose="020B0503020204020204" pitchFamily="34" charset="-122"/>
+                        <a:ea typeface="微软雅黑" panose="020B0503020204020204" pitchFamily="34" charset="-122"/>
+                        <a:cs typeface="+mn-cs"/>
+                      </a:endParaRPr>
+                    </a:p>
+                  </a:txBody>
+                  <a:tcPr marL="27432" marR="27432" marT="9144" marB="9144">
+                    <a:lnL>
+                      <a:noFill/>
+                    </a:lnL>
+                    <a:lnR>
+                      <a:noFill/>
+                    </a:lnR>
+                    <a:lnT>
+                      <a:noFill/>
+                    </a:lnT>
+                    <a:lnB w="19050">
+                      <a:solidFill>
+                        <a:srgbClr val="0A0A0A"/>
+                      </a:solidFill>
+                    </a:lnB>
+                    <a:noFill/>
+                  </a:tcPr>
+                </a:tc>
+                <a:tc>
+                  <a:txBody>
+                    <a:bodyPr/>
+                    <a:lstStyle/>
+                    <a:p>
+                      <a:pPr marL="0" algn="ctr" defTabSz="914400" rtl="0" eaLnBrk="1" latinLnBrk="0" hangingPunct="1"/>
+                      <a:r>
+                        <a:rPr sz="800" b="1" kern="1200" dirty="0" err="1">
+                          <a:solidFill>
+                            <a:srgbClr val="0A0A0A"/>
+                          </a:solidFill>
+                          <a:latin typeface="微软雅黑" panose="020B0503020204020204" pitchFamily="34" charset="-122"/>
+                          <a:ea typeface="微软雅黑" panose="020B0503020204020204" pitchFamily="34" charset="-122"/>
+                          <a:cs typeface="+mn-cs"/>
+                        </a:rPr>
+                        <a:t>交易描述</a:t>
+                      </a:r>
+                      <a:endParaRPr sz="800" b="1" kern="1200" dirty="0">
+                        <a:solidFill>
+                          <a:srgbClr val="0A0A0A"/>
+                        </a:solidFill>
+                        <a:latin typeface="微软雅黑" panose="020B0503020204020204" pitchFamily="34" charset="-122"/>
+                        <a:ea typeface="微软雅黑" panose="020B0503020204020204" pitchFamily="34" charset="-122"/>
+                        <a:cs typeface="+mn-cs"/>
+                      </a:endParaRPr>
+                    </a:p>
+                  </a:txBody>
+                  <a:tcPr marL="27432" marR="27432" marT="9144" marB="9144">
+                    <a:lnL>
+                      <a:noFill/>
+                    </a:lnL>
+                    <a:lnR>
+                      <a:noFill/>
+                    </a:lnR>
+                    <a:lnT>
+                      <a:noFill/>
+                    </a:lnT>
+                    <a:lnB w="19050" cap="flat" cmpd="sng" algn="ctr">
+                      <a:solidFill>
+                        <a:srgbClr val="0A0A0A"/>
+                      </a:solidFill>
+                      <a:prstDash val="solid"/>
+                      <a:round/>
+                      <a:headEnd type="none" w="med" len="med"/>
+                      <a:tailEnd type="none" w="med" len="med"/>
+                    </a:lnB>
+                    <a:noFill/>
+                  </a:tcPr>
+                </a:tc>
+                <a:extLst>
+                  <a:ext uri="{0D108BD9-81ED-4DB2-BD59-A6C34878D82A}">
+                    <a16:rowId xmlns:a16="http://schemas.microsoft.com/office/drawing/2014/main" val="10000"/>
+                  </a:ext>
+                </a:extLst>
+              </a:tr>
+              <a:tr h="170373">
+                <a:tc>
+                  <a:txBody>
+                    <a:bodyPr/>
+                    <a:lstStyle/>
+                    <a:p>
+                      <a:pPr marL="0" algn="ctr" defTabSz="914400" rtl="0" eaLnBrk="1" latinLnBrk="0" hangingPunct="1"/>
+                      <a:r>
+                        <a:rPr sz="800" b="0" kern="1200" dirty="0">
+                          <a:solidFill>
+                            <a:srgbClr val="0A0A0A"/>
+                          </a:solidFill>
+                          <a:latin typeface="微软雅黑" panose="020B0503020204020204" pitchFamily="34" charset="-122"/>
+                          <a:ea typeface="微软雅黑" panose="020B0503020204020204" pitchFamily="34" charset="-122"/>
+                          <a:cs typeface="+mn-cs"/>
+                        </a:rPr>
+                        <a:t>2026/03/26</a:t>
+                      </a:r>
+                    </a:p>
+                  </a:txBody>
+                  <a:tcPr marL="27432" marR="27432" marT="9144" marB="9144">
+                    <a:lnL>
+                      <a:noFill/>
+                    </a:lnL>
+                    <a:lnR>
+                      <a:noFill/>
+                    </a:lnR>
+                    <a:lnT w="19050" cap="flat" cmpd="sng" algn="ctr">
+                      <a:solidFill>
+                        <a:srgbClr val="0A0A0A"/>
+                      </a:solidFill>
+                      <a:prstDash val="solid"/>
+                      <a:round/>
+                      <a:headEnd type="none" w="med" len="med"/>
+                      <a:tailEnd type="none" w="med" len="med"/>
+                    </a:lnT>
+                    <a:lnB w="9525">
+                      <a:solidFill>
+                        <a:srgbClr val="D6D6D6"/>
+                      </a:solidFill>
+                    </a:lnB>
+                    <a:noFill/>
+                  </a:tcPr>
+                </a:tc>
+                <a:tc>
+                  <a:txBody>
+                    <a:bodyPr/>
+                    <a:lstStyle/>
+                    <a:p>
+                      <a:pPr marL="0" algn="ctr" defTabSz="914400" rtl="0" eaLnBrk="1" latinLnBrk="0" hangingPunct="1"/>
+                      <a:r>
+                        <a:rPr sz="800" b="0" kern="1200" dirty="0">
+                          <a:solidFill>
+                            <a:srgbClr val="0A0A0A"/>
+                          </a:solidFill>
+                          <a:latin typeface="微软雅黑" panose="020B0503020204020204" pitchFamily="34" charset="-122"/>
+                          <a:ea typeface="微软雅黑" panose="020B0503020204020204" pitchFamily="34" charset="-122"/>
+                          <a:cs typeface="+mn-cs"/>
+                        </a:rPr>
+                        <a:t>A$156</a:t>
+                      </a:r>
+                    </a:p>
+                  </a:txBody>
+                  <a:tcPr marL="27432" marR="27432" marT="9144" marB="9144">
+                    <a:lnL>
+                      <a:noFill/>
+                    </a:lnL>
+                    <a:lnR>
+                      <a:noFill/>
+                    </a:lnR>
+                    <a:lnT w="19050" cap="flat" cmpd="sng" algn="ctr">
+                      <a:solidFill>
+                        <a:srgbClr val="0A0A0A"/>
+                      </a:solidFill>
+                      <a:prstDash val="solid"/>
+                      <a:round/>
+                      <a:headEnd type="none" w="med" len="med"/>
+                      <a:tailEnd type="none" w="med" len="med"/>
+                    </a:lnT>
+                    <a:lnB w="9525">
+                      <a:solidFill>
+                        <a:srgbClr val="D6D6D6"/>
+                      </a:solidFill>
+                    </a:lnB>
+                    <a:noFill/>
+                  </a:tcPr>
+                </a:tc>
+                <a:tc>
+                  <a:txBody>
+                    <a:bodyPr/>
+                    <a:lstStyle/>
+                    <a:p>
+                      <a:pPr marL="0" algn="ctr" defTabSz="914400" rtl="0" eaLnBrk="1" latinLnBrk="0" hangingPunct="1"/>
+                      <a:r>
+                        <a:rPr sz="800" b="0" kern="1200" dirty="0">
+                          <a:solidFill>
+                            <a:srgbClr val="0A0A0A"/>
+                          </a:solidFill>
+                          <a:latin typeface="微软雅黑" panose="020B0503020204020204" pitchFamily="34" charset="-122"/>
+                          <a:ea typeface="微软雅黑" panose="020B0503020204020204" pitchFamily="34" charset="-122"/>
+                          <a:cs typeface="+mn-cs"/>
+                        </a:rPr>
+                        <a:t>Debit</a:t>
+                      </a:r>
+                    </a:p>
+                  </a:txBody>
+                  <a:tcPr marL="27432" marR="27432" marT="9144" marB="9144">
+                    <a:lnL>
+                      <a:noFill/>
+                    </a:lnL>
+                    <a:lnR>
+                      <a:noFill/>
+                    </a:lnR>
+                    <a:lnT w="19050" cap="flat" cmpd="sng" algn="ctr">
+                      <a:solidFill>
+                        <a:srgbClr val="0A0A0A"/>
+                      </a:solidFill>
+                      <a:prstDash val="solid"/>
+                      <a:round/>
+                      <a:headEnd type="none" w="med" len="med"/>
+                      <a:tailEnd type="none" w="med" len="med"/>
+                    </a:lnT>
+                    <a:lnB w="9525">
+                      <a:solidFill>
+                        <a:srgbClr val="D6D6D6"/>
+                      </a:solidFill>
+                    </a:lnB>
+                    <a:noFill/>
+                  </a:tcPr>
+                </a:tc>
+                <a:tc>
+                  <a:txBody>
+                    <a:bodyPr/>
+                    <a:lstStyle/>
+                    <a:p>
+                      <a:pPr marL="0" algn="ctr" defTabSz="914400" rtl="0" eaLnBrk="1" latinLnBrk="0" hangingPunct="1"/>
+                      <a:r>
+                        <a:rPr sz="800" b="0" kern="1200" dirty="0">
+                          <a:solidFill>
+                            <a:srgbClr val="0A0A0A"/>
+                          </a:solidFill>
+                          <a:latin typeface="微软雅黑" panose="020B0503020204020204" pitchFamily="34" charset="-122"/>
+                          <a:ea typeface="微软雅黑" panose="020B0503020204020204" pitchFamily="34" charset="-122"/>
+                          <a:cs typeface="+mn-cs"/>
+                        </a:rPr>
+                        <a:t>BILL PAY Fair Go Finance DT.58oa72 SACC 239</a:t>
+                      </a:r>
+                    </a:p>
+                  </a:txBody>
+                  <a:tcPr marL="27432" marR="27432" marT="9144" marB="9144">
+                    <a:lnL>
+                      <a:noFill/>
+                    </a:lnL>
+                    <a:lnR>
+                      <a:noFill/>
+                    </a:lnR>
+                    <a:lnT w="19050" cap="flat" cmpd="sng" algn="ctr">
+                      <a:solidFill>
+                        <a:srgbClr val="0A0A0A"/>
+                      </a:solidFill>
+                      <a:prstDash val="solid"/>
+                      <a:round/>
+                      <a:headEnd type="none" w="med" len="med"/>
+                      <a:tailEnd type="none" w="med" len="med"/>
+                    </a:lnT>
+                    <a:lnB w="9525" cap="flat" cmpd="sng" algn="ctr">
+                      <a:solidFill>
+                        <a:srgbClr val="D6D6D6"/>
+                      </a:solidFill>
+                      <a:prstDash val="solid"/>
+                      <a:round/>
+                      <a:headEnd type="none" w="med" len="med"/>
+                      <a:tailEnd type="none" w="med" len="med"/>
+                    </a:lnB>
+                    <a:noFill/>
+                  </a:tcPr>
+                </a:tc>
+                <a:extLst>
+                  <a:ext uri="{0D108BD9-81ED-4DB2-BD59-A6C34878D82A}">
+                    <a16:rowId xmlns:a16="http://schemas.microsoft.com/office/drawing/2014/main" val="10001"/>
+                  </a:ext>
+                </a:extLst>
+              </a:tr>
+              <a:tr h="170373">
+                <a:tc>
+                  <a:txBody>
+                    <a:bodyPr/>
+                    <a:lstStyle/>
+                    <a:p>
+                      <a:pPr marL="0" algn="ctr" defTabSz="914400" rtl="0" eaLnBrk="1" latinLnBrk="0" hangingPunct="1"/>
+                      <a:r>
+                        <a:rPr sz="800" b="0" kern="1200" dirty="0">
+                          <a:solidFill>
+                            <a:srgbClr val="0A0A0A"/>
+                          </a:solidFill>
+                          <a:latin typeface="微软雅黑" panose="020B0503020204020204" pitchFamily="34" charset="-122"/>
+                          <a:ea typeface="微软雅黑" panose="020B0503020204020204" pitchFamily="34" charset="-122"/>
+                          <a:cs typeface="+mn-cs"/>
+                        </a:rPr>
+                        <a:t>2026/03/28</a:t>
+                      </a:r>
+                    </a:p>
+                  </a:txBody>
+                  <a:tcPr marL="27432" marR="27432" marT="9144" marB="9144">
+                    <a:lnL>
+                      <a:noFill/>
+                    </a:lnL>
+                    <a:lnR>
+                      <a:noFill/>
+                    </a:lnR>
+                    <a:lnT w="9525" cap="flat" cmpd="sng" algn="ctr">
+                      <a:solidFill>
+                        <a:srgbClr val="D6D6D6"/>
+                      </a:solidFill>
+                      <a:prstDash val="solid"/>
+                      <a:round/>
+                      <a:headEnd type="none" w="med" len="med"/>
+                      <a:tailEnd type="none" w="med" len="med"/>
+                    </a:lnT>
+                    <a:lnB w="9525">
+                      <a:solidFill>
+                        <a:srgbClr val="D6D6D6"/>
+                      </a:solidFill>
+                    </a:lnB>
+                    <a:noFill/>
+                  </a:tcPr>
+                </a:tc>
+                <a:tc>
+                  <a:txBody>
+                    <a:bodyPr/>
+                    <a:lstStyle/>
+                    <a:p>
+                      <a:pPr marL="0" algn="ctr" defTabSz="914400" rtl="0" eaLnBrk="1" latinLnBrk="0" hangingPunct="1"/>
+                      <a:r>
+                        <a:rPr sz="800" b="0" kern="1200" dirty="0">
+                          <a:solidFill>
+                            <a:srgbClr val="0A0A0A"/>
+                          </a:solidFill>
+                          <a:latin typeface="微软雅黑" panose="020B0503020204020204" pitchFamily="34" charset="-122"/>
+                          <a:ea typeface="微软雅黑" panose="020B0503020204020204" pitchFamily="34" charset="-122"/>
+                          <a:cs typeface="+mn-cs"/>
+                        </a:rPr>
+                        <a:t>A$12.40</a:t>
+                      </a:r>
+                    </a:p>
+                  </a:txBody>
+                  <a:tcPr marL="27432" marR="27432" marT="9144" marB="9144">
+                    <a:lnL>
+                      <a:noFill/>
+                    </a:lnL>
+                    <a:lnR>
+                      <a:noFill/>
+                    </a:lnR>
+                    <a:lnT w="9525" cap="flat" cmpd="sng" algn="ctr">
+                      <a:solidFill>
+                        <a:srgbClr val="D6D6D6"/>
+                      </a:solidFill>
+                      <a:prstDash val="solid"/>
+                      <a:round/>
+                      <a:headEnd type="none" w="med" len="med"/>
+                      <a:tailEnd type="none" w="med" len="med"/>
+                    </a:lnT>
+                    <a:lnB w="9525">
+                      <a:solidFill>
+                        <a:srgbClr val="D6D6D6"/>
+                      </a:solidFill>
+                    </a:lnB>
+                    <a:noFill/>
+                  </a:tcPr>
+                </a:tc>
+                <a:tc>
+                  <a:txBody>
+                    <a:bodyPr/>
+                    <a:lstStyle/>
+                    <a:p>
+                      <a:pPr marL="0" algn="ctr" defTabSz="914400" rtl="0" eaLnBrk="1" latinLnBrk="0" hangingPunct="1"/>
+                      <a:r>
+                        <a:rPr sz="800" b="0" kern="1200" dirty="0">
+                          <a:solidFill>
+                            <a:srgbClr val="0A0A0A"/>
+                          </a:solidFill>
+                          <a:latin typeface="微软雅黑" panose="020B0503020204020204" pitchFamily="34" charset="-122"/>
+                          <a:ea typeface="微软雅黑" panose="020B0503020204020204" pitchFamily="34" charset="-122"/>
+                          <a:cs typeface="+mn-cs"/>
+                        </a:rPr>
+                        <a:t>Debit</a:t>
+                      </a:r>
+                    </a:p>
+                  </a:txBody>
+                  <a:tcPr marL="27432" marR="27432" marT="9144" marB="9144">
+                    <a:lnL>
+                      <a:noFill/>
+                    </a:lnL>
+                    <a:lnR>
+                      <a:noFill/>
+                    </a:lnR>
+                    <a:lnT w="9525" cap="flat" cmpd="sng" algn="ctr">
+                      <a:solidFill>
+                        <a:srgbClr val="D6D6D6"/>
+                      </a:solidFill>
+                      <a:prstDash val="solid"/>
+                      <a:round/>
+                      <a:headEnd type="none" w="med" len="med"/>
+                      <a:tailEnd type="none" w="med" len="med"/>
+                    </a:lnT>
+                    <a:lnB w="9525">
+                      <a:solidFill>
+                        <a:srgbClr val="D6D6D6"/>
+                      </a:solidFill>
+                    </a:lnB>
+                    <a:noFill/>
+                  </a:tcPr>
+                </a:tc>
+                <a:tc>
+                  <a:txBody>
+                    <a:bodyPr/>
+                    <a:lstStyle/>
+                    <a:p>
+                      <a:pPr marL="0" algn="ctr" defTabSz="914400" rtl="0" eaLnBrk="1" latinLnBrk="0" hangingPunct="1"/>
+                      <a:r>
+                        <a:rPr sz="800" b="0" kern="1200" dirty="0">
+                          <a:solidFill>
+                            <a:srgbClr val="0A0A0A"/>
+                          </a:solidFill>
+                          <a:latin typeface="微软雅黑" panose="020B0503020204020204" pitchFamily="34" charset="-122"/>
+                          <a:ea typeface="微软雅黑" panose="020B0503020204020204" pitchFamily="34" charset="-122"/>
+                          <a:cs typeface="+mn-cs"/>
+                        </a:rPr>
+                        <a:t>MCDONALDS BRISBANE</a:t>
+                      </a:r>
+                    </a:p>
+                  </a:txBody>
+                  <a:tcPr marL="27432" marR="27432" marT="9144" marB="9144">
+                    <a:lnL>
+                      <a:noFill/>
+                    </a:lnL>
+                    <a:lnR>
+                      <a:noFill/>
+                    </a:lnR>
+                    <a:lnT w="9525" cap="flat" cmpd="sng" algn="ctr">
+                      <a:solidFill>
+                        <a:srgbClr val="D6D6D6"/>
+                      </a:solidFill>
+                      <a:prstDash val="solid"/>
+                      <a:round/>
+                      <a:headEnd type="none" w="med" len="med"/>
+                      <a:tailEnd type="none" w="med" len="med"/>
+                    </a:lnT>
+                    <a:lnB w="9525" cap="flat" cmpd="sng" algn="ctr">
+                      <a:solidFill>
+                        <a:srgbClr val="D6D6D6"/>
+                      </a:solidFill>
+                      <a:prstDash val="solid"/>
+                      <a:round/>
+                      <a:headEnd type="none" w="med" len="med"/>
+                      <a:tailEnd type="none" w="med" len="med"/>
+                    </a:lnB>
+                    <a:noFill/>
+                  </a:tcPr>
+                </a:tc>
+                <a:extLst>
+                  <a:ext uri="{0D108BD9-81ED-4DB2-BD59-A6C34878D82A}">
+                    <a16:rowId xmlns:a16="http://schemas.microsoft.com/office/drawing/2014/main" val="10002"/>
+                  </a:ext>
+                </a:extLst>
+              </a:tr>
+              <a:tr h="170373">
+                <a:tc>
+                  <a:txBody>
+                    <a:bodyPr/>
+                    <a:lstStyle/>
+                    <a:p>
+                      <a:pPr marL="0" algn="ctr" defTabSz="914400" rtl="0" eaLnBrk="1" latinLnBrk="0" hangingPunct="1"/>
+                      <a:r>
+                        <a:rPr sz="800" b="0" kern="1200">
+                          <a:solidFill>
+                            <a:srgbClr val="0A0A0A"/>
+                          </a:solidFill>
+                          <a:latin typeface="微软雅黑" panose="020B0503020204020204" pitchFamily="34" charset="-122"/>
+                          <a:ea typeface="微软雅黑" panose="020B0503020204020204" pitchFamily="34" charset="-122"/>
+                          <a:cs typeface="+mn-cs"/>
+                        </a:rPr>
+                        <a:t>2026/04/02</a:t>
+                      </a:r>
+                    </a:p>
+                  </a:txBody>
+                  <a:tcPr marL="27432" marR="27432" marT="9144" marB="9144">
+                    <a:lnL>
+                      <a:noFill/>
+                    </a:lnL>
+                    <a:lnR>
+                      <a:noFill/>
+                    </a:lnR>
+                    <a:lnT w="9525" cap="flat" cmpd="sng" algn="ctr">
+                      <a:solidFill>
+                        <a:srgbClr val="D6D6D6"/>
+                      </a:solidFill>
+                      <a:prstDash val="solid"/>
+                      <a:round/>
+                      <a:headEnd type="none" w="med" len="med"/>
+                      <a:tailEnd type="none" w="med" len="med"/>
+                    </a:lnT>
+                    <a:lnB w="9525">
+                      <a:solidFill>
+                        <a:srgbClr val="D6D6D6"/>
+                      </a:solidFill>
+                    </a:lnB>
+                    <a:noFill/>
+                  </a:tcPr>
+                </a:tc>
+                <a:tc>
+                  <a:txBody>
+                    <a:bodyPr/>
+                    <a:lstStyle/>
+                    <a:p>
+                      <a:pPr marL="0" algn="ctr" defTabSz="914400" rtl="0" eaLnBrk="1" latinLnBrk="0" hangingPunct="1"/>
+                      <a:r>
+                        <a:rPr sz="800" b="0" kern="1200" dirty="0">
+                          <a:solidFill>
+                            <a:srgbClr val="0A0A0A"/>
+                          </a:solidFill>
+                          <a:latin typeface="微软雅黑" panose="020B0503020204020204" pitchFamily="34" charset="-122"/>
+                          <a:ea typeface="微软雅黑" panose="020B0503020204020204" pitchFamily="34" charset="-122"/>
+                          <a:cs typeface="+mn-cs"/>
+                        </a:rPr>
+                        <a:t>A$35.90</a:t>
+                      </a:r>
+                    </a:p>
+                  </a:txBody>
+                  <a:tcPr marL="27432" marR="27432" marT="9144" marB="9144">
+                    <a:lnL>
+                      <a:noFill/>
+                    </a:lnL>
+                    <a:lnR>
+                      <a:noFill/>
+                    </a:lnR>
+                    <a:lnT w="9525" cap="flat" cmpd="sng" algn="ctr">
+                      <a:solidFill>
+                        <a:srgbClr val="D6D6D6"/>
+                      </a:solidFill>
+                      <a:prstDash val="solid"/>
+                      <a:round/>
+                      <a:headEnd type="none" w="med" len="med"/>
+                      <a:tailEnd type="none" w="med" len="med"/>
+                    </a:lnT>
+                    <a:lnB w="9525">
+                      <a:solidFill>
+                        <a:srgbClr val="D6D6D6"/>
+                      </a:solidFill>
+                    </a:lnB>
+                    <a:noFill/>
+                  </a:tcPr>
+                </a:tc>
+                <a:tc>
+                  <a:txBody>
+                    <a:bodyPr/>
+                    <a:lstStyle/>
+                    <a:p>
+                      <a:pPr marL="0" algn="ctr" defTabSz="914400" rtl="0" eaLnBrk="1" latinLnBrk="0" hangingPunct="1"/>
+                      <a:r>
+                        <a:rPr sz="800" b="0" kern="1200" dirty="0">
+                          <a:solidFill>
+                            <a:srgbClr val="0A0A0A"/>
+                          </a:solidFill>
+                          <a:latin typeface="微软雅黑" panose="020B0503020204020204" pitchFamily="34" charset="-122"/>
+                          <a:ea typeface="微软雅黑" panose="020B0503020204020204" pitchFamily="34" charset="-122"/>
+                          <a:cs typeface="+mn-cs"/>
+                        </a:rPr>
+                        <a:t>Debit</a:t>
+                      </a:r>
+                    </a:p>
+                  </a:txBody>
+                  <a:tcPr marL="27432" marR="27432" marT="9144" marB="9144">
+                    <a:lnL>
+                      <a:noFill/>
+                    </a:lnL>
+                    <a:lnR>
+                      <a:noFill/>
+                    </a:lnR>
+                    <a:lnT w="9525" cap="flat" cmpd="sng" algn="ctr">
+                      <a:solidFill>
+                        <a:srgbClr val="D6D6D6"/>
+                      </a:solidFill>
+                      <a:prstDash val="solid"/>
+                      <a:round/>
+                      <a:headEnd type="none" w="med" len="med"/>
+                      <a:tailEnd type="none" w="med" len="med"/>
+                    </a:lnT>
+                    <a:lnB w="9525">
+                      <a:solidFill>
+                        <a:srgbClr val="D6D6D6"/>
+                      </a:solidFill>
+                    </a:lnB>
+                    <a:noFill/>
+                  </a:tcPr>
+                </a:tc>
+                <a:tc>
+                  <a:txBody>
+                    <a:bodyPr/>
+                    <a:lstStyle/>
+                    <a:p>
+                      <a:pPr marL="0" algn="ctr" defTabSz="914400" rtl="0" eaLnBrk="1" latinLnBrk="0" hangingPunct="1"/>
+                      <a:r>
+                        <a:rPr sz="800" b="0" kern="1200" dirty="0">
+                          <a:solidFill>
+                            <a:srgbClr val="0A0A0A"/>
+                          </a:solidFill>
+                          <a:latin typeface="微软雅黑" panose="020B0503020204020204" pitchFamily="34" charset="-122"/>
+                          <a:ea typeface="微软雅黑" panose="020B0503020204020204" pitchFamily="34" charset="-122"/>
+                          <a:cs typeface="+mn-cs"/>
+                        </a:rPr>
+                        <a:t>CHEMIST WAREHOUSE 123</a:t>
+                      </a:r>
+                    </a:p>
+                  </a:txBody>
+                  <a:tcPr marL="27432" marR="27432" marT="9144" marB="9144">
+                    <a:lnL>
+                      <a:noFill/>
+                    </a:lnL>
+                    <a:lnR>
+                      <a:noFill/>
+                    </a:lnR>
+                    <a:lnT w="9525" cap="flat" cmpd="sng" algn="ctr">
+                      <a:solidFill>
+                        <a:srgbClr val="D6D6D6"/>
+                      </a:solidFill>
+                      <a:prstDash val="solid"/>
+                      <a:round/>
+                      <a:headEnd type="none" w="med" len="med"/>
+                      <a:tailEnd type="none" w="med" len="med"/>
+                    </a:lnT>
+                    <a:lnB w="9525" cap="flat" cmpd="sng" algn="ctr">
+                      <a:solidFill>
+                        <a:srgbClr val="D6D6D6"/>
+                      </a:solidFill>
+                      <a:prstDash val="solid"/>
+                      <a:round/>
+                      <a:headEnd type="none" w="med" len="med"/>
+                      <a:tailEnd type="none" w="med" len="med"/>
+                    </a:lnB>
+                    <a:noFill/>
+                  </a:tcPr>
+                </a:tc>
+                <a:extLst>
+                  <a:ext uri="{0D108BD9-81ED-4DB2-BD59-A6C34878D82A}">
+                    <a16:rowId xmlns:a16="http://schemas.microsoft.com/office/drawing/2014/main" val="10003"/>
+                  </a:ext>
+                </a:extLst>
+              </a:tr>
+              <a:tr h="170373">
+                <a:tc>
+                  <a:txBody>
+                    <a:bodyPr/>
+                    <a:lstStyle/>
+                    <a:p>
+                      <a:pPr marL="0" algn="ctr" defTabSz="914400" rtl="0" eaLnBrk="1" latinLnBrk="0" hangingPunct="1"/>
+                      <a:r>
+                        <a:rPr sz="800" b="0" kern="1200">
+                          <a:solidFill>
+                            <a:srgbClr val="0A0A0A"/>
+                          </a:solidFill>
+                          <a:latin typeface="微软雅黑" panose="020B0503020204020204" pitchFamily="34" charset="-122"/>
+                          <a:ea typeface="微软雅黑" panose="020B0503020204020204" pitchFamily="34" charset="-122"/>
+                          <a:cs typeface="+mn-cs"/>
+                        </a:rPr>
+                        <a:t>2026/04/08</a:t>
+                      </a:r>
+                    </a:p>
+                  </a:txBody>
+                  <a:tcPr marL="27432" marR="27432" marT="9144" marB="9144">
+                    <a:lnL>
+                      <a:noFill/>
+                    </a:lnL>
+                    <a:lnR>
+                      <a:noFill/>
+                    </a:lnR>
+                    <a:lnT w="9525" cap="flat" cmpd="sng" algn="ctr">
+                      <a:solidFill>
+                        <a:srgbClr val="D6D6D6"/>
+                      </a:solidFill>
+                      <a:prstDash val="solid"/>
+                      <a:round/>
+                      <a:headEnd type="none" w="med" len="med"/>
+                      <a:tailEnd type="none" w="med" len="med"/>
+                    </a:lnT>
+                    <a:lnB w="9525">
+                      <a:solidFill>
+                        <a:srgbClr val="D6D6D6"/>
+                      </a:solidFill>
+                    </a:lnB>
+                    <a:noFill/>
+                  </a:tcPr>
+                </a:tc>
+                <a:tc>
+                  <a:txBody>
+                    <a:bodyPr/>
+                    <a:lstStyle/>
+                    <a:p>
+                      <a:pPr marL="0" algn="ctr" defTabSz="914400" rtl="0" eaLnBrk="1" latinLnBrk="0" hangingPunct="1"/>
+                      <a:r>
+                        <a:rPr sz="800" b="0" kern="1200" dirty="0">
+                          <a:solidFill>
+                            <a:srgbClr val="0A0A0A"/>
+                          </a:solidFill>
+                          <a:latin typeface="微软雅黑" panose="020B0503020204020204" pitchFamily="34" charset="-122"/>
+                          <a:ea typeface="微软雅黑" panose="020B0503020204020204" pitchFamily="34" charset="-122"/>
+                          <a:cs typeface="+mn-cs"/>
+                        </a:rPr>
+                        <a:t>A$8.99</a:t>
+                      </a:r>
+                    </a:p>
+                  </a:txBody>
+                  <a:tcPr marL="27432" marR="27432" marT="9144" marB="9144">
+                    <a:lnL>
+                      <a:noFill/>
+                    </a:lnL>
+                    <a:lnR>
+                      <a:noFill/>
+                    </a:lnR>
+                    <a:lnT w="9525" cap="flat" cmpd="sng" algn="ctr">
+                      <a:solidFill>
+                        <a:srgbClr val="D6D6D6"/>
+                      </a:solidFill>
+                      <a:prstDash val="solid"/>
+                      <a:round/>
+                      <a:headEnd type="none" w="med" len="med"/>
+                      <a:tailEnd type="none" w="med" len="med"/>
+                    </a:lnT>
+                    <a:lnB w="9525">
+                      <a:solidFill>
+                        <a:srgbClr val="D6D6D6"/>
+                      </a:solidFill>
+                    </a:lnB>
+                    <a:noFill/>
+                  </a:tcPr>
+                </a:tc>
+                <a:tc>
+                  <a:txBody>
+                    <a:bodyPr/>
+                    <a:lstStyle/>
+                    <a:p>
+                      <a:pPr marL="0" algn="ctr" defTabSz="914400" rtl="0" eaLnBrk="1" latinLnBrk="0" hangingPunct="1"/>
+                      <a:r>
+                        <a:rPr sz="800" b="0" kern="1200">
+                          <a:solidFill>
+                            <a:srgbClr val="0A0A0A"/>
+                          </a:solidFill>
+                          <a:latin typeface="微软雅黑" panose="020B0503020204020204" pitchFamily="34" charset="-122"/>
+                          <a:ea typeface="微软雅黑" panose="020B0503020204020204" pitchFamily="34" charset="-122"/>
+                          <a:cs typeface="+mn-cs"/>
+                        </a:rPr>
+                        <a:t>Debit</a:t>
+                      </a:r>
+                    </a:p>
+                  </a:txBody>
+                  <a:tcPr marL="27432" marR="27432" marT="9144" marB="9144">
+                    <a:lnL>
+                      <a:noFill/>
+                    </a:lnL>
+                    <a:lnR>
+                      <a:noFill/>
+                    </a:lnR>
+                    <a:lnT w="9525" cap="flat" cmpd="sng" algn="ctr">
+                      <a:solidFill>
+                        <a:srgbClr val="D6D6D6"/>
+                      </a:solidFill>
+                      <a:prstDash val="solid"/>
+                      <a:round/>
+                      <a:headEnd type="none" w="med" len="med"/>
+                      <a:tailEnd type="none" w="med" len="med"/>
+                    </a:lnT>
+                    <a:lnB w="9525">
+                      <a:solidFill>
+                        <a:srgbClr val="D6D6D6"/>
+                      </a:solidFill>
+                    </a:lnB>
+                    <a:noFill/>
+                  </a:tcPr>
+                </a:tc>
+                <a:tc>
+                  <a:txBody>
+                    <a:bodyPr/>
+                    <a:lstStyle/>
+                    <a:p>
+                      <a:pPr marL="0" algn="ctr" defTabSz="914400" rtl="0" eaLnBrk="1" latinLnBrk="0" hangingPunct="1"/>
+                      <a:r>
+                        <a:rPr sz="800" b="0" kern="1200" dirty="0">
+                          <a:solidFill>
+                            <a:srgbClr val="0A0A0A"/>
+                          </a:solidFill>
+                          <a:latin typeface="微软雅黑" panose="020B0503020204020204" pitchFamily="34" charset="-122"/>
+                          <a:ea typeface="微软雅黑" panose="020B0503020204020204" pitchFamily="34" charset="-122"/>
+                          <a:cs typeface="+mn-cs"/>
+                        </a:rPr>
+                        <a:t>AMZNPRIMEA*</a:t>
+                      </a:r>
+                    </a:p>
+                  </a:txBody>
+                  <a:tcPr marL="27432" marR="27432" marT="9144" marB="9144">
+                    <a:lnL>
+                      <a:noFill/>
+                    </a:lnL>
+                    <a:lnR>
+                      <a:noFill/>
+                    </a:lnR>
+                    <a:lnT w="9525" cap="flat" cmpd="sng" algn="ctr">
+                      <a:solidFill>
+                        <a:srgbClr val="D6D6D6"/>
+                      </a:solidFill>
+                      <a:prstDash val="solid"/>
+                      <a:round/>
+                      <a:headEnd type="none" w="med" len="med"/>
+                      <a:tailEnd type="none" w="med" len="med"/>
+                    </a:lnT>
+                    <a:lnB w="9525" cap="flat" cmpd="sng" algn="ctr">
+                      <a:solidFill>
+                        <a:srgbClr val="D6D6D6"/>
+                      </a:solidFill>
+                      <a:prstDash val="solid"/>
+                      <a:round/>
+                      <a:headEnd type="none" w="med" len="med"/>
+                      <a:tailEnd type="none" w="med" len="med"/>
+                    </a:lnB>
+                    <a:noFill/>
+                  </a:tcPr>
+                </a:tc>
+                <a:extLst>
+                  <a:ext uri="{0D108BD9-81ED-4DB2-BD59-A6C34878D82A}">
+                    <a16:rowId xmlns:a16="http://schemas.microsoft.com/office/drawing/2014/main" val="10004"/>
+                  </a:ext>
+                </a:extLst>
+              </a:tr>
+              <a:tr h="170373">
+                <a:tc>
+                  <a:txBody>
+                    <a:bodyPr/>
+                    <a:lstStyle/>
+                    <a:p>
+                      <a:pPr marL="0" algn="ctr" defTabSz="914400" rtl="0" eaLnBrk="1" latinLnBrk="0" hangingPunct="1"/>
+                      <a:r>
+                        <a:rPr sz="800" b="0" kern="1200">
+                          <a:solidFill>
+                            <a:srgbClr val="0A0A0A"/>
+                          </a:solidFill>
+                          <a:latin typeface="微软雅黑" panose="020B0503020204020204" pitchFamily="34" charset="-122"/>
+                          <a:ea typeface="微软雅黑" panose="020B0503020204020204" pitchFamily="34" charset="-122"/>
+                          <a:cs typeface="+mn-cs"/>
+                        </a:rPr>
+                        <a:t>2026/04/10</a:t>
+                      </a:r>
+                    </a:p>
+                  </a:txBody>
+                  <a:tcPr marL="27432" marR="27432" marT="9144" marB="9144">
+                    <a:lnL>
+                      <a:noFill/>
+                    </a:lnL>
+                    <a:lnR>
+                      <a:noFill/>
+                    </a:lnR>
+                    <a:lnT w="9525" cap="flat" cmpd="sng" algn="ctr">
+                      <a:solidFill>
+                        <a:srgbClr val="D6D6D6"/>
+                      </a:solidFill>
+                      <a:prstDash val="solid"/>
+                      <a:round/>
+                      <a:headEnd type="none" w="med" len="med"/>
+                      <a:tailEnd type="none" w="med" len="med"/>
+                    </a:lnT>
+                    <a:lnB w="9525">
+                      <a:solidFill>
+                        <a:srgbClr val="D6D6D6"/>
+                      </a:solidFill>
+                    </a:lnB>
+                    <a:noFill/>
+                  </a:tcPr>
+                </a:tc>
+                <a:tc>
+                  <a:txBody>
+                    <a:bodyPr/>
+                    <a:lstStyle/>
+                    <a:p>
+                      <a:pPr marL="0" algn="ctr" defTabSz="914400" rtl="0" eaLnBrk="1" latinLnBrk="0" hangingPunct="1"/>
+                      <a:r>
+                        <a:rPr sz="800" b="0" kern="1200">
+                          <a:solidFill>
+                            <a:srgbClr val="0A0A0A"/>
+                          </a:solidFill>
+                          <a:latin typeface="微软雅黑" panose="020B0503020204020204" pitchFamily="34" charset="-122"/>
+                          <a:ea typeface="微软雅黑" panose="020B0503020204020204" pitchFamily="34" charset="-122"/>
+                          <a:cs typeface="+mn-cs"/>
+                        </a:rPr>
+                        <a:t>A$3,420.50</a:t>
+                      </a:r>
+                    </a:p>
+                  </a:txBody>
+                  <a:tcPr marL="27432" marR="27432" marT="9144" marB="9144">
+                    <a:lnL>
+                      <a:noFill/>
+                    </a:lnL>
+                    <a:lnR>
+                      <a:noFill/>
+                    </a:lnR>
+                    <a:lnT w="9525" cap="flat" cmpd="sng" algn="ctr">
+                      <a:solidFill>
+                        <a:srgbClr val="D6D6D6"/>
+                      </a:solidFill>
+                      <a:prstDash val="solid"/>
+                      <a:round/>
+                      <a:headEnd type="none" w="med" len="med"/>
+                      <a:tailEnd type="none" w="med" len="med"/>
+                    </a:lnT>
+                    <a:lnB w="9525">
+                      <a:solidFill>
+                        <a:srgbClr val="D6D6D6"/>
+                      </a:solidFill>
+                    </a:lnB>
+                    <a:noFill/>
+                  </a:tcPr>
+                </a:tc>
+                <a:tc>
+                  <a:txBody>
+                    <a:bodyPr/>
+                    <a:lstStyle/>
+                    <a:p>
+                      <a:pPr marL="0" algn="ctr" defTabSz="914400" rtl="0" eaLnBrk="1" latinLnBrk="0" hangingPunct="1"/>
+                      <a:r>
+                        <a:rPr sz="800" b="0" kern="1200">
+                          <a:solidFill>
+                            <a:srgbClr val="0A0A0A"/>
+                          </a:solidFill>
+                          <a:latin typeface="微软雅黑" panose="020B0503020204020204" pitchFamily="34" charset="-122"/>
+                          <a:ea typeface="微软雅黑" panose="020B0503020204020204" pitchFamily="34" charset="-122"/>
+                          <a:cs typeface="+mn-cs"/>
+                        </a:rPr>
+                        <a:t>Credit</a:t>
+                      </a:r>
+                    </a:p>
+                  </a:txBody>
+                  <a:tcPr marL="27432" marR="27432" marT="9144" marB="9144">
+                    <a:lnL>
+                      <a:noFill/>
+                    </a:lnL>
+                    <a:lnR>
+                      <a:noFill/>
+                    </a:lnR>
+                    <a:lnT w="9525" cap="flat" cmpd="sng" algn="ctr">
+                      <a:solidFill>
+                        <a:srgbClr val="D6D6D6"/>
+                      </a:solidFill>
+                      <a:prstDash val="solid"/>
+                      <a:round/>
+                      <a:headEnd type="none" w="med" len="med"/>
+                      <a:tailEnd type="none" w="med" len="med"/>
+                    </a:lnT>
+                    <a:lnB w="9525">
+                      <a:solidFill>
+                        <a:srgbClr val="D6D6D6"/>
+                      </a:solidFill>
+                    </a:lnB>
+                    <a:noFill/>
+                  </a:tcPr>
+                </a:tc>
+                <a:tc>
+                  <a:txBody>
+                    <a:bodyPr/>
+                    <a:lstStyle/>
+                    <a:p>
+                      <a:pPr marL="0" algn="ctr" defTabSz="914400" rtl="0" eaLnBrk="1" latinLnBrk="0" hangingPunct="1"/>
+                      <a:r>
+                        <a:rPr sz="800" b="0" kern="1200" dirty="0">
+                          <a:solidFill>
+                            <a:srgbClr val="0A0A0A"/>
+                          </a:solidFill>
+                          <a:latin typeface="微软雅黑" panose="020B0503020204020204" pitchFamily="34" charset="-122"/>
+                          <a:ea typeface="微软雅黑" panose="020B0503020204020204" pitchFamily="34" charset="-122"/>
+                          <a:cs typeface="+mn-cs"/>
+                        </a:rPr>
+                        <a:t>PAYROLL ACME PTY LTD</a:t>
+                      </a:r>
+                    </a:p>
+                  </a:txBody>
+                  <a:tcPr marL="27432" marR="27432" marT="9144" marB="9144">
+                    <a:lnL>
+                      <a:noFill/>
+                    </a:lnL>
+                    <a:lnR>
+                      <a:noFill/>
+                    </a:lnR>
+                    <a:lnT w="9525" cap="flat" cmpd="sng" algn="ctr">
+                      <a:solidFill>
+                        <a:srgbClr val="D6D6D6"/>
+                      </a:solidFill>
+                      <a:prstDash val="solid"/>
+                      <a:round/>
+                      <a:headEnd type="none" w="med" len="med"/>
+                      <a:tailEnd type="none" w="med" len="med"/>
+                    </a:lnT>
+                    <a:lnB w="9525">
+                      <a:solidFill>
+                        <a:srgbClr val="D6D6D6"/>
+                      </a:solidFill>
+                    </a:lnB>
+                    <a:noFill/>
+                  </a:tcPr>
+                </a:tc>
+                <a:extLst>
+                  <a:ext uri="{0D108BD9-81ED-4DB2-BD59-A6C34878D82A}">
+                    <a16:rowId xmlns:a16="http://schemas.microsoft.com/office/drawing/2014/main" val="10005"/>
+                  </a:ext>
+                </a:extLst>
+              </a:tr>
+            </a:tbl>
+          </a:graphicData>
+        </a:graphic>
+      </p:graphicFrame>
+      <p:graphicFrame>
+        <p:nvGraphicFramePr>
+          <p:cNvPr id="16" name="init-table">
+            <a:extLst>
+              <a:ext uri="{FF2B5EF4-FFF2-40B4-BE49-F238E27FC236}">
+                <a16:creationId xmlns:a16="http://schemas.microsoft.com/office/drawing/2014/main" id="{3C86CAD7-1100-4D7C-B8CF-F22C4AFE4904}"/>
+              </a:ext>
+            </a:extLst>
+          </p:cNvPr>
+          <p:cNvGraphicFramePr>
+            <a:graphicFrameLocks noGrp="1"/>
+          </p:cNvGraphicFramePr>
+          <p:nvPr>
+            <p:extLst>
+              <p:ext uri="{D42A27DB-BD31-4B8C-83A1-F6EECF244321}">
+                <p14:modId xmlns:p14="http://schemas.microsoft.com/office/powerpoint/2010/main" val="4233041013"/>
+              </p:ext>
+            </p:extLst>
+          </p:nvPr>
+        </p:nvGraphicFramePr>
+        <p:xfrm>
+          <a:off x="568385" y="2839315"/>
+          <a:ext cx="10901631" cy="1022238"/>
+        </p:xfrm>
+        <a:graphic>
+          <a:graphicData uri="http://schemas.openxmlformats.org/drawingml/2006/table">
+            <a:tbl>
+              <a:tblPr/>
+              <a:tblGrid>
+                <a:gridCol w="796947">
+                  <a:extLst>
+                    <a:ext uri="{9D8B030D-6E8A-4147-A177-3AD203B41FA5}">
+                      <a16:colId xmlns:a16="http://schemas.microsoft.com/office/drawing/2014/main" val="20000"/>
+                    </a:ext>
+                  </a:extLst>
+                </a:gridCol>
+                <a:gridCol w="3717051">
+                  <a:extLst>
+                    <a:ext uri="{9D8B030D-6E8A-4147-A177-3AD203B41FA5}">
+                      <a16:colId xmlns:a16="http://schemas.microsoft.com/office/drawing/2014/main" val="20001"/>
+                    </a:ext>
+                  </a:extLst>
+                </a:gridCol>
+                <a:gridCol w="1159622">
+                  <a:extLst>
+                    <a:ext uri="{9D8B030D-6E8A-4147-A177-3AD203B41FA5}">
+                      <a16:colId xmlns:a16="http://schemas.microsoft.com/office/drawing/2014/main" val="2631831465"/>
+                    </a:ext>
+                  </a:extLst>
+                </a:gridCol>
+                <a:gridCol w="1277223">
+                  <a:extLst>
+                    <a:ext uri="{9D8B030D-6E8A-4147-A177-3AD203B41FA5}">
+                      <a16:colId xmlns:a16="http://schemas.microsoft.com/office/drawing/2014/main" val="20002"/>
+                    </a:ext>
+                  </a:extLst>
+                </a:gridCol>
+                <a:gridCol w="923613">
+                  <a:extLst>
+                    <a:ext uri="{9D8B030D-6E8A-4147-A177-3AD203B41FA5}">
+                      <a16:colId xmlns:a16="http://schemas.microsoft.com/office/drawing/2014/main" val="4140160165"/>
+                    </a:ext>
+                  </a:extLst>
+                </a:gridCol>
+                <a:gridCol w="676780">
+                  <a:extLst>
+                    <a:ext uri="{9D8B030D-6E8A-4147-A177-3AD203B41FA5}">
+                      <a16:colId xmlns:a16="http://schemas.microsoft.com/office/drawing/2014/main" val="2534051383"/>
+                    </a:ext>
+                  </a:extLst>
+                </a:gridCol>
+                <a:gridCol w="2350395">
+                  <a:extLst>
+                    <a:ext uri="{9D8B030D-6E8A-4147-A177-3AD203B41FA5}">
+                      <a16:colId xmlns:a16="http://schemas.microsoft.com/office/drawing/2014/main" val="994888910"/>
+                    </a:ext>
+                  </a:extLst>
+                </a:gridCol>
+              </a:tblGrid>
+              <a:tr h="170373">
+                <a:tc>
+                  <a:txBody>
+                    <a:bodyPr/>
+                    <a:lstStyle/>
+                    <a:p>
+                      <a:pPr algn="l"/>
+                      <a:r>
+                        <a:rPr sz="800" b="1">
+                          <a:solidFill>
+                            <a:srgbClr val="0A0A0A"/>
+                          </a:solidFill>
+                          <a:latin typeface="微软雅黑"/>
+                          <a:ea typeface="微软雅黑"/>
+                        </a:rPr>
+                        <a:t>日期</a:t>
+                      </a:r>
+                    </a:p>
+                  </a:txBody>
+                  <a:tcPr marL="27432" marR="27432" marT="9144" marB="9144">
+                    <a:lnL>
+                      <a:noFill/>
+                    </a:lnL>
+                    <a:lnR>
+                      <a:noFill/>
+                    </a:lnR>
+                    <a:lnT>
+                      <a:noFill/>
+                    </a:lnT>
+                    <a:lnB w="19050">
+                      <a:solidFill>
+                        <a:srgbClr val="0A0A0A"/>
+                      </a:solidFill>
+                    </a:lnB>
+                    <a:noFill/>
+                  </a:tcPr>
+                </a:tc>
+                <a:tc>
+                  <a:txBody>
+                    <a:bodyPr/>
+                    <a:lstStyle/>
+                    <a:p>
+                      <a:pPr algn="l"/>
+                      <a:r>
+                        <a:rPr sz="800" b="1" dirty="0" err="1">
+                          <a:solidFill>
+                            <a:srgbClr val="0A0A0A"/>
+                          </a:solidFill>
+                          <a:latin typeface="微软雅黑"/>
+                          <a:ea typeface="微软雅黑"/>
+                        </a:rPr>
+                        <a:t>交易描述</a:t>
+                      </a:r>
+                      <a:endParaRPr sz="800" b="1" dirty="0">
+                        <a:solidFill>
+                          <a:srgbClr val="0A0A0A"/>
+                        </a:solidFill>
+                        <a:latin typeface="微软雅黑"/>
+                        <a:ea typeface="微软雅黑"/>
+                      </a:endParaRPr>
+                    </a:p>
+                  </a:txBody>
+                  <a:tcPr marL="27432" marR="27432" marT="9144" marB="9144">
+                    <a:lnL>
+                      <a:noFill/>
+                    </a:lnL>
+                    <a:lnR>
+                      <a:noFill/>
+                    </a:lnR>
+                    <a:lnT>
+                      <a:noFill/>
+                    </a:lnT>
+                    <a:lnB w="19050">
+                      <a:solidFill>
+                        <a:srgbClr val="0A0A0A"/>
+                      </a:solidFill>
+                    </a:lnB>
+                    <a:noFill/>
+                  </a:tcPr>
+                </a:tc>
+                <a:tc>
+                  <a:txBody>
+                    <a:bodyPr/>
+                    <a:lstStyle/>
+                    <a:p>
+                      <a:pPr algn="l"/>
+                      <a:r>
+                        <a:rPr sz="800" b="1" dirty="0" err="1">
+                          <a:solidFill>
+                            <a:srgbClr val="0A0A0A"/>
+                          </a:solidFill>
+                          <a:latin typeface="微软雅黑"/>
+                          <a:ea typeface="微软雅黑"/>
+                        </a:rPr>
+                        <a:t>交易金额</a:t>
+                      </a:r>
+                      <a:endParaRPr sz="800" b="1" dirty="0">
+                        <a:solidFill>
+                          <a:srgbClr val="0A0A0A"/>
+                        </a:solidFill>
+                        <a:latin typeface="微软雅黑"/>
+                        <a:ea typeface="微软雅黑"/>
+                      </a:endParaRPr>
+                    </a:p>
+                  </a:txBody>
+                  <a:tcPr marL="27432" marR="27432" marT="9144" marB="9144">
+                    <a:lnL>
+                      <a:noFill/>
+                    </a:lnL>
+                    <a:lnR>
+                      <a:noFill/>
+                    </a:lnR>
+                    <a:lnT>
+                      <a:noFill/>
+                    </a:lnT>
+                    <a:lnB w="19050" cap="flat" cmpd="sng" algn="ctr">
+                      <a:solidFill>
+                        <a:srgbClr val="0A0A0A"/>
+                      </a:solidFill>
+                      <a:prstDash val="solid"/>
+                      <a:round/>
+                      <a:headEnd type="none" w="med" len="med"/>
+                      <a:tailEnd type="none" w="med" len="med"/>
+                    </a:lnB>
+                    <a:noFill/>
+                  </a:tcPr>
+                </a:tc>
+                <a:tc>
+                  <a:txBody>
+                    <a:bodyPr/>
+                    <a:lstStyle/>
+                    <a:p>
+                      <a:pPr algn="l"/>
+                      <a:r>
+                        <a:rPr sz="800" b="1" dirty="0" err="1">
+                          <a:solidFill>
+                            <a:srgbClr val="0A0A0A"/>
+                          </a:solidFill>
+                          <a:latin typeface="微软雅黑"/>
+                          <a:ea typeface="微软雅黑"/>
+                        </a:rPr>
+                        <a:t>标准交易对手</a:t>
+                      </a:r>
+                      <a:endParaRPr sz="800" b="1" dirty="0">
+                        <a:solidFill>
+                          <a:srgbClr val="0A0A0A"/>
+                        </a:solidFill>
+                        <a:latin typeface="微软雅黑"/>
+                        <a:ea typeface="微软雅黑"/>
+                      </a:endParaRPr>
+                    </a:p>
+                  </a:txBody>
+                  <a:tcPr marL="27432" marR="27432" marT="9144" marB="9144">
+                    <a:lnL>
+                      <a:noFill/>
+                    </a:lnL>
+                    <a:lnR>
+                      <a:noFill/>
+                    </a:lnR>
+                    <a:lnT>
+                      <a:noFill/>
+                    </a:lnT>
+                    <a:lnB w="19050">
+                      <a:solidFill>
+                        <a:srgbClr val="0A0A0A"/>
+                      </a:solidFill>
+                    </a:lnB>
+                    <a:noFill/>
+                  </a:tcPr>
+                </a:tc>
+                <a:tc>
+                  <a:txBody>
+                    <a:bodyPr/>
+                    <a:lstStyle/>
+                    <a:p>
+                      <a:pPr algn="l"/>
+                      <a:r>
+                        <a:rPr sz="800" b="1" dirty="0" err="1">
+                          <a:solidFill>
+                            <a:srgbClr val="0A0A0A"/>
+                          </a:solidFill>
+                          <a:latin typeface="微软雅黑"/>
+                          <a:ea typeface="微软雅黑"/>
+                        </a:rPr>
+                        <a:t>主体类型</a:t>
+                      </a:r>
+                      <a:endParaRPr sz="800" b="1" dirty="0">
+                        <a:solidFill>
+                          <a:srgbClr val="0A0A0A"/>
+                        </a:solidFill>
+                        <a:latin typeface="微软雅黑"/>
+                        <a:ea typeface="微软雅黑"/>
+                      </a:endParaRPr>
+                    </a:p>
+                  </a:txBody>
+                  <a:tcPr marL="27432" marR="27432" marT="9144" marB="9144">
+                    <a:lnL>
+                      <a:noFill/>
+                    </a:lnL>
+                    <a:lnR>
+                      <a:noFill/>
+                    </a:lnR>
+                    <a:lnT>
+                      <a:noFill/>
+                    </a:lnT>
+                    <a:lnB w="19050" cap="flat" cmpd="sng" algn="ctr">
+                      <a:solidFill>
+                        <a:srgbClr val="0A0A0A"/>
+                      </a:solidFill>
+                      <a:prstDash val="solid"/>
+                      <a:round/>
+                      <a:headEnd type="none" w="med" len="med"/>
+                      <a:tailEnd type="none" w="med" len="med"/>
+                    </a:lnB>
+                    <a:noFill/>
+                  </a:tcPr>
+                </a:tc>
+                <a:tc>
+                  <a:txBody>
+                    <a:bodyPr/>
+                    <a:lstStyle/>
+                    <a:p>
+                      <a:pPr algn="l"/>
+                      <a:r>
+                        <a:rPr sz="800" b="1">
+                          <a:solidFill>
+                            <a:srgbClr val="0A0A0A"/>
+                          </a:solidFill>
+                          <a:latin typeface="微软雅黑"/>
+                          <a:ea typeface="微软雅黑"/>
+                        </a:rPr>
+                        <a:t>一级分类</a:t>
+                      </a:r>
+                    </a:p>
+                  </a:txBody>
+                  <a:tcPr marL="27432" marR="27432" marT="9144" marB="9144">
+                    <a:lnL>
+                      <a:noFill/>
+                    </a:lnL>
+                    <a:lnR>
+                      <a:noFill/>
+                    </a:lnR>
+                    <a:lnT>
+                      <a:noFill/>
+                    </a:lnT>
+                    <a:lnB w="19050" cap="flat" cmpd="sng" algn="ctr">
+                      <a:solidFill>
+                        <a:srgbClr val="0A0A0A"/>
+                      </a:solidFill>
+                      <a:prstDash val="solid"/>
+                      <a:round/>
+                      <a:headEnd type="none" w="med" len="med"/>
+                      <a:tailEnd type="none" w="med" len="med"/>
+                    </a:lnB>
+                    <a:noFill/>
+                  </a:tcPr>
+                </a:tc>
+                <a:tc>
+                  <a:txBody>
+                    <a:bodyPr/>
+                    <a:lstStyle/>
+                    <a:p>
+                      <a:pPr algn="l"/>
+                      <a:r>
+                        <a:rPr sz="800" b="1">
+                          <a:solidFill>
+                            <a:srgbClr val="0A0A0A"/>
+                          </a:solidFill>
+                          <a:latin typeface="微软雅黑"/>
+                          <a:ea typeface="微软雅黑"/>
+                        </a:rPr>
+                        <a:t>分类依据</a:t>
+                      </a:r>
+                    </a:p>
+                  </a:txBody>
+                  <a:tcPr marL="27432" marR="27432" marT="9144" marB="9144">
+                    <a:lnL>
+                      <a:noFill/>
+                    </a:lnL>
+                    <a:lnR>
+                      <a:noFill/>
+                    </a:lnR>
+                    <a:lnT>
+                      <a:noFill/>
+                    </a:lnT>
+                    <a:lnB w="19050" cap="flat" cmpd="sng" algn="ctr">
+                      <a:solidFill>
+                        <a:srgbClr val="0A0A0A"/>
+                      </a:solidFill>
+                      <a:prstDash val="solid"/>
+                      <a:round/>
+                      <a:headEnd type="none" w="med" len="med"/>
+                      <a:tailEnd type="none" w="med" len="med"/>
+                    </a:lnB>
+                    <a:noFill/>
+                  </a:tcPr>
+                </a:tc>
+                <a:extLst>
+                  <a:ext uri="{0D108BD9-81ED-4DB2-BD59-A6C34878D82A}">
+                    <a16:rowId xmlns:a16="http://schemas.microsoft.com/office/drawing/2014/main" val="10000"/>
+                  </a:ext>
+                </a:extLst>
+              </a:tr>
+              <a:tr h="170373">
+                <a:tc>
+                  <a:txBody>
+                    <a:bodyPr/>
+                    <a:lstStyle/>
+                    <a:p>
+                      <a:pPr marL="0" algn="l" defTabSz="914400" rtl="0" eaLnBrk="1" latinLnBrk="0" hangingPunct="1"/>
+                      <a:r>
+                        <a:rPr sz="800" b="0" kern="1200" dirty="0">
+                          <a:solidFill>
+                            <a:srgbClr val="0A0A0A"/>
+                          </a:solidFill>
+                          <a:latin typeface="微软雅黑" panose="020B0503020204020204" pitchFamily="34" charset="-122"/>
+                          <a:ea typeface="微软雅黑" panose="020B0503020204020204" pitchFamily="34" charset="-122"/>
+                          <a:cs typeface="+mn-cs"/>
+                        </a:rPr>
+                        <a:t>2026/03/26</a:t>
+                      </a:r>
+                    </a:p>
+                  </a:txBody>
+                  <a:tcPr marL="27432" marR="27432" marT="9144" marB="9144">
+                    <a:lnL>
+                      <a:noFill/>
+                    </a:lnL>
+                    <a:lnR>
+                      <a:noFill/>
+                    </a:lnR>
+                    <a:lnT w="19050" cap="flat" cmpd="sng" algn="ctr">
+                      <a:solidFill>
+                        <a:srgbClr val="0A0A0A"/>
+                      </a:solidFill>
+                      <a:prstDash val="solid"/>
+                      <a:round/>
+                      <a:headEnd type="none" w="med" len="med"/>
+                      <a:tailEnd type="none" w="med" len="med"/>
+                    </a:lnT>
+                    <a:lnB w="9525">
+                      <a:solidFill>
+                        <a:srgbClr val="D6D6D6"/>
+                      </a:solidFill>
+                    </a:lnB>
+                    <a:noFill/>
+                  </a:tcPr>
+                </a:tc>
+                <a:tc>
+                  <a:txBody>
+                    <a:bodyPr/>
+                    <a:lstStyle/>
+                    <a:p>
+                      <a:pPr marL="0" algn="l" defTabSz="914400" rtl="0" eaLnBrk="1" latinLnBrk="0" hangingPunct="1"/>
+                      <a:r>
+                        <a:rPr sz="800" b="0" kern="1200" dirty="0">
+                          <a:solidFill>
+                            <a:srgbClr val="0A0A0A"/>
+                          </a:solidFill>
+                          <a:latin typeface="微软雅黑" panose="020B0503020204020204" pitchFamily="34" charset="-122"/>
+                          <a:ea typeface="微软雅黑" panose="020B0503020204020204" pitchFamily="34" charset="-122"/>
+                          <a:cs typeface="+mn-cs"/>
+                        </a:rPr>
+                        <a:t>BILL PAY Fair Go Finance DT.58oa72 SACC 239</a:t>
+                      </a:r>
+                    </a:p>
+                  </a:txBody>
+                  <a:tcPr marL="27432" marR="27432" marT="9144" marB="9144">
+                    <a:lnL>
+                      <a:noFill/>
+                    </a:lnL>
+                    <a:lnR>
+                      <a:noFill/>
+                    </a:lnR>
+                    <a:lnT w="19050" cap="flat" cmpd="sng" algn="ctr">
+                      <a:solidFill>
+                        <a:srgbClr val="0A0A0A"/>
+                      </a:solidFill>
+                      <a:prstDash val="solid"/>
+                      <a:round/>
+                      <a:headEnd type="none" w="med" len="med"/>
+                      <a:tailEnd type="none" w="med" len="med"/>
+                    </a:lnT>
+                    <a:lnB w="9525">
+                      <a:solidFill>
+                        <a:srgbClr val="D6D6D6"/>
+                      </a:solidFill>
+                    </a:lnB>
+                    <a:noFill/>
+                  </a:tcPr>
+                </a:tc>
+                <a:tc>
+                  <a:txBody>
+                    <a:bodyPr/>
+                    <a:lstStyle/>
+                    <a:p>
+                      <a:pPr marL="0" algn="l" defTabSz="914400" rtl="0" eaLnBrk="1" latinLnBrk="0" hangingPunct="1"/>
+                      <a:r>
+                        <a:rPr sz="800" b="0" kern="1200" dirty="0">
+                          <a:solidFill>
+                            <a:srgbClr val="0A0A0A"/>
+                          </a:solidFill>
+                          <a:latin typeface="微软雅黑" panose="020B0503020204020204" pitchFamily="34" charset="-122"/>
+                          <a:ea typeface="微软雅黑" panose="020B0503020204020204" pitchFamily="34" charset="-122"/>
+                          <a:cs typeface="+mn-cs"/>
+                        </a:rPr>
+                        <a:t>A$156</a:t>
+                      </a:r>
+                    </a:p>
+                  </a:txBody>
+                  <a:tcPr marL="27432" marR="27432" marT="9144" marB="9144">
+                    <a:lnL>
+                      <a:noFill/>
+                    </a:lnL>
+                    <a:lnR>
+                      <a:noFill/>
+                    </a:lnR>
+                    <a:lnT w="19050" cap="flat" cmpd="sng" algn="ctr">
+                      <a:solidFill>
+                        <a:srgbClr val="0A0A0A"/>
+                      </a:solidFill>
+                      <a:prstDash val="solid"/>
+                      <a:round/>
+                      <a:headEnd type="none" w="med" len="med"/>
+                      <a:tailEnd type="none" w="med" len="med"/>
+                    </a:lnT>
+                    <a:lnB w="9525" cap="flat" cmpd="sng" algn="ctr">
+                      <a:solidFill>
+                        <a:srgbClr val="D6D6D6"/>
+                      </a:solidFill>
+                      <a:prstDash val="solid"/>
+                      <a:round/>
+                      <a:headEnd type="none" w="med" len="med"/>
+                      <a:tailEnd type="none" w="med" len="med"/>
+                    </a:lnB>
+                    <a:noFill/>
+                  </a:tcPr>
+                </a:tc>
+                <a:tc>
+                  <a:txBody>
+                    <a:bodyPr/>
+                    <a:lstStyle/>
+                    <a:p>
+                      <a:pPr marL="0" algn="l" defTabSz="914400" rtl="0" eaLnBrk="1" latinLnBrk="0" hangingPunct="1"/>
+                      <a:r>
+                        <a:rPr sz="800" b="0" kern="1200">
+                          <a:solidFill>
+                            <a:srgbClr val="0A0A0A"/>
+                          </a:solidFill>
+                          <a:latin typeface="微软雅黑" panose="020B0503020204020204" pitchFamily="34" charset="-122"/>
+                          <a:ea typeface="微软雅黑" panose="020B0503020204020204" pitchFamily="34" charset="-122"/>
+                          <a:cs typeface="+mn-cs"/>
+                        </a:rPr>
+                        <a:t>Fair Go Finance</a:t>
+                      </a:r>
+                    </a:p>
+                  </a:txBody>
+                  <a:tcPr marL="27432" marR="27432" marT="9144" marB="9144">
+                    <a:lnL>
+                      <a:noFill/>
+                    </a:lnL>
+                    <a:lnR>
+                      <a:noFill/>
+                    </a:lnR>
+                    <a:lnT w="19050" cap="flat" cmpd="sng" algn="ctr">
+                      <a:solidFill>
+                        <a:srgbClr val="0A0A0A"/>
+                      </a:solidFill>
+                      <a:prstDash val="solid"/>
+                      <a:round/>
+                      <a:headEnd type="none" w="med" len="med"/>
+                      <a:tailEnd type="none" w="med" len="med"/>
+                    </a:lnT>
+                    <a:lnB w="9525">
+                      <a:solidFill>
+                        <a:srgbClr val="D6D6D6"/>
+                      </a:solidFill>
+                    </a:lnB>
+                    <a:noFill/>
+                  </a:tcPr>
+                </a:tc>
+                <a:tc>
+                  <a:txBody>
+                    <a:bodyPr/>
+                    <a:lstStyle/>
+                    <a:p>
+                      <a:pPr marL="0" algn="l" defTabSz="914400" rtl="0" eaLnBrk="1" latinLnBrk="0" hangingPunct="1"/>
+                      <a:r>
+                        <a:rPr sz="800" b="0" kern="1200" dirty="0" err="1">
+                          <a:solidFill>
+                            <a:srgbClr val="0A0A0A"/>
+                          </a:solidFill>
+                          <a:latin typeface="微软雅黑" panose="020B0503020204020204" pitchFamily="34" charset="-122"/>
+                          <a:ea typeface="微软雅黑" panose="020B0503020204020204" pitchFamily="34" charset="-122"/>
+                          <a:cs typeface="+mn-cs"/>
+                        </a:rPr>
+                        <a:t>小额信贷机构</a:t>
+                      </a:r>
+                      <a:endParaRPr sz="800" b="0" kern="1200" dirty="0">
+                        <a:solidFill>
+                          <a:srgbClr val="0A0A0A"/>
+                        </a:solidFill>
+                        <a:latin typeface="微软雅黑" panose="020B0503020204020204" pitchFamily="34" charset="-122"/>
+                        <a:ea typeface="微软雅黑" panose="020B0503020204020204" pitchFamily="34" charset="-122"/>
+                        <a:cs typeface="+mn-cs"/>
+                      </a:endParaRPr>
+                    </a:p>
+                  </a:txBody>
+                  <a:tcPr marL="27432" marR="27432" marT="9144" marB="9144">
+                    <a:lnL>
+                      <a:noFill/>
+                    </a:lnL>
+                    <a:lnR>
+                      <a:noFill/>
+                    </a:lnR>
+                    <a:lnT w="19050" cap="flat" cmpd="sng" algn="ctr">
+                      <a:solidFill>
+                        <a:srgbClr val="0A0A0A"/>
+                      </a:solidFill>
+                      <a:prstDash val="solid"/>
+                      <a:round/>
+                      <a:headEnd type="none" w="med" len="med"/>
+                      <a:tailEnd type="none" w="med" len="med"/>
+                    </a:lnT>
+                    <a:lnB w="9525" cap="flat" cmpd="sng" algn="ctr">
+                      <a:solidFill>
+                        <a:srgbClr val="D6D6D6"/>
+                      </a:solidFill>
+                      <a:prstDash val="solid"/>
+                      <a:round/>
+                      <a:headEnd type="none" w="med" len="med"/>
+                      <a:tailEnd type="none" w="med" len="med"/>
+                    </a:lnB>
+                    <a:noFill/>
+                  </a:tcPr>
+                </a:tc>
+                <a:tc>
+                  <a:txBody>
+                    <a:bodyPr/>
+                    <a:lstStyle/>
+                    <a:p>
+                      <a:pPr marL="0" algn="l" defTabSz="914400" rtl="0" eaLnBrk="1" latinLnBrk="0" hangingPunct="1"/>
+                      <a:r>
+                        <a:rPr sz="800" b="0" kern="1200">
+                          <a:solidFill>
+                            <a:srgbClr val="0A0A0A"/>
+                          </a:solidFill>
+                          <a:latin typeface="微软雅黑" panose="020B0503020204020204" pitchFamily="34" charset="-122"/>
+                          <a:ea typeface="微软雅黑" panose="020B0503020204020204" pitchFamily="34" charset="-122"/>
+                          <a:cs typeface="+mn-cs"/>
+                        </a:rPr>
+                        <a:t>贷款及还款</a:t>
+                      </a:r>
+                    </a:p>
+                  </a:txBody>
+                  <a:tcPr marL="27432" marR="27432" marT="9144" marB="9144">
+                    <a:lnL>
+                      <a:noFill/>
+                    </a:lnL>
+                    <a:lnR>
+                      <a:noFill/>
+                    </a:lnR>
+                    <a:lnT w="19050" cap="flat" cmpd="sng" algn="ctr">
+                      <a:solidFill>
+                        <a:srgbClr val="0A0A0A"/>
+                      </a:solidFill>
+                      <a:prstDash val="solid"/>
+                      <a:round/>
+                      <a:headEnd type="none" w="med" len="med"/>
+                      <a:tailEnd type="none" w="med" len="med"/>
+                    </a:lnT>
+                    <a:lnB w="9525" cap="flat" cmpd="sng" algn="ctr">
+                      <a:solidFill>
+                        <a:srgbClr val="D6D6D6"/>
+                      </a:solidFill>
+                      <a:prstDash val="solid"/>
+                      <a:round/>
+                      <a:headEnd type="none" w="med" len="med"/>
+                      <a:tailEnd type="none" w="med" len="med"/>
+                    </a:lnB>
+                    <a:noFill/>
+                  </a:tcPr>
+                </a:tc>
+                <a:tc>
+                  <a:txBody>
+                    <a:bodyPr/>
+                    <a:lstStyle/>
+                    <a:p>
+                      <a:pPr marL="0" algn="l" defTabSz="914400" rtl="0" eaLnBrk="1" latinLnBrk="0" hangingPunct="1"/>
+                      <a:r>
+                        <a:rPr sz="800" b="0" kern="1200">
+                          <a:solidFill>
+                            <a:srgbClr val="0A0A0A"/>
+                          </a:solidFill>
+                          <a:latin typeface="微软雅黑" panose="020B0503020204020204" pitchFamily="34" charset="-122"/>
+                          <a:ea typeface="微软雅黑" panose="020B0503020204020204" pitchFamily="34" charset="-122"/>
+                          <a:cs typeface="+mn-cs"/>
+                        </a:rPr>
+                        <a:t>交易方向、机构名称、产品关键词及历史交易模式</a:t>
+                      </a:r>
+                    </a:p>
+                  </a:txBody>
+                  <a:tcPr marL="27432" marR="27432" marT="9144" marB="9144">
+                    <a:lnL>
+                      <a:noFill/>
+                    </a:lnL>
+                    <a:lnR>
+                      <a:noFill/>
+                    </a:lnR>
+                    <a:lnT w="19050" cap="flat" cmpd="sng" algn="ctr">
+                      <a:solidFill>
+                        <a:srgbClr val="0A0A0A"/>
+                      </a:solidFill>
+                      <a:prstDash val="solid"/>
+                      <a:round/>
+                      <a:headEnd type="none" w="med" len="med"/>
+                      <a:tailEnd type="none" w="med" len="med"/>
+                    </a:lnT>
+                    <a:lnB w="9525" cap="flat" cmpd="sng" algn="ctr">
+                      <a:solidFill>
+                        <a:srgbClr val="D6D6D6"/>
+                      </a:solidFill>
+                      <a:prstDash val="solid"/>
+                      <a:round/>
+                      <a:headEnd type="none" w="med" len="med"/>
+                      <a:tailEnd type="none" w="med" len="med"/>
+                    </a:lnB>
+                    <a:noFill/>
+                  </a:tcPr>
+                </a:tc>
+                <a:extLst>
+                  <a:ext uri="{0D108BD9-81ED-4DB2-BD59-A6C34878D82A}">
+                    <a16:rowId xmlns:a16="http://schemas.microsoft.com/office/drawing/2014/main" val="10001"/>
+                  </a:ext>
+                </a:extLst>
+              </a:tr>
+              <a:tr h="170373">
+                <a:tc>
+                  <a:txBody>
+                    <a:bodyPr/>
+                    <a:lstStyle/>
+                    <a:p>
+                      <a:pPr marL="0" algn="l" defTabSz="914400" rtl="0" eaLnBrk="1" latinLnBrk="0" hangingPunct="1"/>
+                      <a:r>
+                        <a:rPr sz="800" b="0" kern="1200">
+                          <a:solidFill>
+                            <a:srgbClr val="0A0A0A"/>
+                          </a:solidFill>
+                          <a:latin typeface="微软雅黑" panose="020B0503020204020204" pitchFamily="34" charset="-122"/>
+                          <a:ea typeface="微软雅黑" panose="020B0503020204020204" pitchFamily="34" charset="-122"/>
+                          <a:cs typeface="+mn-cs"/>
+                        </a:rPr>
+                        <a:t>2026/03/28</a:t>
+                      </a:r>
+                    </a:p>
+                  </a:txBody>
+                  <a:tcPr marL="27432" marR="27432" marT="9144" marB="9144">
+                    <a:lnL>
+                      <a:noFill/>
+                    </a:lnL>
+                    <a:lnR>
+                      <a:noFill/>
+                    </a:lnR>
+                    <a:lnT w="9525" cap="flat" cmpd="sng" algn="ctr">
+                      <a:solidFill>
+                        <a:srgbClr val="D6D6D6"/>
+                      </a:solidFill>
+                      <a:prstDash val="solid"/>
+                      <a:round/>
+                      <a:headEnd type="none" w="med" len="med"/>
+                      <a:tailEnd type="none" w="med" len="med"/>
+                    </a:lnT>
+                    <a:lnB w="9525">
+                      <a:solidFill>
+                        <a:srgbClr val="D6D6D6"/>
+                      </a:solidFill>
+                    </a:lnB>
+                    <a:noFill/>
+                  </a:tcPr>
+                </a:tc>
+                <a:tc>
+                  <a:txBody>
+                    <a:bodyPr/>
+                    <a:lstStyle/>
+                    <a:p>
+                      <a:pPr marL="0" algn="l" defTabSz="914400" rtl="0" eaLnBrk="1" latinLnBrk="0" hangingPunct="1"/>
+                      <a:r>
+                        <a:rPr sz="800" b="0" kern="1200" dirty="0">
+                          <a:solidFill>
+                            <a:srgbClr val="0A0A0A"/>
+                          </a:solidFill>
+                          <a:latin typeface="微软雅黑" panose="020B0503020204020204" pitchFamily="34" charset="-122"/>
+                          <a:ea typeface="微软雅黑" panose="020B0503020204020204" pitchFamily="34" charset="-122"/>
+                          <a:cs typeface="+mn-cs"/>
+                        </a:rPr>
+                        <a:t>MCDONALDS BRISBANE</a:t>
+                      </a:r>
+                    </a:p>
+                  </a:txBody>
+                  <a:tcPr marL="27432" marR="27432" marT="9144" marB="9144">
+                    <a:lnL>
+                      <a:noFill/>
+                    </a:lnL>
+                    <a:lnR>
+                      <a:noFill/>
+                    </a:lnR>
+                    <a:lnT w="9525" cap="flat" cmpd="sng" algn="ctr">
+                      <a:solidFill>
+                        <a:srgbClr val="D6D6D6"/>
+                      </a:solidFill>
+                      <a:prstDash val="solid"/>
+                      <a:round/>
+                      <a:headEnd type="none" w="med" len="med"/>
+                      <a:tailEnd type="none" w="med" len="med"/>
+                    </a:lnT>
+                    <a:lnB w="9525">
+                      <a:solidFill>
+                        <a:srgbClr val="D6D6D6"/>
+                      </a:solidFill>
+                    </a:lnB>
+                    <a:noFill/>
+                  </a:tcPr>
+                </a:tc>
+                <a:tc>
+                  <a:txBody>
+                    <a:bodyPr/>
+                    <a:lstStyle/>
+                    <a:p>
+                      <a:pPr marL="0" algn="l" defTabSz="914400" rtl="0" eaLnBrk="1" latinLnBrk="0" hangingPunct="1"/>
+                      <a:r>
+                        <a:rPr sz="800" b="0" kern="1200">
+                          <a:solidFill>
+                            <a:srgbClr val="0A0A0A"/>
+                          </a:solidFill>
+                          <a:latin typeface="微软雅黑" panose="020B0503020204020204" pitchFamily="34" charset="-122"/>
+                          <a:ea typeface="微软雅黑" panose="020B0503020204020204" pitchFamily="34" charset="-122"/>
+                          <a:cs typeface="+mn-cs"/>
+                        </a:rPr>
+                        <a:t>A$12.40</a:t>
+                      </a:r>
+                    </a:p>
+                  </a:txBody>
+                  <a:tcPr marL="27432" marR="27432" marT="9144" marB="9144">
+                    <a:lnL>
+                      <a:noFill/>
+                    </a:lnL>
+                    <a:lnR>
+                      <a:noFill/>
+                    </a:lnR>
+                    <a:lnT w="9525" cap="flat" cmpd="sng" algn="ctr">
+                      <a:solidFill>
+                        <a:srgbClr val="D6D6D6"/>
+                      </a:solidFill>
+                      <a:prstDash val="solid"/>
+                      <a:round/>
+                      <a:headEnd type="none" w="med" len="med"/>
+                      <a:tailEnd type="none" w="med" len="med"/>
+                    </a:lnT>
+                    <a:lnB w="9525" cap="flat" cmpd="sng" algn="ctr">
+                      <a:solidFill>
+                        <a:srgbClr val="D6D6D6"/>
+                      </a:solidFill>
+                      <a:prstDash val="solid"/>
+                      <a:round/>
+                      <a:headEnd type="none" w="med" len="med"/>
+                      <a:tailEnd type="none" w="med" len="med"/>
+                    </a:lnB>
+                    <a:noFill/>
+                  </a:tcPr>
+                </a:tc>
+                <a:tc>
+                  <a:txBody>
+                    <a:bodyPr/>
+                    <a:lstStyle/>
+                    <a:p>
+                      <a:pPr marL="0" algn="l" defTabSz="914400" rtl="0" eaLnBrk="1" latinLnBrk="0" hangingPunct="1"/>
+                      <a:r>
+                        <a:rPr sz="800" b="0" kern="1200" dirty="0">
+                          <a:solidFill>
+                            <a:srgbClr val="0A0A0A"/>
+                          </a:solidFill>
+                          <a:latin typeface="微软雅黑" panose="020B0503020204020204" pitchFamily="34" charset="-122"/>
+                          <a:ea typeface="微软雅黑" panose="020B0503020204020204" pitchFamily="34" charset="-122"/>
+                          <a:cs typeface="+mn-cs"/>
+                        </a:rPr>
+                        <a:t>McDonald's</a:t>
+                      </a:r>
+                    </a:p>
+                  </a:txBody>
+                  <a:tcPr marL="27432" marR="27432" marT="9144" marB="9144">
+                    <a:lnL>
+                      <a:noFill/>
+                    </a:lnL>
+                    <a:lnR>
+                      <a:noFill/>
+                    </a:lnR>
+                    <a:lnT w="9525" cap="flat" cmpd="sng" algn="ctr">
+                      <a:solidFill>
+                        <a:srgbClr val="D6D6D6"/>
+                      </a:solidFill>
+                      <a:prstDash val="solid"/>
+                      <a:round/>
+                      <a:headEnd type="none" w="med" len="med"/>
+                      <a:tailEnd type="none" w="med" len="med"/>
+                    </a:lnT>
+                    <a:lnB w="9525">
+                      <a:solidFill>
+                        <a:srgbClr val="D6D6D6"/>
+                      </a:solidFill>
+                    </a:lnB>
+                    <a:noFill/>
+                  </a:tcPr>
+                </a:tc>
+                <a:tc>
+                  <a:txBody>
+                    <a:bodyPr/>
+                    <a:lstStyle/>
+                    <a:p>
+                      <a:pPr marL="0" algn="l" defTabSz="914400" rtl="0" eaLnBrk="1" latinLnBrk="0" hangingPunct="1"/>
+                      <a:r>
+                        <a:rPr sz="800" b="0" kern="1200">
+                          <a:solidFill>
+                            <a:srgbClr val="0A0A0A"/>
+                          </a:solidFill>
+                          <a:latin typeface="微软雅黑" panose="020B0503020204020204" pitchFamily="34" charset="-122"/>
+                          <a:ea typeface="微软雅黑" panose="020B0503020204020204" pitchFamily="34" charset="-122"/>
+                          <a:cs typeface="+mn-cs"/>
+                        </a:rPr>
+                        <a:t>商户企业</a:t>
+                      </a:r>
+                    </a:p>
+                  </a:txBody>
+                  <a:tcPr marL="27432" marR="27432" marT="9144" marB="9144">
+                    <a:lnL>
+                      <a:noFill/>
+                    </a:lnL>
+                    <a:lnR>
+                      <a:noFill/>
+                    </a:lnR>
+                    <a:lnT w="9525" cap="flat" cmpd="sng" algn="ctr">
+                      <a:solidFill>
+                        <a:srgbClr val="D6D6D6"/>
+                      </a:solidFill>
+                      <a:prstDash val="solid"/>
+                      <a:round/>
+                      <a:headEnd type="none" w="med" len="med"/>
+                      <a:tailEnd type="none" w="med" len="med"/>
+                    </a:lnT>
+                    <a:lnB w="9525" cap="flat" cmpd="sng" algn="ctr">
+                      <a:solidFill>
+                        <a:srgbClr val="D6D6D6"/>
+                      </a:solidFill>
+                      <a:prstDash val="solid"/>
+                      <a:round/>
+                      <a:headEnd type="none" w="med" len="med"/>
+                      <a:tailEnd type="none" w="med" len="med"/>
+                    </a:lnB>
+                    <a:noFill/>
+                  </a:tcPr>
+                </a:tc>
+                <a:tc>
+                  <a:txBody>
+                    <a:bodyPr/>
+                    <a:lstStyle/>
+                    <a:p>
+                      <a:pPr marL="0" algn="l" defTabSz="914400" rtl="0" eaLnBrk="1" latinLnBrk="0" hangingPunct="1"/>
+                      <a:r>
+                        <a:rPr sz="800" b="0" kern="1200">
+                          <a:solidFill>
+                            <a:srgbClr val="0A0A0A"/>
+                          </a:solidFill>
+                          <a:latin typeface="微软雅黑" panose="020B0503020204020204" pitchFamily="34" charset="-122"/>
+                          <a:ea typeface="微软雅黑" panose="020B0503020204020204" pitchFamily="34" charset="-122"/>
+                          <a:cs typeface="+mn-cs"/>
+                        </a:rPr>
+                        <a:t>消费</a:t>
+                      </a:r>
+                    </a:p>
+                  </a:txBody>
+                  <a:tcPr marL="27432" marR="27432" marT="9144" marB="9144">
+                    <a:lnL>
+                      <a:noFill/>
+                    </a:lnL>
+                    <a:lnR>
+                      <a:noFill/>
+                    </a:lnR>
+                    <a:lnT w="9525" cap="flat" cmpd="sng" algn="ctr">
+                      <a:solidFill>
+                        <a:srgbClr val="D6D6D6"/>
+                      </a:solidFill>
+                      <a:prstDash val="solid"/>
+                      <a:round/>
+                      <a:headEnd type="none" w="med" len="med"/>
+                      <a:tailEnd type="none" w="med" len="med"/>
+                    </a:lnT>
+                    <a:lnB w="9525" cap="flat" cmpd="sng" algn="ctr">
+                      <a:solidFill>
+                        <a:srgbClr val="D6D6D6"/>
+                      </a:solidFill>
+                      <a:prstDash val="solid"/>
+                      <a:round/>
+                      <a:headEnd type="none" w="med" len="med"/>
+                      <a:tailEnd type="none" w="med" len="med"/>
+                    </a:lnB>
+                    <a:noFill/>
+                  </a:tcPr>
+                </a:tc>
+                <a:tc>
+                  <a:txBody>
+                    <a:bodyPr/>
+                    <a:lstStyle/>
+                    <a:p>
+                      <a:pPr marL="0" algn="l" defTabSz="914400" rtl="0" eaLnBrk="1" latinLnBrk="0" hangingPunct="1"/>
+                      <a:r>
+                        <a:rPr sz="800" b="0" kern="1200">
+                          <a:solidFill>
+                            <a:srgbClr val="0A0A0A"/>
+                          </a:solidFill>
+                          <a:latin typeface="微软雅黑" panose="020B0503020204020204" pitchFamily="34" charset="-122"/>
+                          <a:ea typeface="微软雅黑" panose="020B0503020204020204" pitchFamily="34" charset="-122"/>
+                          <a:cs typeface="+mn-cs"/>
+                        </a:rPr>
+                        <a:t>商户知识库标准名匹配</a:t>
+                      </a:r>
+                    </a:p>
+                  </a:txBody>
+                  <a:tcPr marL="27432" marR="27432" marT="9144" marB="9144">
+                    <a:lnL>
+                      <a:noFill/>
+                    </a:lnL>
+                    <a:lnR>
+                      <a:noFill/>
+                    </a:lnR>
+                    <a:lnT w="9525" cap="flat" cmpd="sng" algn="ctr">
+                      <a:solidFill>
+                        <a:srgbClr val="D6D6D6"/>
+                      </a:solidFill>
+                      <a:prstDash val="solid"/>
+                      <a:round/>
+                      <a:headEnd type="none" w="med" len="med"/>
+                      <a:tailEnd type="none" w="med" len="med"/>
+                    </a:lnT>
+                    <a:lnB w="9525" cap="flat" cmpd="sng" algn="ctr">
+                      <a:solidFill>
+                        <a:srgbClr val="D6D6D6"/>
+                      </a:solidFill>
+                      <a:prstDash val="solid"/>
+                      <a:round/>
+                      <a:headEnd type="none" w="med" len="med"/>
+                      <a:tailEnd type="none" w="med" len="med"/>
+                    </a:lnB>
+                    <a:noFill/>
+                  </a:tcPr>
+                </a:tc>
+                <a:extLst>
+                  <a:ext uri="{0D108BD9-81ED-4DB2-BD59-A6C34878D82A}">
+                    <a16:rowId xmlns:a16="http://schemas.microsoft.com/office/drawing/2014/main" val="10002"/>
+                  </a:ext>
+                </a:extLst>
+              </a:tr>
+              <a:tr h="170373">
+                <a:tc>
+                  <a:txBody>
+                    <a:bodyPr/>
+                    <a:lstStyle/>
+                    <a:p>
+                      <a:pPr marL="0" algn="l" defTabSz="914400" rtl="0" eaLnBrk="1" latinLnBrk="0" hangingPunct="1"/>
+                      <a:r>
+                        <a:rPr sz="800" b="0" kern="1200">
+                          <a:solidFill>
+                            <a:srgbClr val="0A0A0A"/>
+                          </a:solidFill>
+                          <a:latin typeface="微软雅黑" panose="020B0503020204020204" pitchFamily="34" charset="-122"/>
+                          <a:ea typeface="微软雅黑" panose="020B0503020204020204" pitchFamily="34" charset="-122"/>
+                          <a:cs typeface="+mn-cs"/>
+                        </a:rPr>
+                        <a:t>2026/04/02</a:t>
+                      </a:r>
+                    </a:p>
+                  </a:txBody>
+                  <a:tcPr marL="27432" marR="27432" marT="9144" marB="9144">
+                    <a:lnL>
+                      <a:noFill/>
+                    </a:lnL>
+                    <a:lnR>
+                      <a:noFill/>
+                    </a:lnR>
+                    <a:lnT w="9525" cap="flat" cmpd="sng" algn="ctr">
+                      <a:solidFill>
+                        <a:srgbClr val="D6D6D6"/>
+                      </a:solidFill>
+                      <a:prstDash val="solid"/>
+                      <a:round/>
+                      <a:headEnd type="none" w="med" len="med"/>
+                      <a:tailEnd type="none" w="med" len="med"/>
+                    </a:lnT>
+                    <a:lnB w="9525">
+                      <a:solidFill>
+                        <a:srgbClr val="D6D6D6"/>
+                      </a:solidFill>
+                    </a:lnB>
+                    <a:noFill/>
+                  </a:tcPr>
+                </a:tc>
+                <a:tc>
+                  <a:txBody>
+                    <a:bodyPr/>
+                    <a:lstStyle/>
+                    <a:p>
+                      <a:pPr marL="0" algn="l" defTabSz="914400" rtl="0" eaLnBrk="1" latinLnBrk="0" hangingPunct="1"/>
+                      <a:r>
+                        <a:rPr sz="800" b="0" kern="1200" dirty="0">
+                          <a:solidFill>
+                            <a:srgbClr val="0A0A0A"/>
+                          </a:solidFill>
+                          <a:latin typeface="微软雅黑" panose="020B0503020204020204" pitchFamily="34" charset="-122"/>
+                          <a:ea typeface="微软雅黑" panose="020B0503020204020204" pitchFamily="34" charset="-122"/>
+                          <a:cs typeface="+mn-cs"/>
+                        </a:rPr>
+                        <a:t>CHEMIST WAREHOUSE 123</a:t>
+                      </a:r>
+                    </a:p>
+                  </a:txBody>
+                  <a:tcPr marL="27432" marR="27432" marT="9144" marB="9144">
+                    <a:lnL>
+                      <a:noFill/>
+                    </a:lnL>
+                    <a:lnR>
+                      <a:noFill/>
+                    </a:lnR>
+                    <a:lnT w="9525" cap="flat" cmpd="sng" algn="ctr">
+                      <a:solidFill>
+                        <a:srgbClr val="D6D6D6"/>
+                      </a:solidFill>
+                      <a:prstDash val="solid"/>
+                      <a:round/>
+                      <a:headEnd type="none" w="med" len="med"/>
+                      <a:tailEnd type="none" w="med" len="med"/>
+                    </a:lnT>
+                    <a:lnB w="9525">
+                      <a:solidFill>
+                        <a:srgbClr val="D6D6D6"/>
+                      </a:solidFill>
+                    </a:lnB>
+                    <a:noFill/>
+                  </a:tcPr>
+                </a:tc>
+                <a:tc>
+                  <a:txBody>
+                    <a:bodyPr/>
+                    <a:lstStyle/>
+                    <a:p>
+                      <a:pPr marL="0" algn="l" defTabSz="914400" rtl="0" eaLnBrk="1" latinLnBrk="0" hangingPunct="1"/>
+                      <a:r>
+                        <a:rPr sz="800" b="0" kern="1200" dirty="0">
+                          <a:solidFill>
+                            <a:srgbClr val="0A0A0A"/>
+                          </a:solidFill>
+                          <a:latin typeface="微软雅黑" panose="020B0503020204020204" pitchFamily="34" charset="-122"/>
+                          <a:ea typeface="微软雅黑" panose="020B0503020204020204" pitchFamily="34" charset="-122"/>
+                          <a:cs typeface="+mn-cs"/>
+                        </a:rPr>
+                        <a:t>A$35.90</a:t>
+                      </a:r>
+                    </a:p>
+                  </a:txBody>
+                  <a:tcPr marL="27432" marR="27432" marT="9144" marB="9144">
+                    <a:lnL>
+                      <a:noFill/>
+                    </a:lnL>
+                    <a:lnR>
+                      <a:noFill/>
+                    </a:lnR>
+                    <a:lnT w="9525" cap="flat" cmpd="sng" algn="ctr">
+                      <a:solidFill>
+                        <a:srgbClr val="D6D6D6"/>
+                      </a:solidFill>
+                      <a:prstDash val="solid"/>
+                      <a:round/>
+                      <a:headEnd type="none" w="med" len="med"/>
+                      <a:tailEnd type="none" w="med" len="med"/>
+                    </a:lnT>
+                    <a:lnB w="9525" cap="flat" cmpd="sng" algn="ctr">
+                      <a:solidFill>
+                        <a:srgbClr val="D6D6D6"/>
+                      </a:solidFill>
+                      <a:prstDash val="solid"/>
+                      <a:round/>
+                      <a:headEnd type="none" w="med" len="med"/>
+                      <a:tailEnd type="none" w="med" len="med"/>
+                    </a:lnB>
+                    <a:noFill/>
+                  </a:tcPr>
+                </a:tc>
+                <a:tc>
+                  <a:txBody>
+                    <a:bodyPr/>
+                    <a:lstStyle/>
+                    <a:p>
+                      <a:pPr marL="0" algn="l" defTabSz="914400" rtl="0" eaLnBrk="1" latinLnBrk="0" hangingPunct="1"/>
+                      <a:r>
+                        <a:rPr sz="800" b="0" kern="1200">
+                          <a:solidFill>
+                            <a:srgbClr val="0A0A0A"/>
+                          </a:solidFill>
+                          <a:latin typeface="微软雅黑" panose="020B0503020204020204" pitchFamily="34" charset="-122"/>
+                          <a:ea typeface="微软雅黑" panose="020B0503020204020204" pitchFamily="34" charset="-122"/>
+                          <a:cs typeface="+mn-cs"/>
+                        </a:rPr>
+                        <a:t>Chemist Warehouse</a:t>
+                      </a:r>
+                    </a:p>
+                  </a:txBody>
+                  <a:tcPr marL="27432" marR="27432" marT="9144" marB="9144">
+                    <a:lnL>
+                      <a:noFill/>
+                    </a:lnL>
+                    <a:lnR>
+                      <a:noFill/>
+                    </a:lnR>
+                    <a:lnT w="9525" cap="flat" cmpd="sng" algn="ctr">
+                      <a:solidFill>
+                        <a:srgbClr val="D6D6D6"/>
+                      </a:solidFill>
+                      <a:prstDash val="solid"/>
+                      <a:round/>
+                      <a:headEnd type="none" w="med" len="med"/>
+                      <a:tailEnd type="none" w="med" len="med"/>
+                    </a:lnT>
+                    <a:lnB w="9525">
+                      <a:solidFill>
+                        <a:srgbClr val="D6D6D6"/>
+                      </a:solidFill>
+                    </a:lnB>
+                    <a:noFill/>
+                  </a:tcPr>
+                </a:tc>
+                <a:tc>
+                  <a:txBody>
+                    <a:bodyPr/>
+                    <a:lstStyle/>
+                    <a:p>
+                      <a:pPr marL="0" algn="l" defTabSz="914400" rtl="0" eaLnBrk="1" latinLnBrk="0" hangingPunct="1"/>
+                      <a:r>
+                        <a:rPr sz="800" b="0" kern="1200" dirty="0" err="1">
+                          <a:solidFill>
+                            <a:srgbClr val="0A0A0A"/>
+                          </a:solidFill>
+                          <a:latin typeface="微软雅黑" panose="020B0503020204020204" pitchFamily="34" charset="-122"/>
+                          <a:ea typeface="微软雅黑" panose="020B0503020204020204" pitchFamily="34" charset="-122"/>
+                          <a:cs typeface="+mn-cs"/>
+                        </a:rPr>
+                        <a:t>商户企业</a:t>
+                      </a:r>
+                      <a:endParaRPr sz="800" b="0" kern="1200" dirty="0">
+                        <a:solidFill>
+                          <a:srgbClr val="0A0A0A"/>
+                        </a:solidFill>
+                        <a:latin typeface="微软雅黑" panose="020B0503020204020204" pitchFamily="34" charset="-122"/>
+                        <a:ea typeface="微软雅黑" panose="020B0503020204020204" pitchFamily="34" charset="-122"/>
+                        <a:cs typeface="+mn-cs"/>
+                      </a:endParaRPr>
+                    </a:p>
+                  </a:txBody>
+                  <a:tcPr marL="27432" marR="27432" marT="9144" marB="9144">
+                    <a:lnL>
+                      <a:noFill/>
+                    </a:lnL>
+                    <a:lnR>
+                      <a:noFill/>
+                    </a:lnR>
+                    <a:lnT w="9525" cap="flat" cmpd="sng" algn="ctr">
+                      <a:solidFill>
+                        <a:srgbClr val="D6D6D6"/>
+                      </a:solidFill>
+                      <a:prstDash val="solid"/>
+                      <a:round/>
+                      <a:headEnd type="none" w="med" len="med"/>
+                      <a:tailEnd type="none" w="med" len="med"/>
+                    </a:lnT>
+                    <a:lnB w="9525" cap="flat" cmpd="sng" algn="ctr">
+                      <a:solidFill>
+                        <a:srgbClr val="D6D6D6"/>
+                      </a:solidFill>
+                      <a:prstDash val="solid"/>
+                      <a:round/>
+                      <a:headEnd type="none" w="med" len="med"/>
+                      <a:tailEnd type="none" w="med" len="med"/>
+                    </a:lnB>
+                    <a:noFill/>
+                  </a:tcPr>
+                </a:tc>
+                <a:tc>
+                  <a:txBody>
+                    <a:bodyPr/>
+                    <a:lstStyle/>
+                    <a:p>
+                      <a:pPr marL="0" algn="l" defTabSz="914400" rtl="0" eaLnBrk="1" latinLnBrk="0" hangingPunct="1"/>
+                      <a:r>
+                        <a:rPr sz="800" b="0" kern="1200">
+                          <a:solidFill>
+                            <a:srgbClr val="0A0A0A"/>
+                          </a:solidFill>
+                          <a:latin typeface="微软雅黑" panose="020B0503020204020204" pitchFamily="34" charset="-122"/>
+                          <a:ea typeface="微软雅黑" panose="020B0503020204020204" pitchFamily="34" charset="-122"/>
+                          <a:cs typeface="+mn-cs"/>
+                        </a:rPr>
+                        <a:t>消费</a:t>
+                      </a:r>
+                    </a:p>
+                  </a:txBody>
+                  <a:tcPr marL="27432" marR="27432" marT="9144" marB="9144">
+                    <a:lnL>
+                      <a:noFill/>
+                    </a:lnL>
+                    <a:lnR>
+                      <a:noFill/>
+                    </a:lnR>
+                    <a:lnT w="9525" cap="flat" cmpd="sng" algn="ctr">
+                      <a:solidFill>
+                        <a:srgbClr val="D6D6D6"/>
+                      </a:solidFill>
+                      <a:prstDash val="solid"/>
+                      <a:round/>
+                      <a:headEnd type="none" w="med" len="med"/>
+                      <a:tailEnd type="none" w="med" len="med"/>
+                    </a:lnT>
+                    <a:lnB w="9525" cap="flat" cmpd="sng" algn="ctr">
+                      <a:solidFill>
+                        <a:srgbClr val="D6D6D6"/>
+                      </a:solidFill>
+                      <a:prstDash val="solid"/>
+                      <a:round/>
+                      <a:headEnd type="none" w="med" len="med"/>
+                      <a:tailEnd type="none" w="med" len="med"/>
+                    </a:lnB>
+                    <a:noFill/>
+                  </a:tcPr>
+                </a:tc>
+                <a:tc>
+                  <a:txBody>
+                    <a:bodyPr/>
+                    <a:lstStyle/>
+                    <a:p>
+                      <a:pPr marL="0" algn="l" defTabSz="914400" rtl="0" eaLnBrk="1" latinLnBrk="0" hangingPunct="1"/>
+                      <a:r>
+                        <a:rPr sz="800" b="0" kern="1200">
+                          <a:solidFill>
+                            <a:srgbClr val="0A0A0A"/>
+                          </a:solidFill>
+                          <a:latin typeface="微软雅黑" panose="020B0503020204020204" pitchFamily="34" charset="-122"/>
+                          <a:ea typeface="微软雅黑" panose="020B0503020204020204" pitchFamily="34" charset="-122"/>
+                          <a:cs typeface="+mn-cs"/>
+                        </a:rPr>
+                        <a:t>商户知识库标准名匹配</a:t>
+                      </a:r>
+                    </a:p>
+                  </a:txBody>
+                  <a:tcPr marL="27432" marR="27432" marT="9144" marB="9144">
+                    <a:lnL>
+                      <a:noFill/>
+                    </a:lnL>
+                    <a:lnR>
+                      <a:noFill/>
+                    </a:lnR>
+                    <a:lnT w="9525" cap="flat" cmpd="sng" algn="ctr">
+                      <a:solidFill>
+                        <a:srgbClr val="D6D6D6"/>
+                      </a:solidFill>
+                      <a:prstDash val="solid"/>
+                      <a:round/>
+                      <a:headEnd type="none" w="med" len="med"/>
+                      <a:tailEnd type="none" w="med" len="med"/>
+                    </a:lnT>
+                    <a:lnB w="9525" cap="flat" cmpd="sng" algn="ctr">
+                      <a:solidFill>
+                        <a:srgbClr val="D6D6D6"/>
+                      </a:solidFill>
+                      <a:prstDash val="solid"/>
+                      <a:round/>
+                      <a:headEnd type="none" w="med" len="med"/>
+                      <a:tailEnd type="none" w="med" len="med"/>
+                    </a:lnB>
+                    <a:noFill/>
+                  </a:tcPr>
+                </a:tc>
+                <a:extLst>
+                  <a:ext uri="{0D108BD9-81ED-4DB2-BD59-A6C34878D82A}">
+                    <a16:rowId xmlns:a16="http://schemas.microsoft.com/office/drawing/2014/main" val="10003"/>
+                  </a:ext>
+                </a:extLst>
+              </a:tr>
+              <a:tr h="170373">
+                <a:tc>
+                  <a:txBody>
+                    <a:bodyPr/>
+                    <a:lstStyle/>
+                    <a:p>
+                      <a:pPr marL="0" algn="l" defTabSz="914400" rtl="0" eaLnBrk="1" latinLnBrk="0" hangingPunct="1"/>
+                      <a:r>
+                        <a:rPr sz="800" b="0" kern="1200">
+                          <a:solidFill>
+                            <a:srgbClr val="0A0A0A"/>
+                          </a:solidFill>
+                          <a:latin typeface="微软雅黑" panose="020B0503020204020204" pitchFamily="34" charset="-122"/>
+                          <a:ea typeface="微软雅黑" panose="020B0503020204020204" pitchFamily="34" charset="-122"/>
+                          <a:cs typeface="+mn-cs"/>
+                        </a:rPr>
+                        <a:t>2026/04/08</a:t>
+                      </a:r>
+                    </a:p>
+                  </a:txBody>
+                  <a:tcPr marL="27432" marR="27432" marT="9144" marB="9144">
+                    <a:lnL>
+                      <a:noFill/>
+                    </a:lnL>
+                    <a:lnR>
+                      <a:noFill/>
+                    </a:lnR>
+                    <a:lnT w="9525" cap="flat" cmpd="sng" algn="ctr">
+                      <a:solidFill>
+                        <a:srgbClr val="D6D6D6"/>
+                      </a:solidFill>
+                      <a:prstDash val="solid"/>
+                      <a:round/>
+                      <a:headEnd type="none" w="med" len="med"/>
+                      <a:tailEnd type="none" w="med" len="med"/>
+                    </a:lnT>
+                    <a:lnB w="9525">
+                      <a:solidFill>
+                        <a:srgbClr val="D6D6D6"/>
+                      </a:solidFill>
+                    </a:lnB>
+                    <a:noFill/>
+                  </a:tcPr>
+                </a:tc>
+                <a:tc>
+                  <a:txBody>
+                    <a:bodyPr/>
+                    <a:lstStyle/>
+                    <a:p>
+                      <a:pPr marL="0" algn="l" defTabSz="914400" rtl="0" eaLnBrk="1" latinLnBrk="0" hangingPunct="1"/>
+                      <a:r>
+                        <a:rPr sz="800" b="0" kern="1200" dirty="0">
+                          <a:solidFill>
+                            <a:srgbClr val="0A0A0A"/>
+                          </a:solidFill>
+                          <a:latin typeface="微软雅黑" panose="020B0503020204020204" pitchFamily="34" charset="-122"/>
+                          <a:ea typeface="微软雅黑" panose="020B0503020204020204" pitchFamily="34" charset="-122"/>
+                          <a:cs typeface="+mn-cs"/>
+                        </a:rPr>
+                        <a:t>AMZNPRIMEA*</a:t>
+                      </a:r>
+                    </a:p>
+                  </a:txBody>
+                  <a:tcPr marL="27432" marR="27432" marT="9144" marB="9144">
+                    <a:lnL>
+                      <a:noFill/>
+                    </a:lnL>
+                    <a:lnR>
+                      <a:noFill/>
+                    </a:lnR>
+                    <a:lnT w="9525" cap="flat" cmpd="sng" algn="ctr">
+                      <a:solidFill>
+                        <a:srgbClr val="D6D6D6"/>
+                      </a:solidFill>
+                      <a:prstDash val="solid"/>
+                      <a:round/>
+                      <a:headEnd type="none" w="med" len="med"/>
+                      <a:tailEnd type="none" w="med" len="med"/>
+                    </a:lnT>
+                    <a:lnB w="9525">
+                      <a:solidFill>
+                        <a:srgbClr val="D6D6D6"/>
+                      </a:solidFill>
+                    </a:lnB>
+                    <a:noFill/>
+                  </a:tcPr>
+                </a:tc>
+                <a:tc>
+                  <a:txBody>
+                    <a:bodyPr/>
+                    <a:lstStyle/>
+                    <a:p>
+                      <a:pPr marL="0" algn="l" defTabSz="914400" rtl="0" eaLnBrk="1" latinLnBrk="0" hangingPunct="1"/>
+                      <a:r>
+                        <a:rPr sz="800" b="0" kern="1200" dirty="0">
+                          <a:solidFill>
+                            <a:srgbClr val="0A0A0A"/>
+                          </a:solidFill>
+                          <a:latin typeface="微软雅黑" panose="020B0503020204020204" pitchFamily="34" charset="-122"/>
+                          <a:ea typeface="微软雅黑" panose="020B0503020204020204" pitchFamily="34" charset="-122"/>
+                          <a:cs typeface="+mn-cs"/>
+                        </a:rPr>
+                        <a:t>A$8.99</a:t>
+                      </a:r>
+                    </a:p>
+                  </a:txBody>
+                  <a:tcPr marL="27432" marR="27432" marT="9144" marB="9144">
+                    <a:lnL>
+                      <a:noFill/>
+                    </a:lnL>
+                    <a:lnR>
+                      <a:noFill/>
+                    </a:lnR>
+                    <a:lnT w="9525" cap="flat" cmpd="sng" algn="ctr">
+                      <a:solidFill>
+                        <a:srgbClr val="D6D6D6"/>
+                      </a:solidFill>
+                      <a:prstDash val="solid"/>
+                      <a:round/>
+                      <a:headEnd type="none" w="med" len="med"/>
+                      <a:tailEnd type="none" w="med" len="med"/>
+                    </a:lnT>
+                    <a:lnB w="9525" cap="flat" cmpd="sng" algn="ctr">
+                      <a:solidFill>
+                        <a:srgbClr val="D6D6D6"/>
+                      </a:solidFill>
+                      <a:prstDash val="solid"/>
+                      <a:round/>
+                      <a:headEnd type="none" w="med" len="med"/>
+                      <a:tailEnd type="none" w="med" len="med"/>
+                    </a:lnB>
+                    <a:noFill/>
+                  </a:tcPr>
+                </a:tc>
+                <a:tc>
+                  <a:txBody>
+                    <a:bodyPr/>
+                    <a:lstStyle/>
+                    <a:p>
+                      <a:pPr marL="0" algn="l" defTabSz="914400" rtl="0" eaLnBrk="1" latinLnBrk="0" hangingPunct="1"/>
+                      <a:r>
+                        <a:rPr sz="800" b="0" kern="1200">
+                          <a:solidFill>
+                            <a:srgbClr val="0A0A0A"/>
+                          </a:solidFill>
+                          <a:latin typeface="微软雅黑" panose="020B0503020204020204" pitchFamily="34" charset="-122"/>
+                          <a:ea typeface="微软雅黑" panose="020B0503020204020204" pitchFamily="34" charset="-122"/>
+                          <a:cs typeface="+mn-cs"/>
+                        </a:rPr>
+                        <a:t>Amazon Prime</a:t>
+                      </a:r>
+                    </a:p>
+                  </a:txBody>
+                  <a:tcPr marL="27432" marR="27432" marT="9144" marB="9144">
+                    <a:lnL>
+                      <a:noFill/>
+                    </a:lnL>
+                    <a:lnR>
+                      <a:noFill/>
+                    </a:lnR>
+                    <a:lnT w="9525" cap="flat" cmpd="sng" algn="ctr">
+                      <a:solidFill>
+                        <a:srgbClr val="D6D6D6"/>
+                      </a:solidFill>
+                      <a:prstDash val="solid"/>
+                      <a:round/>
+                      <a:headEnd type="none" w="med" len="med"/>
+                      <a:tailEnd type="none" w="med" len="med"/>
+                    </a:lnT>
+                    <a:lnB w="9525">
+                      <a:solidFill>
+                        <a:srgbClr val="D6D6D6"/>
+                      </a:solidFill>
+                    </a:lnB>
+                    <a:noFill/>
+                  </a:tcPr>
+                </a:tc>
+                <a:tc>
+                  <a:txBody>
+                    <a:bodyPr/>
+                    <a:lstStyle/>
+                    <a:p>
+                      <a:pPr marL="0" algn="l" defTabSz="914400" rtl="0" eaLnBrk="1" latinLnBrk="0" hangingPunct="1"/>
+                      <a:r>
+                        <a:rPr sz="800" b="0" kern="1200">
+                          <a:solidFill>
+                            <a:srgbClr val="0A0A0A"/>
+                          </a:solidFill>
+                          <a:latin typeface="微软雅黑" panose="020B0503020204020204" pitchFamily="34" charset="-122"/>
+                          <a:ea typeface="微软雅黑" panose="020B0503020204020204" pitchFamily="34" charset="-122"/>
+                          <a:cs typeface="+mn-cs"/>
+                        </a:rPr>
+                        <a:t>商户企业</a:t>
+                      </a:r>
+                    </a:p>
+                  </a:txBody>
+                  <a:tcPr marL="27432" marR="27432" marT="9144" marB="9144">
+                    <a:lnL>
+                      <a:noFill/>
+                    </a:lnL>
+                    <a:lnR>
+                      <a:noFill/>
+                    </a:lnR>
+                    <a:lnT w="9525" cap="flat" cmpd="sng" algn="ctr">
+                      <a:solidFill>
+                        <a:srgbClr val="D6D6D6"/>
+                      </a:solidFill>
+                      <a:prstDash val="solid"/>
+                      <a:round/>
+                      <a:headEnd type="none" w="med" len="med"/>
+                      <a:tailEnd type="none" w="med" len="med"/>
+                    </a:lnT>
+                    <a:lnB w="9525" cap="flat" cmpd="sng" algn="ctr">
+                      <a:solidFill>
+                        <a:srgbClr val="D6D6D6"/>
+                      </a:solidFill>
+                      <a:prstDash val="solid"/>
+                      <a:round/>
+                      <a:headEnd type="none" w="med" len="med"/>
+                      <a:tailEnd type="none" w="med" len="med"/>
+                    </a:lnB>
+                    <a:noFill/>
+                  </a:tcPr>
+                </a:tc>
+                <a:tc>
+                  <a:txBody>
+                    <a:bodyPr/>
+                    <a:lstStyle/>
+                    <a:p>
+                      <a:pPr marL="0" algn="l" defTabSz="914400" rtl="0" eaLnBrk="1" latinLnBrk="0" hangingPunct="1"/>
+                      <a:r>
+                        <a:rPr sz="800" b="0" kern="1200">
+                          <a:solidFill>
+                            <a:srgbClr val="0A0A0A"/>
+                          </a:solidFill>
+                          <a:latin typeface="微软雅黑" panose="020B0503020204020204" pitchFamily="34" charset="-122"/>
+                          <a:ea typeface="微软雅黑" panose="020B0503020204020204" pitchFamily="34" charset="-122"/>
+                          <a:cs typeface="+mn-cs"/>
+                        </a:rPr>
+                        <a:t>订阅</a:t>
+                      </a:r>
+                    </a:p>
+                  </a:txBody>
+                  <a:tcPr marL="27432" marR="27432" marT="9144" marB="9144">
+                    <a:lnL>
+                      <a:noFill/>
+                    </a:lnL>
+                    <a:lnR>
+                      <a:noFill/>
+                    </a:lnR>
+                    <a:lnT w="9525" cap="flat" cmpd="sng" algn="ctr">
+                      <a:solidFill>
+                        <a:srgbClr val="D6D6D6"/>
+                      </a:solidFill>
+                      <a:prstDash val="solid"/>
+                      <a:round/>
+                      <a:headEnd type="none" w="med" len="med"/>
+                      <a:tailEnd type="none" w="med" len="med"/>
+                    </a:lnT>
+                    <a:lnB w="9525" cap="flat" cmpd="sng" algn="ctr">
+                      <a:solidFill>
+                        <a:srgbClr val="D6D6D6"/>
+                      </a:solidFill>
+                      <a:prstDash val="solid"/>
+                      <a:round/>
+                      <a:headEnd type="none" w="med" len="med"/>
+                      <a:tailEnd type="none" w="med" len="med"/>
+                    </a:lnB>
+                    <a:noFill/>
+                  </a:tcPr>
+                </a:tc>
+                <a:tc>
+                  <a:txBody>
+                    <a:bodyPr/>
+                    <a:lstStyle/>
+                    <a:p>
+                      <a:pPr marL="0" algn="l" defTabSz="914400" rtl="0" eaLnBrk="1" latinLnBrk="0" hangingPunct="1"/>
+                      <a:r>
+                        <a:rPr sz="800" b="0" kern="1200">
+                          <a:solidFill>
+                            <a:srgbClr val="0A0A0A"/>
+                          </a:solidFill>
+                          <a:latin typeface="微软雅黑" panose="020B0503020204020204" pitchFamily="34" charset="-122"/>
+                          <a:ea typeface="微软雅黑" panose="020B0503020204020204" pitchFamily="34" charset="-122"/>
+                          <a:cs typeface="+mn-cs"/>
+                        </a:rPr>
+                        <a:t>商户知识库标准名匹配</a:t>
+                      </a:r>
+                    </a:p>
+                  </a:txBody>
+                  <a:tcPr marL="27432" marR="27432" marT="9144" marB="9144">
+                    <a:lnL>
+                      <a:noFill/>
+                    </a:lnL>
+                    <a:lnR>
+                      <a:noFill/>
+                    </a:lnR>
+                    <a:lnT w="9525" cap="flat" cmpd="sng" algn="ctr">
+                      <a:solidFill>
+                        <a:srgbClr val="D6D6D6"/>
+                      </a:solidFill>
+                      <a:prstDash val="solid"/>
+                      <a:round/>
+                      <a:headEnd type="none" w="med" len="med"/>
+                      <a:tailEnd type="none" w="med" len="med"/>
+                    </a:lnT>
+                    <a:lnB w="9525" cap="flat" cmpd="sng" algn="ctr">
+                      <a:solidFill>
+                        <a:srgbClr val="D6D6D6"/>
+                      </a:solidFill>
+                      <a:prstDash val="solid"/>
+                      <a:round/>
+                      <a:headEnd type="none" w="med" len="med"/>
+                      <a:tailEnd type="none" w="med" len="med"/>
+                    </a:lnB>
+                    <a:noFill/>
+                  </a:tcPr>
+                </a:tc>
+                <a:extLst>
+                  <a:ext uri="{0D108BD9-81ED-4DB2-BD59-A6C34878D82A}">
+                    <a16:rowId xmlns:a16="http://schemas.microsoft.com/office/drawing/2014/main" val="10004"/>
+                  </a:ext>
+                </a:extLst>
+              </a:tr>
+              <a:tr h="170373">
+                <a:tc>
+                  <a:txBody>
+                    <a:bodyPr/>
+                    <a:lstStyle/>
+                    <a:p>
+                      <a:pPr marL="0" algn="l" defTabSz="914400" rtl="0" eaLnBrk="1" latinLnBrk="0" hangingPunct="1"/>
+                      <a:r>
+                        <a:rPr sz="800" b="0" kern="1200">
+                          <a:solidFill>
+                            <a:srgbClr val="0A0A0A"/>
+                          </a:solidFill>
+                          <a:latin typeface="微软雅黑" panose="020B0503020204020204" pitchFamily="34" charset="-122"/>
+                          <a:ea typeface="微软雅黑" panose="020B0503020204020204" pitchFamily="34" charset="-122"/>
+                          <a:cs typeface="+mn-cs"/>
+                        </a:rPr>
+                        <a:t>2026/04/10</a:t>
+                      </a:r>
+                    </a:p>
+                  </a:txBody>
+                  <a:tcPr marL="27432" marR="27432" marT="9144" marB="9144">
+                    <a:lnL>
+                      <a:noFill/>
+                    </a:lnL>
+                    <a:lnR>
+                      <a:noFill/>
+                    </a:lnR>
+                    <a:lnT w="9525" cap="flat" cmpd="sng" algn="ctr">
+                      <a:solidFill>
+                        <a:srgbClr val="D6D6D6"/>
+                      </a:solidFill>
+                      <a:prstDash val="solid"/>
+                      <a:round/>
+                      <a:headEnd type="none" w="med" len="med"/>
+                      <a:tailEnd type="none" w="med" len="med"/>
+                    </a:lnT>
+                    <a:lnB w="9525">
+                      <a:solidFill>
+                        <a:srgbClr val="D6D6D6"/>
+                      </a:solidFill>
+                    </a:lnB>
+                    <a:noFill/>
+                  </a:tcPr>
+                </a:tc>
+                <a:tc>
+                  <a:txBody>
+                    <a:bodyPr/>
+                    <a:lstStyle/>
+                    <a:p>
+                      <a:pPr marL="0" algn="l" defTabSz="914400" rtl="0" eaLnBrk="1" latinLnBrk="0" hangingPunct="1"/>
+                      <a:r>
+                        <a:rPr sz="800" b="0" kern="1200" dirty="0">
+                          <a:solidFill>
+                            <a:srgbClr val="0A0A0A"/>
+                          </a:solidFill>
+                          <a:latin typeface="微软雅黑" panose="020B0503020204020204" pitchFamily="34" charset="-122"/>
+                          <a:ea typeface="微软雅黑" panose="020B0503020204020204" pitchFamily="34" charset="-122"/>
+                          <a:cs typeface="+mn-cs"/>
+                        </a:rPr>
+                        <a:t>PAYROLL ACME PTY LTD</a:t>
+                      </a:r>
+                    </a:p>
+                  </a:txBody>
+                  <a:tcPr marL="27432" marR="27432" marT="9144" marB="9144">
+                    <a:lnL>
+                      <a:noFill/>
+                    </a:lnL>
+                    <a:lnR>
+                      <a:noFill/>
+                    </a:lnR>
+                    <a:lnT w="9525" cap="flat" cmpd="sng" algn="ctr">
+                      <a:solidFill>
+                        <a:srgbClr val="D6D6D6"/>
+                      </a:solidFill>
+                      <a:prstDash val="solid"/>
+                      <a:round/>
+                      <a:headEnd type="none" w="med" len="med"/>
+                      <a:tailEnd type="none" w="med" len="med"/>
+                    </a:lnT>
+                    <a:lnB w="9525">
+                      <a:solidFill>
+                        <a:srgbClr val="D6D6D6"/>
+                      </a:solidFill>
+                    </a:lnB>
+                    <a:noFill/>
+                  </a:tcPr>
+                </a:tc>
+                <a:tc>
+                  <a:txBody>
+                    <a:bodyPr/>
+                    <a:lstStyle/>
+                    <a:p>
+                      <a:pPr marL="0" algn="l" defTabSz="914400" rtl="0" eaLnBrk="1" latinLnBrk="0" hangingPunct="1"/>
+                      <a:r>
+                        <a:rPr sz="800" b="0" kern="1200" dirty="0">
+                          <a:solidFill>
+                            <a:srgbClr val="0A0A0A"/>
+                          </a:solidFill>
+                          <a:latin typeface="微软雅黑" panose="020B0503020204020204" pitchFamily="34" charset="-122"/>
+                          <a:ea typeface="微软雅黑" panose="020B0503020204020204" pitchFamily="34" charset="-122"/>
+                          <a:cs typeface="+mn-cs"/>
+                        </a:rPr>
+                        <a:t>A$3,420.50</a:t>
+                      </a:r>
+                    </a:p>
+                  </a:txBody>
+                  <a:tcPr marL="27432" marR="27432" marT="9144" marB="9144">
+                    <a:lnL>
+                      <a:noFill/>
+                    </a:lnL>
+                    <a:lnR>
+                      <a:noFill/>
+                    </a:lnR>
+                    <a:lnT w="9525" cap="flat" cmpd="sng" algn="ctr">
+                      <a:solidFill>
+                        <a:srgbClr val="D6D6D6"/>
+                      </a:solidFill>
+                      <a:prstDash val="solid"/>
+                      <a:round/>
+                      <a:headEnd type="none" w="med" len="med"/>
+                      <a:tailEnd type="none" w="med" len="med"/>
+                    </a:lnT>
+                    <a:lnB w="9525">
+                      <a:solidFill>
+                        <a:srgbClr val="D6D6D6"/>
+                      </a:solidFill>
+                    </a:lnB>
+                    <a:noFill/>
+                  </a:tcPr>
+                </a:tc>
+                <a:tc>
+                  <a:txBody>
+                    <a:bodyPr/>
+                    <a:lstStyle/>
+                    <a:p>
+                      <a:pPr marL="0" algn="l" defTabSz="914400" rtl="0" eaLnBrk="1" latinLnBrk="0" hangingPunct="1"/>
+                      <a:r>
+                        <a:rPr sz="800" b="0" kern="1200">
+                          <a:solidFill>
+                            <a:srgbClr val="0A0A0A"/>
+                          </a:solidFill>
+                          <a:latin typeface="微软雅黑" panose="020B0503020204020204" pitchFamily="34" charset="-122"/>
+                          <a:ea typeface="微软雅黑" panose="020B0503020204020204" pitchFamily="34" charset="-122"/>
+                          <a:cs typeface="+mn-cs"/>
+                        </a:rPr>
+                        <a:t>ACME PTY LTD</a:t>
+                      </a:r>
+                    </a:p>
+                  </a:txBody>
+                  <a:tcPr marL="27432" marR="27432" marT="9144" marB="9144">
+                    <a:lnL>
+                      <a:noFill/>
+                    </a:lnL>
+                    <a:lnR>
+                      <a:noFill/>
+                    </a:lnR>
+                    <a:lnT w="9525" cap="flat" cmpd="sng" algn="ctr">
+                      <a:solidFill>
+                        <a:srgbClr val="D6D6D6"/>
+                      </a:solidFill>
+                      <a:prstDash val="solid"/>
+                      <a:round/>
+                      <a:headEnd type="none" w="med" len="med"/>
+                      <a:tailEnd type="none" w="med" len="med"/>
+                    </a:lnT>
+                    <a:lnB w="9525">
+                      <a:solidFill>
+                        <a:srgbClr val="D6D6D6"/>
+                      </a:solidFill>
+                    </a:lnB>
+                    <a:noFill/>
+                  </a:tcPr>
+                </a:tc>
+                <a:tc>
+                  <a:txBody>
+                    <a:bodyPr/>
+                    <a:lstStyle/>
+                    <a:p>
+                      <a:pPr marL="0" algn="l" defTabSz="914400" rtl="0" eaLnBrk="1" latinLnBrk="0" hangingPunct="1"/>
+                      <a:r>
+                        <a:rPr sz="800" b="0" kern="1200">
+                          <a:solidFill>
+                            <a:srgbClr val="0A0A0A"/>
+                          </a:solidFill>
+                          <a:latin typeface="微软雅黑" panose="020B0503020204020204" pitchFamily="34" charset="-122"/>
+                          <a:ea typeface="微软雅黑" panose="020B0503020204020204" pitchFamily="34" charset="-122"/>
+                          <a:cs typeface="+mn-cs"/>
+                        </a:rPr>
+                        <a:t>雇主 / 收入付款方</a:t>
+                      </a:r>
+                    </a:p>
+                  </a:txBody>
+                  <a:tcPr marL="27432" marR="27432" marT="9144" marB="9144">
+                    <a:lnL>
+                      <a:noFill/>
+                    </a:lnL>
+                    <a:lnR>
+                      <a:noFill/>
+                    </a:lnR>
+                    <a:lnT w="9525" cap="flat" cmpd="sng" algn="ctr">
+                      <a:solidFill>
+                        <a:srgbClr val="D6D6D6"/>
+                      </a:solidFill>
+                      <a:prstDash val="solid"/>
+                      <a:round/>
+                      <a:headEnd type="none" w="med" len="med"/>
+                      <a:tailEnd type="none" w="med" len="med"/>
+                    </a:lnT>
+                    <a:lnB w="9525">
+                      <a:solidFill>
+                        <a:srgbClr val="D6D6D6"/>
+                      </a:solidFill>
+                    </a:lnB>
+                    <a:noFill/>
+                  </a:tcPr>
+                </a:tc>
+                <a:tc>
+                  <a:txBody>
+                    <a:bodyPr/>
+                    <a:lstStyle/>
+                    <a:p>
+                      <a:pPr marL="0" algn="l" defTabSz="914400" rtl="0" eaLnBrk="1" latinLnBrk="0" hangingPunct="1"/>
+                      <a:r>
+                        <a:rPr sz="800" b="0" kern="1200">
+                          <a:solidFill>
+                            <a:srgbClr val="0A0A0A"/>
+                          </a:solidFill>
+                          <a:latin typeface="微软雅黑" panose="020B0503020204020204" pitchFamily="34" charset="-122"/>
+                          <a:ea typeface="微软雅黑" panose="020B0503020204020204" pitchFamily="34" charset="-122"/>
+                          <a:cs typeface="+mn-cs"/>
+                        </a:rPr>
+                        <a:t>收入</a:t>
+                      </a:r>
+                    </a:p>
+                  </a:txBody>
+                  <a:tcPr marL="27432" marR="27432" marT="9144" marB="9144">
+                    <a:lnL>
+                      <a:noFill/>
+                    </a:lnL>
+                    <a:lnR>
+                      <a:noFill/>
+                    </a:lnR>
+                    <a:lnT w="9525" cap="flat" cmpd="sng" algn="ctr">
+                      <a:solidFill>
+                        <a:srgbClr val="D6D6D6"/>
+                      </a:solidFill>
+                      <a:prstDash val="solid"/>
+                      <a:round/>
+                      <a:headEnd type="none" w="med" len="med"/>
+                      <a:tailEnd type="none" w="med" len="med"/>
+                    </a:lnT>
+                    <a:lnB w="9525">
+                      <a:solidFill>
+                        <a:srgbClr val="D6D6D6"/>
+                      </a:solidFill>
+                    </a:lnB>
+                    <a:noFill/>
+                  </a:tcPr>
+                </a:tc>
+                <a:tc>
+                  <a:txBody>
+                    <a:bodyPr/>
+                    <a:lstStyle/>
+                    <a:p>
+                      <a:pPr marL="0" algn="l" defTabSz="914400" rtl="0" eaLnBrk="1" latinLnBrk="0" hangingPunct="1"/>
+                      <a:r>
+                        <a:rPr sz="800" b="0" kern="1200" dirty="0" err="1">
+                          <a:solidFill>
+                            <a:srgbClr val="0A0A0A"/>
+                          </a:solidFill>
+                          <a:latin typeface="微软雅黑" panose="020B0503020204020204" pitchFamily="34" charset="-122"/>
+                          <a:ea typeface="微软雅黑" panose="020B0503020204020204" pitchFamily="34" charset="-122"/>
+                          <a:cs typeface="+mn-cs"/>
+                        </a:rPr>
+                        <a:t>工资文本模式</a:t>
+                      </a:r>
+                      <a:r>
+                        <a:rPr sz="800" b="0" kern="1200" dirty="0">
+                          <a:solidFill>
+                            <a:srgbClr val="0A0A0A"/>
+                          </a:solidFill>
+                          <a:latin typeface="微软雅黑" panose="020B0503020204020204" pitchFamily="34" charset="-122"/>
+                          <a:ea typeface="微软雅黑" panose="020B0503020204020204" pitchFamily="34" charset="-122"/>
+                          <a:cs typeface="+mn-cs"/>
+                        </a:rPr>
+                        <a:t> + </a:t>
+                      </a:r>
+                      <a:r>
+                        <a:rPr sz="800" b="0" kern="1200" dirty="0" err="1">
+                          <a:solidFill>
+                            <a:srgbClr val="0A0A0A"/>
+                          </a:solidFill>
+                          <a:latin typeface="微软雅黑" panose="020B0503020204020204" pitchFamily="34" charset="-122"/>
+                          <a:ea typeface="微软雅黑" panose="020B0503020204020204" pitchFamily="34" charset="-122"/>
+                          <a:cs typeface="+mn-cs"/>
+                        </a:rPr>
+                        <a:t>双周周期</a:t>
+                      </a:r>
+                      <a:r>
+                        <a:rPr sz="800" b="0" kern="1200" dirty="0">
+                          <a:solidFill>
+                            <a:srgbClr val="0A0A0A"/>
+                          </a:solidFill>
+                          <a:latin typeface="微软雅黑" panose="020B0503020204020204" pitchFamily="34" charset="-122"/>
+                          <a:ea typeface="微软雅黑" panose="020B0503020204020204" pitchFamily="34" charset="-122"/>
+                          <a:cs typeface="+mn-cs"/>
+                        </a:rPr>
+                        <a:t> + </a:t>
+                      </a:r>
+                      <a:r>
+                        <a:rPr sz="800" b="0" kern="1200" dirty="0" err="1">
+                          <a:solidFill>
+                            <a:srgbClr val="0A0A0A"/>
+                          </a:solidFill>
+                          <a:latin typeface="微软雅黑" panose="020B0503020204020204" pitchFamily="34" charset="-122"/>
+                          <a:ea typeface="微软雅黑" panose="020B0503020204020204" pitchFamily="34" charset="-122"/>
+                          <a:cs typeface="+mn-cs"/>
+                        </a:rPr>
+                        <a:t>稳定金额</a:t>
+                      </a:r>
+                      <a:endParaRPr sz="800" b="0" kern="1200" dirty="0">
+                        <a:solidFill>
+                          <a:srgbClr val="0A0A0A"/>
+                        </a:solidFill>
+                        <a:latin typeface="微软雅黑" panose="020B0503020204020204" pitchFamily="34" charset="-122"/>
+                        <a:ea typeface="微软雅黑" panose="020B0503020204020204" pitchFamily="34" charset="-122"/>
+                        <a:cs typeface="+mn-cs"/>
+                      </a:endParaRPr>
+                    </a:p>
+                  </a:txBody>
+                  <a:tcPr marL="27432" marR="27432" marT="9144" marB="9144">
+                    <a:lnL>
+                      <a:noFill/>
+                    </a:lnL>
+                    <a:lnR>
+                      <a:noFill/>
+                    </a:lnR>
+                    <a:lnT w="9525" cap="flat" cmpd="sng" algn="ctr">
+                      <a:solidFill>
+                        <a:srgbClr val="D6D6D6"/>
+                      </a:solidFill>
+                      <a:prstDash val="solid"/>
+                      <a:round/>
+                      <a:headEnd type="none" w="med" len="med"/>
+                      <a:tailEnd type="none" w="med" len="med"/>
+                    </a:lnT>
+                    <a:lnB w="9525">
+                      <a:solidFill>
+                        <a:srgbClr val="D6D6D6"/>
+                      </a:solidFill>
+                    </a:lnB>
+                    <a:noFill/>
+                  </a:tcPr>
+                </a:tc>
+                <a:extLst>
+                  <a:ext uri="{0D108BD9-81ED-4DB2-BD59-A6C34878D82A}">
+                    <a16:rowId xmlns:a16="http://schemas.microsoft.com/office/drawing/2014/main" val="10005"/>
+                  </a:ext>
+                </a:extLst>
+              </a:tr>
+            </a:tbl>
+          </a:graphicData>
+        </a:graphic>
+      </p:graphicFrame>
       <p:graphicFrame>
         <p:nvGraphicFramePr>
           <p:cNvPr id="17" name="income-table">
@@ -12429,7 +17844,7 @@
 </p:sld>
 </file>
 
-<file path=ppt/slides/slide3.xml><?xml version="1.0" encoding="utf-8"?>
+<file path=ppt/slides/slide4.xml><?xml version="1.0" encoding="utf-8"?>
 <p:sld xmlns:a="http://schemas.openxmlformats.org/drawingml/2006/main" xmlns:r="http://schemas.openxmlformats.org/officeDocument/2006/relationships" xmlns:p="http://schemas.openxmlformats.org/presentationml/2006/main">
   <p:cSld>
     <p:spTree>
@@ -17466,7 +22881,7 @@
 </p:sld>
 </file>
 
-<file path=ppt/slides/slide4.xml><?xml version="1.0" encoding="utf-8"?>
+<file path=ppt/slides/slide5.xml><?xml version="1.0" encoding="utf-8"?>
 <p:sld xmlns:a="http://schemas.openxmlformats.org/drawingml/2006/main" xmlns:r="http://schemas.openxmlformats.org/officeDocument/2006/relationships" xmlns:p="http://schemas.openxmlformats.org/presentationml/2006/main">
   <p:cSld>
     <p:spTree>

--- a/银行流水分享_V1.7.pptx
+++ b/银行流水分享_V1.7.pptx
@@ -29132,14 +29132,14 @@
       </p:sp>
       <p:sp>
         <p:nvSpPr>
-          <p:cNvPr id="64" name="Oval 63"/>
+          <p:cNvPr id="64" name="venn-blue"/>
           <p:cNvSpPr/>
           <p:nvPr/>
         </p:nvSpPr>
         <p:spPr>
           <a:xfrm>
-            <a:off x="420623" y="1965961"/>
-            <a:ext cx="2148840" cy="2148840"/>
+            <a:off x="841248" y="1609344"/>
+            <a:ext cx="2578608" cy="2578608"/>
           </a:xfrm>
           <a:prstGeom prst="ellipse">
             <a:avLst/>
@@ -29174,50 +29174,20 @@
           <a:bodyPr rtlCol="0" anchor="ctr"/>
           <a:lstStyle/>
           <a:p>
-            <a:pPr marL="0" marR="0" lvl="0" indent="0" algn="ctr" defTabSz="914400" rtl="0" eaLnBrk="1" fontAlgn="auto" latinLnBrk="0" hangingPunct="1">
-              <a:lnSpc>
-                <a:spcPct val="100000"/>
-              </a:lnSpc>
-              <a:spcBef>
-                <a:spcPts val="0"/>
-              </a:spcBef>
-              <a:spcAft>
-                <a:spcPts val="0"/>
-              </a:spcAft>
-              <a:buClrTx/>
-              <a:buSzTx/>
-              <a:buFontTx/>
-              <a:buNone/>
-              <a:tabLst/>
-              <a:defRPr/>
-            </a:pPr>
-            <a:endParaRPr kumimoji="0" sz="1800" b="0" i="0" u="none" strike="noStrike" kern="1200" cap="none" spc="0" normalizeH="0" baseline="0" noProof="0">
-              <a:ln>
-                <a:noFill/>
-              </a:ln>
-              <a:solidFill>
-                <a:prstClr val="white"/>
-              </a:solidFill>
-              <a:effectLst/>
-              <a:uLnTx/>
-              <a:uFillTx/>
-              <a:latin typeface="等线"/>
-              <a:ea typeface="+mn-ea"/>
-              <a:cs typeface="+mn-cs"/>
-            </a:endParaRPr>
+            <a:pPr algn="ctr"/>
           </a:p>
         </p:txBody>
       </p:sp>
       <p:sp>
         <p:nvSpPr>
-          <p:cNvPr id="65" name="Oval 64"/>
+          <p:cNvPr id="65" name="venn-gold"/>
           <p:cNvSpPr/>
           <p:nvPr/>
         </p:nvSpPr>
         <p:spPr>
           <a:xfrm>
-            <a:off x="1609343" y="1965961"/>
-            <a:ext cx="2148840" cy="2148840"/>
+            <a:off x="1947671" y="1609344"/>
+            <a:ext cx="2487168" cy="2487168"/>
           </a:xfrm>
           <a:prstGeom prst="ellipse">
             <a:avLst/>
@@ -29252,50 +29222,20 @@
           <a:bodyPr rtlCol="0" anchor="ctr"/>
           <a:lstStyle/>
           <a:p>
-            <a:pPr marL="0" marR="0" lvl="0" indent="0" algn="ctr" defTabSz="914400" rtl="0" eaLnBrk="1" fontAlgn="auto" latinLnBrk="0" hangingPunct="1">
-              <a:lnSpc>
-                <a:spcPct val="100000"/>
-              </a:lnSpc>
-              <a:spcBef>
-                <a:spcPts val="0"/>
-              </a:spcBef>
-              <a:spcAft>
-                <a:spcPts val="0"/>
-              </a:spcAft>
-              <a:buClrTx/>
-              <a:buSzTx/>
-              <a:buFontTx/>
-              <a:buNone/>
-              <a:tabLst/>
-              <a:defRPr/>
-            </a:pPr>
-            <a:endParaRPr kumimoji="0" sz="1800" b="0" i="0" u="none" strike="noStrike" kern="1200" cap="none" spc="0" normalizeH="0" baseline="0" noProof="0">
-              <a:ln>
-                <a:noFill/>
-              </a:ln>
-              <a:solidFill>
-                <a:prstClr val="white"/>
-              </a:solidFill>
-              <a:effectLst/>
-              <a:uLnTx/>
-              <a:uFillTx/>
-              <a:latin typeface="等线"/>
-              <a:ea typeface="+mn-ea"/>
-              <a:cs typeface="+mn-cs"/>
-            </a:endParaRPr>
+            <a:pPr algn="ctr"/>
           </a:p>
         </p:txBody>
       </p:sp>
       <p:sp>
         <p:nvSpPr>
-          <p:cNvPr id="66" name="TextBox 65"/>
+          <p:cNvPr id="66" name="venn-label-blue"/>
           <p:cNvSpPr txBox="1"/>
           <p:nvPr/>
         </p:nvSpPr>
         <p:spPr>
           <a:xfrm>
-            <a:off x="283463" y="2903221"/>
-            <a:ext cx="914400" cy="274320"/>
+            <a:off x="841248" y="1298448"/>
+            <a:ext cx="1463040" cy="402336"/>
           </a:xfrm>
           <a:prstGeom prst="rect">
             <a:avLst/>
@@ -29303,42 +29243,117 @@
           <a:noFill/>
         </p:spPr>
         <p:txBody>
-          <a:bodyPr wrap="square" anchor="ctr">
+          <a:bodyPr wrap="none" lIns="0" rIns="0" tIns="0" bIns="0">
+            <a:noAutofit/>
+          </a:bodyPr>
+          <a:lstStyle/>
+          <a:p>
+            <a:pPr algn="l"/>
+            <a:r>
+              <a:rPr sz="900" b="1" lang="zh-CN">
+                <a:solidFill>
+                  <a:srgbClr val="1F4E79"/>
+                </a:solidFill>
+                <a:latin typeface="微软雅黑"/>
+                <a:ea typeface="微软雅黑"/>
+              </a:rPr>
+              <a:t>Finv 识别 5,680</a:t>
+            </a:r>
+          </a:p>
+          <a:p>
+            <a:pPr algn="l"/>
+            <a:r>
+              <a:rPr sz="800" b="0" lang="zh-CN">
+                <a:solidFill>
+                  <a:srgbClr val="606060"/>
+                </a:solidFill>
+                <a:latin typeface="微软雅黑"/>
+                <a:ea typeface="微软雅黑"/>
+              </a:rPr>
+              <a:t>覆盖率 12.8%</a:t>
+            </a:r>
+          </a:p>
+        </p:txBody>
+      </p:sp>
+      <p:sp>
+        <p:nvSpPr>
+          <p:cNvPr id="67" name="venn-label-gold"/>
+          <p:cNvSpPr txBox="1"/>
+          <p:nvPr/>
+        </p:nvSpPr>
+        <p:spPr>
+          <a:xfrm>
+            <a:off x="2971799" y="1298448"/>
+            <a:ext cx="1463040" cy="402336"/>
+          </a:xfrm>
+          <a:prstGeom prst="rect">
+            <a:avLst/>
+          </a:prstGeom>
+          <a:noFill/>
+        </p:spPr>
+        <p:txBody>
+          <a:bodyPr wrap="none" lIns="0" rIns="0" tIns="0" bIns="0">
+            <a:noAutofit/>
+          </a:bodyPr>
+          <a:lstStyle/>
+          <a:p>
+            <a:pPr algn="r"/>
+            <a:r>
+              <a:rPr sz="900" b="1" lang="zh-CN">
+                <a:solidFill>
+                  <a:srgbClr val="D6A000"/>
+                </a:solidFill>
+                <a:latin typeface="微软雅黑"/>
+                <a:ea typeface="微软雅黑"/>
+              </a:rPr>
+              <a:t>illion 识别 5,363</a:t>
+            </a:r>
+          </a:p>
+          <a:p>
+            <a:pPr algn="r"/>
+            <a:r>
+              <a:rPr sz="800" b="0" lang="zh-CN">
+                <a:solidFill>
+                  <a:srgbClr val="606060"/>
+                </a:solidFill>
+                <a:latin typeface="微软雅黑"/>
+                <a:ea typeface="微软雅黑"/>
+              </a:rPr>
+              <a:t>覆盖率 12.1%</a:t>
+            </a:r>
+          </a:p>
+        </p:txBody>
+      </p:sp>
+      <p:sp>
+        <p:nvSpPr>
+          <p:cNvPr id="68" name="venn-blue-only"/>
+          <p:cNvSpPr txBox="1"/>
+          <p:nvPr/>
+        </p:nvSpPr>
+        <p:spPr>
+          <a:xfrm>
+            <a:off x="987552" y="2743200"/>
+            <a:ext cx="822960" cy="274320"/>
+          </a:xfrm>
+          <a:prstGeom prst="rect">
+            <a:avLst/>
+          </a:prstGeom>
+          <a:noFill/>
+        </p:spPr>
+        <p:txBody>
+          <a:bodyPr wrap="none" lIns="0" rIns="0" tIns="0" bIns="0">
             <a:spAutoFit/>
           </a:bodyPr>
           <a:lstStyle/>
           <a:p>
-            <a:pPr marL="0" marR="0" lvl="0" indent="0" algn="ctr" defTabSz="914400" rtl="0" eaLnBrk="1" fontAlgn="auto" latinLnBrk="0" hangingPunct="1">
-              <a:lnSpc>
-                <a:spcPct val="100000"/>
-              </a:lnSpc>
-              <a:spcBef>
-                <a:spcPts val="0"/>
-              </a:spcBef>
-              <a:spcAft>
-                <a:spcPts val="0"/>
-              </a:spcAft>
-              <a:buClrTx/>
-              <a:buSzTx/>
-              <a:buFontTx/>
-              <a:buNone/>
-              <a:tabLst/>
-              <a:defRPr/>
-            </a:pPr>
+            <a:pPr algn="ctr"/>
             <a:r>
-              <a:rPr kumimoji="0" sz="1100" b="1" i="0" u="none" strike="noStrike" kern="1200" cap="none" spc="0" normalizeH="0" baseline="0" noProof="0">
-                <a:ln>
-                  <a:noFill/>
-                </a:ln>
+              <a:rPr sz="1100" b="1" lang="zh-CN">
                 <a:solidFill>
-                  <a:srgbClr val="1F4E79"/>
+                  <a:srgbClr val="0A0A0A"/>
                 </a:solidFill>
-                <a:effectLst/>
-                <a:uLnTx/>
-                <a:uFillTx/>
                 <a:latin typeface="微软雅黑"/>
-                <a:ea typeface="+mn-ea"/>
-                <a:cs typeface="+mn-cs"/>
+                <a:ea typeface="微软雅黑"/>
               </a:rPr>
               <a:t>396</a:t>
             </a:r>
@@ -29347,14 +29362,14 @@
       </p:sp>
       <p:sp>
         <p:nvSpPr>
-          <p:cNvPr id="67" name="TextBox 66"/>
+          <p:cNvPr id="69" name="venn-gold-only"/>
           <p:cNvSpPr txBox="1"/>
           <p:nvPr/>
         </p:nvSpPr>
         <p:spPr>
           <a:xfrm>
-            <a:off x="2980943" y="2903221"/>
-            <a:ext cx="914400" cy="274320"/>
+            <a:off x="3520440" y="2743200"/>
+            <a:ext cx="822960" cy="274320"/>
           </a:xfrm>
           <a:prstGeom prst="rect">
             <a:avLst/>
@@ -29362,42 +29377,19 @@
           <a:noFill/>
         </p:spPr>
         <p:txBody>
-          <a:bodyPr wrap="square" anchor="ctr">
+          <a:bodyPr wrap="none" lIns="0" rIns="0" tIns="0" bIns="0">
             <a:spAutoFit/>
           </a:bodyPr>
           <a:lstStyle/>
           <a:p>
-            <a:pPr marL="0" marR="0" lvl="0" indent="0" algn="ctr" defTabSz="914400" rtl="0" eaLnBrk="1" fontAlgn="auto" latinLnBrk="0" hangingPunct="1">
-              <a:lnSpc>
-                <a:spcPct val="100000"/>
-              </a:lnSpc>
-              <a:spcBef>
-                <a:spcPts val="0"/>
-              </a:spcBef>
-              <a:spcAft>
-                <a:spcPts val="0"/>
-              </a:spcAft>
-              <a:buClrTx/>
-              <a:buSzTx/>
-              <a:buFontTx/>
-              <a:buNone/>
-              <a:tabLst/>
-              <a:defRPr/>
-            </a:pPr>
+            <a:pPr algn="ctr"/>
             <a:r>
-              <a:rPr kumimoji="0" sz="1100" b="1" i="0" u="none" strike="noStrike" kern="1200" cap="none" spc="0" normalizeH="0" baseline="0" noProof="0">
-                <a:ln>
-                  <a:noFill/>
-                </a:ln>
+              <a:rPr sz="1100" b="1" lang="zh-CN">
                 <a:solidFill>
-                  <a:srgbClr val="D6A000"/>
+                  <a:srgbClr val="0A0A0A"/>
                 </a:solidFill>
-                <a:effectLst/>
-                <a:uLnTx/>
-                <a:uFillTx/>
                 <a:latin typeface="微软雅黑"/>
-                <a:ea typeface="+mn-ea"/>
-                <a:cs typeface="+mn-cs"/>
+                <a:ea typeface="微软雅黑"/>
               </a:rPr>
               <a:t>79</a:t>
             </a:r>
@@ -29406,14 +29398,14 @@
       </p:sp>
       <p:sp>
         <p:nvSpPr>
-          <p:cNvPr id="68" name="TextBox 67"/>
+          <p:cNvPr id="70" name="venn-intersect"/>
           <p:cNvSpPr txBox="1"/>
           <p:nvPr/>
         </p:nvSpPr>
         <p:spPr>
           <a:xfrm>
-            <a:off x="1289303" y="2839213"/>
-            <a:ext cx="685800" cy="274320"/>
+            <a:off x="2276856" y="2670048"/>
+            <a:ext cx="822960" cy="274320"/>
           </a:xfrm>
           <a:prstGeom prst="rect">
             <a:avLst/>
@@ -29421,42 +29413,19 @@
           <a:noFill/>
         </p:spPr>
         <p:txBody>
-          <a:bodyPr wrap="square" anchor="ctr">
+          <a:bodyPr wrap="none" lIns="0" rIns="0" tIns="0" bIns="0">
             <a:spAutoFit/>
           </a:bodyPr>
           <a:lstStyle/>
           <a:p>
-            <a:pPr marL="0" marR="0" lvl="0" indent="0" algn="ctr" defTabSz="914400" rtl="0" eaLnBrk="1" fontAlgn="auto" latinLnBrk="0" hangingPunct="1">
-              <a:lnSpc>
-                <a:spcPct val="100000"/>
-              </a:lnSpc>
-              <a:spcBef>
-                <a:spcPts val="0"/>
-              </a:spcBef>
-              <a:spcAft>
-                <a:spcPts val="0"/>
-              </a:spcAft>
-              <a:buClrTx/>
-              <a:buSzTx/>
-              <a:buFontTx/>
-              <a:buNone/>
-              <a:tabLst/>
-              <a:defRPr/>
-            </a:pPr>
+            <a:pPr algn="ctr"/>
             <a:r>
-              <a:rPr kumimoji="0" sz="1200" b="1" i="0" u="none" strike="noStrike" kern="1200" cap="none" spc="0" normalizeH="0" baseline="0" noProof="0">
-                <a:ln>
-                  <a:noFill/>
-                </a:ln>
+              <a:rPr sz="1200" b="1" lang="zh-CN">
                 <a:solidFill>
-                  <a:srgbClr val="0A0A0A"/>
+                  <a:srgbClr val="1F4E79"/>
                 </a:solidFill>
-                <a:effectLst/>
-                <a:uLnTx/>
-                <a:uFillTx/>
                 <a:latin typeface="微软雅黑"/>
-                <a:ea typeface="+mn-ea"/>
-                <a:cs typeface="+mn-cs"/>
+                <a:ea typeface="微软雅黑"/>
               </a:rPr>
               <a:t>5,284</a:t>
             </a:r>
@@ -29465,14 +29434,14 @@
       </p:sp>
       <p:sp>
         <p:nvSpPr>
-          <p:cNvPr id="69" name="TextBox 68"/>
+          <p:cNvPr id="71" name="venn-rate"/>
           <p:cNvSpPr txBox="1"/>
           <p:nvPr/>
         </p:nvSpPr>
         <p:spPr>
           <a:xfrm>
-            <a:off x="1133855" y="3131821"/>
-            <a:ext cx="960120" cy="201168"/>
+            <a:off x="2276856" y="2962656"/>
+            <a:ext cx="822960" cy="274320"/>
           </a:xfrm>
           <a:prstGeom prst="rect">
             <a:avLst/>
@@ -29480,280 +29449,21 @@
           <a:noFill/>
         </p:spPr>
         <p:txBody>
-          <a:bodyPr wrap="square" anchor="ctr">
+          <a:bodyPr wrap="none" lIns="0" rIns="0" tIns="0" bIns="0">
             <a:spAutoFit/>
           </a:bodyPr>
           <a:lstStyle/>
           <a:p>
-            <a:pPr marL="0" marR="0" lvl="0" indent="0" algn="ctr" defTabSz="914400" rtl="0" eaLnBrk="1" fontAlgn="auto" latinLnBrk="0" hangingPunct="1">
-              <a:lnSpc>
-                <a:spcPct val="100000"/>
-              </a:lnSpc>
-              <a:spcBef>
-                <a:spcPts val="0"/>
-              </a:spcBef>
-              <a:spcAft>
-                <a:spcPts val="0"/>
-              </a:spcAft>
-              <a:buClrTx/>
-              <a:buSzTx/>
-              <a:buFontTx/>
-              <a:buNone/>
-              <a:tabLst/>
-              <a:defRPr/>
-            </a:pPr>
+            <a:pPr algn="ctr"/>
             <a:r>
-              <a:rPr kumimoji="0" sz="750" b="0" i="0" u="none" strike="noStrike" kern="1200" cap="none" spc="0" normalizeH="0" baseline="0" noProof="0">
-                <a:ln>
-                  <a:noFill/>
-                </a:ln>
+              <a:rPr sz="750" b="0" lang="zh-CN">
                 <a:solidFill>
-                  <a:srgbClr val="3D3C3A"/>
+                  <a:srgbClr val="606060"/>
                 </a:solidFill>
-                <a:effectLst/>
-                <a:uLnTx/>
-                <a:uFillTx/>
                 <a:latin typeface="微软雅黑"/>
-                <a:ea typeface="+mn-ea"/>
-                <a:cs typeface="+mn-cs"/>
+                <a:ea typeface="微软雅黑"/>
               </a:rPr>
               <a:t>一致率 92.0%</a:t>
-            </a:r>
-          </a:p>
-        </p:txBody>
-      </p:sp>
-      <p:sp>
-        <p:nvSpPr>
-          <p:cNvPr id="70" name="TextBox 69"/>
-          <p:cNvSpPr txBox="1"/>
-          <p:nvPr/>
-        </p:nvSpPr>
-        <p:spPr>
-          <a:xfrm>
-            <a:off x="192023" y="1429921"/>
-            <a:ext cx="2606040" cy="230832"/>
-          </a:xfrm>
-          <a:prstGeom prst="rect">
-            <a:avLst/>
-          </a:prstGeom>
-          <a:noFill/>
-        </p:spPr>
-        <p:txBody>
-          <a:bodyPr wrap="square" anchor="ctr">
-            <a:spAutoFit/>
-          </a:bodyPr>
-          <a:lstStyle/>
-          <a:p>
-            <a:pPr marL="0" marR="0" lvl="0" indent="0" algn="ctr" defTabSz="914400" rtl="0" eaLnBrk="1" fontAlgn="auto" latinLnBrk="0" hangingPunct="1">
-              <a:lnSpc>
-                <a:spcPct val="100000"/>
-              </a:lnSpc>
-              <a:spcBef>
-                <a:spcPts val="0"/>
-              </a:spcBef>
-              <a:spcAft>
-                <a:spcPts val="0"/>
-              </a:spcAft>
-              <a:buClrTx/>
-              <a:buSzTx/>
-              <a:buFontTx/>
-              <a:buNone/>
-              <a:tabLst/>
-              <a:defRPr/>
-            </a:pPr>
-            <a:r>
-              <a:rPr kumimoji="0" sz="900" b="1" i="0" u="none" strike="noStrike" kern="1200" cap="none" spc="0" normalizeH="0" baseline="0" noProof="0">
-                <a:ln>
-                  <a:noFill/>
-                </a:ln>
-                <a:solidFill>
-                  <a:srgbClr val="1F4E79"/>
-                </a:solidFill>
-                <a:effectLst/>
-                <a:uLnTx/>
-                <a:uFillTx/>
-                <a:latin typeface="微软雅黑"/>
-                <a:ea typeface="+mn-ea"/>
-                <a:cs typeface="+mn-cs"/>
-              </a:rPr>
-              <a:t>Finv 识别 5,680</a:t>
-            </a:r>
-          </a:p>
-        </p:txBody>
-      </p:sp>
-      <p:sp>
-        <p:nvSpPr>
-          <p:cNvPr id="71" name="TextBox 70"/>
-          <p:cNvSpPr txBox="1"/>
-          <p:nvPr/>
-        </p:nvSpPr>
-        <p:spPr>
-          <a:xfrm>
-            <a:off x="192023" y="1655065"/>
-            <a:ext cx="2606040" cy="219456"/>
-          </a:xfrm>
-          <a:prstGeom prst="rect">
-            <a:avLst/>
-          </a:prstGeom>
-          <a:noFill/>
-        </p:spPr>
-        <p:txBody>
-          <a:bodyPr wrap="square" anchor="ctr">
-            <a:spAutoFit/>
-          </a:bodyPr>
-          <a:lstStyle/>
-          <a:p>
-            <a:pPr marL="0" marR="0" lvl="0" indent="0" algn="ctr" defTabSz="914400" rtl="0" eaLnBrk="1" fontAlgn="auto" latinLnBrk="0" hangingPunct="1">
-              <a:lnSpc>
-                <a:spcPct val="100000"/>
-              </a:lnSpc>
-              <a:spcBef>
-                <a:spcPts val="0"/>
-              </a:spcBef>
-              <a:spcAft>
-                <a:spcPts val="0"/>
-              </a:spcAft>
-              <a:buClrTx/>
-              <a:buSzTx/>
-              <a:buFontTx/>
-              <a:buNone/>
-              <a:tabLst/>
-              <a:defRPr/>
-            </a:pPr>
-            <a:r>
-              <a:rPr kumimoji="0" sz="800" b="0" i="0" u="none" strike="noStrike" kern="1200" cap="none" spc="0" normalizeH="0" baseline="0" noProof="0">
-                <a:ln>
-                  <a:noFill/>
-                </a:ln>
-                <a:solidFill>
-                  <a:srgbClr val="3D3C3A"/>
-                </a:solidFill>
-                <a:effectLst/>
-                <a:uLnTx/>
-                <a:uFillTx/>
-                <a:latin typeface="微软雅黑"/>
-                <a:ea typeface="+mn-ea"/>
-                <a:cs typeface="+mn-cs"/>
-              </a:rPr>
-              <a:t>覆盖率 12.8%</a:t>
-            </a:r>
-          </a:p>
-        </p:txBody>
-      </p:sp>
-      <p:sp>
-        <p:nvSpPr>
-          <p:cNvPr id="72" name="TextBox 71"/>
-          <p:cNvSpPr txBox="1"/>
-          <p:nvPr/>
-        </p:nvSpPr>
-        <p:spPr>
-          <a:xfrm>
-            <a:off x="1380743" y="1408177"/>
-            <a:ext cx="2606040" cy="274320"/>
-          </a:xfrm>
-          <a:prstGeom prst="rect">
-            <a:avLst/>
-          </a:prstGeom>
-          <a:noFill/>
-        </p:spPr>
-        <p:txBody>
-          <a:bodyPr wrap="square" anchor="ctr">
-            <a:spAutoFit/>
-          </a:bodyPr>
-          <a:lstStyle/>
-          <a:p>
-            <a:pPr marL="0" marR="0" lvl="0" indent="0" algn="ctr" defTabSz="914400" rtl="0" eaLnBrk="1" fontAlgn="auto" latinLnBrk="0" hangingPunct="1">
-              <a:lnSpc>
-                <a:spcPct val="100000"/>
-              </a:lnSpc>
-              <a:spcBef>
-                <a:spcPts val="0"/>
-              </a:spcBef>
-              <a:spcAft>
-                <a:spcPts val="0"/>
-              </a:spcAft>
-              <a:buClrTx/>
-              <a:buSzTx/>
-              <a:buFontTx/>
-              <a:buNone/>
-              <a:tabLst/>
-              <a:defRPr/>
-            </a:pPr>
-            <a:r>
-              <a:rPr kumimoji="0" sz="900" b="1" i="0" u="none" strike="noStrike" kern="1200" cap="none" spc="0" normalizeH="0" baseline="0" noProof="0">
-                <a:ln>
-                  <a:noFill/>
-                </a:ln>
-                <a:solidFill>
-                  <a:srgbClr val="D6A000"/>
-                </a:solidFill>
-                <a:effectLst/>
-                <a:uLnTx/>
-                <a:uFillTx/>
-                <a:latin typeface="微软雅黑"/>
-                <a:ea typeface="+mn-ea"/>
-                <a:cs typeface="+mn-cs"/>
-              </a:rPr>
-              <a:t>illion 识别 5,363</a:t>
-            </a:r>
-          </a:p>
-        </p:txBody>
-      </p:sp>
-      <p:sp>
-        <p:nvSpPr>
-          <p:cNvPr id="73" name="TextBox 72"/>
-          <p:cNvSpPr txBox="1"/>
-          <p:nvPr/>
-        </p:nvSpPr>
-        <p:spPr>
-          <a:xfrm>
-            <a:off x="1380743" y="1655065"/>
-            <a:ext cx="2606040" cy="219456"/>
-          </a:xfrm>
-          <a:prstGeom prst="rect">
-            <a:avLst/>
-          </a:prstGeom>
-          <a:noFill/>
-        </p:spPr>
-        <p:txBody>
-          <a:bodyPr wrap="square" anchor="ctr">
-            <a:spAutoFit/>
-          </a:bodyPr>
-          <a:lstStyle/>
-          <a:p>
-            <a:pPr marL="0" marR="0" lvl="0" indent="0" algn="ctr" defTabSz="914400" rtl="0" eaLnBrk="1" fontAlgn="auto" latinLnBrk="0" hangingPunct="1">
-              <a:lnSpc>
-                <a:spcPct val="100000"/>
-              </a:lnSpc>
-              <a:spcBef>
-                <a:spcPts val="0"/>
-              </a:spcBef>
-              <a:spcAft>
-                <a:spcPts val="0"/>
-              </a:spcAft>
-              <a:buClrTx/>
-              <a:buSzTx/>
-              <a:buFontTx/>
-              <a:buNone/>
-              <a:tabLst/>
-              <a:defRPr/>
-            </a:pPr>
-            <a:r>
-              <a:rPr kumimoji="0" sz="800" b="0" i="0" u="none" strike="noStrike" kern="1200" cap="none" spc="0" normalizeH="0" baseline="0" noProof="0">
-                <a:ln>
-                  <a:noFill/>
-                </a:ln>
-                <a:solidFill>
-                  <a:srgbClr val="3D3C3A"/>
-                </a:solidFill>
-                <a:effectLst/>
-                <a:uLnTx/>
-                <a:uFillTx/>
-                <a:latin typeface="微软雅黑"/>
-                <a:ea typeface="+mn-ea"/>
-                <a:cs typeface="+mn-cs"/>
-              </a:rPr>
-              <a:t>覆盖率 12.1%</a:t>
             </a:r>
           </a:p>
         </p:txBody>

--- a/银行流水分享_V1.7.pptx
+++ b/银行流水分享_V1.7.pptx
@@ -3133,7 +3133,10 @@
                 <a:buFontTx/>
                 <a:buNone/>
                 <a:tabLst/>
-                <a:defRPr/>
+                <a:defRPr>
+                  <a:latin typeface="微软雅黑"/>
+                  <a:ea typeface="微软雅黑"/>
+                </a:defRPr>
               </a:pPr>
               <a:endParaRPr kumimoji="0" sz="1800" b="0" i="0" u="none" strike="noStrike" kern="1200" cap="none" spc="0" normalizeH="0" baseline="0" noProof="0">
                 <a:ln>
@@ -3213,7 +3216,10 @@
                 <a:buFontTx/>
                 <a:buNone/>
                 <a:tabLst/>
-                <a:defRPr/>
+                <a:defRPr>
+                  <a:latin typeface="微软雅黑"/>
+                  <a:ea typeface="微软雅黑"/>
+                </a:defRPr>
               </a:pPr>
               <a:endParaRPr kumimoji="0" sz="1800" b="0" i="0" u="none" strike="noStrike" kern="1200" cap="none" spc="0" normalizeH="0" baseline="0" noProof="0">
                 <a:ln>
@@ -3275,7 +3281,10 @@
                 <a:buFontTx/>
                 <a:buNone/>
                 <a:tabLst/>
-                <a:defRPr/>
+                <a:defRPr>
+                  <a:latin typeface="微软雅黑"/>
+                  <a:ea typeface="微软雅黑"/>
+                </a:defRPr>
               </a:pPr>
               <a:r>
                 <a:rPr kumimoji="0" sz="1100" b="1" i="0" u="none" strike="noStrike" kern="1200" cap="none" spc="0" normalizeH="0" baseline="0" noProof="0">
@@ -3289,7 +3298,7 @@
                   <a:uLnTx/>
                   <a:uFillTx/>
                   <a:latin typeface="微软雅黑"/>
-                  <a:ea typeface="+mn-ea"/>
+                  <a:ea typeface="微软雅黑"/>
                   <a:cs typeface="+mn-cs"/>
                 </a:rPr>
                 <a:t>用户申请</a:t>
@@ -3340,7 +3349,10 @@
                 <a:buFontTx/>
                 <a:buNone/>
                 <a:tabLst/>
-                <a:defRPr/>
+                <a:defRPr>
+                  <a:latin typeface="微软雅黑"/>
+                  <a:ea typeface="微软雅黑"/>
+                </a:defRPr>
               </a:pPr>
               <a:r>
                 <a:rPr kumimoji="0" sz="1200" b="1" i="0" u="none" strike="noStrike" kern="1200" cap="none" spc="0" normalizeH="0" baseline="0" noProof="0">
@@ -3354,7 +3366,7 @@
                   <a:uLnTx/>
                   <a:uFillTx/>
                   <a:latin typeface="微软雅黑"/>
-                  <a:ea typeface="+mn-ea"/>
+                  <a:ea typeface="微软雅黑"/>
                   <a:cs typeface="+mn-cs"/>
                 </a:rPr>
                 <a:t>→</a:t>
@@ -3423,7 +3435,10 @@
                 <a:buFontTx/>
                 <a:buNone/>
                 <a:tabLst/>
-                <a:defRPr/>
+                <a:defRPr>
+                  <a:latin typeface="微软雅黑"/>
+                  <a:ea typeface="微软雅黑"/>
+                </a:defRPr>
               </a:pPr>
               <a:endParaRPr kumimoji="0" sz="1800" b="0" i="0" u="none" strike="noStrike" kern="1200" cap="none" spc="0" normalizeH="0" baseline="0" noProof="0">
                 <a:ln>
@@ -3485,7 +3500,10 @@
                 <a:buFontTx/>
                 <a:buNone/>
                 <a:tabLst/>
-                <a:defRPr/>
+                <a:defRPr>
+                  <a:latin typeface="微软雅黑"/>
+                  <a:ea typeface="微软雅黑"/>
+                </a:defRPr>
               </a:pPr>
               <a:r>
                 <a:rPr kumimoji="0" sz="1100" b="1" i="0" u="none" strike="noStrike" kern="1200" cap="none" spc="0" normalizeH="0" baseline="0" noProof="0">
@@ -3499,7 +3517,7 @@
                   <a:uLnTx/>
                   <a:uFillTx/>
                   <a:latin typeface="微软雅黑"/>
-                  <a:ea typeface="+mn-ea"/>
+                  <a:ea typeface="微软雅黑"/>
                   <a:cs typeface="+mn-cs"/>
                 </a:rPr>
                 <a:t>银行卡绑定</a:t>
@@ -3550,7 +3568,10 @@
                 <a:buFontTx/>
                 <a:buNone/>
                 <a:tabLst/>
-                <a:defRPr/>
+                <a:defRPr>
+                  <a:latin typeface="微软雅黑"/>
+                  <a:ea typeface="微软雅黑"/>
+                </a:defRPr>
               </a:pPr>
               <a:r>
                 <a:rPr kumimoji="0" sz="1200" b="1" i="0" u="none" strike="noStrike" kern="1200" cap="none" spc="0" normalizeH="0" baseline="0" noProof="0">
@@ -3564,7 +3585,7 @@
                   <a:uLnTx/>
                   <a:uFillTx/>
                   <a:latin typeface="微软雅黑"/>
-                  <a:ea typeface="+mn-ea"/>
+                  <a:ea typeface="微软雅黑"/>
                   <a:cs typeface="+mn-cs"/>
                 </a:rPr>
                 <a:t>→</a:t>
@@ -3633,7 +3654,10 @@
                 <a:buFontTx/>
                 <a:buNone/>
                 <a:tabLst/>
-                <a:defRPr/>
+                <a:defRPr>
+                  <a:latin typeface="微软雅黑"/>
+                  <a:ea typeface="微软雅黑"/>
+                </a:defRPr>
               </a:pPr>
               <a:endParaRPr kumimoji="0" sz="1800" b="0" i="0" u="none" strike="noStrike" kern="1200" cap="none" spc="0" normalizeH="0" baseline="0" noProof="0">
                 <a:ln>
@@ -3695,7 +3719,10 @@
                 <a:buFontTx/>
                 <a:buNone/>
                 <a:tabLst/>
-                <a:defRPr/>
+                <a:defRPr>
+                  <a:latin typeface="微软雅黑"/>
+                  <a:ea typeface="微软雅黑"/>
+                </a:defRPr>
               </a:pPr>
               <a:r>
                 <a:rPr kumimoji="0" sz="1100" b="1" i="0" u="none" strike="noStrike" kern="1200" cap="none" spc="0" normalizeH="0" baseline="0" noProof="0" dirty="0" err="1">
@@ -3709,7 +3736,7 @@
                   <a:uLnTx/>
                   <a:uFillTx/>
                   <a:latin typeface="微软雅黑"/>
-                  <a:ea typeface="+mn-ea"/>
+                  <a:ea typeface="微软雅黑"/>
                   <a:cs typeface="+mn-cs"/>
                 </a:rPr>
                 <a:t>数据解析</a:t>
@@ -3774,7 +3801,10 @@
                 <a:buFontTx/>
                 <a:buNone/>
                 <a:tabLst/>
-                <a:defRPr/>
+                <a:defRPr>
+                  <a:latin typeface="微软雅黑"/>
+                  <a:ea typeface="微软雅黑"/>
+                </a:defRPr>
               </a:pPr>
               <a:r>
                 <a:rPr kumimoji="0" sz="1200" b="1" i="0" u="none" strike="noStrike" kern="1200" cap="none" spc="0" normalizeH="0" baseline="0" noProof="0">
@@ -3788,7 +3818,7 @@
                   <a:uLnTx/>
                   <a:uFillTx/>
                   <a:latin typeface="微软雅黑"/>
-                  <a:ea typeface="+mn-ea"/>
+                  <a:ea typeface="微软雅黑"/>
                   <a:cs typeface="+mn-cs"/>
                 </a:rPr>
                 <a:t>→</a:t>
@@ -3857,7 +3887,10 @@
                 <a:buFontTx/>
                 <a:buNone/>
                 <a:tabLst/>
-                <a:defRPr/>
+                <a:defRPr>
+                  <a:latin typeface="微软雅黑"/>
+                  <a:ea typeface="微软雅黑"/>
+                </a:defRPr>
               </a:pPr>
               <a:endParaRPr kumimoji="0" sz="1800" b="0" i="0" u="none" strike="noStrike" kern="1200" cap="none" spc="0" normalizeH="0" baseline="0" noProof="0">
                 <a:ln>
@@ -3919,7 +3952,10 @@
                 <a:buFontTx/>
                 <a:buNone/>
                 <a:tabLst/>
-                <a:defRPr/>
+                <a:defRPr>
+                  <a:latin typeface="微软雅黑"/>
+                  <a:ea typeface="微软雅黑"/>
+                </a:defRPr>
               </a:pPr>
               <a:r>
                 <a:rPr kumimoji="0" sz="1100" b="1" i="0" u="none" strike="noStrike" kern="1200" cap="none" spc="0" normalizeH="0" baseline="0" noProof="0" dirty="0" err="1">
@@ -3933,7 +3969,7 @@
                   <a:uLnTx/>
                   <a:uFillTx/>
                   <a:latin typeface="微软雅黑"/>
-                  <a:ea typeface="+mn-ea"/>
+                  <a:ea typeface="微软雅黑"/>
                   <a:cs typeface="+mn-cs"/>
                 </a:rPr>
                 <a:t>银行流水识别</a:t>
@@ -3998,7 +4034,10 @@
                 <a:buFontTx/>
                 <a:buNone/>
                 <a:tabLst/>
-                <a:defRPr/>
+                <a:defRPr>
+                  <a:latin typeface="微软雅黑"/>
+                  <a:ea typeface="微软雅黑"/>
+                </a:defRPr>
               </a:pPr>
               <a:r>
                 <a:rPr kumimoji="0" sz="1200" b="1" i="0" u="none" strike="noStrike" kern="1200" cap="none" spc="0" normalizeH="0" baseline="0" noProof="0">
@@ -4012,7 +4051,7 @@
                   <a:uLnTx/>
                   <a:uFillTx/>
                   <a:latin typeface="微软雅黑"/>
-                  <a:ea typeface="+mn-ea"/>
+                  <a:ea typeface="微软雅黑"/>
                   <a:cs typeface="+mn-cs"/>
                 </a:rPr>
                 <a:t>→</a:t>
@@ -4081,7 +4120,10 @@
                 <a:buFontTx/>
                 <a:buNone/>
                 <a:tabLst/>
-                <a:defRPr/>
+                <a:defRPr>
+                  <a:latin typeface="微软雅黑"/>
+                  <a:ea typeface="微软雅黑"/>
+                </a:defRPr>
               </a:pPr>
               <a:endParaRPr kumimoji="0" sz="1800" b="0" i="0" u="none" strike="noStrike" kern="1200" cap="none" spc="0" normalizeH="0" baseline="0" noProof="0">
                 <a:ln>
@@ -4143,7 +4185,10 @@
                 <a:buFontTx/>
                 <a:buNone/>
                 <a:tabLst/>
-                <a:defRPr/>
+                <a:defRPr>
+                  <a:latin typeface="微软雅黑"/>
+                  <a:ea typeface="微软雅黑"/>
+                </a:defRPr>
               </a:pPr>
               <a:r>
                 <a:rPr kumimoji="0" sz="1100" b="1" i="0" u="none" strike="noStrike" kern="1200" cap="none" spc="0" normalizeH="0" baseline="0" noProof="0" dirty="0">
@@ -4157,7 +4202,7 @@
                   <a:uLnTx/>
                   <a:uFillTx/>
                   <a:latin typeface="微软雅黑"/>
-                  <a:ea typeface="+mn-ea"/>
+                  <a:ea typeface="微软雅黑"/>
                   <a:cs typeface="+mn-cs"/>
                 </a:rPr>
                 <a:t>Serviceability</a:t>
@@ -4208,7 +4253,10 @@
                 <a:buFontTx/>
                 <a:buNone/>
                 <a:tabLst/>
-                <a:defRPr/>
+                <a:defRPr>
+                  <a:latin typeface="微软雅黑"/>
+                  <a:ea typeface="微软雅黑"/>
+                </a:defRPr>
               </a:pPr>
               <a:r>
                 <a:rPr kumimoji="0" sz="1200" b="1" i="0" u="none" strike="noStrike" kern="1200" cap="none" spc="0" normalizeH="0" baseline="0" noProof="0">
@@ -4222,7 +4270,7 @@
                   <a:uLnTx/>
                   <a:uFillTx/>
                   <a:latin typeface="微软雅黑"/>
-                  <a:ea typeface="+mn-ea"/>
+                  <a:ea typeface="微软雅黑"/>
                   <a:cs typeface="+mn-cs"/>
                 </a:rPr>
                 <a:t>→</a:t>
@@ -4291,7 +4339,10 @@
                 <a:buFontTx/>
                 <a:buNone/>
                 <a:tabLst/>
-                <a:defRPr/>
+                <a:defRPr>
+                  <a:latin typeface="微软雅黑"/>
+                  <a:ea typeface="微软雅黑"/>
+                </a:defRPr>
               </a:pPr>
               <a:endParaRPr kumimoji="0" sz="1800" b="0" i="0" u="none" strike="noStrike" kern="1200" cap="none" spc="0" normalizeH="0" baseline="0" noProof="0">
                 <a:ln>
@@ -4353,7 +4404,10 @@
                 <a:buFontTx/>
                 <a:buNone/>
                 <a:tabLst/>
-                <a:defRPr/>
+                <a:defRPr>
+                  <a:latin typeface="微软雅黑"/>
+                  <a:ea typeface="微软雅黑"/>
+                </a:defRPr>
               </a:pPr>
               <a:r>
                 <a:rPr kumimoji="0" sz="1100" b="1" i="0" u="none" strike="noStrike" kern="1200" cap="none" spc="0" normalizeH="0" baseline="0" noProof="0">
@@ -4367,7 +4421,7 @@
                   <a:uLnTx/>
                   <a:uFillTx/>
                   <a:latin typeface="微软雅黑"/>
-                  <a:ea typeface="+mn-ea"/>
+                  <a:ea typeface="微软雅黑"/>
                   <a:cs typeface="+mn-cs"/>
                 </a:rPr>
                 <a:t>信审决策</a:t>
@@ -4419,7 +4473,10 @@
               <a:buFontTx/>
               <a:buNone/>
               <a:tabLst/>
-              <a:defRPr/>
+              <a:defRPr>
+                <a:latin typeface="微软雅黑"/>
+                <a:ea typeface="微软雅黑"/>
+              </a:defRPr>
             </a:pPr>
             <a:r>
               <a:rPr kumimoji="0" sz="850" b="0" i="0" u="none" strike="noStrike" kern="1200" cap="none" spc="0" normalizeH="0" baseline="0" noProof="0" dirty="0" err="1">
@@ -4433,7 +4490,7 @@
                 <a:uLnTx/>
                 <a:uFillTx/>
                 <a:latin typeface="微软雅黑"/>
-                <a:ea typeface="+mn-ea"/>
+                <a:ea typeface="微软雅黑"/>
                 <a:cs typeface="+mn-cs"/>
               </a:rPr>
               <a:t>依据《National</a:t>
@@ -4450,7 +4507,7 @@
                 <a:uLnTx/>
                 <a:uFillTx/>
                 <a:latin typeface="微软雅黑"/>
-                <a:ea typeface="+mn-ea"/>
+                <a:ea typeface="微软雅黑"/>
                 <a:cs typeface="+mn-cs"/>
               </a:rPr>
               <a:t> Consumer Credit Protection Act 2009》及 ASIC </a:t>
@@ -4467,7 +4524,7 @@
                 <a:uLnTx/>
                 <a:uFillTx/>
                 <a:latin typeface="微软雅黑"/>
-                <a:ea typeface="+mn-ea"/>
+                <a:ea typeface="微软雅黑"/>
                 <a:cs typeface="+mn-cs"/>
               </a:rPr>
               <a:t>监管要求</a:t>
@@ -4550,7 +4607,10 @@
               <a:buFontTx/>
               <a:buNone/>
               <a:tabLst/>
-              <a:defRPr/>
+              <a:defRPr>
+                <a:latin typeface="微软雅黑"/>
+                <a:ea typeface="微软雅黑"/>
+              </a:defRPr>
             </a:pPr>
             <a:endParaRPr kumimoji="0" sz="1800" b="0" i="0" u="none" strike="noStrike" kern="1200" cap="none" spc="0" normalizeH="0" baseline="0" noProof="0">
               <a:ln>
@@ -4630,7 +4690,10 @@
               <a:buFontTx/>
               <a:buNone/>
               <a:tabLst/>
-              <a:defRPr/>
+              <a:defRPr>
+                <a:latin typeface="微软雅黑"/>
+                <a:ea typeface="微软雅黑"/>
+              </a:defRPr>
             </a:pPr>
             <a:endParaRPr kumimoji="0" sz="1800" b="0" i="0" u="none" strike="noStrike" kern="1200" cap="none" spc="0" normalizeH="0" baseline="0" noProof="0">
               <a:ln>
@@ -4692,7 +4755,10 @@
               <a:buFontTx/>
               <a:buNone/>
               <a:tabLst/>
-              <a:defRPr/>
+              <a:defRPr>
+                <a:latin typeface="微软雅黑"/>
+                <a:ea typeface="微软雅黑"/>
+              </a:defRPr>
             </a:pPr>
             <a:r>
               <a:rPr kumimoji="0" sz="1000" b="1" i="0" u="none" strike="noStrike" kern="1200" cap="none" spc="0" normalizeH="0" baseline="0" noProof="0" dirty="0">
@@ -4706,7 +4772,7 @@
                 <a:uLnTx/>
                 <a:uFillTx/>
                 <a:latin typeface="微软雅黑"/>
-                <a:ea typeface="+mn-ea"/>
+                <a:ea typeface="微软雅黑"/>
                 <a:cs typeface="+mn-cs"/>
               </a:rPr>
               <a:t>1</a:t>
@@ -4757,7 +4823,10 @@
               <a:buFontTx/>
               <a:buNone/>
               <a:tabLst/>
-              <a:defRPr/>
+              <a:defRPr>
+                <a:latin typeface="微软雅黑"/>
+                <a:ea typeface="微软雅黑"/>
+              </a:defRPr>
             </a:pPr>
             <a:r>
               <a:rPr kumimoji="0" sz="1050" b="1" i="0" u="none" strike="noStrike" kern="1200" cap="none" spc="0" normalizeH="0" baseline="0" noProof="0">
@@ -4771,7 +4840,7 @@
                 <a:uLnTx/>
                 <a:uFillTx/>
                 <a:latin typeface="微软雅黑"/>
-                <a:ea typeface="+mn-ea"/>
+                <a:ea typeface="微软雅黑"/>
                 <a:cs typeface="+mn-cs"/>
               </a:rPr>
               <a:t>合理了解客户</a:t>
@@ -4822,7 +4891,10 @@
               <a:buFontTx/>
               <a:buNone/>
               <a:tabLst/>
-              <a:defRPr/>
+              <a:defRPr>
+                <a:latin typeface="微软雅黑"/>
+                <a:ea typeface="微软雅黑"/>
+              </a:defRPr>
             </a:pPr>
             <a:r>
               <a:rPr kumimoji="0" sz="900" b="0" i="0" u="none" strike="noStrike" kern="1200" cap="none" spc="0" normalizeH="0" baseline="0" noProof="0">
@@ -4836,7 +4908,7 @@
                 <a:uLnTx/>
                 <a:uFillTx/>
                 <a:latin typeface="微软雅黑"/>
-                <a:ea typeface="+mn-ea"/>
+                <a:ea typeface="微软雅黑"/>
                 <a:cs typeface="+mn-cs"/>
               </a:rPr>
               <a:t>财务状况及借款目的</a:t>
@@ -4905,7 +4977,10 @@
               <a:buFontTx/>
               <a:buNone/>
               <a:tabLst/>
-              <a:defRPr/>
+              <a:defRPr>
+                <a:latin typeface="微软雅黑"/>
+                <a:ea typeface="微软雅黑"/>
+              </a:defRPr>
             </a:pPr>
             <a:endParaRPr kumimoji="0" sz="1800" b="0" i="0" u="none" strike="noStrike" kern="1200" cap="none" spc="0" normalizeH="0" baseline="0" noProof="0">
               <a:ln>
@@ -4985,7 +5060,10 @@
               <a:buFontTx/>
               <a:buNone/>
               <a:tabLst/>
-              <a:defRPr/>
+              <a:defRPr>
+                <a:latin typeface="微软雅黑"/>
+                <a:ea typeface="微软雅黑"/>
+              </a:defRPr>
             </a:pPr>
             <a:endParaRPr kumimoji="0" sz="1800" b="0" i="0" u="none" strike="noStrike" kern="1200" cap="none" spc="0" normalizeH="0" baseline="0" noProof="0">
               <a:ln>
@@ -5047,7 +5125,10 @@
               <a:buFontTx/>
               <a:buNone/>
               <a:tabLst/>
-              <a:defRPr/>
+              <a:defRPr>
+                <a:latin typeface="微软雅黑"/>
+                <a:ea typeface="微软雅黑"/>
+              </a:defRPr>
             </a:pPr>
             <a:r>
               <a:rPr kumimoji="0" sz="1000" b="1" i="0" u="none" strike="noStrike" kern="1200" cap="none" spc="0" normalizeH="0" baseline="0" noProof="0" dirty="0">
@@ -5061,7 +5142,7 @@
                 <a:uLnTx/>
                 <a:uFillTx/>
                 <a:latin typeface="微软雅黑"/>
-                <a:ea typeface="+mn-ea"/>
+                <a:ea typeface="微软雅黑"/>
                 <a:cs typeface="+mn-cs"/>
               </a:rPr>
               <a:t>2</a:t>
@@ -5112,7 +5193,10 @@
               <a:buFontTx/>
               <a:buNone/>
               <a:tabLst/>
-              <a:defRPr/>
+              <a:defRPr>
+                <a:latin typeface="微软雅黑"/>
+                <a:ea typeface="微软雅黑"/>
+              </a:defRPr>
             </a:pPr>
             <a:r>
               <a:rPr kumimoji="0" sz="1050" b="1" i="0" u="none" strike="noStrike" kern="1200" cap="none" spc="0" normalizeH="0" baseline="0" noProof="0">
@@ -5126,7 +5210,7 @@
                 <a:uLnTx/>
                 <a:uFillTx/>
                 <a:latin typeface="微软雅黑"/>
-                <a:ea typeface="+mn-ea"/>
+                <a:ea typeface="微软雅黑"/>
                 <a:cs typeface="+mn-cs"/>
               </a:rPr>
               <a:t>核实收入与支出</a:t>
@@ -5177,7 +5261,10 @@
               <a:buFontTx/>
               <a:buNone/>
               <a:tabLst/>
-              <a:defRPr/>
+              <a:defRPr>
+                <a:latin typeface="微软雅黑"/>
+                <a:ea typeface="微软雅黑"/>
+              </a:defRPr>
             </a:pPr>
             <a:r>
               <a:rPr kumimoji="0" sz="900" b="0" i="0" u="none" strike="noStrike" kern="1200" cap="none" spc="0" normalizeH="0" baseline="0" noProof="0">
@@ -5191,7 +5278,7 @@
                 <a:uLnTx/>
                 <a:uFillTx/>
                 <a:latin typeface="微软雅黑"/>
-                <a:ea typeface="+mn-ea"/>
+                <a:ea typeface="微软雅黑"/>
                 <a:cs typeface="+mn-cs"/>
               </a:rPr>
               <a:t>必要支出、现有负债及可预见变化</a:t>
@@ -5260,7 +5347,10 @@
               <a:buFontTx/>
               <a:buNone/>
               <a:tabLst/>
-              <a:defRPr/>
+              <a:defRPr>
+                <a:latin typeface="微软雅黑"/>
+                <a:ea typeface="微软雅黑"/>
+              </a:defRPr>
             </a:pPr>
             <a:endParaRPr kumimoji="0" sz="1800" b="0" i="0" u="none" strike="noStrike" kern="1200" cap="none" spc="0" normalizeH="0" baseline="0" noProof="0">
               <a:ln>
@@ -5340,7 +5430,10 @@
               <a:buFontTx/>
               <a:buNone/>
               <a:tabLst/>
-              <a:defRPr/>
+              <a:defRPr>
+                <a:latin typeface="微软雅黑"/>
+                <a:ea typeface="微软雅黑"/>
+              </a:defRPr>
             </a:pPr>
             <a:endParaRPr kumimoji="0" sz="1800" b="0" i="0" u="none" strike="noStrike" kern="1200" cap="none" spc="0" normalizeH="0" baseline="0" noProof="0">
               <a:ln>
@@ -5402,7 +5495,10 @@
               <a:buFontTx/>
               <a:buNone/>
               <a:tabLst/>
-              <a:defRPr/>
+              <a:defRPr>
+                <a:latin typeface="微软雅黑"/>
+                <a:ea typeface="微软雅黑"/>
+              </a:defRPr>
             </a:pPr>
             <a:r>
               <a:rPr kumimoji="0" sz="1000" b="1" i="0" u="none" strike="noStrike" kern="1200" cap="none" spc="0" normalizeH="0" baseline="0" noProof="0" dirty="0">
@@ -5416,7 +5512,7 @@
                 <a:uLnTx/>
                 <a:uFillTx/>
                 <a:latin typeface="微软雅黑"/>
-                <a:ea typeface="+mn-ea"/>
+                <a:ea typeface="微软雅黑"/>
                 <a:cs typeface="+mn-cs"/>
               </a:rPr>
               <a:t>3</a:t>
@@ -5467,7 +5563,10 @@
               <a:buFontTx/>
               <a:buNone/>
               <a:tabLst/>
-              <a:defRPr/>
+              <a:defRPr>
+                <a:latin typeface="微软雅黑"/>
+                <a:ea typeface="微软雅黑"/>
+              </a:defRPr>
             </a:pPr>
             <a:r>
               <a:rPr kumimoji="0" sz="1050" b="1" i="0" u="none" strike="noStrike" kern="1200" cap="none" spc="0" normalizeH="0" baseline="0" noProof="0">
@@ -5481,7 +5580,7 @@
                 <a:uLnTx/>
                 <a:uFillTx/>
                 <a:latin typeface="微软雅黑"/>
-                <a:ea typeface="+mn-ea"/>
+                <a:ea typeface="微软雅黑"/>
                 <a:cs typeface="+mn-cs"/>
               </a:rPr>
               <a:t>评估还款能力</a:t>
@@ -5532,7 +5631,10 @@
               <a:buFontTx/>
               <a:buNone/>
               <a:tabLst/>
-              <a:defRPr/>
+              <a:defRPr>
+                <a:latin typeface="微软雅黑"/>
+                <a:ea typeface="微软雅黑"/>
+              </a:defRPr>
             </a:pPr>
             <a:r>
               <a:rPr kumimoji="0" sz="900" b="0" i="0" u="none" strike="noStrike" kern="1200" cap="none" spc="0" normalizeH="0" baseline="0" noProof="0">
@@ -5546,7 +5648,7 @@
                 <a:uLnTx/>
                 <a:uFillTx/>
                 <a:latin typeface="微软雅黑"/>
-                <a:ea typeface="+mn-ea"/>
+                <a:ea typeface="微软雅黑"/>
                 <a:cs typeface="+mn-cs"/>
               </a:rPr>
               <a:t>能否在不造成重大经济困难的情况下履行还款</a:t>
@@ -5615,7 +5717,10 @@
               <a:buFontTx/>
               <a:buNone/>
               <a:tabLst/>
-              <a:defRPr/>
+              <a:defRPr>
+                <a:latin typeface="微软雅黑"/>
+                <a:ea typeface="微软雅黑"/>
+              </a:defRPr>
             </a:pPr>
             <a:endParaRPr kumimoji="0" sz="1800" b="0" i="0" u="none" strike="noStrike" kern="1200" cap="none" spc="0" normalizeH="0" baseline="0" noProof="0">
               <a:ln>
@@ -5695,7 +5800,10 @@
               <a:buFontTx/>
               <a:buNone/>
               <a:tabLst/>
-              <a:defRPr/>
+              <a:defRPr>
+                <a:latin typeface="微软雅黑"/>
+                <a:ea typeface="微软雅黑"/>
+              </a:defRPr>
             </a:pPr>
             <a:endParaRPr kumimoji="0" sz="1800" b="0" i="0" u="none" strike="noStrike" kern="1200" cap="none" spc="0" normalizeH="0" baseline="0" noProof="0">
               <a:ln>
@@ -5757,7 +5865,10 @@
               <a:buFontTx/>
               <a:buNone/>
               <a:tabLst/>
-              <a:defRPr/>
+              <a:defRPr>
+                <a:latin typeface="微软雅黑"/>
+                <a:ea typeface="微软雅黑"/>
+              </a:defRPr>
             </a:pPr>
             <a:r>
               <a:rPr kumimoji="0" sz="1000" b="1" i="0" u="none" strike="noStrike" kern="1200" cap="none" spc="0" normalizeH="0" baseline="0" noProof="0" dirty="0">
@@ -5771,7 +5882,7 @@
                 <a:uLnTx/>
                 <a:uFillTx/>
                 <a:latin typeface="微软雅黑"/>
-                <a:ea typeface="+mn-ea"/>
+                <a:ea typeface="微软雅黑"/>
                 <a:cs typeface="+mn-cs"/>
               </a:rPr>
               <a:t>4</a:t>
@@ -5822,7 +5933,10 @@
               <a:buFontTx/>
               <a:buNone/>
               <a:tabLst/>
-              <a:defRPr/>
+              <a:defRPr>
+                <a:latin typeface="微软雅黑"/>
+                <a:ea typeface="微软雅黑"/>
+              </a:defRPr>
             </a:pPr>
             <a:r>
               <a:rPr kumimoji="0" sz="1050" b="1" i="0" u="none" strike="noStrike" kern="1200" cap="none" spc="0" normalizeH="0" baseline="0" noProof="0">
@@ -5836,7 +5950,7 @@
                 <a:uLnTx/>
                 <a:uFillTx/>
                 <a:latin typeface="微软雅黑"/>
-                <a:ea typeface="+mn-ea"/>
+                <a:ea typeface="微软雅黑"/>
                 <a:cs typeface="+mn-cs"/>
               </a:rPr>
               <a:t>提供合适产品</a:t>
@@ -5887,7 +6001,10 @@
               <a:buFontTx/>
               <a:buNone/>
               <a:tabLst/>
-              <a:defRPr/>
+              <a:defRPr>
+                <a:latin typeface="微软雅黑"/>
+                <a:ea typeface="微软雅黑"/>
+              </a:defRPr>
             </a:pPr>
             <a:r>
               <a:rPr kumimoji="0" sz="900" b="0" i="0" u="none" strike="noStrike" kern="1200" cap="none" spc="0" normalizeH="0" baseline="0" noProof="0">
@@ -5901,7 +6018,7 @@
                 <a:uLnTx/>
                 <a:uFillTx/>
                 <a:latin typeface="微软雅黑"/>
-                <a:ea typeface="+mn-ea"/>
+                <a:ea typeface="微软雅黑"/>
                 <a:cs typeface="+mn-cs"/>
               </a:rPr>
               <a:t>不得提供“不适合”的信贷产品</a:t>
@@ -6008,7 +6125,10 @@
               <a:buFontTx/>
               <a:buNone/>
               <a:tabLst/>
-              <a:defRPr/>
+              <a:defRPr>
+                <a:latin typeface="微软雅黑"/>
+                <a:ea typeface="微软雅黑"/>
+              </a:defRPr>
             </a:pPr>
             <a:r>
               <a:rPr kumimoji="0" sz="1500" b="1" i="0" u="none" strike="noStrike" kern="1200" cap="none" spc="0" normalizeH="0" baseline="0" noProof="0" dirty="0" err="1">
@@ -6019,7 +6139,7 @@
                 <a:uLnTx/>
                 <a:uFillTx/>
                 <a:latin typeface="微软雅黑"/>
-                <a:ea typeface="+mn-ea"/>
+                <a:ea typeface="微软雅黑"/>
                 <a:cs typeface="+mn-cs"/>
               </a:rPr>
               <a:t>收入</a:t>
@@ -6033,7 +6153,7 @@
                 <a:uLnTx/>
                 <a:uFillTx/>
                 <a:latin typeface="微软雅黑"/>
-                <a:ea typeface="+mn-ea"/>
+                <a:ea typeface="微软雅黑"/>
                 <a:cs typeface="+mn-cs"/>
               </a:rPr>
               <a:t> − </a:t>
@@ -6047,7 +6167,7 @@
                 <a:uLnTx/>
                 <a:uFillTx/>
                 <a:latin typeface="微软雅黑"/>
-                <a:ea typeface="+mn-ea"/>
+                <a:ea typeface="微软雅黑"/>
                 <a:cs typeface="+mn-cs"/>
               </a:rPr>
               <a:t>必要支出</a:t>
@@ -6061,7 +6181,7 @@
                 <a:uLnTx/>
                 <a:uFillTx/>
                 <a:latin typeface="微软雅黑"/>
-                <a:ea typeface="+mn-ea"/>
+                <a:ea typeface="微软雅黑"/>
                 <a:cs typeface="+mn-cs"/>
               </a:rPr>
               <a:t> − </a:t>
@@ -6075,7 +6195,7 @@
                 <a:uLnTx/>
                 <a:uFillTx/>
                 <a:latin typeface="微软雅黑"/>
-                <a:ea typeface="+mn-ea"/>
+                <a:ea typeface="微软雅黑"/>
                 <a:cs typeface="+mn-cs"/>
               </a:rPr>
               <a:t>负债还款</a:t>
@@ -6089,7 +6209,7 @@
                 <a:uLnTx/>
                 <a:uFillTx/>
                 <a:latin typeface="微软雅黑"/>
-                <a:ea typeface="+mn-ea"/>
+                <a:ea typeface="微软雅黑"/>
                 <a:cs typeface="+mn-cs"/>
               </a:rPr>
               <a:t> ＝ </a:t>
@@ -6103,7 +6223,7 @@
                 <a:uLnTx/>
                 <a:uFillTx/>
                 <a:latin typeface="微软雅黑"/>
-                <a:ea typeface="+mn-ea"/>
+                <a:ea typeface="微软雅黑"/>
                 <a:cs typeface="+mn-cs"/>
               </a:rPr>
               <a:t>客户可支配盈余</a:t>
@@ -6196,14 +6316,18 @@
               <a:buFontTx/>
               <a:buNone/>
               <a:tabLst/>
-              <a:defRPr/>
+              <a:defRPr>
+                <a:latin typeface="微软雅黑"/>
+                <a:ea typeface="微软雅黑"/>
+              </a:defRPr>
             </a:pPr>
             <a:r>
               <a:rPr lang="zh-CN" altLang="en-US" sz="2000" b="1" noProof="1">
                 <a:solidFill>
                   <a:srgbClr val="0A0A0A"/>
                 </a:solidFill>
-                <a:ea typeface="微软雅黑" panose="020B0503020204020204" pitchFamily="34" charset="-122"/>
+                <a:latin typeface="微软雅黑"/>
+                <a:ea typeface="微软雅黑"/>
               </a:rPr>
               <a:t>从一笔交易到完整客户财务画像直接回答新增还款能力</a:t>
             </a:r>
@@ -6253,18 +6377,30 @@
               <a:buFontTx/>
               <a:buNone/>
               <a:tabLst/>
-              <a:defRPr/>
+              <a:defRPr>
+                <a:latin typeface="微软雅黑"/>
+                <a:ea typeface="微软雅黑"/>
+              </a:defRPr>
             </a:pPr>
             <a:r>
-              <a:rPr lang="zh-CN" altLang="en-US" dirty="0"/>
+              <a:rPr lang="zh-CN" altLang="en-US" dirty="0">
+                <a:latin typeface="微软雅黑"/>
+                <a:ea typeface="微软雅黑"/>
+              </a:rPr>
               <a:t>原始流水 → 单笔交易识别 → 用户</a:t>
             </a:r>
             <a:r>
-              <a:rPr lang="en-US" altLang="zh-CN" dirty="0"/>
+              <a:rPr lang="en-US" altLang="zh-CN" dirty="0">
+                <a:latin typeface="微软雅黑"/>
+                <a:ea typeface="微软雅黑"/>
+              </a:rPr>
               <a:t>/</a:t>
             </a:r>
             <a:r>
-              <a:rPr lang="zh-CN" altLang="en-US" dirty="0"/>
+              <a:rPr lang="zh-CN" altLang="en-US" dirty="0">
+                <a:latin typeface="微软雅黑"/>
+                <a:ea typeface="微软雅黑"/>
+              </a:rPr>
               <a:t>贷款汇总</a:t>
             </a:r>
             <a:endParaRPr kumimoji="0" lang="en-US" altLang="zh-CN" sz="1800" b="0" i="0" u="none" strike="noStrike" kern="1200" cap="none" spc="0" normalizeH="0" baseline="0" noProof="1">
@@ -6328,7 +6464,10 @@
               <a:buFontTx/>
               <a:buNone/>
               <a:tabLst/>
-              <a:defRPr/>
+              <a:defRPr>
+                <a:latin typeface="微软雅黑"/>
+                <a:ea typeface="微软雅黑"/>
+              </a:defRPr>
             </a:pPr>
             <a:r>
               <a:rPr kumimoji="0" lang="en-US" altLang="zh-CN" sz="1200" b="1" i="0" u="none" strike="noStrike" kern="1200" cap="none" spc="0" normalizeH="0" baseline="0" noProof="0" dirty="0">
@@ -6425,7 +6564,10 @@
               <a:buFontTx/>
               <a:buNone/>
               <a:tabLst/>
-              <a:defRPr/>
+              <a:defRPr>
+                <a:latin typeface="微软雅黑"/>
+                <a:ea typeface="微软雅黑"/>
+              </a:defRPr>
             </a:pPr>
             <a:r>
               <a:rPr kumimoji="0" lang="en-US" altLang="zh-CN" sz="1200" b="1" i="0" u="none" strike="noStrike" kern="1200" cap="none" spc="0" normalizeH="0" baseline="0" noProof="0">
@@ -6522,7 +6664,10 @@
               <a:buFontTx/>
               <a:buNone/>
               <a:tabLst/>
-              <a:defRPr/>
+              <a:defRPr>
+                <a:latin typeface="微软雅黑"/>
+                <a:ea typeface="微软雅黑"/>
+              </a:defRPr>
             </a:pPr>
             <a:r>
               <a:rPr kumimoji="0" lang="en-US" altLang="zh-CN" sz="1200" b="1" i="0" u="none" strike="noStrike" kern="1200" cap="none" spc="0" normalizeH="0" baseline="0" noProof="0" dirty="0">
@@ -11610,14 +11755,18 @@
               <a:buFontTx/>
               <a:buNone/>
               <a:tabLst/>
-              <a:defRPr/>
+              <a:defRPr>
+                <a:latin typeface="微软雅黑"/>
+                <a:ea typeface="微软雅黑"/>
+              </a:defRPr>
             </a:pPr>
             <a:r>
               <a:rPr lang="zh-CN" altLang="en-US" sz="2000" b="1" noProof="1">
                 <a:solidFill>
                   <a:srgbClr val="0A0A0A"/>
                 </a:solidFill>
-                <a:ea typeface="微软雅黑" panose="020B0503020204020204" pitchFamily="34" charset="-122"/>
+                <a:latin typeface="微软雅黑"/>
+                <a:ea typeface="微软雅黑"/>
               </a:rPr>
               <a:t>从一笔交易到完整客户财务画像直接回答新增还款能力</a:t>
             </a:r>
@@ -11667,18 +11816,30 @@
               <a:buFontTx/>
               <a:buNone/>
               <a:tabLst/>
-              <a:defRPr/>
+              <a:defRPr>
+                <a:latin typeface="微软雅黑"/>
+                <a:ea typeface="微软雅黑"/>
+              </a:defRPr>
             </a:pPr>
             <a:r>
-              <a:rPr lang="zh-CN" altLang="en-US" dirty="0"/>
+              <a:rPr lang="zh-CN" altLang="en-US" dirty="0">
+                <a:latin typeface="微软雅黑"/>
+                <a:ea typeface="微软雅黑"/>
+              </a:rPr>
               <a:t>原始流水 → 单笔交易识别 → 用户</a:t>
             </a:r>
             <a:r>
-              <a:rPr lang="en-US" altLang="zh-CN" dirty="0"/>
+              <a:rPr lang="en-US" altLang="zh-CN" dirty="0">
+                <a:latin typeface="微软雅黑"/>
+                <a:ea typeface="微软雅黑"/>
+              </a:rPr>
               <a:t>/</a:t>
             </a:r>
             <a:r>
-              <a:rPr lang="zh-CN" altLang="en-US" dirty="0"/>
+              <a:rPr lang="zh-CN" altLang="en-US" dirty="0">
+                <a:latin typeface="微软雅黑"/>
+                <a:ea typeface="微软雅黑"/>
+              </a:rPr>
               <a:t>贷款汇总</a:t>
             </a:r>
             <a:endParaRPr kumimoji="0" lang="en-US" altLang="zh-CN" sz="1800" b="0" i="0" u="none" strike="noStrike" kern="1200" cap="none" spc="0" normalizeH="0" baseline="0" noProof="1">
@@ -11742,7 +11903,10 @@
               <a:buFontTx/>
               <a:buNone/>
               <a:tabLst/>
-              <a:defRPr/>
+              <a:defRPr>
+                <a:latin typeface="微软雅黑"/>
+                <a:ea typeface="微软雅黑"/>
+              </a:defRPr>
             </a:pPr>
             <a:r>
               <a:rPr kumimoji="0" lang="en-US" altLang="zh-CN" sz="1200" b="1" i="0" u="none" strike="noStrike" kern="1200" cap="none" spc="0" normalizeH="0" baseline="0" noProof="0" dirty="0">
@@ -11839,7 +12003,10 @@
               <a:buFontTx/>
               <a:buNone/>
               <a:tabLst/>
-              <a:defRPr/>
+              <a:defRPr>
+                <a:latin typeface="微软雅黑"/>
+                <a:ea typeface="微软雅黑"/>
+              </a:defRPr>
             </a:pPr>
             <a:r>
               <a:rPr kumimoji="0" lang="en-US" altLang="zh-CN" sz="1200" b="1" i="0" u="none" strike="noStrike" kern="1200" cap="none" spc="0" normalizeH="0" baseline="0" noProof="0">
@@ -11936,7 +12103,10 @@
               <a:buFontTx/>
               <a:buNone/>
               <a:tabLst/>
-              <a:defRPr/>
+              <a:defRPr>
+                <a:latin typeface="微软雅黑"/>
+                <a:ea typeface="微软雅黑"/>
+              </a:defRPr>
             </a:pPr>
             <a:r>
               <a:rPr kumimoji="0" lang="en-US" altLang="zh-CN" sz="1200" b="1" i="0" u="none" strike="noStrike" kern="1200" cap="none" spc="0" normalizeH="0" baseline="0" noProof="0" dirty="0">
@@ -17607,7 +17777,10 @@
               <a:buFontTx/>
               <a:buNone/>
               <a:tabLst/>
-              <a:defRPr/>
+              <a:defRPr>
+                <a:latin typeface="微软雅黑"/>
+                <a:ea typeface="微软雅黑"/>
+              </a:defRPr>
             </a:pPr>
             <a:r>
               <a:rPr kumimoji="0" lang="zh-CN" altLang="en-US" sz="1300" b="1" i="0" u="none" strike="noStrike" kern="1200" cap="none" spc="0" normalizeH="0" baseline="0" noProof="0">
@@ -17621,7 +17794,7 @@
                 <a:uLnTx/>
                 <a:uFillTx/>
                 <a:latin typeface="微软雅黑"/>
-                <a:ea typeface="等线" panose="02010600030101010101" pitchFamily="2" charset="-122"/>
+                <a:ea typeface="微软雅黑"/>
                 <a:cs typeface="+mn-cs"/>
               </a:rPr>
               <a:t>用户维度</a:t>
@@ -17705,7 +17878,10 @@
               <a:buFontTx/>
               <a:buNone/>
               <a:tabLst/>
-              <a:defRPr/>
+              <a:defRPr>
+                <a:latin typeface="微软雅黑"/>
+                <a:ea typeface="微软雅黑"/>
+              </a:defRPr>
             </a:pPr>
             <a:r>
               <a:rPr kumimoji="0" lang="zh-CN" altLang="en-US" sz="1300" b="1" i="0" u="none" strike="noStrike" kern="1200" cap="none" spc="0" normalizeH="0" baseline="0" noProof="0">
@@ -17719,7 +17895,7 @@
                 <a:uLnTx/>
                 <a:uFillTx/>
                 <a:latin typeface="微软雅黑"/>
-                <a:ea typeface="等线" panose="02010600030101010101" pitchFamily="2" charset="-122"/>
+                <a:ea typeface="微软雅黑"/>
                 <a:cs typeface="+mn-cs"/>
               </a:rPr>
               <a:t>单笔借款维度</a:t>
@@ -22537,6 +22713,8 @@
                 <a:solidFill>
                   <a:srgbClr val="0A0A0A"/>
                 </a:solidFill>
+                <a:latin typeface="微软雅黑"/>
+                <a:ea typeface="微软雅黑"/>
               </a:rPr>
               <a:t>知识库随注册商户的新增、变更、失效持续更新，并从真实交易中补齐注册数据未覆盖的支付描述和商户别名。由此形成“分类 → 监控 → 定位 → 输出 → 更新 → 再分类”的持续优化闭环。</a:t>
             </a:r>
@@ -22589,6 +22767,7 @@
                 <a:solidFill>
                   <a:srgbClr val="1F4E79"/>
                 </a:solidFill>
+                <a:latin typeface="微软雅黑"/>
                 <a:ea typeface="微软雅黑"/>
               </a:rPr>
               <a:t>① 监控</a:t>
@@ -22601,6 +22780,7 @@
                 <a:solidFill>
                   <a:srgbClr val="3D3C3A"/>
                 </a:solidFill>
+                <a:latin typeface="微软雅黑"/>
                 <a:ea typeface="微软雅黑"/>
               </a:rPr>
               <a:t>捕捉分类批量漂移、同一交易对手归类不一致、覆盖率或命中率明显下降、新描述未被任何引擎识别等异常信号。</a:t>
@@ -22699,6 +22879,7 @@
                 <a:solidFill>
                   <a:srgbClr val="1F4E79"/>
                 </a:solidFill>
+                <a:latin typeface="微软雅黑"/>
                 <a:ea typeface="微软雅黑"/>
               </a:rPr>
               <a:t>② 定位</a:t>
@@ -22711,6 +22892,7 @@
                 <a:solidFill>
                   <a:srgbClr val="3D3C3A"/>
                 </a:solidFill>
+                <a:latin typeface="微软雅黑"/>
                 <a:ea typeface="微软雅黑"/>
               </a:rPr>
               <a:t>对异常逐笔细挖交易描述、金额、方向、交易对手、命中引擎和分类依据，归类为五类原因。</a:t>
@@ -22809,6 +22991,7 @@
                 <a:solidFill>
                   <a:srgbClr val="1F4E79"/>
                 </a:solidFill>
+                <a:latin typeface="微软雅黑"/>
                 <a:ea typeface="微软雅黑"/>
               </a:rPr>
               <a:t>③ 输出</a:t>
@@ -22821,6 +23004,7 @@
                 <a:solidFill>
                   <a:srgbClr val="3D3C3A"/>
                 </a:solidFill>
+                <a:latin typeface="微软雅黑"/>
                 <a:ea typeface="微软雅黑"/>
               </a:rPr>
               <a:t>生成按优先级排序的诊断报告，直接标明问题引擎、需检查的规则、缺失的商户／关键词及应补充的知识库，供业务确认。</a:t>
@@ -22942,7 +23126,10 @@
               <a:buFontTx/>
               <a:buNone/>
               <a:tabLst/>
-              <a:defRPr/>
+              <a:defRPr>
+                <a:latin typeface="微软雅黑"/>
+                <a:ea typeface="微软雅黑"/>
+              </a:defRPr>
             </a:pPr>
             <a:r>
               <a:rPr kumimoji="0" lang="en-US" altLang="zh-CN" sz="2000" b="1" i="0" u="none" strike="noStrike" kern="1200" cap="none" spc="0" normalizeH="0" baseline="0" noProof="1">
@@ -26351,7 +26538,10 @@
               <a:buFontTx/>
               <a:buNone/>
               <a:tabLst/>
-              <a:defRPr/>
+              <a:defRPr>
+                <a:latin typeface="微软雅黑"/>
+                <a:ea typeface="微软雅黑"/>
+              </a:defRPr>
             </a:pPr>
             <a:r>
               <a:rPr kumimoji="0" sz="1100" b="0" i="0" u="none" strike="noStrike" kern="1200" cap="none" spc="0" normalizeH="0" baseline="0" noProof="0" dirty="0">
@@ -26365,7 +26555,7 @@
                 <a:uLnTx/>
                 <a:uFillTx/>
                 <a:latin typeface="微软雅黑"/>
-                <a:ea typeface="+mn-ea"/>
+                <a:ea typeface="微软雅黑"/>
                 <a:cs typeface="+mn-cs"/>
               </a:rPr>
               <a:t>OOT 样本对比：1,519 </a:t>
@@ -26382,7 +26572,7 @@
                 <a:uLnTx/>
                 <a:uFillTx/>
                 <a:latin typeface="微软雅黑"/>
-                <a:ea typeface="+mn-ea"/>
+                <a:ea typeface="微软雅黑"/>
                 <a:cs typeface="+mn-cs"/>
               </a:rPr>
               <a:t>个申请</a:t>
@@ -26399,7 +26589,7 @@
                 <a:uLnTx/>
                 <a:uFillTx/>
                 <a:latin typeface="微软雅黑"/>
-                <a:ea typeface="+mn-ea"/>
+                <a:ea typeface="微软雅黑"/>
                 <a:cs typeface="+mn-cs"/>
               </a:rPr>
               <a:t> case ｜ 1,958,480 </a:t>
@@ -26416,7 +26606,7 @@
                 <a:uLnTx/>
                 <a:uFillTx/>
                 <a:latin typeface="微软雅黑"/>
-                <a:ea typeface="+mn-ea"/>
+                <a:ea typeface="微软雅黑"/>
                 <a:cs typeface="+mn-cs"/>
               </a:rPr>
               <a:t>条交易</a:t>
@@ -26433,7 +26623,7 @@
                 <a:uLnTx/>
                 <a:uFillTx/>
                 <a:latin typeface="微软雅黑"/>
-                <a:ea typeface="+mn-ea"/>
+                <a:ea typeface="微软雅黑"/>
                 <a:cs typeface="+mn-cs"/>
               </a:rPr>
               <a:t> ｜ 2026/07/27–2026/07/31</a:t>
@@ -26496,7 +26686,10 @@
               <a:buFontTx/>
               <a:buNone/>
               <a:tabLst/>
-              <a:defRPr/>
+              <a:defRPr>
+                <a:latin typeface="微软雅黑"/>
+                <a:ea typeface="微软雅黑"/>
+              </a:defRPr>
             </a:pPr>
             <a:endParaRPr kumimoji="0" sz="1800" b="0" i="0" u="none" strike="noStrike" kern="1200" cap="none" spc="0" normalizeH="0" baseline="0" noProof="0">
               <a:ln>
@@ -26552,7 +26745,10 @@
               <a:buFontTx/>
               <a:buNone/>
               <a:tabLst/>
-              <a:defRPr/>
+              <a:defRPr>
+                <a:latin typeface="微软雅黑"/>
+                <a:ea typeface="微软雅黑"/>
+              </a:defRPr>
             </a:pPr>
             <a:r>
               <a:rPr kumimoji="0" sz="1200" b="1" i="0" u="none" strike="noStrike" kern="1200" cap="none" spc="0" normalizeH="0" baseline="0" noProof="0">
@@ -26566,7 +26762,7 @@
                 <a:uLnTx/>
                 <a:uFillTx/>
                 <a:latin typeface="微软雅黑"/>
-                <a:ea typeface="+mn-ea"/>
+                <a:ea typeface="微软雅黑"/>
                 <a:cs typeface="+mn-cs"/>
               </a:rPr>
               <a:t>1. 贷款识别覆盖交集：我方漏识别更少</a:t>
@@ -26629,7 +26825,10 @@
               <a:buFontTx/>
               <a:buNone/>
               <a:tabLst/>
-              <a:defRPr/>
+              <a:defRPr>
+                <a:latin typeface="微软雅黑"/>
+                <a:ea typeface="微软雅黑"/>
+              </a:defRPr>
             </a:pPr>
             <a:endParaRPr kumimoji="0" sz="1800" b="0" i="0" u="none" strike="noStrike" kern="1200" cap="none" spc="0" normalizeH="0" baseline="0" noProof="0">
               <a:ln>
@@ -26703,7 +26902,10 @@
               <a:buFontTx/>
               <a:buNone/>
               <a:tabLst/>
-              <a:defRPr/>
+              <a:defRPr>
+                <a:latin typeface="微软雅黑"/>
+                <a:ea typeface="微软雅黑"/>
+              </a:defRPr>
             </a:pPr>
             <a:endParaRPr kumimoji="0" sz="1800" b="0" i="0" u="none" strike="noStrike" kern="1200" cap="none" spc="0" normalizeH="0" baseline="0" noProof="0">
               <a:ln>
@@ -26759,7 +26961,10 @@
               <a:buFontTx/>
               <a:buNone/>
               <a:tabLst/>
-              <a:defRPr/>
+              <a:defRPr>
+                <a:latin typeface="微软雅黑"/>
+                <a:ea typeface="微软雅黑"/>
+              </a:defRPr>
             </a:pPr>
             <a:r>
               <a:rPr kumimoji="0" sz="900" b="1" i="0" u="none" strike="noStrike" kern="1200" cap="none" spc="0" normalizeH="0" baseline="0" noProof="0">
@@ -26773,7 +26978,7 @@
                 <a:uLnTx/>
                 <a:uFillTx/>
                 <a:latin typeface="微软雅黑"/>
-                <a:ea typeface="+mn-ea"/>
+                <a:ea typeface="微软雅黑"/>
                 <a:cs typeface="+mn-cs"/>
               </a:rPr>
               <a:t>Finv 识别</a:t>
@@ -26818,7 +27023,10 @@
               <a:buFontTx/>
               <a:buNone/>
               <a:tabLst/>
-              <a:defRPr/>
+              <a:defRPr>
+                <a:latin typeface="微软雅黑"/>
+                <a:ea typeface="微软雅黑"/>
+              </a:defRPr>
             </a:pPr>
             <a:r>
               <a:rPr kumimoji="0" sz="1500" b="1" i="0" u="none" strike="noStrike" kern="1200" cap="none" spc="0" normalizeH="0" baseline="0" noProof="0">
@@ -26832,7 +27040,7 @@
                 <a:uLnTx/>
                 <a:uFillTx/>
                 <a:latin typeface="微软雅黑"/>
-                <a:ea typeface="+mn-ea"/>
+                <a:ea typeface="微软雅黑"/>
                 <a:cs typeface="+mn-cs"/>
               </a:rPr>
               <a:t>5,680</a:t>
@@ -26877,7 +27085,10 @@
               <a:buFontTx/>
               <a:buNone/>
               <a:tabLst/>
-              <a:defRPr/>
+              <a:defRPr>
+                <a:latin typeface="微软雅黑"/>
+                <a:ea typeface="微软雅黑"/>
+              </a:defRPr>
             </a:pPr>
             <a:r>
               <a:rPr kumimoji="0" sz="800" b="0" i="0" u="none" strike="noStrike" kern="1200" cap="none" spc="0" normalizeH="0" baseline="0" noProof="0">
@@ -26891,7 +27102,7 @@
                 <a:uLnTx/>
                 <a:uFillTx/>
                 <a:latin typeface="微软雅黑"/>
-                <a:ea typeface="+mn-ea"/>
+                <a:ea typeface="微软雅黑"/>
                 <a:cs typeface="+mn-cs"/>
               </a:rPr>
               <a:t>覆盖率 12.8%</a:t>
@@ -26954,7 +27165,10 @@
               <a:buFontTx/>
               <a:buNone/>
               <a:tabLst/>
-              <a:defRPr/>
+              <a:defRPr>
+                <a:latin typeface="微软雅黑"/>
+                <a:ea typeface="微软雅黑"/>
+              </a:defRPr>
             </a:pPr>
             <a:endParaRPr kumimoji="0" sz="1800" b="0" i="0" u="none" strike="noStrike" kern="1200" cap="none" spc="0" normalizeH="0" baseline="0" noProof="0">
               <a:ln>
@@ -27028,7 +27242,10 @@
               <a:buFontTx/>
               <a:buNone/>
               <a:tabLst/>
-              <a:defRPr/>
+              <a:defRPr>
+                <a:latin typeface="微软雅黑"/>
+                <a:ea typeface="微软雅黑"/>
+              </a:defRPr>
             </a:pPr>
             <a:endParaRPr kumimoji="0" sz="1800" b="0" i="0" u="none" strike="noStrike" kern="1200" cap="none" spc="0" normalizeH="0" baseline="0" noProof="0">
               <a:ln>
@@ -27084,7 +27301,10 @@
               <a:buFontTx/>
               <a:buNone/>
               <a:tabLst/>
-              <a:defRPr/>
+              <a:defRPr>
+                <a:latin typeface="微软雅黑"/>
+                <a:ea typeface="微软雅黑"/>
+              </a:defRPr>
             </a:pPr>
             <a:r>
               <a:rPr kumimoji="0" sz="900" b="1" i="0" u="none" strike="noStrike" kern="1200" cap="none" spc="0" normalizeH="0" baseline="0" noProof="0">
@@ -27098,7 +27318,7 @@
                 <a:uLnTx/>
                 <a:uFillTx/>
                 <a:latin typeface="微软雅黑"/>
-                <a:ea typeface="+mn-ea"/>
+                <a:ea typeface="微软雅黑"/>
                 <a:cs typeface="+mn-cs"/>
               </a:rPr>
               <a:t>双方共识</a:t>
@@ -27143,7 +27363,10 @@
               <a:buFontTx/>
               <a:buNone/>
               <a:tabLst/>
-              <a:defRPr/>
+              <a:defRPr>
+                <a:latin typeface="微软雅黑"/>
+                <a:ea typeface="微软雅黑"/>
+              </a:defRPr>
             </a:pPr>
             <a:r>
               <a:rPr kumimoji="0" sz="1500" b="1" i="0" u="none" strike="noStrike" kern="1200" cap="none" spc="0" normalizeH="0" baseline="0" noProof="0">
@@ -27157,7 +27380,7 @@
                 <a:uLnTx/>
                 <a:uFillTx/>
                 <a:latin typeface="微软雅黑"/>
-                <a:ea typeface="+mn-ea"/>
+                <a:ea typeface="微软雅黑"/>
                 <a:cs typeface="+mn-cs"/>
               </a:rPr>
               <a:t>5,284</a:t>
@@ -27202,7 +27425,10 @@
               <a:buFontTx/>
               <a:buNone/>
               <a:tabLst/>
-              <a:defRPr/>
+              <a:defRPr>
+                <a:latin typeface="微软雅黑"/>
+                <a:ea typeface="微软雅黑"/>
+              </a:defRPr>
             </a:pPr>
             <a:r>
               <a:rPr kumimoji="0" sz="800" b="0" i="0" u="none" strike="noStrike" kern="1200" cap="none" spc="0" normalizeH="0" baseline="0" noProof="0">
@@ -27216,7 +27442,7 @@
                 <a:uLnTx/>
                 <a:uFillTx/>
                 <a:latin typeface="微软雅黑"/>
-                <a:ea typeface="+mn-ea"/>
+                <a:ea typeface="微软雅黑"/>
                 <a:cs typeface="+mn-cs"/>
               </a:rPr>
               <a:t>一致率 92.0%</a:t>
@@ -27279,7 +27505,10 @@
               <a:buFontTx/>
               <a:buNone/>
               <a:tabLst/>
-              <a:defRPr/>
+              <a:defRPr>
+                <a:latin typeface="微软雅黑"/>
+                <a:ea typeface="微软雅黑"/>
+              </a:defRPr>
             </a:pPr>
             <a:endParaRPr kumimoji="0" sz="1800" b="0" i="0" u="none" strike="noStrike" kern="1200" cap="none" spc="0" normalizeH="0" baseline="0" noProof="0">
               <a:ln>
@@ -27353,7 +27582,10 @@
               <a:buFontTx/>
               <a:buNone/>
               <a:tabLst/>
-              <a:defRPr/>
+              <a:defRPr>
+                <a:latin typeface="微软雅黑"/>
+                <a:ea typeface="微软雅黑"/>
+              </a:defRPr>
             </a:pPr>
             <a:endParaRPr kumimoji="0" sz="1800" b="0" i="0" u="none" strike="noStrike" kern="1200" cap="none" spc="0" normalizeH="0" baseline="0" noProof="0">
               <a:ln>
@@ -27409,7 +27641,10 @@
               <a:buFontTx/>
               <a:buNone/>
               <a:tabLst/>
-              <a:defRPr/>
+              <a:defRPr>
+                <a:latin typeface="微软雅黑"/>
+                <a:ea typeface="微软雅黑"/>
+              </a:defRPr>
             </a:pPr>
             <a:r>
               <a:rPr kumimoji="0" sz="900" b="1" i="0" u="none" strike="noStrike" kern="1200" cap="none" spc="0" normalizeH="0" baseline="0" noProof="0">
@@ -27423,7 +27658,7 @@
                 <a:uLnTx/>
                 <a:uFillTx/>
                 <a:latin typeface="微软雅黑"/>
-                <a:ea typeface="+mn-ea"/>
+                <a:ea typeface="微软雅黑"/>
                 <a:cs typeface="+mn-cs"/>
               </a:rPr>
               <a:t>illion 识别</a:t>
@@ -27468,7 +27703,10 @@
               <a:buFontTx/>
               <a:buNone/>
               <a:tabLst/>
-              <a:defRPr/>
+              <a:defRPr>
+                <a:latin typeface="微软雅黑"/>
+                <a:ea typeface="微软雅黑"/>
+              </a:defRPr>
             </a:pPr>
             <a:r>
               <a:rPr kumimoji="0" sz="1500" b="1" i="0" u="none" strike="noStrike" kern="1200" cap="none" spc="0" normalizeH="0" baseline="0" noProof="0">
@@ -27482,7 +27720,7 @@
                 <a:uLnTx/>
                 <a:uFillTx/>
                 <a:latin typeface="微软雅黑"/>
-                <a:ea typeface="+mn-ea"/>
+                <a:ea typeface="微软雅黑"/>
                 <a:cs typeface="+mn-cs"/>
               </a:rPr>
               <a:t>5,363</a:t>
@@ -27527,7 +27765,10 @@
               <a:buFontTx/>
               <a:buNone/>
               <a:tabLst/>
-              <a:defRPr/>
+              <a:defRPr>
+                <a:latin typeface="微软雅黑"/>
+                <a:ea typeface="微软雅黑"/>
+              </a:defRPr>
             </a:pPr>
             <a:r>
               <a:rPr kumimoji="0" sz="800" b="0" i="0" u="none" strike="noStrike" kern="1200" cap="none" spc="0" normalizeH="0" baseline="0" noProof="0">
@@ -27541,7 +27782,7 @@
                 <a:uLnTx/>
                 <a:uFillTx/>
                 <a:latin typeface="微软雅黑"/>
-                <a:ea typeface="+mn-ea"/>
+                <a:ea typeface="微软雅黑"/>
                 <a:cs typeface="+mn-cs"/>
               </a:rPr>
               <a:t>覆盖率 12.1%</a:t>
@@ -27604,7 +27845,10 @@
               <a:buFontTx/>
               <a:buNone/>
               <a:tabLst/>
-              <a:defRPr/>
+              <a:defRPr>
+                <a:latin typeface="微软雅黑"/>
+                <a:ea typeface="微软雅黑"/>
+              </a:defRPr>
             </a:pPr>
             <a:endParaRPr kumimoji="0" sz="1800" b="0" i="0" u="none" strike="noStrike" kern="1200" cap="none" spc="0" normalizeH="0" baseline="0" noProof="0">
               <a:ln>
@@ -27678,7 +27922,10 @@
               <a:buFontTx/>
               <a:buNone/>
               <a:tabLst/>
-              <a:defRPr/>
+              <a:defRPr>
+                <a:latin typeface="微软雅黑"/>
+                <a:ea typeface="微软雅黑"/>
+              </a:defRPr>
             </a:pPr>
             <a:endParaRPr kumimoji="0" sz="1800" b="0" i="0" u="none" strike="noStrike" kern="1200" cap="none" spc="0" normalizeH="0" baseline="0" noProof="0">
               <a:ln>
@@ -27734,7 +27981,10 @@
               <a:buFontTx/>
               <a:buNone/>
               <a:tabLst/>
-              <a:defRPr/>
+              <a:defRPr>
+                <a:latin typeface="微软雅黑"/>
+                <a:ea typeface="微软雅黑"/>
+              </a:defRPr>
             </a:pPr>
             <a:r>
               <a:rPr kumimoji="0" sz="950" b="1" i="0" u="none" strike="noStrike" kern="1200" cap="none" spc="0" normalizeH="0" baseline="0" noProof="0">
@@ -27748,7 +27998,7 @@
                 <a:uLnTx/>
                 <a:uFillTx/>
                 <a:latin typeface="微软雅黑"/>
-                <a:ea typeface="+mn-ea"/>
+                <a:ea typeface="微软雅黑"/>
                 <a:cs typeface="+mn-cs"/>
               </a:rPr>
               <a:t>双方识别高度重合，但 Finv 覆盖更多、漏识更少</a:t>
@@ -27811,7 +28061,10 @@
               <a:buFontTx/>
               <a:buNone/>
               <a:tabLst/>
-              <a:defRPr/>
+              <a:defRPr>
+                <a:latin typeface="微软雅黑"/>
+                <a:ea typeface="微软雅黑"/>
+              </a:defRPr>
             </a:pPr>
             <a:endParaRPr kumimoji="0" sz="1800" b="0" i="0" u="none" strike="noStrike" kern="1200" cap="none" spc="0" normalizeH="0" baseline="0" noProof="0">
               <a:ln>
@@ -27867,7 +28120,10 @@
               <a:buFontTx/>
               <a:buNone/>
               <a:tabLst/>
-              <a:defRPr/>
+              <a:defRPr>
+                <a:latin typeface="微软雅黑"/>
+                <a:ea typeface="微软雅黑"/>
+              </a:defRPr>
             </a:pPr>
             <a:r>
               <a:rPr kumimoji="0" sz="850" b="1" i="0" u="none" strike="noStrike" kern="1200" cap="none" spc="0" normalizeH="0" baseline="0" noProof="0">
@@ -27881,7 +28137,7 @@
                 <a:uLnTx/>
                 <a:uFillTx/>
                 <a:latin typeface="微软雅黑"/>
-                <a:ea typeface="+mn-ea"/>
+                <a:ea typeface="微软雅黑"/>
                 <a:cs typeface="+mn-cs"/>
               </a:rPr>
               <a:t>Case 1</a:t>
@@ -27926,7 +28182,10 @@
               <a:buFontTx/>
               <a:buNone/>
               <a:tabLst/>
-              <a:defRPr/>
+              <a:defRPr>
+                <a:latin typeface="微软雅黑"/>
+                <a:ea typeface="微软雅黑"/>
+              </a:defRPr>
             </a:pPr>
             <a:r>
               <a:rPr kumimoji="0" sz="1050" b="1" i="0" u="none" strike="noStrike" kern="1200" cap="none" spc="0" normalizeH="0" baseline="0" noProof="0">
@@ -27940,7 +28199,7 @@
                 <a:uLnTx/>
                 <a:uFillTx/>
                 <a:latin typeface="微软雅黑"/>
-                <a:ea typeface="+mn-ea"/>
+                <a:ea typeface="微软雅黑"/>
                 <a:cs typeface="+mn-cs"/>
               </a:rPr>
               <a:t>覆盖提升：Home Loan 被 illion 漏识别</a:t>
@@ -27985,7 +28244,10 @@
               <a:buFontTx/>
               <a:buNone/>
               <a:tabLst/>
-              <a:defRPr/>
+              <a:defRPr>
+                <a:latin typeface="微软雅黑"/>
+                <a:ea typeface="微软雅黑"/>
+              </a:defRPr>
             </a:pPr>
             <a:r>
               <a:rPr kumimoji="0" sz="850" b="0" i="0" u="none" strike="noStrike" kern="1200" cap="none" spc="0" normalizeH="0" baseline="0" noProof="0">
@@ -27999,7 +28261,7 @@
                 <a:uLnTx/>
                 <a:uFillTx/>
                 <a:latin typeface="微软雅黑"/>
-                <a:ea typeface="+mn-ea"/>
+                <a:ea typeface="微软雅黑"/>
                 <a:cs typeface="+mn-cs"/>
               </a:rPr>
               <a:t>同一笔 Home Loan 还款，illion 归为 Internal Transfer，住房贷款完全遗漏</a:t>
@@ -28062,7 +28324,10 @@
               <a:buFontTx/>
               <a:buNone/>
               <a:tabLst/>
-              <a:defRPr/>
+              <a:defRPr>
+                <a:latin typeface="微软雅黑"/>
+                <a:ea typeface="微软雅黑"/>
+              </a:defRPr>
             </a:pPr>
             <a:endParaRPr kumimoji="0" sz="1800" b="0" i="0" u="none" strike="noStrike" kern="1200" cap="none" spc="0" normalizeH="0" baseline="0" noProof="0">
               <a:ln>
@@ -28136,7 +28401,10 @@
               <a:buFontTx/>
               <a:buNone/>
               <a:tabLst/>
-              <a:defRPr/>
+              <a:defRPr>
+                <a:latin typeface="微软雅黑"/>
+                <a:ea typeface="微软雅黑"/>
+              </a:defRPr>
             </a:pPr>
             <a:endParaRPr kumimoji="0" sz="1800" b="0" i="0" u="none" strike="noStrike" kern="1200" cap="none" spc="0" normalizeH="0" baseline="0" noProof="0">
               <a:ln>
@@ -28192,7 +28460,10 @@
               <a:buFontTx/>
               <a:buNone/>
               <a:tabLst/>
-              <a:defRPr/>
+              <a:defRPr>
+                <a:latin typeface="微软雅黑"/>
+                <a:ea typeface="微软雅黑"/>
+              </a:defRPr>
             </a:pPr>
             <a:r>
               <a:rPr kumimoji="0" sz="850" b="1" i="0" u="none" strike="noStrike" kern="1200" cap="none" spc="0" normalizeH="0" baseline="0" noProof="0">
@@ -28206,7 +28477,7 @@
                 <a:uLnTx/>
                 <a:uFillTx/>
                 <a:latin typeface="微软雅黑"/>
-                <a:ea typeface="+mn-ea"/>
+                <a:ea typeface="微软雅黑"/>
                 <a:cs typeface="+mn-cs"/>
               </a:rPr>
               <a:t>✓ Finv 通过产品词库识别 Home Loan，扩大贷款识别覆盖</a:t>
@@ -28269,7 +28540,10 @@
               <a:buFontTx/>
               <a:buNone/>
               <a:tabLst/>
-              <a:defRPr/>
+              <a:defRPr>
+                <a:latin typeface="微软雅黑"/>
+                <a:ea typeface="微软雅黑"/>
+              </a:defRPr>
             </a:pPr>
             <a:endParaRPr kumimoji="0" sz="1800" b="0" i="0" u="none" strike="noStrike" kern="1200" cap="none" spc="0" normalizeH="0" baseline="0" noProof="0">
               <a:ln>
@@ -28325,7 +28599,10 @@
               <a:buFontTx/>
               <a:buNone/>
               <a:tabLst/>
-              <a:defRPr/>
+              <a:defRPr>
+                <a:latin typeface="微软雅黑"/>
+                <a:ea typeface="微软雅黑"/>
+              </a:defRPr>
             </a:pPr>
             <a:r>
               <a:rPr kumimoji="0" sz="850" b="1" i="0" u="none" strike="noStrike" kern="1200" cap="none" spc="0" normalizeH="0" baseline="0" noProof="0">
@@ -28339,7 +28616,7 @@
                 <a:uLnTx/>
                 <a:uFillTx/>
                 <a:latin typeface="微软雅黑"/>
-                <a:ea typeface="+mn-ea"/>
+                <a:ea typeface="微软雅黑"/>
                 <a:cs typeface="+mn-cs"/>
               </a:rPr>
               <a:t>Case 2</a:t>
@@ -28384,7 +28661,10 @@
               <a:buFontTx/>
               <a:buNone/>
               <a:tabLst/>
-              <a:defRPr/>
+              <a:defRPr>
+                <a:latin typeface="微软雅黑"/>
+                <a:ea typeface="微软雅黑"/>
+              </a:defRPr>
             </a:pPr>
             <a:r>
               <a:rPr kumimoji="0" sz="1050" b="1" i="0" u="none" strike="noStrike" kern="1200" cap="none" spc="0" normalizeH="0" baseline="0" noProof="0">
@@ -28398,7 +28678,7 @@
                 <a:uLnTx/>
                 <a:uFillTx/>
                 <a:latin typeface="微软雅黑"/>
-                <a:ea typeface="+mn-ea"/>
+                <a:ea typeface="微软雅黑"/>
                 <a:cs typeface="+mn-cs"/>
               </a:rPr>
               <a:t>一致性：同一贷款流内 illion 标签自相矛盾（MoneySpot）</a:t>
@@ -28443,7 +28723,10 @@
               <a:buFontTx/>
               <a:buNone/>
               <a:tabLst/>
-              <a:defRPr/>
+              <a:defRPr>
+                <a:latin typeface="微软雅黑"/>
+                <a:ea typeface="微软雅黑"/>
+              </a:defRPr>
             </a:pPr>
             <a:r>
               <a:rPr kumimoji="0" sz="850" b="0" i="0" u="none" strike="noStrike" kern="1200" cap="none" spc="0" normalizeH="0" baseline="0" noProof="0">
@@ -28457,7 +28740,7 @@
                 <a:uLnTx/>
                 <a:uFillTx/>
                 <a:latin typeface="微软雅黑"/>
-                <a:ea typeface="+mn-ea"/>
+                <a:ea typeface="微软雅黑"/>
                 <a:cs typeface="+mn-cs"/>
               </a:rPr>
               <a:t>同一贷款流共 11 笔：放款 1 笔（A$750）+ 等额还款 10 笔（A$49.09/期），illion 前 6 笔标 SACC、后 5 笔标 Non-SACC</a:t>
@@ -28520,7 +28803,10 @@
               <a:buFontTx/>
               <a:buNone/>
               <a:tabLst/>
-              <a:defRPr/>
+              <a:defRPr>
+                <a:latin typeface="微软雅黑"/>
+                <a:ea typeface="微软雅黑"/>
+              </a:defRPr>
             </a:pPr>
             <a:endParaRPr kumimoji="0" sz="1800" b="0" i="0" u="none" strike="noStrike" kern="1200" cap="none" spc="0" normalizeH="0" baseline="0" noProof="0">
               <a:ln>
@@ -28594,7 +28880,10 @@
               <a:buFontTx/>
               <a:buNone/>
               <a:tabLst/>
-              <a:defRPr/>
+              <a:defRPr>
+                <a:latin typeface="微软雅黑"/>
+                <a:ea typeface="微软雅黑"/>
+              </a:defRPr>
             </a:pPr>
             <a:endParaRPr kumimoji="0" sz="1800" b="0" i="0" u="none" strike="noStrike" kern="1200" cap="none" spc="0" normalizeH="0" baseline="0" noProof="0">
               <a:ln>
@@ -28650,7 +28939,10 @@
               <a:buFontTx/>
               <a:buNone/>
               <a:tabLst/>
-              <a:defRPr/>
+              <a:defRPr>
+                <a:latin typeface="微软雅黑"/>
+                <a:ea typeface="微软雅黑"/>
+              </a:defRPr>
             </a:pPr>
             <a:r>
               <a:rPr kumimoji="0" sz="850" b="1" i="0" u="none" strike="noStrike" kern="1200" cap="none" spc="0" normalizeH="0" baseline="0" noProof="0">
@@ -28664,7 +28956,7 @@
                 <a:uLnTx/>
                 <a:uFillTx/>
                 <a:latin typeface="微软雅黑"/>
-                <a:ea typeface="+mn-ea"/>
+                <a:ea typeface="微软雅黑"/>
                 <a:cs typeface="+mn-cs"/>
               </a:rPr>
               <a:t>✓ Finv 基于完整贷款流统一判断，避免交易级标签前后冲突</a:t>
@@ -28727,7 +29019,10 @@
               <a:buFontTx/>
               <a:buNone/>
               <a:tabLst/>
-              <a:defRPr/>
+              <a:defRPr>
+                <a:latin typeface="微软雅黑"/>
+                <a:ea typeface="微软雅黑"/>
+              </a:defRPr>
             </a:pPr>
             <a:endParaRPr kumimoji="0" sz="1800" b="0" i="0" u="none" strike="noStrike" kern="1200" cap="none" spc="0" normalizeH="0" baseline="0" noProof="0">
               <a:ln>
@@ -28783,7 +29078,10 @@
               <a:buFontTx/>
               <a:buNone/>
               <a:tabLst/>
-              <a:defRPr/>
+              <a:defRPr>
+                <a:latin typeface="微软雅黑"/>
+                <a:ea typeface="微软雅黑"/>
+              </a:defRPr>
             </a:pPr>
             <a:r>
               <a:rPr kumimoji="0" sz="850" b="1" i="0" u="none" strike="noStrike" kern="1200" cap="none" spc="0" normalizeH="0" baseline="0" noProof="0">
@@ -28797,7 +29095,7 @@
                 <a:uLnTx/>
                 <a:uFillTx/>
                 <a:latin typeface="微软雅黑"/>
-                <a:ea typeface="+mn-ea"/>
+                <a:ea typeface="微软雅黑"/>
                 <a:cs typeface="+mn-cs"/>
               </a:rPr>
               <a:t>Case 3</a:t>
@@ -28842,7 +29140,10 @@
               <a:buFontTx/>
               <a:buNone/>
               <a:tabLst/>
-              <a:defRPr/>
+              <a:defRPr>
+                <a:latin typeface="微软雅黑"/>
+                <a:ea typeface="微软雅黑"/>
+              </a:defRPr>
             </a:pPr>
             <a:r>
               <a:rPr kumimoji="0" sz="1050" b="1" i="0" u="none" strike="noStrike" kern="1200" cap="none" spc="0" normalizeH="0" baseline="0" noProof="0">
@@ -28856,7 +29157,7 @@
                 <a:uLnTx/>
                 <a:uFillTx/>
                 <a:latin typeface="微软雅黑"/>
-                <a:ea typeface="+mn-ea"/>
+                <a:ea typeface="微软雅黑"/>
                 <a:cs typeface="+mn-cs"/>
               </a:rPr>
               <a:t>分类精度：Credit24 被 illion 泛化为 SACC</a:t>
@@ -28901,7 +29202,10 @@
               <a:buFontTx/>
               <a:buNone/>
               <a:tabLst/>
-              <a:defRPr/>
+              <a:defRPr>
+                <a:latin typeface="微软雅黑"/>
+                <a:ea typeface="微软雅黑"/>
+              </a:defRPr>
             </a:pPr>
             <a:r>
               <a:rPr kumimoji="0" sz="850" b="0" i="0" u="none" strike="noStrike" kern="1200" cap="none" spc="0" normalizeH="0" baseline="0" noProof="0">
@@ -28915,7 +29219,7 @@
                 <a:uLnTx/>
                 <a:uFillTx/>
                 <a:latin typeface="微软雅黑"/>
-                <a:ea typeface="+mn-ea"/>
+                <a:ea typeface="微软雅黑"/>
                 <a:cs typeface="+mn-cs"/>
               </a:rPr>
               <a:t>同一用户共 19 笔 Credit24 交易全部被标为 SACC Loans，忽略产品类型差异</a:t>
@@ -28978,7 +29282,10 @@
               <a:buFontTx/>
               <a:buNone/>
               <a:tabLst/>
-              <a:defRPr/>
+              <a:defRPr>
+                <a:latin typeface="微软雅黑"/>
+                <a:ea typeface="微软雅黑"/>
+              </a:defRPr>
             </a:pPr>
             <a:endParaRPr kumimoji="0" sz="1800" b="0" i="0" u="none" strike="noStrike" kern="1200" cap="none" spc="0" normalizeH="0" baseline="0" noProof="0">
               <a:ln>
@@ -29052,7 +29359,10 @@
               <a:buFontTx/>
               <a:buNone/>
               <a:tabLst/>
-              <a:defRPr/>
+              <a:defRPr>
+                <a:latin typeface="微软雅黑"/>
+                <a:ea typeface="微软雅黑"/>
+              </a:defRPr>
             </a:pPr>
             <a:endParaRPr kumimoji="0" sz="1800" b="0" i="0" u="none" strike="noStrike" kern="1200" cap="none" spc="0" normalizeH="0" baseline="0" noProof="0">
               <a:ln>
@@ -29108,7 +29418,10 @@
               <a:buFontTx/>
               <a:buNone/>
               <a:tabLst/>
-              <a:defRPr/>
+              <a:defRPr>
+                <a:latin typeface="微软雅黑"/>
+                <a:ea typeface="微软雅黑"/>
+              </a:defRPr>
             </a:pPr>
             <a:r>
               <a:rPr kumimoji="0" sz="850" b="1" i="0" u="none" strike="noStrike" kern="1200" cap="none" spc="0" normalizeH="0" baseline="0" noProof="0">
@@ -29122,7 +29435,7 @@
                 <a:uLnTx/>
                 <a:uFillTx/>
                 <a:latin typeface="微软雅黑"/>
-                <a:ea typeface="+mn-ea"/>
+                <a:ea typeface="微软雅黑"/>
                 <a:cs typeface="+mn-cs"/>
               </a:rPr>
               <a:t>✓ Finv 结合交易模式与机构产品知识识别 LOC，提升贷款类型精度</a:t>
@@ -29524,8 +29837,8 @@
     </a:clrScheme>
     <a:fontScheme name="Office">
       <a:majorFont>
-        <a:latin typeface="等线 Light"/>
-        <a:ea typeface=""/>
+        <a:latin typeface="微软雅黑"/>
+        <a:ea typeface="微软雅黑"/>
         <a:cs typeface=""/>
         <a:font script="Jpan" typeface="游ゴシック Light"/>
         <a:font script="Hang" typeface="맑은 고딕"/>
@@ -29559,8 +29872,8 @@
         <a:font script="Geor" typeface="Sylfaen"/>
       </a:majorFont>
       <a:minorFont>
-        <a:latin typeface="等线"/>
-        <a:ea typeface=""/>
+        <a:latin typeface="微软雅黑"/>
+        <a:ea typeface="微软雅黑"/>
         <a:cs typeface=""/>
         <a:font script="Jpan" typeface="游ゴシック"/>
         <a:font script="Hang" typeface="맑은 고딕"/>

--- a/银行流水分享_V1.7.pptx
+++ b/银行流水分享_V1.7.pptx
@@ -9957,10 +9957,12 @@
             <a:avLst/>
           </a:prstGeom>
           <a:solidFill>
-            <a:srgbClr val="E3EBF4"/>
+            <a:srgbClr val="FFFFFF"/>
           </a:solidFill>
-          <a:ln>
-            <a:noFill/>
+          <a:ln w="9525">
+            <a:solidFill>
+              <a:srgbClr val="B0B0B0"/>
+            </a:solidFill>
           </a:ln>
           <a:effectLst/>
         </p:spPr>
@@ -10222,39 +10224,41 @@
           <p:nvPr/>
         </p:nvGraphicFramePr>
         <p:xfrm>
-          <a:off x="749808" y="5193792"/>
-          <a:ext cx="5010912" cy="960120"/>
+          <a:off x="749808" y="5120640"/>
+          <a:ext cx="5010912" cy="1024128"/>
         </p:xfrm>
         <a:graphic>
           <a:graphicData uri="http://schemas.openxmlformats.org/drawingml/2006/table">
             <a:tbl>
-              <a:tblPr firstRow="1" bandRow="1">
-                <a:tableStyleId>{5C22544A-7EE6-4342-B048-85BDC9FD1C3A}</a:tableStyleId>
-              </a:tblPr>
+              <a:tblPr firstRow="0" bandRow="0" lastRow="0" firstCol="0" lastCol="0" bandCol="0"/>
               <a:tblGrid>
                 <a:gridCol w="1371600"/>
                 <a:gridCol w="3639312"/>
               </a:tblGrid>
-              <a:tr h="137160">
+              <a:tr h="128016">
                 <a:tc>
                   <a:txBody>
                     <a:bodyPr wrap="square"/>
                     <a:lstStyle/>
                     <a:p>
-                      <a:pPr algn="l"/>
-                      <a:r>
-                        <a:rPr sz="800" b="0" lang="zh-CN">
-                          <a:solidFill>
-                            <a:srgbClr val="3D3C3A"/>
+                      <a:pPr algn="l">
+                        <a:lnSpc>
+                          <a:spcPct val="90000"/>
+                        </a:lnSpc>
+                      </a:pPr>
+                      <a:r>
+                        <a:rPr sz="800" b="1" lang="zh-CN">
+                          <a:solidFill>
+                            <a:srgbClr val="1F4E79"/>
                           </a:solidFill>
                           <a:latin typeface="微软雅黑"/>
                           <a:ea typeface="微软雅黑"/>
                         </a:rPr>
-                        <a:t>90 天借款金额</a:t>
-                      </a:r>
-                    </a:p>
-                  </a:txBody>
-                  <a:tcPr marL="18288" marR="18288" marT="4572" marB="4572" anchor="ctr">
+                        <a:t>金额</a:t>
+                      </a:r>
+                    </a:p>
+                  </a:txBody>
+                  <a:tcPr marL="18288" marR="18288" marT="0" marB="0" anchor="ctr">
                     <a:lnL>
                       <a:noFill/>
                     </a:lnL>
@@ -10269,6 +10273,9 @@
                     <a:lnT>
                       <a:noFill/>
                     </a:lnT>
+                    <a:solidFill>
+                      <a:srgbClr val="E3EBF4"/>
+                    </a:solidFill>
                   </a:tcPr>
                 </a:tc>
                 <a:tc>
@@ -10276,20 +10283,24 @@
                     <a:bodyPr wrap="square"/>
                     <a:lstStyle/>
                     <a:p>
-                      <a:pPr algn="l"/>
-                      <a:r>
-                        <a:rPr sz="800" b="0" lang="zh-CN">
-                          <a:solidFill>
-                            <a:srgbClr val="3D3C3A"/>
+                      <a:pPr algn="l">
+                        <a:lnSpc>
+                          <a:spcPct val="90000"/>
+                        </a:lnSpc>
+                      </a:pPr>
+                      <a:r>
+                        <a:rPr sz="800" b="1" lang="zh-CN">
+                          <a:solidFill>
+                            <a:srgbClr val="1F4E79"/>
                           </a:solidFill>
                           <a:latin typeface="微软雅黑"/>
                           <a:ea typeface="微软雅黑"/>
                         </a:rPr>
-                        <a:t>A$2,300</a:t>
-                      </a:r>
-                    </a:p>
-                  </a:txBody>
-                  <a:tcPr marL="18288" marR="18288" marT="4572" marB="4572" anchor="ctr">
+                        <a:t> </a:t>
+                      </a:r>
+                    </a:p>
+                  </a:txBody>
+                  <a:tcPr marL="18288" marR="18288" marT="0" marB="0" anchor="ctr">
                     <a:lnL>
                       <a:noFill/>
                     </a:lnL>
@@ -10304,16 +10315,23 @@
                     <a:lnT>
                       <a:noFill/>
                     </a:lnT>
+                    <a:solidFill>
+                      <a:srgbClr val="E3EBF4"/>
+                    </a:solidFill>
                   </a:tcPr>
                 </a:tc>
               </a:tr>
-              <a:tr h="137160">
+              <a:tr h="109728">
                 <a:tc>
                   <a:txBody>
                     <a:bodyPr wrap="square"/>
                     <a:lstStyle/>
                     <a:p>
-                      <a:pPr algn="l"/>
+                      <a:pPr algn="l">
+                        <a:lnSpc>
+                          <a:spcPct val="90000"/>
+                        </a:lnSpc>
+                      </a:pPr>
                       <a:r>
                         <a:rPr sz="800" b="0" lang="zh-CN">
                           <a:solidFill>
@@ -10322,11 +10340,11 @@
                           <a:latin typeface="微软雅黑"/>
                           <a:ea typeface="微软雅黑"/>
                         </a:rPr>
-                        <a:t>90 天还款金额</a:t>
-                      </a:r>
-                    </a:p>
-                  </a:txBody>
-                  <a:tcPr marL="18288" marR="18288" marT="4572" marB="4572" anchor="ctr">
+                        <a:t>90 天借款金额</a:t>
+                      </a:r>
+                    </a:p>
+                  </a:txBody>
+                  <a:tcPr marL="18288" marR="18288" marT="0" marB="0" anchor="ctr">
                     <a:lnL>
                       <a:noFill/>
                     </a:lnL>
@@ -10341,6 +10359,9 @@
                     <a:lnT>
                       <a:noFill/>
                     </a:lnT>
+                    <a:solidFill>
+                      <a:srgbClr val="FFFFFF"/>
+                    </a:solidFill>
                   </a:tcPr>
                 </a:tc>
                 <a:tc>
@@ -10348,20 +10369,24 @@
                     <a:bodyPr wrap="square"/>
                     <a:lstStyle/>
                     <a:p>
-                      <a:pPr algn="l"/>
-                      <a:r>
-                        <a:rPr sz="800" b="0" lang="zh-CN">
-                          <a:solidFill>
-                            <a:srgbClr val="3D3C3A"/>
+                      <a:pPr algn="l">
+                        <a:lnSpc>
+                          <a:spcPct val="90000"/>
+                        </a:lnSpc>
+                      </a:pPr>
+                      <a:r>
+                        <a:rPr sz="800" b="1" lang="zh-CN">
+                          <a:solidFill>
+                            <a:srgbClr val="1F4E79"/>
                           </a:solidFill>
                           <a:latin typeface="微软雅黑"/>
                           <a:ea typeface="微软雅黑"/>
                         </a:rPr>
-                        <a:t>A$1,284</a:t>
-                      </a:r>
-                    </a:p>
-                  </a:txBody>
-                  <a:tcPr marL="18288" marR="18288" marT="4572" marB="4572" anchor="ctr">
+                        <a:t>A$2,300</a:t>
+                      </a:r>
+                    </a:p>
+                  </a:txBody>
+                  <a:tcPr marL="18288" marR="18288" marT="0" marB="0" anchor="ctr">
                     <a:lnL>
                       <a:noFill/>
                     </a:lnL>
@@ -10376,16 +10401,23 @@
                     <a:lnT>
                       <a:noFill/>
                     </a:lnT>
+                    <a:solidFill>
+                      <a:srgbClr val="FFFFFF"/>
+                    </a:solidFill>
                   </a:tcPr>
                 </a:tc>
               </a:tr>
-              <a:tr h="137160">
+              <a:tr h="109728">
                 <a:tc>
                   <a:txBody>
                     <a:bodyPr wrap="square"/>
                     <a:lstStyle/>
                     <a:p>
-                      <a:pPr algn="l"/>
+                      <a:pPr algn="l">
+                        <a:lnSpc>
+                          <a:spcPct val="90000"/>
+                        </a:lnSpc>
+                      </a:pPr>
                       <a:r>
                         <a:rPr sz="800" b="0" lang="zh-CN">
                           <a:solidFill>
@@ -10394,11 +10426,11 @@
                           <a:latin typeface="微软雅黑"/>
                           <a:ea typeface="微软雅黑"/>
                         </a:rPr>
-                        <a:t>还款次数</a:t>
-                      </a:r>
-                    </a:p>
-                  </a:txBody>
-                  <a:tcPr marL="18288" marR="18288" marT="4572" marB="4572" anchor="ctr">
+                        <a:t>90 天还款金额</a:t>
+                      </a:r>
+                    </a:p>
+                  </a:txBody>
+                  <a:tcPr marL="18288" marR="18288" marT="0" marB="0" anchor="ctr">
                     <a:lnL>
                       <a:noFill/>
                     </a:lnL>
@@ -10413,6 +10445,9 @@
                     <a:lnT>
                       <a:noFill/>
                     </a:lnT>
+                    <a:solidFill>
+                      <a:srgbClr val="FFFFFF"/>
+                    </a:solidFill>
                   </a:tcPr>
                 </a:tc>
                 <a:tc>
@@ -10420,20 +10455,24 @@
                     <a:bodyPr wrap="square"/>
                     <a:lstStyle/>
                     <a:p>
-                      <a:pPr algn="l"/>
-                      <a:r>
-                        <a:rPr sz="800" b="0" lang="zh-CN">
-                          <a:solidFill>
-                            <a:srgbClr val="3D3C3A"/>
+                      <a:pPr algn="l">
+                        <a:lnSpc>
+                          <a:spcPct val="90000"/>
+                        </a:lnSpc>
+                      </a:pPr>
+                      <a:r>
+                        <a:rPr sz="800" b="1" lang="zh-CN">
+                          <a:solidFill>
+                            <a:srgbClr val="1F4E79"/>
                           </a:solidFill>
                           <a:latin typeface="微软雅黑"/>
                           <a:ea typeface="微软雅黑"/>
                         </a:rPr>
-                        <a:t>9 次</a:t>
-                      </a:r>
-                    </a:p>
-                  </a:txBody>
-                  <a:tcPr marL="18288" marR="18288" marT="4572" marB="4572" anchor="ctr">
+                        <a:t>A$1,284</a:t>
+                      </a:r>
+                    </a:p>
+                  </a:txBody>
+                  <a:tcPr marL="18288" marR="18288" marT="0" marB="0" anchor="ctr">
                     <a:lnL>
                       <a:noFill/>
                     </a:lnL>
@@ -10448,16 +10487,23 @@
                     <a:lnT>
                       <a:noFill/>
                     </a:lnT>
+                    <a:solidFill>
+                      <a:srgbClr val="FFFFFF"/>
+                    </a:solidFill>
                   </a:tcPr>
                 </a:tc>
               </a:tr>
-              <a:tr h="137160">
+              <a:tr h="109728">
                 <a:tc>
                   <a:txBody>
                     <a:bodyPr wrap="square"/>
                     <a:lstStyle/>
                     <a:p>
-                      <a:pPr algn="l"/>
+                      <a:pPr algn="l">
+                        <a:lnSpc>
+                          <a:spcPct val="90000"/>
+                        </a:lnSpc>
+                      </a:pPr>
                       <a:r>
                         <a:rPr sz="800" b="0" lang="zh-CN">
                           <a:solidFill>
@@ -10466,11 +10512,11 @@
                           <a:latin typeface="微软雅黑"/>
                           <a:ea typeface="微软雅黑"/>
                         </a:rPr>
-                        <a:t>是否存在 SACC 贷款</a:t>
-                      </a:r>
-                    </a:p>
-                  </a:txBody>
-                  <a:tcPr marL="18288" marR="18288" marT="4572" marB="4572" anchor="ctr">
+                        <a:t>还款次数</a:t>
+                      </a:r>
+                    </a:p>
+                  </a:txBody>
+                  <a:tcPr marL="18288" marR="18288" marT="0" marB="0" anchor="ctr">
                     <a:lnL>
                       <a:noFill/>
                     </a:lnL>
@@ -10485,6 +10531,9 @@
                     <a:lnT>
                       <a:noFill/>
                     </a:lnT>
+                    <a:solidFill>
+                      <a:srgbClr val="FFFFFF"/>
+                    </a:solidFill>
                   </a:tcPr>
                 </a:tc>
                 <a:tc>
@@ -10492,20 +10541,24 @@
                     <a:bodyPr wrap="square"/>
                     <a:lstStyle/>
                     <a:p>
-                      <a:pPr algn="l"/>
-                      <a:r>
-                        <a:rPr sz="800" b="0" lang="zh-CN">
-                          <a:solidFill>
-                            <a:srgbClr val="3D3C3A"/>
+                      <a:pPr algn="l">
+                        <a:lnSpc>
+                          <a:spcPct val="90000"/>
+                        </a:lnSpc>
+                      </a:pPr>
+                      <a:r>
+                        <a:rPr sz="800" b="1" lang="zh-CN">
+                          <a:solidFill>
+                            <a:srgbClr val="1F4E79"/>
                           </a:solidFill>
                           <a:latin typeface="微软雅黑"/>
                           <a:ea typeface="微软雅黑"/>
                         </a:rPr>
-                        <a:t>是</a:t>
-                      </a:r>
-                    </a:p>
-                  </a:txBody>
-                  <a:tcPr marL="18288" marR="18288" marT="4572" marB="4572" anchor="ctr">
+                        <a:t>9 次</a:t>
+                      </a:r>
+                    </a:p>
+                  </a:txBody>
+                  <a:tcPr marL="18288" marR="18288" marT="0" marB="0" anchor="ctr">
                     <a:lnL>
                       <a:noFill/>
                     </a:lnL>
@@ -10520,29 +10573,36 @@
                     <a:lnT>
                       <a:noFill/>
                     </a:lnT>
+                    <a:solidFill>
+                      <a:srgbClr val="FFFFFF"/>
+                    </a:solidFill>
                   </a:tcPr>
                 </a:tc>
               </a:tr>
-              <a:tr h="137160">
+              <a:tr h="128016">
                 <a:tc>
                   <a:txBody>
                     <a:bodyPr wrap="square"/>
                     <a:lstStyle/>
                     <a:p>
-                      <a:pPr algn="l"/>
-                      <a:r>
-                        <a:rPr sz="800" b="0" lang="zh-CN">
-                          <a:solidFill>
-                            <a:srgbClr val="3D3C3A"/>
+                      <a:pPr algn="l">
+                        <a:lnSpc>
+                          <a:spcPct val="90000"/>
+                        </a:lnSpc>
+                      </a:pPr>
+                      <a:r>
+                        <a:rPr sz="800" b="1" lang="zh-CN">
+                          <a:solidFill>
+                            <a:srgbClr val="1F4E79"/>
                           </a:solidFill>
                           <a:latin typeface="微软雅黑"/>
                           <a:ea typeface="微软雅黑"/>
                         </a:rPr>
-                        <a:t>是否存在多头借贷</a:t>
-                      </a:r>
-                    </a:p>
-                  </a:txBody>
-                  <a:tcPr marL="18288" marR="18288" marT="4572" marB="4572" anchor="ctr">
+                        <a:t>贷款判断</a:t>
+                      </a:r>
+                    </a:p>
+                  </a:txBody>
+                  <a:tcPr marL="18288" marR="18288" marT="0" marB="0" anchor="ctr">
                     <a:lnL>
                       <a:noFill/>
                     </a:lnL>
@@ -10557,6 +10617,9 @@
                     <a:lnT>
                       <a:noFill/>
                     </a:lnT>
+                    <a:solidFill>
+                      <a:srgbClr val="E3EBF4"/>
+                    </a:solidFill>
                   </a:tcPr>
                 </a:tc>
                 <a:tc>
@@ -10564,20 +10627,24 @@
                     <a:bodyPr wrap="square"/>
                     <a:lstStyle/>
                     <a:p>
-                      <a:pPr algn="l"/>
-                      <a:r>
-                        <a:rPr sz="800" b="0" lang="zh-CN">
-                          <a:solidFill>
-                            <a:srgbClr val="3D3C3A"/>
+                      <a:pPr algn="l">
+                        <a:lnSpc>
+                          <a:spcPct val="90000"/>
+                        </a:lnSpc>
+                      </a:pPr>
+                      <a:r>
+                        <a:rPr sz="800" b="1" lang="zh-CN">
+                          <a:solidFill>
+                            <a:srgbClr val="1F4E79"/>
                           </a:solidFill>
                           <a:latin typeface="微软雅黑"/>
                           <a:ea typeface="微软雅黑"/>
                         </a:rPr>
-                        <a:t>是</a:t>
-                      </a:r>
-                    </a:p>
-                  </a:txBody>
-                  <a:tcPr marL="18288" marR="18288" marT="4572" marB="4572" anchor="ctr">
+                        <a:t> </a:t>
+                      </a:r>
+                    </a:p>
+                  </a:txBody>
+                  <a:tcPr marL="18288" marR="18288" marT="0" marB="0" anchor="ctr">
                     <a:lnL>
                       <a:noFill/>
                     </a:lnL>
@@ -10592,16 +10659,23 @@
                     <a:lnT>
                       <a:noFill/>
                     </a:lnT>
+                    <a:solidFill>
+                      <a:srgbClr val="E3EBF4"/>
+                    </a:solidFill>
                   </a:tcPr>
                 </a:tc>
               </a:tr>
-              <a:tr h="137160">
+              <a:tr h="109728">
                 <a:tc>
                   <a:txBody>
                     <a:bodyPr wrap="square"/>
                     <a:lstStyle/>
                     <a:p>
-                      <a:pPr algn="l"/>
+                      <a:pPr algn="l">
+                        <a:lnSpc>
+                          <a:spcPct val="90000"/>
+                        </a:lnSpc>
+                      </a:pPr>
                       <a:r>
                         <a:rPr sz="800" b="0" lang="zh-CN">
                           <a:solidFill>
@@ -10610,11 +10684,11 @@
                           <a:latin typeface="微软雅黑"/>
                           <a:ea typeface="微软雅黑"/>
                         </a:rPr>
-                        <a:t>是否持续还款</a:t>
-                      </a:r>
-                    </a:p>
-                  </a:txBody>
-                  <a:tcPr marL="18288" marR="18288" marT="4572" marB="4572" anchor="ctr">
+                        <a:t>是否存在 SACC 贷款</a:t>
+                      </a:r>
+                    </a:p>
+                  </a:txBody>
+                  <a:tcPr marL="18288" marR="18288" marT="0" marB="0" anchor="ctr">
                     <a:lnL>
                       <a:noFill/>
                     </a:lnL>
@@ -10629,6 +10703,9 @@
                     <a:lnT>
                       <a:noFill/>
                     </a:lnT>
+                    <a:solidFill>
+                      <a:srgbClr val="FFFFFF"/>
+                    </a:solidFill>
                   </a:tcPr>
                 </a:tc>
                 <a:tc>
@@ -10636,11 +10713,15 @@
                     <a:bodyPr wrap="square"/>
                     <a:lstStyle/>
                     <a:p>
-                      <a:pPr algn="l"/>
-                      <a:r>
-                        <a:rPr sz="800" b="0" lang="zh-CN">
-                          <a:solidFill>
-                            <a:srgbClr val="3D3C3A"/>
+                      <a:pPr algn="l">
+                        <a:lnSpc>
+                          <a:spcPct val="90000"/>
+                        </a:lnSpc>
+                      </a:pPr>
+                      <a:r>
+                        <a:rPr sz="800" b="1" lang="zh-CN">
+                          <a:solidFill>
+                            <a:srgbClr val="1F4E79"/>
                           </a:solidFill>
                           <a:latin typeface="微软雅黑"/>
                           <a:ea typeface="微软雅黑"/>
@@ -10649,7 +10730,7 @@
                       </a:r>
                     </a:p>
                   </a:txBody>
-                  <a:tcPr marL="18288" marR="18288" marT="4572" marB="4572" anchor="ctr">
+                  <a:tcPr marL="18288" marR="18288" marT="0" marB="0" anchor="ctr">
                     <a:lnL>
                       <a:noFill/>
                     </a:lnL>
@@ -10664,16 +10745,23 @@
                     <a:lnT>
                       <a:noFill/>
                     </a:lnT>
+                    <a:solidFill>
+                      <a:srgbClr val="FFFFFF"/>
+                    </a:solidFill>
                   </a:tcPr>
                 </a:tc>
               </a:tr>
-              <a:tr h="137160">
+              <a:tr h="109728">
                 <a:tc>
                   <a:txBody>
                     <a:bodyPr wrap="square"/>
                     <a:lstStyle/>
                     <a:p>
-                      <a:pPr algn="l"/>
+                      <a:pPr algn="l">
+                        <a:lnSpc>
+                          <a:spcPct val="90000"/>
+                        </a:lnSpc>
+                      </a:pPr>
                       <a:r>
                         <a:rPr sz="800" b="0" lang="zh-CN">
                           <a:solidFill>
@@ -10682,11 +10770,11 @@
                           <a:latin typeface="微软雅黑"/>
                           <a:ea typeface="微软雅黑"/>
                         </a:rPr>
-                        <a:t>是否出现还款中断</a:t>
-                      </a:r>
-                    </a:p>
-                  </a:txBody>
-                  <a:tcPr marL="18288" marR="18288" marT="4572" marB="4572" anchor="ctr">
+                        <a:t>是否存在多头借贷</a:t>
+                      </a:r>
+                    </a:p>
+                  </a:txBody>
+                  <a:tcPr marL="18288" marR="18288" marT="0" marB="0" anchor="ctr">
                     <a:lnL>
                       <a:noFill/>
                     </a:lnL>
@@ -10701,6 +10789,9 @@
                     <a:lnT>
                       <a:noFill/>
                     </a:lnT>
+                    <a:solidFill>
+                      <a:srgbClr val="FFFFFF"/>
+                    </a:solidFill>
                   </a:tcPr>
                 </a:tc>
                 <a:tc>
@@ -10708,20 +10799,196 @@
                     <a:bodyPr wrap="square"/>
                     <a:lstStyle/>
                     <a:p>
-                      <a:pPr algn="l"/>
-                      <a:r>
-                        <a:rPr sz="800" b="0" lang="zh-CN">
-                          <a:solidFill>
-                            <a:srgbClr val="3D3C3A"/>
+                      <a:pPr algn="l">
+                        <a:lnSpc>
+                          <a:spcPct val="90000"/>
+                        </a:lnSpc>
+                      </a:pPr>
+                      <a:r>
+                        <a:rPr sz="800" b="1" lang="zh-CN">
+                          <a:solidFill>
+                            <a:srgbClr val="1F4E79"/>
                           </a:solidFill>
                           <a:latin typeface="微软雅黑"/>
                           <a:ea typeface="微软雅黑"/>
                         </a:rPr>
+                        <a:t>是</a:t>
+                      </a:r>
+                    </a:p>
+                  </a:txBody>
+                  <a:tcPr marL="18288" marR="18288" marT="0" marB="0" anchor="ctr">
+                    <a:lnL>
+                      <a:noFill/>
+                    </a:lnL>
+                    <a:lnR>
+                      <a:noFill/>
+                    </a:lnR>
+                    <a:lnB w="12700">
+                      <a:solidFill>
+                        <a:srgbClr val="D6D6D6"/>
+                      </a:solidFill>
+                    </a:lnB>
+                    <a:lnT>
+                      <a:noFill/>
+                    </a:lnT>
+                    <a:solidFill>
+                      <a:srgbClr val="FFFFFF"/>
+                    </a:solidFill>
+                  </a:tcPr>
+                </a:tc>
+              </a:tr>
+              <a:tr h="109728">
+                <a:tc>
+                  <a:txBody>
+                    <a:bodyPr wrap="square"/>
+                    <a:lstStyle/>
+                    <a:p>
+                      <a:pPr algn="l">
+                        <a:lnSpc>
+                          <a:spcPct val="90000"/>
+                        </a:lnSpc>
+                      </a:pPr>
+                      <a:r>
+                        <a:rPr sz="800" b="0" lang="zh-CN">
+                          <a:solidFill>
+                            <a:srgbClr val="3D3C3A"/>
+                          </a:solidFill>
+                          <a:latin typeface="微软雅黑"/>
+                          <a:ea typeface="微软雅黑"/>
+                        </a:rPr>
+                        <a:t>是否持续还款</a:t>
+                      </a:r>
+                    </a:p>
+                  </a:txBody>
+                  <a:tcPr marL="18288" marR="18288" marT="0" marB="0" anchor="ctr">
+                    <a:lnL>
+                      <a:noFill/>
+                    </a:lnL>
+                    <a:lnR>
+                      <a:noFill/>
+                    </a:lnR>
+                    <a:lnB w="12700">
+                      <a:solidFill>
+                        <a:srgbClr val="D6D6D6"/>
+                      </a:solidFill>
+                    </a:lnB>
+                    <a:lnT>
+                      <a:noFill/>
+                    </a:lnT>
+                    <a:solidFill>
+                      <a:srgbClr val="FFFFFF"/>
+                    </a:solidFill>
+                  </a:tcPr>
+                </a:tc>
+                <a:tc>
+                  <a:txBody>
+                    <a:bodyPr wrap="square"/>
+                    <a:lstStyle/>
+                    <a:p>
+                      <a:pPr algn="l">
+                        <a:lnSpc>
+                          <a:spcPct val="90000"/>
+                        </a:lnSpc>
+                      </a:pPr>
+                      <a:r>
+                        <a:rPr sz="800" b="1" lang="zh-CN">
+                          <a:solidFill>
+                            <a:srgbClr val="1F4E79"/>
+                          </a:solidFill>
+                          <a:latin typeface="微软雅黑"/>
+                          <a:ea typeface="微软雅黑"/>
+                        </a:rPr>
+                        <a:t>是</a:t>
+                      </a:r>
+                    </a:p>
+                  </a:txBody>
+                  <a:tcPr marL="18288" marR="18288" marT="0" marB="0" anchor="ctr">
+                    <a:lnL>
+                      <a:noFill/>
+                    </a:lnL>
+                    <a:lnR>
+                      <a:noFill/>
+                    </a:lnR>
+                    <a:lnB w="12700">
+                      <a:solidFill>
+                        <a:srgbClr val="D6D6D6"/>
+                      </a:solidFill>
+                    </a:lnB>
+                    <a:lnT>
+                      <a:noFill/>
+                    </a:lnT>
+                    <a:solidFill>
+                      <a:srgbClr val="FFFFFF"/>
+                    </a:solidFill>
+                  </a:tcPr>
+                </a:tc>
+              </a:tr>
+              <a:tr h="109728">
+                <a:tc>
+                  <a:txBody>
+                    <a:bodyPr wrap="square"/>
+                    <a:lstStyle/>
+                    <a:p>
+                      <a:pPr algn="l">
+                        <a:lnSpc>
+                          <a:spcPct val="90000"/>
+                        </a:lnSpc>
+                      </a:pPr>
+                      <a:r>
+                        <a:rPr sz="800" b="0" lang="zh-CN">
+                          <a:solidFill>
+                            <a:srgbClr val="3D3C3A"/>
+                          </a:solidFill>
+                          <a:latin typeface="微软雅黑"/>
+                          <a:ea typeface="微软雅黑"/>
+                        </a:rPr>
+                        <a:t>是否出现还款中断</a:t>
+                      </a:r>
+                    </a:p>
+                  </a:txBody>
+                  <a:tcPr marL="18288" marR="18288" marT="0" marB="0" anchor="ctr">
+                    <a:lnL>
+                      <a:noFill/>
+                    </a:lnL>
+                    <a:lnR>
+                      <a:noFill/>
+                    </a:lnR>
+                    <a:lnB w="12700">
+                      <a:solidFill>
+                        <a:srgbClr val="D6D6D6"/>
+                      </a:solidFill>
+                    </a:lnB>
+                    <a:lnT>
+                      <a:noFill/>
+                    </a:lnT>
+                    <a:solidFill>
+                      <a:srgbClr val="FFFFFF"/>
+                    </a:solidFill>
+                  </a:tcPr>
+                </a:tc>
+                <a:tc>
+                  <a:txBody>
+                    <a:bodyPr wrap="square"/>
+                    <a:lstStyle/>
+                    <a:p>
+                      <a:pPr algn="l">
+                        <a:lnSpc>
+                          <a:spcPct val="90000"/>
+                        </a:lnSpc>
+                      </a:pPr>
+                      <a:r>
+                        <a:rPr sz="800" b="1" lang="zh-CN">
+                          <a:solidFill>
+                            <a:srgbClr val="1F4E79"/>
+                          </a:solidFill>
+                          <a:latin typeface="微软雅黑"/>
+                          <a:ea typeface="微软雅黑"/>
+                        </a:rPr>
                         <a:t>否</a:t>
                       </a:r>
                     </a:p>
                   </a:txBody>
-                  <a:tcPr marL="18288" marR="18288" marT="4572" marB="4572" anchor="ctr">
+                  <a:tcPr marL="18288" marR="18288" marT="0" marB="0" anchor="ctr">
                     <a:lnL>
                       <a:noFill/>
                     </a:lnL>
@@ -10736,6 +11003,9 @@
                     <a:lnT>
                       <a:noFill/>
                     </a:lnT>
+                    <a:solidFill>
+                      <a:srgbClr val="FFFFFF"/>
+                    </a:solidFill>
                   </a:tcPr>
                 </a:tc>
               </a:tr>
@@ -10758,10 +11028,12 @@
             <a:avLst/>
           </a:prstGeom>
           <a:solidFill>
-            <a:srgbClr val="E3EBF4"/>
+            <a:srgbClr val="FFFFFF"/>
           </a:solidFill>
-          <a:ln>
-            <a:noFill/>
+          <a:ln w="9525">
+            <a:solidFill>
+              <a:srgbClr val="B0B0B0"/>
+            </a:solidFill>
           </a:ln>
           <a:effectLst/>
         </p:spPr>
@@ -11036,39 +11308,41 @@
           <p:nvPr/>
         </p:nvGraphicFramePr>
         <p:xfrm>
-          <a:off x="6400800" y="5193792"/>
-          <a:ext cx="5010912" cy="960120"/>
+          <a:off x="6400800" y="5120640"/>
+          <a:ext cx="5010912" cy="1024128"/>
         </p:xfrm>
         <a:graphic>
           <a:graphicData uri="http://schemas.openxmlformats.org/drawingml/2006/table">
             <a:tbl>
-              <a:tblPr firstRow="1" bandRow="1">
-                <a:tableStyleId>{5C22544A-7EE6-4342-B048-85BDC9FD1C3A}</a:tableStyleId>
-              </a:tblPr>
+              <a:tblPr firstRow="0" bandRow="0" lastRow="0" firstCol="0" lastCol="0" bandCol="0"/>
               <a:tblGrid>
                 <a:gridCol w="1371600"/>
                 <a:gridCol w="3639312"/>
               </a:tblGrid>
-              <a:tr h="137160">
+              <a:tr h="128016">
                 <a:tc>
                   <a:txBody>
                     <a:bodyPr wrap="square"/>
                     <a:lstStyle/>
                     <a:p>
-                      <a:pPr algn="l"/>
-                      <a:r>
-                        <a:rPr sz="800" b="0" lang="zh-CN">
-                          <a:solidFill>
-                            <a:srgbClr val="3D3C3A"/>
+                      <a:pPr algn="l">
+                        <a:lnSpc>
+                          <a:spcPct val="90000"/>
+                        </a:lnSpc>
+                      </a:pPr>
+                      <a:r>
+                        <a:rPr sz="800" b="1" lang="zh-CN">
+                          <a:solidFill>
+                            <a:srgbClr val="1F4E79"/>
                           </a:solidFill>
                           <a:latin typeface="微软雅黑"/>
                           <a:ea typeface="微软雅黑"/>
                         </a:rPr>
-                        <a:t>贷款类型</a:t>
-                      </a:r>
-                    </a:p>
-                  </a:txBody>
-                  <a:tcPr marL="18288" marR="18288" marT="4572" marB="4572" anchor="ctr">
+                        <a:t>基本信息</a:t>
+                      </a:r>
+                    </a:p>
+                  </a:txBody>
+                  <a:tcPr marL="18288" marR="18288" marT="0" marB="0" anchor="ctr">
                     <a:lnL>
                       <a:noFill/>
                     </a:lnL>
@@ -11083,6 +11357,9 @@
                     <a:lnT>
                       <a:noFill/>
                     </a:lnT>
+                    <a:solidFill>
+                      <a:srgbClr val="E3EBF4"/>
+                    </a:solidFill>
                   </a:tcPr>
                 </a:tc>
                 <a:tc>
@@ -11090,20 +11367,24 @@
                     <a:bodyPr wrap="square"/>
                     <a:lstStyle/>
                     <a:p>
-                      <a:pPr algn="l"/>
-                      <a:r>
-                        <a:rPr sz="800" b="0" lang="zh-CN">
-                          <a:solidFill>
-                            <a:srgbClr val="3D3C3A"/>
+                      <a:pPr algn="l">
+                        <a:lnSpc>
+                          <a:spcPct val="90000"/>
+                        </a:lnSpc>
+                      </a:pPr>
+                      <a:r>
+                        <a:rPr sz="800" b="1" lang="zh-CN">
+                          <a:solidFill>
+                            <a:srgbClr val="1F4E79"/>
                           </a:solidFill>
                           <a:latin typeface="微软雅黑"/>
                           <a:ea typeface="微软雅黑"/>
                         </a:rPr>
-                        <a:t>SACC</a:t>
-                      </a:r>
-                    </a:p>
-                  </a:txBody>
-                  <a:tcPr marL="18288" marR="18288" marT="4572" marB="4572" anchor="ctr">
+                        <a:t> </a:t>
+                      </a:r>
+                    </a:p>
+                  </a:txBody>
+                  <a:tcPr marL="18288" marR="18288" marT="0" marB="0" anchor="ctr">
                     <a:lnL>
                       <a:noFill/>
                     </a:lnL>
@@ -11118,16 +11399,23 @@
                     <a:lnT>
                       <a:noFill/>
                     </a:lnT>
+                    <a:solidFill>
+                      <a:srgbClr val="E3EBF4"/>
+                    </a:solidFill>
                   </a:tcPr>
                 </a:tc>
               </a:tr>
-              <a:tr h="137160">
+              <a:tr h="109728">
                 <a:tc>
                   <a:txBody>
                     <a:bodyPr wrap="square"/>
                     <a:lstStyle/>
                     <a:p>
-                      <a:pPr algn="l"/>
+                      <a:pPr algn="l">
+                        <a:lnSpc>
+                          <a:spcPct val="90000"/>
+                        </a:lnSpc>
+                      </a:pPr>
                       <a:r>
                         <a:rPr sz="800" b="0" lang="zh-CN">
                           <a:solidFill>
@@ -11136,11 +11424,11 @@
                           <a:latin typeface="微软雅黑"/>
                           <a:ea typeface="微软雅黑"/>
                         </a:rPr>
-                        <a:t>90 天已还金额</a:t>
-                      </a:r>
-                    </a:p>
-                  </a:txBody>
-                  <a:tcPr marL="18288" marR="18288" marT="4572" marB="4572" anchor="ctr">
+                        <a:t>贷款类型</a:t>
+                      </a:r>
+                    </a:p>
+                  </a:txBody>
+                  <a:tcPr marL="18288" marR="18288" marT="0" marB="0" anchor="ctr">
                     <a:lnL>
                       <a:noFill/>
                     </a:lnL>
@@ -11155,6 +11443,9 @@
                     <a:lnT>
                       <a:noFill/>
                     </a:lnT>
+                    <a:solidFill>
+                      <a:srgbClr val="FFFFFF"/>
+                    </a:solidFill>
                   </a:tcPr>
                 </a:tc>
                 <a:tc>
@@ -11162,20 +11453,24 @@
                     <a:bodyPr wrap="square"/>
                     <a:lstStyle/>
                     <a:p>
-                      <a:pPr algn="l"/>
-                      <a:r>
-                        <a:rPr sz="800" b="0" lang="zh-CN">
-                          <a:solidFill>
-                            <a:srgbClr val="3D3C3A"/>
+                      <a:pPr algn="l">
+                        <a:lnSpc>
+                          <a:spcPct val="90000"/>
+                        </a:lnSpc>
+                      </a:pPr>
+                      <a:r>
+                        <a:rPr sz="800" b="1" lang="zh-CN">
+                          <a:solidFill>
+                            <a:srgbClr val="1F4E79"/>
                           </a:solidFill>
                           <a:latin typeface="微软雅黑"/>
                           <a:ea typeface="微软雅黑"/>
                         </a:rPr>
-                        <a:t>A$936</a:t>
-                      </a:r>
-                    </a:p>
-                  </a:txBody>
-                  <a:tcPr marL="18288" marR="18288" marT="4572" marB="4572" anchor="ctr">
+                        <a:t>SACC</a:t>
+                      </a:r>
+                    </a:p>
+                  </a:txBody>
+                  <a:tcPr marL="18288" marR="18288" marT="0" marB="0" anchor="ctr">
                     <a:lnL>
                       <a:noFill/>
                     </a:lnL>
@@ -11190,16 +11485,23 @@
                     <a:lnT>
                       <a:noFill/>
                     </a:lnT>
+                    <a:solidFill>
+                      <a:srgbClr val="FFFFFF"/>
+                    </a:solidFill>
                   </a:tcPr>
                 </a:tc>
               </a:tr>
-              <a:tr h="137160">
+              <a:tr h="109728">
                 <a:tc>
                   <a:txBody>
                     <a:bodyPr wrap="square"/>
                     <a:lstStyle/>
                     <a:p>
-                      <a:pPr algn="l"/>
+                      <a:pPr algn="l">
+                        <a:lnSpc>
+                          <a:spcPct val="90000"/>
+                        </a:lnSpc>
+                      </a:pPr>
                       <a:r>
                         <a:rPr sz="800" b="0" lang="zh-CN">
                           <a:solidFill>
@@ -11208,11 +11510,11 @@
                           <a:latin typeface="微软雅黑"/>
                           <a:ea typeface="微软雅黑"/>
                         </a:rPr>
-                        <a:t>还款频率</a:t>
-                      </a:r>
-                    </a:p>
-                  </a:txBody>
-                  <a:tcPr marL="18288" marR="18288" marT="4572" marB="4572" anchor="ctr">
+                        <a:t>90 天已还金额</a:t>
+                      </a:r>
+                    </a:p>
+                  </a:txBody>
+                  <a:tcPr marL="18288" marR="18288" marT="0" marB="0" anchor="ctr">
                     <a:lnL>
                       <a:noFill/>
                     </a:lnL>
@@ -11227,6 +11529,9 @@
                     <a:lnT>
                       <a:noFill/>
                     </a:lnT>
+                    <a:solidFill>
+                      <a:srgbClr val="FFFFFF"/>
+                    </a:solidFill>
                   </a:tcPr>
                 </a:tc>
                 <a:tc>
@@ -11234,20 +11539,24 @@
                     <a:bodyPr wrap="square"/>
                     <a:lstStyle/>
                     <a:p>
-                      <a:pPr algn="l"/>
-                      <a:r>
-                        <a:rPr sz="800" b="0" lang="zh-CN">
-                          <a:solidFill>
-                            <a:srgbClr val="3D3C3A"/>
+                      <a:pPr algn="l">
+                        <a:lnSpc>
+                          <a:spcPct val="90000"/>
+                        </a:lnSpc>
+                      </a:pPr>
+                      <a:r>
+                        <a:rPr sz="800" b="1" lang="zh-CN">
+                          <a:solidFill>
+                            <a:srgbClr val="1F4E79"/>
                           </a:solidFill>
                           <a:latin typeface="微软雅黑"/>
                           <a:ea typeface="微软雅黑"/>
                         </a:rPr>
-                        <a:t>每两周 A$156</a:t>
-                      </a:r>
-                    </a:p>
-                  </a:txBody>
-                  <a:tcPr marL="18288" marR="18288" marT="4572" marB="4572" anchor="ctr">
+                        <a:t>A$936</a:t>
+                      </a:r>
+                    </a:p>
+                  </a:txBody>
+                  <a:tcPr marL="18288" marR="18288" marT="0" marB="0" anchor="ctr">
                     <a:lnL>
                       <a:noFill/>
                     </a:lnL>
@@ -11262,16 +11571,23 @@
                     <a:lnT>
                       <a:noFill/>
                     </a:lnT>
+                    <a:solidFill>
+                      <a:srgbClr val="FFFFFF"/>
+                    </a:solidFill>
                   </a:tcPr>
                 </a:tc>
               </a:tr>
-              <a:tr h="137160">
+              <a:tr h="109728">
                 <a:tc>
                   <a:txBody>
                     <a:bodyPr wrap="square"/>
                     <a:lstStyle/>
                     <a:p>
-                      <a:pPr algn="l"/>
+                      <a:pPr algn="l">
+                        <a:lnSpc>
+                          <a:spcPct val="90000"/>
+                        </a:lnSpc>
+                      </a:pPr>
                       <a:r>
                         <a:rPr sz="800" b="0" lang="zh-CN">
                           <a:solidFill>
@@ -11280,11 +11596,11 @@
                           <a:latin typeface="微软雅黑"/>
                           <a:ea typeface="微软雅黑"/>
                         </a:rPr>
-                        <a:t>90 天还款次数</a:t>
-                      </a:r>
-                    </a:p>
-                  </a:txBody>
-                  <a:tcPr marL="18288" marR="18288" marT="4572" marB="4572" anchor="ctr">
+                        <a:t>还款频率</a:t>
+                      </a:r>
+                    </a:p>
+                  </a:txBody>
+                  <a:tcPr marL="18288" marR="18288" marT="0" marB="0" anchor="ctr">
                     <a:lnL>
                       <a:noFill/>
                     </a:lnL>
@@ -11299,6 +11615,9 @@
                     <a:lnT>
                       <a:noFill/>
                     </a:lnT>
+                    <a:solidFill>
+                      <a:srgbClr val="FFFFFF"/>
+                    </a:solidFill>
                   </a:tcPr>
                 </a:tc>
                 <a:tc>
@@ -11306,20 +11625,24 @@
                     <a:bodyPr wrap="square"/>
                     <a:lstStyle/>
                     <a:p>
-                      <a:pPr algn="l"/>
-                      <a:r>
-                        <a:rPr sz="800" b="0" lang="zh-CN">
-                          <a:solidFill>
-                            <a:srgbClr val="3D3C3A"/>
+                      <a:pPr algn="l">
+                        <a:lnSpc>
+                          <a:spcPct val="90000"/>
+                        </a:lnSpc>
+                      </a:pPr>
+                      <a:r>
+                        <a:rPr sz="800" b="1" lang="zh-CN">
+                          <a:solidFill>
+                            <a:srgbClr val="1F4E79"/>
                           </a:solidFill>
                           <a:latin typeface="微软雅黑"/>
                           <a:ea typeface="微软雅黑"/>
                         </a:rPr>
-                        <a:t>6 次</a:t>
-                      </a:r>
-                    </a:p>
-                  </a:txBody>
-                  <a:tcPr marL="18288" marR="18288" marT="4572" marB="4572" anchor="ctr">
+                        <a:t>每两周 A$156</a:t>
+                      </a:r>
+                    </a:p>
+                  </a:txBody>
+                  <a:tcPr marL="18288" marR="18288" marT="0" marB="0" anchor="ctr">
                     <a:lnL>
                       <a:noFill/>
                     </a:lnL>
@@ -11334,29 +11657,36 @@
                     <a:lnT>
                       <a:noFill/>
                     </a:lnT>
+                    <a:solidFill>
+                      <a:srgbClr val="FFFFFF"/>
+                    </a:solidFill>
                   </a:tcPr>
                 </a:tc>
               </a:tr>
-              <a:tr h="137160">
+              <a:tr h="128016">
                 <a:tc>
                   <a:txBody>
                     <a:bodyPr wrap="square"/>
                     <a:lstStyle/>
                     <a:p>
-                      <a:pPr algn="l"/>
-                      <a:r>
-                        <a:rPr sz="800" b="0" lang="zh-CN">
-                          <a:solidFill>
-                            <a:srgbClr val="3D3C3A"/>
+                      <a:pPr algn="l">
+                        <a:lnSpc>
+                          <a:spcPct val="90000"/>
+                        </a:lnSpc>
+                      </a:pPr>
+                      <a:r>
+                        <a:rPr sz="800" b="1" lang="zh-CN">
+                          <a:solidFill>
+                            <a:srgbClr val="1F4E79"/>
                           </a:solidFill>
                           <a:latin typeface="微软雅黑"/>
                           <a:ea typeface="微软雅黑"/>
                         </a:rPr>
-                        <a:t>当前状态</a:t>
-                      </a:r>
-                    </a:p>
-                  </a:txBody>
-                  <a:tcPr marL="18288" marR="18288" marT="4572" marB="4572" anchor="ctr">
+                        <a:t>状态与扣款</a:t>
+                      </a:r>
+                    </a:p>
+                  </a:txBody>
+                  <a:tcPr marL="18288" marR="18288" marT="0" marB="0" anchor="ctr">
                     <a:lnL>
                       <a:noFill/>
                     </a:lnL>
@@ -11371,6 +11701,9 @@
                     <a:lnT>
                       <a:noFill/>
                     </a:lnT>
+                    <a:solidFill>
+                      <a:srgbClr val="E3EBF4"/>
+                    </a:solidFill>
                   </a:tcPr>
                 </a:tc>
                 <a:tc>
@@ -11378,20 +11711,24 @@
                     <a:bodyPr wrap="square"/>
                     <a:lstStyle/>
                     <a:p>
-                      <a:pPr algn="l"/>
-                      <a:r>
-                        <a:rPr sz="800" b="0" lang="zh-CN">
-                          <a:solidFill>
-                            <a:srgbClr val="3D3C3A"/>
+                      <a:pPr algn="l">
+                        <a:lnSpc>
+                          <a:spcPct val="90000"/>
+                        </a:lnSpc>
+                      </a:pPr>
+                      <a:r>
+                        <a:rPr sz="800" b="1" lang="zh-CN">
+                          <a:solidFill>
+                            <a:srgbClr val="1F4E79"/>
                           </a:solidFill>
                           <a:latin typeface="微软雅黑"/>
                           <a:ea typeface="微软雅黑"/>
                         </a:rPr>
-                        <a:t>在贷</a:t>
-                      </a:r>
-                    </a:p>
-                  </a:txBody>
-                  <a:tcPr marL="18288" marR="18288" marT="4572" marB="4572" anchor="ctr">
+                        <a:t> </a:t>
+                      </a:r>
+                    </a:p>
+                  </a:txBody>
+                  <a:tcPr marL="18288" marR="18288" marT="0" marB="0" anchor="ctr">
                     <a:lnL>
                       <a:noFill/>
                     </a:lnL>
@@ -11406,16 +11743,23 @@
                     <a:lnT>
                       <a:noFill/>
                     </a:lnT>
+                    <a:solidFill>
+                      <a:srgbClr val="E3EBF4"/>
+                    </a:solidFill>
                   </a:tcPr>
                 </a:tc>
               </a:tr>
-              <a:tr h="137160">
+              <a:tr h="109728">
                 <a:tc>
                   <a:txBody>
                     <a:bodyPr wrap="square"/>
                     <a:lstStyle/>
                     <a:p>
-                      <a:pPr algn="l"/>
+                      <a:pPr algn="l">
+                        <a:lnSpc>
+                          <a:spcPct val="90000"/>
+                        </a:lnSpc>
+                      </a:pPr>
                       <a:r>
                         <a:rPr sz="800" b="0" lang="zh-CN">
                           <a:solidFill>
@@ -11424,11 +11768,11 @@
                           <a:latin typeface="微软雅黑"/>
                           <a:ea typeface="微软雅黑"/>
                         </a:rPr>
-                        <a:t>扣款失败</a:t>
-                      </a:r>
-                    </a:p>
-                  </a:txBody>
-                  <a:tcPr marL="18288" marR="18288" marT="4572" marB="4572" anchor="ctr">
+                        <a:t>90 天还款次数</a:t>
+                      </a:r>
+                    </a:p>
+                  </a:txBody>
+                  <a:tcPr marL="18288" marR="18288" marT="0" marB="0" anchor="ctr">
                     <a:lnL>
                       <a:noFill/>
                     </a:lnL>
@@ -11443,6 +11787,9 @@
                     <a:lnT>
                       <a:noFill/>
                     </a:lnT>
+                    <a:solidFill>
+                      <a:srgbClr val="FFFFFF"/>
+                    </a:solidFill>
                   </a:tcPr>
                 </a:tc>
                 <a:tc>
@@ -11450,20 +11797,24 @@
                     <a:bodyPr wrap="square"/>
                     <a:lstStyle/>
                     <a:p>
-                      <a:pPr algn="l"/>
-                      <a:r>
-                        <a:rPr sz="800" b="0" lang="zh-CN">
-                          <a:solidFill>
-                            <a:srgbClr val="3D3C3A"/>
+                      <a:pPr algn="l">
+                        <a:lnSpc>
+                          <a:spcPct val="90000"/>
+                        </a:lnSpc>
+                      </a:pPr>
+                      <a:r>
+                        <a:rPr sz="800" b="1" lang="zh-CN">
+                          <a:solidFill>
+                            <a:srgbClr val="1F4E79"/>
                           </a:solidFill>
                           <a:latin typeface="微软雅黑"/>
                           <a:ea typeface="微软雅黑"/>
                         </a:rPr>
-                        <a:t>否</a:t>
-                      </a:r>
-                    </a:p>
-                  </a:txBody>
-                  <a:tcPr marL="18288" marR="18288" marT="4572" marB="4572" anchor="ctr">
+                        <a:t>6 次</a:t>
+                      </a:r>
+                    </a:p>
+                  </a:txBody>
+                  <a:tcPr marL="18288" marR="18288" marT="0" marB="0" anchor="ctr">
                     <a:lnL>
                       <a:noFill/>
                     </a:lnL>
@@ -11478,16 +11829,23 @@
                     <a:lnT>
                       <a:noFill/>
                     </a:lnT>
+                    <a:solidFill>
+                      <a:srgbClr val="FFFFFF"/>
+                    </a:solidFill>
                   </a:tcPr>
                 </a:tc>
               </a:tr>
-              <a:tr h="137160">
+              <a:tr h="109728">
                 <a:tc>
                   <a:txBody>
                     <a:bodyPr wrap="square"/>
                     <a:lstStyle/>
                     <a:p>
-                      <a:pPr algn="l"/>
+                      <a:pPr algn="l">
+                        <a:lnSpc>
+                          <a:spcPct val="90000"/>
+                        </a:lnSpc>
+                      </a:pPr>
                       <a:r>
                         <a:rPr sz="800" b="0" lang="zh-CN">
                           <a:solidFill>
@@ -11496,11 +11854,11 @@
                           <a:latin typeface="微软雅黑"/>
                           <a:ea typeface="微软雅黑"/>
                         </a:rPr>
-                        <a:t>年化利率（APR）</a:t>
-                      </a:r>
-                    </a:p>
-                  </a:txBody>
-                  <a:tcPr marL="18288" marR="18288" marT="4572" marB="4572" anchor="ctr">
+                        <a:t>当前状态</a:t>
+                      </a:r>
+                    </a:p>
+                  </a:txBody>
+                  <a:tcPr marL="18288" marR="18288" marT="0" marB="0" anchor="ctr">
                     <a:lnL>
                       <a:noFill/>
                     </a:lnL>
@@ -11515,6 +11873,9 @@
                     <a:lnT>
                       <a:noFill/>
                     </a:lnT>
+                    <a:solidFill>
+                      <a:srgbClr val="FFFFFF"/>
+                    </a:solidFill>
                   </a:tcPr>
                 </a:tc>
                 <a:tc>
@@ -11522,20 +11883,196 @@
                     <a:bodyPr wrap="square"/>
                     <a:lstStyle/>
                     <a:p>
-                      <a:pPr algn="l"/>
-                      <a:r>
-                        <a:rPr sz="800" b="0" lang="zh-CN">
-                          <a:solidFill>
-                            <a:srgbClr val="3D3C3A"/>
+                      <a:pPr algn="l">
+                        <a:lnSpc>
+                          <a:spcPct val="90000"/>
+                        </a:lnSpc>
+                      </a:pPr>
+                      <a:r>
+                        <a:rPr sz="800" b="1" lang="zh-CN">
+                          <a:solidFill>
+                            <a:srgbClr val="1F4E79"/>
                           </a:solidFill>
                           <a:latin typeface="微软雅黑"/>
                           <a:ea typeface="微软雅黑"/>
                         </a:rPr>
+                        <a:t>在贷</a:t>
+                      </a:r>
+                    </a:p>
+                  </a:txBody>
+                  <a:tcPr marL="18288" marR="18288" marT="0" marB="0" anchor="ctr">
+                    <a:lnL>
+                      <a:noFill/>
+                    </a:lnL>
+                    <a:lnR>
+                      <a:noFill/>
+                    </a:lnR>
+                    <a:lnB w="12700">
+                      <a:solidFill>
+                        <a:srgbClr val="D6D6D6"/>
+                      </a:solidFill>
+                    </a:lnB>
+                    <a:lnT>
+                      <a:noFill/>
+                    </a:lnT>
+                    <a:solidFill>
+                      <a:srgbClr val="FFFFFF"/>
+                    </a:solidFill>
+                  </a:tcPr>
+                </a:tc>
+              </a:tr>
+              <a:tr h="109728">
+                <a:tc>
+                  <a:txBody>
+                    <a:bodyPr wrap="square"/>
+                    <a:lstStyle/>
+                    <a:p>
+                      <a:pPr algn="l">
+                        <a:lnSpc>
+                          <a:spcPct val="90000"/>
+                        </a:lnSpc>
+                      </a:pPr>
+                      <a:r>
+                        <a:rPr sz="800" b="0" lang="zh-CN">
+                          <a:solidFill>
+                            <a:srgbClr val="3D3C3A"/>
+                          </a:solidFill>
+                          <a:latin typeface="微软雅黑"/>
+                          <a:ea typeface="微软雅黑"/>
+                        </a:rPr>
+                        <a:t>扣款失败</a:t>
+                      </a:r>
+                    </a:p>
+                  </a:txBody>
+                  <a:tcPr marL="18288" marR="18288" marT="0" marB="0" anchor="ctr">
+                    <a:lnL>
+                      <a:noFill/>
+                    </a:lnL>
+                    <a:lnR>
+                      <a:noFill/>
+                    </a:lnR>
+                    <a:lnB w="12700">
+                      <a:solidFill>
+                        <a:srgbClr val="D6D6D6"/>
+                      </a:solidFill>
+                    </a:lnB>
+                    <a:lnT>
+                      <a:noFill/>
+                    </a:lnT>
+                    <a:solidFill>
+                      <a:srgbClr val="FFFFFF"/>
+                    </a:solidFill>
+                  </a:tcPr>
+                </a:tc>
+                <a:tc>
+                  <a:txBody>
+                    <a:bodyPr wrap="square"/>
+                    <a:lstStyle/>
+                    <a:p>
+                      <a:pPr algn="l">
+                        <a:lnSpc>
+                          <a:spcPct val="90000"/>
+                        </a:lnSpc>
+                      </a:pPr>
+                      <a:r>
+                        <a:rPr sz="800" b="1" lang="zh-CN">
+                          <a:solidFill>
+                            <a:srgbClr val="1F4E79"/>
+                          </a:solidFill>
+                          <a:latin typeface="微软雅黑"/>
+                          <a:ea typeface="微软雅黑"/>
+                        </a:rPr>
+                        <a:t>否</a:t>
+                      </a:r>
+                    </a:p>
+                  </a:txBody>
+                  <a:tcPr marL="18288" marR="18288" marT="0" marB="0" anchor="ctr">
+                    <a:lnL>
+                      <a:noFill/>
+                    </a:lnL>
+                    <a:lnR>
+                      <a:noFill/>
+                    </a:lnR>
+                    <a:lnB w="12700">
+                      <a:solidFill>
+                        <a:srgbClr val="D6D6D6"/>
+                      </a:solidFill>
+                    </a:lnB>
+                    <a:lnT>
+                      <a:noFill/>
+                    </a:lnT>
+                    <a:solidFill>
+                      <a:srgbClr val="FFFFFF"/>
+                    </a:solidFill>
+                  </a:tcPr>
+                </a:tc>
+              </a:tr>
+              <a:tr h="109728">
+                <a:tc>
+                  <a:txBody>
+                    <a:bodyPr wrap="square"/>
+                    <a:lstStyle/>
+                    <a:p>
+                      <a:pPr algn="l">
+                        <a:lnSpc>
+                          <a:spcPct val="90000"/>
+                        </a:lnSpc>
+                      </a:pPr>
+                      <a:r>
+                        <a:rPr sz="800" b="0" lang="zh-CN">
+                          <a:solidFill>
+                            <a:srgbClr val="3D3C3A"/>
+                          </a:solidFill>
+                          <a:latin typeface="微软雅黑"/>
+                          <a:ea typeface="微软雅黑"/>
+                        </a:rPr>
+                        <a:t>年化利率（APR）</a:t>
+                      </a:r>
+                    </a:p>
+                  </a:txBody>
+                  <a:tcPr marL="18288" marR="18288" marT="0" marB="0" anchor="ctr">
+                    <a:lnL>
+                      <a:noFill/>
+                    </a:lnL>
+                    <a:lnR>
+                      <a:noFill/>
+                    </a:lnR>
+                    <a:lnB w="12700">
+                      <a:solidFill>
+                        <a:srgbClr val="D6D6D6"/>
+                      </a:solidFill>
+                    </a:lnB>
+                    <a:lnT>
+                      <a:noFill/>
+                    </a:lnT>
+                    <a:solidFill>
+                      <a:srgbClr val="FFFFFF"/>
+                    </a:solidFill>
+                  </a:tcPr>
+                </a:tc>
+                <a:tc>
+                  <a:txBody>
+                    <a:bodyPr wrap="square"/>
+                    <a:lstStyle/>
+                    <a:p>
+                      <a:pPr algn="l">
+                        <a:lnSpc>
+                          <a:spcPct val="90000"/>
+                        </a:lnSpc>
+                      </a:pPr>
+                      <a:r>
+                        <a:rPr sz="800" b="1" lang="zh-CN">
+                          <a:solidFill>
+                            <a:srgbClr val="1F4E79"/>
+                          </a:solidFill>
+                          <a:latin typeface="微软雅黑"/>
+                          <a:ea typeface="微软雅黑"/>
+                        </a:rPr>
                         <a:t>【待补充】</a:t>
                       </a:r>
                     </a:p>
                   </a:txBody>
-                  <a:tcPr marL="18288" marR="18288" marT="4572" marB="4572" anchor="ctr">
+                  <a:tcPr marL="18288" marR="18288" marT="0" marB="0" anchor="ctr">
                     <a:lnL>
                       <a:noFill/>
                     </a:lnL>
@@ -11550,6 +12087,9 @@
                     <a:lnT>
                       <a:noFill/>
                     </a:lnT>
+                    <a:solidFill>
+                      <a:srgbClr val="FFFFFF"/>
+                    </a:solidFill>
                   </a:tcPr>
                 </a:tc>
               </a:tr>
